--- a/제조 분야 AI Agent 아키텍처.pptx
+++ b/제조 분야 AI Agent 아키텍처.pptx
@@ -16,6 +16,7 @@
     <p:sldId id="264" r:id="rId15"/>
     <p:sldId id="265" r:id="rId16"/>
     <p:sldId id="266" r:id="rId17"/>
+    <p:sldId id="267" r:id="rId18"/>
   </p:sldIdLst>
   <p:sldSz cx="12192000" cy="6858000" type="screen4x3"/>
   <p:notesSz cx="6858000" cy="9144000"/>
@@ -3122,8 +3123,8 @@
         </p:blipFill>
         <p:spPr>
           <a:xfrm>
-            <a:off x="7620000" y="1905000"/>
-            <a:ext cx="3810000" cy="3048000"/>
+            <a:off x="762000" y="4651920"/>
+            <a:ext cx="9144000" cy="457200"/>
           </a:xfrm>
           <a:prstGeom prst="rect">
             <a:avLst/>
@@ -3132,53 +3133,133 @@
       </p:pic>
       <p:sp>
         <p:nvSpPr>
-          <p:cNvPr id="3" name="Rounded Rectangle 2"/>
-          <p:cNvSpPr/>
-          <p:nvPr/>
-        </p:nvSpPr>
-        <p:spPr>
-          <a:xfrm>
-            <a:off x="762000" y="4592835"/>
-            <a:ext cx="571500" cy="38100"/>
-          </a:xfrm>
-          <a:prstGeom prst="roundRect">
-            <a:avLst>
-              <a:gd name="adj" fmla="val 50000"/>
-            </a:avLst>
-          </a:prstGeom>
-          <a:solidFill>
-            <a:srgbClr val="2563EB"/>
-          </a:solidFill>
-          <a:ln>
-            <a:noFill/>
-          </a:ln>
-          <a:effectLst/>
-        </p:spPr>
-        <p:style>
-          <a:lnRef idx="1">
-            <a:schemeClr val="accent1"/>
-          </a:lnRef>
-          <a:fillRef idx="3">
-            <a:schemeClr val="accent1"/>
-          </a:fillRef>
-          <a:effectRef idx="2">
-            <a:schemeClr val="accent1"/>
-          </a:effectRef>
-          <a:fontRef idx="minor">
-            <a:schemeClr val="lt1"/>
-          </a:fontRef>
-        </p:style>
-        <p:txBody>
-          <a:bodyPr rtlCol="0" anchor="ctr"/>
-          <a:lstStyle/>
-          <a:p>
-            <a:pPr algn="ctr"/>
+          <p:cNvPr id="3" name="TextBox 2"/>
+          <p:cNvSpPr txBox="1"/>
+          <p:nvPr/>
+        </p:nvSpPr>
+        <p:spPr>
+          <a:xfrm>
+            <a:off x="762000" y="1748879"/>
+            <a:ext cx="9144000" cy="266700"/>
+          </a:xfrm>
+          <a:prstGeom prst="rect">
+            <a:avLst/>
+          </a:prstGeom>
+          <a:noFill/>
+        </p:spPr>
+        <p:txBody>
+          <a:bodyPr wrap="square" lIns="0" rIns="0" tIns="0" bIns="0" anchor="ctr">
+            <a:spAutoFit/>
+          </a:bodyPr>
+          <a:lstStyle/>
+          <a:p>
+            <a:pPr algn="l"/>
+            <a:r>
+              <a:rPr b="0" sz="1200" i="0" u="none">
+                <a:solidFill>
+                  <a:srgbClr val="94A3B8"/>
+                </a:solidFill>
+                <a:latin typeface="Noto Sans KR Medium"/>
+              </a:rPr>
+              <a:t>제조 혁신을 위한 프레임워크 전략</a:t>
+            </a:r>
+          </a:p>
+        </p:txBody>
+      </p:sp>
+      <p:sp>
+        <p:nvSpPr>
+          <p:cNvPr id="4" name="TextBox 3"/>
+          <p:cNvSpPr txBox="1"/>
+          <p:nvPr/>
+        </p:nvSpPr>
+        <p:spPr>
+          <a:xfrm>
+            <a:off x="762000" y="2244179"/>
+            <a:ext cx="9601200" cy="1188541"/>
+          </a:xfrm>
+          <a:prstGeom prst="rect">
+            <a:avLst/>
+          </a:prstGeom>
+          <a:noFill/>
+        </p:spPr>
+        <p:txBody>
+          <a:bodyPr wrap="square" lIns="0" rIns="0" tIns="0" bIns="0" anchor="t">
+            <a:spAutoFit/>
+          </a:bodyPr>
+          <a:lstStyle/>
+          <a:p>
+            <a:pPr algn="l">
+              <a:lnSpc>
+                <a:spcPts val="4680"/>
+              </a:lnSpc>
+            </a:pPr>
+            <a:r>
+              <a:rPr b="0" sz="3900" i="0" u="none">
+                <a:solidFill>
+                  <a:srgbClr val="F8FAFC"/>
+                </a:solidFill>
+                <a:latin typeface="Noto Sans KR Black"/>
+              </a:rPr>
+              <a:t>제조 분야 AI Agent</a:t>
+            </a:r>
+            <a:r>
+              <a:t>
+</a:t>
+            </a:r>
+            <a:r>
+              <a:rPr b="0" sz="3900" i="0" u="none">
+                <a:solidFill>
+                  <a:srgbClr val="38BDF8"/>
+                </a:solidFill>
+                <a:latin typeface="Noto Sans KR Black"/>
+              </a:rPr>
+              <a:t>아키텍처 구성 및 활용 전략</a:t>
+            </a:r>
+          </a:p>
+        </p:txBody>
+      </p:sp>
+      <p:sp>
+        <p:nvSpPr>
+          <p:cNvPr id="5" name="TextBox 4"/>
+          <p:cNvSpPr txBox="1"/>
+          <p:nvPr/>
+        </p:nvSpPr>
+        <p:spPr>
+          <a:xfrm>
+            <a:off x="762000" y="3661320"/>
+            <a:ext cx="7810500" cy="609600"/>
+          </a:xfrm>
+          <a:prstGeom prst="rect">
+            <a:avLst/>
+          </a:prstGeom>
+          <a:noFill/>
+        </p:spPr>
+        <p:txBody>
+          <a:bodyPr wrap="square" lIns="0" rIns="0" tIns="0" bIns="0" anchor="t">
+            <a:spAutoFit/>
+          </a:bodyPr>
+          <a:lstStyle/>
+          <a:p>
+            <a:pPr algn="l">
+              <a:lnSpc>
+                <a:spcPts val="2400"/>
+              </a:lnSpc>
+            </a:pPr>
+            <a:r>
+              <a:rPr b="0" sz="1500" i="0" u="none">
+                <a:solidFill>
+                  <a:srgbClr val="94A3B8"/>
+                </a:solidFill>
+                <a:latin typeface="Noto Sans KR"/>
+              </a:rPr>
+              <a:t>바이브 코딩 기반 표준 개발 체계 구축, 소스 품질 관제, MES 데이터 기반 AI Agent 연동 및 Java 엔터프라이즈 NordAxe 프레임워크 도입 방안</a:t>
+            </a:r>
           </a:p>
         </p:txBody>
       </p:sp>
       <p:pic>
         <p:nvPicPr>
-          <p:cNvPr id="4" name="Picture 3" descr="image.png"/>
+          <p:cNvPr id="6" name="Picture 5" descr="image.png"/>
           <p:cNvPicPr>
             <a:picLocks noChangeAspect="1"/>
           </p:cNvPicPr>
@@ -3192,105 +3273,14 @@
         </p:blipFill>
         <p:spPr>
           <a:xfrm>
-            <a:off x="7629525" y="1914525"/>
-            <a:ext cx="3790950" cy="3028950"/>
+            <a:off x="762000" y="1748879"/>
+            <a:ext cx="2385417" cy="266700"/>
           </a:xfrm>
           <a:prstGeom prst="rect">
             <a:avLst/>
           </a:prstGeom>
         </p:spPr>
       </p:pic>
-      <p:sp>
-        <p:nvSpPr>
-          <p:cNvPr id="5" name="TextBox 4"/>
-          <p:cNvSpPr txBox="1"/>
-          <p:nvPr/>
-        </p:nvSpPr>
-        <p:spPr>
-          <a:xfrm>
-            <a:off x="762000" y="2760464"/>
-            <a:ext cx="6800850" cy="1051321"/>
-          </a:xfrm>
-          <a:prstGeom prst="rect">
-            <a:avLst/>
-          </a:prstGeom>
-          <a:noFill/>
-        </p:spPr>
-        <p:txBody>
-          <a:bodyPr wrap="square" lIns="0" rIns="0" tIns="0" bIns="0" anchor="t">
-            <a:spAutoFit/>
-          </a:bodyPr>
-          <a:lstStyle/>
-          <a:p>
-            <a:pPr algn="l">
-              <a:lnSpc>
-                <a:spcPts val="4140"/>
-              </a:lnSpc>
-            </a:pPr>
-            <a:r>
-              <a:rPr b="0" sz="3450" i="0" u="none">
-                <a:solidFill>
-                  <a:srgbClr val="F8FAFC"/>
-                </a:solidFill>
-                <a:latin typeface="Noto Sans KR ExtraBold"/>
-              </a:rPr>
-              <a:t>제조 분야 AI Agent</a:t>
-            </a:r>
-            <a:r>
-              <a:t>
-</a:t>
-            </a:r>
-            <a:r>
-              <a:rPr b="0" sz="3450" i="0" u="none">
-                <a:solidFill>
-                  <a:srgbClr val="3B82F6"/>
-                </a:solidFill>
-                <a:latin typeface="Noto Sans KR ExtraBold"/>
-              </a:rPr>
-              <a:t>아키텍처 구축 전략</a:t>
-            </a:r>
-          </a:p>
-        </p:txBody>
-      </p:sp>
-      <p:sp>
-        <p:nvSpPr>
-          <p:cNvPr id="6" name="TextBox 5"/>
-          <p:cNvSpPr txBox="1"/>
-          <p:nvPr/>
-        </p:nvSpPr>
-        <p:spPr>
-          <a:xfrm>
-            <a:off x="762000" y="4002285"/>
-            <a:ext cx="6477000" cy="285750"/>
-          </a:xfrm>
-          <a:prstGeom prst="rect">
-            <a:avLst/>
-          </a:prstGeom>
-          <a:noFill/>
-        </p:spPr>
-        <p:txBody>
-          <a:bodyPr wrap="square" lIns="0" rIns="0" tIns="0" bIns="0" anchor="t">
-            <a:spAutoFit/>
-          </a:bodyPr>
-          <a:lstStyle/>
-          <a:p>
-            <a:pPr algn="l">
-              <a:lnSpc>
-                <a:spcPts val="2250"/>
-              </a:lnSpc>
-            </a:pPr>
-            <a:r>
-              <a:rPr b="0" sz="1500" i="0" u="none">
-                <a:solidFill>
-                  <a:srgbClr val="94A3B8"/>
-                </a:solidFill>
-                <a:latin typeface="Noto Sans KR"/>
-              </a:rPr>
-              <a:t>개발 Vibe Coding · 기존 소스 품질 관리 · MES Data/Tooling 통합</a:t>
-            </a:r>
-          </a:p>
-        </p:txBody>
-      </p:sp>
       <p:pic>
         <p:nvPicPr>
           <p:cNvPr id="7" name="Picture 6" descr="image.png"/>
@@ -3307,24 +3297,72 @@
         </p:blipFill>
         <p:spPr>
           <a:xfrm>
-            <a:off x="904875" y="2312789"/>
-            <a:ext cx="103733" cy="133350"/>
+            <a:off x="762000" y="4932908"/>
+            <a:ext cx="133498" cy="171450"/>
           </a:xfrm>
           <a:prstGeom prst="rect">
             <a:avLst/>
           </a:prstGeom>
         </p:spPr>
       </p:pic>
-      <p:sp>
-        <p:nvSpPr>
-          <p:cNvPr id="8" name="TextBox 7"/>
-          <p:cNvSpPr txBox="1"/>
-          <p:nvPr/>
-        </p:nvSpPr>
-        <p:spPr>
-          <a:xfrm>
-            <a:off x="1084808" y="2293739"/>
-            <a:ext cx="1787574" cy="171450"/>
+      <p:pic>
+        <p:nvPicPr>
+          <p:cNvPr id="8" name="Picture 7" descr="image.png"/>
+          <p:cNvPicPr>
+            <a:picLocks noChangeAspect="1"/>
+          </p:cNvPicPr>
+          <p:nvPr/>
+        </p:nvPicPr>
+        <p:blipFill>
+          <a:blip r:embed="rId5"/>
+          <a:stretch>
+            <a:fillRect/>
+          </a:stretch>
+        </p:blipFill>
+        <p:spPr>
+          <a:xfrm>
+            <a:off x="2597794" y="4932908"/>
+            <a:ext cx="133498" cy="171450"/>
+          </a:xfrm>
+          <a:prstGeom prst="rect">
+            <a:avLst/>
+          </a:prstGeom>
+        </p:spPr>
+      </p:pic>
+      <p:pic>
+        <p:nvPicPr>
+          <p:cNvPr id="9" name="Picture 8" descr="image.png"/>
+          <p:cNvPicPr>
+            <a:picLocks noChangeAspect="1"/>
+          </p:cNvPicPr>
+          <p:nvPr/>
+        </p:nvPicPr>
+        <p:blipFill>
+          <a:blip r:embed="rId6"/>
+          <a:stretch>
+            <a:fillRect/>
+          </a:stretch>
+        </p:blipFill>
+        <p:spPr>
+          <a:xfrm>
+            <a:off x="4383434" y="4932908"/>
+            <a:ext cx="133498" cy="171450"/>
+          </a:xfrm>
+          <a:prstGeom prst="rect">
+            <a:avLst/>
+          </a:prstGeom>
+        </p:spPr>
+      </p:pic>
+      <p:sp>
+        <p:nvSpPr>
+          <p:cNvPr id="10" name="TextBox 9"/>
+          <p:cNvSpPr txBox="1"/>
+          <p:nvPr/>
+        </p:nvSpPr>
+        <p:spPr>
+          <a:xfrm>
+            <a:off x="990748" y="4928145"/>
+            <a:ext cx="1302246" cy="180975"/>
           </a:xfrm>
           <a:prstGeom prst="rect">
             <a:avLst/>
@@ -3339,13 +3377,83 @@
           <a:p>
             <a:pPr algn="l"/>
             <a:r>
-              <a:rPr b="0" sz="1050" i="0" u="none">
-                <a:solidFill>
-                  <a:srgbClr val="93C5FD"/>
-                </a:solidFill>
-                <a:latin typeface="Noto Sans KR SemiBold"/>
-              </a:rPr>
-              <a:t>제조 엔터프라이즈 AI 시스템</a:t>
+              <a:rPr b="0" sz="1125" i="0" u="none">
+                <a:solidFill>
+                  <a:srgbClr val="CBD5E1"/>
+                </a:solidFill>
+                <a:latin typeface="Noto Sans KR Medium"/>
+              </a:rPr>
+              <a:t>Inhouse 바이브 코딩</a:t>
+            </a:r>
+          </a:p>
+        </p:txBody>
+      </p:sp>
+      <p:sp>
+        <p:nvSpPr>
+          <p:cNvPr id="11" name="TextBox 10"/>
+          <p:cNvSpPr txBox="1"/>
+          <p:nvPr/>
+        </p:nvSpPr>
+        <p:spPr>
+          <a:xfrm>
+            <a:off x="2826543" y="4937670"/>
+            <a:ext cx="1252091" cy="161925"/>
+          </a:xfrm>
+          <a:prstGeom prst="rect">
+            <a:avLst/>
+          </a:prstGeom>
+          <a:noFill/>
+        </p:spPr>
+        <p:txBody>
+          <a:bodyPr wrap="square" lIns="0" rIns="0" tIns="0" bIns="0" anchor="t">
+            <a:spAutoFit/>
+          </a:bodyPr>
+          <a:lstStyle/>
+          <a:p>
+            <a:pPr algn="l"/>
+            <a:r>
+              <a:rPr b="0" sz="1125" i="0" u="none">
+                <a:solidFill>
+                  <a:srgbClr val="CBD5E1"/>
+                </a:solidFill>
+                <a:latin typeface="Noto Sans KR Medium"/>
+              </a:rPr>
+              <a:t>MES CORE Tooling</a:t>
+            </a:r>
+          </a:p>
+        </p:txBody>
+      </p:sp>
+      <p:sp>
+        <p:nvSpPr>
+          <p:cNvPr id="12" name="TextBox 11"/>
+          <p:cNvSpPr txBox="1"/>
+          <p:nvPr/>
+        </p:nvSpPr>
+        <p:spPr>
+          <a:xfrm>
+            <a:off x="4612183" y="4937670"/>
+            <a:ext cx="1302692" cy="161925"/>
+          </a:xfrm>
+          <a:prstGeom prst="rect">
+            <a:avLst/>
+          </a:prstGeom>
+          <a:noFill/>
+        </p:spPr>
+        <p:txBody>
+          <a:bodyPr wrap="square" lIns="0" rIns="0" tIns="0" bIns="0" anchor="t">
+            <a:spAutoFit/>
+          </a:bodyPr>
+          <a:lstStyle/>
+          <a:p>
+            <a:pPr algn="l"/>
+            <a:r>
+              <a:rPr b="0" sz="1125" i="0" u="none">
+                <a:solidFill>
+                  <a:srgbClr val="CBD5E1"/>
+                </a:solidFill>
+                <a:latin typeface="Noto Sans KR Medium"/>
+              </a:rPr>
+              <a:t>NordAxe Java Agent</a:t>
             </a:r>
           </a:p>
         </p:txBody>
@@ -3364,7 +3472,7 @@
     <p:bg>
       <p:bgPr>
         <a:solidFill>
-          <a:srgbClr val="FFFFFF"/>
+          <a:srgbClr val="F8FAFC"/>
         </a:solidFill>
         <a:effectLst/>
       </p:bgPr>
@@ -3376,9 +3484,79 @@
         <p:nvPr/>
       </p:nvGrpSpPr>
       <p:grpSpPr/>
+      <p:sp>
+        <p:nvSpPr>
+          <p:cNvPr id="2" name="TextBox 1"/>
+          <p:cNvSpPr txBox="1"/>
+          <p:nvPr/>
+        </p:nvSpPr>
+        <p:spPr>
+          <a:xfrm>
+            <a:off x="609600" y="533400"/>
+            <a:ext cx="10972800" cy="647700"/>
+          </a:xfrm>
+          <a:prstGeom prst="rect">
+            <a:avLst/>
+          </a:prstGeom>
+          <a:noFill/>
+        </p:spPr>
+        <p:txBody>
+          <a:bodyPr wrap="square" lIns="0" rIns="0" tIns="0" bIns="0" anchor="t">
+            <a:spAutoFit/>
+          </a:bodyPr>
+          <a:lstStyle/>
+          <a:p>
+            <a:pPr algn="l"/>
+            <a:r>
+              <a:rPr b="1" sz="1200" i="0" u="none">
+                <a:solidFill>
+                  <a:srgbClr val="2563EB"/>
+                </a:solidFill>
+                <a:latin typeface="Noto Sans KR"/>
+              </a:rPr>
+              <a:t>FRAMEWORK STRATEGY</a:t>
+            </a:r>
+          </a:p>
+        </p:txBody>
+      </p:sp>
+      <p:sp>
+        <p:nvSpPr>
+          <p:cNvPr id="3" name="TextBox 2"/>
+          <p:cNvSpPr txBox="1"/>
+          <p:nvPr/>
+        </p:nvSpPr>
+        <p:spPr>
+          <a:xfrm>
+            <a:off x="609600" y="762000"/>
+            <a:ext cx="11521440" cy="419100"/>
+          </a:xfrm>
+          <a:prstGeom prst="rect">
+            <a:avLst/>
+          </a:prstGeom>
+          <a:noFill/>
+        </p:spPr>
+        <p:txBody>
+          <a:bodyPr wrap="square" lIns="0" rIns="0" tIns="0" bIns="0" anchor="t">
+            <a:spAutoFit/>
+          </a:bodyPr>
+          <a:lstStyle/>
+          <a:p>
+            <a:pPr algn="l"/>
+            <a:r>
+              <a:rPr b="0" sz="2400" i="0" u="none">
+                <a:solidFill>
+                  <a:srgbClr val="0F172A"/>
+                </a:solidFill>
+                <a:latin typeface="Noto Sans KR ExtraBold"/>
+              </a:rPr>
+              <a:t>왜 NordAxe(OpenProject) 프레임워크인가?</a:t>
+            </a:r>
+          </a:p>
+        </p:txBody>
+      </p:sp>
       <p:pic>
         <p:nvPicPr>
-          <p:cNvPr id="2" name="Picture 1" descr="image.png"/>
+          <p:cNvPr id="4" name="Picture 3" descr="image.png"/>
           <p:cNvPicPr>
             <a:picLocks noChangeAspect="1"/>
           </p:cNvPicPr>
@@ -3392,52 +3570,17 @@
         </p:blipFill>
         <p:spPr>
           <a:xfrm>
-            <a:off x="609600" y="1143000"/>
-            <a:ext cx="10972800" cy="5295900"/>
+            <a:off x="6267450" y="2609850"/>
+            <a:ext cx="5314950" cy="1219200"/>
           </a:xfrm>
           <a:prstGeom prst="rect">
             <a:avLst/>
           </a:prstGeom>
         </p:spPr>
       </p:pic>
-      <p:sp>
-        <p:nvSpPr>
-          <p:cNvPr id="3" name="TextBox 2"/>
-          <p:cNvSpPr txBox="1"/>
-          <p:nvPr/>
-        </p:nvSpPr>
-        <p:spPr>
-          <a:xfrm>
-            <a:off x="609600" y="419100"/>
-            <a:ext cx="10972800" cy="571500"/>
-          </a:xfrm>
-          <a:prstGeom prst="rect">
-            <a:avLst/>
-          </a:prstGeom>
-          <a:noFill/>
-        </p:spPr>
-        <p:txBody>
-          <a:bodyPr wrap="square" lIns="0" rIns="0" tIns="0" bIns="0" anchor="t">
-            <a:spAutoFit/>
-          </a:bodyPr>
-          <a:lstStyle/>
-          <a:p>
-            <a:pPr algn="l"/>
-            <a:r>
-              <a:rPr b="1" sz="1200" i="0" u="none">
-                <a:solidFill>
-                  <a:srgbClr val="2563EB"/>
-                </a:solidFill>
-                <a:latin typeface="Noto Sans KR"/>
-              </a:rPr>
-              <a:t>ARCHITECTURE BLUEPRINT</a:t>
-            </a:r>
-          </a:p>
-        </p:txBody>
-      </p:sp>
       <p:pic>
         <p:nvPicPr>
-          <p:cNvPr id="4" name="Picture 3" descr="image.png"/>
+          <p:cNvPr id="5" name="Picture 4" descr="image.png"/>
           <p:cNvPicPr>
             <a:picLocks noChangeAspect="1"/>
           </p:cNvPicPr>
@@ -3451,8 +3594,8 @@
         </p:blipFill>
         <p:spPr>
           <a:xfrm>
-            <a:off x="847725" y="4114800"/>
-            <a:ext cx="10496550" cy="381000"/>
+            <a:off x="6267450" y="3981450"/>
+            <a:ext cx="5314950" cy="1219200"/>
           </a:xfrm>
           <a:prstGeom prst="rect">
             <a:avLst/>
@@ -3461,14 +3604,53 @@
       </p:pic>
       <p:sp>
         <p:nvSpPr>
-          <p:cNvPr id="5" name="TextBox 4"/>
-          <p:cNvSpPr txBox="1"/>
-          <p:nvPr/>
-        </p:nvSpPr>
-        <p:spPr>
-          <a:xfrm>
-            <a:off x="609600" y="628650"/>
-            <a:ext cx="11521440" cy="361950"/>
+          <p:cNvPr id="6" name="TextBox 5"/>
+          <p:cNvSpPr txBox="1"/>
+          <p:nvPr/>
+        </p:nvSpPr>
+        <p:spPr>
+          <a:xfrm>
+            <a:off x="609600" y="3095625"/>
+            <a:ext cx="5314950" cy="914400"/>
+          </a:xfrm>
+          <a:prstGeom prst="rect">
+            <a:avLst/>
+          </a:prstGeom>
+          <a:noFill/>
+        </p:spPr>
+        <p:txBody>
+          <a:bodyPr wrap="square" lIns="0" rIns="0" tIns="0" bIns="0" anchor="t">
+            <a:spAutoFit/>
+          </a:bodyPr>
+          <a:lstStyle/>
+          <a:p>
+            <a:pPr algn="l">
+              <a:lnSpc>
+                <a:spcPts val="7200"/>
+              </a:lnSpc>
+            </a:pPr>
+            <a:r>
+              <a:rPr b="0" sz="7200" i="0" u="none">
+                <a:solidFill>
+                  <a:srgbClr val="2563EB"/>
+                </a:solidFill>
+                <a:latin typeface="Noto Sans KR Black"/>
+              </a:rPr>
+              <a:t>90%+</a:t>
+            </a:r>
+          </a:p>
+        </p:txBody>
+      </p:sp>
+      <p:sp>
+        <p:nvSpPr>
+          <p:cNvPr id="7" name="TextBox 6"/>
+          <p:cNvSpPr txBox="1"/>
+          <p:nvPr/>
+        </p:nvSpPr>
+        <p:spPr>
+          <a:xfrm>
+            <a:off x="609600" y="4124325"/>
+            <a:ext cx="5314950" cy="257175"/>
           </a:xfrm>
           <a:prstGeom prst="rect">
             <a:avLst/>
@@ -3483,137 +3665,126 @@
           <a:p>
             <a:pPr algn="l"/>
             <a:r>
-              <a:rPr b="1" sz="2100" i="0" u="none">
+              <a:rPr b="1" sz="1500" i="0" u="none">
                 <a:solidFill>
                   <a:srgbClr val="0F172A"/>
                 </a:solidFill>
                 <a:latin typeface="Noto Sans KR"/>
               </a:rPr>
-              <a:t>제조 AI Agent 종합 아키텍처 구성도</a:t>
-            </a:r>
-          </a:p>
-        </p:txBody>
-      </p:sp>
-      <p:pic>
-        <p:nvPicPr>
-          <p:cNvPr id="6" name="Picture 5" descr="image.png"/>
-          <p:cNvPicPr>
-            <a:picLocks noChangeAspect="1"/>
-          </p:cNvPicPr>
-          <p:nvPr/>
-        </p:nvPicPr>
-        <p:blipFill>
-          <a:blip r:embed="rId4"/>
-          <a:stretch>
-            <a:fillRect/>
-          </a:stretch>
-        </p:blipFill>
-        <p:spPr>
-          <a:xfrm>
-            <a:off x="847725" y="3086100"/>
-            <a:ext cx="1737866" cy="895350"/>
-          </a:xfrm>
-          <a:prstGeom prst="rect">
-            <a:avLst/>
-          </a:prstGeom>
-        </p:spPr>
-      </p:pic>
-      <p:pic>
-        <p:nvPicPr>
-          <p:cNvPr id="7" name="Picture 6" descr="image.png"/>
-          <p:cNvPicPr>
-            <a:picLocks noChangeAspect="1"/>
-          </p:cNvPicPr>
-          <p:nvPr/>
-        </p:nvPicPr>
-        <p:blipFill>
-          <a:blip r:embed="rId5"/>
-          <a:stretch>
-            <a:fillRect/>
-          </a:stretch>
-        </p:blipFill>
-        <p:spPr>
-          <a:xfrm>
-            <a:off x="2879824" y="3086100"/>
-            <a:ext cx="2062608" cy="895350"/>
-          </a:xfrm>
-          <a:prstGeom prst="rect">
-            <a:avLst/>
-          </a:prstGeom>
-        </p:spPr>
-      </p:pic>
-      <p:pic>
-        <p:nvPicPr>
-          <p:cNvPr id="8" name="Picture 7" descr="image.png"/>
-          <p:cNvPicPr>
-            <a:picLocks noChangeAspect="1"/>
-          </p:cNvPicPr>
-          <p:nvPr/>
-        </p:nvPicPr>
-        <p:blipFill>
-          <a:blip r:embed="rId6"/>
-          <a:stretch>
-            <a:fillRect/>
-          </a:stretch>
-        </p:blipFill>
-        <p:spPr>
-          <a:xfrm>
-            <a:off x="5236666" y="3095625"/>
-            <a:ext cx="1737866" cy="876300"/>
-          </a:xfrm>
-          <a:prstGeom prst="rect">
-            <a:avLst/>
-          </a:prstGeom>
-        </p:spPr>
-      </p:pic>
-      <p:pic>
-        <p:nvPicPr>
-          <p:cNvPr id="9" name="Picture 8" descr="image.png"/>
-          <p:cNvPicPr>
-            <a:picLocks noChangeAspect="1"/>
-          </p:cNvPicPr>
-          <p:nvPr/>
-        </p:nvPicPr>
-        <p:blipFill>
-          <a:blip r:embed="rId7"/>
-          <a:stretch>
-            <a:fillRect/>
-          </a:stretch>
-        </p:blipFill>
-        <p:spPr>
-          <a:xfrm>
-            <a:off x="7268765" y="3095625"/>
-            <a:ext cx="2043558" cy="876300"/>
-          </a:xfrm>
-          <a:prstGeom prst="rect">
-            <a:avLst/>
-          </a:prstGeom>
-        </p:spPr>
-      </p:pic>
-      <p:pic>
-        <p:nvPicPr>
-          <p:cNvPr id="10" name="Picture 9" descr="image.png"/>
-          <p:cNvPicPr>
-            <a:picLocks noChangeAspect="1"/>
-          </p:cNvPicPr>
-          <p:nvPr/>
-        </p:nvPicPr>
-        <p:blipFill>
-          <a:blip r:embed="rId8"/>
-          <a:stretch>
-            <a:fillRect/>
-          </a:stretch>
-        </p:blipFill>
-        <p:spPr>
-          <a:xfrm>
-            <a:off x="9606557" y="3095625"/>
-            <a:ext cx="1737866" cy="876300"/>
-          </a:xfrm>
-          <a:prstGeom prst="rect">
-            <a:avLst/>
-          </a:prstGeom>
-        </p:spPr>
-      </p:pic>
+              <a:t>현재 Python 편중 AI 생태계 비율</a:t>
+            </a:r>
+          </a:p>
+        </p:txBody>
+      </p:sp>
+      <p:sp>
+        <p:nvSpPr>
+          <p:cNvPr id="8" name="TextBox 7"/>
+          <p:cNvSpPr txBox="1"/>
+          <p:nvPr/>
+        </p:nvSpPr>
+        <p:spPr>
+          <a:xfrm>
+            <a:off x="609600" y="4457700"/>
+            <a:ext cx="5314950" cy="257175"/>
+          </a:xfrm>
+          <a:prstGeom prst="rect">
+            <a:avLst/>
+          </a:prstGeom>
+          <a:noFill/>
+        </p:spPr>
+        <p:txBody>
+          <a:bodyPr wrap="square" lIns="0" rIns="0" tIns="0" bIns="0" anchor="t">
+            <a:spAutoFit/>
+          </a:bodyPr>
+          <a:lstStyle/>
+          <a:p>
+            <a:pPr algn="l">
+              <a:lnSpc>
+                <a:spcPts val="2025"/>
+              </a:lnSpc>
+            </a:pPr>
+            <a:r>
+              <a:rPr b="0" sz="1350" i="0" u="none">
+                <a:solidFill>
+                  <a:srgbClr val="475569"/>
+                </a:solidFill>
+                <a:latin typeface="Noto Sans KR"/>
+              </a:rPr>
+              <a:t>그러나 기업 Enterprise 환경은 대부분 Java/C# 기반.</a:t>
+            </a:r>
+          </a:p>
+        </p:txBody>
+      </p:sp>
+      <p:sp>
+        <p:nvSpPr>
+          <p:cNvPr id="9" name="TextBox 8"/>
+          <p:cNvSpPr txBox="1"/>
+          <p:nvPr/>
+        </p:nvSpPr>
+        <p:spPr>
+          <a:xfrm>
+            <a:off x="6505575" y="2847975"/>
+            <a:ext cx="5080635" cy="228600"/>
+          </a:xfrm>
+          <a:prstGeom prst="rect">
+            <a:avLst/>
+          </a:prstGeom>
+          <a:noFill/>
+        </p:spPr>
+        <p:txBody>
+          <a:bodyPr wrap="square" lIns="0" rIns="0" tIns="0" bIns="0" anchor="t">
+            <a:spAutoFit/>
+          </a:bodyPr>
+          <a:lstStyle/>
+          <a:p>
+            <a:pPr algn="l"/>
+            <a:r>
+              <a:rPr b="1" sz="1350" i="0" u="none">
+                <a:solidFill>
+                  <a:srgbClr val="0F172A"/>
+                </a:solidFill>
+                <a:latin typeface="Noto Sans KR"/>
+              </a:rPr>
+              <a:t>Java 비즈니스 모듈 직접 재활용</a:t>
+            </a:r>
+          </a:p>
+        </p:txBody>
+      </p:sp>
+      <p:sp>
+        <p:nvSpPr>
+          <p:cNvPr id="10" name="TextBox 9"/>
+          <p:cNvSpPr txBox="1"/>
+          <p:nvPr/>
+        </p:nvSpPr>
+        <p:spPr>
+          <a:xfrm>
+            <a:off x="6505575" y="3133725"/>
+            <a:ext cx="4838700" cy="457200"/>
+          </a:xfrm>
+          <a:prstGeom prst="rect">
+            <a:avLst/>
+          </a:prstGeom>
+          <a:noFill/>
+        </p:spPr>
+        <p:txBody>
+          <a:bodyPr wrap="square" lIns="0" rIns="0" tIns="0" bIns="0" anchor="t">
+            <a:spAutoFit/>
+          </a:bodyPr>
+          <a:lstStyle/>
+          <a:p>
+            <a:pPr algn="l"/>
+            <a:r>
+              <a:rPr b="0" sz="1350" i="0" u="none">
+                <a:solidFill>
+                  <a:srgbClr val="334155"/>
+                </a:solidFill>
+                <a:latin typeface="Noto Sans KR"/>
+              </a:rPr>
+              <a:t>큰 변환 공수 없이 Java Agent Tool로 변환하여 획기적 비용 절감.</a:t>
+            </a:r>
+          </a:p>
+        </p:txBody>
+      </p:sp>
       <p:sp>
         <p:nvSpPr>
           <p:cNvPr id="11" name="TextBox 10"/>
@@ -3622,29 +3793,29 @@
         </p:nvSpPr>
         <p:spPr>
           <a:xfrm>
-            <a:off x="1723132" y="4219575"/>
-            <a:ext cx="1338857" cy="171450"/>
-          </a:xfrm>
-          <a:prstGeom prst="rect">
-            <a:avLst/>
-          </a:prstGeom>
-          <a:noFill/>
-        </p:spPr>
-        <p:txBody>
-          <a:bodyPr wrap="square" lIns="160883" rIns="0" tIns="0" bIns="0" anchor="t">
+            <a:off x="6505575" y="4219575"/>
+            <a:ext cx="5080635" cy="228600"/>
+          </a:xfrm>
+          <a:prstGeom prst="rect">
+            <a:avLst/>
+          </a:prstGeom>
+          <a:noFill/>
+        </p:spPr>
+        <p:txBody>
+          <a:bodyPr wrap="square" lIns="0" rIns="0" tIns="0" bIns="0" anchor="t">
             <a:spAutoFit/>
           </a:bodyPr>
           <a:lstStyle/>
           <a:p>
             <a:pPr algn="l"/>
             <a:r>
-              <a:rPr b="0" sz="1050" i="0" u="none">
-                <a:solidFill>
-                  <a:srgbClr val="475569"/>
-                </a:solidFill>
-                <a:latin typeface="Noto Sans KR SemiBold"/>
-              </a:rPr>
-              <a:t>안티패턴 자동 검증</a:t>
+              <a:rPr b="1" sz="1350" i="0" u="none">
+                <a:solidFill>
+                  <a:srgbClr val="0F172A"/>
+                </a:solidFill>
+                <a:latin typeface="Noto Sans KR"/>
+              </a:rPr>
+              <a:t>대규모 시스템 통합 및 안정적 운영</a:t>
             </a:r>
           </a:p>
         </p:txBody>
@@ -3657,706 +3828,33 @@
         </p:nvSpPr>
         <p:spPr>
           <a:xfrm>
-            <a:off x="4489102" y="4219575"/>
-            <a:ext cx="2316807" cy="171450"/>
-          </a:xfrm>
-          <a:prstGeom prst="rect">
-            <a:avLst/>
-          </a:prstGeom>
-          <a:noFill/>
-        </p:spPr>
-        <p:txBody>
-          <a:bodyPr wrap="square" lIns="160883" rIns="0" tIns="0" bIns="0" anchor="t">
+            <a:off x="6505575" y="4505325"/>
+            <a:ext cx="4838700" cy="457200"/>
+          </a:xfrm>
+          <a:prstGeom prst="rect">
+            <a:avLst/>
+          </a:prstGeom>
+          <a:noFill/>
+        </p:spPr>
+        <p:txBody>
+          <a:bodyPr wrap="square" lIns="0" rIns="0" tIns="0" bIns="0" anchor="t">
             <a:spAutoFit/>
           </a:bodyPr>
           <a:lstStyle/>
           <a:p>
             <a:pPr algn="l"/>
             <a:r>
-              <a:rPr b="0" sz="1050" i="0" u="none">
-                <a:solidFill>
-                  <a:srgbClr val="475569"/>
-                </a:solidFill>
-                <a:latin typeface="Noto Sans KR SemiBold"/>
-              </a:rPr>
-              <a:t>레거시 소스 로그 기반 Prompt 검증</a:t>
-            </a:r>
-          </a:p>
-        </p:txBody>
-      </p:sp>
-      <p:sp>
-        <p:nvSpPr>
-          <p:cNvPr id="13" name="TextBox 12"/>
-          <p:cNvSpPr txBox="1"/>
-          <p:nvPr/>
-        </p:nvSpPr>
-        <p:spPr>
-          <a:xfrm>
-            <a:off x="8233023" y="4219575"/>
-            <a:ext cx="2235547" cy="171450"/>
-          </a:xfrm>
-          <a:prstGeom prst="rect">
-            <a:avLst/>
-          </a:prstGeom>
-          <a:noFill/>
-        </p:spPr>
-        <p:txBody>
-          <a:bodyPr wrap="square" lIns="160883" rIns="0" tIns="0" bIns="0" anchor="t">
-            <a:spAutoFit/>
-          </a:bodyPr>
-          <a:lstStyle/>
-          <a:p>
-            <a:pPr algn="l"/>
-            <a:r>
-              <a:rPr b="0" sz="1050" i="0" u="none">
-                <a:solidFill>
-                  <a:srgbClr val="475569"/>
-                </a:solidFill>
-                <a:latin typeface="Noto Sans KR SemiBold"/>
-              </a:rPr>
-              <a:t>검증 실패 시 Feature 삭제 및 회귀</a:t>
-            </a:r>
-          </a:p>
-        </p:txBody>
-      </p:sp>
-      <p:pic>
-        <p:nvPicPr>
-          <p:cNvPr id="14" name="Picture 13" descr="image.png"/>
-          <p:cNvPicPr>
-            <a:picLocks noChangeAspect="1"/>
-          </p:cNvPicPr>
-          <p:nvPr/>
-        </p:nvPicPr>
-        <p:blipFill>
-          <a:blip r:embed="rId9"/>
-          <a:stretch>
-            <a:fillRect/>
-          </a:stretch>
-        </p:blipFill>
-        <p:spPr>
-          <a:xfrm>
-            <a:off x="2680841" y="3476625"/>
-            <a:ext cx="103733" cy="133350"/>
-          </a:xfrm>
-          <a:prstGeom prst="rect">
-            <a:avLst/>
-          </a:prstGeom>
-        </p:spPr>
-      </p:pic>
-      <p:pic>
-        <p:nvPicPr>
-          <p:cNvPr id="15" name="Picture 14" descr="image.png"/>
-          <p:cNvPicPr>
-            <a:picLocks noChangeAspect="1"/>
-          </p:cNvPicPr>
-          <p:nvPr/>
-        </p:nvPicPr>
-        <p:blipFill>
-          <a:blip r:embed="rId10"/>
-          <a:stretch>
-            <a:fillRect/>
-          </a:stretch>
-        </p:blipFill>
-        <p:spPr>
-          <a:xfrm>
-            <a:off x="5037683" y="3476625"/>
-            <a:ext cx="103733" cy="133350"/>
-          </a:xfrm>
-          <a:prstGeom prst="rect">
-            <a:avLst/>
-          </a:prstGeom>
-        </p:spPr>
-      </p:pic>
-      <p:pic>
-        <p:nvPicPr>
-          <p:cNvPr id="16" name="Picture 15" descr="image.png"/>
-          <p:cNvPicPr>
-            <a:picLocks noChangeAspect="1"/>
-          </p:cNvPicPr>
-          <p:nvPr/>
-        </p:nvPicPr>
-        <p:blipFill>
-          <a:blip r:embed="rId9"/>
-          <a:stretch>
-            <a:fillRect/>
-          </a:stretch>
-        </p:blipFill>
-        <p:spPr>
-          <a:xfrm>
-            <a:off x="7069782" y="3476625"/>
-            <a:ext cx="103733" cy="133350"/>
-          </a:xfrm>
-          <a:prstGeom prst="rect">
-            <a:avLst/>
-          </a:prstGeom>
-        </p:spPr>
-      </p:pic>
-      <p:pic>
-        <p:nvPicPr>
-          <p:cNvPr id="17" name="Picture 16" descr="image.png"/>
-          <p:cNvPicPr>
-            <a:picLocks noChangeAspect="1"/>
-          </p:cNvPicPr>
-          <p:nvPr/>
-        </p:nvPicPr>
-        <p:blipFill>
-          <a:blip r:embed="rId10"/>
-          <a:stretch>
-            <a:fillRect/>
-          </a:stretch>
-        </p:blipFill>
-        <p:spPr>
-          <a:xfrm>
-            <a:off x="9407574" y="3476625"/>
-            <a:ext cx="103733" cy="133350"/>
-          </a:xfrm>
-          <a:prstGeom prst="rect">
-            <a:avLst/>
-          </a:prstGeom>
-        </p:spPr>
-      </p:pic>
-      <p:pic>
-        <p:nvPicPr>
-          <p:cNvPr id="18" name="Picture 17" descr="image.png"/>
-          <p:cNvPicPr>
-            <a:picLocks noChangeAspect="1"/>
-          </p:cNvPicPr>
-          <p:nvPr/>
-        </p:nvPicPr>
-        <p:blipFill>
-          <a:blip r:embed="rId11"/>
-          <a:stretch>
-            <a:fillRect/>
-          </a:stretch>
-        </p:blipFill>
-        <p:spPr>
-          <a:xfrm>
-            <a:off x="1723132" y="4238625"/>
-            <a:ext cx="103733" cy="133350"/>
-          </a:xfrm>
-          <a:prstGeom prst="rect">
-            <a:avLst/>
-          </a:prstGeom>
-        </p:spPr>
-      </p:pic>
-      <p:pic>
-        <p:nvPicPr>
-          <p:cNvPr id="19" name="Picture 18" descr="image.png"/>
-          <p:cNvPicPr>
-            <a:picLocks noChangeAspect="1"/>
-          </p:cNvPicPr>
-          <p:nvPr/>
-        </p:nvPicPr>
-        <p:blipFill>
-          <a:blip r:embed="rId12"/>
-          <a:stretch>
-            <a:fillRect/>
-          </a:stretch>
-        </p:blipFill>
-        <p:spPr>
-          <a:xfrm>
-            <a:off x="4489102" y="4238625"/>
-            <a:ext cx="103733" cy="133350"/>
-          </a:xfrm>
-          <a:prstGeom prst="rect">
-            <a:avLst/>
-          </a:prstGeom>
-        </p:spPr>
-      </p:pic>
-      <p:pic>
-        <p:nvPicPr>
-          <p:cNvPr id="20" name="Picture 19" descr="image.png"/>
-          <p:cNvPicPr>
-            <a:picLocks noChangeAspect="1"/>
-          </p:cNvPicPr>
-          <p:nvPr/>
-        </p:nvPicPr>
-        <p:blipFill>
-          <a:blip r:embed="rId13"/>
-          <a:stretch>
-            <a:fillRect/>
-          </a:stretch>
-        </p:blipFill>
-        <p:spPr>
-          <a:xfrm>
-            <a:off x="8233023" y="4238625"/>
-            <a:ext cx="103733" cy="133350"/>
-          </a:xfrm>
-          <a:prstGeom prst="rect">
-            <a:avLst/>
-          </a:prstGeom>
-        </p:spPr>
-      </p:pic>
-      <p:sp>
-        <p:nvSpPr>
-          <p:cNvPr id="21" name="TextBox 20"/>
-          <p:cNvSpPr txBox="1"/>
-          <p:nvPr/>
-        </p:nvSpPr>
-        <p:spPr>
-          <a:xfrm>
-            <a:off x="914292" y="3467100"/>
-            <a:ext cx="1604731" cy="180975"/>
-          </a:xfrm>
-          <a:prstGeom prst="rect">
-            <a:avLst/>
-          </a:prstGeom>
-          <a:noFill/>
-        </p:spPr>
-        <p:txBody>
-          <a:bodyPr wrap="square" lIns="0" rIns="0" tIns="0" bIns="0" anchor="t">
-            <a:spAutoFit/>
-          </a:bodyPr>
-          <a:lstStyle/>
-          <a:p>
-            <a:pPr algn="ctr"/>
-            <a:r>
-              <a:rPr b="1" sz="1125" i="0" u="none">
-                <a:solidFill>
-                  <a:srgbClr val="0F172A"/>
+              <a:rPr b="0" sz="1350" i="0" u="none">
+                <a:solidFill>
+                  <a:srgbClr val="334155"/>
                 </a:solidFill>
                 <a:latin typeface="Noto Sans KR"/>
               </a:rPr>
-              <a:t>설계 규격</a:t>
-            </a:r>
-          </a:p>
-        </p:txBody>
-      </p:sp>
-      <p:sp>
-        <p:nvSpPr>
-          <p:cNvPr id="22" name="TextBox 21"/>
-          <p:cNvSpPr txBox="1"/>
-          <p:nvPr/>
-        </p:nvSpPr>
-        <p:spPr>
-          <a:xfrm>
-            <a:off x="952500" y="3667125"/>
-            <a:ext cx="1528316" cy="171450"/>
-          </a:xfrm>
-          <a:prstGeom prst="rect">
-            <a:avLst/>
-          </a:prstGeom>
-          <a:noFill/>
-        </p:spPr>
-        <p:txBody>
-          <a:bodyPr wrap="square" lIns="0" rIns="0" tIns="0" bIns="0" anchor="t">
-            <a:spAutoFit/>
-          </a:bodyPr>
-          <a:lstStyle/>
-          <a:p>
-            <a:pPr algn="ctr"/>
-            <a:r>
-              <a:rPr b="0" sz="975" i="0" u="none">
-                <a:solidFill>
-                  <a:srgbClr val="64748B"/>
-                </a:solidFill>
-                <a:latin typeface="Noto Sans KR"/>
-              </a:rPr>
-              <a:t>FE / BE / 설비 IF</a:t>
-            </a:r>
-          </a:p>
-        </p:txBody>
-      </p:sp>
-      <p:sp>
-        <p:nvSpPr>
-          <p:cNvPr id="23" name="TextBox 22"/>
-          <p:cNvSpPr txBox="1"/>
-          <p:nvPr/>
-        </p:nvSpPr>
-        <p:spPr>
-          <a:xfrm>
-            <a:off x="2948273" y="3476625"/>
-            <a:ext cx="1925709" cy="161925"/>
-          </a:xfrm>
-          <a:prstGeom prst="rect">
-            <a:avLst/>
-          </a:prstGeom>
-          <a:noFill/>
-        </p:spPr>
-        <p:txBody>
-          <a:bodyPr wrap="square" lIns="0" rIns="0" tIns="0" bIns="0" anchor="t">
-            <a:spAutoFit/>
-          </a:bodyPr>
-          <a:lstStyle/>
-          <a:p>
-            <a:pPr algn="ctr"/>
-            <a:r>
-              <a:rPr b="1" sz="1125" i="0" u="none">
-                <a:solidFill>
-                  <a:srgbClr val="1E40AF"/>
-                </a:solidFill>
-                <a:latin typeface="Noto Sans KR"/>
-              </a:rPr>
-              <a:t>Vibe Agent</a:t>
-            </a:r>
-          </a:p>
-        </p:txBody>
-      </p:sp>
-      <p:sp>
-        <p:nvSpPr>
-          <p:cNvPr id="24" name="TextBox 23"/>
-          <p:cNvSpPr txBox="1"/>
-          <p:nvPr/>
-        </p:nvSpPr>
-        <p:spPr>
-          <a:xfrm>
-            <a:off x="2994124" y="3657600"/>
-            <a:ext cx="1834008" cy="171450"/>
-          </a:xfrm>
-          <a:prstGeom prst="rect">
-            <a:avLst/>
-          </a:prstGeom>
-          <a:noFill/>
-        </p:spPr>
-        <p:txBody>
-          <a:bodyPr wrap="square" lIns="0" rIns="0" tIns="0" bIns="0" anchor="t">
-            <a:spAutoFit/>
-          </a:bodyPr>
-          <a:lstStyle/>
-          <a:p>
-            <a:pPr algn="ctr"/>
-            <a:r>
-              <a:rPr b="0" sz="975" i="0" u="none">
-                <a:solidFill>
-                  <a:srgbClr val="3B82F6"/>
-                </a:solidFill>
-                <a:latin typeface="Noto Sans KR"/>
-              </a:rPr>
-              <a:t>Spring Inhouse 표준</a:t>
-            </a:r>
-          </a:p>
-        </p:txBody>
-      </p:sp>
-      <p:sp>
-        <p:nvSpPr>
-          <p:cNvPr id="25" name="TextBox 24"/>
-          <p:cNvSpPr txBox="1"/>
-          <p:nvPr/>
-        </p:nvSpPr>
-        <p:spPr>
-          <a:xfrm>
-            <a:off x="5303233" y="3476625"/>
-            <a:ext cx="1604731" cy="161925"/>
-          </a:xfrm>
-          <a:prstGeom prst="rect">
-            <a:avLst/>
-          </a:prstGeom>
-          <a:noFill/>
-        </p:spPr>
-        <p:txBody>
-          <a:bodyPr wrap="square" lIns="0" rIns="0" tIns="0" bIns="0" anchor="t">
-            <a:spAutoFit/>
-          </a:bodyPr>
-          <a:lstStyle/>
-          <a:p>
-            <a:pPr algn="ctr"/>
-            <a:r>
-              <a:rPr b="1" sz="1125" i="0" u="none">
-                <a:solidFill>
-                  <a:srgbClr val="0F172A"/>
-                </a:solidFill>
-                <a:latin typeface="Noto Sans KR"/>
-              </a:rPr>
-              <a:t>Git / CI/CD</a:t>
-            </a:r>
-          </a:p>
-        </p:txBody>
-      </p:sp>
-      <p:sp>
-        <p:nvSpPr>
-          <p:cNvPr id="26" name="TextBox 25"/>
-          <p:cNvSpPr txBox="1"/>
-          <p:nvPr/>
-        </p:nvSpPr>
-        <p:spPr>
-          <a:xfrm>
-            <a:off x="5341441" y="3657600"/>
-            <a:ext cx="1528316" cy="171450"/>
-          </a:xfrm>
-          <a:prstGeom prst="rect">
-            <a:avLst/>
-          </a:prstGeom>
-          <a:noFill/>
-        </p:spPr>
-        <p:txBody>
-          <a:bodyPr wrap="square" lIns="0" rIns="0" tIns="0" bIns="0" anchor="t">
-            <a:spAutoFit/>
-          </a:bodyPr>
-          <a:lstStyle/>
-          <a:p>
-            <a:pPr algn="ctr"/>
-            <a:r>
-              <a:rPr b="0" sz="975" i="0" u="none">
-                <a:solidFill>
-                  <a:srgbClr val="64748B"/>
-                </a:solidFill>
-                <a:latin typeface="Noto Sans KR"/>
-              </a:rPr>
-              <a:t>Dev 배포 &amp; Prod 반영</a:t>
-            </a:r>
-          </a:p>
-        </p:txBody>
-      </p:sp>
-      <p:sp>
-        <p:nvSpPr>
-          <p:cNvPr id="27" name="TextBox 26"/>
-          <p:cNvSpPr txBox="1"/>
-          <p:nvPr/>
-        </p:nvSpPr>
-        <p:spPr>
-          <a:xfrm>
-            <a:off x="7327690" y="3476625"/>
-            <a:ext cx="1925709" cy="161925"/>
-          </a:xfrm>
-          <a:prstGeom prst="rect">
-            <a:avLst/>
-          </a:prstGeom>
-          <a:noFill/>
-        </p:spPr>
-        <p:txBody>
-          <a:bodyPr wrap="square" lIns="0" rIns="0" tIns="0" bIns="0" anchor="t">
-            <a:spAutoFit/>
-          </a:bodyPr>
-          <a:lstStyle/>
-          <a:p>
-            <a:pPr algn="ctr"/>
-            <a:r>
-              <a:rPr b="1" sz="1125" i="0" u="none">
-                <a:solidFill>
-                  <a:srgbClr val="14532D"/>
-                </a:solidFill>
-                <a:latin typeface="Noto Sans KR"/>
-              </a:rPr>
-              <a:t>MES Tools</a:t>
-            </a:r>
-          </a:p>
-        </p:txBody>
-      </p:sp>
-      <p:sp>
-        <p:nvSpPr>
-          <p:cNvPr id="28" name="TextBox 27"/>
-          <p:cNvSpPr txBox="1"/>
-          <p:nvPr/>
-        </p:nvSpPr>
-        <p:spPr>
-          <a:xfrm>
-            <a:off x="7373540" y="3657600"/>
-            <a:ext cx="1834008" cy="171450"/>
-          </a:xfrm>
-          <a:prstGeom prst="rect">
-            <a:avLst/>
-          </a:prstGeom>
-          <a:noFill/>
-        </p:spPr>
-        <p:txBody>
-          <a:bodyPr wrap="square" lIns="0" rIns="0" tIns="0" bIns="0" anchor="t">
-            <a:spAutoFit/>
-          </a:bodyPr>
-          <a:lstStyle/>
-          <a:p>
-            <a:pPr algn="ctr"/>
-            <a:r>
-              <a:rPr b="0" sz="975" i="0" u="none">
-                <a:solidFill>
-                  <a:srgbClr val="16A34A"/>
-                </a:solidFill>
-                <a:latin typeface="Noto Sans KR"/>
-              </a:rPr>
-              <a:t>WO / LOT / Log 추출</a:t>
-            </a:r>
-          </a:p>
-        </p:txBody>
-      </p:sp>
-      <p:sp>
-        <p:nvSpPr>
-          <p:cNvPr id="29" name="TextBox 28"/>
-          <p:cNvSpPr txBox="1"/>
-          <p:nvPr/>
-        </p:nvSpPr>
-        <p:spPr>
-          <a:xfrm>
-            <a:off x="9673124" y="3476625"/>
-            <a:ext cx="1604731" cy="161925"/>
-          </a:xfrm>
-          <a:prstGeom prst="rect">
-            <a:avLst/>
-          </a:prstGeom>
-          <a:noFill/>
-        </p:spPr>
-        <p:txBody>
-          <a:bodyPr wrap="square" lIns="0" rIns="0" tIns="0" bIns="0" anchor="t">
-            <a:spAutoFit/>
-          </a:bodyPr>
-          <a:lstStyle/>
-          <a:p>
-            <a:pPr algn="ctr"/>
-            <a:r>
-              <a:rPr b="1" sz="1125" i="0" u="none">
-                <a:solidFill>
-                  <a:srgbClr val="0F172A"/>
-                </a:solidFill>
-                <a:latin typeface="Noto Sans KR"/>
-              </a:rPr>
-              <a:t>LLM Pipeline</a:t>
-            </a:r>
-          </a:p>
-        </p:txBody>
-      </p:sp>
-      <p:sp>
-        <p:nvSpPr>
-          <p:cNvPr id="30" name="TextBox 29"/>
-          <p:cNvSpPr txBox="1"/>
-          <p:nvPr/>
-        </p:nvSpPr>
-        <p:spPr>
-          <a:xfrm>
-            <a:off x="9711332" y="3657600"/>
-            <a:ext cx="1528316" cy="171450"/>
-          </a:xfrm>
-          <a:prstGeom prst="rect">
-            <a:avLst/>
-          </a:prstGeom>
-          <a:noFill/>
-        </p:spPr>
-        <p:txBody>
-          <a:bodyPr wrap="square" lIns="0" rIns="0" tIns="0" bIns="0" anchor="t">
-            <a:spAutoFit/>
-          </a:bodyPr>
-          <a:lstStyle/>
-          <a:p>
-            <a:pPr algn="ctr"/>
-            <a:r>
-              <a:rPr b="0" sz="975" i="0" u="none">
-                <a:solidFill>
-                  <a:srgbClr val="64748B"/>
-                </a:solidFill>
-                <a:latin typeface="Noto Sans KR"/>
-              </a:rPr>
-              <a:t>GUID &amp; 통계 분석</a:t>
-            </a:r>
-          </a:p>
-        </p:txBody>
-      </p:sp>
-      <p:pic>
-        <p:nvPicPr>
-          <p:cNvPr id="31" name="Picture 30" descr="image.png"/>
-          <p:cNvPicPr>
-            <a:picLocks noChangeAspect="1"/>
-          </p:cNvPicPr>
-          <p:nvPr/>
-        </p:nvPicPr>
-        <p:blipFill>
-          <a:blip r:embed="rId14"/>
-          <a:stretch>
-            <a:fillRect/>
-          </a:stretch>
-        </p:blipFill>
-        <p:spPr>
-          <a:xfrm>
-            <a:off x="1649908" y="3238500"/>
-            <a:ext cx="133498" cy="171450"/>
-          </a:xfrm>
-          <a:prstGeom prst="rect">
-            <a:avLst/>
-          </a:prstGeom>
-        </p:spPr>
-      </p:pic>
-      <p:pic>
-        <p:nvPicPr>
-          <p:cNvPr id="32" name="Picture 31" descr="image.png"/>
-          <p:cNvPicPr>
-            <a:picLocks noChangeAspect="1"/>
-          </p:cNvPicPr>
-          <p:nvPr/>
-        </p:nvPicPr>
-        <p:blipFill>
-          <a:blip r:embed="rId15"/>
-          <a:stretch>
-            <a:fillRect/>
-          </a:stretch>
-        </p:blipFill>
-        <p:spPr>
-          <a:xfrm>
-            <a:off x="3844379" y="3248025"/>
-            <a:ext cx="133498" cy="171450"/>
-          </a:xfrm>
-          <a:prstGeom prst="rect">
-            <a:avLst/>
-          </a:prstGeom>
-        </p:spPr>
-      </p:pic>
-      <p:pic>
-        <p:nvPicPr>
-          <p:cNvPr id="33" name="Picture 32" descr="image.png"/>
-          <p:cNvPicPr>
-            <a:picLocks noChangeAspect="1"/>
-          </p:cNvPicPr>
-          <p:nvPr/>
-        </p:nvPicPr>
-        <p:blipFill>
-          <a:blip r:embed="rId16"/>
-          <a:stretch>
-            <a:fillRect/>
-          </a:stretch>
-        </p:blipFill>
-        <p:spPr>
-          <a:xfrm>
-            <a:off x="6038850" y="3248025"/>
-            <a:ext cx="133498" cy="171450"/>
-          </a:xfrm>
-          <a:prstGeom prst="rect">
-            <a:avLst/>
-          </a:prstGeom>
-        </p:spPr>
-      </p:pic>
-      <p:pic>
-        <p:nvPicPr>
-          <p:cNvPr id="34" name="Picture 33" descr="image.png"/>
-          <p:cNvPicPr>
-            <a:picLocks noChangeAspect="1"/>
-          </p:cNvPicPr>
-          <p:nvPr/>
-        </p:nvPicPr>
-        <p:blipFill>
-          <a:blip r:embed="rId17"/>
-          <a:stretch>
-            <a:fillRect/>
-          </a:stretch>
-        </p:blipFill>
-        <p:spPr>
-          <a:xfrm>
-            <a:off x="8223795" y="3248025"/>
-            <a:ext cx="133498" cy="171450"/>
-          </a:xfrm>
-          <a:prstGeom prst="rect">
-            <a:avLst/>
-          </a:prstGeom>
-        </p:spPr>
-      </p:pic>
-      <p:pic>
-        <p:nvPicPr>
-          <p:cNvPr id="35" name="Picture 34" descr="image.png"/>
-          <p:cNvPicPr>
-            <a:picLocks noChangeAspect="1"/>
-          </p:cNvPicPr>
-          <p:nvPr/>
-        </p:nvPicPr>
-        <p:blipFill>
-          <a:blip r:embed="rId18"/>
-          <a:stretch>
-            <a:fillRect/>
-          </a:stretch>
-        </p:blipFill>
-        <p:spPr>
-          <a:xfrm>
-            <a:off x="10408741" y="3248025"/>
-            <a:ext cx="133498" cy="171450"/>
-          </a:xfrm>
-          <a:prstGeom prst="rect">
-            <a:avLst/>
-          </a:prstGeom>
-        </p:spPr>
-      </p:pic>
+              <a:t>초기 프로토타이핑(Python) 대비 대규모 엔터프라이즈 운영 시 Java가 압도적 유리.</a:t>
+            </a:r>
+          </a:p>
+        </p:txBody>
+      </p:sp>
     </p:spTree>
   </p:cSld>
   <p:clrMapOvr>
@@ -4368,6 +3866,14 @@
 <file path=ppt/slides/slide11.xml><?xml version="1.0" encoding="utf-8"?>
 <p:sld xmlns:a="http://schemas.openxmlformats.org/drawingml/2006/main" xmlns:p="http://schemas.openxmlformats.org/presentationml/2006/main" xmlns:r="http://schemas.openxmlformats.org/officeDocument/2006/relationships">
   <p:cSld>
+    <p:bg>
+      <p:bgPr>
+        <a:solidFill>
+          <a:srgbClr val="020617"/>
+        </a:solidFill>
+        <a:effectLst/>
+      </p:bgPr>
+    </p:bg>
     <p:spTree>
       <p:nvGrpSpPr>
         <p:cNvPr id="1" name=""/>
@@ -4375,6 +3881,32 @@
         <p:nvPr/>
       </p:nvGrpSpPr>
       <p:grpSpPr/>
+    </p:spTree>
+  </p:cSld>
+  <p:clrMapOvr>
+    <a:masterClrMapping/>
+  </p:clrMapOvr>
+</p:sld>
+</file>
+
+<file path=ppt/slides/slide12.xml><?xml version="1.0" encoding="utf-8"?>
+<p:sld xmlns:a="http://schemas.openxmlformats.org/drawingml/2006/main" xmlns:p="http://schemas.openxmlformats.org/presentationml/2006/main" xmlns:r="http://schemas.openxmlformats.org/officeDocument/2006/relationships">
+  <p:cSld>
+    <p:bg>
+      <p:bgPr>
+        <a:solidFill>
+          <a:srgbClr val="0F172A"/>
+        </a:solidFill>
+        <a:effectLst/>
+      </p:bgPr>
+    </p:bg>
+    <p:spTree>
+      <p:nvGrpSpPr>
+        <p:cNvPr id="1" name=""/>
+        <p:cNvGrpSpPr/>
+        <p:nvPr/>
+      </p:nvGrpSpPr>
+      <p:grpSpPr/>
       <p:sp>
         <p:nvSpPr>
           <p:cNvPr id="2" name="TextBox 1"/>
@@ -4383,36 +3915,110 @@
         </p:nvSpPr>
         <p:spPr>
           <a:xfrm>
-            <a:off x="571500" y="571500"/>
-            <a:ext cx="1707713" cy="266700"/>
-          </a:xfrm>
-          <a:prstGeom prst="rect">
-            <a:avLst/>
-          </a:prstGeom>
-          <a:noFill/>
-        </p:spPr>
-        <p:txBody>
-          <a:bodyPr wrap="square" lIns="0" rIns="0" tIns="0" bIns="0" anchor="t">
-            <a:spAutoFit/>
-          </a:bodyPr>
-          <a:lstStyle/>
-          <a:p>
-            <a:pPr algn="l"/>
-            <a:r>
-              <a:rPr b="1" sz="1800" i="0" u="none">
-                <a:solidFill>
-                  <a:srgbClr val="1E293B"/>
+            <a:off x="5200501" y="2124075"/>
+            <a:ext cx="1790997" cy="152400"/>
+          </a:xfrm>
+          <a:prstGeom prst="rect">
+            <a:avLst/>
+          </a:prstGeom>
+          <a:noFill/>
+        </p:spPr>
+        <p:txBody>
+          <a:bodyPr wrap="square" lIns="0" rIns="0" tIns="0" bIns="0" anchor="t">
+            <a:spAutoFit/>
+          </a:bodyPr>
+          <a:lstStyle/>
+          <a:p>
+            <a:pPr algn="ctr"/>
+            <a:r>
+              <a:rPr b="1" sz="1050" i="0" u="none">
+                <a:solidFill>
+                  <a:srgbClr val="38BDF8"/>
+                </a:solidFill>
+                <a:latin typeface="JetBrains Mono"/>
+              </a:rPr>
+              <a:t>SUMMARY &amp; CONCLUSION</a:t>
+            </a:r>
+          </a:p>
+        </p:txBody>
+      </p:sp>
+      <p:sp>
+        <p:nvSpPr>
+          <p:cNvPr id="3" name="TextBox 2"/>
+          <p:cNvSpPr txBox="1"/>
+          <p:nvPr/>
+        </p:nvSpPr>
+        <p:spPr>
+          <a:xfrm>
+            <a:off x="2314746" y="2428875"/>
+            <a:ext cx="7562507" cy="561975"/>
+          </a:xfrm>
+          <a:prstGeom prst="rect">
+            <a:avLst/>
+          </a:prstGeom>
+          <a:noFill/>
+        </p:spPr>
+        <p:txBody>
+          <a:bodyPr wrap="square" lIns="0" rIns="0" tIns="0" bIns="0" anchor="t">
+            <a:spAutoFit/>
+          </a:bodyPr>
+          <a:lstStyle/>
+          <a:p>
+            <a:pPr algn="ctr"/>
+            <a:r>
+              <a:rPr b="0" sz="3300" i="0" u="none">
+                <a:solidFill>
+                  <a:srgbClr val="F8FAFC"/>
+                </a:solidFill>
+                <a:latin typeface="Noto Sans KR Black"/>
+              </a:rPr>
+              <a:t>제조 AI Agent 아키텍처 구축 기대효과</a:t>
+            </a:r>
+          </a:p>
+        </p:txBody>
+      </p:sp>
+      <p:sp>
+        <p:nvSpPr>
+          <p:cNvPr id="4" name="TextBox 3"/>
+          <p:cNvSpPr txBox="1"/>
+          <p:nvPr/>
+        </p:nvSpPr>
+        <p:spPr>
+          <a:xfrm>
+            <a:off x="2095500" y="3219450"/>
+            <a:ext cx="8001000" cy="609600"/>
+          </a:xfrm>
+          <a:prstGeom prst="rect">
+            <a:avLst/>
+          </a:prstGeom>
+          <a:noFill/>
+        </p:spPr>
+        <p:txBody>
+          <a:bodyPr wrap="square" lIns="0" rIns="0" tIns="0" bIns="0" anchor="t">
+            <a:spAutoFit/>
+          </a:bodyPr>
+          <a:lstStyle/>
+          <a:p>
+            <a:pPr algn="ctr">
+              <a:lnSpc>
+                <a:spcPts val="2400"/>
+              </a:lnSpc>
+            </a:pPr>
+            <a:r>
+              <a:rPr b="0" sz="1500" i="0" u="none">
+                <a:solidFill>
+                  <a:srgbClr val="94A3B8"/>
                 </a:solidFill>
                 <a:latin typeface="Noto Sans KR"/>
               </a:rPr>
-              <a:t>Image Sources</a:t>
+              <a:t>바이브 코딩 표준화부터 NordAxe Java 프레임워크 도입까지, 신속한 개발 생산성과 엔터프라이즈 운영 안정성을 동시에 확보합니다.</a:t>
             </a:r>
           </a:p>
         </p:txBody>
       </p:sp>
       <p:pic>
         <p:nvPicPr>
-          <p:cNvPr id="3" name="Picture 2" descr="image.png"/>
+          <p:cNvPr id="5" name="Picture 4" descr="image.png"/>
           <p:cNvPicPr>
             <a:picLocks noChangeAspect="1"/>
           </p:cNvPicPr>
@@ -4426,93 +4032,62 @@
         </p:blipFill>
         <p:spPr>
           <a:xfrm>
-            <a:off x="571500" y="995362"/>
-            <a:ext cx="857250" cy="476250"/>
+            <a:off x="3489275" y="4286250"/>
+            <a:ext cx="1475333" cy="447675"/>
           </a:xfrm>
           <a:prstGeom prst="rect">
             <a:avLst/>
           </a:prstGeom>
         </p:spPr>
       </p:pic>
-      <p:sp>
-        <p:nvSpPr>
-          <p:cNvPr id="4" name="TextBox 3"/>
-          <p:cNvSpPr txBox="1"/>
-          <p:nvPr/>
-        </p:nvSpPr>
-        <p:spPr>
-          <a:xfrm>
-            <a:off x="1666875" y="981075"/>
-            <a:ext cx="9953625" cy="285750"/>
-          </a:xfrm>
-          <a:prstGeom prst="rect">
-            <a:avLst/>
-          </a:prstGeom>
-          <a:noFill/>
-        </p:spPr>
-        <p:txBody>
-          <a:bodyPr wrap="square" lIns="0" rIns="0" tIns="0" bIns="0" anchor="t">
-            <a:spAutoFit/>
-          </a:bodyPr>
-          <a:lstStyle/>
-          <a:p>
-            <a:pPr algn="l"/>
-            <a:r>
-              <a:rPr b="0" sz="975" i="0" u="none">
-                <a:solidFill>
-                  <a:srgbClr val="1E293B"/>
-                </a:solidFill>
-                <a:latin typeface="Noto Sans KR"/>
-              </a:rPr>
-              <a:t>https://cdn.prod.website-files.com/63df0b451693d106cbf84530/640ec2d9979c11d6ea6ee039_Food%2520Manufacturing%2520Operations%2520Smart%2520Factory%2520Dashboard%2520Example.png</a:t>
-            </a:r>
-          </a:p>
-        </p:txBody>
-      </p:sp>
-      <p:sp>
-        <p:nvSpPr>
-          <p:cNvPr id="5" name="TextBox 4"/>
-          <p:cNvSpPr txBox="1"/>
-          <p:nvPr/>
-        </p:nvSpPr>
-        <p:spPr>
-          <a:xfrm>
-            <a:off x="1666875" y="1314450"/>
-            <a:ext cx="1885652" cy="171450"/>
-          </a:xfrm>
-          <a:prstGeom prst="rect">
-            <a:avLst/>
-          </a:prstGeom>
-          <a:noFill/>
-        </p:spPr>
-        <p:txBody>
-          <a:bodyPr wrap="square" lIns="0" rIns="0" tIns="0" bIns="0" anchor="t">
-            <a:spAutoFit/>
-          </a:bodyPr>
-          <a:lstStyle/>
-          <a:p>
-            <a:pPr algn="l"/>
-            <a:r>
-              <a:rPr b="0" sz="1200" i="0" u="none">
-                <a:solidFill>
-                  <a:srgbClr val="1E293B"/>
-                </a:solidFill>
-                <a:latin typeface="Noto Sans KR"/>
-              </a:rPr>
-              <a:t>Source: </a:t>
-            </a:r>
-            <a:r>
-              <a:rPr b="0" sz="1200" i="0" u="none">
-                <a:solidFill>
-                  <a:srgbClr val="4F46E5"/>
-                </a:solidFill>
-                <a:latin typeface="Noto Sans KR"/>
-              </a:rPr>
-              <a:t>www.worximity.com</a:t>
-            </a:r>
-          </a:p>
-        </p:txBody>
-      </p:sp>
+      <p:pic>
+        <p:nvPicPr>
+          <p:cNvPr id="6" name="Picture 5" descr="image.png"/>
+          <p:cNvPicPr>
+            <a:picLocks noChangeAspect="1"/>
+          </p:cNvPicPr>
+          <p:nvPr/>
+        </p:nvPicPr>
+        <p:blipFill>
+          <a:blip r:embed="rId3"/>
+          <a:stretch>
+            <a:fillRect/>
+          </a:stretch>
+        </p:blipFill>
+        <p:spPr>
+          <a:xfrm>
+            <a:off x="5117008" y="4286250"/>
+            <a:ext cx="1627733" cy="447675"/>
+          </a:xfrm>
+          <a:prstGeom prst="rect">
+            <a:avLst/>
+          </a:prstGeom>
+        </p:spPr>
+      </p:pic>
+      <p:pic>
+        <p:nvPicPr>
+          <p:cNvPr id="7" name="Picture 6" descr="image.png"/>
+          <p:cNvPicPr>
+            <a:picLocks noChangeAspect="1"/>
+          </p:cNvPicPr>
+          <p:nvPr/>
+        </p:nvPicPr>
+        <p:blipFill>
+          <a:blip r:embed="rId4"/>
+          <a:stretch>
+            <a:fillRect/>
+          </a:stretch>
+        </p:blipFill>
+        <p:spPr>
+          <a:xfrm>
+            <a:off x="6897141" y="4286250"/>
+            <a:ext cx="1805582" cy="447675"/>
+          </a:xfrm>
+          <a:prstGeom prst="rect">
+            <a:avLst/>
+          </a:prstGeom>
+        </p:spPr>
+      </p:pic>
     </p:spTree>
   </p:cSld>
   <p:clrMapOvr>
@@ -4527,7 +4102,7 @@
     <p:bg>
       <p:bgPr>
         <a:solidFill>
-          <a:srgbClr val="FFFFFF"/>
+          <a:srgbClr val="F8FAFC"/>
         </a:solidFill>
         <a:effectLst/>
       </p:bgPr>
@@ -4569,7 +4144,7 @@
                 </a:solidFill>
                 <a:latin typeface="Noto Sans KR"/>
               </a:rPr>
-              <a:t>EXECUTIVE SUMMARY</a:t>
+              <a:t>EXECUTIVE OVERVIEW</a:t>
             </a:r>
           </a:p>
         </p:txBody>
@@ -4598,13 +4173,13 @@
           <a:p>
             <a:pPr algn="l"/>
             <a:r>
-              <a:rPr b="1" sz="2400" i="0" u="none">
+              <a:rPr b="0" sz="2400" i="0" u="none">
                 <a:solidFill>
                   <a:srgbClr val="0F172A"/>
                 </a:solidFill>
-                <a:latin typeface="Noto Sans KR"/>
-              </a:rPr>
-              <a:t>아키텍처 핵심 3대 추진 축</a:t>
+                <a:latin typeface="Noto Sans KR ExtraBold"/>
+              </a:rPr>
+              <a:t>제조 AI Agent 아키텍처 3대 핵심 기둥</a:t>
             </a:r>
           </a:p>
         </p:txBody>
@@ -4625,8 +4200,8 @@
         </p:blipFill>
         <p:spPr>
           <a:xfrm>
-            <a:off x="609600" y="2578893"/>
-            <a:ext cx="3505200" cy="2652563"/>
+            <a:off x="609600" y="2695575"/>
+            <a:ext cx="3505200" cy="2457450"/>
           </a:xfrm>
           <a:prstGeom prst="rect">
             <a:avLst/>
@@ -4642,15 +4217,15 @@
           <p:nvPr/>
         </p:nvPicPr>
         <p:blipFill>
-          <a:blip r:embed="rId3"/>
+          <a:blip r:embed="rId2"/>
           <a:stretch>
             <a:fillRect/>
           </a:stretch>
         </p:blipFill>
         <p:spPr>
           <a:xfrm>
-            <a:off x="4343400" y="2578893"/>
-            <a:ext cx="3505200" cy="2652563"/>
+            <a:off x="4343400" y="2695575"/>
+            <a:ext cx="3505200" cy="2457450"/>
           </a:xfrm>
           <a:prstGeom prst="rect">
             <a:avLst/>
@@ -4666,15 +4241,15 @@
           <p:nvPr/>
         </p:nvPicPr>
         <p:blipFill>
-          <a:blip r:embed="rId4"/>
+          <a:blip r:embed="rId2"/>
           <a:stretch>
             <a:fillRect/>
           </a:stretch>
         </p:blipFill>
         <p:spPr>
           <a:xfrm>
-            <a:off x="8077200" y="2578893"/>
-            <a:ext cx="3505200" cy="2652563"/>
+            <a:off x="8077200" y="2695575"/>
+            <a:ext cx="3505200" cy="2457450"/>
           </a:xfrm>
           <a:prstGeom prst="rect">
             <a:avLst/>
@@ -4690,15 +4265,15 @@
           <p:nvPr/>
         </p:nvPicPr>
         <p:blipFill>
-          <a:blip r:embed="rId5"/>
+          <a:blip r:embed="rId3"/>
           <a:stretch>
             <a:fillRect/>
           </a:stretch>
         </p:blipFill>
         <p:spPr>
           <a:xfrm>
-            <a:off x="847725" y="2883693"/>
-            <a:ext cx="381000" cy="381000"/>
+            <a:off x="923925" y="3009900"/>
+            <a:ext cx="457200" cy="457200"/>
           </a:xfrm>
           <a:prstGeom prst="rect">
             <a:avLst/>
@@ -4714,15 +4289,15 @@
           <p:nvPr/>
         </p:nvPicPr>
         <p:blipFill>
-          <a:blip r:embed="rId6"/>
+          <a:blip r:embed="rId4"/>
           <a:stretch>
             <a:fillRect/>
           </a:stretch>
         </p:blipFill>
         <p:spPr>
           <a:xfrm>
-            <a:off x="4581525" y="2883693"/>
-            <a:ext cx="381000" cy="381000"/>
+            <a:off x="4657725" y="3009900"/>
+            <a:ext cx="457200" cy="457200"/>
           </a:xfrm>
           <a:prstGeom prst="rect">
             <a:avLst/>
@@ -4738,6 +4313,381 @@
           <p:nvPr/>
         </p:nvPicPr>
         <p:blipFill>
+          <a:blip r:embed="rId5"/>
+          <a:stretch>
+            <a:fillRect/>
+          </a:stretch>
+        </p:blipFill>
+        <p:spPr>
+          <a:xfrm>
+            <a:off x="8391525" y="3009900"/>
+            <a:ext cx="457200" cy="457200"/>
+          </a:xfrm>
+          <a:prstGeom prst="rect">
+            <a:avLst/>
+          </a:prstGeom>
+        </p:spPr>
+      </p:pic>
+      <p:sp>
+        <p:nvSpPr>
+          <p:cNvPr id="10" name="TextBox 9"/>
+          <p:cNvSpPr txBox="1"/>
+          <p:nvPr/>
+        </p:nvSpPr>
+        <p:spPr>
+          <a:xfrm>
+            <a:off x="923925" y="3657600"/>
+            <a:ext cx="2876550" cy="152400"/>
+          </a:xfrm>
+          <a:prstGeom prst="rect">
+            <a:avLst/>
+          </a:prstGeom>
+          <a:noFill/>
+        </p:spPr>
+        <p:txBody>
+          <a:bodyPr wrap="square" lIns="0" rIns="0" tIns="0" bIns="0" anchor="t">
+            <a:spAutoFit/>
+          </a:bodyPr>
+          <a:lstStyle/>
+          <a:p>
+            <a:pPr algn="l"/>
+            <a:r>
+              <a:rPr b="1" sz="1050" i="0" u="none">
+                <a:solidFill>
+                  <a:srgbClr val="64748B"/>
+                </a:solidFill>
+                <a:latin typeface="Noto Sans KR"/>
+              </a:rPr>
+              <a:t>PILLAR 01</a:t>
+            </a:r>
+          </a:p>
+        </p:txBody>
+      </p:sp>
+      <p:sp>
+        <p:nvSpPr>
+          <p:cNvPr id="11" name="TextBox 10"/>
+          <p:cNvSpPr txBox="1"/>
+          <p:nvPr/>
+        </p:nvSpPr>
+        <p:spPr>
+          <a:xfrm>
+            <a:off x="923925" y="3886200"/>
+            <a:ext cx="3020377" cy="285750"/>
+          </a:xfrm>
+          <a:prstGeom prst="rect">
+            <a:avLst/>
+          </a:prstGeom>
+          <a:noFill/>
+        </p:spPr>
+        <p:txBody>
+          <a:bodyPr wrap="square" lIns="0" rIns="0" tIns="0" bIns="0" anchor="t">
+            <a:spAutoFit/>
+          </a:bodyPr>
+          <a:lstStyle/>
+          <a:p>
+            <a:pPr algn="l"/>
+            <a:r>
+              <a:rPr b="1" sz="1650" i="0" u="none">
+                <a:solidFill>
+                  <a:srgbClr val="0F172A"/>
+                </a:solidFill>
+                <a:latin typeface="Noto Sans KR"/>
+              </a:rPr>
+              <a:t>바이브 코딩 표준화</a:t>
+            </a:r>
+          </a:p>
+        </p:txBody>
+      </p:sp>
+      <p:sp>
+        <p:nvSpPr>
+          <p:cNvPr id="12" name="TextBox 11"/>
+          <p:cNvSpPr txBox="1"/>
+          <p:nvPr/>
+        </p:nvSpPr>
+        <p:spPr>
+          <a:xfrm>
+            <a:off x="923925" y="4324350"/>
+            <a:ext cx="2876550" cy="514350"/>
+          </a:xfrm>
+          <a:prstGeom prst="rect">
+            <a:avLst/>
+          </a:prstGeom>
+          <a:noFill/>
+        </p:spPr>
+        <p:txBody>
+          <a:bodyPr wrap="square" lIns="0" rIns="0" tIns="0" bIns="0" anchor="t">
+            <a:spAutoFit/>
+          </a:bodyPr>
+          <a:lstStyle/>
+          <a:p>
+            <a:pPr algn="l">
+              <a:lnSpc>
+                <a:spcPts val="2025"/>
+              </a:lnSpc>
+            </a:pPr>
+            <a:r>
+              <a:rPr b="0" sz="1350" i="0" u="none">
+                <a:solidFill>
+                  <a:srgbClr val="334155"/>
+                </a:solidFill>
+                <a:latin typeface="Noto Sans KR"/>
+              </a:rPr>
+              <a:t>Spring 구조 유사 프레임워크와 컨벤션 기반 정확도 극대화.</a:t>
+            </a:r>
+          </a:p>
+        </p:txBody>
+      </p:sp>
+      <p:sp>
+        <p:nvSpPr>
+          <p:cNvPr id="13" name="TextBox 12"/>
+          <p:cNvSpPr txBox="1"/>
+          <p:nvPr/>
+        </p:nvSpPr>
+        <p:spPr>
+          <a:xfrm>
+            <a:off x="4657725" y="3657600"/>
+            <a:ext cx="2876550" cy="152400"/>
+          </a:xfrm>
+          <a:prstGeom prst="rect">
+            <a:avLst/>
+          </a:prstGeom>
+          <a:noFill/>
+        </p:spPr>
+        <p:txBody>
+          <a:bodyPr wrap="square" lIns="0" rIns="0" tIns="0" bIns="0" anchor="t">
+            <a:spAutoFit/>
+          </a:bodyPr>
+          <a:lstStyle/>
+          <a:p>
+            <a:pPr algn="l"/>
+            <a:r>
+              <a:rPr b="1" sz="1050" i="0" u="none">
+                <a:solidFill>
+                  <a:srgbClr val="64748B"/>
+                </a:solidFill>
+                <a:latin typeface="Noto Sans KR"/>
+              </a:rPr>
+              <a:t>PILLAR 02</a:t>
+            </a:r>
+          </a:p>
+        </p:txBody>
+      </p:sp>
+      <p:sp>
+        <p:nvSpPr>
+          <p:cNvPr id="14" name="TextBox 13"/>
+          <p:cNvSpPr txBox="1"/>
+          <p:nvPr/>
+        </p:nvSpPr>
+        <p:spPr>
+          <a:xfrm>
+            <a:off x="4657725" y="3886200"/>
+            <a:ext cx="3020377" cy="285750"/>
+          </a:xfrm>
+          <a:prstGeom prst="rect">
+            <a:avLst/>
+          </a:prstGeom>
+          <a:noFill/>
+        </p:spPr>
+        <p:txBody>
+          <a:bodyPr wrap="square" lIns="0" rIns="0" tIns="0" bIns="0" anchor="t">
+            <a:spAutoFit/>
+          </a:bodyPr>
+          <a:lstStyle/>
+          <a:p>
+            <a:pPr algn="l"/>
+            <a:r>
+              <a:rPr b="1" sz="1650" i="0" u="none">
+                <a:solidFill>
+                  <a:srgbClr val="0F172A"/>
+                </a:solidFill>
+                <a:latin typeface="Noto Sans KR"/>
+              </a:rPr>
+              <a:t>운영 MES Tooling</a:t>
+            </a:r>
+          </a:p>
+        </p:txBody>
+      </p:sp>
+      <p:sp>
+        <p:nvSpPr>
+          <p:cNvPr id="15" name="TextBox 14"/>
+          <p:cNvSpPr txBox="1"/>
+          <p:nvPr/>
+        </p:nvSpPr>
+        <p:spPr>
+          <a:xfrm>
+            <a:off x="4657725" y="4324350"/>
+            <a:ext cx="2876550" cy="514350"/>
+          </a:xfrm>
+          <a:prstGeom prst="rect">
+            <a:avLst/>
+          </a:prstGeom>
+          <a:noFill/>
+        </p:spPr>
+        <p:txBody>
+          <a:bodyPr wrap="square" lIns="0" rIns="0" tIns="0" bIns="0" anchor="t">
+            <a:spAutoFit/>
+          </a:bodyPr>
+          <a:lstStyle/>
+          <a:p>
+            <a:pPr algn="l">
+              <a:lnSpc>
+                <a:spcPts val="2025"/>
+              </a:lnSpc>
+            </a:pPr>
+            <a:r>
+              <a:rPr b="0" sz="1350" i="0" u="none">
+                <a:solidFill>
+                  <a:srgbClr val="334155"/>
+                </a:solidFill>
+                <a:latin typeface="Noto Sans KR"/>
+              </a:rPr>
+              <a:t>WO·LOT·설비 데이터 연동 Tool 및 Log 분석 자율 제어.</a:t>
+            </a:r>
+          </a:p>
+        </p:txBody>
+      </p:sp>
+      <p:sp>
+        <p:nvSpPr>
+          <p:cNvPr id="16" name="TextBox 15"/>
+          <p:cNvSpPr txBox="1"/>
+          <p:nvPr/>
+        </p:nvSpPr>
+        <p:spPr>
+          <a:xfrm>
+            <a:off x="8391525" y="3657600"/>
+            <a:ext cx="2876550" cy="152400"/>
+          </a:xfrm>
+          <a:prstGeom prst="rect">
+            <a:avLst/>
+          </a:prstGeom>
+          <a:noFill/>
+        </p:spPr>
+        <p:txBody>
+          <a:bodyPr wrap="square" lIns="0" rIns="0" tIns="0" bIns="0" anchor="t">
+            <a:spAutoFit/>
+          </a:bodyPr>
+          <a:lstStyle/>
+          <a:p>
+            <a:pPr algn="l"/>
+            <a:r>
+              <a:rPr b="1" sz="1050" i="0" u="none">
+                <a:solidFill>
+                  <a:srgbClr val="64748B"/>
+                </a:solidFill>
+                <a:latin typeface="Noto Sans KR"/>
+              </a:rPr>
+              <a:t>PILLAR 03</a:t>
+            </a:r>
+          </a:p>
+        </p:txBody>
+      </p:sp>
+      <p:sp>
+        <p:nvSpPr>
+          <p:cNvPr id="17" name="TextBox 16"/>
+          <p:cNvSpPr txBox="1"/>
+          <p:nvPr/>
+        </p:nvSpPr>
+        <p:spPr>
+          <a:xfrm>
+            <a:off x="8391525" y="3886200"/>
+            <a:ext cx="3020377" cy="247650"/>
+          </a:xfrm>
+          <a:prstGeom prst="rect">
+            <a:avLst/>
+          </a:prstGeom>
+          <a:noFill/>
+        </p:spPr>
+        <p:txBody>
+          <a:bodyPr wrap="square" lIns="0" rIns="0" tIns="0" bIns="0" anchor="t">
+            <a:spAutoFit/>
+          </a:bodyPr>
+          <a:lstStyle/>
+          <a:p>
+            <a:pPr algn="l"/>
+            <a:r>
+              <a:rPr b="1" sz="1650" i="0" u="none">
+                <a:solidFill>
+                  <a:srgbClr val="0F172A"/>
+                </a:solidFill>
+                <a:latin typeface="Noto Sans KR"/>
+              </a:rPr>
+              <a:t>NordAxe Java Agent</a:t>
+            </a:r>
+          </a:p>
+        </p:txBody>
+      </p:sp>
+      <p:sp>
+        <p:nvSpPr>
+          <p:cNvPr id="18" name="TextBox 17"/>
+          <p:cNvSpPr txBox="1"/>
+          <p:nvPr/>
+        </p:nvSpPr>
+        <p:spPr>
+          <a:xfrm>
+            <a:off x="8391525" y="4286250"/>
+            <a:ext cx="2876550" cy="514350"/>
+          </a:xfrm>
+          <a:prstGeom prst="rect">
+            <a:avLst/>
+          </a:prstGeom>
+          <a:noFill/>
+        </p:spPr>
+        <p:txBody>
+          <a:bodyPr wrap="square" lIns="0" rIns="0" tIns="0" bIns="0" anchor="t">
+            <a:spAutoFit/>
+          </a:bodyPr>
+          <a:lstStyle/>
+          <a:p>
+            <a:pPr algn="l">
+              <a:lnSpc>
+                <a:spcPts val="2025"/>
+              </a:lnSpc>
+            </a:pPr>
+            <a:r>
+              <a:rPr b="0" sz="1350" i="0" u="none">
+                <a:solidFill>
+                  <a:srgbClr val="334155"/>
+                </a:solidFill>
+                <a:latin typeface="Noto Sans KR"/>
+              </a:rPr>
+              <a:t>Enterprise Java 자산 직결을 통한 비용 절감 및 대규모 안정성.</a:t>
+            </a:r>
+          </a:p>
+        </p:txBody>
+      </p:sp>
+      <p:pic>
+        <p:nvPicPr>
+          <p:cNvPr id="19" name="Picture 18" descr="image.png"/>
+          <p:cNvPicPr>
+            <a:picLocks noChangeAspect="1"/>
+          </p:cNvPicPr>
+          <p:nvPr/>
+        </p:nvPicPr>
+        <p:blipFill>
+          <a:blip r:embed="rId6"/>
+          <a:stretch>
+            <a:fillRect/>
+          </a:stretch>
+        </p:blipFill>
+        <p:spPr>
+          <a:xfrm>
+            <a:off x="1070967" y="3133725"/>
+            <a:ext cx="163115" cy="209550"/>
+          </a:xfrm>
+          <a:prstGeom prst="rect">
+            <a:avLst/>
+          </a:prstGeom>
+        </p:spPr>
+      </p:pic>
+      <p:pic>
+        <p:nvPicPr>
+          <p:cNvPr id="20" name="Picture 19" descr="image.png"/>
+          <p:cNvPicPr>
+            <a:picLocks noChangeAspect="1"/>
+          </p:cNvPicPr>
+          <p:nvPr/>
+        </p:nvPicPr>
+        <p:blipFill>
           <a:blip r:embed="rId7"/>
           <a:stretch>
             <a:fillRect/>
@@ -4745,554 +4695,17 @@
         </p:blipFill>
         <p:spPr>
           <a:xfrm>
-            <a:off x="8315325" y="2883693"/>
-            <a:ext cx="381000" cy="381000"/>
+            <a:off x="4804767" y="3133725"/>
+            <a:ext cx="163115" cy="209550"/>
           </a:xfrm>
           <a:prstGeom prst="rect">
             <a:avLst/>
           </a:prstGeom>
         </p:spPr>
       </p:pic>
-      <p:sp>
-        <p:nvSpPr>
-          <p:cNvPr id="10" name="TextBox 9"/>
-          <p:cNvSpPr txBox="1"/>
-          <p:nvPr/>
-        </p:nvSpPr>
-        <p:spPr>
-          <a:xfrm>
-            <a:off x="1343025" y="2945606"/>
-            <a:ext cx="1841167" cy="257175"/>
-          </a:xfrm>
-          <a:prstGeom prst="rect">
-            <a:avLst/>
-          </a:prstGeom>
-          <a:noFill/>
-        </p:spPr>
-        <p:txBody>
-          <a:bodyPr wrap="square" lIns="0" rIns="0" tIns="0" bIns="0" anchor="t">
-            <a:spAutoFit/>
-          </a:bodyPr>
-          <a:lstStyle/>
-          <a:p>
-            <a:pPr algn="l"/>
-            <a:r>
-              <a:rPr b="1" sz="1500" i="0" u="none">
-                <a:solidFill>
-                  <a:srgbClr val="0F172A"/>
-                </a:solidFill>
-                <a:latin typeface="Noto Sans KR"/>
-              </a:rPr>
-              <a:t>1. Vibe Coding 체계</a:t>
-            </a:r>
-          </a:p>
-        </p:txBody>
-      </p:sp>
-      <p:sp>
-        <p:nvSpPr>
-          <p:cNvPr id="11" name="TextBox 10"/>
-          <p:cNvSpPr txBox="1"/>
-          <p:nvPr/>
-        </p:nvSpPr>
-        <p:spPr>
-          <a:xfrm>
-            <a:off x="847725" y="3417093"/>
-            <a:ext cx="3028950" cy="307627"/>
-          </a:xfrm>
-          <a:prstGeom prst="rect">
-            <a:avLst/>
-          </a:prstGeom>
-          <a:noFill/>
-        </p:spPr>
-        <p:txBody>
-          <a:bodyPr wrap="square" lIns="0" rIns="0" tIns="0" bIns="0" anchor="t">
-            <a:spAutoFit/>
-          </a:bodyPr>
-          <a:lstStyle/>
-          <a:p>
-            <a:pPr algn="l">
-              <a:lnSpc>
-                <a:spcPts val="2422"/>
-              </a:lnSpc>
-            </a:pPr>
-            <a:r>
-              <a:rPr b="1" sz="1275" i="0" u="none">
-                <a:solidFill>
-                  <a:srgbClr val="334155"/>
-                </a:solidFill>
-                <a:latin typeface="Noto Sans KR"/>
-              </a:rPr>
-              <a:t>Inhouse 표준:</a:t>
-            </a:r>
-            <a:r>
-              <a:rPr b="0" sz="1275" i="0" u="none">
-                <a:solidFill>
-                  <a:srgbClr val="334155"/>
-                </a:solidFill>
-                <a:latin typeface="Noto Sans KR"/>
-              </a:rPr>
-              <a:t> Spring 동질성 극대화</a:t>
-            </a:r>
-          </a:p>
-        </p:txBody>
-      </p:sp>
-      <p:sp>
-        <p:nvSpPr>
-          <p:cNvPr id="12" name="TextBox 11"/>
-          <p:cNvSpPr txBox="1"/>
-          <p:nvPr/>
-        </p:nvSpPr>
-        <p:spPr>
-          <a:xfrm>
-            <a:off x="847725" y="3724721"/>
-            <a:ext cx="3028950" cy="307627"/>
-          </a:xfrm>
-          <a:prstGeom prst="rect">
-            <a:avLst/>
-          </a:prstGeom>
-          <a:noFill/>
-        </p:spPr>
-        <p:txBody>
-          <a:bodyPr wrap="square" lIns="0" rIns="0" tIns="0" bIns="0" anchor="t">
-            <a:spAutoFit/>
-          </a:bodyPr>
-          <a:lstStyle/>
-          <a:p>
-            <a:pPr algn="l">
-              <a:lnSpc>
-                <a:spcPts val="2422"/>
-              </a:lnSpc>
-            </a:pPr>
-            <a:r>
-              <a:rPr b="1" sz="1275" i="0" u="none">
-                <a:solidFill>
-                  <a:srgbClr val="334155"/>
-                </a:solidFill>
-                <a:latin typeface="Noto Sans KR"/>
-              </a:rPr>
-              <a:t>설계서 규격:</a:t>
-            </a:r>
-            <a:r>
-              <a:rPr b="0" sz="1275" i="0" u="none">
-                <a:solidFill>
-                  <a:srgbClr val="334155"/>
-                </a:solidFill>
-                <a:latin typeface="Noto Sans KR"/>
-              </a:rPr>
-              <a:t> FE / BE / 설비 IF 양식</a:t>
-            </a:r>
-          </a:p>
-        </p:txBody>
-      </p:sp>
-      <p:sp>
-        <p:nvSpPr>
-          <p:cNvPr id="13" name="TextBox 12"/>
-          <p:cNvSpPr txBox="1"/>
-          <p:nvPr/>
-        </p:nvSpPr>
-        <p:spPr>
-          <a:xfrm>
-            <a:off x="847725" y="4032349"/>
-            <a:ext cx="3028950" cy="307627"/>
-          </a:xfrm>
-          <a:prstGeom prst="rect">
-            <a:avLst/>
-          </a:prstGeom>
-          <a:noFill/>
-        </p:spPr>
-        <p:txBody>
-          <a:bodyPr wrap="square" lIns="0" rIns="0" tIns="0" bIns="0" anchor="t">
-            <a:spAutoFit/>
-          </a:bodyPr>
-          <a:lstStyle/>
-          <a:p>
-            <a:pPr algn="l">
-              <a:lnSpc>
-                <a:spcPts val="2422"/>
-              </a:lnSpc>
-            </a:pPr>
-            <a:r>
-              <a:rPr b="1" sz="1275" i="0" u="none">
-                <a:solidFill>
-                  <a:srgbClr val="334155"/>
-                </a:solidFill>
-                <a:latin typeface="Noto Sans KR"/>
-              </a:rPr>
-              <a:t>CI/CD 배포:</a:t>
-            </a:r>
-            <a:r>
-              <a:rPr b="0" sz="1275" i="0" u="none">
-                <a:solidFill>
-                  <a:srgbClr val="334155"/>
-                </a:solidFill>
-                <a:latin typeface="Noto Sans KR"/>
-              </a:rPr>
-              <a:t> Agent Commit &amp; 회귀 통제</a:t>
-            </a:r>
-          </a:p>
-        </p:txBody>
-      </p:sp>
-      <p:sp>
-        <p:nvSpPr>
-          <p:cNvPr id="14" name="TextBox 13"/>
-          <p:cNvSpPr txBox="1"/>
-          <p:nvPr/>
-        </p:nvSpPr>
-        <p:spPr>
-          <a:xfrm>
-            <a:off x="5076825" y="2945606"/>
-            <a:ext cx="1989311" cy="257175"/>
-          </a:xfrm>
-          <a:prstGeom prst="rect">
-            <a:avLst/>
-          </a:prstGeom>
-          <a:noFill/>
-        </p:spPr>
-        <p:txBody>
-          <a:bodyPr wrap="square" lIns="0" rIns="0" tIns="0" bIns="0" anchor="t">
-            <a:spAutoFit/>
-          </a:bodyPr>
-          <a:lstStyle/>
-          <a:p>
-            <a:pPr algn="l"/>
-            <a:r>
-              <a:rPr b="1" sz="1500" i="0" u="none">
-                <a:solidFill>
-                  <a:srgbClr val="0F172A"/>
-                </a:solidFill>
-                <a:latin typeface="Noto Sans KR"/>
-              </a:rPr>
-              <a:t>2. 기존 소스 품질 관리</a:t>
-            </a:r>
-          </a:p>
-        </p:txBody>
-      </p:sp>
-      <p:sp>
-        <p:nvSpPr>
-          <p:cNvPr id="15" name="TextBox 14"/>
-          <p:cNvSpPr txBox="1"/>
-          <p:nvPr/>
-        </p:nvSpPr>
-        <p:spPr>
-          <a:xfrm>
-            <a:off x="4581525" y="3417093"/>
-            <a:ext cx="3028950" cy="307627"/>
-          </a:xfrm>
-          <a:prstGeom prst="rect">
-            <a:avLst/>
-          </a:prstGeom>
-          <a:noFill/>
-        </p:spPr>
-        <p:txBody>
-          <a:bodyPr wrap="square" lIns="0" rIns="0" tIns="0" bIns="0" anchor="t">
-            <a:spAutoFit/>
-          </a:bodyPr>
-          <a:lstStyle/>
-          <a:p>
-            <a:pPr algn="l">
-              <a:lnSpc>
-                <a:spcPts val="2422"/>
-              </a:lnSpc>
-            </a:pPr>
-            <a:r>
-              <a:rPr b="1" sz="1275" i="0" u="none">
-                <a:solidFill>
-                  <a:srgbClr val="334155"/>
-                </a:solidFill>
-                <a:latin typeface="Noto Sans KR"/>
-              </a:rPr>
-              <a:t>Spring 베이스:</a:t>
-            </a:r>
-            <a:r>
-              <a:rPr b="0" sz="1275" i="0" u="none">
-                <a:solidFill>
-                  <a:srgbClr val="334155"/>
-                </a:solidFill>
-                <a:latin typeface="Noto Sans KR"/>
-              </a:rPr>
-              <a:t> 범용성 표준 프레임워크</a:t>
-            </a:r>
-          </a:p>
-        </p:txBody>
-      </p:sp>
-      <p:sp>
-        <p:nvSpPr>
-          <p:cNvPr id="16" name="TextBox 15"/>
-          <p:cNvSpPr txBox="1"/>
-          <p:nvPr/>
-        </p:nvSpPr>
-        <p:spPr>
-          <a:xfrm>
-            <a:off x="4581525" y="3724721"/>
-            <a:ext cx="3028950" cy="307627"/>
-          </a:xfrm>
-          <a:prstGeom prst="rect">
-            <a:avLst/>
-          </a:prstGeom>
-          <a:noFill/>
-        </p:spPr>
-        <p:txBody>
-          <a:bodyPr wrap="square" lIns="0" rIns="0" tIns="0" bIns="0" anchor="t">
-            <a:spAutoFit/>
-          </a:bodyPr>
-          <a:lstStyle/>
-          <a:p>
-            <a:pPr algn="l">
-              <a:lnSpc>
-                <a:spcPts val="2422"/>
-              </a:lnSpc>
-            </a:pPr>
-            <a:r>
-              <a:rPr b="1" sz="1275" i="0" u="none">
-                <a:solidFill>
-                  <a:srgbClr val="334155"/>
-                </a:solidFill>
-                <a:latin typeface="Noto Sans KR"/>
-              </a:rPr>
-              <a:t>컨벤션 적용:</a:t>
-            </a:r>
-            <a:r>
-              <a:rPr b="0" sz="1275" i="0" u="none">
-                <a:solidFill>
-                  <a:srgbClr val="334155"/>
-                </a:solidFill>
-                <a:latin typeface="Noto Sans KR"/>
-              </a:rPr>
-              <a:t> 안티패턴 가이드 필수화</a:t>
-            </a:r>
-          </a:p>
-        </p:txBody>
-      </p:sp>
-      <p:sp>
-        <p:nvSpPr>
-          <p:cNvPr id="17" name="TextBox 16"/>
-          <p:cNvSpPr txBox="1"/>
-          <p:nvPr/>
-        </p:nvSpPr>
-        <p:spPr>
-          <a:xfrm>
-            <a:off x="4581525" y="4032349"/>
-            <a:ext cx="3028950" cy="307627"/>
-          </a:xfrm>
-          <a:prstGeom prst="rect">
-            <a:avLst/>
-          </a:prstGeom>
-          <a:noFill/>
-        </p:spPr>
-        <p:txBody>
-          <a:bodyPr wrap="square" lIns="0" rIns="0" tIns="0" bIns="0" anchor="t">
-            <a:spAutoFit/>
-          </a:bodyPr>
-          <a:lstStyle/>
-          <a:p>
-            <a:pPr algn="l">
-              <a:lnSpc>
-                <a:spcPts val="2422"/>
-              </a:lnSpc>
-            </a:pPr>
-            <a:r>
-              <a:rPr b="1" sz="1275" i="0" u="none">
-                <a:solidFill>
-                  <a:srgbClr val="334155"/>
-                </a:solidFill>
-                <a:latin typeface="Noto Sans KR"/>
-              </a:rPr>
-              <a:t>로그 Prompt화:</a:t>
-            </a:r>
-            <a:r>
-              <a:rPr b="0" sz="1275" i="0" u="none">
-                <a:solidFill>
-                  <a:srgbClr val="334155"/>
-                </a:solidFill>
-                <a:latin typeface="Noto Sans KR"/>
-              </a:rPr>
-              <a:t> 동작 무결성 자동 검증</a:t>
-            </a:r>
-          </a:p>
-        </p:txBody>
-      </p:sp>
-      <p:sp>
-        <p:nvSpPr>
-          <p:cNvPr id="18" name="TextBox 17"/>
-          <p:cNvSpPr txBox="1"/>
-          <p:nvPr/>
-        </p:nvSpPr>
-        <p:spPr>
-          <a:xfrm>
-            <a:off x="8810625" y="2964656"/>
-            <a:ext cx="1666927" cy="219075"/>
-          </a:xfrm>
-          <a:prstGeom prst="rect">
-            <a:avLst/>
-          </a:prstGeom>
-          <a:noFill/>
-        </p:spPr>
-        <p:txBody>
-          <a:bodyPr wrap="square" lIns="0" rIns="0" tIns="0" bIns="0" anchor="t">
-            <a:spAutoFit/>
-          </a:bodyPr>
-          <a:lstStyle/>
-          <a:p>
-            <a:pPr algn="l"/>
-            <a:r>
-              <a:rPr b="1" sz="1500" i="0" u="none">
-                <a:solidFill>
-                  <a:srgbClr val="0F172A"/>
-                </a:solidFill>
-                <a:latin typeface="Noto Sans KR"/>
-              </a:rPr>
-              <a:t>3. MES AI Tooling</a:t>
-            </a:r>
-          </a:p>
-        </p:txBody>
-      </p:sp>
-      <p:sp>
-        <p:nvSpPr>
-          <p:cNvPr id="19" name="TextBox 18"/>
-          <p:cNvSpPr txBox="1"/>
-          <p:nvPr/>
-        </p:nvSpPr>
-        <p:spPr>
-          <a:xfrm>
-            <a:off x="8315325" y="3417093"/>
-            <a:ext cx="3028950" cy="307627"/>
-          </a:xfrm>
-          <a:prstGeom prst="rect">
-            <a:avLst/>
-          </a:prstGeom>
-          <a:noFill/>
-        </p:spPr>
-        <p:txBody>
-          <a:bodyPr wrap="square" lIns="0" rIns="0" tIns="0" bIns="0" anchor="t">
-            <a:spAutoFit/>
-          </a:bodyPr>
-          <a:lstStyle/>
-          <a:p>
-            <a:pPr algn="l">
-              <a:lnSpc>
-                <a:spcPts val="2422"/>
-              </a:lnSpc>
-            </a:pPr>
-            <a:r>
-              <a:rPr b="1" sz="1275" i="0" u="none">
-                <a:solidFill>
-                  <a:srgbClr val="334155"/>
-                </a:solidFill>
-                <a:latin typeface="Noto Sans KR"/>
-              </a:rPr>
-              <a:t>MES 전용 Tool:</a:t>
-            </a:r>
-            <a:r>
-              <a:rPr b="0" sz="1275" i="0" u="none">
-                <a:solidFill>
-                  <a:srgbClr val="334155"/>
-                </a:solidFill>
-                <a:latin typeface="Noto Sans KR"/>
-              </a:rPr>
-              <a:t> WO/LOT/설비/Log 추출</a:t>
-            </a:r>
-          </a:p>
-        </p:txBody>
-      </p:sp>
-      <p:sp>
-        <p:nvSpPr>
-          <p:cNvPr id="20" name="TextBox 19"/>
-          <p:cNvSpPr txBox="1"/>
-          <p:nvPr/>
-        </p:nvSpPr>
-        <p:spPr>
-          <a:xfrm>
-            <a:off x="8315325" y="3724721"/>
-            <a:ext cx="3028950" cy="615255"/>
-          </a:xfrm>
-          <a:prstGeom prst="rect">
-            <a:avLst/>
-          </a:prstGeom>
-          <a:noFill/>
-        </p:spPr>
-        <p:txBody>
-          <a:bodyPr wrap="square" lIns="0" rIns="0" tIns="0" bIns="0" anchor="t">
-            <a:spAutoFit/>
-          </a:bodyPr>
-          <a:lstStyle/>
-          <a:p>
-            <a:pPr algn="l">
-              <a:lnSpc>
-                <a:spcPts val="2422"/>
-              </a:lnSpc>
-            </a:pPr>
-            <a:r>
-              <a:rPr b="1" sz="1275" i="0" u="none">
-                <a:solidFill>
-                  <a:srgbClr val="334155"/>
-                </a:solidFill>
-                <a:latin typeface="Noto Sans KR"/>
-              </a:rPr>
-              <a:t>Prompt 파이프라인:</a:t>
-            </a:r>
-            <a:r>
-              <a:rPr b="0" sz="1275" i="0" u="none">
-                <a:solidFill>
-                  <a:srgbClr val="334155"/>
-                </a:solidFill>
-                <a:latin typeface="Noto Sans KR"/>
-              </a:rPr>
-              <a:t> JPA Entity JSON 연동</a:t>
-            </a:r>
-          </a:p>
-        </p:txBody>
-      </p:sp>
-      <p:sp>
-        <p:nvSpPr>
-          <p:cNvPr id="21" name="TextBox 20"/>
-          <p:cNvSpPr txBox="1"/>
-          <p:nvPr/>
-        </p:nvSpPr>
-        <p:spPr>
-          <a:xfrm>
-            <a:off x="8315325" y="4339976"/>
-            <a:ext cx="3028950" cy="615255"/>
-          </a:xfrm>
-          <a:prstGeom prst="rect">
-            <a:avLst/>
-          </a:prstGeom>
-          <a:noFill/>
-        </p:spPr>
-        <p:txBody>
-          <a:bodyPr wrap="square" lIns="0" rIns="0" tIns="0" bIns="0" anchor="t">
-            <a:spAutoFit/>
-          </a:bodyPr>
-          <a:lstStyle/>
-          <a:p>
-            <a:pPr algn="l">
-              <a:lnSpc>
-                <a:spcPts val="2422"/>
-              </a:lnSpc>
-            </a:pPr>
-            <a:r>
-              <a:rPr b="1" sz="1275" i="0" u="none">
-                <a:solidFill>
-                  <a:srgbClr val="334155"/>
-                </a:solidFill>
-                <a:latin typeface="Noto Sans KR"/>
-              </a:rPr>
-              <a:t>LLM 유효성:</a:t>
-            </a:r>
-            <a:r>
-              <a:rPr b="0" sz="1275" i="0" u="none">
-                <a:solidFill>
-                  <a:srgbClr val="334155"/>
-                </a:solidFill>
-                <a:latin typeface="Noto Sans KR"/>
-              </a:rPr>
-              <a:t> 통계 관리 및 프롬프트 고도화</a:t>
-            </a:r>
-          </a:p>
-        </p:txBody>
-      </p:sp>
       <p:pic>
         <p:nvPicPr>
-          <p:cNvPr id="22" name="Picture 21" descr="image.png"/>
+          <p:cNvPr id="21" name="Picture 20" descr="image.png"/>
           <p:cNvPicPr>
             <a:picLocks noChangeAspect="1"/>
           </p:cNvPicPr>
@@ -5306,56 +4719,8 @@
         </p:blipFill>
         <p:spPr>
           <a:xfrm>
-            <a:off x="971401" y="2988468"/>
-            <a:ext cx="133498" cy="171450"/>
-          </a:xfrm>
-          <a:prstGeom prst="rect">
-            <a:avLst/>
-          </a:prstGeom>
-        </p:spPr>
-      </p:pic>
-      <p:pic>
-        <p:nvPicPr>
-          <p:cNvPr id="23" name="Picture 22" descr="image.png"/>
-          <p:cNvPicPr>
-            <a:picLocks noChangeAspect="1"/>
-          </p:cNvPicPr>
-          <p:nvPr/>
-        </p:nvPicPr>
-        <p:blipFill>
-          <a:blip r:embed="rId9"/>
-          <a:stretch>
-            <a:fillRect/>
-          </a:stretch>
-        </p:blipFill>
-        <p:spPr>
-          <a:xfrm>
-            <a:off x="4705201" y="2988468"/>
-            <a:ext cx="133498" cy="171450"/>
-          </a:xfrm>
-          <a:prstGeom prst="rect">
-            <a:avLst/>
-          </a:prstGeom>
-        </p:spPr>
-      </p:pic>
-      <p:pic>
-        <p:nvPicPr>
-          <p:cNvPr id="24" name="Picture 23" descr="image.png"/>
-          <p:cNvPicPr>
-            <a:picLocks noChangeAspect="1"/>
-          </p:cNvPicPr>
-          <p:nvPr/>
-        </p:nvPicPr>
-        <p:blipFill>
-          <a:blip r:embed="rId10"/>
-          <a:stretch>
-            <a:fillRect/>
-          </a:stretch>
-        </p:blipFill>
-        <p:spPr>
-          <a:xfrm>
-            <a:off x="8439001" y="2988468"/>
-            <a:ext cx="133498" cy="171450"/>
+            <a:off x="8538567" y="3133725"/>
+            <a:ext cx="163115" cy="209550"/>
           </a:xfrm>
           <a:prstGeom prst="rect">
             <a:avLst/>
@@ -5418,49 +4783,14 @@
                 </a:solidFill>
                 <a:latin typeface="Noto Sans KR"/>
               </a:rPr>
-              <a:t>DEVELOPMENT STANDARDS</a:t>
-            </a:r>
-          </a:p>
-        </p:txBody>
-      </p:sp>
-      <p:sp>
-        <p:nvSpPr>
-          <p:cNvPr id="3" name="TextBox 2"/>
-          <p:cNvSpPr txBox="1"/>
-          <p:nvPr/>
-        </p:nvSpPr>
-        <p:spPr>
-          <a:xfrm>
-            <a:off x="609600" y="762000"/>
-            <a:ext cx="11521440" cy="419100"/>
-          </a:xfrm>
-          <a:prstGeom prst="rect">
-            <a:avLst/>
-          </a:prstGeom>
-          <a:noFill/>
-        </p:spPr>
-        <p:txBody>
-          <a:bodyPr wrap="square" lIns="0" rIns="0" tIns="0" bIns="0" anchor="t">
-            <a:spAutoFit/>
-          </a:bodyPr>
-          <a:lstStyle/>
-          <a:p>
-            <a:pPr algn="l"/>
-            <a:r>
-              <a:rPr b="1" sz="2400" i="0" u="none">
-                <a:solidFill>
-                  <a:srgbClr val="0F172A"/>
-                </a:solidFill>
-                <a:latin typeface="Noto Sans KR"/>
-              </a:rPr>
-              <a:t>Inhouse 프레임워크 &amp; 개발 안티패턴</a:t>
+              <a:t>DEVELOPMENT PHASE</a:t>
             </a:r>
           </a:p>
         </p:txBody>
       </p:sp>
       <p:pic>
         <p:nvPicPr>
-          <p:cNvPr id="4" name="Picture 3" descr="image.png"/>
+          <p:cNvPr id="3" name="Picture 2" descr="image.png"/>
           <p:cNvPicPr>
             <a:picLocks noChangeAspect="1"/>
           </p:cNvPicPr>
@@ -5474,14 +4804,49 @@
         </p:blipFill>
         <p:spPr>
           <a:xfrm>
-            <a:off x="609600" y="2947987"/>
-            <a:ext cx="3505200" cy="1914525"/>
+            <a:off x="5962650" y="2709862"/>
+            <a:ext cx="5619750" cy="2390775"/>
           </a:xfrm>
           <a:prstGeom prst="rect">
             <a:avLst/>
           </a:prstGeom>
         </p:spPr>
       </p:pic>
+      <p:sp>
+        <p:nvSpPr>
+          <p:cNvPr id="4" name="TextBox 3"/>
+          <p:cNvSpPr txBox="1"/>
+          <p:nvPr/>
+        </p:nvSpPr>
+        <p:spPr>
+          <a:xfrm>
+            <a:off x="609600" y="762000"/>
+            <a:ext cx="11521440" cy="419100"/>
+          </a:xfrm>
+          <a:prstGeom prst="rect">
+            <a:avLst/>
+          </a:prstGeom>
+          <a:noFill/>
+        </p:spPr>
+        <p:txBody>
+          <a:bodyPr wrap="square" lIns="0" rIns="0" tIns="0" bIns="0" anchor="t">
+            <a:spAutoFit/>
+          </a:bodyPr>
+          <a:lstStyle/>
+          <a:p>
+            <a:pPr algn="l"/>
+            <a:r>
+              <a:rPr b="0" sz="2400" i="0" u="none">
+                <a:solidFill>
+                  <a:srgbClr val="0F172A"/>
+                </a:solidFill>
+                <a:latin typeface="Noto Sans KR ExtraBold"/>
+              </a:rPr>
+              <a:t>개발 단계: 바이브 코딩 표준 및 안티패턴 관리</a:t>
+            </a:r>
+          </a:p>
+        </p:txBody>
+      </p:sp>
       <p:pic>
         <p:nvPicPr>
           <p:cNvPr id="5" name="Picture 4" descr="image.png"/>
@@ -5491,15 +4856,15 @@
           <p:nvPr/>
         </p:nvPicPr>
         <p:blipFill>
-          <a:blip r:embed="rId2"/>
+          <a:blip r:embed="rId3"/>
           <a:stretch>
             <a:fillRect/>
           </a:stretch>
         </p:blipFill>
         <p:spPr>
           <a:xfrm>
-            <a:off x="4343400" y="2947987"/>
-            <a:ext cx="3505200" cy="1914525"/>
+            <a:off x="609600" y="2028825"/>
+            <a:ext cx="5010150" cy="1123950"/>
           </a:xfrm>
           <a:prstGeom prst="rect">
             <a:avLst/>
@@ -5522,8 +4887,8 @@
         </p:blipFill>
         <p:spPr>
           <a:xfrm>
-            <a:off x="8077200" y="2947987"/>
-            <a:ext cx="3505200" cy="1914525"/>
+            <a:off x="609600" y="3343275"/>
+            <a:ext cx="5010150" cy="1123950"/>
           </a:xfrm>
           <a:prstGeom prst="rect">
             <a:avLst/>
@@ -5539,15 +4904,15 @@
           <p:nvPr/>
         </p:nvPicPr>
         <p:blipFill>
-          <a:blip r:embed="rId4"/>
+          <a:blip r:embed="rId3"/>
           <a:stretch>
             <a:fillRect/>
           </a:stretch>
         </p:blipFill>
         <p:spPr>
           <a:xfrm>
-            <a:off x="847725" y="3224212"/>
-            <a:ext cx="419100" cy="419100"/>
+            <a:off x="609600" y="4657725"/>
+            <a:ext cx="5010150" cy="1123950"/>
           </a:xfrm>
           <a:prstGeom prst="rect">
             <a:avLst/>
@@ -5563,45 +4928,56 @@
           <p:nvPr/>
         </p:nvPicPr>
         <p:blipFill>
-          <a:blip r:embed="rId5"/>
+          <a:blip r:embed="rId4"/>
           <a:stretch>
             <a:fillRect/>
           </a:stretch>
         </p:blipFill>
         <p:spPr>
           <a:xfrm>
-            <a:off x="4581525" y="3224212"/>
-            <a:ext cx="419100" cy="419100"/>
+            <a:off x="6267450" y="3048000"/>
+            <a:ext cx="148232" cy="190500"/>
           </a:xfrm>
           <a:prstGeom prst="rect">
             <a:avLst/>
           </a:prstGeom>
         </p:spPr>
       </p:pic>
-      <p:pic>
-        <p:nvPicPr>
-          <p:cNvPr id="9" name="Picture 8" descr="image.png"/>
-          <p:cNvPicPr>
-            <a:picLocks noChangeAspect="1"/>
-          </p:cNvPicPr>
-          <p:nvPr/>
-        </p:nvPicPr>
-        <p:blipFill>
-          <a:blip r:embed="rId6"/>
-          <a:stretch>
-            <a:fillRect/>
-          </a:stretch>
-        </p:blipFill>
-        <p:spPr>
-          <a:xfrm>
-            <a:off x="8315325" y="3224212"/>
-            <a:ext cx="419100" cy="419100"/>
-          </a:xfrm>
-          <a:prstGeom prst="rect">
-            <a:avLst/>
-          </a:prstGeom>
-        </p:spPr>
-      </p:pic>
+      <p:sp>
+        <p:nvSpPr>
+          <p:cNvPr id="9" name="TextBox 8"/>
+          <p:cNvSpPr txBox="1"/>
+          <p:nvPr/>
+        </p:nvSpPr>
+        <p:spPr>
+          <a:xfrm>
+            <a:off x="876300" y="2219325"/>
+            <a:ext cx="4740592" cy="228600"/>
+          </a:xfrm>
+          <a:prstGeom prst="rect">
+            <a:avLst/>
+          </a:prstGeom>
+          <a:noFill/>
+        </p:spPr>
+        <p:txBody>
+          <a:bodyPr wrap="square" lIns="0" rIns="0" tIns="0" bIns="0" anchor="t">
+            <a:spAutoFit/>
+          </a:bodyPr>
+          <a:lstStyle/>
+          <a:p>
+            <a:pPr algn="l"/>
+            <a:r>
+              <a:rPr b="1" sz="1350" i="0" u="none">
+                <a:solidFill>
+                  <a:srgbClr val="0F172A"/>
+                </a:solidFill>
+                <a:latin typeface="Noto Sans KR"/>
+              </a:rPr>
+              <a:t>Spring 구조적 동일성 확보</a:t>
+            </a:r>
+          </a:p>
+        </p:txBody>
+      </p:sp>
       <p:sp>
         <p:nvSpPr>
           <p:cNvPr id="10" name="TextBox 9"/>
@@ -5610,8 +4986,8 @@
         </p:nvSpPr>
         <p:spPr>
           <a:xfrm>
-            <a:off x="847725" y="3795712"/>
-            <a:ext cx="3180397" cy="257175"/>
+            <a:off x="876300" y="2505075"/>
+            <a:ext cx="4514850" cy="457200"/>
           </a:xfrm>
           <a:prstGeom prst="rect">
             <a:avLst/>
@@ -5626,264 +5002,336 @@
           <a:p>
             <a:pPr algn="l"/>
             <a:r>
+              <a:rPr b="0" sz="1350" i="0" u="none">
+                <a:solidFill>
+                  <a:srgbClr val="334155"/>
+                </a:solidFill>
+                <a:latin typeface="Noto Sans KR"/>
+              </a:rPr>
+              <a:t>Inhouse 프레임워크 구조 일치로 AI 동작 정확도 향상 및 토큰 소모 최소화.</a:t>
+            </a:r>
+          </a:p>
+        </p:txBody>
+      </p:sp>
+      <p:sp>
+        <p:nvSpPr>
+          <p:cNvPr id="11" name="TextBox 10"/>
+          <p:cNvSpPr txBox="1"/>
+          <p:nvPr/>
+        </p:nvSpPr>
+        <p:spPr>
+          <a:xfrm>
+            <a:off x="876300" y="3533775"/>
+            <a:ext cx="4740592" cy="228600"/>
+          </a:xfrm>
+          <a:prstGeom prst="rect">
+            <a:avLst/>
+          </a:prstGeom>
+          <a:noFill/>
+        </p:spPr>
+        <p:txBody>
+          <a:bodyPr wrap="square" lIns="0" rIns="0" tIns="0" bIns="0" anchor="t">
+            <a:spAutoFit/>
+          </a:bodyPr>
+          <a:lstStyle/>
+          <a:p>
+            <a:pPr algn="l"/>
+            <a:r>
+              <a:rPr b="1" sz="1350" i="0" u="none">
+                <a:solidFill>
+                  <a:srgbClr val="0F172A"/>
+                </a:solidFill>
+                <a:latin typeface="Noto Sans KR"/>
+              </a:rPr>
+              <a:t>컨벤션 &amp; 안티패턴 정의</a:t>
+            </a:r>
+          </a:p>
+        </p:txBody>
+      </p:sp>
+      <p:sp>
+        <p:nvSpPr>
+          <p:cNvPr id="12" name="TextBox 11"/>
+          <p:cNvSpPr txBox="1"/>
+          <p:nvPr/>
+        </p:nvSpPr>
+        <p:spPr>
+          <a:xfrm>
+            <a:off x="876300" y="3819525"/>
+            <a:ext cx="4514850" cy="457200"/>
+          </a:xfrm>
+          <a:prstGeom prst="rect">
+            <a:avLst/>
+          </a:prstGeom>
+          <a:noFill/>
+        </p:spPr>
+        <p:txBody>
+          <a:bodyPr wrap="square" lIns="0" rIns="0" tIns="0" bIns="0" anchor="t">
+            <a:spAutoFit/>
+          </a:bodyPr>
+          <a:lstStyle/>
+          <a:p>
+            <a:pPr algn="l"/>
+            <a:r>
+              <a:rPr b="0" sz="1350" i="0" u="none">
+                <a:solidFill>
+                  <a:srgbClr val="334155"/>
+                </a:solidFill>
+                <a:latin typeface="Noto Sans KR"/>
+              </a:rPr>
+              <a:t>비즈니스 룰 기반 코딩 규범 명시 및 리소스 생성 시 금지 규칙 정립.</a:t>
+            </a:r>
+          </a:p>
+        </p:txBody>
+      </p:sp>
+      <p:sp>
+        <p:nvSpPr>
+          <p:cNvPr id="13" name="TextBox 12"/>
+          <p:cNvSpPr txBox="1"/>
+          <p:nvPr/>
+        </p:nvSpPr>
+        <p:spPr>
+          <a:xfrm>
+            <a:off x="876300" y="4848225"/>
+            <a:ext cx="4740592" cy="228600"/>
+          </a:xfrm>
+          <a:prstGeom prst="rect">
+            <a:avLst/>
+          </a:prstGeom>
+          <a:noFill/>
+        </p:spPr>
+        <p:txBody>
+          <a:bodyPr wrap="square" lIns="0" rIns="0" tIns="0" bIns="0" anchor="t">
+            <a:spAutoFit/>
+          </a:bodyPr>
+          <a:lstStyle/>
+          <a:p>
+            <a:pPr algn="l"/>
+            <a:r>
+              <a:rPr b="1" sz="1350" i="0" u="none">
+                <a:solidFill>
+                  <a:srgbClr val="0F172A"/>
+                </a:solidFill>
+                <a:latin typeface="Noto Sans KR"/>
+              </a:rPr>
+              <a:t>3대 설계서 표준 양식화</a:t>
+            </a:r>
+          </a:p>
+        </p:txBody>
+      </p:sp>
+      <p:sp>
+        <p:nvSpPr>
+          <p:cNvPr id="14" name="TextBox 13"/>
+          <p:cNvSpPr txBox="1"/>
+          <p:nvPr/>
+        </p:nvSpPr>
+        <p:spPr>
+          <a:xfrm>
+            <a:off x="876300" y="5133975"/>
+            <a:ext cx="4514850" cy="457200"/>
+          </a:xfrm>
+          <a:prstGeom prst="rect">
+            <a:avLst/>
+          </a:prstGeom>
+          <a:noFill/>
+        </p:spPr>
+        <p:txBody>
+          <a:bodyPr wrap="square" lIns="0" rIns="0" tIns="0" bIns="0" anchor="t">
+            <a:spAutoFit/>
+          </a:bodyPr>
+          <a:lstStyle/>
+          <a:p>
+            <a:pPr algn="l"/>
+            <a:r>
+              <a:rPr b="0" sz="1350" i="0" u="none">
+                <a:solidFill>
+                  <a:srgbClr val="334155"/>
+                </a:solidFill>
+                <a:latin typeface="Noto Sans KR"/>
+              </a:rPr>
+              <a:t>프론트엔드·백엔드·인터페이스 통신 스펙을 표준 규격으로 사전 정의.</a:t>
+            </a:r>
+          </a:p>
+        </p:txBody>
+      </p:sp>
+      <p:sp>
+        <p:nvSpPr>
+          <p:cNvPr id="15" name="TextBox 14"/>
+          <p:cNvSpPr txBox="1"/>
+          <p:nvPr/>
+        </p:nvSpPr>
+        <p:spPr>
+          <a:xfrm>
+            <a:off x="6510932" y="3014662"/>
+            <a:ext cx="2222621" cy="257175"/>
+          </a:xfrm>
+          <a:prstGeom prst="rect">
+            <a:avLst/>
+          </a:prstGeom>
+          <a:noFill/>
+        </p:spPr>
+        <p:txBody>
+          <a:bodyPr wrap="square" lIns="0" rIns="0" tIns="0" bIns="0" anchor="t">
+            <a:spAutoFit/>
+          </a:bodyPr>
+          <a:lstStyle/>
+          <a:p>
+            <a:pPr algn="l"/>
+            <a:r>
               <a:rPr b="1" sz="1500" i="0" u="none">
                 <a:solidFill>
-                  <a:srgbClr val="0F172A"/>
+                  <a:srgbClr val="FFFFFF"/>
                 </a:solidFill>
                 <a:latin typeface="Noto Sans KR"/>
               </a:rPr>
-              <a:t>Spring 동질성 확보</a:t>
-            </a:r>
-          </a:p>
-        </p:txBody>
-      </p:sp>
-      <p:sp>
-        <p:nvSpPr>
-          <p:cNvPr id="11" name="TextBox 10"/>
-          <p:cNvSpPr txBox="1"/>
-          <p:nvPr/>
-        </p:nvSpPr>
-        <p:spPr>
-          <a:xfrm>
-            <a:off x="847725" y="4129087"/>
-            <a:ext cx="3028950" cy="228600"/>
-          </a:xfrm>
-          <a:prstGeom prst="rect">
-            <a:avLst/>
-          </a:prstGeom>
-          <a:noFill/>
-        </p:spPr>
-        <p:txBody>
-          <a:bodyPr wrap="square" lIns="0" rIns="0" tIns="0" bIns="0" anchor="t">
-            <a:spAutoFit/>
-          </a:bodyPr>
-          <a:lstStyle/>
-          <a:p>
-            <a:pPr algn="l"/>
+              <a:t>AI 정확도 제어 핵심 원칙</a:t>
+            </a:r>
+          </a:p>
+        </p:txBody>
+      </p:sp>
+      <p:sp>
+        <p:nvSpPr>
+          <p:cNvPr id="16" name="TextBox 15"/>
+          <p:cNvSpPr txBox="1"/>
+          <p:nvPr/>
+        </p:nvSpPr>
+        <p:spPr>
+          <a:xfrm>
+            <a:off x="6267450" y="3462337"/>
+            <a:ext cx="5010150" cy="514350"/>
+          </a:xfrm>
+          <a:prstGeom prst="rect">
+            <a:avLst/>
+          </a:prstGeom>
+          <a:noFill/>
+        </p:spPr>
+        <p:txBody>
+          <a:bodyPr wrap="square" lIns="0" rIns="0" tIns="0" bIns="0" anchor="t">
+            <a:spAutoFit/>
+          </a:bodyPr>
+          <a:lstStyle/>
+          <a:p>
+            <a:pPr algn="l">
+              <a:lnSpc>
+                <a:spcPts val="2025"/>
+              </a:lnSpc>
+            </a:pPr>
+            <a:r>
+              <a:rPr b="1" sz="1350" i="0" u="none">
+                <a:solidFill>
+                  <a:srgbClr val="38BDF8"/>
+                </a:solidFill>
+                <a:latin typeface="Noto Sans KR"/>
+              </a:rPr>
+              <a:t>구조적 유사성:</a:t>
+            </a:r>
             <a:r>
               <a:rPr b="0" sz="1350" i="0" u="none">
                 <a:solidFill>
-                  <a:srgbClr val="475569"/>
+                  <a:srgbClr val="CBD5E1"/>
                 </a:solidFill>
                 <a:latin typeface="Noto Sans KR"/>
               </a:rPr>
-              <a:t>AI 정확도 급상승 및 토큰 소모 최적화</a:t>
-            </a:r>
-          </a:p>
-        </p:txBody>
-      </p:sp>
-      <p:sp>
-        <p:nvSpPr>
-          <p:cNvPr id="12" name="TextBox 11"/>
-          <p:cNvSpPr txBox="1"/>
-          <p:nvPr/>
-        </p:nvSpPr>
-        <p:spPr>
-          <a:xfrm>
-            <a:off x="4581525" y="3795712"/>
-            <a:ext cx="3180397" cy="257175"/>
-          </a:xfrm>
-          <a:prstGeom prst="rect">
-            <a:avLst/>
-          </a:prstGeom>
-          <a:noFill/>
-        </p:spPr>
-        <p:txBody>
-          <a:bodyPr wrap="square" lIns="0" rIns="0" tIns="0" bIns="0" anchor="t">
-            <a:spAutoFit/>
-          </a:bodyPr>
-          <a:lstStyle/>
-          <a:p>
-            <a:pPr algn="l"/>
-            <a:r>
-              <a:rPr b="1" sz="1500" i="0" u="none">
-                <a:solidFill>
-                  <a:srgbClr val="0F172A"/>
+              <a:t> 프레임워크 유사도가 낮을수록 AI 할루시네이션 급증.</a:t>
+            </a:r>
+          </a:p>
+        </p:txBody>
+      </p:sp>
+      <p:sp>
+        <p:nvSpPr>
+          <p:cNvPr id="17" name="TextBox 16"/>
+          <p:cNvSpPr txBox="1"/>
+          <p:nvPr/>
+        </p:nvSpPr>
+        <p:spPr>
+          <a:xfrm>
+            <a:off x="6267450" y="4129087"/>
+            <a:ext cx="5010150" cy="257175"/>
+          </a:xfrm>
+          <a:prstGeom prst="rect">
+            <a:avLst/>
+          </a:prstGeom>
+          <a:noFill/>
+        </p:spPr>
+        <p:txBody>
+          <a:bodyPr wrap="square" lIns="0" rIns="0" tIns="0" bIns="0" anchor="t">
+            <a:spAutoFit/>
+          </a:bodyPr>
+          <a:lstStyle/>
+          <a:p>
+            <a:pPr algn="l">
+              <a:lnSpc>
+                <a:spcPts val="2025"/>
+              </a:lnSpc>
+            </a:pPr>
+            <a:r>
+              <a:rPr b="1" sz="1350" i="0" u="none">
+                <a:solidFill>
+                  <a:srgbClr val="38BDF8"/>
                 </a:solidFill>
                 <a:latin typeface="Noto Sans KR"/>
               </a:rPr>
-              <a:t>코딩 컨벤션 정의</a:t>
-            </a:r>
-          </a:p>
-        </p:txBody>
-      </p:sp>
-      <p:sp>
-        <p:nvSpPr>
-          <p:cNvPr id="13" name="TextBox 12"/>
-          <p:cNvSpPr txBox="1"/>
-          <p:nvPr/>
-        </p:nvSpPr>
-        <p:spPr>
-          <a:xfrm>
-            <a:off x="4581525" y="4129087"/>
-            <a:ext cx="3028950" cy="228600"/>
-          </a:xfrm>
-          <a:prstGeom prst="rect">
-            <a:avLst/>
-          </a:prstGeom>
-          <a:noFill/>
-        </p:spPr>
-        <p:txBody>
-          <a:bodyPr wrap="square" lIns="0" rIns="0" tIns="0" bIns="0" anchor="t">
-            <a:spAutoFit/>
-          </a:bodyPr>
-          <a:lstStyle/>
-          <a:p>
-            <a:pPr algn="l"/>
+              <a:t>명확한 컨벤션:</a:t>
+            </a:r>
             <a:r>
               <a:rPr b="0" sz="1350" i="0" u="none">
                 <a:solidFill>
-                  <a:srgbClr val="475569"/>
+                  <a:srgbClr val="CBD5E1"/>
                 </a:solidFill>
                 <a:latin typeface="Noto Sans KR"/>
               </a:rPr>
-              <a:t>언어·라이브러리 및 비즈니스 룰 규격화</a:t>
-            </a:r>
-          </a:p>
-        </p:txBody>
-      </p:sp>
-      <p:sp>
-        <p:nvSpPr>
-          <p:cNvPr id="14" name="TextBox 13"/>
-          <p:cNvSpPr txBox="1"/>
-          <p:nvPr/>
-        </p:nvSpPr>
-        <p:spPr>
-          <a:xfrm>
-            <a:off x="8315325" y="3795712"/>
-            <a:ext cx="3180397" cy="257175"/>
-          </a:xfrm>
-          <a:prstGeom prst="rect">
-            <a:avLst/>
-          </a:prstGeom>
-          <a:noFill/>
-        </p:spPr>
-        <p:txBody>
-          <a:bodyPr wrap="square" lIns="0" rIns="0" tIns="0" bIns="0" anchor="t">
-            <a:spAutoFit/>
-          </a:bodyPr>
-          <a:lstStyle/>
-          <a:p>
-            <a:pPr algn="l"/>
-            <a:r>
-              <a:rPr b="1" sz="1500" i="0" u="none">
-                <a:solidFill>
-                  <a:srgbClr val="9F1239"/>
+              <a:t> 라이브러리 사용 가이드로 불필요한 재작성 방지.</a:t>
+            </a:r>
+          </a:p>
+        </p:txBody>
+      </p:sp>
+      <p:sp>
+        <p:nvSpPr>
+          <p:cNvPr id="18" name="TextBox 17"/>
+          <p:cNvSpPr txBox="1"/>
+          <p:nvPr/>
+        </p:nvSpPr>
+        <p:spPr>
+          <a:xfrm>
+            <a:off x="6267450" y="4538662"/>
+            <a:ext cx="5010150" cy="257175"/>
+          </a:xfrm>
+          <a:prstGeom prst="rect">
+            <a:avLst/>
+          </a:prstGeom>
+          <a:noFill/>
+        </p:spPr>
+        <p:txBody>
+          <a:bodyPr wrap="square" lIns="0" rIns="0" tIns="0" bIns="0" anchor="t">
+            <a:spAutoFit/>
+          </a:bodyPr>
+          <a:lstStyle/>
+          <a:p>
+            <a:pPr algn="l">
+              <a:lnSpc>
+                <a:spcPts val="2025"/>
+              </a:lnSpc>
+            </a:pPr>
+            <a:r>
+              <a:rPr b="1" sz="1350" i="0" u="none">
+                <a:solidFill>
+                  <a:srgbClr val="38BDF8"/>
                 </a:solidFill>
                 <a:latin typeface="Noto Sans KR"/>
               </a:rPr>
-              <a:t>안티패턴 목록 통제</a:t>
-            </a:r>
-          </a:p>
-        </p:txBody>
-      </p:sp>
-      <p:sp>
-        <p:nvSpPr>
-          <p:cNvPr id="15" name="TextBox 14"/>
-          <p:cNvSpPr txBox="1"/>
-          <p:nvPr/>
-        </p:nvSpPr>
-        <p:spPr>
-          <a:xfrm>
-            <a:off x="8315325" y="4129087"/>
-            <a:ext cx="3028950" cy="457200"/>
-          </a:xfrm>
-          <a:prstGeom prst="rect">
-            <a:avLst/>
-          </a:prstGeom>
-          <a:noFill/>
-        </p:spPr>
-        <p:txBody>
-          <a:bodyPr wrap="square" lIns="0" rIns="0" tIns="0" bIns="0" anchor="t">
-            <a:spAutoFit/>
-          </a:bodyPr>
-          <a:lstStyle/>
-          <a:p>
-            <a:pPr algn="l"/>
+              <a:t>양식 표준화:</a:t>
+            </a:r>
             <a:r>
               <a:rPr b="0" sz="1350" i="0" u="none">
                 <a:solidFill>
-                  <a:srgbClr val="4C0519"/>
+                  <a:srgbClr val="CBD5E1"/>
                 </a:solidFill>
                 <a:latin typeface="Noto Sans KR"/>
               </a:rPr>
-              <a:t>라이브러리 오용 및 리소스 남발 자동 차단</a:t>
-            </a:r>
-          </a:p>
-        </p:txBody>
-      </p:sp>
-      <p:pic>
-        <p:nvPicPr>
-          <p:cNvPr id="16" name="Picture 15" descr="image.png"/>
-          <p:cNvPicPr>
-            <a:picLocks noChangeAspect="1"/>
-          </p:cNvPicPr>
-          <p:nvPr/>
-        </p:nvPicPr>
-        <p:blipFill>
-          <a:blip r:embed="rId7"/>
-          <a:stretch>
-            <a:fillRect/>
-          </a:stretch>
-        </p:blipFill>
-        <p:spPr>
-          <a:xfrm>
-            <a:off x="983158" y="3338512"/>
-            <a:ext cx="148232" cy="190500"/>
-          </a:xfrm>
-          <a:prstGeom prst="rect">
-            <a:avLst/>
-          </a:prstGeom>
-        </p:spPr>
-      </p:pic>
-      <p:pic>
-        <p:nvPicPr>
-          <p:cNvPr id="17" name="Picture 16" descr="image.png"/>
-          <p:cNvPicPr>
-            <a:picLocks noChangeAspect="1"/>
-          </p:cNvPicPr>
-          <p:nvPr/>
-        </p:nvPicPr>
-        <p:blipFill>
-          <a:blip r:embed="rId8"/>
-          <a:stretch>
-            <a:fillRect/>
-          </a:stretch>
-        </p:blipFill>
-        <p:spPr>
-          <a:xfrm>
-            <a:off x="4716958" y="3338512"/>
-            <a:ext cx="148232" cy="190500"/>
-          </a:xfrm>
-          <a:prstGeom prst="rect">
-            <a:avLst/>
-          </a:prstGeom>
-        </p:spPr>
-      </p:pic>
-      <p:pic>
-        <p:nvPicPr>
-          <p:cNvPr id="18" name="Picture 17" descr="image.png"/>
-          <p:cNvPicPr>
-            <a:picLocks noChangeAspect="1"/>
-          </p:cNvPicPr>
-          <p:nvPr/>
-        </p:nvPicPr>
-        <p:blipFill>
-          <a:blip r:embed="rId9"/>
-          <a:stretch>
-            <a:fillRect/>
-          </a:stretch>
-        </p:blipFill>
-        <p:spPr>
-          <a:xfrm>
-            <a:off x="8450758" y="3338512"/>
-            <a:ext cx="148232" cy="190500"/>
-          </a:xfrm>
-          <a:prstGeom prst="rect">
-            <a:avLst/>
-          </a:prstGeom>
-        </p:spPr>
-      </p:pic>
+              <a:t> 설비·타 시스템 인터페이스 스펙 자동 생성 유도.</a:t>
+            </a:r>
+          </a:p>
+        </p:txBody>
+      </p:sp>
     </p:spTree>
   </p:cSld>
   <p:clrMapOvr>
@@ -5898,7 +5346,7 @@
     <p:bg>
       <p:bgPr>
         <a:solidFill>
-          <a:srgbClr val="FFFFFF"/>
+          <a:srgbClr val="F8FAFC"/>
         </a:solidFill>
         <a:effectLst/>
       </p:bgPr>
@@ -5940,7 +5388,7 @@
                 </a:solidFill>
                 <a:latin typeface="Noto Sans KR"/>
               </a:rPr>
-              <a:t>DOCUMENTATION &amp; GOVERNANCE</a:t>
+              <a:t>QUALITY CONTROL</a:t>
             </a:r>
           </a:p>
         </p:txBody>
@@ -5969,13 +5417,13 @@
           <a:p>
             <a:pPr algn="l"/>
             <a:r>
-              <a:rPr b="1" sz="2400" i="0" u="none">
+              <a:rPr b="0" sz="2400" i="0" u="none">
                 <a:solidFill>
                   <a:srgbClr val="0F172A"/>
                 </a:solidFill>
-                <a:latin typeface="Noto Sans KR"/>
-              </a:rPr>
-              <a:t>설계서 정형화 및 Git 브랜치 전략</a:t>
+                <a:latin typeface="Noto Sans KR ExtraBold"/>
+              </a:rPr>
+              <a:t>형상 관리 브랜치 전략 및 안전 배포 파이프라인</a:t>
             </a:r>
           </a:p>
         </p:txBody>
@@ -5996,8 +5444,8 @@
         </p:blipFill>
         <p:spPr>
           <a:xfrm>
-            <a:off x="609600" y="2866132"/>
-            <a:ext cx="5353050" cy="2078087"/>
+            <a:off x="609600" y="3000375"/>
+            <a:ext cx="2628900" cy="1809750"/>
           </a:xfrm>
           <a:prstGeom prst="rect">
             <a:avLst/>
@@ -6013,6 +5461,30 @@
           <p:nvPr/>
         </p:nvPicPr>
         <p:blipFill>
+          <a:blip r:embed="rId2"/>
+          <a:stretch>
+            <a:fillRect/>
+          </a:stretch>
+        </p:blipFill>
+        <p:spPr>
+          <a:xfrm>
+            <a:off x="3390900" y="3000375"/>
+            <a:ext cx="2628900" cy="1809750"/>
+          </a:xfrm>
+          <a:prstGeom prst="rect">
+            <a:avLst/>
+          </a:prstGeom>
+        </p:spPr>
+      </p:pic>
+      <p:pic>
+        <p:nvPicPr>
+          <p:cNvPr id="6" name="Picture 5" descr="image.png"/>
+          <p:cNvPicPr>
+            <a:picLocks noChangeAspect="1"/>
+          </p:cNvPicPr>
+          <p:nvPr/>
+        </p:nvPicPr>
+        <p:blipFill>
           <a:blip r:embed="rId3"/>
           <a:stretch>
             <a:fillRect/>
@@ -6020,84 +5492,38 @@
         </p:blipFill>
         <p:spPr>
           <a:xfrm>
-            <a:off x="6229350" y="2866132"/>
-            <a:ext cx="5353050" cy="2078087"/>
+            <a:off x="6172200" y="3000375"/>
+            <a:ext cx="2628900" cy="1809750"/>
           </a:xfrm>
           <a:prstGeom prst="rect">
             <a:avLst/>
           </a:prstGeom>
         </p:spPr>
       </p:pic>
-      <p:sp>
-        <p:nvSpPr>
-          <p:cNvPr id="6" name="TextBox 5"/>
-          <p:cNvSpPr txBox="1"/>
-          <p:nvPr/>
-        </p:nvSpPr>
-        <p:spPr>
-          <a:xfrm>
-            <a:off x="885825" y="3142357"/>
-            <a:ext cx="5040630" cy="257175"/>
-          </a:xfrm>
-          <a:prstGeom prst="rect">
-            <a:avLst/>
-          </a:prstGeom>
-          <a:noFill/>
-        </p:spPr>
-        <p:txBody>
-          <a:bodyPr wrap="square" lIns="224432" rIns="0" tIns="0" bIns="0" anchor="t">
-            <a:spAutoFit/>
-          </a:bodyPr>
-          <a:lstStyle/>
-          <a:p>
-            <a:pPr algn="l"/>
-            <a:r>
-              <a:rPr b="1" sz="1500" i="0" u="none">
-                <a:solidFill>
-                  <a:srgbClr val="0F172A"/>
-                </a:solidFill>
-                <a:latin typeface="Noto Sans KR"/>
-              </a:rPr>
-              <a:t>정형화 설계서 3종</a:t>
-            </a:r>
-          </a:p>
-        </p:txBody>
-      </p:sp>
-      <p:sp>
-        <p:nvSpPr>
-          <p:cNvPr id="7" name="TextBox 6"/>
-          <p:cNvSpPr txBox="1"/>
-          <p:nvPr/>
-        </p:nvSpPr>
-        <p:spPr>
-          <a:xfrm>
-            <a:off x="6505575" y="3142357"/>
-            <a:ext cx="5040630" cy="257175"/>
-          </a:xfrm>
-          <a:prstGeom prst="rect">
-            <a:avLst/>
-          </a:prstGeom>
-          <a:noFill/>
-        </p:spPr>
-        <p:txBody>
-          <a:bodyPr wrap="square" lIns="224432" rIns="0" tIns="0" bIns="0" anchor="t">
-            <a:spAutoFit/>
-          </a:bodyPr>
-          <a:lstStyle/>
-          <a:p>
-            <a:pPr algn="l"/>
-            <a:r>
-              <a:rPr b="1" sz="1500" i="0" u="none">
-                <a:solidFill>
-                  <a:srgbClr val="0F172A"/>
-                </a:solidFill>
-                <a:latin typeface="Noto Sans KR"/>
-              </a:rPr>
-              <a:t>Git 저장소 &amp; Agent Commit</a:t>
-            </a:r>
-          </a:p>
-        </p:txBody>
-      </p:sp>
+      <p:pic>
+        <p:nvPicPr>
+          <p:cNvPr id="7" name="Picture 6" descr="image.png"/>
+          <p:cNvPicPr>
+            <a:picLocks noChangeAspect="1"/>
+          </p:cNvPicPr>
+          <p:nvPr/>
+        </p:nvPicPr>
+        <p:blipFill>
+          <a:blip r:embed="rId2"/>
+          <a:stretch>
+            <a:fillRect/>
+          </a:stretch>
+        </p:blipFill>
+        <p:spPr>
+          <a:xfrm>
+            <a:off x="8953500" y="3000375"/>
+            <a:ext cx="2628900" cy="1809750"/>
+          </a:xfrm>
+          <a:prstGeom prst="rect">
+            <a:avLst/>
+          </a:prstGeom>
+        </p:spPr>
+      </p:pic>
       <p:pic>
         <p:nvPicPr>
           <p:cNvPr id="8" name="Picture 7" descr="image.png"/>
@@ -6114,8 +5540,8 @@
         </p:blipFill>
         <p:spPr>
           <a:xfrm>
-            <a:off x="885825" y="3170932"/>
-            <a:ext cx="148232" cy="190500"/>
+            <a:off x="847725" y="3238500"/>
+            <a:ext cx="721816" cy="228600"/>
           </a:xfrm>
           <a:prstGeom prst="rect">
             <a:avLst/>
@@ -6138,298 +5564,338 @@
         </p:blipFill>
         <p:spPr>
           <a:xfrm>
-            <a:off x="6505575" y="3170932"/>
-            <a:ext cx="148232" cy="190500"/>
+            <a:off x="3629025" y="3238500"/>
+            <a:ext cx="721816" cy="228600"/>
           </a:xfrm>
           <a:prstGeom prst="rect">
             <a:avLst/>
           </a:prstGeom>
         </p:spPr>
       </p:pic>
-      <p:sp>
-        <p:nvSpPr>
-          <p:cNvPr id="10" name="TextBox 9"/>
-          <p:cNvSpPr txBox="1"/>
-          <p:nvPr/>
-        </p:nvSpPr>
-        <p:spPr>
-          <a:xfrm>
-            <a:off x="885825" y="3551932"/>
-            <a:ext cx="4800600" cy="308520"/>
-          </a:xfrm>
-          <a:prstGeom prst="rect">
-            <a:avLst/>
-          </a:prstGeom>
-          <a:noFill/>
-        </p:spPr>
-        <p:txBody>
-          <a:bodyPr wrap="square" lIns="0" rIns="0" tIns="0" bIns="0" anchor="t">
-            <a:spAutoFit/>
-          </a:bodyPr>
-          <a:lstStyle/>
-          <a:p>
-            <a:pPr algn="l">
-              <a:lnSpc>
-                <a:spcPts val="2429"/>
-              </a:lnSpc>
-            </a:pPr>
+      <p:pic>
+        <p:nvPicPr>
+          <p:cNvPr id="10" name="Picture 9" descr="image.png"/>
+          <p:cNvPicPr>
+            <a:picLocks noChangeAspect="1"/>
+          </p:cNvPicPr>
+          <p:nvPr/>
+        </p:nvPicPr>
+        <p:blipFill>
+          <a:blip r:embed="rId6"/>
+          <a:stretch>
+            <a:fillRect/>
+          </a:stretch>
+        </p:blipFill>
+        <p:spPr>
+          <a:xfrm>
+            <a:off x="6410325" y="3238500"/>
+            <a:ext cx="721816" cy="228600"/>
+          </a:xfrm>
+          <a:prstGeom prst="rect">
+            <a:avLst/>
+          </a:prstGeom>
+        </p:spPr>
+      </p:pic>
+      <p:pic>
+        <p:nvPicPr>
+          <p:cNvPr id="11" name="Picture 10" descr="image.png"/>
+          <p:cNvPicPr>
+            <a:picLocks noChangeAspect="1"/>
+          </p:cNvPicPr>
+          <p:nvPr/>
+        </p:nvPicPr>
+        <p:blipFill>
+          <a:blip r:embed="rId7"/>
+          <a:stretch>
+            <a:fillRect/>
+          </a:stretch>
+        </p:blipFill>
+        <p:spPr>
+          <a:xfrm>
+            <a:off x="9191625" y="3238500"/>
+            <a:ext cx="721816" cy="228600"/>
+          </a:xfrm>
+          <a:prstGeom prst="rect">
+            <a:avLst/>
+          </a:prstGeom>
+        </p:spPr>
+      </p:pic>
+      <p:sp>
+        <p:nvSpPr>
+          <p:cNvPr id="12" name="TextBox 11"/>
+          <p:cNvSpPr txBox="1"/>
+          <p:nvPr/>
+        </p:nvSpPr>
+        <p:spPr>
+          <a:xfrm>
+            <a:off x="847725" y="3581400"/>
+            <a:ext cx="2260282" cy="228600"/>
+          </a:xfrm>
+          <a:prstGeom prst="rect">
+            <a:avLst/>
+          </a:prstGeom>
+          <a:noFill/>
+        </p:spPr>
+        <p:txBody>
+          <a:bodyPr wrap="square" lIns="0" rIns="0" tIns="0" bIns="0" anchor="t">
+            <a:spAutoFit/>
+          </a:bodyPr>
+          <a:lstStyle/>
+          <a:p>
+            <a:pPr algn="l"/>
             <a:r>
               <a:rPr b="1" sz="1350" i="0" u="none">
                 <a:solidFill>
-                  <a:srgbClr val="334155"/>
+                  <a:srgbClr val="0F172A"/>
                 </a:solidFill>
                 <a:latin typeface="Noto Sans KR"/>
               </a:rPr>
-              <a:t>FE 설계서:</a:t>
-            </a:r>
+              <a:t>권한 분리 &amp; Commit</a:t>
+            </a:r>
+          </a:p>
+        </p:txBody>
+      </p:sp>
+      <p:sp>
+        <p:nvSpPr>
+          <p:cNvPr id="13" name="TextBox 12"/>
+          <p:cNvSpPr txBox="1"/>
+          <p:nvPr/>
+        </p:nvSpPr>
+        <p:spPr>
+          <a:xfrm>
+            <a:off x="847725" y="3886200"/>
+            <a:ext cx="2152650" cy="685800"/>
+          </a:xfrm>
+          <a:prstGeom prst="rect">
+            <a:avLst/>
+          </a:prstGeom>
+          <a:noFill/>
+        </p:spPr>
+        <p:txBody>
+          <a:bodyPr wrap="square" lIns="0" rIns="0" tIns="0" bIns="0" anchor="t">
+            <a:spAutoFit/>
+          </a:bodyPr>
+          <a:lstStyle/>
+          <a:p>
+            <a:pPr algn="l"/>
             <a:r>
               <a:rPr b="0" sz="1350" i="0" u="none">
                 <a:solidFill>
-                  <a:srgbClr val="334155"/>
+                  <a:srgbClr val="475569"/>
                 </a:solidFill>
                 <a:latin typeface="Noto Sans KR"/>
               </a:rPr>
-              <a:t> UI/UX 및 백엔드 통신 스펙 정의</a:t>
-            </a:r>
-          </a:p>
-        </p:txBody>
-      </p:sp>
-      <p:sp>
-        <p:nvSpPr>
-          <p:cNvPr id="11" name="TextBox 10"/>
-          <p:cNvSpPr txBox="1"/>
-          <p:nvPr/>
-        </p:nvSpPr>
-        <p:spPr>
-          <a:xfrm>
-            <a:off x="885825" y="3955702"/>
-            <a:ext cx="4800600" cy="308520"/>
-          </a:xfrm>
-          <a:prstGeom prst="rect">
-            <a:avLst/>
-          </a:prstGeom>
-          <a:noFill/>
-        </p:spPr>
-        <p:txBody>
-          <a:bodyPr wrap="square" lIns="0" rIns="0" tIns="0" bIns="0" anchor="t">
-            <a:spAutoFit/>
-          </a:bodyPr>
-          <a:lstStyle/>
-          <a:p>
-            <a:pPr algn="l">
-              <a:lnSpc>
-                <a:spcPts val="2429"/>
-              </a:lnSpc>
-            </a:pPr>
+              <a:t>산출물 변경 이력 단위 원자적 Commit 생성 및 main 직커밋 통제.</a:t>
+            </a:r>
+          </a:p>
+        </p:txBody>
+      </p:sp>
+      <p:sp>
+        <p:nvSpPr>
+          <p:cNvPr id="14" name="TextBox 13"/>
+          <p:cNvSpPr txBox="1"/>
+          <p:nvPr/>
+        </p:nvSpPr>
+        <p:spPr>
+          <a:xfrm>
+            <a:off x="3629025" y="3581400"/>
+            <a:ext cx="2260282" cy="228600"/>
+          </a:xfrm>
+          <a:prstGeom prst="rect">
+            <a:avLst/>
+          </a:prstGeom>
+          <a:noFill/>
+        </p:spPr>
+        <p:txBody>
+          <a:bodyPr wrap="square" lIns="0" rIns="0" tIns="0" bIns="0" anchor="t">
+            <a:spAutoFit/>
+          </a:bodyPr>
+          <a:lstStyle/>
+          <a:p>
+            <a:pPr algn="l"/>
             <a:r>
               <a:rPr b="1" sz="1350" i="0" u="none">
                 <a:solidFill>
-                  <a:srgbClr val="334155"/>
+                  <a:srgbClr val="0F172A"/>
                 </a:solidFill>
                 <a:latin typeface="Noto Sans KR"/>
               </a:rPr>
-              <a:t>BE 설계서:</a:t>
-            </a:r>
+              <a:t>feature 검증 &amp; 회귀</a:t>
+            </a:r>
+          </a:p>
+        </p:txBody>
+      </p:sp>
+      <p:sp>
+        <p:nvSpPr>
+          <p:cNvPr id="15" name="TextBox 14"/>
+          <p:cNvSpPr txBox="1"/>
+          <p:nvPr/>
+        </p:nvSpPr>
+        <p:spPr>
+          <a:xfrm>
+            <a:off x="3629025" y="3886200"/>
+            <a:ext cx="2152650" cy="685800"/>
+          </a:xfrm>
+          <a:prstGeom prst="rect">
+            <a:avLst/>
+          </a:prstGeom>
+          <a:noFill/>
+        </p:spPr>
+        <p:txBody>
+          <a:bodyPr wrap="square" lIns="0" rIns="0" tIns="0" bIns="0" anchor="t">
+            <a:spAutoFit/>
+          </a:bodyPr>
+          <a:lstStyle/>
+          <a:p>
+            <a:pPr algn="l"/>
             <a:r>
               <a:rPr b="0" sz="1350" i="0" u="none">
                 <a:solidFill>
-                  <a:srgbClr val="334155"/>
+                  <a:srgbClr val="475569"/>
                 </a:solidFill>
                 <a:latin typeface="Noto Sans KR"/>
               </a:rPr>
-              <a:t> Data 처리 순서 및 통신 규격 명시</a:t>
-            </a:r>
-          </a:p>
-        </p:txBody>
-      </p:sp>
-      <p:sp>
-        <p:nvSpPr>
-          <p:cNvPr id="12" name="TextBox 11"/>
-          <p:cNvSpPr txBox="1"/>
-          <p:nvPr/>
-        </p:nvSpPr>
-        <p:spPr>
-          <a:xfrm>
-            <a:off x="885825" y="4359473"/>
-            <a:ext cx="4800600" cy="308520"/>
-          </a:xfrm>
-          <a:prstGeom prst="rect">
-            <a:avLst/>
-          </a:prstGeom>
-          <a:noFill/>
-        </p:spPr>
-        <p:txBody>
-          <a:bodyPr wrap="square" lIns="0" rIns="0" tIns="0" bIns="0" anchor="t">
-            <a:spAutoFit/>
-          </a:bodyPr>
-          <a:lstStyle/>
-          <a:p>
-            <a:pPr algn="l">
-              <a:lnSpc>
-                <a:spcPts val="2429"/>
-              </a:lnSpc>
-            </a:pPr>
+              <a:t>연계 테스트 미만족 시 산출물 단계 회귀 후 feature 브랜치 삭제.</a:t>
+            </a:r>
+          </a:p>
+        </p:txBody>
+      </p:sp>
+      <p:sp>
+        <p:nvSpPr>
+          <p:cNvPr id="16" name="TextBox 15"/>
+          <p:cNvSpPr txBox="1"/>
+          <p:nvPr/>
+        </p:nvSpPr>
+        <p:spPr>
+          <a:xfrm>
+            <a:off x="6410325" y="3581400"/>
+            <a:ext cx="2260282" cy="200025"/>
+          </a:xfrm>
+          <a:prstGeom prst="rect">
+            <a:avLst/>
+          </a:prstGeom>
+          <a:noFill/>
+        </p:spPr>
+        <p:txBody>
+          <a:bodyPr wrap="square" lIns="0" rIns="0" tIns="0" bIns="0" anchor="t">
+            <a:spAutoFit/>
+          </a:bodyPr>
+          <a:lstStyle/>
+          <a:p>
+            <a:pPr algn="l"/>
             <a:r>
               <a:rPr b="1" sz="1350" i="0" u="none">
                 <a:solidFill>
-                  <a:srgbClr val="334155"/>
+                  <a:srgbClr val="0F172A"/>
                 </a:solidFill>
                 <a:latin typeface="Noto Sans KR"/>
               </a:rPr>
-              <a:t>인터페이스:</a:t>
-            </a:r>
+              <a:t>develop CI/CD</a:t>
+            </a:r>
+          </a:p>
+        </p:txBody>
+      </p:sp>
+      <p:sp>
+        <p:nvSpPr>
+          <p:cNvPr id="17" name="TextBox 16"/>
+          <p:cNvSpPr txBox="1"/>
+          <p:nvPr/>
+        </p:nvSpPr>
+        <p:spPr>
+          <a:xfrm>
+            <a:off x="6410325" y="3857625"/>
+            <a:ext cx="2152650" cy="685800"/>
+          </a:xfrm>
+          <a:prstGeom prst="rect">
+            <a:avLst/>
+          </a:prstGeom>
+          <a:noFill/>
+        </p:spPr>
+        <p:txBody>
+          <a:bodyPr wrap="square" lIns="0" rIns="0" tIns="0" bIns="0" anchor="t">
+            <a:spAutoFit/>
+          </a:bodyPr>
+          <a:lstStyle/>
+          <a:p>
+            <a:pPr algn="l"/>
             <a:r>
               <a:rPr b="0" sz="1350" i="0" u="none">
                 <a:solidFill>
-                  <a:srgbClr val="334155"/>
+                  <a:srgbClr val="475569"/>
                 </a:solidFill>
                 <a:latin typeface="Noto Sans KR"/>
               </a:rPr>
-              <a:t> 설비 및 타 시스템 연동 스펙</a:t>
-            </a:r>
-          </a:p>
-        </p:txBody>
-      </p:sp>
-      <p:sp>
-        <p:nvSpPr>
-          <p:cNvPr id="13" name="TextBox 12"/>
-          <p:cNvSpPr txBox="1"/>
-          <p:nvPr/>
-        </p:nvSpPr>
-        <p:spPr>
-          <a:xfrm>
-            <a:off x="6505575" y="3551932"/>
-            <a:ext cx="4800600" cy="308520"/>
-          </a:xfrm>
-          <a:prstGeom prst="rect">
-            <a:avLst/>
-          </a:prstGeom>
-          <a:noFill/>
-        </p:spPr>
-        <p:txBody>
-          <a:bodyPr wrap="square" lIns="0" rIns="0" tIns="0" bIns="0" anchor="t">
-            <a:spAutoFit/>
-          </a:bodyPr>
-          <a:lstStyle/>
-          <a:p>
-            <a:pPr algn="l">
-              <a:lnSpc>
-                <a:spcPts val="2429"/>
-              </a:lnSpc>
-            </a:pPr>
+              <a:t>소스와 설정을 병합하여 개발 서버 배포 및 자동화 테스트 검증.</a:t>
+            </a:r>
+          </a:p>
+        </p:txBody>
+      </p:sp>
+      <p:sp>
+        <p:nvSpPr>
+          <p:cNvPr id="18" name="TextBox 17"/>
+          <p:cNvSpPr txBox="1"/>
+          <p:nvPr/>
+        </p:nvSpPr>
+        <p:spPr>
+          <a:xfrm>
+            <a:off x="9191625" y="3581400"/>
+            <a:ext cx="2260282" cy="228600"/>
+          </a:xfrm>
+          <a:prstGeom prst="rect">
+            <a:avLst/>
+          </a:prstGeom>
+          <a:noFill/>
+        </p:spPr>
+        <p:txBody>
+          <a:bodyPr wrap="square" lIns="0" rIns="0" tIns="0" bIns="0" anchor="t">
+            <a:spAutoFit/>
+          </a:bodyPr>
+          <a:lstStyle/>
+          <a:p>
+            <a:pPr algn="l"/>
             <a:r>
               <a:rPr b="1" sz="1350" i="0" u="none">
                 <a:solidFill>
-                  <a:srgbClr val="334155"/>
+                  <a:srgbClr val="0F172A"/>
                 </a:solidFill>
                 <a:latin typeface="Noto Sans KR"/>
               </a:rPr>
-              <a:t>영역 분리:</a:t>
-            </a:r>
+              <a:t>master 운영 배포</a:t>
+            </a:r>
+          </a:p>
+        </p:txBody>
+      </p:sp>
+      <p:sp>
+        <p:nvSpPr>
+          <p:cNvPr id="19" name="TextBox 18"/>
+          <p:cNvSpPr txBox="1"/>
+          <p:nvPr/>
+        </p:nvSpPr>
+        <p:spPr>
+          <a:xfrm>
+            <a:off x="9191625" y="3886200"/>
+            <a:ext cx="2152650" cy="685800"/>
+          </a:xfrm>
+          <a:prstGeom prst="rect">
+            <a:avLst/>
+          </a:prstGeom>
+          <a:noFill/>
+        </p:spPr>
+        <p:txBody>
+          <a:bodyPr wrap="square" lIns="0" rIns="0" tIns="0" bIns="0" anchor="t">
+            <a:spAutoFit/>
+          </a:bodyPr>
+          <a:lstStyle/>
+          <a:p>
+            <a:pPr algn="l"/>
             <a:r>
               <a:rPr b="0" sz="1350" i="0" u="none">
                 <a:solidFill>
-                  <a:srgbClr val="334155"/>
+                  <a:srgbClr val="475569"/>
                 </a:solidFill>
                 <a:latin typeface="Noto Sans KR"/>
               </a:rPr>
-              <a:t> 문서/소스/설정 및 feature/dev/master</a:t>
-            </a:r>
-          </a:p>
-        </p:txBody>
-      </p:sp>
-      <p:sp>
-        <p:nvSpPr>
-          <p:cNvPr id="14" name="TextBox 13"/>
-          <p:cNvSpPr txBox="1"/>
-          <p:nvPr/>
-        </p:nvSpPr>
-        <p:spPr>
-          <a:xfrm>
-            <a:off x="6505575" y="3955702"/>
-            <a:ext cx="4800600" cy="308520"/>
-          </a:xfrm>
-          <a:prstGeom prst="rect">
-            <a:avLst/>
-          </a:prstGeom>
-          <a:noFill/>
-        </p:spPr>
-        <p:txBody>
-          <a:bodyPr wrap="square" lIns="0" rIns="0" tIns="0" bIns="0" anchor="t">
-            <a:spAutoFit/>
-          </a:bodyPr>
-          <a:lstStyle/>
-          <a:p>
-            <a:pPr algn="l">
-              <a:lnSpc>
-                <a:spcPts val="2429"/>
-              </a:lnSpc>
-            </a:pPr>
-            <a:r>
-              <a:rPr b="1" sz="1350" i="0" u="none">
-                <a:solidFill>
-                  <a:srgbClr val="334155"/>
-                </a:solidFill>
-                <a:latin typeface="Noto Sans KR"/>
-              </a:rPr>
-              <a:t>안전장치:</a:t>
-            </a:r>
-            <a:r>
-              <a:rPr b="0" sz="1350" i="0" u="none">
-                <a:solidFill>
-                  <a:srgbClr val="334155"/>
-                </a:solidFill>
-                <a:latin typeface="Noto Sans KR"/>
-              </a:rPr>
-              <a:t> Main 직접 커밋 차단 및 Merge 승인제</a:t>
-            </a:r>
-          </a:p>
-        </p:txBody>
-      </p:sp>
-      <p:sp>
-        <p:nvSpPr>
-          <p:cNvPr id="15" name="TextBox 14"/>
-          <p:cNvSpPr txBox="1"/>
-          <p:nvPr/>
-        </p:nvSpPr>
-        <p:spPr>
-          <a:xfrm>
-            <a:off x="6505575" y="4359473"/>
-            <a:ext cx="4800600" cy="308520"/>
-          </a:xfrm>
-          <a:prstGeom prst="rect">
-            <a:avLst/>
-          </a:prstGeom>
-          <a:noFill/>
-        </p:spPr>
-        <p:txBody>
-          <a:bodyPr wrap="square" lIns="0" rIns="0" tIns="0" bIns="0" anchor="t">
-            <a:spAutoFit/>
-          </a:bodyPr>
-          <a:lstStyle/>
-          <a:p>
-            <a:pPr algn="l">
-              <a:lnSpc>
-                <a:spcPts val="2429"/>
-              </a:lnSpc>
-            </a:pPr>
-            <a:r>
-              <a:rPr b="1" sz="1350" i="0" u="none">
-                <a:solidFill>
-                  <a:srgbClr val="334155"/>
-                </a:solidFill>
-                <a:latin typeface="Noto Sans KR"/>
-              </a:rPr>
-              <a:t>Agent Commit:</a:t>
-            </a:r>
-            <a:r>
-              <a:rPr b="0" sz="1350" i="0" u="none">
-                <a:solidFill>
-                  <a:srgbClr val="334155"/>
-                </a:solidFill>
-                <a:latin typeface="Noto Sans KR"/>
-              </a:rPr>
-              <a:t> 변경이력 단위 커밋 자동화</a:t>
+              <a:t>테스트 완료된 Commit 및 설정 최종 병합 후 운영 서버 배포.</a:t>
             </a:r>
           </a:p>
         </p:txBody>
@@ -6460,79 +5926,9 @@
         <p:nvPr/>
       </p:nvGrpSpPr>
       <p:grpSpPr/>
-      <p:sp>
-        <p:nvSpPr>
-          <p:cNvPr id="2" name="TextBox 1"/>
-          <p:cNvSpPr txBox="1"/>
-          <p:nvPr/>
-        </p:nvSpPr>
-        <p:spPr>
-          <a:xfrm>
-            <a:off x="609600" y="533400"/>
-            <a:ext cx="10972800" cy="647700"/>
-          </a:xfrm>
-          <a:prstGeom prst="rect">
-            <a:avLst/>
-          </a:prstGeom>
-          <a:noFill/>
-        </p:spPr>
-        <p:txBody>
-          <a:bodyPr wrap="square" lIns="0" rIns="0" tIns="0" bIns="0" anchor="t">
-            <a:spAutoFit/>
-          </a:bodyPr>
-          <a:lstStyle/>
-          <a:p>
-            <a:pPr algn="l"/>
-            <a:r>
-              <a:rPr b="1" sz="1200" i="0" u="none">
-                <a:solidFill>
-                  <a:srgbClr val="2563EB"/>
-                </a:solidFill>
-                <a:latin typeface="Noto Sans KR"/>
-              </a:rPr>
-              <a:t>CI/CD &amp; REGRESSION</a:t>
-            </a:r>
-          </a:p>
-        </p:txBody>
-      </p:sp>
-      <p:sp>
-        <p:nvSpPr>
-          <p:cNvPr id="3" name="TextBox 2"/>
-          <p:cNvSpPr txBox="1"/>
-          <p:nvPr/>
-        </p:nvSpPr>
-        <p:spPr>
-          <a:xfrm>
-            <a:off x="609600" y="762000"/>
-            <a:ext cx="11521440" cy="419100"/>
-          </a:xfrm>
-          <a:prstGeom prst="rect">
-            <a:avLst/>
-          </a:prstGeom>
-          <a:noFill/>
-        </p:spPr>
-        <p:txBody>
-          <a:bodyPr wrap="square" lIns="0" rIns="0" tIns="0" bIns="0" anchor="t">
-            <a:spAutoFit/>
-          </a:bodyPr>
-          <a:lstStyle/>
-          <a:p>
-            <a:pPr algn="l"/>
-            <a:r>
-              <a:rPr b="1" sz="2400" i="0" u="none">
-                <a:solidFill>
-                  <a:srgbClr val="0F172A"/>
-                </a:solidFill>
-                <a:latin typeface="Noto Sans KR"/>
-              </a:rPr>
-              <a:t>검증·회귀 및 CI/CD 배포 파이프라인</a:t>
-            </a:r>
-          </a:p>
-        </p:txBody>
-      </p:sp>
       <p:pic>
         <p:nvPicPr>
-          <p:cNvPr id="4" name="Picture 3" descr="image.png"/>
+          <p:cNvPr id="2" name="Picture 1" descr="image.png"/>
           <p:cNvPicPr>
             <a:picLocks noChangeAspect="1"/>
           </p:cNvPicPr>
@@ -6546,14 +5942,84 @@
         </p:blipFill>
         <p:spPr>
           <a:xfrm>
-            <a:off x="609600" y="3262312"/>
-            <a:ext cx="2425600" cy="1285875"/>
+            <a:off x="609600" y="1362075"/>
+            <a:ext cx="10972800" cy="5000625"/>
           </a:xfrm>
           <a:prstGeom prst="rect">
             <a:avLst/>
           </a:prstGeom>
         </p:spPr>
       </p:pic>
+      <p:sp>
+        <p:nvSpPr>
+          <p:cNvPr id="3" name="TextBox 2"/>
+          <p:cNvSpPr txBox="1"/>
+          <p:nvPr/>
+        </p:nvSpPr>
+        <p:spPr>
+          <a:xfrm>
+            <a:off x="609600" y="495300"/>
+            <a:ext cx="10972800" cy="600075"/>
+          </a:xfrm>
+          <a:prstGeom prst="rect">
+            <a:avLst/>
+          </a:prstGeom>
+          <a:noFill/>
+        </p:spPr>
+        <p:txBody>
+          <a:bodyPr wrap="square" lIns="0" rIns="0" tIns="0" bIns="0" anchor="t">
+            <a:spAutoFit/>
+          </a:bodyPr>
+          <a:lstStyle/>
+          <a:p>
+            <a:pPr algn="l"/>
+            <a:r>
+              <a:rPr b="1" sz="1200" i="0" u="none">
+                <a:solidFill>
+                  <a:srgbClr val="2563EB"/>
+                </a:solidFill>
+                <a:latin typeface="Noto Sans KR"/>
+              </a:rPr>
+              <a:t>ARCHITECTURE DIAGRAM 01</a:t>
+            </a:r>
+          </a:p>
+        </p:txBody>
+      </p:sp>
+      <p:sp>
+        <p:nvSpPr>
+          <p:cNvPr id="4" name="TextBox 3"/>
+          <p:cNvSpPr txBox="1"/>
+          <p:nvPr/>
+        </p:nvSpPr>
+        <p:spPr>
+          <a:xfrm>
+            <a:off x="609600" y="704850"/>
+            <a:ext cx="11521440" cy="390525"/>
+          </a:xfrm>
+          <a:prstGeom prst="rect">
+            <a:avLst/>
+          </a:prstGeom>
+          <a:noFill/>
+        </p:spPr>
+        <p:txBody>
+          <a:bodyPr wrap="square" lIns="0" rIns="0" tIns="0" bIns="0" anchor="t">
+            <a:spAutoFit/>
+          </a:bodyPr>
+          <a:lstStyle/>
+          <a:p>
+            <a:pPr algn="l"/>
+            <a:r>
+              <a:rPr b="0" sz="2250" i="0" u="none">
+                <a:solidFill>
+                  <a:srgbClr val="0F172A"/>
+                </a:solidFill>
+                <a:latin typeface="Noto Sans KR ExtraBold"/>
+              </a:rPr>
+              <a:t>바이브 코딩 기반 개발 및 CI/CD 파이프라인 아키텍처</a:t>
+            </a:r>
+          </a:p>
+        </p:txBody>
+      </p:sp>
       <p:pic>
         <p:nvPicPr>
           <p:cNvPr id="5" name="Picture 4" descr="image.png"/>
@@ -6570,8 +6036,8 @@
         </p:blipFill>
         <p:spPr>
           <a:xfrm>
-            <a:off x="3458616" y="3262312"/>
-            <a:ext cx="2425600" cy="1285875"/>
+            <a:off x="885825" y="1638300"/>
+            <a:ext cx="2958554" cy="952500"/>
           </a:xfrm>
           <a:prstGeom prst="rect">
             <a:avLst/>
@@ -6594,8 +6060,8 @@
         </p:blipFill>
         <p:spPr>
           <a:xfrm>
-            <a:off x="6307633" y="3262312"/>
-            <a:ext cx="2425600" cy="1285875"/>
+            <a:off x="4034879" y="2028825"/>
+            <a:ext cx="133498" cy="171450"/>
           </a:xfrm>
           <a:prstGeom prst="rect">
             <a:avLst/>
@@ -6618,8 +6084,8 @@
         </p:blipFill>
         <p:spPr>
           <a:xfrm>
-            <a:off x="9156650" y="3262312"/>
-            <a:ext cx="2425600" cy="1285875"/>
+            <a:off x="4358878" y="1647825"/>
+            <a:ext cx="2958554" cy="933450"/>
           </a:xfrm>
           <a:prstGeom prst="rect">
             <a:avLst/>
@@ -6635,15 +6101,15 @@
           <p:nvPr/>
         </p:nvPicPr>
         <p:blipFill>
-          <a:blip r:embed="rId6"/>
+          <a:blip r:embed="rId4"/>
           <a:stretch>
             <a:fillRect/>
           </a:stretch>
         </p:blipFill>
         <p:spPr>
           <a:xfrm>
-            <a:off x="3187600" y="3829050"/>
-            <a:ext cx="118616" cy="152400"/>
+            <a:off x="7507932" y="2028825"/>
+            <a:ext cx="133498" cy="171450"/>
           </a:xfrm>
           <a:prstGeom prst="rect">
             <a:avLst/>
@@ -6659,15 +6125,15 @@
           <p:nvPr/>
         </p:nvPicPr>
         <p:blipFill>
-          <a:blip r:embed="rId7"/>
+          <a:blip r:embed="rId6"/>
           <a:stretch>
             <a:fillRect/>
           </a:stretch>
         </p:blipFill>
         <p:spPr>
           <a:xfrm>
-            <a:off x="6036617" y="3829050"/>
-            <a:ext cx="118616" cy="152400"/>
+            <a:off x="7831931" y="1652587"/>
+            <a:ext cx="3474094" cy="923925"/>
           </a:xfrm>
           <a:prstGeom prst="rect">
             <a:avLst/>
@@ -6683,14 +6149,545 @@
           <p:nvPr/>
         </p:nvPicPr>
         <p:blipFill>
-          <a:blip r:embed="rId6"/>
+          <a:blip r:embed="rId7"/>
           <a:stretch>
             <a:fillRect/>
           </a:stretch>
         </p:blipFill>
         <p:spPr>
           <a:xfrm>
-            <a:off x="8885634" y="3829050"/>
+            <a:off x="6014442" y="3676650"/>
+            <a:ext cx="163115" cy="209550"/>
+          </a:xfrm>
+          <a:prstGeom prst="rect">
+            <a:avLst/>
+          </a:prstGeom>
+        </p:spPr>
+      </p:pic>
+      <p:pic>
+        <p:nvPicPr>
+          <p:cNvPr id="11" name="Picture 10" descr="image.png"/>
+          <p:cNvPicPr>
+            <a:picLocks noChangeAspect="1"/>
+          </p:cNvPicPr>
+          <p:nvPr/>
+        </p:nvPicPr>
+        <p:blipFill>
+          <a:blip r:embed="rId8"/>
+          <a:stretch>
+            <a:fillRect/>
+          </a:stretch>
+        </p:blipFill>
+        <p:spPr>
+          <a:xfrm>
+            <a:off x="885825" y="4972050"/>
+            <a:ext cx="3130450" cy="1114425"/>
+          </a:xfrm>
+          <a:prstGeom prst="rect">
+            <a:avLst/>
+          </a:prstGeom>
+        </p:spPr>
+      </p:pic>
+      <p:pic>
+        <p:nvPicPr>
+          <p:cNvPr id="12" name="Picture 11" descr="image.png"/>
+          <p:cNvPicPr>
+            <a:picLocks noChangeAspect="1"/>
+          </p:cNvPicPr>
+          <p:nvPr/>
+        </p:nvPicPr>
+        <p:blipFill>
+          <a:blip r:embed="rId4"/>
+          <a:stretch>
+            <a:fillRect/>
+          </a:stretch>
+        </p:blipFill>
+        <p:spPr>
+          <a:xfrm>
+            <a:off x="4206775" y="5443537"/>
+            <a:ext cx="133498" cy="171450"/>
+          </a:xfrm>
+          <a:prstGeom prst="rect">
+            <a:avLst/>
+          </a:prstGeom>
+        </p:spPr>
+      </p:pic>
+      <p:pic>
+        <p:nvPicPr>
+          <p:cNvPr id="13" name="Picture 12" descr="image.png"/>
+          <p:cNvPicPr>
+            <a:picLocks noChangeAspect="1"/>
+          </p:cNvPicPr>
+          <p:nvPr/>
+        </p:nvPicPr>
+        <p:blipFill>
+          <a:blip r:embed="rId9"/>
+          <a:stretch>
+            <a:fillRect/>
+          </a:stretch>
+        </p:blipFill>
+        <p:spPr>
+          <a:xfrm>
+            <a:off x="4530774" y="4972050"/>
+            <a:ext cx="3130450" cy="1114425"/>
+          </a:xfrm>
+          <a:prstGeom prst="rect">
+            <a:avLst/>
+          </a:prstGeom>
+        </p:spPr>
+      </p:pic>
+      <p:pic>
+        <p:nvPicPr>
+          <p:cNvPr id="14" name="Picture 13" descr="image.png"/>
+          <p:cNvPicPr>
+            <a:picLocks noChangeAspect="1"/>
+          </p:cNvPicPr>
+          <p:nvPr/>
+        </p:nvPicPr>
+        <p:blipFill>
+          <a:blip r:embed="rId4"/>
+          <a:stretch>
+            <a:fillRect/>
+          </a:stretch>
+        </p:blipFill>
+        <p:spPr>
+          <a:xfrm>
+            <a:off x="7851725" y="5443537"/>
+            <a:ext cx="133498" cy="171450"/>
+          </a:xfrm>
+          <a:prstGeom prst="rect">
+            <a:avLst/>
+          </a:prstGeom>
+        </p:spPr>
+      </p:pic>
+      <p:pic>
+        <p:nvPicPr>
+          <p:cNvPr id="15" name="Picture 14" descr="image.png"/>
+          <p:cNvPicPr>
+            <a:picLocks noChangeAspect="1"/>
+          </p:cNvPicPr>
+          <p:nvPr/>
+        </p:nvPicPr>
+        <p:blipFill>
+          <a:blip r:embed="rId10"/>
+          <a:stretch>
+            <a:fillRect/>
+          </a:stretch>
+        </p:blipFill>
+        <p:spPr>
+          <a:xfrm>
+            <a:off x="8175724" y="4972050"/>
+            <a:ext cx="3130450" cy="1114425"/>
+          </a:xfrm>
+          <a:prstGeom prst="rect">
+            <a:avLst/>
+          </a:prstGeom>
+        </p:spPr>
+      </p:pic>
+      <p:pic>
+        <p:nvPicPr>
+          <p:cNvPr id="16" name="Picture 15" descr="image.png"/>
+          <p:cNvPicPr>
+            <a:picLocks noChangeAspect="1"/>
+          </p:cNvPicPr>
+          <p:nvPr/>
+        </p:nvPicPr>
+        <p:blipFill>
+          <a:blip r:embed="rId11"/>
+          <a:stretch>
+            <a:fillRect/>
+          </a:stretch>
+        </p:blipFill>
+        <p:spPr>
+          <a:xfrm>
+            <a:off x="2290911" y="1790700"/>
+            <a:ext cx="148232" cy="190500"/>
+          </a:xfrm>
+          <a:prstGeom prst="rect">
+            <a:avLst/>
+          </a:prstGeom>
+        </p:spPr>
+      </p:pic>
+      <p:pic>
+        <p:nvPicPr>
+          <p:cNvPr id="17" name="Picture 16" descr="image.png"/>
+          <p:cNvPicPr>
+            <a:picLocks noChangeAspect="1"/>
+          </p:cNvPicPr>
+          <p:nvPr/>
+        </p:nvPicPr>
+        <p:blipFill>
+          <a:blip r:embed="rId12"/>
+          <a:stretch>
+            <a:fillRect/>
+          </a:stretch>
+        </p:blipFill>
+        <p:spPr>
+          <a:xfrm>
+            <a:off x="5763964" y="1800225"/>
+            <a:ext cx="148232" cy="190500"/>
+          </a:xfrm>
+          <a:prstGeom prst="rect">
+            <a:avLst/>
+          </a:prstGeom>
+        </p:spPr>
+      </p:pic>
+      <p:pic>
+        <p:nvPicPr>
+          <p:cNvPr id="18" name="Picture 17" descr="image.png"/>
+          <p:cNvPicPr>
+            <a:picLocks noChangeAspect="1"/>
+          </p:cNvPicPr>
+          <p:nvPr/>
+        </p:nvPicPr>
+        <p:blipFill>
+          <a:blip r:embed="rId13"/>
+          <a:stretch>
+            <a:fillRect/>
+          </a:stretch>
+        </p:blipFill>
+        <p:spPr>
+          <a:xfrm>
+            <a:off x="9494787" y="1804987"/>
+            <a:ext cx="148232" cy="190500"/>
+          </a:xfrm>
+          <a:prstGeom prst="rect">
+            <a:avLst/>
+          </a:prstGeom>
+        </p:spPr>
+      </p:pic>
+      <p:sp>
+        <p:nvSpPr>
+          <p:cNvPr id="19" name="TextBox 18"/>
+          <p:cNvSpPr txBox="1"/>
+          <p:nvPr/>
+        </p:nvSpPr>
+        <p:spPr>
+          <a:xfrm>
+            <a:off x="1076325" y="2038350"/>
+            <a:ext cx="2577554" cy="228600"/>
+          </a:xfrm>
+          <a:prstGeom prst="rect">
+            <a:avLst/>
+          </a:prstGeom>
+          <a:noFill/>
+        </p:spPr>
+        <p:txBody>
+          <a:bodyPr wrap="square" lIns="0" rIns="0" tIns="0" bIns="0" anchor="t">
+            <a:spAutoFit/>
+          </a:bodyPr>
+          <a:lstStyle/>
+          <a:p>
+            <a:pPr algn="ctr"/>
+            <a:r>
+              <a:rPr b="1" sz="1350" i="0" u="none">
+                <a:solidFill>
+                  <a:srgbClr val="FFFFFF"/>
+                </a:solidFill>
+                <a:latin typeface="Noto Sans KR"/>
+              </a:rPr>
+              <a:t>Inhouse 코딩 컨벤션</a:t>
+            </a:r>
+          </a:p>
+        </p:txBody>
+      </p:sp>
+      <p:sp>
+        <p:nvSpPr>
+          <p:cNvPr id="20" name="TextBox 19"/>
+          <p:cNvSpPr txBox="1"/>
+          <p:nvPr/>
+        </p:nvSpPr>
+        <p:spPr>
+          <a:xfrm>
+            <a:off x="1076325" y="2266950"/>
+            <a:ext cx="2577554" cy="171450"/>
+          </a:xfrm>
+          <a:prstGeom prst="rect">
+            <a:avLst/>
+          </a:prstGeom>
+          <a:noFill/>
+        </p:spPr>
+        <p:txBody>
+          <a:bodyPr wrap="square" lIns="0" rIns="0" tIns="0" bIns="0" anchor="t">
+            <a:spAutoFit/>
+          </a:bodyPr>
+          <a:lstStyle/>
+          <a:p>
+            <a:pPr algn="ctr"/>
+            <a:r>
+              <a:rPr b="0" sz="1050" i="0" u="none">
+                <a:solidFill>
+                  <a:srgbClr val="94A3B8"/>
+                </a:solidFill>
+                <a:latin typeface="Noto Sans KR"/>
+              </a:rPr>
+              <a:t>Spring 유사 구조 &amp; 안티패턴</a:t>
+            </a:r>
+          </a:p>
+        </p:txBody>
+      </p:sp>
+      <p:sp>
+        <p:nvSpPr>
+          <p:cNvPr id="21" name="TextBox 20"/>
+          <p:cNvSpPr txBox="1"/>
+          <p:nvPr/>
+        </p:nvSpPr>
+        <p:spPr>
+          <a:xfrm>
+            <a:off x="4549378" y="2047875"/>
+            <a:ext cx="2577554" cy="228600"/>
+          </a:xfrm>
+          <a:prstGeom prst="rect">
+            <a:avLst/>
+          </a:prstGeom>
+          <a:noFill/>
+        </p:spPr>
+        <p:txBody>
+          <a:bodyPr wrap="square" lIns="0" rIns="0" tIns="0" bIns="0" anchor="t">
+            <a:spAutoFit/>
+          </a:bodyPr>
+          <a:lstStyle/>
+          <a:p>
+            <a:pPr algn="ctr"/>
+            <a:r>
+              <a:rPr b="1" sz="1350" i="0" u="none">
+                <a:solidFill>
+                  <a:srgbClr val="FFFFFF"/>
+                </a:solidFill>
+                <a:latin typeface="Noto Sans KR"/>
+              </a:rPr>
+              <a:t>3대 설계서 표준 양식</a:t>
+            </a:r>
+          </a:p>
+        </p:txBody>
+      </p:sp>
+      <p:sp>
+        <p:nvSpPr>
+          <p:cNvPr id="22" name="TextBox 21"/>
+          <p:cNvSpPr txBox="1"/>
+          <p:nvPr/>
+        </p:nvSpPr>
+        <p:spPr>
+          <a:xfrm>
+            <a:off x="4549378" y="2276475"/>
+            <a:ext cx="2577554" cy="152400"/>
+          </a:xfrm>
+          <a:prstGeom prst="rect">
+            <a:avLst/>
+          </a:prstGeom>
+          <a:noFill/>
+        </p:spPr>
+        <p:txBody>
+          <a:bodyPr wrap="square" lIns="0" rIns="0" tIns="0" bIns="0" anchor="t">
+            <a:spAutoFit/>
+          </a:bodyPr>
+          <a:lstStyle/>
+          <a:p>
+            <a:pPr algn="ctr"/>
+            <a:r>
+              <a:rPr b="0" sz="1050" i="0" u="none">
+                <a:solidFill>
+                  <a:srgbClr val="94A3B8"/>
+                </a:solidFill>
+                <a:latin typeface="Noto Sans KR"/>
+              </a:rPr>
+              <a:t>UI/UX, Backend, Interface</a:t>
+            </a:r>
+          </a:p>
+        </p:txBody>
+      </p:sp>
+      <p:sp>
+        <p:nvSpPr>
+          <p:cNvPr id="23" name="TextBox 22"/>
+          <p:cNvSpPr txBox="1"/>
+          <p:nvPr/>
+        </p:nvSpPr>
+        <p:spPr>
+          <a:xfrm>
+            <a:off x="8022431" y="2052637"/>
+            <a:ext cx="3093094" cy="200025"/>
+          </a:xfrm>
+          <a:prstGeom prst="rect">
+            <a:avLst/>
+          </a:prstGeom>
+          <a:noFill/>
+        </p:spPr>
+        <p:txBody>
+          <a:bodyPr wrap="square" lIns="0" rIns="0" tIns="0" bIns="0" anchor="t">
+            <a:spAutoFit/>
+          </a:bodyPr>
+          <a:lstStyle/>
+          <a:p>
+            <a:pPr algn="ctr"/>
+            <a:r>
+              <a:rPr b="1" sz="1350" i="0" u="none">
+                <a:solidFill>
+                  <a:srgbClr val="FFFFFF"/>
+                </a:solidFill>
+                <a:latin typeface="Noto Sans KR"/>
+              </a:rPr>
+              <a:t>Vibe Coding AI Agent</a:t>
+            </a:r>
+          </a:p>
+        </p:txBody>
+      </p:sp>
+      <p:sp>
+        <p:nvSpPr>
+          <p:cNvPr id="24" name="TextBox 23"/>
+          <p:cNvSpPr txBox="1"/>
+          <p:nvPr/>
+        </p:nvSpPr>
+        <p:spPr>
+          <a:xfrm>
+            <a:off x="8022431" y="2252662"/>
+            <a:ext cx="3093094" cy="171450"/>
+          </a:xfrm>
+          <a:prstGeom prst="rect">
+            <a:avLst/>
+          </a:prstGeom>
+          <a:noFill/>
+        </p:spPr>
+        <p:txBody>
+          <a:bodyPr wrap="square" lIns="0" rIns="0" tIns="0" bIns="0" anchor="t">
+            <a:spAutoFit/>
+          </a:bodyPr>
+          <a:lstStyle/>
+          <a:p>
+            <a:pPr algn="ctr"/>
+            <a:r>
+              <a:rPr b="0" sz="1050" i="0" u="none">
+                <a:solidFill>
+                  <a:srgbClr val="BFDBFE"/>
+                </a:solidFill>
+                <a:latin typeface="Noto Sans KR"/>
+              </a:rPr>
+              <a:t>소스코드 &amp; 산출물 자동 생성</a:t>
+            </a:r>
+          </a:p>
+        </p:txBody>
+      </p:sp>
+      <p:sp>
+        <p:nvSpPr>
+          <p:cNvPr id="25" name="TextBox 24"/>
+          <p:cNvSpPr txBox="1"/>
+          <p:nvPr/>
+        </p:nvSpPr>
+        <p:spPr>
+          <a:xfrm>
+            <a:off x="1076325" y="5438775"/>
+            <a:ext cx="2749450" cy="457200"/>
+          </a:xfrm>
+          <a:prstGeom prst="rect">
+            <a:avLst/>
+          </a:prstGeom>
+          <a:noFill/>
+        </p:spPr>
+        <p:txBody>
+          <a:bodyPr wrap="square" lIns="0" rIns="0" tIns="0" bIns="0" anchor="t">
+            <a:spAutoFit/>
+          </a:bodyPr>
+          <a:lstStyle/>
+          <a:p>
+            <a:pPr algn="l"/>
+            <a:r>
+              <a:rPr b="0" sz="1350" i="0" u="none">
+                <a:solidFill>
+                  <a:srgbClr val="475569"/>
+                </a:solidFill>
+                <a:latin typeface="Noto Sans KR"/>
+              </a:rPr>
+              <a:t>개별 기능 검증 및 산출물 단위 Commit 생성 (실패 시 회귀 후 삭제)</a:t>
+            </a:r>
+          </a:p>
+        </p:txBody>
+      </p:sp>
+      <p:sp>
+        <p:nvSpPr>
+          <p:cNvPr id="26" name="TextBox 25"/>
+          <p:cNvSpPr txBox="1"/>
+          <p:nvPr/>
+        </p:nvSpPr>
+        <p:spPr>
+          <a:xfrm>
+            <a:off x="4721274" y="5438775"/>
+            <a:ext cx="2749450" cy="457200"/>
+          </a:xfrm>
+          <a:prstGeom prst="rect">
+            <a:avLst/>
+          </a:prstGeom>
+          <a:noFill/>
+        </p:spPr>
+        <p:txBody>
+          <a:bodyPr wrap="square" lIns="0" rIns="0" tIns="0" bIns="0" anchor="t">
+            <a:spAutoFit/>
+          </a:bodyPr>
+          <a:lstStyle/>
+          <a:p>
+            <a:pPr algn="l"/>
+            <a:r>
+              <a:rPr b="0" sz="1350" i="0" u="none">
+                <a:solidFill>
+                  <a:srgbClr val="475569"/>
+                </a:solidFill>
+                <a:latin typeface="Noto Sans KR"/>
+              </a:rPr>
+              <a:t>소스/설정 통합 후 개발 서버 자동 배포 및 연계 테스트 수행</a:t>
+            </a:r>
+          </a:p>
+        </p:txBody>
+      </p:sp>
+      <p:sp>
+        <p:nvSpPr>
+          <p:cNvPr id="27" name="TextBox 26"/>
+          <p:cNvSpPr txBox="1"/>
+          <p:nvPr/>
+        </p:nvSpPr>
+        <p:spPr>
+          <a:xfrm>
+            <a:off x="8366224" y="5438775"/>
+            <a:ext cx="2749450" cy="457200"/>
+          </a:xfrm>
+          <a:prstGeom prst="rect">
+            <a:avLst/>
+          </a:prstGeom>
+          <a:noFill/>
+        </p:spPr>
+        <p:txBody>
+          <a:bodyPr wrap="square" lIns="0" rIns="0" tIns="0" bIns="0" anchor="t">
+            <a:spAutoFit/>
+          </a:bodyPr>
+          <a:lstStyle/>
+          <a:p>
+            <a:pPr algn="l"/>
+            <a:r>
+              <a:rPr b="0" sz="1350" i="0" u="none">
+                <a:solidFill>
+                  <a:srgbClr val="475569"/>
+                </a:solidFill>
+                <a:latin typeface="Noto Sans KR"/>
+              </a:rPr>
+              <a:t>Merge 승인 통제 후 운영 환경 배포 (Direct Commit 차단)</a:t>
+            </a:r>
+          </a:p>
+        </p:txBody>
+      </p:sp>
+      <p:pic>
+        <p:nvPicPr>
+          <p:cNvPr id="28" name="Picture 27" descr="image.png"/>
+          <p:cNvPicPr>
+            <a:picLocks noChangeAspect="1"/>
+          </p:cNvPicPr>
+          <p:nvPr/>
+        </p:nvPicPr>
+        <p:blipFill>
+          <a:blip r:embed="rId14"/>
+          <a:stretch>
+            <a:fillRect/>
+          </a:stretch>
+        </p:blipFill>
+        <p:spPr>
+          <a:xfrm>
+            <a:off x="1076325" y="5186362"/>
             <a:ext cx="118616" cy="152400"/>
           </a:xfrm>
           <a:prstGeom prst="rect">
@@ -6698,16 +6695,64 @@
           </a:prstGeom>
         </p:spPr>
       </p:pic>
-      <p:sp>
-        <p:nvSpPr>
-          <p:cNvPr id="11" name="TextBox 10"/>
-          <p:cNvSpPr txBox="1"/>
-          <p:nvPr/>
-        </p:nvSpPr>
-        <p:spPr>
-          <a:xfrm>
-            <a:off x="847725" y="3500437"/>
-            <a:ext cx="1949350" cy="171450"/>
+      <p:pic>
+        <p:nvPicPr>
+          <p:cNvPr id="29" name="Picture 28" descr="image.png"/>
+          <p:cNvPicPr>
+            <a:picLocks noChangeAspect="1"/>
+          </p:cNvPicPr>
+          <p:nvPr/>
+        </p:nvPicPr>
+        <p:blipFill>
+          <a:blip r:embed="rId15"/>
+          <a:stretch>
+            <a:fillRect/>
+          </a:stretch>
+        </p:blipFill>
+        <p:spPr>
+          <a:xfrm>
+            <a:off x="4721274" y="5186362"/>
+            <a:ext cx="118616" cy="152400"/>
+          </a:xfrm>
+          <a:prstGeom prst="rect">
+            <a:avLst/>
+          </a:prstGeom>
+        </p:spPr>
+      </p:pic>
+      <p:pic>
+        <p:nvPicPr>
+          <p:cNvPr id="30" name="Picture 29" descr="image.png"/>
+          <p:cNvPicPr>
+            <a:picLocks noChangeAspect="1"/>
+          </p:cNvPicPr>
+          <p:nvPr/>
+        </p:nvPicPr>
+        <p:blipFill>
+          <a:blip r:embed="rId16"/>
+          <a:stretch>
+            <a:fillRect/>
+          </a:stretch>
+        </p:blipFill>
+        <p:spPr>
+          <a:xfrm>
+            <a:off x="8366224" y="5186362"/>
+            <a:ext cx="118616" cy="152400"/>
+          </a:xfrm>
+          <a:prstGeom prst="rect">
+            <a:avLst/>
+          </a:prstGeom>
+        </p:spPr>
+      </p:pic>
+      <p:sp>
+        <p:nvSpPr>
+          <p:cNvPr id="31" name="TextBox 30"/>
+          <p:cNvSpPr txBox="1"/>
+          <p:nvPr/>
+        </p:nvSpPr>
+        <p:spPr>
+          <a:xfrm>
+            <a:off x="1271141" y="5162550"/>
+            <a:ext cx="1270627" cy="200025"/>
           </a:xfrm>
           <a:prstGeom prst="rect">
             <a:avLst/>
@@ -6722,27 +6767,27 @@
           <a:p>
             <a:pPr algn="l"/>
             <a:r>
-              <a:rPr b="0" sz="1200" i="0" u="none">
-                <a:solidFill>
-                  <a:srgbClr val="2563EB"/>
-                </a:solidFill>
-                <a:latin typeface="Noto Sans KR ExtraBold"/>
-              </a:rPr>
-              <a:t>STEP 01</a:t>
-            </a:r>
-          </a:p>
-        </p:txBody>
-      </p:sp>
-      <p:sp>
-        <p:nvSpPr>
-          <p:cNvPr id="12" name="TextBox 11"/>
-          <p:cNvSpPr txBox="1"/>
-          <p:nvPr/>
-        </p:nvSpPr>
-        <p:spPr>
-          <a:xfrm>
-            <a:off x="847725" y="3748087"/>
-            <a:ext cx="2046818" cy="257175"/>
+              <a:rPr b="1" sz="1350" i="0" u="none">
+                <a:solidFill>
+                  <a:srgbClr val="0F172A"/>
+                </a:solidFill>
+                <a:latin typeface="Noto Sans KR"/>
+              </a:rPr>
+              <a:t>feature Branch</a:t>
+            </a:r>
+          </a:p>
+        </p:txBody>
+      </p:sp>
+      <p:sp>
+        <p:nvSpPr>
+          <p:cNvPr id="32" name="TextBox 31"/>
+          <p:cNvSpPr txBox="1"/>
+          <p:nvPr/>
+        </p:nvSpPr>
+        <p:spPr>
+          <a:xfrm>
+            <a:off x="4916090" y="5162550"/>
+            <a:ext cx="1340323" cy="200025"/>
           </a:xfrm>
           <a:prstGeom prst="rect">
             <a:avLst/>
@@ -6757,27 +6802,27 @@
           <a:p>
             <a:pPr algn="l"/>
             <a:r>
-              <a:rPr b="1" sz="1500" i="0" u="none">
+              <a:rPr b="1" sz="1350" i="0" u="none">
                 <a:solidFill>
                   <a:srgbClr val="0F172A"/>
                 </a:solidFill>
                 <a:latin typeface="Noto Sans KR"/>
               </a:rPr>
-              <a:t>Feature 검증</a:t>
-            </a:r>
-          </a:p>
-        </p:txBody>
-      </p:sp>
-      <p:sp>
-        <p:nvSpPr>
-          <p:cNvPr id="13" name="TextBox 12"/>
-          <p:cNvSpPr txBox="1"/>
-          <p:nvPr/>
-        </p:nvSpPr>
-        <p:spPr>
-          <a:xfrm>
-            <a:off x="847725" y="4081462"/>
-            <a:ext cx="1949350" cy="228600"/>
+              <a:t>develop (CI/CD)</a:t>
+            </a:r>
+          </a:p>
+        </p:txBody>
+      </p:sp>
+      <p:sp>
+        <p:nvSpPr>
+          <p:cNvPr id="33" name="TextBox 32"/>
+          <p:cNvSpPr txBox="1"/>
+          <p:nvPr/>
+        </p:nvSpPr>
+        <p:spPr>
+          <a:xfrm>
+            <a:off x="8561040" y="5162550"/>
+            <a:ext cx="1170458" cy="200025"/>
           </a:xfrm>
           <a:prstGeom prst="rect">
             <a:avLst/>
@@ -6792,328 +6837,13 @@
           <a:p>
             <a:pPr algn="l"/>
             <a:r>
-              <a:rPr b="0" sz="1350" i="0" u="none">
-                <a:solidFill>
-                  <a:srgbClr val="475569"/>
+              <a:rPr b="1" sz="1350" i="0" u="none">
+                <a:solidFill>
+                  <a:srgbClr val="0F172A"/>
                 </a:solidFill>
                 <a:latin typeface="Noto Sans KR"/>
               </a:rPr>
-              <a:t>단위 기능 검증 완료</a:t>
-            </a:r>
-          </a:p>
-        </p:txBody>
-      </p:sp>
-      <p:sp>
-        <p:nvSpPr>
-          <p:cNvPr id="14" name="TextBox 13"/>
-          <p:cNvSpPr txBox="1"/>
-          <p:nvPr/>
-        </p:nvSpPr>
-        <p:spPr>
-          <a:xfrm>
-            <a:off x="3696741" y="3500437"/>
-            <a:ext cx="1949350" cy="171450"/>
-          </a:xfrm>
-          <a:prstGeom prst="rect">
-            <a:avLst/>
-          </a:prstGeom>
-          <a:noFill/>
-        </p:spPr>
-        <p:txBody>
-          <a:bodyPr wrap="square" lIns="0" rIns="0" tIns="0" bIns="0" anchor="t">
-            <a:spAutoFit/>
-          </a:bodyPr>
-          <a:lstStyle/>
-          <a:p>
-            <a:pPr algn="l"/>
-            <a:r>
-              <a:rPr b="0" sz="1200" i="0" u="none">
-                <a:solidFill>
-                  <a:srgbClr val="2563EB"/>
-                </a:solidFill>
-                <a:latin typeface="Noto Sans KR ExtraBold"/>
-              </a:rPr>
-              <a:t>STEP 02</a:t>
-            </a:r>
-          </a:p>
-        </p:txBody>
-      </p:sp>
-      <p:sp>
-        <p:nvSpPr>
-          <p:cNvPr id="15" name="TextBox 14"/>
-          <p:cNvSpPr txBox="1"/>
-          <p:nvPr/>
-        </p:nvSpPr>
-        <p:spPr>
-          <a:xfrm>
-            <a:off x="3696741" y="3748087"/>
-            <a:ext cx="2046818" cy="257175"/>
-          </a:xfrm>
-          <a:prstGeom prst="rect">
-            <a:avLst/>
-          </a:prstGeom>
-          <a:noFill/>
-        </p:spPr>
-        <p:txBody>
-          <a:bodyPr wrap="square" lIns="0" rIns="0" tIns="0" bIns="0" anchor="t">
-            <a:spAutoFit/>
-          </a:bodyPr>
-          <a:lstStyle/>
-          <a:p>
-            <a:pPr algn="l"/>
-            <a:r>
-              <a:rPr b="1" sz="1500" i="0" u="none">
-                <a:solidFill>
-                  <a:srgbClr val="0F172A"/>
-                </a:solidFill>
-                <a:latin typeface="Noto Sans KR"/>
-              </a:rPr>
-              <a:t>Dev 배포 &amp; 테스트</a:t>
-            </a:r>
-          </a:p>
-        </p:txBody>
-      </p:sp>
-      <p:sp>
-        <p:nvSpPr>
-          <p:cNvPr id="16" name="TextBox 15"/>
-          <p:cNvSpPr txBox="1"/>
-          <p:nvPr/>
-        </p:nvSpPr>
-        <p:spPr>
-          <a:xfrm>
-            <a:off x="3696741" y="4081462"/>
-            <a:ext cx="1949350" cy="228600"/>
-          </a:xfrm>
-          <a:prstGeom prst="rect">
-            <a:avLst/>
-          </a:prstGeom>
-          <a:noFill/>
-        </p:spPr>
-        <p:txBody>
-          <a:bodyPr wrap="square" lIns="0" rIns="0" tIns="0" bIns="0" anchor="t">
-            <a:spAutoFit/>
-          </a:bodyPr>
-          <a:lstStyle/>
-          <a:p>
-            <a:pPr algn="l"/>
-            <a:r>
-              <a:rPr b="0" sz="1350" i="0" u="none">
-                <a:solidFill>
-                  <a:srgbClr val="475569"/>
-                </a:solidFill>
-                <a:latin typeface="Noto Sans KR"/>
-              </a:rPr>
-              <a:t>CI/CD로 개발서버 배포</a:t>
-            </a:r>
-          </a:p>
-        </p:txBody>
-      </p:sp>
-      <p:sp>
-        <p:nvSpPr>
-          <p:cNvPr id="17" name="TextBox 16"/>
-          <p:cNvSpPr txBox="1"/>
-          <p:nvPr/>
-        </p:nvSpPr>
-        <p:spPr>
-          <a:xfrm>
-            <a:off x="6545758" y="3500437"/>
-            <a:ext cx="1949350" cy="171450"/>
-          </a:xfrm>
-          <a:prstGeom prst="rect">
-            <a:avLst/>
-          </a:prstGeom>
-          <a:noFill/>
-        </p:spPr>
-        <p:txBody>
-          <a:bodyPr wrap="square" lIns="0" rIns="0" tIns="0" bIns="0" anchor="t">
-            <a:spAutoFit/>
-          </a:bodyPr>
-          <a:lstStyle/>
-          <a:p>
-            <a:pPr algn="l"/>
-            <a:r>
-              <a:rPr b="0" sz="1200" i="0" u="none">
-                <a:solidFill>
-                  <a:srgbClr val="E11D48"/>
-                </a:solidFill>
-                <a:latin typeface="Noto Sans KR ExtraBold"/>
-              </a:rPr>
-              <a:t>FAILSAFE</a:t>
-            </a:r>
-          </a:p>
-        </p:txBody>
-      </p:sp>
-      <p:sp>
-        <p:nvSpPr>
-          <p:cNvPr id="18" name="TextBox 17"/>
-          <p:cNvSpPr txBox="1"/>
-          <p:nvPr/>
-        </p:nvSpPr>
-        <p:spPr>
-          <a:xfrm>
-            <a:off x="6545758" y="3748087"/>
-            <a:ext cx="2046818" cy="257175"/>
-          </a:xfrm>
-          <a:prstGeom prst="rect">
-            <a:avLst/>
-          </a:prstGeom>
-          <a:noFill/>
-        </p:spPr>
-        <p:txBody>
-          <a:bodyPr wrap="square" lIns="0" rIns="0" tIns="0" bIns="0" anchor="t">
-            <a:spAutoFit/>
-          </a:bodyPr>
-          <a:lstStyle/>
-          <a:p>
-            <a:pPr algn="l"/>
-            <a:r>
-              <a:rPr b="1" sz="1500" i="0" u="none">
-                <a:solidFill>
-                  <a:srgbClr val="9F1239"/>
-                </a:solidFill>
-                <a:latin typeface="Noto Sans KR"/>
-              </a:rPr>
-              <a:t>산출물 회귀</a:t>
-            </a:r>
-          </a:p>
-        </p:txBody>
-      </p:sp>
-      <p:sp>
-        <p:nvSpPr>
-          <p:cNvPr id="19" name="TextBox 18"/>
-          <p:cNvSpPr txBox="1"/>
-          <p:nvPr/>
-        </p:nvSpPr>
-        <p:spPr>
-          <a:xfrm>
-            <a:off x="6545758" y="4081462"/>
-            <a:ext cx="1949350" cy="228600"/>
-          </a:xfrm>
-          <a:prstGeom prst="rect">
-            <a:avLst/>
-          </a:prstGeom>
-          <a:noFill/>
-        </p:spPr>
-        <p:txBody>
-          <a:bodyPr wrap="square" lIns="0" rIns="0" tIns="0" bIns="0" anchor="t">
-            <a:spAutoFit/>
-          </a:bodyPr>
-          <a:lstStyle/>
-          <a:p>
-            <a:pPr algn="l"/>
-            <a:r>
-              <a:rPr b="0" sz="1350" i="0" u="none">
-                <a:solidFill>
-                  <a:srgbClr val="4C0519"/>
-                </a:solidFill>
-                <a:latin typeface="Noto Sans KR"/>
-              </a:rPr>
-              <a:t>미충족 시 Feature 삭제</a:t>
-            </a:r>
-          </a:p>
-        </p:txBody>
-      </p:sp>
-      <p:sp>
-        <p:nvSpPr>
-          <p:cNvPr id="20" name="TextBox 19"/>
-          <p:cNvSpPr txBox="1"/>
-          <p:nvPr/>
-        </p:nvSpPr>
-        <p:spPr>
-          <a:xfrm>
-            <a:off x="9394775" y="3500437"/>
-            <a:ext cx="1949350" cy="171450"/>
-          </a:xfrm>
-          <a:prstGeom prst="rect">
-            <a:avLst/>
-          </a:prstGeom>
-          <a:noFill/>
-        </p:spPr>
-        <p:txBody>
-          <a:bodyPr wrap="square" lIns="0" rIns="0" tIns="0" bIns="0" anchor="t">
-            <a:spAutoFit/>
-          </a:bodyPr>
-          <a:lstStyle/>
-          <a:p>
-            <a:pPr algn="l"/>
-            <a:r>
-              <a:rPr b="0" sz="1200" i="0" u="none">
-                <a:solidFill>
-                  <a:srgbClr val="16A34A"/>
-                </a:solidFill>
-                <a:latin typeface="Noto Sans KR ExtraBold"/>
-              </a:rPr>
-              <a:t>STEP 03</a:t>
-            </a:r>
-          </a:p>
-        </p:txBody>
-      </p:sp>
-      <p:sp>
-        <p:nvSpPr>
-          <p:cNvPr id="21" name="TextBox 20"/>
-          <p:cNvSpPr txBox="1"/>
-          <p:nvPr/>
-        </p:nvSpPr>
-        <p:spPr>
-          <a:xfrm>
-            <a:off x="9394775" y="3748087"/>
-            <a:ext cx="2046818" cy="257175"/>
-          </a:xfrm>
-          <a:prstGeom prst="rect">
-            <a:avLst/>
-          </a:prstGeom>
-          <a:noFill/>
-        </p:spPr>
-        <p:txBody>
-          <a:bodyPr wrap="square" lIns="0" rIns="0" tIns="0" bIns="0" anchor="t">
-            <a:spAutoFit/>
-          </a:bodyPr>
-          <a:lstStyle/>
-          <a:p>
-            <a:pPr algn="l"/>
-            <a:r>
-              <a:rPr b="1" sz="1500" i="0" u="none">
-                <a:solidFill>
-                  <a:srgbClr val="14532D"/>
-                </a:solidFill>
-                <a:latin typeface="Noto Sans KR"/>
-              </a:rPr>
-              <a:t>운영서버 배포</a:t>
-            </a:r>
-          </a:p>
-        </p:txBody>
-      </p:sp>
-      <p:sp>
-        <p:nvSpPr>
-          <p:cNvPr id="22" name="TextBox 21"/>
-          <p:cNvSpPr txBox="1"/>
-          <p:nvPr/>
-        </p:nvSpPr>
-        <p:spPr>
-          <a:xfrm>
-            <a:off x="9394775" y="4081462"/>
-            <a:ext cx="1949350" cy="228600"/>
-          </a:xfrm>
-          <a:prstGeom prst="rect">
-            <a:avLst/>
-          </a:prstGeom>
-          <a:noFill/>
-        </p:spPr>
-        <p:txBody>
-          <a:bodyPr wrap="square" lIns="0" rIns="0" tIns="0" bIns="0" anchor="t">
-            <a:spAutoFit/>
-          </a:bodyPr>
-          <a:lstStyle/>
-          <a:p>
-            <a:pPr algn="l"/>
-            <a:r>
-              <a:rPr b="0" sz="1350" i="0" u="none">
-                <a:solidFill>
-                  <a:srgbClr val="14532D"/>
-                </a:solidFill>
-                <a:latin typeface="Noto Sans KR"/>
-              </a:rPr>
-              <a:t>검증 Commit 최종 반영</a:t>
+              <a:t>master (Prod)</a:t>
             </a:r>
           </a:p>
         </p:txBody>
@@ -7170,11 +6900,11 @@
             <a:r>
               <a:rPr b="1" sz="1200" i="0" u="none">
                 <a:solidFill>
-                  <a:srgbClr val="D97706"/>
+                  <a:srgbClr val="2563EB"/>
                 </a:solidFill>
                 <a:latin typeface="Noto Sans KR"/>
               </a:rPr>
-              <a:t>LEGACY CODE QUALITY CONTROL</a:t>
+              <a:t>LEGACY GOVERNANCE</a:t>
             </a:r>
           </a:p>
         </p:txBody>
@@ -7203,13 +6933,13 @@
           <a:p>
             <a:pPr algn="l"/>
             <a:r>
-              <a:rPr b="1" sz="2400" i="0" u="none">
+              <a:rPr b="0" sz="2400" i="0" u="none">
                 <a:solidFill>
                   <a:srgbClr val="0F172A"/>
                 </a:solidFill>
-                <a:latin typeface="Noto Sans KR"/>
-              </a:rPr>
-              <a:t>기존/레거시 소스 품질 관리 전략</a:t>
+                <a:latin typeface="Noto Sans KR ExtraBold"/>
+              </a:rPr>
+              <a:t>기존 소스 품질 관제 체계 (비-바이브 코딩 프로젝트)</a:t>
             </a:r>
           </a:p>
         </p:txBody>
@@ -7230,8 +6960,8 @@
         </p:blipFill>
         <p:spPr>
           <a:xfrm>
-            <a:off x="609600" y="2967037"/>
-            <a:ext cx="3505200" cy="1876425"/>
+            <a:off x="609600" y="2838450"/>
+            <a:ext cx="3505200" cy="2171700"/>
           </a:xfrm>
           <a:prstGeom prst="rect">
             <a:avLst/>
@@ -7254,8 +6984,8 @@
         </p:blipFill>
         <p:spPr>
           <a:xfrm>
-            <a:off x="4343400" y="2967037"/>
-            <a:ext cx="3505200" cy="1876425"/>
+            <a:off x="4343400" y="2838450"/>
+            <a:ext cx="3505200" cy="2171700"/>
           </a:xfrm>
           <a:prstGeom prst="rect">
             <a:avLst/>
@@ -7271,30 +7001,6 @@
           <p:nvPr/>
         </p:nvPicPr>
         <p:blipFill>
-          <a:blip r:embed="rId2"/>
-          <a:stretch>
-            <a:fillRect/>
-          </a:stretch>
-        </p:blipFill>
-        <p:spPr>
-          <a:xfrm>
-            <a:off x="8077200" y="2967037"/>
-            <a:ext cx="3505200" cy="1876425"/>
-          </a:xfrm>
-          <a:prstGeom prst="rect">
-            <a:avLst/>
-          </a:prstGeom>
-        </p:spPr>
-      </p:pic>
-      <p:pic>
-        <p:nvPicPr>
-          <p:cNvPr id="7" name="Picture 6" descr="image.png"/>
-          <p:cNvPicPr>
-            <a:picLocks noChangeAspect="1"/>
-          </p:cNvPicPr>
-          <p:nvPr/>
-        </p:nvPicPr>
-        <p:blipFill>
           <a:blip r:embed="rId3"/>
           <a:stretch>
             <a:fillRect/>
@@ -7302,62 +7008,123 @@
         </p:blipFill>
         <p:spPr>
           <a:xfrm>
-            <a:off x="885825" y="3243262"/>
-            <a:ext cx="381000" cy="381000"/>
+            <a:off x="8077200" y="2838450"/>
+            <a:ext cx="3505200" cy="2171700"/>
           </a:xfrm>
           <a:prstGeom prst="rect">
             <a:avLst/>
           </a:prstGeom>
         </p:spPr>
       </p:pic>
-      <p:pic>
-        <p:nvPicPr>
-          <p:cNvPr id="8" name="Picture 7" descr="image.png"/>
-          <p:cNvPicPr>
-            <a:picLocks noChangeAspect="1"/>
-          </p:cNvPicPr>
-          <p:nvPr/>
-        </p:nvPicPr>
-        <p:blipFill>
-          <a:blip r:embed="rId4"/>
-          <a:stretch>
-            <a:fillRect/>
-          </a:stretch>
-        </p:blipFill>
-        <p:spPr>
-          <a:xfrm>
-            <a:off x="4619625" y="3243262"/>
-            <a:ext cx="381000" cy="381000"/>
-          </a:xfrm>
-          <a:prstGeom prst="rect">
-            <a:avLst/>
-          </a:prstGeom>
-        </p:spPr>
-      </p:pic>
-      <p:pic>
-        <p:nvPicPr>
-          <p:cNvPr id="9" name="Picture 8" descr="image.png"/>
-          <p:cNvPicPr>
-            <a:picLocks noChangeAspect="1"/>
-          </p:cNvPicPr>
-          <p:nvPr/>
-        </p:nvPicPr>
-        <p:blipFill>
-          <a:blip r:embed="rId5"/>
-          <a:stretch>
-            <a:fillRect/>
-          </a:stretch>
-        </p:blipFill>
-        <p:spPr>
-          <a:xfrm>
-            <a:off x="8353425" y="3243262"/>
-            <a:ext cx="381000" cy="381000"/>
-          </a:xfrm>
-          <a:prstGeom prst="rect">
-            <a:avLst/>
-          </a:prstGeom>
-        </p:spPr>
-      </p:pic>
+      <p:sp>
+        <p:nvSpPr>
+          <p:cNvPr id="7" name="TextBox 6"/>
+          <p:cNvSpPr txBox="1"/>
+          <p:nvPr/>
+        </p:nvSpPr>
+        <p:spPr>
+          <a:xfrm>
+            <a:off x="914400" y="3181350"/>
+            <a:ext cx="2895600" cy="266700"/>
+          </a:xfrm>
+          <a:prstGeom prst="rect">
+            <a:avLst/>
+          </a:prstGeom>
+          <a:noFill/>
+        </p:spPr>
+        <p:txBody>
+          <a:bodyPr wrap="square" lIns="0" rIns="0" tIns="0" bIns="0" anchor="t">
+            <a:spAutoFit/>
+          </a:bodyPr>
+          <a:lstStyle/>
+          <a:p>
+            <a:pPr algn="l"/>
+            <a:r>
+              <a:rPr b="0" sz="1800" i="0" u="none">
+                <a:solidFill>
+                  <a:srgbClr val="2563EB"/>
+                </a:solidFill>
+                <a:latin typeface="Noto Sans KR ExtraBold"/>
+              </a:rPr>
+              <a:t>01</a:t>
+            </a:r>
+          </a:p>
+        </p:txBody>
+      </p:sp>
+      <p:sp>
+        <p:nvSpPr>
+          <p:cNvPr id="8" name="TextBox 7"/>
+          <p:cNvSpPr txBox="1"/>
+          <p:nvPr/>
+        </p:nvSpPr>
+        <p:spPr>
+          <a:xfrm>
+            <a:off x="914400" y="3562350"/>
+            <a:ext cx="3040380" cy="257175"/>
+          </a:xfrm>
+          <a:prstGeom prst="rect">
+            <a:avLst/>
+          </a:prstGeom>
+          <a:noFill/>
+        </p:spPr>
+        <p:txBody>
+          <a:bodyPr wrap="square" lIns="0" rIns="0" tIns="0" bIns="0" anchor="t">
+            <a:spAutoFit/>
+          </a:bodyPr>
+          <a:lstStyle/>
+          <a:p>
+            <a:pPr algn="l"/>
+            <a:r>
+              <a:rPr b="1" sz="1500" i="0" u="none">
+                <a:solidFill>
+                  <a:srgbClr val="0F172A"/>
+                </a:solidFill>
+                <a:latin typeface="Noto Sans KR"/>
+              </a:rPr>
+              <a:t>Spring 베이스 범용성</a:t>
+            </a:r>
+          </a:p>
+        </p:txBody>
+      </p:sp>
+      <p:sp>
+        <p:nvSpPr>
+          <p:cNvPr id="9" name="TextBox 8"/>
+          <p:cNvSpPr txBox="1"/>
+          <p:nvPr/>
+        </p:nvSpPr>
+        <p:spPr>
+          <a:xfrm>
+            <a:off x="914400" y="3933825"/>
+            <a:ext cx="2895600" cy="771525"/>
+          </a:xfrm>
+          <a:prstGeom prst="rect">
+            <a:avLst/>
+          </a:prstGeom>
+          <a:noFill/>
+        </p:spPr>
+        <p:txBody>
+          <a:bodyPr wrap="square" lIns="0" rIns="0" tIns="0" bIns="0" anchor="t">
+            <a:spAutoFit/>
+          </a:bodyPr>
+          <a:lstStyle/>
+          <a:p>
+            <a:pPr algn="l">
+              <a:lnSpc>
+                <a:spcPts val="2025"/>
+              </a:lnSpc>
+            </a:pPr>
+            <a:r>
+              <a:rPr b="0" sz="1350" i="0" u="none">
+                <a:solidFill>
+                  <a:srgbClr val="334155"/>
+                </a:solidFill>
+                <a:latin typeface="Noto Sans KR"/>
+              </a:rPr>
+              <a:t>레거시 프레임워크를 범용성 높은 Spring 기반 아키텍처로 재구성하여 구조 표준화.</a:t>
+            </a:r>
+          </a:p>
+        </p:txBody>
+      </p:sp>
       <p:sp>
         <p:nvSpPr>
           <p:cNvPr id="10" name="TextBox 9"/>
@@ -7366,8 +7133,8 @@
         </p:nvSpPr>
         <p:spPr>
           <a:xfrm>
-            <a:off x="885825" y="3776662"/>
-            <a:ext cx="3100387" cy="257175"/>
+            <a:off x="4648200" y="3181350"/>
+            <a:ext cx="2895600" cy="266700"/>
           </a:xfrm>
           <a:prstGeom prst="rect">
             <a:avLst/>
@@ -7382,27 +7149,101 @@
           <a:p>
             <a:pPr algn="l"/>
             <a:r>
+              <a:rPr b="0" sz="1800" i="0" u="none">
+                <a:solidFill>
+                  <a:srgbClr val="2563EB"/>
+                </a:solidFill>
+                <a:latin typeface="Noto Sans KR ExtraBold"/>
+              </a:rPr>
+              <a:t>02</a:t>
+            </a:r>
+          </a:p>
+        </p:txBody>
+      </p:sp>
+      <p:sp>
+        <p:nvSpPr>
+          <p:cNvPr id="11" name="TextBox 10"/>
+          <p:cNvSpPr txBox="1"/>
+          <p:nvPr/>
+        </p:nvSpPr>
+        <p:spPr>
+          <a:xfrm>
+            <a:off x="4648200" y="3562350"/>
+            <a:ext cx="3040380" cy="257175"/>
+          </a:xfrm>
+          <a:prstGeom prst="rect">
+            <a:avLst/>
+          </a:prstGeom>
+          <a:noFill/>
+        </p:spPr>
+        <p:txBody>
+          <a:bodyPr wrap="square" lIns="0" rIns="0" tIns="0" bIns="0" anchor="t">
+            <a:spAutoFit/>
+          </a:bodyPr>
+          <a:lstStyle/>
+          <a:p>
+            <a:pPr algn="l"/>
+            <a:r>
               <a:rPr b="1" sz="1500" i="0" u="none">
                 <a:solidFill>
                   <a:srgbClr val="0F172A"/>
                 </a:solidFill>
                 <a:latin typeface="Noto Sans KR"/>
               </a:rPr>
-              <a:t>1. Spring 베이스 표준화</a:t>
-            </a:r>
-          </a:p>
-        </p:txBody>
-      </p:sp>
-      <p:sp>
-        <p:nvSpPr>
-          <p:cNvPr id="11" name="TextBox 10"/>
-          <p:cNvSpPr txBox="1"/>
-          <p:nvPr/>
-        </p:nvSpPr>
-        <p:spPr>
-          <a:xfrm>
-            <a:off x="885825" y="4110037"/>
-            <a:ext cx="2952750" cy="457200"/>
+              <a:t>규범 필수 적용</a:t>
+            </a:r>
+          </a:p>
+        </p:txBody>
+      </p:sp>
+      <p:sp>
+        <p:nvSpPr>
+          <p:cNvPr id="12" name="TextBox 11"/>
+          <p:cNvSpPr txBox="1"/>
+          <p:nvPr/>
+        </p:nvSpPr>
+        <p:spPr>
+          <a:xfrm>
+            <a:off x="4648200" y="3933825"/>
+            <a:ext cx="2895600" cy="771525"/>
+          </a:xfrm>
+          <a:prstGeom prst="rect">
+            <a:avLst/>
+          </a:prstGeom>
+          <a:noFill/>
+        </p:spPr>
+        <p:txBody>
+          <a:bodyPr wrap="square" lIns="0" rIns="0" tIns="0" bIns="0" anchor="t">
+            <a:spAutoFit/>
+          </a:bodyPr>
+          <a:lstStyle/>
+          <a:p>
+            <a:pPr algn="l">
+              <a:lnSpc>
+                <a:spcPts val="2025"/>
+              </a:lnSpc>
+            </a:pPr>
+            <a:r>
+              <a:rPr b="0" sz="1350" i="0" u="none">
+                <a:solidFill>
+                  <a:srgbClr val="334155"/>
+                </a:solidFill>
+                <a:latin typeface="Noto Sans KR"/>
+              </a:rPr>
+              <a:t>개발 단계와 동일한 코딩 컨벤션 및 안티패턴 규칙을 레거시 관제에도 강제 적용.</a:t>
+            </a:r>
+          </a:p>
+        </p:txBody>
+      </p:sp>
+      <p:sp>
+        <p:nvSpPr>
+          <p:cNvPr id="13" name="TextBox 12"/>
+          <p:cNvSpPr txBox="1"/>
+          <p:nvPr/>
+        </p:nvSpPr>
+        <p:spPr>
+          <a:xfrm>
+            <a:off x="8382000" y="3181350"/>
+            <a:ext cx="2895600" cy="266700"/>
           </a:xfrm>
           <a:prstGeom prst="rect">
             <a:avLst/>
@@ -7417,229 +7258,91 @@
           <a:p>
             <a:pPr algn="l"/>
             <a:r>
+              <a:rPr b="0" sz="1800" i="0" u="none">
+                <a:solidFill>
+                  <a:srgbClr val="0F172A"/>
+                </a:solidFill>
+                <a:latin typeface="Noto Sans KR ExtraBold"/>
+              </a:rPr>
+              <a:t>03</a:t>
+            </a:r>
+          </a:p>
+        </p:txBody>
+      </p:sp>
+      <p:sp>
+        <p:nvSpPr>
+          <p:cNvPr id="14" name="TextBox 13"/>
+          <p:cNvSpPr txBox="1"/>
+          <p:nvPr/>
+        </p:nvSpPr>
+        <p:spPr>
+          <a:xfrm>
+            <a:off x="8382000" y="3562350"/>
+            <a:ext cx="3040380" cy="257175"/>
+          </a:xfrm>
+          <a:prstGeom prst="rect">
+            <a:avLst/>
+          </a:prstGeom>
+          <a:noFill/>
+        </p:spPr>
+        <p:txBody>
+          <a:bodyPr wrap="square" lIns="0" rIns="0" tIns="0" bIns="0" anchor="t">
+            <a:spAutoFit/>
+          </a:bodyPr>
+          <a:lstStyle/>
+          <a:p>
+            <a:pPr algn="l"/>
+            <a:r>
+              <a:rPr b="1" sz="1500" i="0" u="none">
+                <a:solidFill>
+                  <a:srgbClr val="0F172A"/>
+                </a:solidFill>
+                <a:latin typeface="Noto Sans KR"/>
+              </a:rPr>
+              <a:t>Log 기반 AI 검증</a:t>
+            </a:r>
+          </a:p>
+        </p:txBody>
+      </p:sp>
+      <p:sp>
+        <p:nvSpPr>
+          <p:cNvPr id="15" name="TextBox 14"/>
+          <p:cNvSpPr txBox="1"/>
+          <p:nvPr/>
+        </p:nvSpPr>
+        <p:spPr>
+          <a:xfrm>
+            <a:off x="8382000" y="3933825"/>
+            <a:ext cx="2895600" cy="771525"/>
+          </a:xfrm>
+          <a:prstGeom prst="rect">
+            <a:avLst/>
+          </a:prstGeom>
+          <a:noFill/>
+        </p:spPr>
+        <p:txBody>
+          <a:bodyPr wrap="square" lIns="0" rIns="0" tIns="0" bIns="0" anchor="t">
+            <a:spAutoFit/>
+          </a:bodyPr>
+          <a:lstStyle/>
+          <a:p>
+            <a:pPr algn="l">
+              <a:lnSpc>
+                <a:spcPts val="2025"/>
+              </a:lnSpc>
+            </a:pPr>
+            <a:r>
               <a:rPr b="0" sz="1350" i="0" u="none">
                 <a:solidFill>
-                  <a:srgbClr val="475569"/>
+                  <a:srgbClr val="334155"/>
                 </a:solidFill>
                 <a:latin typeface="Noto Sans KR"/>
               </a:rPr>
-              <a:t>범용성 높은 프레임워크 기반으로 구조 이식</a:t>
-            </a:r>
-          </a:p>
-        </p:txBody>
-      </p:sp>
-      <p:sp>
-        <p:nvSpPr>
-          <p:cNvPr id="12" name="TextBox 11"/>
-          <p:cNvSpPr txBox="1"/>
-          <p:nvPr/>
-        </p:nvSpPr>
-        <p:spPr>
-          <a:xfrm>
-            <a:off x="4619625" y="3776662"/>
-            <a:ext cx="3100387" cy="257175"/>
-          </a:xfrm>
-          <a:prstGeom prst="rect">
-            <a:avLst/>
-          </a:prstGeom>
-          <a:noFill/>
-        </p:spPr>
-        <p:txBody>
-          <a:bodyPr wrap="square" lIns="0" rIns="0" tIns="0" bIns="0" anchor="t">
-            <a:spAutoFit/>
-          </a:bodyPr>
-          <a:lstStyle/>
-          <a:p>
-            <a:pPr algn="l"/>
-            <a:r>
-              <a:rPr b="1" sz="1500" i="0" u="none">
-                <a:solidFill>
-                  <a:srgbClr val="0F172A"/>
-                </a:solidFill>
-                <a:latin typeface="Noto Sans KR"/>
-              </a:rPr>
-              <a:t>2. 컨벤션·안티패턴 강제</a:t>
-            </a:r>
-          </a:p>
-        </p:txBody>
-      </p:sp>
-      <p:sp>
-        <p:nvSpPr>
-          <p:cNvPr id="13" name="TextBox 12"/>
-          <p:cNvSpPr txBox="1"/>
-          <p:nvPr/>
-        </p:nvSpPr>
-        <p:spPr>
-          <a:xfrm>
-            <a:off x="4619625" y="4110037"/>
-            <a:ext cx="2952750" cy="228600"/>
-          </a:xfrm>
-          <a:prstGeom prst="rect">
-            <a:avLst/>
-          </a:prstGeom>
-          <a:noFill/>
-        </p:spPr>
-        <p:txBody>
-          <a:bodyPr wrap="square" lIns="0" rIns="0" tIns="0" bIns="0" anchor="t">
-            <a:spAutoFit/>
-          </a:bodyPr>
-          <a:lstStyle/>
-          <a:p>
-            <a:pPr algn="l"/>
-            <a:r>
-              <a:rPr b="0" sz="1350" i="0" u="none">
-                <a:solidFill>
-                  <a:srgbClr val="475569"/>
-                </a:solidFill>
-                <a:latin typeface="Noto Sans KR"/>
-              </a:rPr>
-              <a:t>기존 소스 가이드라인 필수 적용</a:t>
-            </a:r>
-          </a:p>
-        </p:txBody>
-      </p:sp>
-      <p:sp>
-        <p:nvSpPr>
-          <p:cNvPr id="14" name="TextBox 13"/>
-          <p:cNvSpPr txBox="1"/>
-          <p:nvPr/>
-        </p:nvSpPr>
-        <p:spPr>
-          <a:xfrm>
-            <a:off x="8353425" y="3776662"/>
-            <a:ext cx="3100387" cy="257175"/>
-          </a:xfrm>
-          <a:prstGeom prst="rect">
-            <a:avLst/>
-          </a:prstGeom>
-          <a:noFill/>
-        </p:spPr>
-        <p:txBody>
-          <a:bodyPr wrap="square" lIns="0" rIns="0" tIns="0" bIns="0" anchor="t">
-            <a:spAutoFit/>
-          </a:bodyPr>
-          <a:lstStyle/>
-          <a:p>
-            <a:pPr algn="l"/>
-            <a:r>
-              <a:rPr b="1" sz="1500" i="0" u="none">
-                <a:solidFill>
-                  <a:srgbClr val="0F172A"/>
-                </a:solidFill>
-                <a:latin typeface="Noto Sans KR"/>
-              </a:rPr>
-              <a:t>3. 로그 기반 Prompt 검증</a:t>
-            </a:r>
-          </a:p>
-        </p:txBody>
-      </p:sp>
-      <p:sp>
-        <p:nvSpPr>
-          <p:cNvPr id="15" name="TextBox 14"/>
-          <p:cNvSpPr txBox="1"/>
-          <p:nvPr/>
-        </p:nvSpPr>
-        <p:spPr>
-          <a:xfrm>
-            <a:off x="8353425" y="4110037"/>
-            <a:ext cx="2952750" cy="457200"/>
-          </a:xfrm>
-          <a:prstGeom prst="rect">
-            <a:avLst/>
-          </a:prstGeom>
-          <a:noFill/>
-        </p:spPr>
-        <p:txBody>
-          <a:bodyPr wrap="square" lIns="0" rIns="0" tIns="0" bIns="0" anchor="t">
-            <a:spAutoFit/>
-          </a:bodyPr>
-          <a:lstStyle/>
-          <a:p>
-            <a:pPr algn="l"/>
-            <a:r>
-              <a:rPr b="0" sz="1350" i="0" u="none">
-                <a:solidFill>
-                  <a:srgbClr val="475569"/>
-                </a:solidFill>
-                <a:latin typeface="Noto Sans KR"/>
-              </a:rPr>
-              <a:t>실행 로그 프롬프트 변환으로 동작 무결성 확보</a:t>
-            </a:r>
-          </a:p>
-        </p:txBody>
-      </p:sp>
-      <p:pic>
-        <p:nvPicPr>
-          <p:cNvPr id="16" name="Picture 15" descr="image.png"/>
-          <p:cNvPicPr>
-            <a:picLocks noChangeAspect="1"/>
-          </p:cNvPicPr>
-          <p:nvPr/>
-        </p:nvPicPr>
-        <p:blipFill>
-          <a:blip r:embed="rId6"/>
-          <a:stretch>
-            <a:fillRect/>
-          </a:stretch>
-        </p:blipFill>
-        <p:spPr>
-          <a:xfrm>
-            <a:off x="1009501" y="3348037"/>
-            <a:ext cx="133498" cy="171450"/>
-          </a:xfrm>
-          <a:prstGeom prst="rect">
-            <a:avLst/>
-          </a:prstGeom>
-        </p:spPr>
-      </p:pic>
-      <p:pic>
-        <p:nvPicPr>
-          <p:cNvPr id="17" name="Picture 16" descr="image.png"/>
-          <p:cNvPicPr>
-            <a:picLocks noChangeAspect="1"/>
-          </p:cNvPicPr>
-          <p:nvPr/>
-        </p:nvPicPr>
-        <p:blipFill>
-          <a:blip r:embed="rId7"/>
-          <a:stretch>
-            <a:fillRect/>
-          </a:stretch>
-        </p:blipFill>
-        <p:spPr>
-          <a:xfrm>
-            <a:off x="4743301" y="3348037"/>
-            <a:ext cx="133498" cy="171450"/>
-          </a:xfrm>
-          <a:prstGeom prst="rect">
-            <a:avLst/>
-          </a:prstGeom>
-        </p:spPr>
-      </p:pic>
-      <p:pic>
-        <p:nvPicPr>
-          <p:cNvPr id="18" name="Picture 17" descr="image.png"/>
-          <p:cNvPicPr>
-            <a:picLocks noChangeAspect="1"/>
-          </p:cNvPicPr>
-          <p:nvPr/>
-        </p:nvPicPr>
-        <p:blipFill>
-          <a:blip r:embed="rId8"/>
-          <a:stretch>
-            <a:fillRect/>
-          </a:stretch>
-        </p:blipFill>
-        <p:spPr>
-          <a:xfrm>
-            <a:off x="8477101" y="3348037"/>
-            <a:ext cx="133498" cy="171450"/>
-          </a:xfrm>
-          <a:prstGeom prst="rect">
-            <a:avLst/>
-          </a:prstGeom>
-        </p:spPr>
-      </p:pic>
+              <a:t>실행 로그 분석 데이터를 Prompt화하여 소스 품질과 동작 무결성을 AI가 검증.</a:t>
+            </a:r>
+          </a:p>
+        </p:txBody>
+      </p:sp>
     </p:spTree>
   </p:cSld>
   <p:clrMapOvr>
@@ -7654,7 +7357,7 @@
     <p:bg>
       <p:bgPr>
         <a:solidFill>
-          <a:srgbClr val="FFFFFF"/>
+          <a:srgbClr val="F8FAFC"/>
         </a:solidFill>
         <a:effectLst/>
       </p:bgPr>
@@ -7696,49 +7399,14 @@
                 </a:solidFill>
                 <a:latin typeface="Noto Sans KR"/>
               </a:rPr>
-              <a:t>MES TOOL INTEGRATION</a:t>
-            </a:r>
-          </a:p>
-        </p:txBody>
-      </p:sp>
-      <p:sp>
-        <p:nvSpPr>
-          <p:cNvPr id="3" name="TextBox 2"/>
-          <p:cNvSpPr txBox="1"/>
-          <p:nvPr/>
-        </p:nvSpPr>
-        <p:spPr>
-          <a:xfrm>
-            <a:off x="609600" y="762000"/>
-            <a:ext cx="11521440" cy="419100"/>
-          </a:xfrm>
-          <a:prstGeom prst="rect">
-            <a:avLst/>
-          </a:prstGeom>
-          <a:noFill/>
-        </p:spPr>
-        <p:txBody>
-          <a:bodyPr wrap="square" lIns="0" rIns="0" tIns="0" bIns="0" anchor="t">
-            <a:spAutoFit/>
-          </a:bodyPr>
-          <a:lstStyle/>
-          <a:p>
-            <a:pPr algn="l"/>
-            <a:r>
-              <a:rPr b="1" sz="2400" i="0" u="none">
-                <a:solidFill>
-                  <a:srgbClr val="0F172A"/>
-                </a:solidFill>
-                <a:latin typeface="Noto Sans KR"/>
-              </a:rPr>
-              <a:t>MES 핵심 Data &amp; Log 추출 Tool 개발</a:t>
+              <a:t>MES INTEGRATION</a:t>
             </a:r>
           </a:p>
         </p:txBody>
       </p:sp>
       <p:pic>
         <p:nvPicPr>
-          <p:cNvPr id="4" name="Picture 3" descr="image.png"/>
+          <p:cNvPr id="3" name="Picture 2" descr="image.png"/>
           <p:cNvPicPr>
             <a:picLocks noChangeAspect="1"/>
           </p:cNvPicPr>
@@ -7752,8 +7420,8 @@
         </p:blipFill>
         <p:spPr>
           <a:xfrm>
-            <a:off x="609600" y="2804219"/>
-            <a:ext cx="5334000" cy="2201912"/>
+            <a:off x="609600" y="2433637"/>
+            <a:ext cx="5334000" cy="2943225"/>
           </a:xfrm>
           <a:prstGeom prst="rect">
             <a:avLst/>
@@ -7762,7 +7430,7 @@
       </p:pic>
       <p:pic>
         <p:nvPicPr>
-          <p:cNvPr id="5" name="Picture 4" descr="image.png"/>
+          <p:cNvPr id="4" name="Picture 3" descr="image.png"/>
           <p:cNvPicPr>
             <a:picLocks noChangeAspect="1"/>
           </p:cNvPicPr>
@@ -7776,14 +7444,49 @@
         </p:blipFill>
         <p:spPr>
           <a:xfrm>
-            <a:off x="6248400" y="2804219"/>
-            <a:ext cx="5334000" cy="2201912"/>
+            <a:off x="6248400" y="2733675"/>
+            <a:ext cx="5334000" cy="2343150"/>
           </a:xfrm>
           <a:prstGeom prst="rect">
             <a:avLst/>
           </a:prstGeom>
         </p:spPr>
       </p:pic>
+      <p:sp>
+        <p:nvSpPr>
+          <p:cNvPr id="5" name="TextBox 4"/>
+          <p:cNvSpPr txBox="1"/>
+          <p:nvPr/>
+        </p:nvSpPr>
+        <p:spPr>
+          <a:xfrm>
+            <a:off x="609600" y="762000"/>
+            <a:ext cx="11521440" cy="419100"/>
+          </a:xfrm>
+          <a:prstGeom prst="rect">
+            <a:avLst/>
+          </a:prstGeom>
+          <a:noFill/>
+        </p:spPr>
+        <p:txBody>
+          <a:bodyPr wrap="square" lIns="0" rIns="0" tIns="0" bIns="0" anchor="t">
+            <a:spAutoFit/>
+          </a:bodyPr>
+          <a:lstStyle/>
+          <a:p>
+            <a:pPr algn="l"/>
+            <a:r>
+              <a:rPr b="0" sz="2400" i="0" u="none">
+                <a:solidFill>
+                  <a:srgbClr val="0F172A"/>
+                </a:solidFill>
+                <a:latin typeface="Noto Sans KR ExtraBold"/>
+              </a:rPr>
+              <a:t>운영 단계: MES 핵심 DATA 연동 AI Agent Tool 개발</a:t>
+            </a:r>
+          </a:p>
+        </p:txBody>
+      </p:sp>
       <p:pic>
         <p:nvPicPr>
           <p:cNvPr id="6" name="Picture 5" descr="image.png"/>
@@ -7800,8 +7503,8 @@
         </p:blipFill>
         <p:spPr>
           <a:xfrm>
-            <a:off x="952500" y="3137594"/>
-            <a:ext cx="177849" cy="228600"/>
+            <a:off x="923925" y="2719387"/>
+            <a:ext cx="1401663" cy="228600"/>
           </a:xfrm>
           <a:prstGeom prst="rect">
             <a:avLst/>
@@ -7824,8 +7527,8 @@
         </p:blipFill>
         <p:spPr>
           <a:xfrm>
-            <a:off x="6591300" y="3137594"/>
-            <a:ext cx="177849" cy="228600"/>
+            <a:off x="6562725" y="3019425"/>
+            <a:ext cx="1848594" cy="228600"/>
           </a:xfrm>
           <a:prstGeom prst="rect">
             <a:avLst/>
@@ -7840,8 +7543,8 @@
         </p:nvSpPr>
         <p:spPr>
           <a:xfrm>
-            <a:off x="1244649" y="3109019"/>
-            <a:ext cx="2118546" cy="285750"/>
+            <a:off x="923925" y="3071812"/>
+            <a:ext cx="4940617" cy="285750"/>
           </a:xfrm>
           <a:prstGeom prst="rect">
             <a:avLst/>
@@ -7862,7 +7565,7 @@
                 </a:solidFill>
                 <a:latin typeface="Noto Sans KR"/>
               </a:rPr>
-              <a:t>MES 핵심 DATA Tool</a:t>
+              <a:t>MES 주요 엔티티 활용</a:t>
             </a:r>
           </a:p>
         </p:txBody>
@@ -7875,8 +7578,8 @@
         </p:nvSpPr>
         <p:spPr>
           <a:xfrm>
-            <a:off x="952500" y="3547169"/>
-            <a:ext cx="4686300" cy="308520"/>
+            <a:off x="923925" y="3471862"/>
+            <a:ext cx="4705350" cy="771525"/>
           </a:xfrm>
           <a:prstGeom prst="rect">
             <a:avLst/>
@@ -7891,40 +7594,66 @@
           <a:p>
             <a:pPr algn="l">
               <a:lnSpc>
-                <a:spcPts val="2429"/>
+                <a:spcPts val="2025"/>
               </a:lnSpc>
             </a:pPr>
             <a:r>
-              <a:rPr b="1" sz="1350" i="0" u="none">
+              <a:rPr b="0" sz="1350" i="0" u="none">
                 <a:solidFill>
                   <a:srgbClr val="334155"/>
                 </a:solidFill>
                 <a:latin typeface="Noto Sans KR"/>
               </a:rPr>
-              <a:t>WO / LOT:</a:t>
-            </a:r>
-            <a:r>
-              <a:rPr b="0" sz="1350" i="0" u="none">
-                <a:solidFill>
-                  <a:srgbClr val="334155"/>
+              <a:t>WO, LOT, EQUIPMENT, PROCESS, TRACKIN-OUT 등 핵심 제조 데이터를 AI Agent가 즉시 조회·제어할 수 있는 표준 Tool 세트 구축.</a:t>
+            </a:r>
+          </a:p>
+        </p:txBody>
+      </p:sp>
+      <p:sp>
+        <p:nvSpPr>
+          <p:cNvPr id="10" name="TextBox 9"/>
+          <p:cNvSpPr txBox="1"/>
+          <p:nvPr/>
+        </p:nvSpPr>
+        <p:spPr>
+          <a:xfrm>
+            <a:off x="6562725" y="3371850"/>
+            <a:ext cx="4940617" cy="285750"/>
+          </a:xfrm>
+          <a:prstGeom prst="rect">
+            <a:avLst/>
+          </a:prstGeom>
+          <a:noFill/>
+        </p:spPr>
+        <p:txBody>
+          <a:bodyPr wrap="square" lIns="0" rIns="0" tIns="0" bIns="0" anchor="t">
+            <a:spAutoFit/>
+          </a:bodyPr>
+          <a:lstStyle/>
+          <a:p>
+            <a:pPr algn="l"/>
+            <a:r>
+              <a:rPr b="1" sz="1650" i="0" u="none">
+                <a:solidFill>
+                  <a:srgbClr val="0F172A"/>
                 </a:solidFill>
                 <a:latin typeface="Noto Sans KR"/>
               </a:rPr>
-              <a:t> 작업지시 및 로트 이력 연동</a:t>
-            </a:r>
-          </a:p>
-        </p:txBody>
-      </p:sp>
-      <p:sp>
-        <p:nvSpPr>
-          <p:cNvPr id="10" name="TextBox 9"/>
-          <p:cNvSpPr txBox="1"/>
-          <p:nvPr/>
-        </p:nvSpPr>
-        <p:spPr>
-          <a:xfrm>
-            <a:off x="952500" y="3969990"/>
-            <a:ext cx="4686300" cy="308520"/>
+              <a:t>인터페이스 &amp; 통신 로그 추출</a:t>
+            </a:r>
+          </a:p>
+        </p:txBody>
+      </p:sp>
+      <p:sp>
+        <p:nvSpPr>
+          <p:cNvPr id="11" name="TextBox 10"/>
+          <p:cNvSpPr txBox="1"/>
+          <p:nvPr/>
+        </p:nvSpPr>
+        <p:spPr>
+          <a:xfrm>
+            <a:off x="6562725" y="3771900"/>
+            <a:ext cx="4705350" cy="514350"/>
           </a:xfrm>
           <a:prstGeom prst="rect">
             <a:avLst/>
@@ -7939,257 +7668,165 @@
           <a:p>
             <a:pPr algn="l">
               <a:lnSpc>
-                <a:spcPts val="2429"/>
+                <a:spcPts val="2025"/>
               </a:lnSpc>
             </a:pPr>
             <a:r>
-              <a:rPr b="1" sz="1350" i="0" u="none">
+              <a:rPr b="0" sz="1350" i="0" u="none">
                 <a:solidFill>
                   <a:srgbClr val="334155"/>
                 </a:solidFill>
                 <a:latin typeface="Noto Sans KR"/>
               </a:rPr>
-              <a:t>EQUIPMENT / PROCESS:</a:t>
-            </a:r>
-            <a:r>
-              <a:rPr b="0" sz="1350" i="0" u="none">
-                <a:solidFill>
-                  <a:srgbClr val="334155"/>
-                </a:solidFill>
-                <a:latin typeface="Noto Sans KR"/>
-              </a:rPr>
-              <a:t> 설비 및 공정 상태 조회</a:t>
-            </a:r>
-          </a:p>
-        </p:txBody>
-      </p:sp>
-      <p:sp>
-        <p:nvSpPr>
-          <p:cNvPr id="11" name="TextBox 10"/>
-          <p:cNvSpPr txBox="1"/>
-          <p:nvPr/>
-        </p:nvSpPr>
-        <p:spPr>
-          <a:xfrm>
-            <a:off x="952500" y="4392810"/>
-            <a:ext cx="4686300" cy="308520"/>
-          </a:xfrm>
-          <a:prstGeom prst="rect">
-            <a:avLst/>
-          </a:prstGeom>
-          <a:noFill/>
-        </p:spPr>
-        <p:txBody>
-          <a:bodyPr wrap="square" lIns="0" rIns="0" tIns="0" bIns="0" anchor="t">
-            <a:spAutoFit/>
-          </a:bodyPr>
-          <a:lstStyle/>
-          <a:p>
-            <a:pPr algn="l">
-              <a:lnSpc>
-                <a:spcPts val="2429"/>
-              </a:lnSpc>
-            </a:pPr>
-            <a:r>
-              <a:rPr b="1" sz="1350" i="0" u="none">
-                <a:solidFill>
-                  <a:srgbClr val="334155"/>
-                </a:solidFill>
-                <a:latin typeface="Noto Sans KR"/>
-              </a:rPr>
-              <a:t>TRACK IN-OUT:</a:t>
-            </a:r>
-            <a:r>
-              <a:rPr b="0" sz="1350" i="0" u="none">
-                <a:solidFill>
-                  <a:srgbClr val="334155"/>
-                </a:solidFill>
-                <a:latin typeface="Noto Sans KR"/>
-              </a:rPr>
-              <a:t> 공정 투입·체크아웃 실시간 연계</a:t>
-            </a:r>
-          </a:p>
-        </p:txBody>
-      </p:sp>
-      <p:sp>
-        <p:nvSpPr>
-          <p:cNvPr id="12" name="TextBox 11"/>
-          <p:cNvSpPr txBox="1"/>
-          <p:nvPr/>
-        </p:nvSpPr>
-        <p:spPr>
-          <a:xfrm>
-            <a:off x="6883449" y="3109019"/>
-            <a:ext cx="2574853" cy="285750"/>
-          </a:xfrm>
-          <a:prstGeom prst="rect">
-            <a:avLst/>
-          </a:prstGeom>
-          <a:noFill/>
-        </p:spPr>
-        <p:txBody>
-          <a:bodyPr wrap="square" lIns="0" rIns="0" tIns="0" bIns="0" anchor="t">
-            <a:spAutoFit/>
-          </a:bodyPr>
-          <a:lstStyle/>
-          <a:p>
-            <a:pPr algn="l"/>
-            <a:r>
-              <a:rPr b="1" sz="1650" i="0" u="none">
-                <a:solidFill>
-                  <a:srgbClr val="0F172A"/>
-                </a:solidFill>
-                <a:latin typeface="Noto Sans KR"/>
-              </a:rPr>
-              <a:t>인터페이스 Log 추출 Tool</a:t>
-            </a:r>
-          </a:p>
-        </p:txBody>
-      </p:sp>
-      <p:sp>
-        <p:nvSpPr>
-          <p:cNvPr id="13" name="TextBox 12"/>
-          <p:cNvSpPr txBox="1"/>
-          <p:nvPr/>
-        </p:nvSpPr>
-        <p:spPr>
-          <a:xfrm>
-            <a:off x="6591300" y="3547169"/>
-            <a:ext cx="4686300" cy="308520"/>
-          </a:xfrm>
-          <a:prstGeom prst="rect">
-            <a:avLst/>
-          </a:prstGeom>
-          <a:noFill/>
-        </p:spPr>
-        <p:txBody>
-          <a:bodyPr wrap="square" lIns="0" rIns="0" tIns="0" bIns="0" anchor="t">
-            <a:spAutoFit/>
-          </a:bodyPr>
-          <a:lstStyle/>
-          <a:p>
-            <a:pPr algn="l">
-              <a:lnSpc>
-                <a:spcPts val="2429"/>
-              </a:lnSpc>
-            </a:pPr>
-            <a:r>
-              <a:rPr b="1" sz="1350" i="0" u="none">
-                <a:solidFill>
-                  <a:srgbClr val="334155"/>
-                </a:solidFill>
-                <a:latin typeface="Noto Sans KR"/>
-              </a:rPr>
-              <a:t>설비 통신 Log:</a:t>
-            </a:r>
-            <a:r>
-              <a:rPr b="0" sz="1350" i="0" u="none">
-                <a:solidFill>
-                  <a:srgbClr val="334155"/>
-                </a:solidFill>
-                <a:latin typeface="Noto Sans KR"/>
-              </a:rPr>
-              <a:t> 설비 데이터 수집 이력 자동 추출</a:t>
-            </a:r>
-          </a:p>
-        </p:txBody>
-      </p:sp>
-      <p:sp>
-        <p:nvSpPr>
-          <p:cNvPr id="14" name="TextBox 13"/>
-          <p:cNvSpPr txBox="1"/>
-          <p:nvPr/>
-        </p:nvSpPr>
-        <p:spPr>
-          <a:xfrm>
-            <a:off x="6591300" y="3969990"/>
-            <a:ext cx="4686300" cy="308520"/>
-          </a:xfrm>
-          <a:prstGeom prst="rect">
-            <a:avLst/>
-          </a:prstGeom>
-          <a:noFill/>
-        </p:spPr>
-        <p:txBody>
-          <a:bodyPr wrap="square" lIns="0" rIns="0" tIns="0" bIns="0" anchor="t">
-            <a:spAutoFit/>
-          </a:bodyPr>
-          <a:lstStyle/>
-          <a:p>
-            <a:pPr algn="l">
-              <a:lnSpc>
-                <a:spcPts val="2429"/>
-              </a:lnSpc>
-            </a:pPr>
-            <a:r>
-              <a:rPr b="1" sz="1350" i="0" u="none">
-                <a:solidFill>
-                  <a:srgbClr val="334155"/>
-                </a:solidFill>
-                <a:latin typeface="Noto Sans KR"/>
-              </a:rPr>
-              <a:t>타 시스템 IF:</a:t>
-            </a:r>
-            <a:r>
-              <a:rPr b="0" sz="1350" i="0" u="none">
-                <a:solidFill>
-                  <a:srgbClr val="334155"/>
-                </a:solidFill>
-                <a:latin typeface="Noto Sans KR"/>
-              </a:rPr>
-              <a:t> 연계 통신 규격 스펙 기반 추출</a:t>
-            </a:r>
-          </a:p>
-        </p:txBody>
-      </p:sp>
-      <p:sp>
-        <p:nvSpPr>
-          <p:cNvPr id="15" name="TextBox 14"/>
-          <p:cNvSpPr txBox="1"/>
-          <p:nvPr/>
-        </p:nvSpPr>
-        <p:spPr>
-          <a:xfrm>
-            <a:off x="6591300" y="4392810"/>
-            <a:ext cx="4686300" cy="308520"/>
-          </a:xfrm>
-          <a:prstGeom prst="rect">
-            <a:avLst/>
-          </a:prstGeom>
-          <a:noFill/>
-        </p:spPr>
-        <p:txBody>
-          <a:bodyPr wrap="square" lIns="0" rIns="0" tIns="0" bIns="0" anchor="t">
-            <a:spAutoFit/>
-          </a:bodyPr>
-          <a:lstStyle/>
-          <a:p>
-            <a:pPr algn="l">
-              <a:lnSpc>
-                <a:spcPts val="2429"/>
-              </a:lnSpc>
-            </a:pPr>
-            <a:r>
-              <a:rPr b="1" sz="1350" i="0" u="none">
-                <a:solidFill>
-                  <a:srgbClr val="334155"/>
-                </a:solidFill>
-                <a:latin typeface="Noto Sans KR"/>
-              </a:rPr>
-              <a:t>Agent 전용 Tooling:</a:t>
-            </a:r>
-            <a:r>
-              <a:rPr b="0" sz="1350" i="0" u="none">
-                <a:solidFill>
-                  <a:srgbClr val="334155"/>
-                </a:solidFill>
-                <a:latin typeface="Noto Sans KR"/>
-              </a:rPr>
-              <a:t> 원클릭 진단 및 분석 지원</a:t>
-            </a:r>
-          </a:p>
-        </p:txBody>
-      </p:sp>
+              <a:t>설비 및 외부 타 시스템과의 통신 인터페이스 규격과 MES 핵심 처리 Log를 실시간으로 자동 추출하는 전용 AI Tool 개발.</a:t>
+            </a:r>
+          </a:p>
+        </p:txBody>
+      </p:sp>
+      <p:pic>
+        <p:nvPicPr>
+          <p:cNvPr id="12" name="Picture 11" descr="image.png"/>
+          <p:cNvPicPr>
+            <a:picLocks noChangeAspect="1"/>
+          </p:cNvPicPr>
+          <p:nvPr/>
+        </p:nvPicPr>
+        <p:blipFill>
+          <a:blip r:embed="rId6"/>
+          <a:stretch>
+            <a:fillRect/>
+          </a:stretch>
+        </p:blipFill>
+        <p:spPr>
+          <a:xfrm>
+            <a:off x="923925" y="4433887"/>
+            <a:ext cx="1191666" cy="285750"/>
+          </a:xfrm>
+          <a:prstGeom prst="rect">
+            <a:avLst/>
+          </a:prstGeom>
+        </p:spPr>
+      </p:pic>
+      <p:pic>
+        <p:nvPicPr>
+          <p:cNvPr id="13" name="Picture 12" descr="image.png"/>
+          <p:cNvPicPr>
+            <a:picLocks noChangeAspect="1"/>
+          </p:cNvPicPr>
+          <p:nvPr/>
+        </p:nvPicPr>
+        <p:blipFill>
+          <a:blip r:embed="rId7"/>
+          <a:stretch>
+            <a:fillRect/>
+          </a:stretch>
+        </p:blipFill>
+        <p:spPr>
+          <a:xfrm>
+            <a:off x="2191791" y="4433887"/>
+            <a:ext cx="1228725" cy="285750"/>
+          </a:xfrm>
+          <a:prstGeom prst="rect">
+            <a:avLst/>
+          </a:prstGeom>
+        </p:spPr>
+      </p:pic>
+      <p:pic>
+        <p:nvPicPr>
+          <p:cNvPr id="14" name="Picture 13" descr="image.png"/>
+          <p:cNvPicPr>
+            <a:picLocks noChangeAspect="1"/>
+          </p:cNvPicPr>
+          <p:nvPr/>
+        </p:nvPicPr>
+        <p:blipFill>
+          <a:blip r:embed="rId8"/>
+          <a:stretch>
+            <a:fillRect/>
+          </a:stretch>
+        </p:blipFill>
+        <p:spPr>
+          <a:xfrm>
+            <a:off x="3496716" y="4433887"/>
+            <a:ext cx="1488132" cy="285750"/>
+          </a:xfrm>
+          <a:prstGeom prst="rect">
+            <a:avLst/>
+          </a:prstGeom>
+        </p:spPr>
+      </p:pic>
+      <p:pic>
+        <p:nvPicPr>
+          <p:cNvPr id="15" name="Picture 14" descr="image.png"/>
+          <p:cNvPicPr>
+            <a:picLocks noChangeAspect="1"/>
+          </p:cNvPicPr>
+          <p:nvPr/>
+        </p:nvPicPr>
+        <p:blipFill>
+          <a:blip r:embed="rId9"/>
+          <a:stretch>
+            <a:fillRect/>
+          </a:stretch>
+        </p:blipFill>
+        <p:spPr>
+          <a:xfrm>
+            <a:off x="923925" y="4795837"/>
+            <a:ext cx="1228725" cy="266700"/>
+          </a:xfrm>
+          <a:prstGeom prst="rect">
+            <a:avLst/>
+          </a:prstGeom>
+        </p:spPr>
+      </p:pic>
+      <p:pic>
+        <p:nvPicPr>
+          <p:cNvPr id="16" name="Picture 15" descr="image.png"/>
+          <p:cNvPicPr>
+            <a:picLocks noChangeAspect="1"/>
+          </p:cNvPicPr>
+          <p:nvPr/>
+        </p:nvPicPr>
+        <p:blipFill>
+          <a:blip r:embed="rId10"/>
+          <a:stretch>
+            <a:fillRect/>
+          </a:stretch>
+        </p:blipFill>
+        <p:spPr>
+          <a:xfrm>
+            <a:off x="6562725" y="4476750"/>
+            <a:ext cx="1140023" cy="285750"/>
+          </a:xfrm>
+          <a:prstGeom prst="rect">
+            <a:avLst/>
+          </a:prstGeom>
+        </p:spPr>
+      </p:pic>
+      <p:pic>
+        <p:nvPicPr>
+          <p:cNvPr id="17" name="Picture 16" descr="image.png"/>
+          <p:cNvPicPr>
+            <a:picLocks noChangeAspect="1"/>
+          </p:cNvPicPr>
+          <p:nvPr/>
+        </p:nvPicPr>
+        <p:blipFill>
+          <a:blip r:embed="rId11"/>
+          <a:stretch>
+            <a:fillRect/>
+          </a:stretch>
+        </p:blipFill>
+        <p:spPr>
+          <a:xfrm>
+            <a:off x="7778948" y="4476750"/>
+            <a:ext cx="1159519" cy="285750"/>
+          </a:xfrm>
+          <a:prstGeom prst="rect">
+            <a:avLst/>
+          </a:prstGeom>
+        </p:spPr>
+      </p:pic>
     </p:spTree>
   </p:cSld>
   <p:clrMapOvr>
@@ -8246,7 +7883,7 @@
                 </a:solidFill>
                 <a:latin typeface="Noto Sans KR"/>
               </a:rPr>
-              <a:t>PROMPT DATA PIPELINE</a:t>
+              <a:t>PROMPT MANAGEMENT</a:t>
             </a:r>
           </a:p>
         </p:txBody>
@@ -8275,13 +7912,13 @@
           <a:p>
             <a:pPr algn="l"/>
             <a:r>
-              <a:rPr b="1" sz="2400" i="0" u="none">
+              <a:rPr b="0" sz="2400" i="0" u="none">
                 <a:solidFill>
                   <a:srgbClr val="0F172A"/>
                 </a:solidFill>
-                <a:latin typeface="Noto Sans KR"/>
-              </a:rPr>
-              <a:t>Prompt 데이터 자동화 &amp; GUID/Alarm 관리</a:t>
+                <a:latin typeface="Noto Sans KR ExtraBold"/>
+              </a:rPr>
+              <a:t>프롬프트 파이프라인 관리 및 엔지니어링 고도화</a:t>
             </a:r>
           </a:p>
         </p:txBody>
@@ -8302,8 +7939,8 @@
         </p:blipFill>
         <p:spPr>
           <a:xfrm>
-            <a:off x="609600" y="2967037"/>
-            <a:ext cx="3505200" cy="1876425"/>
+            <a:off x="609600" y="3181350"/>
+            <a:ext cx="2600325" cy="1447800"/>
           </a:xfrm>
           <a:prstGeom prst="rect">
             <a:avLst/>
@@ -8326,8 +7963,8 @@
         </p:blipFill>
         <p:spPr>
           <a:xfrm>
-            <a:off x="4343400" y="2967037"/>
-            <a:ext cx="3505200" cy="1876425"/>
+            <a:off x="3400425" y="3181350"/>
+            <a:ext cx="2600325" cy="1447800"/>
           </a:xfrm>
           <a:prstGeom prst="rect">
             <a:avLst/>
@@ -8350,8 +7987,8 @@
         </p:blipFill>
         <p:spPr>
           <a:xfrm>
-            <a:off x="8077200" y="2967037"/>
-            <a:ext cx="3505200" cy="1876425"/>
+            <a:off x="6191250" y="3181350"/>
+            <a:ext cx="2600325" cy="1447800"/>
           </a:xfrm>
           <a:prstGeom prst="rect">
             <a:avLst/>
@@ -8367,69 +8004,91 @@
           <p:nvPr/>
         </p:nvPicPr>
         <p:blipFill>
-          <a:blip r:embed="rId3"/>
+          <a:blip r:embed="rId2"/>
           <a:stretch>
             <a:fillRect/>
           </a:stretch>
         </p:blipFill>
         <p:spPr>
           <a:xfrm>
-            <a:off x="885825" y="3243262"/>
-            <a:ext cx="381000" cy="381000"/>
+            <a:off x="8982075" y="3181350"/>
+            <a:ext cx="2600325" cy="1447800"/>
           </a:xfrm>
           <a:prstGeom prst="rect">
             <a:avLst/>
           </a:prstGeom>
         </p:spPr>
       </p:pic>
-      <p:pic>
-        <p:nvPicPr>
-          <p:cNvPr id="8" name="Picture 7" descr="image.png"/>
-          <p:cNvPicPr>
-            <a:picLocks noChangeAspect="1"/>
-          </p:cNvPicPr>
-          <p:nvPr/>
-        </p:nvPicPr>
-        <p:blipFill>
-          <a:blip r:embed="rId4"/>
-          <a:stretch>
-            <a:fillRect/>
-          </a:stretch>
-        </p:blipFill>
-        <p:spPr>
-          <a:xfrm>
-            <a:off x="4619625" y="3243262"/>
-            <a:ext cx="381000" cy="381000"/>
-          </a:xfrm>
-          <a:prstGeom prst="rect">
-            <a:avLst/>
-          </a:prstGeom>
-        </p:spPr>
-      </p:pic>
-      <p:pic>
-        <p:nvPicPr>
-          <p:cNvPr id="9" name="Picture 8" descr="image.png"/>
-          <p:cNvPicPr>
-            <a:picLocks noChangeAspect="1"/>
-          </p:cNvPicPr>
-          <p:nvPr/>
-        </p:nvPicPr>
-        <p:blipFill>
-          <a:blip r:embed="rId5"/>
-          <a:stretch>
-            <a:fillRect/>
-          </a:stretch>
-        </p:blipFill>
-        <p:spPr>
-          <a:xfrm>
-            <a:off x="8353425" y="3243262"/>
-            <a:ext cx="381000" cy="381000"/>
-          </a:xfrm>
-          <a:prstGeom prst="rect">
-            <a:avLst/>
-          </a:prstGeom>
-        </p:spPr>
-      </p:pic>
+      <p:sp>
+        <p:nvSpPr>
+          <p:cNvPr id="8" name="TextBox 7"/>
+          <p:cNvSpPr txBox="1"/>
+          <p:nvPr/>
+        </p:nvSpPr>
+        <p:spPr>
+          <a:xfrm>
+            <a:off x="838200" y="3409950"/>
+            <a:ext cx="2250281" cy="228600"/>
+          </a:xfrm>
+          <a:prstGeom prst="rect">
+            <a:avLst/>
+          </a:prstGeom>
+          <a:noFill/>
+        </p:spPr>
+        <p:txBody>
+          <a:bodyPr wrap="square" lIns="0" rIns="0" tIns="0" bIns="0" anchor="t">
+            <a:spAutoFit/>
+          </a:bodyPr>
+          <a:lstStyle/>
+          <a:p>
+            <a:pPr algn="l"/>
+            <a:r>
+              <a:rPr b="1" sz="1350" i="0" u="none">
+                <a:solidFill>
+                  <a:srgbClr val="0F172A"/>
+                </a:solidFill>
+                <a:latin typeface="Noto Sans KR"/>
+              </a:rPr>
+              <a:t>DB 매핑 &amp; JSON 생성</a:t>
+            </a:r>
+          </a:p>
+        </p:txBody>
+      </p:sp>
+      <p:sp>
+        <p:nvSpPr>
+          <p:cNvPr id="9" name="TextBox 8"/>
+          <p:cNvSpPr txBox="1"/>
+          <p:nvPr/>
+        </p:nvSpPr>
+        <p:spPr>
+          <a:xfrm>
+            <a:off x="838200" y="3714750"/>
+            <a:ext cx="2143125" cy="685800"/>
+          </a:xfrm>
+          <a:prstGeom prst="rect">
+            <a:avLst/>
+          </a:prstGeom>
+          <a:noFill/>
+        </p:spPr>
+        <p:txBody>
+          <a:bodyPr wrap="square" lIns="0" rIns="0" tIns="0" bIns="0" anchor="t">
+            <a:spAutoFit/>
+          </a:bodyPr>
+          <a:lstStyle/>
+          <a:p>
+            <a:pPr algn="l"/>
+            <a:r>
+              <a:rPr b="0" sz="1350" i="0" u="none">
+                <a:solidFill>
+                  <a:srgbClr val="334155"/>
+                </a:solidFill>
+                <a:latin typeface="Noto Sans KR"/>
+              </a:rPr>
+              <a:t>Prompt별 JPA Entity Column/Key 일치화로 자동 JSON 저장.</a:t>
+            </a:r>
+          </a:p>
+        </p:txBody>
+      </p:sp>
       <p:sp>
         <p:nvSpPr>
           <p:cNvPr id="10" name="TextBox 9"/>
@@ -8438,8 +8097,8 @@
         </p:nvSpPr>
         <p:spPr>
           <a:xfrm>
-            <a:off x="885825" y="3776662"/>
-            <a:ext cx="3100387" cy="257175"/>
+            <a:off x="3629025" y="3409950"/>
+            <a:ext cx="2250281" cy="228600"/>
           </a:xfrm>
           <a:prstGeom prst="rect">
             <a:avLst/>
@@ -8454,13 +8113,13 @@
           <a:p>
             <a:pPr algn="l"/>
             <a:r>
-              <a:rPr b="1" sz="1500" i="0" u="none">
+              <a:rPr b="1" sz="1350" i="0" u="none">
                 <a:solidFill>
                   <a:srgbClr val="0F172A"/>
                 </a:solidFill>
                 <a:latin typeface="Noto Sans KR"/>
               </a:rPr>
-              <a:t>JPA / JSON 자동 매핑</a:t>
+              <a:t>GUID 기반 메타 관리</a:t>
             </a:r>
           </a:p>
         </p:txBody>
@@ -8473,8 +8132,8 @@
         </p:nvSpPr>
         <p:spPr>
           <a:xfrm>
-            <a:off x="885825" y="4110037"/>
-            <a:ext cx="2952750" cy="228600"/>
+            <a:off x="3629025" y="3714750"/>
+            <a:ext cx="2143125" cy="685800"/>
           </a:xfrm>
           <a:prstGeom prst="rect">
             <a:avLst/>
@@ -8491,11 +8150,11 @@
             <a:r>
               <a:rPr b="0" sz="1350" i="0" u="none">
                 <a:solidFill>
-                  <a:srgbClr val="475569"/>
+                  <a:srgbClr val="334155"/>
                 </a:solidFill>
                 <a:latin typeface="Noto Sans KR"/>
               </a:rPr>
-              <a:t>Column명과 Key 일치 기반 DB 저장</a:t>
+              <a:t>GUID 부여, 실행·보관 주기 관리, Shared Prompt 및 Alarm 설정.</a:t>
             </a:r>
           </a:p>
         </p:txBody>
@@ -8508,8 +8167,8 @@
         </p:nvSpPr>
         <p:spPr>
           <a:xfrm>
-            <a:off x="4619625" y="3776662"/>
-            <a:ext cx="3100387" cy="257175"/>
+            <a:off x="6419850" y="3409950"/>
+            <a:ext cx="2250281" cy="228600"/>
           </a:xfrm>
           <a:prstGeom prst="rect">
             <a:avLst/>
@@ -8524,13 +8183,13 @@
           <a:p>
             <a:pPr algn="l"/>
             <a:r>
-              <a:rPr b="1" sz="1500" i="0" u="none">
+              <a:rPr b="1" sz="1350" i="0" u="none">
                 <a:solidFill>
                   <a:srgbClr val="0F172A"/>
                 </a:solidFill>
                 <a:latin typeface="Noto Sans KR"/>
               </a:rPr>
-              <a:t>GUID 부여 및 주기 관리</a:t>
+              <a:t>시각화 라이브러리 연동</a:t>
             </a:r>
           </a:p>
         </p:txBody>
@@ -8543,8 +8202,8 @@
         </p:nvSpPr>
         <p:spPr>
           <a:xfrm>
-            <a:off x="4619625" y="4110037"/>
-            <a:ext cx="2952750" cy="228600"/>
+            <a:off x="6419850" y="3714750"/>
+            <a:ext cx="2143125" cy="685800"/>
           </a:xfrm>
           <a:prstGeom prst="rect">
             <a:avLst/>
@@ -8561,11 +8220,11 @@
             <a:r>
               <a:rPr b="0" sz="1350" i="0" u="none">
                 <a:solidFill>
-                  <a:srgbClr val="475569"/>
+                  <a:srgbClr val="334155"/>
                 </a:solidFill>
                 <a:latin typeface="Noto Sans KR"/>
               </a:rPr>
-              <a:t>실행/보관주기 및 공유 프롬프트 관리</a:t>
+              <a:t>분석 데이터 생성 시 즉시 시각화 차트 및 알람 트리거 자동 작동.</a:t>
             </a:r>
           </a:p>
         </p:txBody>
@@ -8578,8 +8237,8 @@
         </p:nvSpPr>
         <p:spPr>
           <a:xfrm>
-            <a:off x="8353425" y="3776662"/>
-            <a:ext cx="3100387" cy="257175"/>
+            <a:off x="9210675" y="3409950"/>
+            <a:ext cx="2250281" cy="228600"/>
           </a:xfrm>
           <a:prstGeom prst="rect">
             <a:avLst/>
@@ -8594,13 +8253,13 @@
           <a:p>
             <a:pPr algn="l"/>
             <a:r>
-              <a:rPr b="1" sz="1500" i="0" u="none">
+              <a:rPr b="1" sz="1350" i="0" u="none">
                 <a:solidFill>
                   <a:srgbClr val="0F172A"/>
                 </a:solidFill>
                 <a:latin typeface="Noto Sans KR"/>
               </a:rPr>
-              <a:t>시각화 &amp; Alarm 연동</a:t>
+              <a:t>LLM 기반 성능 분석</a:t>
             </a:r>
           </a:p>
         </p:txBody>
@@ -8613,8 +8272,8 @@
         </p:nvSpPr>
         <p:spPr>
           <a:xfrm>
-            <a:off x="8353425" y="4110037"/>
-            <a:ext cx="2952750" cy="457200"/>
+            <a:off x="9210675" y="3714750"/>
+            <a:ext cx="2143125" cy="685800"/>
           </a:xfrm>
           <a:prstGeom prst="rect">
             <a:avLst/>
@@ -8631,87 +8290,15 @@
             <a:r>
               <a:rPr b="0" sz="1350" i="0" u="none">
                 <a:solidFill>
-                  <a:srgbClr val="475569"/>
+                  <a:srgbClr val="334155"/>
                 </a:solidFill>
                 <a:latin typeface="Noto Sans KR"/>
               </a:rPr>
-              <a:t>라이브러리 연동 및 이상 감지 알람 설정</a:t>
-            </a:r>
-          </a:p>
-        </p:txBody>
-      </p:sp>
-      <p:pic>
-        <p:nvPicPr>
-          <p:cNvPr id="16" name="Picture 15" descr="image.png"/>
-          <p:cNvPicPr>
-            <a:picLocks noChangeAspect="1"/>
-          </p:cNvPicPr>
-          <p:nvPr/>
-        </p:nvPicPr>
-        <p:blipFill>
-          <a:blip r:embed="rId6"/>
-          <a:stretch>
-            <a:fillRect/>
-          </a:stretch>
-        </p:blipFill>
-        <p:spPr>
-          <a:xfrm>
-            <a:off x="1009501" y="3348037"/>
-            <a:ext cx="133498" cy="171450"/>
-          </a:xfrm>
-          <a:prstGeom prst="rect">
-            <a:avLst/>
-          </a:prstGeom>
-        </p:spPr>
-      </p:pic>
-      <p:pic>
-        <p:nvPicPr>
-          <p:cNvPr id="17" name="Picture 16" descr="image.png"/>
-          <p:cNvPicPr>
-            <a:picLocks noChangeAspect="1"/>
-          </p:cNvPicPr>
-          <p:nvPr/>
-        </p:nvPicPr>
-        <p:blipFill>
-          <a:blip r:embed="rId7"/>
-          <a:stretch>
-            <a:fillRect/>
-          </a:stretch>
-        </p:blipFill>
-        <p:spPr>
-          <a:xfrm>
-            <a:off x="4743301" y="3348037"/>
-            <a:ext cx="133498" cy="171450"/>
-          </a:xfrm>
-          <a:prstGeom prst="rect">
-            <a:avLst/>
-          </a:prstGeom>
-        </p:spPr>
-      </p:pic>
-      <p:pic>
-        <p:nvPicPr>
-          <p:cNvPr id="18" name="Picture 17" descr="image.png"/>
-          <p:cNvPicPr>
-            <a:picLocks noChangeAspect="1"/>
-          </p:cNvPicPr>
-          <p:nvPr/>
-        </p:nvPicPr>
-        <p:blipFill>
-          <a:blip r:embed="rId8"/>
-          <a:stretch>
-            <a:fillRect/>
-          </a:stretch>
-        </p:blipFill>
-        <p:spPr>
-          <a:xfrm>
-            <a:off x="8477101" y="3348037"/>
-            <a:ext cx="133498" cy="171450"/>
-          </a:xfrm>
-          <a:prstGeom prst="rect">
-            <a:avLst/>
-          </a:prstGeom>
-        </p:spPr>
-      </p:pic>
+              <a:t>Prompt 통계 및 유효성 LLM 분석을 통한 지속적 엔지니어링 고도화.</a:t>
+            </a:r>
+          </a:p>
+        </p:txBody>
+      </p:sp>
     </p:spTree>
   </p:cSld>
   <p:clrMapOvr>
@@ -8746,8 +8333,8 @@
         </p:nvSpPr>
         <p:spPr>
           <a:xfrm>
-            <a:off x="609600" y="533400"/>
-            <a:ext cx="10972800" cy="647700"/>
+            <a:off x="609600" y="495300"/>
+            <a:ext cx="10972800" cy="600075"/>
           </a:xfrm>
           <a:prstGeom prst="rect">
             <a:avLst/>
@@ -8768,49 +8355,14 @@
                 </a:solidFill>
                 <a:latin typeface="Noto Sans KR"/>
               </a:rPr>
-              <a:t>PROMPT ENGINEERING</a:t>
-            </a:r>
-          </a:p>
-        </p:txBody>
-      </p:sp>
-      <p:sp>
-        <p:nvSpPr>
-          <p:cNvPr id="3" name="TextBox 2"/>
-          <p:cNvSpPr txBox="1"/>
-          <p:nvPr/>
-        </p:nvSpPr>
-        <p:spPr>
-          <a:xfrm>
-            <a:off x="609600" y="762000"/>
-            <a:ext cx="11521440" cy="419100"/>
-          </a:xfrm>
-          <a:prstGeom prst="rect">
-            <a:avLst/>
-          </a:prstGeom>
-          <a:noFill/>
-        </p:spPr>
-        <p:txBody>
-          <a:bodyPr wrap="square" lIns="0" rIns="0" tIns="0" bIns="0" anchor="t">
-            <a:spAutoFit/>
-          </a:bodyPr>
-          <a:lstStyle/>
-          <a:p>
-            <a:pPr algn="l"/>
-            <a:r>
-              <a:rPr b="1" sz="2400" i="0" u="none">
-                <a:solidFill>
-                  <a:srgbClr val="0F172A"/>
-                </a:solidFill>
-                <a:latin typeface="Noto Sans KR"/>
-              </a:rPr>
-              <a:t>LLM 분석 및 프롬프트 엔지니어링 고도화</a:t>
+              <a:t>ARCHITECTURE DIAGRAM 02</a:t>
             </a:r>
           </a:p>
         </p:txBody>
       </p:sp>
       <p:pic>
         <p:nvPicPr>
-          <p:cNvPr id="4" name="Picture 3" descr="image.png"/>
+          <p:cNvPr id="3" name="Picture 2" descr="image.png"/>
           <p:cNvPicPr>
             <a:picLocks noChangeAspect="1"/>
           </p:cNvPicPr>
@@ -8824,8 +8376,8 @@
         </p:blipFill>
         <p:spPr>
           <a:xfrm>
-            <a:off x="609600" y="3033712"/>
-            <a:ext cx="4724400" cy="1743075"/>
+            <a:off x="876300" y="1590675"/>
+            <a:ext cx="10439400" cy="704850"/>
           </a:xfrm>
           <a:prstGeom prst="rect">
             <a:avLst/>
@@ -8834,7 +8386,7 @@
       </p:pic>
       <p:pic>
         <p:nvPicPr>
-          <p:cNvPr id="5" name="Picture 4" descr="image.png"/>
+          <p:cNvPr id="4" name="Picture 3" descr="image.png"/>
           <p:cNvPicPr>
             <a:picLocks noChangeAspect="1"/>
           </p:cNvPicPr>
@@ -8848,14 +8400,49 @@
         </p:blipFill>
         <p:spPr>
           <a:xfrm>
-            <a:off x="5638800" y="2952750"/>
-            <a:ext cx="5943600" cy="876300"/>
+            <a:off x="876300" y="5562600"/>
+            <a:ext cx="10439400" cy="533400"/>
           </a:xfrm>
           <a:prstGeom prst="rect">
             <a:avLst/>
           </a:prstGeom>
         </p:spPr>
       </p:pic>
+      <p:sp>
+        <p:nvSpPr>
+          <p:cNvPr id="5" name="TextBox 4"/>
+          <p:cNvSpPr txBox="1"/>
+          <p:nvPr/>
+        </p:nvSpPr>
+        <p:spPr>
+          <a:xfrm>
+            <a:off x="609600" y="704850"/>
+            <a:ext cx="11521440" cy="390525"/>
+          </a:xfrm>
+          <a:prstGeom prst="rect">
+            <a:avLst/>
+          </a:prstGeom>
+          <a:noFill/>
+        </p:spPr>
+        <p:txBody>
+          <a:bodyPr wrap="square" lIns="0" rIns="0" tIns="0" bIns="0" anchor="t">
+            <a:spAutoFit/>
+          </a:bodyPr>
+          <a:lstStyle/>
+          <a:p>
+            <a:pPr algn="l"/>
+            <a:r>
+              <a:rPr b="0" sz="2250" i="0" u="none">
+                <a:solidFill>
+                  <a:srgbClr val="0F172A"/>
+                </a:solidFill>
+                <a:latin typeface="Noto Sans KR ExtraBold"/>
+              </a:rPr>
+              <a:t>운영 AI Agent &amp; MES Tool 서비스 전체 시스템 구성도</a:t>
+            </a:r>
+          </a:p>
+        </p:txBody>
+      </p:sp>
       <p:pic>
         <p:nvPicPr>
           <p:cNvPr id="6" name="Picture 5" descr="image.png"/>
@@ -8872,98 +8459,251 @@
         </p:blipFill>
         <p:spPr>
           <a:xfrm>
-            <a:off x="5638800" y="3981450"/>
-            <a:ext cx="5943600" cy="876300"/>
+            <a:off x="6419403" y="1866900"/>
+            <a:ext cx="118616" cy="152400"/>
           </a:xfrm>
           <a:prstGeom prst="rect">
             <a:avLst/>
           </a:prstGeom>
         </p:spPr>
       </p:pic>
-      <p:sp>
-        <p:nvSpPr>
-          <p:cNvPr id="7" name="TextBox 6"/>
-          <p:cNvSpPr txBox="1"/>
-          <p:nvPr/>
-        </p:nvSpPr>
-        <p:spPr>
-          <a:xfrm>
-            <a:off x="990600" y="3414712"/>
-            <a:ext cx="3962400" cy="609600"/>
-          </a:xfrm>
-          <a:prstGeom prst="rect">
-            <a:avLst/>
-          </a:prstGeom>
-          <a:noFill/>
-        </p:spPr>
-        <p:txBody>
-          <a:bodyPr wrap="square" lIns="0" rIns="0" tIns="0" bIns="0" anchor="t">
-            <a:spAutoFit/>
-          </a:bodyPr>
-          <a:lstStyle/>
-          <a:p>
-            <a:pPr algn="ctr">
-              <a:lnSpc>
-                <a:spcPts val="4800"/>
-              </a:lnSpc>
-            </a:pPr>
-            <a:r>
-              <a:rPr b="0" sz="4800" i="0" u="none">
-                <a:solidFill>
-                  <a:srgbClr val="2563EB"/>
-                </a:solidFill>
-                <a:latin typeface="Noto Sans KR ExtraBold"/>
-              </a:rPr>
-              <a:t>AI LLM</a:t>
-            </a:r>
-          </a:p>
-        </p:txBody>
-      </p:sp>
-      <p:sp>
-        <p:nvSpPr>
-          <p:cNvPr id="8" name="TextBox 7"/>
-          <p:cNvSpPr txBox="1"/>
-          <p:nvPr/>
-        </p:nvSpPr>
-        <p:spPr>
-          <a:xfrm>
-            <a:off x="990600" y="4138612"/>
-            <a:ext cx="3962400" cy="257175"/>
-          </a:xfrm>
-          <a:prstGeom prst="rect">
-            <a:avLst/>
-          </a:prstGeom>
-          <a:noFill/>
-        </p:spPr>
-        <p:txBody>
-          <a:bodyPr wrap="square" lIns="0" rIns="0" tIns="0" bIns="0" anchor="t">
-            <a:spAutoFit/>
-          </a:bodyPr>
-          <a:lstStyle/>
-          <a:p>
-            <a:pPr algn="ctr"/>
-            <a:r>
-              <a:rPr b="1" sz="1500" i="0" u="none">
-                <a:solidFill>
-                  <a:srgbClr val="1E40AF"/>
+      <p:pic>
+        <p:nvPicPr>
+          <p:cNvPr id="7" name="Picture 6" descr="image.png"/>
+          <p:cNvPicPr>
+            <a:picLocks noChangeAspect="1"/>
+          </p:cNvPicPr>
+          <p:nvPr/>
+        </p:nvPicPr>
+        <p:blipFill>
+          <a:blip r:embed="rId5"/>
+          <a:stretch>
+            <a:fillRect/>
+          </a:stretch>
+        </p:blipFill>
+        <p:spPr>
+          <a:xfrm>
+            <a:off x="9026276" y="1781175"/>
+            <a:ext cx="2060823" cy="323850"/>
+          </a:xfrm>
+          <a:prstGeom prst="rect">
+            <a:avLst/>
+          </a:prstGeom>
+        </p:spPr>
+      </p:pic>
+      <p:pic>
+        <p:nvPicPr>
+          <p:cNvPr id="8" name="Picture 7" descr="image.png"/>
+          <p:cNvPicPr>
+            <a:picLocks noChangeAspect="1"/>
+          </p:cNvPicPr>
+          <p:nvPr/>
+        </p:nvPicPr>
+        <p:blipFill>
+          <a:blip r:embed="rId6"/>
+          <a:stretch>
+            <a:fillRect/>
+          </a:stretch>
+        </p:blipFill>
+        <p:spPr>
+          <a:xfrm>
+            <a:off x="876300" y="3405187"/>
+            <a:ext cx="3378249" cy="1047750"/>
+          </a:xfrm>
+          <a:prstGeom prst="rect">
+            <a:avLst/>
+          </a:prstGeom>
+        </p:spPr>
+      </p:pic>
+      <p:pic>
+        <p:nvPicPr>
+          <p:cNvPr id="9" name="Picture 8" descr="image.png"/>
+          <p:cNvPicPr>
+            <a:picLocks noChangeAspect="1"/>
+          </p:cNvPicPr>
+          <p:nvPr/>
+        </p:nvPicPr>
+        <p:blipFill>
+          <a:blip r:embed="rId7"/>
+          <a:stretch>
+            <a:fillRect/>
+          </a:stretch>
+        </p:blipFill>
+        <p:spPr>
+          <a:xfrm>
+            <a:off x="4406949" y="3405187"/>
+            <a:ext cx="3378249" cy="1047750"/>
+          </a:xfrm>
+          <a:prstGeom prst="rect">
+            <a:avLst/>
+          </a:prstGeom>
+        </p:spPr>
+      </p:pic>
+      <p:pic>
+        <p:nvPicPr>
+          <p:cNvPr id="10" name="Picture 9" descr="image.png"/>
+          <p:cNvPicPr>
+            <a:picLocks noChangeAspect="1"/>
+          </p:cNvPicPr>
+          <p:nvPr/>
+        </p:nvPicPr>
+        <p:blipFill>
+          <a:blip r:embed="rId8"/>
+          <a:stretch>
+            <a:fillRect/>
+          </a:stretch>
+        </p:blipFill>
+        <p:spPr>
+          <a:xfrm>
+            <a:off x="7937599" y="3405187"/>
+            <a:ext cx="3378249" cy="1047750"/>
+          </a:xfrm>
+          <a:prstGeom prst="rect">
+            <a:avLst/>
+          </a:prstGeom>
+        </p:spPr>
+      </p:pic>
+      <p:pic>
+        <p:nvPicPr>
+          <p:cNvPr id="11" name="Picture 10" descr="image.png"/>
+          <p:cNvPicPr>
+            <a:picLocks noChangeAspect="1"/>
+          </p:cNvPicPr>
+          <p:nvPr/>
+        </p:nvPicPr>
+        <p:blipFill>
+          <a:blip r:embed="rId9"/>
+          <a:stretch>
+            <a:fillRect/>
+          </a:stretch>
+        </p:blipFill>
+        <p:spPr>
+          <a:xfrm>
+            <a:off x="1104900" y="1847850"/>
+            <a:ext cx="148232" cy="190500"/>
+          </a:xfrm>
+          <a:prstGeom prst="rect">
+            <a:avLst/>
+          </a:prstGeom>
+        </p:spPr>
+      </p:pic>
+      <p:pic>
+        <p:nvPicPr>
+          <p:cNvPr id="12" name="Picture 11" descr="image.png"/>
+          <p:cNvPicPr>
+            <a:picLocks noChangeAspect="1"/>
+          </p:cNvPicPr>
+          <p:nvPr/>
+        </p:nvPicPr>
+        <p:blipFill>
+          <a:blip r:embed="rId10"/>
+          <a:stretch>
+            <a:fillRect/>
+          </a:stretch>
+        </p:blipFill>
+        <p:spPr>
+          <a:xfrm>
+            <a:off x="1104900" y="5734050"/>
+            <a:ext cx="148232" cy="190500"/>
+          </a:xfrm>
+          <a:prstGeom prst="rect">
+            <a:avLst/>
+          </a:prstGeom>
+        </p:spPr>
+      </p:pic>
+      <p:pic>
+        <p:nvPicPr>
+          <p:cNvPr id="13" name="Picture 12" descr="image.png"/>
+          <p:cNvPicPr>
+            <a:picLocks noChangeAspect="1"/>
+          </p:cNvPicPr>
+          <p:nvPr/>
+        </p:nvPicPr>
+        <p:blipFill>
+          <a:blip r:embed="rId11"/>
+          <a:stretch>
+            <a:fillRect/>
+          </a:stretch>
+        </p:blipFill>
+        <p:spPr>
+          <a:xfrm>
+            <a:off x="4969222" y="5734050"/>
+            <a:ext cx="148232" cy="190500"/>
+          </a:xfrm>
+          <a:prstGeom prst="rect">
+            <a:avLst/>
+          </a:prstGeom>
+        </p:spPr>
+      </p:pic>
+      <p:pic>
+        <p:nvPicPr>
+          <p:cNvPr id="14" name="Picture 13" descr="image.png"/>
+          <p:cNvPicPr>
+            <a:picLocks noChangeAspect="1"/>
+          </p:cNvPicPr>
+          <p:nvPr/>
+        </p:nvPicPr>
+        <p:blipFill>
+          <a:blip r:embed="rId12"/>
+          <a:stretch>
+            <a:fillRect/>
+          </a:stretch>
+        </p:blipFill>
+        <p:spPr>
+          <a:xfrm>
+            <a:off x="8852743" y="5734050"/>
+            <a:ext cx="148232" cy="190500"/>
+          </a:xfrm>
+          <a:prstGeom prst="rect">
+            <a:avLst/>
+          </a:prstGeom>
+        </p:spPr>
+      </p:pic>
+      <p:sp>
+        <p:nvSpPr>
+          <p:cNvPr id="15" name="TextBox 14"/>
+          <p:cNvSpPr txBox="1"/>
+          <p:nvPr/>
+        </p:nvSpPr>
+        <p:spPr>
+          <a:xfrm>
+            <a:off x="1076325" y="3605212"/>
+            <a:ext cx="2978199" cy="152400"/>
+          </a:xfrm>
+          <a:prstGeom prst="rect">
+            <a:avLst/>
+          </a:prstGeom>
+          <a:noFill/>
+        </p:spPr>
+        <p:txBody>
+          <a:bodyPr wrap="square" lIns="0" rIns="0" tIns="0" bIns="0" anchor="t">
+            <a:spAutoFit/>
+          </a:bodyPr>
+          <a:lstStyle/>
+          <a:p>
+            <a:pPr algn="l"/>
+            <a:r>
+              <a:rPr b="1" sz="1050" i="0" u="none">
+                <a:solidFill>
+                  <a:srgbClr val="93C5FD"/>
                 </a:solidFill>
                 <a:latin typeface="Noto Sans KR"/>
               </a:rPr>
-              <a:t>프롬프트 자체 유효성 평가</a:t>
-            </a:r>
-          </a:p>
-        </p:txBody>
-      </p:sp>
-      <p:sp>
-        <p:nvSpPr>
-          <p:cNvPr id="9" name="TextBox 8"/>
-          <p:cNvSpPr txBox="1"/>
-          <p:nvPr/>
-        </p:nvSpPr>
-        <p:spPr>
-          <a:xfrm>
-            <a:off x="5905500" y="3143250"/>
-            <a:ext cx="5720715" cy="228600"/>
+              <a:t>PROMPT METADATA DB</a:t>
+            </a:r>
+          </a:p>
+        </p:txBody>
+      </p:sp>
+      <p:sp>
+        <p:nvSpPr>
+          <p:cNvPr id="16" name="TextBox 15"/>
+          <p:cNvSpPr txBox="1"/>
+          <p:nvPr/>
+        </p:nvSpPr>
+        <p:spPr>
+          <a:xfrm>
+            <a:off x="1076325" y="3814762"/>
+            <a:ext cx="2978199" cy="228600"/>
           </a:xfrm>
           <a:prstGeom prst="rect">
             <a:avLst/>
@@ -8980,25 +8720,25 @@
             <a:r>
               <a:rPr b="1" sz="1350" i="0" u="none">
                 <a:solidFill>
-                  <a:srgbClr val="0F172A"/>
+                  <a:srgbClr val="FFFFFF"/>
                 </a:solidFill>
                 <a:latin typeface="Noto Sans KR"/>
               </a:rPr>
-              <a:t>프롬프트 유효성 &amp; 사용 통계</a:t>
-            </a:r>
-          </a:p>
-        </p:txBody>
-      </p:sp>
-      <p:sp>
-        <p:nvSpPr>
-          <p:cNvPr id="10" name="TextBox 9"/>
-          <p:cNvSpPr txBox="1"/>
-          <p:nvPr/>
-        </p:nvSpPr>
-        <p:spPr>
-          <a:xfrm>
-            <a:off x="5905500" y="3409950"/>
-            <a:ext cx="5448300" cy="228600"/>
+              <a:t>JPA Entity Column 매핑</a:t>
+            </a:r>
+          </a:p>
+        </p:txBody>
+      </p:sp>
+      <p:sp>
+        <p:nvSpPr>
+          <p:cNvPr id="17" name="TextBox 16"/>
+          <p:cNvSpPr txBox="1"/>
+          <p:nvPr/>
+        </p:nvSpPr>
+        <p:spPr>
+          <a:xfrm>
+            <a:off x="1076325" y="4081462"/>
+            <a:ext cx="2978199" cy="171450"/>
           </a:xfrm>
           <a:prstGeom prst="rect">
             <a:avLst/>
@@ -9013,27 +8753,27 @@
           <a:p>
             <a:pPr algn="l"/>
             <a:r>
-              <a:rPr b="0" sz="1350" i="0" u="none">
-                <a:solidFill>
-                  <a:srgbClr val="475569"/>
+              <a:rPr b="0" sz="1050" i="0" u="none">
+                <a:solidFill>
+                  <a:srgbClr val="CBD5E1"/>
                 </a:solidFill>
                 <a:latin typeface="Noto Sans KR"/>
               </a:rPr>
-              <a:t>LLM 기반 분석 모델 발굴 및 활용 빈도 관리</a:t>
-            </a:r>
-          </a:p>
-        </p:txBody>
-      </p:sp>
-      <p:sp>
-        <p:nvSpPr>
-          <p:cNvPr id="11" name="TextBox 10"/>
-          <p:cNvSpPr txBox="1"/>
-          <p:nvPr/>
-        </p:nvSpPr>
-        <p:spPr>
-          <a:xfrm>
-            <a:off x="5905500" y="4171950"/>
-            <a:ext cx="5720715" cy="228600"/>
+              <a:t>JSON 자동 변환 및 보관주기 관리</a:t>
+            </a:r>
+          </a:p>
+        </p:txBody>
+      </p:sp>
+      <p:sp>
+        <p:nvSpPr>
+          <p:cNvPr id="18" name="TextBox 17"/>
+          <p:cNvSpPr txBox="1"/>
+          <p:nvPr/>
+        </p:nvSpPr>
+        <p:spPr>
+          <a:xfrm>
+            <a:off x="4606974" y="3605212"/>
+            <a:ext cx="2978199" cy="152400"/>
           </a:xfrm>
           <a:prstGeom prst="rect">
             <a:avLst/>
@@ -9048,27 +8788,62 @@
           <a:p>
             <a:pPr algn="l"/>
             <a:r>
+              <a:rPr b="1" sz="1050" i="0" u="none">
+                <a:solidFill>
+                  <a:srgbClr val="A7F3D0"/>
+                </a:solidFill>
+                <a:latin typeface="Noto Sans KR"/>
+              </a:rPr>
+              <a:t>MES CORE TOOL API</a:t>
+            </a:r>
+          </a:p>
+        </p:txBody>
+      </p:sp>
+      <p:sp>
+        <p:nvSpPr>
+          <p:cNvPr id="19" name="TextBox 18"/>
+          <p:cNvSpPr txBox="1"/>
+          <p:nvPr/>
+        </p:nvSpPr>
+        <p:spPr>
+          <a:xfrm>
+            <a:off x="4606974" y="3814762"/>
+            <a:ext cx="2978199" cy="228600"/>
+          </a:xfrm>
+          <a:prstGeom prst="rect">
+            <a:avLst/>
+          </a:prstGeom>
+          <a:noFill/>
+        </p:spPr>
+        <p:txBody>
+          <a:bodyPr wrap="square" lIns="0" rIns="0" tIns="0" bIns="0" anchor="t">
+            <a:spAutoFit/>
+          </a:bodyPr>
+          <a:lstStyle/>
+          <a:p>
+            <a:pPr algn="l"/>
+            <a:r>
               <a:rPr b="1" sz="1350" i="0" u="none">
                 <a:solidFill>
-                  <a:srgbClr val="0F172A"/>
+                  <a:srgbClr val="FFFFFF"/>
                 </a:solidFill>
                 <a:latin typeface="Noto Sans KR"/>
               </a:rPr>
-              <a:t>지속적 프롬프트 고도화</a:t>
-            </a:r>
-          </a:p>
-        </p:txBody>
-      </p:sp>
-      <p:sp>
-        <p:nvSpPr>
-          <p:cNvPr id="12" name="TextBox 11"/>
-          <p:cNvSpPr txBox="1"/>
-          <p:nvPr/>
-        </p:nvSpPr>
-        <p:spPr>
-          <a:xfrm>
-            <a:off x="5905500" y="4438650"/>
-            <a:ext cx="5448300" cy="228600"/>
+              <a:t>WO / LOT / 설비 / Process</a:t>
+            </a:r>
+          </a:p>
+        </p:txBody>
+      </p:sp>
+      <p:sp>
+        <p:nvSpPr>
+          <p:cNvPr id="20" name="TextBox 19"/>
+          <p:cNvSpPr txBox="1"/>
+          <p:nvPr/>
+        </p:nvSpPr>
+        <p:spPr>
+          <a:xfrm>
+            <a:off x="4606974" y="4081462"/>
+            <a:ext cx="2978199" cy="171450"/>
           </a:xfrm>
           <a:prstGeom prst="rect">
             <a:avLst/>
@@ -9083,13 +8858,293 @@
           <a:p>
             <a:pPr algn="l"/>
             <a:r>
-              <a:rPr b="0" sz="1350" i="0" u="none">
-                <a:solidFill>
-                  <a:srgbClr val="475569"/>
+              <a:rPr b="0" sz="1050" i="0" u="none">
+                <a:solidFill>
+                  <a:srgbClr val="CBD5E1"/>
                 </a:solidFill>
                 <a:latin typeface="Noto Sans KR"/>
               </a:rPr>
-              <a:t>분석 데이터 무결성 검증을 통한 파이프라인 최적화</a:t>
+              <a:t>TRACKIN-OUT &amp; 통신 Log 파싱</a:t>
+            </a:r>
+          </a:p>
+        </p:txBody>
+      </p:sp>
+      <p:sp>
+        <p:nvSpPr>
+          <p:cNvPr id="21" name="TextBox 20"/>
+          <p:cNvSpPr txBox="1"/>
+          <p:nvPr/>
+        </p:nvSpPr>
+        <p:spPr>
+          <a:xfrm>
+            <a:off x="8137624" y="3605212"/>
+            <a:ext cx="2978199" cy="152400"/>
+          </a:xfrm>
+          <a:prstGeom prst="rect">
+            <a:avLst/>
+          </a:prstGeom>
+          <a:noFill/>
+        </p:spPr>
+        <p:txBody>
+          <a:bodyPr wrap="square" lIns="0" rIns="0" tIns="0" bIns="0" anchor="t">
+            <a:spAutoFit/>
+          </a:bodyPr>
+          <a:lstStyle/>
+          <a:p>
+            <a:pPr algn="l"/>
+            <a:r>
+              <a:rPr b="1" sz="1050" i="0" u="none">
+                <a:solidFill>
+                  <a:srgbClr val="E9D5FF"/>
+                </a:solidFill>
+                <a:latin typeface="Noto Sans KR"/>
+              </a:rPr>
+              <a:t>PROMPT HIGH-ADVANCED</a:t>
+            </a:r>
+          </a:p>
+        </p:txBody>
+      </p:sp>
+      <p:sp>
+        <p:nvSpPr>
+          <p:cNvPr id="22" name="TextBox 21"/>
+          <p:cNvSpPr txBox="1"/>
+          <p:nvPr/>
+        </p:nvSpPr>
+        <p:spPr>
+          <a:xfrm>
+            <a:off x="8137624" y="3814762"/>
+            <a:ext cx="2978199" cy="228600"/>
+          </a:xfrm>
+          <a:prstGeom prst="rect">
+            <a:avLst/>
+          </a:prstGeom>
+          <a:noFill/>
+        </p:spPr>
+        <p:txBody>
+          <a:bodyPr wrap="square" lIns="0" rIns="0" tIns="0" bIns="0" anchor="t">
+            <a:spAutoFit/>
+          </a:bodyPr>
+          <a:lstStyle/>
+          <a:p>
+            <a:pPr algn="l"/>
+            <a:r>
+              <a:rPr b="1" sz="1350" i="0" u="none">
+                <a:solidFill>
+                  <a:srgbClr val="FFFFFF"/>
+                </a:solidFill>
+                <a:latin typeface="Noto Sans KR"/>
+              </a:rPr>
+              <a:t>LLM 프롬프트 분석</a:t>
+            </a:r>
+          </a:p>
+        </p:txBody>
+      </p:sp>
+      <p:sp>
+        <p:nvSpPr>
+          <p:cNvPr id="23" name="TextBox 22"/>
+          <p:cNvSpPr txBox="1"/>
+          <p:nvPr/>
+        </p:nvSpPr>
+        <p:spPr>
+          <a:xfrm>
+            <a:off x="8137624" y="4081462"/>
+            <a:ext cx="2978199" cy="171450"/>
+          </a:xfrm>
+          <a:prstGeom prst="rect">
+            <a:avLst/>
+          </a:prstGeom>
+          <a:noFill/>
+        </p:spPr>
+        <p:txBody>
+          <a:bodyPr wrap="square" lIns="0" rIns="0" tIns="0" bIns="0" anchor="t">
+            <a:spAutoFit/>
+          </a:bodyPr>
+          <a:lstStyle/>
+          <a:p>
+            <a:pPr algn="l"/>
+            <a:r>
+              <a:rPr b="0" sz="1050" i="0" u="none">
+                <a:solidFill>
+                  <a:srgbClr val="CBD5E1"/>
+                </a:solidFill>
+                <a:latin typeface="Noto Sans KR"/>
+              </a:rPr>
+              <a:t>사용 통계 &amp; 데이터 유효성 검증</a:t>
+            </a:r>
+          </a:p>
+        </p:txBody>
+      </p:sp>
+      <p:sp>
+        <p:nvSpPr>
+          <p:cNvPr id="24" name="TextBox 23"/>
+          <p:cNvSpPr txBox="1"/>
+          <p:nvPr/>
+        </p:nvSpPr>
+        <p:spPr>
+          <a:xfrm>
+            <a:off x="1405532" y="5715000"/>
+            <a:ext cx="1809898" cy="228600"/>
+          </a:xfrm>
+          <a:prstGeom prst="rect">
+            <a:avLst/>
+          </a:prstGeom>
+          <a:noFill/>
+        </p:spPr>
+        <p:txBody>
+          <a:bodyPr wrap="square" lIns="0" rIns="0" tIns="0" bIns="0" anchor="t">
+            <a:spAutoFit/>
+          </a:bodyPr>
+          <a:lstStyle/>
+          <a:p>
+            <a:pPr algn="l"/>
+            <a:r>
+              <a:rPr b="1" sz="1350" i="0" u="none">
+                <a:solidFill>
+                  <a:srgbClr val="FFFFFF"/>
+                </a:solidFill>
+                <a:latin typeface="Noto Sans KR"/>
+              </a:rPr>
+              <a:t>시각화 라이브러리 연동</a:t>
+            </a:r>
+          </a:p>
+        </p:txBody>
+      </p:sp>
+      <p:sp>
+        <p:nvSpPr>
+          <p:cNvPr id="25" name="TextBox 24"/>
+          <p:cNvSpPr txBox="1"/>
+          <p:nvPr/>
+        </p:nvSpPr>
+        <p:spPr>
+          <a:xfrm>
+            <a:off x="5269855" y="5715000"/>
+            <a:ext cx="1829097" cy="228600"/>
+          </a:xfrm>
+          <a:prstGeom prst="rect">
+            <a:avLst/>
+          </a:prstGeom>
+          <a:noFill/>
+        </p:spPr>
+        <p:txBody>
+          <a:bodyPr wrap="square" lIns="0" rIns="0" tIns="0" bIns="0" anchor="t">
+            <a:spAutoFit/>
+          </a:bodyPr>
+          <a:lstStyle/>
+          <a:p>
+            <a:pPr algn="l"/>
+            <a:r>
+              <a:rPr b="1" sz="1350" i="0" u="none">
+                <a:solidFill>
+                  <a:srgbClr val="FFFFFF"/>
+                </a:solidFill>
+                <a:latin typeface="Noto Sans KR"/>
+              </a:rPr>
+              <a:t>이상 감지 실시간 Alarm</a:t>
+            </a:r>
+          </a:p>
+        </p:txBody>
+      </p:sp>
+      <p:sp>
+        <p:nvSpPr>
+          <p:cNvPr id="26" name="TextBox 25"/>
+          <p:cNvSpPr txBox="1"/>
+          <p:nvPr/>
+        </p:nvSpPr>
+        <p:spPr>
+          <a:xfrm>
+            <a:off x="9153376" y="5715000"/>
+            <a:ext cx="1933575" cy="228600"/>
+          </a:xfrm>
+          <a:prstGeom prst="rect">
+            <a:avLst/>
+          </a:prstGeom>
+          <a:noFill/>
+        </p:spPr>
+        <p:txBody>
+          <a:bodyPr wrap="square" lIns="0" rIns="0" tIns="0" bIns="0" anchor="t">
+            <a:spAutoFit/>
+          </a:bodyPr>
+          <a:lstStyle/>
+          <a:p>
+            <a:pPr algn="l"/>
+            <a:r>
+              <a:rPr b="1" sz="1350" i="0" u="none">
+                <a:solidFill>
+                  <a:srgbClr val="FFFFFF"/>
+                </a:solidFill>
+                <a:latin typeface="Noto Sans KR"/>
+              </a:rPr>
+              <a:t>MES DB &amp; Log 스토리지</a:t>
+            </a:r>
+          </a:p>
+        </p:txBody>
+      </p:sp>
+      <p:sp>
+        <p:nvSpPr>
+          <p:cNvPr id="27" name="TextBox 26"/>
+          <p:cNvSpPr txBox="1"/>
+          <p:nvPr/>
+        </p:nvSpPr>
+        <p:spPr>
+          <a:xfrm>
+            <a:off x="1367432" y="1743075"/>
+            <a:ext cx="2563713" cy="228600"/>
+          </a:xfrm>
+          <a:prstGeom prst="rect">
+            <a:avLst/>
+          </a:prstGeom>
+          <a:noFill/>
+        </p:spPr>
+        <p:txBody>
+          <a:bodyPr wrap="square" lIns="0" rIns="0" tIns="0" bIns="0" anchor="t">
+            <a:spAutoFit/>
+          </a:bodyPr>
+          <a:lstStyle/>
+          <a:p>
+            <a:pPr algn="l"/>
+            <a:r>
+              <a:rPr b="1" sz="1350" i="0" u="none">
+                <a:solidFill>
+                  <a:srgbClr val="FFFFFF"/>
+                </a:solidFill>
+                <a:latin typeface="Noto Sans KR"/>
+              </a:rPr>
+              <a:t>사용자 / 관리자</a:t>
+            </a:r>
+          </a:p>
+        </p:txBody>
+      </p:sp>
+      <p:sp>
+        <p:nvSpPr>
+          <p:cNvPr id="28" name="TextBox 27"/>
+          <p:cNvSpPr txBox="1"/>
+          <p:nvPr/>
+        </p:nvSpPr>
+        <p:spPr>
+          <a:xfrm>
+            <a:off x="1367432" y="1971675"/>
+            <a:ext cx="2563713" cy="171450"/>
+          </a:xfrm>
+          <a:prstGeom prst="rect">
+            <a:avLst/>
+          </a:prstGeom>
+          <a:noFill/>
+        </p:spPr>
+        <p:txBody>
+          <a:bodyPr wrap="square" lIns="0" rIns="0" tIns="0" bIns="0" anchor="t">
+            <a:spAutoFit/>
+          </a:bodyPr>
+          <a:lstStyle/>
+          <a:p>
+            <a:pPr algn="l"/>
+            <a:r>
+              <a:rPr b="0" sz="1050" i="0" u="none">
+                <a:solidFill>
+                  <a:srgbClr val="94A3B8"/>
+                </a:solidFill>
+                <a:latin typeface="Noto Sans KR"/>
+              </a:rPr>
+              <a:t>Prompt 정의 &amp; 실행 주기 및 대상 Data 설정</a:t>
             </a:r>
           </a:p>
         </p:txBody>

--- a/제조 분야 AI Agent 아키텍처.pptx
+++ b/제조 분야 AI Agent 아키텍처.pptx
@@ -17,6 +17,7 @@
     <p:sldId id="265" r:id="rId16"/>
     <p:sldId id="266" r:id="rId17"/>
     <p:sldId id="267" r:id="rId18"/>
+    <p:sldId id="268" r:id="rId19"/>
   </p:sldIdLst>
   <p:sldSz cx="12192000" cy="6858000" type="screen4x3"/>
   <p:notesSz cx="6858000" cy="9144000"/>
@@ -3123,8 +3124,8 @@
         </p:blipFill>
         <p:spPr>
           <a:xfrm>
-            <a:off x="762000" y="4651920"/>
-            <a:ext cx="9144000" cy="457200"/>
+            <a:off x="762000" y="4642395"/>
+            <a:ext cx="9334500" cy="476250"/>
           </a:xfrm>
           <a:prstGeom prst="rect">
             <a:avLst/>
@@ -3139,8 +3140,8 @@
         </p:nvSpPr>
         <p:spPr>
           <a:xfrm>
-            <a:off x="762000" y="1748879"/>
-            <a:ext cx="9144000" cy="266700"/>
+            <a:off x="762000" y="1739354"/>
+            <a:ext cx="9334500" cy="266700"/>
           </a:xfrm>
           <a:prstGeom prst="rect">
             <a:avLst/>
@@ -3161,7 +3162,7 @@
                 </a:solidFill>
                 <a:latin typeface="Noto Sans KR Medium"/>
               </a:rPr>
-              <a:t>제조 혁신을 위한 프레임워크 전략</a:t>
+              <a:t>제조 기술 혁신 프레임워크</a:t>
             </a:r>
           </a:p>
         </p:txBody>
@@ -3174,8 +3175,8 @@
         </p:nvSpPr>
         <p:spPr>
           <a:xfrm>
-            <a:off x="762000" y="2244179"/>
-            <a:ext cx="9601200" cy="1188541"/>
+            <a:off x="762000" y="2234654"/>
+            <a:ext cx="9801225" cy="1188541"/>
           </a:xfrm>
           <a:prstGeom prst="rect">
             <a:avLst/>
@@ -3213,7 +3214,7 @@
                 </a:solidFill>
                 <a:latin typeface="Noto Sans KR Black"/>
               </a:rPr>
-              <a:t>아키텍처 구성 및 활용 전략</a:t>
+              <a:t>아키텍처 구성 및 실행 전략</a:t>
             </a:r>
           </a:p>
         </p:txBody>
@@ -3226,8 +3227,8 @@
         </p:nvSpPr>
         <p:spPr>
           <a:xfrm>
-            <a:off x="762000" y="3661320"/>
-            <a:ext cx="7810500" cy="609600"/>
+            <a:off x="762000" y="3651795"/>
+            <a:ext cx="8001000" cy="609600"/>
           </a:xfrm>
           <a:prstGeom prst="rect">
             <a:avLst/>
@@ -3252,7 +3253,7 @@
                 </a:solidFill>
                 <a:latin typeface="Noto Sans KR"/>
               </a:rPr>
-              <a:t>바이브 코딩 기반 표준 개발 체계 구축, 소스 품질 관제, MES 데이터 기반 AI Agent 연동 및 Java 엔터프라이즈 NordAxe 프레임워크 도입 방안</a:t>
+              <a:t>바이브 코딩 체계, 레거시 소스 품질 관제, MES CSV/RAG 파이프라인 및 NordAxe 프레임워크 도입 전략</a:t>
             </a:r>
           </a:p>
         </p:txBody>
@@ -3273,8 +3274,8 @@
         </p:blipFill>
         <p:spPr>
           <a:xfrm>
-            <a:off x="762000" y="1748879"/>
-            <a:ext cx="2385417" cy="266700"/>
+            <a:off x="762000" y="1739354"/>
+            <a:ext cx="3105745" cy="266700"/>
           </a:xfrm>
           <a:prstGeom prst="rect">
             <a:avLst/>
@@ -3305,9 +3306,44 @@
           </a:prstGeom>
         </p:spPr>
       </p:pic>
+      <p:sp>
+        <p:nvSpPr>
+          <p:cNvPr id="8" name="TextBox 7"/>
+          <p:cNvSpPr txBox="1"/>
+          <p:nvPr/>
+        </p:nvSpPr>
+        <p:spPr>
+          <a:xfrm>
+            <a:off x="990748" y="4918620"/>
+            <a:ext cx="1608683" cy="200025"/>
+          </a:xfrm>
+          <a:prstGeom prst="rect">
+            <a:avLst/>
+          </a:prstGeom>
+          <a:noFill/>
+        </p:spPr>
+        <p:txBody>
+          <a:bodyPr wrap="square" lIns="0" rIns="0" tIns="0" bIns="0" anchor="t">
+            <a:spAutoFit/>
+          </a:bodyPr>
+          <a:lstStyle/>
+          <a:p>
+            <a:pPr algn="l"/>
+            <a:r>
+              <a:rPr b="0" sz="1200" i="0" u="none">
+                <a:solidFill>
+                  <a:srgbClr val="CBD5E1"/>
+                </a:solidFill>
+                <a:latin typeface="Noto Sans KR Medium"/>
+              </a:rPr>
+              <a:t>바이브 코딩 파이프라인</a:t>
+            </a:r>
+          </a:p>
+        </p:txBody>
+      </p:sp>
       <p:pic>
         <p:nvPicPr>
-          <p:cNvPr id="8" name="Picture 7" descr="image.png"/>
+          <p:cNvPr id="9" name="Picture 8" descr="image.png"/>
           <p:cNvPicPr>
             <a:picLocks noChangeAspect="1"/>
           </p:cNvPicPr>
@@ -3321,7 +3357,7 @@
         </p:blipFill>
         <p:spPr>
           <a:xfrm>
-            <a:off x="2597794" y="4932908"/>
+            <a:off x="2904232" y="4932908"/>
             <a:ext cx="133498" cy="171450"/>
           </a:xfrm>
           <a:prstGeom prst="rect">
@@ -3329,9 +3365,44 @@
           </a:prstGeom>
         </p:spPr>
       </p:pic>
+      <p:sp>
+        <p:nvSpPr>
+          <p:cNvPr id="10" name="TextBox 9"/>
+          <p:cNvSpPr txBox="1"/>
+          <p:nvPr/>
+        </p:nvSpPr>
+        <p:spPr>
+          <a:xfrm>
+            <a:off x="3132980" y="4932908"/>
+            <a:ext cx="1676995" cy="171450"/>
+          </a:xfrm>
+          <a:prstGeom prst="rect">
+            <a:avLst/>
+          </a:prstGeom>
+          <a:noFill/>
+        </p:spPr>
+        <p:txBody>
+          <a:bodyPr wrap="square" lIns="0" rIns="0" tIns="0" bIns="0" anchor="t">
+            <a:spAutoFit/>
+          </a:bodyPr>
+          <a:lstStyle/>
+          <a:p>
+            <a:pPr algn="l"/>
+            <a:r>
+              <a:rPr b="0" sz="1200" i="0" u="none">
+                <a:solidFill>
+                  <a:srgbClr val="CBD5E1"/>
+                </a:solidFill>
+                <a:latin typeface="Noto Sans KR Medium"/>
+              </a:rPr>
+              <a:t>MES CSV &amp; Vector RAG</a:t>
+            </a:r>
+          </a:p>
+        </p:txBody>
+      </p:sp>
       <p:pic>
         <p:nvPicPr>
-          <p:cNvPr id="9" name="Picture 8" descr="image.png"/>
+          <p:cNvPr id="11" name="Picture 10" descr="image.png"/>
           <p:cNvPicPr>
             <a:picLocks noChangeAspect="1"/>
           </p:cNvPicPr>
@@ -3345,7 +3416,7 @@
         </p:blipFill>
         <p:spPr>
           <a:xfrm>
-            <a:off x="4383434" y="4932908"/>
+            <a:off x="5114776" y="4932908"/>
             <a:ext cx="133498" cy="171450"/>
           </a:xfrm>
           <a:prstGeom prst="rect">
@@ -3355,14 +3426,14 @@
       </p:pic>
       <p:sp>
         <p:nvSpPr>
-          <p:cNvPr id="10" name="TextBox 9"/>
-          <p:cNvSpPr txBox="1"/>
-          <p:nvPr/>
-        </p:nvSpPr>
-        <p:spPr>
-          <a:xfrm>
-            <a:off x="990748" y="4928145"/>
-            <a:ext cx="1302246" cy="180975"/>
+          <p:cNvPr id="12" name="TextBox 11"/>
+          <p:cNvSpPr txBox="1"/>
+          <p:nvPr/>
+        </p:nvSpPr>
+        <p:spPr>
+          <a:xfrm>
+            <a:off x="5343525" y="4932908"/>
+            <a:ext cx="1762125" cy="171450"/>
           </a:xfrm>
           <a:prstGeom prst="rect">
             <a:avLst/>
@@ -3377,83 +3448,13 @@
           <a:p>
             <a:pPr algn="l"/>
             <a:r>
-              <a:rPr b="0" sz="1125" i="0" u="none">
+              <a:rPr b="0" sz="1200" i="0" u="none">
                 <a:solidFill>
                   <a:srgbClr val="CBD5E1"/>
                 </a:solidFill>
                 <a:latin typeface="Noto Sans KR Medium"/>
               </a:rPr>
-              <a:t>Inhouse 바이브 코딩</a:t>
-            </a:r>
-          </a:p>
-        </p:txBody>
-      </p:sp>
-      <p:sp>
-        <p:nvSpPr>
-          <p:cNvPr id="11" name="TextBox 10"/>
-          <p:cNvSpPr txBox="1"/>
-          <p:nvPr/>
-        </p:nvSpPr>
-        <p:spPr>
-          <a:xfrm>
-            <a:off x="2826543" y="4937670"/>
-            <a:ext cx="1252091" cy="161925"/>
-          </a:xfrm>
-          <a:prstGeom prst="rect">
-            <a:avLst/>
-          </a:prstGeom>
-          <a:noFill/>
-        </p:spPr>
-        <p:txBody>
-          <a:bodyPr wrap="square" lIns="0" rIns="0" tIns="0" bIns="0" anchor="t">
-            <a:spAutoFit/>
-          </a:bodyPr>
-          <a:lstStyle/>
-          <a:p>
-            <a:pPr algn="l"/>
-            <a:r>
-              <a:rPr b="0" sz="1125" i="0" u="none">
-                <a:solidFill>
-                  <a:srgbClr val="CBD5E1"/>
-                </a:solidFill>
-                <a:latin typeface="Noto Sans KR Medium"/>
-              </a:rPr>
-              <a:t>MES CORE Tooling</a:t>
-            </a:r>
-          </a:p>
-        </p:txBody>
-      </p:sp>
-      <p:sp>
-        <p:nvSpPr>
-          <p:cNvPr id="12" name="TextBox 11"/>
-          <p:cNvSpPr txBox="1"/>
-          <p:nvPr/>
-        </p:nvSpPr>
-        <p:spPr>
-          <a:xfrm>
-            <a:off x="4612183" y="4937670"/>
-            <a:ext cx="1302692" cy="161925"/>
-          </a:xfrm>
-          <a:prstGeom prst="rect">
-            <a:avLst/>
-          </a:prstGeom>
-          <a:noFill/>
-        </p:spPr>
-        <p:txBody>
-          <a:bodyPr wrap="square" lIns="0" rIns="0" tIns="0" bIns="0" anchor="t">
-            <a:spAutoFit/>
-          </a:bodyPr>
-          <a:lstStyle/>
-          <a:p>
-            <a:pPr algn="l"/>
-            <a:r>
-              <a:rPr b="0" sz="1125" i="0" u="none">
-                <a:solidFill>
-                  <a:srgbClr val="CBD5E1"/>
-                </a:solidFill>
-                <a:latin typeface="Noto Sans KR Medium"/>
-              </a:rPr>
-              <a:t>NordAxe Java Agent</a:t>
+              <a:t>NordAxe Enterprise Agent</a:t>
             </a:r>
           </a:p>
         </p:txBody>
@@ -3484,79 +3485,9 @@
         <p:nvPr/>
       </p:nvGrpSpPr>
       <p:grpSpPr/>
-      <p:sp>
-        <p:nvSpPr>
-          <p:cNvPr id="2" name="TextBox 1"/>
-          <p:cNvSpPr txBox="1"/>
-          <p:nvPr/>
-        </p:nvSpPr>
-        <p:spPr>
-          <a:xfrm>
-            <a:off x="609600" y="533400"/>
-            <a:ext cx="10972800" cy="647700"/>
-          </a:xfrm>
-          <a:prstGeom prst="rect">
-            <a:avLst/>
-          </a:prstGeom>
-          <a:noFill/>
-        </p:spPr>
-        <p:txBody>
-          <a:bodyPr wrap="square" lIns="0" rIns="0" tIns="0" bIns="0" anchor="t">
-            <a:spAutoFit/>
-          </a:bodyPr>
-          <a:lstStyle/>
-          <a:p>
-            <a:pPr algn="l"/>
-            <a:r>
-              <a:rPr b="1" sz="1200" i="0" u="none">
-                <a:solidFill>
-                  <a:srgbClr val="2563EB"/>
-                </a:solidFill>
-                <a:latin typeface="Noto Sans KR"/>
-              </a:rPr>
-              <a:t>FRAMEWORK STRATEGY</a:t>
-            </a:r>
-          </a:p>
-        </p:txBody>
-      </p:sp>
-      <p:sp>
-        <p:nvSpPr>
-          <p:cNvPr id="3" name="TextBox 2"/>
-          <p:cNvSpPr txBox="1"/>
-          <p:nvPr/>
-        </p:nvSpPr>
-        <p:spPr>
-          <a:xfrm>
-            <a:off x="609600" y="762000"/>
-            <a:ext cx="11521440" cy="419100"/>
-          </a:xfrm>
-          <a:prstGeom prst="rect">
-            <a:avLst/>
-          </a:prstGeom>
-          <a:noFill/>
-        </p:spPr>
-        <p:txBody>
-          <a:bodyPr wrap="square" lIns="0" rIns="0" tIns="0" bIns="0" anchor="t">
-            <a:spAutoFit/>
-          </a:bodyPr>
-          <a:lstStyle/>
-          <a:p>
-            <a:pPr algn="l"/>
-            <a:r>
-              <a:rPr b="0" sz="2400" i="0" u="none">
-                <a:solidFill>
-                  <a:srgbClr val="0F172A"/>
-                </a:solidFill>
-                <a:latin typeface="Noto Sans KR ExtraBold"/>
-              </a:rPr>
-              <a:t>왜 NordAxe(OpenProject) 프레임워크인가?</a:t>
-            </a:r>
-          </a:p>
-        </p:txBody>
-      </p:sp>
       <p:pic>
         <p:nvPicPr>
-          <p:cNvPr id="4" name="Picture 3" descr="image.png"/>
+          <p:cNvPr id="2" name="Picture 1" descr="image.png"/>
           <p:cNvPicPr>
             <a:picLocks noChangeAspect="1"/>
           </p:cNvPicPr>
@@ -3570,8 +3501,56 @@
         </p:blipFill>
         <p:spPr>
           <a:xfrm>
-            <a:off x="6267450" y="2609850"/>
-            <a:ext cx="5314950" cy="1219200"/>
+            <a:off x="5953125" y="2276475"/>
+            <a:ext cx="5629275" cy="3257550"/>
+          </a:xfrm>
+          <a:prstGeom prst="rect">
+            <a:avLst/>
+          </a:prstGeom>
+        </p:spPr>
+      </p:pic>
+      <p:pic>
+        <p:nvPicPr>
+          <p:cNvPr id="3" name="Picture 2" descr="image.png"/>
+          <p:cNvPicPr>
+            <a:picLocks noChangeAspect="1"/>
+          </p:cNvPicPr>
+          <p:nvPr/>
+        </p:nvPicPr>
+        <p:blipFill>
+          <a:blip r:embed="rId3"/>
+          <a:stretch>
+            <a:fillRect/>
+          </a:stretch>
+        </p:blipFill>
+        <p:spPr>
+          <a:xfrm>
+            <a:off x="609600" y="2343150"/>
+            <a:ext cx="5000625" cy="1466850"/>
+          </a:xfrm>
+          <a:prstGeom prst="rect">
+            <a:avLst/>
+          </a:prstGeom>
+        </p:spPr>
+      </p:pic>
+      <p:pic>
+        <p:nvPicPr>
+          <p:cNvPr id="4" name="Picture 3" descr="image.png"/>
+          <p:cNvPicPr>
+            <a:picLocks noChangeAspect="1"/>
+          </p:cNvPicPr>
+          <p:nvPr/>
+        </p:nvPicPr>
+        <p:blipFill>
+          <a:blip r:embed="rId4"/>
+          <a:stretch>
+            <a:fillRect/>
+          </a:stretch>
+        </p:blipFill>
+        <p:spPr>
+          <a:xfrm>
+            <a:off x="609600" y="4000500"/>
+            <a:ext cx="5000625" cy="1466850"/>
           </a:xfrm>
           <a:prstGeom prst="rect">
             <a:avLst/>
@@ -3587,31 +3566,160 @@
           <p:nvPr/>
         </p:nvPicPr>
         <p:blipFill>
-          <a:blip r:embed="rId3"/>
+          <a:blip r:embed="rId5"/>
           <a:stretch>
             <a:fillRect/>
           </a:stretch>
         </p:blipFill>
         <p:spPr>
           <a:xfrm>
-            <a:off x="6267450" y="3981450"/>
-            <a:ext cx="5314950" cy="1219200"/>
+            <a:off x="6267450" y="3067050"/>
+            <a:ext cx="5000625" cy="1000125"/>
           </a:xfrm>
           <a:prstGeom prst="rect">
             <a:avLst/>
           </a:prstGeom>
         </p:spPr>
       </p:pic>
-      <p:sp>
-        <p:nvSpPr>
-          <p:cNvPr id="6" name="TextBox 5"/>
-          <p:cNvSpPr txBox="1"/>
-          <p:nvPr/>
-        </p:nvSpPr>
-        <p:spPr>
-          <a:xfrm>
-            <a:off x="609600" y="3095625"/>
-            <a:ext cx="5314950" cy="914400"/>
+      <p:pic>
+        <p:nvPicPr>
+          <p:cNvPr id="6" name="Picture 5" descr="image.png"/>
+          <p:cNvPicPr>
+            <a:picLocks noChangeAspect="1"/>
+          </p:cNvPicPr>
+          <p:nvPr/>
+        </p:nvPicPr>
+        <p:blipFill>
+          <a:blip r:embed="rId5"/>
+          <a:stretch>
+            <a:fillRect/>
+          </a:stretch>
+        </p:blipFill>
+        <p:spPr>
+          <a:xfrm>
+            <a:off x="6267450" y="4219575"/>
+            <a:ext cx="5000625" cy="1000125"/>
+          </a:xfrm>
+          <a:prstGeom prst="rect">
+            <a:avLst/>
+          </a:prstGeom>
+        </p:spPr>
+      </p:pic>
+      <p:sp>
+        <p:nvSpPr>
+          <p:cNvPr id="7" name="TextBox 6"/>
+          <p:cNvSpPr txBox="1"/>
+          <p:nvPr/>
+        </p:nvSpPr>
+        <p:spPr>
+          <a:xfrm>
+            <a:off x="609600" y="533400"/>
+            <a:ext cx="10972800" cy="647700"/>
+          </a:xfrm>
+          <a:prstGeom prst="rect">
+            <a:avLst/>
+          </a:prstGeom>
+          <a:noFill/>
+        </p:spPr>
+        <p:txBody>
+          <a:bodyPr wrap="square" lIns="0" rIns="0" tIns="0" bIns="0" anchor="t">
+            <a:spAutoFit/>
+          </a:bodyPr>
+          <a:lstStyle/>
+          <a:p>
+            <a:pPr algn="l"/>
+            <a:r>
+              <a:rPr b="1" sz="1200" i="0" u="none">
+                <a:solidFill>
+                  <a:srgbClr val="2563EB"/>
+                </a:solidFill>
+                <a:latin typeface="Noto Sans KR"/>
+              </a:rPr>
+              <a:t>FRAMEWORK STRATEGY</a:t>
+            </a:r>
+          </a:p>
+        </p:txBody>
+      </p:sp>
+      <p:sp>
+        <p:nvSpPr>
+          <p:cNvPr id="8" name="TextBox 7"/>
+          <p:cNvSpPr txBox="1"/>
+          <p:nvPr/>
+        </p:nvSpPr>
+        <p:spPr>
+          <a:xfrm>
+            <a:off x="609600" y="762000"/>
+            <a:ext cx="11521440" cy="419100"/>
+          </a:xfrm>
+          <a:prstGeom prst="rect">
+            <a:avLst/>
+          </a:prstGeom>
+          <a:noFill/>
+        </p:spPr>
+        <p:txBody>
+          <a:bodyPr wrap="square" lIns="0" rIns="0" tIns="0" bIns="0" anchor="t">
+            <a:spAutoFit/>
+          </a:bodyPr>
+          <a:lstStyle/>
+          <a:p>
+            <a:pPr algn="l"/>
+            <a:r>
+              <a:rPr b="0" sz="2400" i="0" u="none">
+                <a:solidFill>
+                  <a:srgbClr val="0F172A"/>
+                </a:solidFill>
+                <a:latin typeface="Noto Sans KR ExtraBold"/>
+              </a:rPr>
+              <a:t>왜 Enterprise NordAxe 프레임워크인가?</a:t>
+            </a:r>
+          </a:p>
+        </p:txBody>
+      </p:sp>
+      <p:sp>
+        <p:nvSpPr>
+          <p:cNvPr id="9" name="TextBox 8"/>
+          <p:cNvSpPr txBox="1"/>
+          <p:nvPr/>
+        </p:nvSpPr>
+        <p:spPr>
+          <a:xfrm>
+            <a:off x="6267450" y="2590800"/>
+            <a:ext cx="5250656" cy="285750"/>
+          </a:xfrm>
+          <a:prstGeom prst="rect">
+            <a:avLst/>
+          </a:prstGeom>
+          <a:noFill/>
+        </p:spPr>
+        <p:txBody>
+          <a:bodyPr wrap="square" lIns="0" rIns="0" tIns="0" bIns="0" anchor="t">
+            <a:spAutoFit/>
+          </a:bodyPr>
+          <a:lstStyle/>
+          <a:p>
+            <a:pPr algn="l"/>
+            <a:r>
+              <a:rPr b="1" sz="1650" i="0" u="none">
+                <a:solidFill>
+                  <a:srgbClr val="0F172A"/>
+                </a:solidFill>
+                <a:latin typeface="Noto Sans KR"/>
+              </a:rPr>
+              <a:t>Enterprise 환경에서의 핵심 가치</a:t>
+            </a:r>
+          </a:p>
+        </p:txBody>
+      </p:sp>
+      <p:sp>
+        <p:nvSpPr>
+          <p:cNvPr id="10" name="TextBox 9"/>
+          <p:cNvSpPr txBox="1"/>
+          <p:nvPr/>
+        </p:nvSpPr>
+        <p:spPr>
+          <a:xfrm>
+            <a:off x="885825" y="2581275"/>
+            <a:ext cx="1576089" cy="685800"/>
           </a:xfrm>
           <a:prstGeom prst="rect">
             <a:avLst/>
@@ -3626,11 +3734,11 @@
           <a:p>
             <a:pPr algn="l">
               <a:lnSpc>
-                <a:spcPts val="7200"/>
+                <a:spcPts val="4800"/>
               </a:lnSpc>
             </a:pPr>
             <a:r>
-              <a:rPr b="0" sz="7200" i="0" u="none">
+              <a:rPr b="0" sz="4800" i="0" u="none">
                 <a:solidFill>
                   <a:srgbClr val="2563EB"/>
                 </a:solidFill>
@@ -3643,14 +3751,14 @@
       </p:sp>
       <p:sp>
         <p:nvSpPr>
-          <p:cNvPr id="7" name="TextBox 6"/>
-          <p:cNvSpPr txBox="1"/>
-          <p:nvPr/>
-        </p:nvSpPr>
-        <p:spPr>
-          <a:xfrm>
-            <a:off x="609600" y="4124325"/>
-            <a:ext cx="5314950" cy="257175"/>
+          <p:cNvPr id="11" name="TextBox 10"/>
+          <p:cNvSpPr txBox="1"/>
+          <p:nvPr/>
+        </p:nvSpPr>
+        <p:spPr>
+          <a:xfrm>
+            <a:off x="885825" y="3305175"/>
+            <a:ext cx="4448175" cy="228600"/>
           </a:xfrm>
           <a:prstGeom prst="rect">
             <a:avLst/>
@@ -3665,27 +3773,27 @@
           <a:p>
             <a:pPr algn="l"/>
             <a:r>
-              <a:rPr b="1" sz="1500" i="0" u="none">
-                <a:solidFill>
-                  <a:srgbClr val="0F172A"/>
-                </a:solidFill>
-                <a:latin typeface="Noto Sans KR"/>
-              </a:rPr>
-              <a:t>현재 Python 편중 AI 생태계 비율</a:t>
-            </a:r>
-          </a:p>
-        </p:txBody>
-      </p:sp>
-      <p:sp>
-        <p:nvSpPr>
-          <p:cNvPr id="8" name="TextBox 7"/>
-          <p:cNvSpPr txBox="1"/>
-          <p:nvPr/>
-        </p:nvSpPr>
-        <p:spPr>
-          <a:xfrm>
-            <a:off x="609600" y="4457700"/>
-            <a:ext cx="5314950" cy="257175"/>
+              <a:rPr b="0" sz="1350" i="0" u="none">
+                <a:solidFill>
+                  <a:srgbClr val="475569"/>
+                </a:solidFill>
+                <a:latin typeface="Noto Sans KR"/>
+              </a:rPr>
+              <a:t>현재 AI Agent 생태계의 Python 치우침 현상</a:t>
+            </a:r>
+          </a:p>
+        </p:txBody>
+      </p:sp>
+      <p:sp>
+        <p:nvSpPr>
+          <p:cNvPr id="12" name="TextBox 11"/>
+          <p:cNvSpPr txBox="1"/>
+          <p:nvPr/>
+        </p:nvSpPr>
+        <p:spPr>
+          <a:xfrm>
+            <a:off x="885825" y="4238625"/>
+            <a:ext cx="2643485" cy="685800"/>
           </a:xfrm>
           <a:prstGeom prst="rect">
             <a:avLst/>
@@ -3700,31 +3808,66 @@
           <a:p>
             <a:pPr algn="l">
               <a:lnSpc>
-                <a:spcPts val="2025"/>
+                <a:spcPts val="4800"/>
               </a:lnSpc>
             </a:pPr>
             <a:r>
+              <a:rPr b="0" sz="4800" i="0" u="none">
+                <a:solidFill>
+                  <a:srgbClr val="0F172A"/>
+                </a:solidFill>
+                <a:latin typeface="Noto Sans KR Black"/>
+              </a:rPr>
+              <a:t>Java / C#</a:t>
+            </a:r>
+          </a:p>
+        </p:txBody>
+      </p:sp>
+      <p:sp>
+        <p:nvSpPr>
+          <p:cNvPr id="13" name="TextBox 12"/>
+          <p:cNvSpPr txBox="1"/>
+          <p:nvPr/>
+        </p:nvSpPr>
+        <p:spPr>
+          <a:xfrm>
+            <a:off x="885825" y="4962525"/>
+            <a:ext cx="4448175" cy="228600"/>
+          </a:xfrm>
+          <a:prstGeom prst="rect">
+            <a:avLst/>
+          </a:prstGeom>
+          <a:noFill/>
+        </p:spPr>
+        <p:txBody>
+          <a:bodyPr wrap="square" lIns="0" rIns="0" tIns="0" bIns="0" anchor="t">
+            <a:spAutoFit/>
+          </a:bodyPr>
+          <a:lstStyle/>
+          <a:p>
+            <a:pPr algn="l"/>
+            <a:r>
               <a:rPr b="0" sz="1350" i="0" u="none">
                 <a:solidFill>
                   <a:srgbClr val="475569"/>
                 </a:solidFill>
                 <a:latin typeface="Noto Sans KR"/>
               </a:rPr>
-              <a:t>그러나 기업 Enterprise 환경은 대부분 Java/C# 기반.</a:t>
-            </a:r>
-          </a:p>
-        </p:txBody>
-      </p:sp>
-      <p:sp>
-        <p:nvSpPr>
-          <p:cNvPr id="9" name="TextBox 8"/>
-          <p:cNvSpPr txBox="1"/>
-          <p:nvPr/>
-        </p:nvSpPr>
-        <p:spPr>
-          <a:xfrm>
-            <a:off x="6505575" y="2847975"/>
-            <a:ext cx="5080635" cy="228600"/>
+              <a:t>실제 기업 Enterprise 시스템의 핵심 인프라 언어</a:t>
+            </a:r>
+          </a:p>
+        </p:txBody>
+      </p:sp>
+      <p:sp>
+        <p:nvSpPr>
+          <p:cNvPr id="14" name="TextBox 13"/>
+          <p:cNvSpPr txBox="1"/>
+          <p:nvPr/>
+        </p:nvSpPr>
+        <p:spPr>
+          <a:xfrm>
+            <a:off x="6419850" y="3219450"/>
+            <a:ext cx="4695825" cy="219075"/>
           </a:xfrm>
           <a:prstGeom prst="rect">
             <a:avLst/>
@@ -3739,27 +3882,27 @@
           <a:p>
             <a:pPr algn="l"/>
             <a:r>
-              <a:rPr b="1" sz="1350" i="0" u="none">
-                <a:solidFill>
-                  <a:srgbClr val="0F172A"/>
-                </a:solidFill>
-                <a:latin typeface="Noto Sans KR"/>
-              </a:rPr>
-              <a:t>Java 비즈니스 모듈 직접 재활용</a:t>
-            </a:r>
-          </a:p>
-        </p:txBody>
-      </p:sp>
-      <p:sp>
-        <p:nvSpPr>
-          <p:cNvPr id="10" name="TextBox 9"/>
-          <p:cNvSpPr txBox="1"/>
-          <p:nvPr/>
-        </p:nvSpPr>
-        <p:spPr>
-          <a:xfrm>
-            <a:off x="6505575" y="3133725"/>
-            <a:ext cx="4838700" cy="457200"/>
+              <a:rPr b="1" sz="1275" i="0" u="none">
+                <a:solidFill>
+                  <a:srgbClr val="2563EB"/>
+                </a:solidFill>
+                <a:latin typeface="Noto Sans KR"/>
+              </a:rPr>
+              <a:t>Java Business 모듈 직접 재활용</a:t>
+            </a:r>
+          </a:p>
+        </p:txBody>
+      </p:sp>
+      <p:sp>
+        <p:nvSpPr>
+          <p:cNvPr id="15" name="TextBox 14"/>
+          <p:cNvSpPr txBox="1"/>
+          <p:nvPr/>
+        </p:nvSpPr>
+        <p:spPr>
+          <a:xfrm>
+            <a:off x="6419850" y="3476625"/>
+            <a:ext cx="4695825" cy="438150"/>
           </a:xfrm>
           <a:prstGeom prst="rect">
             <a:avLst/>
@@ -3774,27 +3917,27 @@
           <a:p>
             <a:pPr algn="l"/>
             <a:r>
-              <a:rPr b="0" sz="1350" i="0" u="none">
+              <a:rPr b="0" sz="1275" i="0" u="none">
                 <a:solidFill>
                   <a:srgbClr val="334155"/>
                 </a:solidFill>
                 <a:latin typeface="Noto Sans KR"/>
               </a:rPr>
-              <a:t>큰 변환 공수 없이 Java Agent Tool로 변환하여 획기적 비용 절감.</a:t>
-            </a:r>
-          </a:p>
-        </p:txBody>
-      </p:sp>
-      <p:sp>
-        <p:nvSpPr>
-          <p:cNvPr id="11" name="TextBox 10"/>
-          <p:cNvSpPr txBox="1"/>
-          <p:nvPr/>
-        </p:nvSpPr>
-        <p:spPr>
-          <a:xfrm>
-            <a:off x="6505575" y="4219575"/>
-            <a:ext cx="5080635" cy="228600"/>
+              <a:t>큰 변환 공수 없이 기존 Java 모듈을 Agent Tool로 전환하여 압도적 비용 절감</a:t>
+            </a:r>
+          </a:p>
+        </p:txBody>
+      </p:sp>
+      <p:sp>
+        <p:nvSpPr>
+          <p:cNvPr id="16" name="TextBox 15"/>
+          <p:cNvSpPr txBox="1"/>
+          <p:nvPr/>
+        </p:nvSpPr>
+        <p:spPr>
+          <a:xfrm>
+            <a:off x="6419850" y="4371975"/>
+            <a:ext cx="4695825" cy="219075"/>
           </a:xfrm>
           <a:prstGeom prst="rect">
             <a:avLst/>
@@ -3809,9 +3952,9 @@
           <a:p>
             <a:pPr algn="l"/>
             <a:r>
-              <a:rPr b="1" sz="1350" i="0" u="none">
-                <a:solidFill>
-                  <a:srgbClr val="0F172A"/>
+              <a:rPr b="1" sz="1275" i="0" u="none">
+                <a:solidFill>
+                  <a:srgbClr val="2563EB"/>
                 </a:solidFill>
                 <a:latin typeface="Noto Sans KR"/>
               </a:rPr>
@@ -3822,14 +3965,14 @@
       </p:sp>
       <p:sp>
         <p:nvSpPr>
-          <p:cNvPr id="12" name="TextBox 11"/>
-          <p:cNvSpPr txBox="1"/>
-          <p:nvPr/>
-        </p:nvSpPr>
-        <p:spPr>
-          <a:xfrm>
-            <a:off x="6505575" y="4505325"/>
-            <a:ext cx="4838700" cy="457200"/>
+          <p:cNvPr id="17" name="TextBox 16"/>
+          <p:cNvSpPr txBox="1"/>
+          <p:nvPr/>
+        </p:nvSpPr>
+        <p:spPr>
+          <a:xfrm>
+            <a:off x="6419850" y="4629150"/>
+            <a:ext cx="4695825" cy="438150"/>
           </a:xfrm>
           <a:prstGeom prst="rect">
             <a:avLst/>
@@ -3844,13 +3987,13 @@
           <a:p>
             <a:pPr algn="l"/>
             <a:r>
-              <a:rPr b="0" sz="1350" i="0" u="none">
+              <a:rPr b="0" sz="1275" i="0" u="none">
                 <a:solidFill>
                   <a:srgbClr val="334155"/>
                 </a:solidFill>
                 <a:latin typeface="Noto Sans KR"/>
               </a:rPr>
-              <a:t>초기 프로토타이핑(Python) 대비 대규모 엔터프라이즈 운영 시 Java가 압도적 유리.</a:t>
+              <a:t>파이프라인 프로토타이핑(Python)을 넘어 대규모 대용량 운영 체계(Java) 확립</a:t>
             </a:r>
           </a:p>
         </p:txBody>
@@ -3869,7 +4012,7 @@
     <p:bg>
       <p:bgPr>
         <a:solidFill>
-          <a:srgbClr val="020617"/>
+          <a:srgbClr val="FFFFFF"/>
         </a:solidFill>
         <a:effectLst/>
       </p:bgPr>
@@ -3881,6 +4024,408 @@
         <p:nvPr/>
       </p:nvGrpSpPr>
       <p:grpSpPr/>
+      <p:pic>
+        <p:nvPicPr>
+          <p:cNvPr id="2" name="Picture 1" descr="image.png"/>
+          <p:cNvPicPr>
+            <a:picLocks noChangeAspect="1"/>
+          </p:cNvPicPr>
+          <p:nvPr/>
+        </p:nvPicPr>
+        <p:blipFill>
+          <a:blip r:embed="rId2"/>
+          <a:stretch>
+            <a:fillRect/>
+          </a:stretch>
+        </p:blipFill>
+        <p:spPr>
+          <a:xfrm>
+            <a:off x="6257925" y="1485900"/>
+            <a:ext cx="5324475" cy="4838700"/>
+          </a:xfrm>
+          <a:prstGeom prst="rect">
+            <a:avLst/>
+          </a:prstGeom>
+        </p:spPr>
+      </p:pic>
+      <p:pic>
+        <p:nvPicPr>
+          <p:cNvPr id="3" name="Picture 2" descr="image.png"/>
+          <p:cNvPicPr>
+            <a:picLocks noChangeAspect="1"/>
+          </p:cNvPicPr>
+          <p:nvPr/>
+        </p:nvPicPr>
+        <p:blipFill>
+          <a:blip r:embed="rId3"/>
+          <a:stretch>
+            <a:fillRect/>
+          </a:stretch>
+        </p:blipFill>
+        <p:spPr>
+          <a:xfrm>
+            <a:off x="609600" y="2100262"/>
+            <a:ext cx="5305425" cy="1838325"/>
+          </a:xfrm>
+          <a:prstGeom prst="rect">
+            <a:avLst/>
+          </a:prstGeom>
+        </p:spPr>
+      </p:pic>
+      <p:pic>
+        <p:nvPicPr>
+          <p:cNvPr id="4" name="Picture 3" descr="image.png"/>
+          <p:cNvPicPr>
+            <a:picLocks noChangeAspect="1"/>
+          </p:cNvPicPr>
+          <p:nvPr/>
+        </p:nvPicPr>
+        <p:blipFill>
+          <a:blip r:embed="rId4"/>
+          <a:stretch>
+            <a:fillRect/>
+          </a:stretch>
+        </p:blipFill>
+        <p:spPr>
+          <a:xfrm>
+            <a:off x="609600" y="4129087"/>
+            <a:ext cx="5305425" cy="1581150"/>
+          </a:xfrm>
+          <a:prstGeom prst="rect">
+            <a:avLst/>
+          </a:prstGeom>
+        </p:spPr>
+      </p:pic>
+      <p:sp>
+        <p:nvSpPr>
+          <p:cNvPr id="5" name="TextBox 4"/>
+          <p:cNvSpPr txBox="1"/>
+          <p:nvPr/>
+        </p:nvSpPr>
+        <p:spPr>
+          <a:xfrm>
+            <a:off x="609600" y="533400"/>
+            <a:ext cx="10972800" cy="647700"/>
+          </a:xfrm>
+          <a:prstGeom prst="rect">
+            <a:avLst/>
+          </a:prstGeom>
+          <a:noFill/>
+        </p:spPr>
+        <p:txBody>
+          <a:bodyPr wrap="square" lIns="0" rIns="0" tIns="0" bIns="0" anchor="t">
+            <a:spAutoFit/>
+          </a:bodyPr>
+          <a:lstStyle/>
+          <a:p>
+            <a:pPr algn="l"/>
+            <a:r>
+              <a:rPr b="1" sz="1200" i="0" u="none">
+                <a:solidFill>
+                  <a:srgbClr val="2563EB"/>
+                </a:solidFill>
+                <a:latin typeface="Noto Sans KR"/>
+              </a:rPr>
+              <a:t>PROVEN PERFORMANCE</a:t>
+            </a:r>
+          </a:p>
+        </p:txBody>
+      </p:sp>
+      <p:sp>
+        <p:nvSpPr>
+          <p:cNvPr id="6" name="TextBox 5"/>
+          <p:cNvSpPr txBox="1"/>
+          <p:nvPr/>
+        </p:nvSpPr>
+        <p:spPr>
+          <a:xfrm>
+            <a:off x="609600" y="762000"/>
+            <a:ext cx="11521440" cy="419100"/>
+          </a:xfrm>
+          <a:prstGeom prst="rect">
+            <a:avLst/>
+          </a:prstGeom>
+          <a:noFill/>
+        </p:spPr>
+        <p:txBody>
+          <a:bodyPr wrap="square" lIns="0" rIns="0" tIns="0" bIns="0" anchor="t">
+            <a:spAutoFit/>
+          </a:bodyPr>
+          <a:lstStyle/>
+          <a:p>
+            <a:pPr algn="l"/>
+            <a:r>
+              <a:rPr b="0" sz="2400" i="0" u="none">
+                <a:solidFill>
+                  <a:srgbClr val="0F172A"/>
+                </a:solidFill>
+                <a:latin typeface="Noto Sans KR ExtraBold"/>
+              </a:rPr>
+              <a:t>검증된 실적 및 NordAxe 아키텍처 특장점</a:t>
+            </a:r>
+          </a:p>
+        </p:txBody>
+      </p:sp>
+      <p:pic>
+        <p:nvPicPr>
+          <p:cNvPr id="7" name="Picture 6" descr="image.png"/>
+          <p:cNvPicPr>
+            <a:picLocks noChangeAspect="1"/>
+          </p:cNvPicPr>
+          <p:nvPr/>
+        </p:nvPicPr>
+        <p:blipFill>
+          <a:blip r:embed="rId5"/>
+          <a:stretch>
+            <a:fillRect/>
+          </a:stretch>
+        </p:blipFill>
+        <p:spPr>
+          <a:xfrm>
+            <a:off x="6267450" y="1495425"/>
+            <a:ext cx="5305425" cy="4819650"/>
+          </a:xfrm>
+          <a:prstGeom prst="rect">
+            <a:avLst/>
+          </a:prstGeom>
+        </p:spPr>
+      </p:pic>
+      <p:sp>
+        <p:nvSpPr>
+          <p:cNvPr id="8" name="TextBox 7"/>
+          <p:cNvSpPr txBox="1"/>
+          <p:nvPr/>
+        </p:nvSpPr>
+        <p:spPr>
+          <a:xfrm>
+            <a:off x="847725" y="2671762"/>
+            <a:ext cx="4829175" cy="1028700"/>
+          </a:xfrm>
+          <a:prstGeom prst="rect">
+            <a:avLst/>
+          </a:prstGeom>
+          <a:noFill/>
+        </p:spPr>
+        <p:txBody>
+          <a:bodyPr wrap="square" lIns="0" rIns="0" tIns="0" bIns="0" anchor="t">
+            <a:spAutoFit/>
+          </a:bodyPr>
+          <a:lstStyle/>
+          <a:p>
+            <a:pPr algn="l">
+              <a:lnSpc>
+                <a:spcPts val="2025"/>
+              </a:lnSpc>
+            </a:pPr>
+            <a:r>
+              <a:rPr b="1" sz="1350" i="0" u="none">
+                <a:solidFill>
+                  <a:srgbClr val="334155"/>
+                </a:solidFill>
+                <a:latin typeface="Noto Sans KR"/>
+              </a:rPr>
+              <a:t>SK하이닉스 M16</a:t>
+            </a:r>
+            <a:r>
+              <a:rPr b="0" sz="1350" i="0" u="none">
+                <a:solidFill>
+                  <a:srgbClr val="334155"/>
+                </a:solidFill>
+                <a:latin typeface="Noto Sans KR"/>
+              </a:rPr>
+              <a:t> 및 </a:t>
+            </a:r>
+            <a:r>
+              <a:rPr b="1" sz="1350" i="0" u="none">
+                <a:solidFill>
+                  <a:srgbClr val="334155"/>
+                </a:solidFill>
+                <a:latin typeface="Noto Sans KR"/>
+              </a:rPr>
+              <a:t>LS일렉트릭 ESS MES</a:t>
+            </a:r>
+            <a:r>
+              <a:rPr b="0" sz="1350" i="0" u="none">
+                <a:solidFill>
+                  <a:srgbClr val="334155"/>
+                </a:solidFill>
+                <a:latin typeface="Noto Sans KR"/>
+              </a:rPr>
+              <a:t> 채택 프레임워크 베이스</a:t>
+            </a:r>
+            <a:r>
+              <a:t>
+</a:t>
+            </a:r>
+            <a:r>
+              <a:rPr b="0" sz="1350" i="0" u="none">
+                <a:solidFill>
+                  <a:srgbClr val="334155"/>
+                </a:solidFill>
+                <a:latin typeface="Noto Sans KR"/>
+              </a:rPr>
+              <a:t> Legacy MES를 Spring 구조 MVC MAS MES로 안정적 변환 지원</a:t>
+            </a:r>
+          </a:p>
+        </p:txBody>
+      </p:sp>
+      <p:sp>
+        <p:nvSpPr>
+          <p:cNvPr id="9" name="TextBox 8"/>
+          <p:cNvSpPr txBox="1"/>
+          <p:nvPr/>
+        </p:nvSpPr>
+        <p:spPr>
+          <a:xfrm>
+            <a:off x="847725" y="4700587"/>
+            <a:ext cx="4829175" cy="771525"/>
+          </a:xfrm>
+          <a:prstGeom prst="rect">
+            <a:avLst/>
+          </a:prstGeom>
+          <a:noFill/>
+        </p:spPr>
+        <p:txBody>
+          <a:bodyPr wrap="square" lIns="0" rIns="0" tIns="0" bIns="0" anchor="t">
+            <a:spAutoFit/>
+          </a:bodyPr>
+          <a:lstStyle/>
+          <a:p>
+            <a:pPr algn="l">
+              <a:lnSpc>
+                <a:spcPts val="2025"/>
+              </a:lnSpc>
+            </a:pPr>
+            <a:r>
+              <a:rPr b="0" sz="1350" i="0" u="none">
+                <a:solidFill>
+                  <a:srgbClr val="334155"/>
+                </a:solidFill>
+                <a:latin typeface="Noto Sans KR"/>
+              </a:rPr>
+              <a:t>Spring AOP 구조적 유사성을 유지하되, SLF4J 퍼사드 패턴 기반 계통화된 Factory로 제공되어 Enterprise 소스 품질 관제 및 제어 특화</a:t>
+            </a:r>
+          </a:p>
+        </p:txBody>
+      </p:sp>
+      <p:pic>
+        <p:nvPicPr>
+          <p:cNvPr id="10" name="Picture 9" descr="image.png"/>
+          <p:cNvPicPr>
+            <a:picLocks noChangeAspect="1"/>
+          </p:cNvPicPr>
+          <p:nvPr/>
+        </p:nvPicPr>
+        <p:blipFill>
+          <a:blip r:embed="rId6"/>
+          <a:stretch>
+            <a:fillRect/>
+          </a:stretch>
+        </p:blipFill>
+        <p:spPr>
+          <a:xfrm>
+            <a:off x="847725" y="2362200"/>
+            <a:ext cx="163115" cy="209550"/>
+          </a:xfrm>
+          <a:prstGeom prst="rect">
+            <a:avLst/>
+          </a:prstGeom>
+        </p:spPr>
+      </p:pic>
+      <p:sp>
+        <p:nvSpPr>
+          <p:cNvPr id="11" name="TextBox 10"/>
+          <p:cNvSpPr txBox="1"/>
+          <p:nvPr/>
+        </p:nvSpPr>
+        <p:spPr>
+          <a:xfrm>
+            <a:off x="1106090" y="2338387"/>
+            <a:ext cx="2367014" cy="257175"/>
+          </a:xfrm>
+          <a:prstGeom prst="rect">
+            <a:avLst/>
+          </a:prstGeom>
+          <a:noFill/>
+        </p:spPr>
+        <p:txBody>
+          <a:bodyPr wrap="square" lIns="0" rIns="0" tIns="0" bIns="0" anchor="t">
+            <a:spAutoFit/>
+          </a:bodyPr>
+          <a:lstStyle/>
+          <a:p>
+            <a:pPr algn="l"/>
+            <a:r>
+              <a:rPr b="1" sz="1500" i="0" u="none">
+                <a:solidFill>
+                  <a:srgbClr val="0F172A"/>
+                </a:solidFill>
+                <a:latin typeface="Noto Sans KR"/>
+              </a:rPr>
+              <a:t>초대형 제조 레퍼런스 검증</a:t>
+            </a:r>
+          </a:p>
+        </p:txBody>
+      </p:sp>
+      <p:pic>
+        <p:nvPicPr>
+          <p:cNvPr id="12" name="Picture 11" descr="image.png"/>
+          <p:cNvPicPr>
+            <a:picLocks noChangeAspect="1"/>
+          </p:cNvPicPr>
+          <p:nvPr/>
+        </p:nvPicPr>
+        <p:blipFill>
+          <a:blip r:embed="rId7"/>
+          <a:stretch>
+            <a:fillRect/>
+          </a:stretch>
+        </p:blipFill>
+        <p:spPr>
+          <a:xfrm>
+            <a:off x="847725" y="4391025"/>
+            <a:ext cx="163115" cy="209550"/>
+          </a:xfrm>
+          <a:prstGeom prst="rect">
+            <a:avLst/>
+          </a:prstGeom>
+        </p:spPr>
+      </p:pic>
+      <p:sp>
+        <p:nvSpPr>
+          <p:cNvPr id="13" name="TextBox 12"/>
+          <p:cNvSpPr txBox="1"/>
+          <p:nvPr/>
+        </p:nvSpPr>
+        <p:spPr>
+          <a:xfrm>
+            <a:off x="1106090" y="4367212"/>
+            <a:ext cx="3078509" cy="257175"/>
+          </a:xfrm>
+          <a:prstGeom prst="rect">
+            <a:avLst/>
+          </a:prstGeom>
+          <a:noFill/>
+        </p:spPr>
+        <p:txBody>
+          <a:bodyPr wrap="square" lIns="0" rIns="0" tIns="0" bIns="0" anchor="t">
+            <a:spAutoFit/>
+          </a:bodyPr>
+          <a:lstStyle/>
+          <a:p>
+            <a:pPr algn="l"/>
+            <a:r>
+              <a:rPr b="1" sz="1500" i="0" u="none">
+                <a:solidFill>
+                  <a:srgbClr val="0F172A"/>
+                </a:solidFill>
+                <a:latin typeface="Noto Sans KR"/>
+              </a:rPr>
+              <a:t>Spring AOP &amp; SLF4J 퍼사드 구조</a:t>
+            </a:r>
+          </a:p>
+        </p:txBody>
+      </p:sp>
     </p:spTree>
   </p:cSld>
   <p:clrMapOvr>
@@ -3907,118 +4452,9 @@
         <p:nvPr/>
       </p:nvGrpSpPr>
       <p:grpSpPr/>
-      <p:sp>
-        <p:nvSpPr>
-          <p:cNvPr id="2" name="TextBox 1"/>
-          <p:cNvSpPr txBox="1"/>
-          <p:nvPr/>
-        </p:nvSpPr>
-        <p:spPr>
-          <a:xfrm>
-            <a:off x="5200501" y="2124075"/>
-            <a:ext cx="1790997" cy="152400"/>
-          </a:xfrm>
-          <a:prstGeom prst="rect">
-            <a:avLst/>
-          </a:prstGeom>
-          <a:noFill/>
-        </p:spPr>
-        <p:txBody>
-          <a:bodyPr wrap="square" lIns="0" rIns="0" tIns="0" bIns="0" anchor="t">
-            <a:spAutoFit/>
-          </a:bodyPr>
-          <a:lstStyle/>
-          <a:p>
-            <a:pPr algn="ctr"/>
-            <a:r>
-              <a:rPr b="1" sz="1050" i="0" u="none">
-                <a:solidFill>
-                  <a:srgbClr val="38BDF8"/>
-                </a:solidFill>
-                <a:latin typeface="JetBrains Mono"/>
-              </a:rPr>
-              <a:t>SUMMARY &amp; CONCLUSION</a:t>
-            </a:r>
-          </a:p>
-        </p:txBody>
-      </p:sp>
-      <p:sp>
-        <p:nvSpPr>
-          <p:cNvPr id="3" name="TextBox 2"/>
-          <p:cNvSpPr txBox="1"/>
-          <p:nvPr/>
-        </p:nvSpPr>
-        <p:spPr>
-          <a:xfrm>
-            <a:off x="2314746" y="2428875"/>
-            <a:ext cx="7562507" cy="561975"/>
-          </a:xfrm>
-          <a:prstGeom prst="rect">
-            <a:avLst/>
-          </a:prstGeom>
-          <a:noFill/>
-        </p:spPr>
-        <p:txBody>
-          <a:bodyPr wrap="square" lIns="0" rIns="0" tIns="0" bIns="0" anchor="t">
-            <a:spAutoFit/>
-          </a:bodyPr>
-          <a:lstStyle/>
-          <a:p>
-            <a:pPr algn="ctr"/>
-            <a:r>
-              <a:rPr b="0" sz="3300" i="0" u="none">
-                <a:solidFill>
-                  <a:srgbClr val="F8FAFC"/>
-                </a:solidFill>
-                <a:latin typeface="Noto Sans KR Black"/>
-              </a:rPr>
-              <a:t>제조 AI Agent 아키텍처 구축 기대효과</a:t>
-            </a:r>
-          </a:p>
-        </p:txBody>
-      </p:sp>
-      <p:sp>
-        <p:nvSpPr>
-          <p:cNvPr id="4" name="TextBox 3"/>
-          <p:cNvSpPr txBox="1"/>
-          <p:nvPr/>
-        </p:nvSpPr>
-        <p:spPr>
-          <a:xfrm>
-            <a:off x="2095500" y="3219450"/>
-            <a:ext cx="8001000" cy="609600"/>
-          </a:xfrm>
-          <a:prstGeom prst="rect">
-            <a:avLst/>
-          </a:prstGeom>
-          <a:noFill/>
-        </p:spPr>
-        <p:txBody>
-          <a:bodyPr wrap="square" lIns="0" rIns="0" tIns="0" bIns="0" anchor="t">
-            <a:spAutoFit/>
-          </a:bodyPr>
-          <a:lstStyle/>
-          <a:p>
-            <a:pPr algn="ctr">
-              <a:lnSpc>
-                <a:spcPts val="2400"/>
-              </a:lnSpc>
-            </a:pPr>
-            <a:r>
-              <a:rPr b="0" sz="1500" i="0" u="none">
-                <a:solidFill>
-                  <a:srgbClr val="94A3B8"/>
-                </a:solidFill>
-                <a:latin typeface="Noto Sans KR"/>
-              </a:rPr>
-              <a:t>바이브 코딩 표준화부터 NordAxe Java 프레임워크 도입까지, 신속한 개발 생산성과 엔터프라이즈 운영 안정성을 동시에 확보합니다.</a:t>
-            </a:r>
-          </a:p>
-        </p:txBody>
-      </p:sp>
       <p:pic>
         <p:nvPicPr>
-          <p:cNvPr id="5" name="Picture 4" descr="image.png"/>
+          <p:cNvPr id="2" name="Picture 1" descr="image.png"/>
           <p:cNvPicPr>
             <a:picLocks noChangeAspect="1"/>
           </p:cNvPicPr>
@@ -4032,62 +4468,348 @@
         </p:blipFill>
         <p:spPr>
           <a:xfrm>
-            <a:off x="3489275" y="4286250"/>
-            <a:ext cx="1475333" cy="447675"/>
+            <a:off x="5143351" y="1761232"/>
+            <a:ext cx="1905297" cy="266700"/>
           </a:xfrm>
           <a:prstGeom prst="rect">
             <a:avLst/>
           </a:prstGeom>
         </p:spPr>
       </p:pic>
+      <p:sp>
+        <p:nvSpPr>
+          <p:cNvPr id="3" name="TextBox 2"/>
+          <p:cNvSpPr txBox="1"/>
+          <p:nvPr/>
+        </p:nvSpPr>
+        <p:spPr>
+          <a:xfrm>
+            <a:off x="3304557" y="2256532"/>
+            <a:ext cx="5582885" cy="1097160"/>
+          </a:xfrm>
+          <a:prstGeom prst="rect">
+            <a:avLst/>
+          </a:prstGeom>
+          <a:noFill/>
+        </p:spPr>
+        <p:txBody>
+          <a:bodyPr wrap="square" lIns="0" rIns="0" tIns="0" bIns="0" anchor="t">
+            <a:spAutoFit/>
+          </a:bodyPr>
+          <a:lstStyle/>
+          <a:p>
+            <a:pPr algn="ctr">
+              <a:lnSpc>
+                <a:spcPts val="4320"/>
+              </a:lnSpc>
+            </a:pPr>
+            <a:r>
+              <a:rPr b="0" sz="3600" i="0" u="none">
+                <a:solidFill>
+                  <a:srgbClr val="F8FAFC"/>
+                </a:solidFill>
+                <a:latin typeface="Noto Sans KR Black"/>
+              </a:rPr>
+              <a:t>지능형 제조 AI Agent로의</a:t>
+            </a:r>
+            <a:r>
+              <a:t>
+</a:t>
+            </a:r>
+            <a:r>
+              <a:rPr b="0" sz="3600" i="0" u="none">
+                <a:solidFill>
+                  <a:srgbClr val="38BDF8"/>
+                </a:solidFill>
+                <a:latin typeface="Noto Sans KR Black"/>
+              </a:rPr>
+              <a:t>성공적인 전환</a:t>
+            </a:r>
+          </a:p>
+        </p:txBody>
+      </p:sp>
+      <p:sp>
+        <p:nvSpPr>
+          <p:cNvPr id="4" name="TextBox 3"/>
+          <p:cNvSpPr txBox="1"/>
+          <p:nvPr/>
+        </p:nvSpPr>
+        <p:spPr>
+          <a:xfrm>
+            <a:off x="2095500" y="3544192"/>
+            <a:ext cx="8001000" cy="609600"/>
+          </a:xfrm>
+          <a:prstGeom prst="rect">
+            <a:avLst/>
+          </a:prstGeom>
+          <a:noFill/>
+        </p:spPr>
+        <p:txBody>
+          <a:bodyPr wrap="square" lIns="0" rIns="0" tIns="0" bIns="0" anchor="t">
+            <a:spAutoFit/>
+          </a:bodyPr>
+          <a:lstStyle/>
+          <a:p>
+            <a:pPr algn="ctr">
+              <a:lnSpc>
+                <a:spcPts val="2400"/>
+              </a:lnSpc>
+            </a:pPr>
+            <a:r>
+              <a:rPr b="0" sz="1500" i="0" u="none">
+                <a:solidFill>
+                  <a:srgbClr val="94A3B8"/>
+                </a:solidFill>
+                <a:latin typeface="Noto Sans KR"/>
+              </a:rPr>
+              <a:t>바이브 코딩 표준화, MES CSV/Vector RAG 구축, NordAxe Enterprise 프레임워크를 통해 제조 현장의 생산성과 품질을 혁신합니다.</a:t>
+            </a:r>
+          </a:p>
+        </p:txBody>
+      </p:sp>
+      <p:sp>
+        <p:nvSpPr>
+          <p:cNvPr id="5" name="Rectangle 4"/>
+          <p:cNvSpPr/>
+          <p:nvPr/>
+        </p:nvSpPr>
+        <p:spPr>
+          <a:xfrm>
+            <a:off x="5810250" y="4534792"/>
+            <a:ext cx="571500" cy="28575"/>
+          </a:xfrm>
+          <a:prstGeom prst="rect">
+            <a:avLst/>
+          </a:prstGeom>
+          <a:solidFill>
+            <a:srgbClr val="38BDF8"/>
+          </a:solidFill>
+          <a:ln>
+            <a:noFill/>
+          </a:ln>
+          <a:effectLst/>
+        </p:spPr>
+        <p:style>
+          <a:lnRef idx="1">
+            <a:schemeClr val="accent1"/>
+          </a:lnRef>
+          <a:fillRef idx="3">
+            <a:schemeClr val="accent1"/>
+          </a:fillRef>
+          <a:effectRef idx="2">
+            <a:schemeClr val="accent1"/>
+          </a:effectRef>
+          <a:fontRef idx="minor">
+            <a:schemeClr val="lt1"/>
+          </a:fontRef>
+        </p:style>
+        <p:txBody>
+          <a:bodyPr rtlCol="0" anchor="ctr"/>
+          <a:lstStyle/>
+          <a:p>
+            <a:pPr algn="ctr"/>
+          </a:p>
+        </p:txBody>
+      </p:sp>
+      <p:sp>
+        <p:nvSpPr>
+          <p:cNvPr id="6" name="TextBox 5"/>
+          <p:cNvSpPr txBox="1"/>
+          <p:nvPr/>
+        </p:nvSpPr>
+        <p:spPr>
+          <a:xfrm>
+            <a:off x="5376713" y="4868167"/>
+            <a:ext cx="1438572" cy="228600"/>
+          </a:xfrm>
+          <a:prstGeom prst="rect">
+            <a:avLst/>
+          </a:prstGeom>
+          <a:noFill/>
+        </p:spPr>
+        <p:txBody>
+          <a:bodyPr wrap="square" lIns="0" rIns="0" tIns="0" bIns="0" anchor="t">
+            <a:spAutoFit/>
+          </a:bodyPr>
+          <a:lstStyle/>
+          <a:p>
+            <a:pPr algn="ctr"/>
+            <a:r>
+              <a:rPr b="0" sz="1350" i="0" u="none">
+                <a:solidFill>
+                  <a:srgbClr val="CBD5E1"/>
+                </a:solidFill>
+                <a:latin typeface="Noto Sans KR Medium"/>
+              </a:rPr>
+              <a:t>Q &amp; A / 감사합니다</a:t>
+            </a:r>
+          </a:p>
+        </p:txBody>
+      </p:sp>
+    </p:spTree>
+  </p:cSld>
+  <p:clrMapOvr>
+    <a:masterClrMapping/>
+  </p:clrMapOvr>
+</p:sld>
+</file>
+
+<file path=ppt/slides/slide13.xml><?xml version="1.0" encoding="utf-8"?>
+<p:sld xmlns:a="http://schemas.openxmlformats.org/drawingml/2006/main" xmlns:p="http://schemas.openxmlformats.org/presentationml/2006/main" xmlns:r="http://schemas.openxmlformats.org/officeDocument/2006/relationships">
+  <p:cSld>
+    <p:bg>
+      <p:bgPr>
+        <a:solidFill>
+          <a:srgbClr val="FFFFFF"/>
+        </a:solidFill>
+        <a:effectLst/>
+      </p:bgPr>
+    </p:bg>
+    <p:spTree>
+      <p:nvGrpSpPr>
+        <p:cNvPr id="1" name=""/>
+        <p:cNvGrpSpPr/>
+        <p:nvPr/>
+      </p:nvGrpSpPr>
+      <p:grpSpPr/>
+      <p:sp>
+        <p:nvSpPr>
+          <p:cNvPr id="2" name="TextBox 1"/>
+          <p:cNvSpPr txBox="1"/>
+          <p:nvPr/>
+        </p:nvSpPr>
+        <p:spPr>
+          <a:xfrm>
+            <a:off x="571500" y="571500"/>
+            <a:ext cx="11601450" cy="266700"/>
+          </a:xfrm>
+          <a:prstGeom prst="rect">
+            <a:avLst/>
+          </a:prstGeom>
+          <a:noFill/>
+        </p:spPr>
+        <p:txBody>
+          <a:bodyPr wrap="square" lIns="0" rIns="0" tIns="0" bIns="0" anchor="t">
+            <a:spAutoFit/>
+          </a:bodyPr>
+          <a:lstStyle/>
+          <a:p>
+            <a:pPr algn="l"/>
+            <a:r>
+              <a:rPr b="1" sz="1800" i="0" u="none">
+                <a:solidFill>
+                  <a:srgbClr val="0F172A"/>
+                </a:solidFill>
+                <a:latin typeface="Noto Sans KR"/>
+              </a:rPr>
+              <a:t>Image Sources</a:t>
+            </a:r>
+          </a:p>
+        </p:txBody>
+      </p:sp>
       <p:pic>
         <p:nvPicPr>
-          <p:cNvPr id="6" name="Picture 5" descr="image.png"/>
+          <p:cNvPr id="3" name="Picture 2" descr="image.png"/>
           <p:cNvPicPr>
             <a:picLocks noChangeAspect="1"/>
           </p:cNvPicPr>
           <p:nvPr/>
         </p:nvPicPr>
         <p:blipFill>
-          <a:blip r:embed="rId3"/>
+          <a:blip r:embed="rId2"/>
           <a:stretch>
             <a:fillRect/>
           </a:stretch>
         </p:blipFill>
         <p:spPr>
           <a:xfrm>
-            <a:off x="5117008" y="4286250"/>
-            <a:ext cx="1627733" cy="447675"/>
+            <a:off x="571500" y="981075"/>
+            <a:ext cx="857250" cy="476250"/>
           </a:xfrm>
           <a:prstGeom prst="rect">
             <a:avLst/>
           </a:prstGeom>
         </p:spPr>
       </p:pic>
-      <p:pic>
-        <p:nvPicPr>
-          <p:cNvPr id="7" name="Picture 6" descr="image.png"/>
-          <p:cNvPicPr>
-            <a:picLocks noChangeAspect="1"/>
-          </p:cNvPicPr>
-          <p:nvPr/>
-        </p:nvPicPr>
-        <p:blipFill>
-          <a:blip r:embed="rId4"/>
-          <a:stretch>
-            <a:fillRect/>
-          </a:stretch>
-        </p:blipFill>
-        <p:spPr>
-          <a:xfrm>
-            <a:off x="6897141" y="4286250"/>
-            <a:ext cx="1805582" cy="447675"/>
-          </a:xfrm>
-          <a:prstGeom prst="rect">
-            <a:avLst/>
-          </a:prstGeom>
-        </p:spPr>
-      </p:pic>
+      <p:sp>
+        <p:nvSpPr>
+          <p:cNvPr id="4" name="TextBox 3"/>
+          <p:cNvSpPr txBox="1"/>
+          <p:nvPr/>
+        </p:nvSpPr>
+        <p:spPr>
+          <a:xfrm>
+            <a:off x="1666875" y="1038225"/>
+            <a:ext cx="9953625" cy="142875"/>
+          </a:xfrm>
+          <a:prstGeom prst="rect">
+            <a:avLst/>
+          </a:prstGeom>
+          <a:noFill/>
+        </p:spPr>
+        <p:txBody>
+          <a:bodyPr wrap="square" lIns="0" rIns="0" tIns="0" bIns="0" anchor="t">
+            <a:spAutoFit/>
+          </a:bodyPr>
+          <a:lstStyle/>
+          <a:p>
+            <a:pPr algn="l"/>
+            <a:r>
+              <a:rPr b="0" sz="975" i="0" u="none">
+                <a:solidFill>
+                  <a:srgbClr val="0F172A"/>
+                </a:solidFill>
+                <a:latin typeface="Noto Sans KR"/>
+              </a:rPr>
+              <a:t>https://www.einnosys.com/wp-content/uploads/2026/03/Industry-4.0-Smart-Factory-Solutions-for-Semiconductor-Manufacturing.webp</a:t>
+            </a:r>
+          </a:p>
+        </p:txBody>
+      </p:sp>
+      <p:sp>
+        <p:nvSpPr>
+          <p:cNvPr id="5" name="TextBox 4"/>
+          <p:cNvSpPr txBox="1"/>
+          <p:nvPr/>
+        </p:nvSpPr>
+        <p:spPr>
+          <a:xfrm>
+            <a:off x="1666875" y="1228725"/>
+            <a:ext cx="9953625" cy="171450"/>
+          </a:xfrm>
+          <a:prstGeom prst="rect">
+            <a:avLst/>
+          </a:prstGeom>
+          <a:noFill/>
+        </p:spPr>
+        <p:txBody>
+          <a:bodyPr wrap="square" lIns="0" rIns="0" tIns="0" bIns="0" anchor="t">
+            <a:spAutoFit/>
+          </a:bodyPr>
+          <a:lstStyle/>
+          <a:p>
+            <a:pPr algn="l"/>
+            <a:r>
+              <a:rPr b="0" sz="1200" i="0" u="none">
+                <a:solidFill>
+                  <a:srgbClr val="0F172A"/>
+                </a:solidFill>
+                <a:latin typeface="Noto Sans KR"/>
+              </a:rPr>
+              <a:t>Source: </a:t>
+            </a:r>
+            <a:r>
+              <a:rPr b="0" sz="1200" i="0" u="none">
+                <a:solidFill>
+                  <a:srgbClr val="4F46E5"/>
+                </a:solidFill>
+                <a:latin typeface="Noto Sans KR"/>
+              </a:rPr>
+              <a:t>www.einnosys.com</a:t>
+            </a:r>
+          </a:p>
+        </p:txBody>
+      </p:sp>
     </p:spTree>
   </p:cSld>
   <p:clrMapOvr>
@@ -4114,79 +4836,9 @@
         <p:nvPr/>
       </p:nvGrpSpPr>
       <p:grpSpPr/>
-      <p:sp>
-        <p:nvSpPr>
-          <p:cNvPr id="2" name="TextBox 1"/>
-          <p:cNvSpPr txBox="1"/>
-          <p:nvPr/>
-        </p:nvSpPr>
-        <p:spPr>
-          <a:xfrm>
-            <a:off x="609600" y="533400"/>
-            <a:ext cx="10972800" cy="647700"/>
-          </a:xfrm>
-          <a:prstGeom prst="rect">
-            <a:avLst/>
-          </a:prstGeom>
-          <a:noFill/>
-        </p:spPr>
-        <p:txBody>
-          <a:bodyPr wrap="square" lIns="0" rIns="0" tIns="0" bIns="0" anchor="t">
-            <a:spAutoFit/>
-          </a:bodyPr>
-          <a:lstStyle/>
-          <a:p>
-            <a:pPr algn="l"/>
-            <a:r>
-              <a:rPr b="1" sz="1200" i="0" u="none">
-                <a:solidFill>
-                  <a:srgbClr val="2563EB"/>
-                </a:solidFill>
-                <a:latin typeface="Noto Sans KR"/>
-              </a:rPr>
-              <a:t>EXECUTIVE OVERVIEW</a:t>
-            </a:r>
-          </a:p>
-        </p:txBody>
-      </p:sp>
-      <p:sp>
-        <p:nvSpPr>
-          <p:cNvPr id="3" name="TextBox 2"/>
-          <p:cNvSpPr txBox="1"/>
-          <p:nvPr/>
-        </p:nvSpPr>
-        <p:spPr>
-          <a:xfrm>
-            <a:off x="609600" y="762000"/>
-            <a:ext cx="11521440" cy="419100"/>
-          </a:xfrm>
-          <a:prstGeom prst="rect">
-            <a:avLst/>
-          </a:prstGeom>
-          <a:noFill/>
-        </p:spPr>
-        <p:txBody>
-          <a:bodyPr wrap="square" lIns="0" rIns="0" tIns="0" bIns="0" anchor="t">
-            <a:spAutoFit/>
-          </a:bodyPr>
-          <a:lstStyle/>
-          <a:p>
-            <a:pPr algn="l"/>
-            <a:r>
-              <a:rPr b="0" sz="2400" i="0" u="none">
-                <a:solidFill>
-                  <a:srgbClr val="0F172A"/>
-                </a:solidFill>
-                <a:latin typeface="Noto Sans KR ExtraBold"/>
-              </a:rPr>
-              <a:t>제조 AI Agent 아키텍처 3대 핵심 기둥</a:t>
-            </a:r>
-          </a:p>
-        </p:txBody>
-      </p:sp>
       <p:pic>
         <p:nvPicPr>
-          <p:cNvPr id="4" name="Picture 3" descr="image.png"/>
+          <p:cNvPr id="2" name="Picture 1" descr="image.png"/>
           <p:cNvPicPr>
             <a:picLocks noChangeAspect="1"/>
           </p:cNvPicPr>
@@ -4200,8 +4852,56 @@
         </p:blipFill>
         <p:spPr>
           <a:xfrm>
-            <a:off x="609600" y="2695575"/>
-            <a:ext cx="3505200" cy="2457450"/>
+            <a:off x="609600" y="2595562"/>
+            <a:ext cx="2600325" cy="2657475"/>
+          </a:xfrm>
+          <a:prstGeom prst="rect">
+            <a:avLst/>
+          </a:prstGeom>
+        </p:spPr>
+      </p:pic>
+      <p:pic>
+        <p:nvPicPr>
+          <p:cNvPr id="3" name="Picture 2" descr="image.png"/>
+          <p:cNvPicPr>
+            <a:picLocks noChangeAspect="1"/>
+          </p:cNvPicPr>
+          <p:nvPr/>
+        </p:nvPicPr>
+        <p:blipFill>
+          <a:blip r:embed="rId3"/>
+          <a:stretch>
+            <a:fillRect/>
+          </a:stretch>
+        </p:blipFill>
+        <p:spPr>
+          <a:xfrm>
+            <a:off x="3400425" y="2595562"/>
+            <a:ext cx="2600325" cy="2657475"/>
+          </a:xfrm>
+          <a:prstGeom prst="rect">
+            <a:avLst/>
+          </a:prstGeom>
+        </p:spPr>
+      </p:pic>
+      <p:pic>
+        <p:nvPicPr>
+          <p:cNvPr id="4" name="Picture 3" descr="image.png"/>
+          <p:cNvPicPr>
+            <a:picLocks noChangeAspect="1"/>
+          </p:cNvPicPr>
+          <p:nvPr/>
+        </p:nvPicPr>
+        <p:blipFill>
+          <a:blip r:embed="rId2"/>
+          <a:stretch>
+            <a:fillRect/>
+          </a:stretch>
+        </p:blipFill>
+        <p:spPr>
+          <a:xfrm>
+            <a:off x="6191250" y="2595562"/>
+            <a:ext cx="2600325" cy="2657475"/>
           </a:xfrm>
           <a:prstGeom prst="rect">
             <a:avLst/>
@@ -4224,62 +4924,84 @@
         </p:blipFill>
         <p:spPr>
           <a:xfrm>
-            <a:off x="4343400" y="2695575"/>
-            <a:ext cx="3505200" cy="2457450"/>
+            <a:off x="8982075" y="2595562"/>
+            <a:ext cx="2600325" cy="2657475"/>
           </a:xfrm>
           <a:prstGeom prst="rect">
             <a:avLst/>
           </a:prstGeom>
         </p:spPr>
       </p:pic>
-      <p:pic>
-        <p:nvPicPr>
-          <p:cNvPr id="6" name="Picture 5" descr="image.png"/>
-          <p:cNvPicPr>
-            <a:picLocks noChangeAspect="1"/>
-          </p:cNvPicPr>
-          <p:nvPr/>
-        </p:nvPicPr>
-        <p:blipFill>
-          <a:blip r:embed="rId2"/>
-          <a:stretch>
-            <a:fillRect/>
-          </a:stretch>
-        </p:blipFill>
-        <p:spPr>
-          <a:xfrm>
-            <a:off x="8077200" y="2695575"/>
-            <a:ext cx="3505200" cy="2457450"/>
-          </a:xfrm>
-          <a:prstGeom prst="rect">
-            <a:avLst/>
-          </a:prstGeom>
-        </p:spPr>
-      </p:pic>
-      <p:pic>
-        <p:nvPicPr>
-          <p:cNvPr id="7" name="Picture 6" descr="image.png"/>
-          <p:cNvPicPr>
-            <a:picLocks noChangeAspect="1"/>
-          </p:cNvPicPr>
-          <p:nvPr/>
-        </p:nvPicPr>
-        <p:blipFill>
-          <a:blip r:embed="rId3"/>
-          <a:stretch>
-            <a:fillRect/>
-          </a:stretch>
-        </p:blipFill>
-        <p:spPr>
-          <a:xfrm>
-            <a:off x="923925" y="3009900"/>
-            <a:ext cx="457200" cy="457200"/>
-          </a:xfrm>
-          <a:prstGeom prst="rect">
-            <a:avLst/>
-          </a:prstGeom>
-        </p:spPr>
-      </p:pic>
+      <p:sp>
+        <p:nvSpPr>
+          <p:cNvPr id="6" name="TextBox 5"/>
+          <p:cNvSpPr txBox="1"/>
+          <p:nvPr/>
+        </p:nvSpPr>
+        <p:spPr>
+          <a:xfrm>
+            <a:off x="609600" y="533400"/>
+            <a:ext cx="10972800" cy="647700"/>
+          </a:xfrm>
+          <a:prstGeom prst="rect">
+            <a:avLst/>
+          </a:prstGeom>
+          <a:noFill/>
+        </p:spPr>
+        <p:txBody>
+          <a:bodyPr wrap="square" lIns="0" rIns="0" tIns="0" bIns="0" anchor="t">
+            <a:spAutoFit/>
+          </a:bodyPr>
+          <a:lstStyle/>
+          <a:p>
+            <a:pPr algn="l"/>
+            <a:r>
+              <a:rPr b="1" sz="1200" i="0" u="none">
+                <a:solidFill>
+                  <a:srgbClr val="2563EB"/>
+                </a:solidFill>
+                <a:latin typeface="Noto Sans KR"/>
+              </a:rPr>
+              <a:t>EXECUTIVE OVERVIEW</a:t>
+            </a:r>
+          </a:p>
+        </p:txBody>
+      </p:sp>
+      <p:sp>
+        <p:nvSpPr>
+          <p:cNvPr id="7" name="TextBox 6"/>
+          <p:cNvSpPr txBox="1"/>
+          <p:nvPr/>
+        </p:nvSpPr>
+        <p:spPr>
+          <a:xfrm>
+            <a:off x="609600" y="762000"/>
+            <a:ext cx="11521440" cy="419100"/>
+          </a:xfrm>
+          <a:prstGeom prst="rect">
+            <a:avLst/>
+          </a:prstGeom>
+          <a:noFill/>
+        </p:spPr>
+        <p:txBody>
+          <a:bodyPr wrap="square" lIns="0" rIns="0" tIns="0" bIns="0" anchor="t">
+            <a:spAutoFit/>
+          </a:bodyPr>
+          <a:lstStyle/>
+          <a:p>
+            <a:pPr algn="l"/>
+            <a:r>
+              <a:rPr b="0" sz="2400" i="0" u="none">
+                <a:solidFill>
+                  <a:srgbClr val="0F172A"/>
+                </a:solidFill>
+                <a:latin typeface="Noto Sans KR ExtraBold"/>
+              </a:rPr>
+              <a:t>제조 AI Agent 아키텍처 4대 핵심 축</a:t>
+            </a:r>
+          </a:p>
+        </p:txBody>
+      </p:sp>
       <p:pic>
         <p:nvPicPr>
           <p:cNvPr id="8" name="Picture 7" descr="image.png"/>
@@ -4296,17 +5018,126 @@
         </p:blipFill>
         <p:spPr>
           <a:xfrm>
-            <a:off x="4657725" y="3009900"/>
-            <a:ext cx="457200" cy="457200"/>
+            <a:off x="885825" y="2871787"/>
+            <a:ext cx="419100" cy="419100"/>
           </a:xfrm>
           <a:prstGeom prst="rect">
             <a:avLst/>
           </a:prstGeom>
         </p:spPr>
       </p:pic>
+      <p:sp>
+        <p:nvSpPr>
+          <p:cNvPr id="9" name="TextBox 8"/>
+          <p:cNvSpPr txBox="1"/>
+          <p:nvPr/>
+        </p:nvSpPr>
+        <p:spPr>
+          <a:xfrm>
+            <a:off x="885825" y="3443287"/>
+            <a:ext cx="2047875" cy="152400"/>
+          </a:xfrm>
+          <a:prstGeom prst="rect">
+            <a:avLst/>
+          </a:prstGeom>
+          <a:noFill/>
+        </p:spPr>
+        <p:txBody>
+          <a:bodyPr wrap="square" lIns="0" rIns="0" tIns="0" bIns="0" anchor="t">
+            <a:spAutoFit/>
+          </a:bodyPr>
+          <a:lstStyle/>
+          <a:p>
+            <a:pPr algn="l"/>
+            <a:r>
+              <a:rPr b="1" sz="1050" i="0" u="none">
+                <a:solidFill>
+                  <a:srgbClr val="64748B"/>
+                </a:solidFill>
+                <a:latin typeface="Noto Sans KR"/>
+              </a:rPr>
+              <a:t>PILLAR 01</a:t>
+            </a:r>
+          </a:p>
+        </p:txBody>
+      </p:sp>
+      <p:sp>
+        <p:nvSpPr>
+          <p:cNvPr id="10" name="TextBox 9"/>
+          <p:cNvSpPr txBox="1"/>
+          <p:nvPr/>
+        </p:nvSpPr>
+        <p:spPr>
+          <a:xfrm>
+            <a:off x="885825" y="3652837"/>
+            <a:ext cx="2150268" cy="257175"/>
+          </a:xfrm>
+          <a:prstGeom prst="rect">
+            <a:avLst/>
+          </a:prstGeom>
+          <a:noFill/>
+        </p:spPr>
+        <p:txBody>
+          <a:bodyPr wrap="square" lIns="0" rIns="0" tIns="0" bIns="0" anchor="t">
+            <a:spAutoFit/>
+          </a:bodyPr>
+          <a:lstStyle/>
+          <a:p>
+            <a:pPr algn="l"/>
+            <a:r>
+              <a:rPr b="1" sz="1500" i="0" u="none">
+                <a:solidFill>
+                  <a:srgbClr val="0F172A"/>
+                </a:solidFill>
+                <a:latin typeface="Noto Sans KR"/>
+              </a:rPr>
+              <a:t>바이브 코딩 표준화</a:t>
+            </a:r>
+          </a:p>
+        </p:txBody>
+      </p:sp>
+      <p:sp>
+        <p:nvSpPr>
+          <p:cNvPr id="11" name="TextBox 10"/>
+          <p:cNvSpPr txBox="1"/>
+          <p:nvPr/>
+        </p:nvSpPr>
+        <p:spPr>
+          <a:xfrm>
+            <a:off x="885825" y="4024312"/>
+            <a:ext cx="2047875" cy="771525"/>
+          </a:xfrm>
+          <a:prstGeom prst="rect">
+            <a:avLst/>
+          </a:prstGeom>
+          <a:noFill/>
+        </p:spPr>
+        <p:txBody>
+          <a:bodyPr wrap="square" lIns="0" rIns="0" tIns="0" bIns="0" anchor="t">
+            <a:spAutoFit/>
+          </a:bodyPr>
+          <a:lstStyle/>
+          <a:p>
+            <a:pPr algn="l">
+              <a:lnSpc>
+                <a:spcPts val="2025"/>
+              </a:lnSpc>
+            </a:pPr>
+            <a:r>
+              <a:rPr b="0" sz="1350" i="0" u="none">
+                <a:solidFill>
+                  <a:srgbClr val="334155"/>
+                </a:solidFill>
+                <a:latin typeface="Noto Sans KR"/>
+              </a:rPr>
+              <a:t>Spring 구조 맞춤 Inhouse 프레임워크 및 3대 표준 설계서 도입</a:t>
+            </a:r>
+          </a:p>
+        </p:txBody>
+      </p:sp>
       <p:pic>
         <p:nvPicPr>
-          <p:cNvPr id="9" name="Picture 8" descr="image.png"/>
+          <p:cNvPr id="12" name="Picture 11" descr="image.png"/>
           <p:cNvPicPr>
             <a:picLocks noChangeAspect="1"/>
           </p:cNvPicPr>
@@ -4320,8 +5151,8 @@
         </p:blipFill>
         <p:spPr>
           <a:xfrm>
-            <a:off x="8391525" y="3009900"/>
-            <a:ext cx="457200" cy="457200"/>
+            <a:off x="3676650" y="2871787"/>
+            <a:ext cx="419100" cy="419100"/>
           </a:xfrm>
           <a:prstGeom prst="rect">
             <a:avLst/>
@@ -4330,14 +5161,14 @@
       </p:pic>
       <p:sp>
         <p:nvSpPr>
-          <p:cNvPr id="10" name="TextBox 9"/>
-          <p:cNvSpPr txBox="1"/>
-          <p:nvPr/>
-        </p:nvSpPr>
-        <p:spPr>
-          <a:xfrm>
-            <a:off x="923925" y="3657600"/>
-            <a:ext cx="2876550" cy="152400"/>
+          <p:cNvPr id="13" name="TextBox 12"/>
+          <p:cNvSpPr txBox="1"/>
+          <p:nvPr/>
+        </p:nvSpPr>
+        <p:spPr>
+          <a:xfrm>
+            <a:off x="3676650" y="3443287"/>
+            <a:ext cx="2047875" cy="152400"/>
           </a:xfrm>
           <a:prstGeom prst="rect">
             <a:avLst/>
@@ -4358,21 +5189,21 @@
                 </a:solidFill>
                 <a:latin typeface="Noto Sans KR"/>
               </a:rPr>
-              <a:t>PILLAR 01</a:t>
-            </a:r>
-          </a:p>
-        </p:txBody>
-      </p:sp>
-      <p:sp>
-        <p:nvSpPr>
-          <p:cNvPr id="11" name="TextBox 10"/>
-          <p:cNvSpPr txBox="1"/>
-          <p:nvPr/>
-        </p:nvSpPr>
-        <p:spPr>
-          <a:xfrm>
-            <a:off x="923925" y="3886200"/>
-            <a:ext cx="3020377" cy="285750"/>
+              <a:t>PILLAR 02</a:t>
+            </a:r>
+          </a:p>
+        </p:txBody>
+      </p:sp>
+      <p:sp>
+        <p:nvSpPr>
+          <p:cNvPr id="14" name="TextBox 13"/>
+          <p:cNvSpPr txBox="1"/>
+          <p:nvPr/>
+        </p:nvSpPr>
+        <p:spPr>
+          <a:xfrm>
+            <a:off x="3676650" y="3652837"/>
+            <a:ext cx="2150268" cy="257175"/>
           </a:xfrm>
           <a:prstGeom prst="rect">
             <a:avLst/>
@@ -4387,27 +5218,27 @@
           <a:p>
             <a:pPr algn="l"/>
             <a:r>
-              <a:rPr b="1" sz="1650" i="0" u="none">
+              <a:rPr b="1" sz="1500" i="0" u="none">
                 <a:solidFill>
                   <a:srgbClr val="0F172A"/>
                 </a:solidFill>
                 <a:latin typeface="Noto Sans KR"/>
               </a:rPr>
-              <a:t>바이브 코딩 표준화</a:t>
-            </a:r>
-          </a:p>
-        </p:txBody>
-      </p:sp>
-      <p:sp>
-        <p:nvSpPr>
-          <p:cNvPr id="12" name="TextBox 11"/>
-          <p:cNvSpPr txBox="1"/>
-          <p:nvPr/>
-        </p:nvSpPr>
-        <p:spPr>
-          <a:xfrm>
-            <a:off x="923925" y="4324350"/>
-            <a:ext cx="2876550" cy="514350"/>
+              <a:t>레거시 소스 관제</a:t>
+            </a:r>
+          </a:p>
+        </p:txBody>
+      </p:sp>
+      <p:sp>
+        <p:nvSpPr>
+          <p:cNvPr id="15" name="TextBox 14"/>
+          <p:cNvSpPr txBox="1"/>
+          <p:nvPr/>
+        </p:nvSpPr>
+        <p:spPr>
+          <a:xfrm>
+            <a:off x="3676650" y="4024312"/>
+            <a:ext cx="2047875" cy="771525"/>
           </a:xfrm>
           <a:prstGeom prst="rect">
             <a:avLst/>
@@ -4432,232 +5263,14 @@
                 </a:solidFill>
                 <a:latin typeface="Noto Sans KR"/>
               </a:rPr>
-              <a:t>Spring 구조 유사 프레임워크와 컨벤션 기반 정확도 극대화.</a:t>
-            </a:r>
-          </a:p>
-        </p:txBody>
-      </p:sp>
-      <p:sp>
-        <p:nvSpPr>
-          <p:cNvPr id="13" name="TextBox 12"/>
-          <p:cNvSpPr txBox="1"/>
-          <p:nvPr/>
-        </p:nvSpPr>
-        <p:spPr>
-          <a:xfrm>
-            <a:off x="4657725" y="3657600"/>
-            <a:ext cx="2876550" cy="152400"/>
-          </a:xfrm>
-          <a:prstGeom prst="rect">
-            <a:avLst/>
-          </a:prstGeom>
-          <a:noFill/>
-        </p:spPr>
-        <p:txBody>
-          <a:bodyPr wrap="square" lIns="0" rIns="0" tIns="0" bIns="0" anchor="t">
-            <a:spAutoFit/>
-          </a:bodyPr>
-          <a:lstStyle/>
-          <a:p>
-            <a:pPr algn="l"/>
-            <a:r>
-              <a:rPr b="1" sz="1050" i="0" u="none">
-                <a:solidFill>
-                  <a:srgbClr val="64748B"/>
-                </a:solidFill>
-                <a:latin typeface="Noto Sans KR"/>
-              </a:rPr>
-              <a:t>PILLAR 02</a:t>
-            </a:r>
-          </a:p>
-        </p:txBody>
-      </p:sp>
-      <p:sp>
-        <p:nvSpPr>
-          <p:cNvPr id="14" name="TextBox 13"/>
-          <p:cNvSpPr txBox="1"/>
-          <p:nvPr/>
-        </p:nvSpPr>
-        <p:spPr>
-          <a:xfrm>
-            <a:off x="4657725" y="3886200"/>
-            <a:ext cx="3020377" cy="285750"/>
-          </a:xfrm>
-          <a:prstGeom prst="rect">
-            <a:avLst/>
-          </a:prstGeom>
-          <a:noFill/>
-        </p:spPr>
-        <p:txBody>
-          <a:bodyPr wrap="square" lIns="0" rIns="0" tIns="0" bIns="0" anchor="t">
-            <a:spAutoFit/>
-          </a:bodyPr>
-          <a:lstStyle/>
-          <a:p>
-            <a:pPr algn="l"/>
-            <a:r>
-              <a:rPr b="1" sz="1650" i="0" u="none">
-                <a:solidFill>
-                  <a:srgbClr val="0F172A"/>
-                </a:solidFill>
-                <a:latin typeface="Noto Sans KR"/>
-              </a:rPr>
-              <a:t>운영 MES Tooling</a:t>
-            </a:r>
-          </a:p>
-        </p:txBody>
-      </p:sp>
-      <p:sp>
-        <p:nvSpPr>
-          <p:cNvPr id="15" name="TextBox 14"/>
-          <p:cNvSpPr txBox="1"/>
-          <p:nvPr/>
-        </p:nvSpPr>
-        <p:spPr>
-          <a:xfrm>
-            <a:off x="4657725" y="4324350"/>
-            <a:ext cx="2876550" cy="514350"/>
-          </a:xfrm>
-          <a:prstGeom prst="rect">
-            <a:avLst/>
-          </a:prstGeom>
-          <a:noFill/>
-        </p:spPr>
-        <p:txBody>
-          <a:bodyPr wrap="square" lIns="0" rIns="0" tIns="0" bIns="0" anchor="t">
-            <a:spAutoFit/>
-          </a:bodyPr>
-          <a:lstStyle/>
-          <a:p>
-            <a:pPr algn="l">
-              <a:lnSpc>
-                <a:spcPts val="2025"/>
-              </a:lnSpc>
-            </a:pPr>
-            <a:r>
-              <a:rPr b="0" sz="1350" i="0" u="none">
-                <a:solidFill>
-                  <a:srgbClr val="334155"/>
-                </a:solidFill>
-                <a:latin typeface="Noto Sans KR"/>
-              </a:rPr>
-              <a:t>WO·LOT·설비 데이터 연동 Tool 및 Log 분석 자율 제어.</a:t>
-            </a:r>
-          </a:p>
-        </p:txBody>
-      </p:sp>
-      <p:sp>
-        <p:nvSpPr>
-          <p:cNvPr id="16" name="TextBox 15"/>
-          <p:cNvSpPr txBox="1"/>
-          <p:nvPr/>
-        </p:nvSpPr>
-        <p:spPr>
-          <a:xfrm>
-            <a:off x="8391525" y="3657600"/>
-            <a:ext cx="2876550" cy="152400"/>
-          </a:xfrm>
-          <a:prstGeom prst="rect">
-            <a:avLst/>
-          </a:prstGeom>
-          <a:noFill/>
-        </p:spPr>
-        <p:txBody>
-          <a:bodyPr wrap="square" lIns="0" rIns="0" tIns="0" bIns="0" anchor="t">
-            <a:spAutoFit/>
-          </a:bodyPr>
-          <a:lstStyle/>
-          <a:p>
-            <a:pPr algn="l"/>
-            <a:r>
-              <a:rPr b="1" sz="1050" i="0" u="none">
-                <a:solidFill>
-                  <a:srgbClr val="64748B"/>
-                </a:solidFill>
-                <a:latin typeface="Noto Sans KR"/>
-              </a:rPr>
-              <a:t>PILLAR 03</a:t>
-            </a:r>
-          </a:p>
-        </p:txBody>
-      </p:sp>
-      <p:sp>
-        <p:nvSpPr>
-          <p:cNvPr id="17" name="TextBox 16"/>
-          <p:cNvSpPr txBox="1"/>
-          <p:nvPr/>
-        </p:nvSpPr>
-        <p:spPr>
-          <a:xfrm>
-            <a:off x="8391525" y="3886200"/>
-            <a:ext cx="3020377" cy="247650"/>
-          </a:xfrm>
-          <a:prstGeom prst="rect">
-            <a:avLst/>
-          </a:prstGeom>
-          <a:noFill/>
-        </p:spPr>
-        <p:txBody>
-          <a:bodyPr wrap="square" lIns="0" rIns="0" tIns="0" bIns="0" anchor="t">
-            <a:spAutoFit/>
-          </a:bodyPr>
-          <a:lstStyle/>
-          <a:p>
-            <a:pPr algn="l"/>
-            <a:r>
-              <a:rPr b="1" sz="1650" i="0" u="none">
-                <a:solidFill>
-                  <a:srgbClr val="0F172A"/>
-                </a:solidFill>
-                <a:latin typeface="Noto Sans KR"/>
-              </a:rPr>
-              <a:t>NordAxe Java Agent</a:t>
-            </a:r>
-          </a:p>
-        </p:txBody>
-      </p:sp>
-      <p:sp>
-        <p:nvSpPr>
-          <p:cNvPr id="18" name="TextBox 17"/>
-          <p:cNvSpPr txBox="1"/>
-          <p:nvPr/>
-        </p:nvSpPr>
-        <p:spPr>
-          <a:xfrm>
-            <a:off x="8391525" y="4286250"/>
-            <a:ext cx="2876550" cy="514350"/>
-          </a:xfrm>
-          <a:prstGeom prst="rect">
-            <a:avLst/>
-          </a:prstGeom>
-          <a:noFill/>
-        </p:spPr>
-        <p:txBody>
-          <a:bodyPr wrap="square" lIns="0" rIns="0" tIns="0" bIns="0" anchor="t">
-            <a:spAutoFit/>
-          </a:bodyPr>
-          <a:lstStyle/>
-          <a:p>
-            <a:pPr algn="l">
-              <a:lnSpc>
-                <a:spcPts val="2025"/>
-              </a:lnSpc>
-            </a:pPr>
-            <a:r>
-              <a:rPr b="0" sz="1350" i="0" u="none">
-                <a:solidFill>
-                  <a:srgbClr val="334155"/>
-                </a:solidFill>
-                <a:latin typeface="Noto Sans KR"/>
-              </a:rPr>
-              <a:t>Enterprise Java 자산 직결을 통한 비용 절감 및 대규모 안정성.</a:t>
+              <a:t>Spring 기반 구조화 및 실행 로그 Prompt화 통한 무결성 검증</a:t>
             </a:r>
           </a:p>
         </p:txBody>
       </p:sp>
       <p:pic>
         <p:nvPicPr>
-          <p:cNvPr id="19" name="Picture 18" descr="image.png"/>
+          <p:cNvPr id="16" name="Picture 15" descr="image.png"/>
           <p:cNvPicPr>
             <a:picLocks noChangeAspect="1"/>
           </p:cNvPicPr>
@@ -4671,14 +5284,123 @@
         </p:blipFill>
         <p:spPr>
           <a:xfrm>
-            <a:off x="1070967" y="3133725"/>
-            <a:ext cx="163115" cy="209550"/>
+            <a:off x="6467475" y="2871787"/>
+            <a:ext cx="419100" cy="419100"/>
           </a:xfrm>
           <a:prstGeom prst="rect">
             <a:avLst/>
           </a:prstGeom>
         </p:spPr>
       </p:pic>
+      <p:sp>
+        <p:nvSpPr>
+          <p:cNvPr id="17" name="TextBox 16"/>
+          <p:cNvSpPr txBox="1"/>
+          <p:nvPr/>
+        </p:nvSpPr>
+        <p:spPr>
+          <a:xfrm>
+            <a:off x="6467475" y="3443287"/>
+            <a:ext cx="2047875" cy="152400"/>
+          </a:xfrm>
+          <a:prstGeom prst="rect">
+            <a:avLst/>
+          </a:prstGeom>
+          <a:noFill/>
+        </p:spPr>
+        <p:txBody>
+          <a:bodyPr wrap="square" lIns="0" rIns="0" tIns="0" bIns="0" anchor="t">
+            <a:spAutoFit/>
+          </a:bodyPr>
+          <a:lstStyle/>
+          <a:p>
+            <a:pPr algn="l"/>
+            <a:r>
+              <a:rPr b="1" sz="1050" i="0" u="none">
+                <a:solidFill>
+                  <a:srgbClr val="64748B"/>
+                </a:solidFill>
+                <a:latin typeface="Noto Sans KR"/>
+              </a:rPr>
+              <a:t>PILLAR 03</a:t>
+            </a:r>
+          </a:p>
+        </p:txBody>
+      </p:sp>
+      <p:sp>
+        <p:nvSpPr>
+          <p:cNvPr id="18" name="TextBox 17"/>
+          <p:cNvSpPr txBox="1"/>
+          <p:nvPr/>
+        </p:nvSpPr>
+        <p:spPr>
+          <a:xfrm>
+            <a:off x="6467475" y="3652837"/>
+            <a:ext cx="2150268" cy="438150"/>
+          </a:xfrm>
+          <a:prstGeom prst="rect">
+            <a:avLst/>
+          </a:prstGeom>
+          <a:noFill/>
+        </p:spPr>
+        <p:txBody>
+          <a:bodyPr wrap="square" lIns="0" rIns="0" tIns="0" bIns="0" anchor="t">
+            <a:spAutoFit/>
+          </a:bodyPr>
+          <a:lstStyle/>
+          <a:p>
+            <a:pPr algn="l"/>
+            <a:r>
+              <a:rPr b="1" sz="1500" i="0" u="none">
+                <a:solidFill>
+                  <a:srgbClr val="0F172A"/>
+                </a:solidFill>
+                <a:latin typeface="Noto Sans KR"/>
+              </a:rPr>
+              <a:t>MES CSV &amp; Vector RAG</a:t>
+            </a:r>
+          </a:p>
+        </p:txBody>
+      </p:sp>
+      <p:sp>
+        <p:nvSpPr>
+          <p:cNvPr id="19" name="TextBox 18"/>
+          <p:cNvSpPr txBox="1"/>
+          <p:nvPr/>
+        </p:nvSpPr>
+        <p:spPr>
+          <a:xfrm>
+            <a:off x="6467475" y="4205287"/>
+            <a:ext cx="2047875" cy="771525"/>
+          </a:xfrm>
+          <a:prstGeom prst="rect">
+            <a:avLst/>
+          </a:prstGeom>
+          <a:noFill/>
+        </p:spPr>
+        <p:txBody>
+          <a:bodyPr wrap="square" lIns="0" rIns="0" tIns="0" bIns="0" anchor="t">
+            <a:spAutoFit/>
+          </a:bodyPr>
+          <a:lstStyle/>
+          <a:p>
+            <a:pPr algn="l">
+              <a:lnSpc>
+                <a:spcPts val="2025"/>
+              </a:lnSpc>
+            </a:pPr>
+            <a:r>
+              <a:rPr b="0" sz="1350" i="0" u="none">
+                <a:solidFill>
+                  <a:srgbClr val="334155"/>
+                </a:solidFill>
+                <a:latin typeface="Noto Sans KR"/>
+              </a:rPr>
+              <a:t>핵심 MES 데이터 배치 CSV 변환 및 Postgre/Qdrant RAG 구축</a:t>
+            </a:r>
+          </a:p>
+        </p:txBody>
+      </p:sp>
       <p:pic>
         <p:nvPicPr>
           <p:cNvPr id="20" name="Picture 19" descr="image.png"/>
@@ -4695,17 +5417,126 @@
         </p:blipFill>
         <p:spPr>
           <a:xfrm>
-            <a:off x="4804767" y="3133725"/>
-            <a:ext cx="163115" cy="209550"/>
+            <a:off x="9258300" y="2871787"/>
+            <a:ext cx="419100" cy="419100"/>
           </a:xfrm>
           <a:prstGeom prst="rect">
             <a:avLst/>
           </a:prstGeom>
         </p:spPr>
       </p:pic>
+      <p:sp>
+        <p:nvSpPr>
+          <p:cNvPr id="21" name="TextBox 20"/>
+          <p:cNvSpPr txBox="1"/>
+          <p:nvPr/>
+        </p:nvSpPr>
+        <p:spPr>
+          <a:xfrm>
+            <a:off x="9258300" y="3443287"/>
+            <a:ext cx="2047875" cy="152400"/>
+          </a:xfrm>
+          <a:prstGeom prst="rect">
+            <a:avLst/>
+          </a:prstGeom>
+          <a:noFill/>
+        </p:spPr>
+        <p:txBody>
+          <a:bodyPr wrap="square" lIns="0" rIns="0" tIns="0" bIns="0" anchor="t">
+            <a:spAutoFit/>
+          </a:bodyPr>
+          <a:lstStyle/>
+          <a:p>
+            <a:pPr algn="l"/>
+            <a:r>
+              <a:rPr b="1" sz="1050" i="0" u="none">
+                <a:solidFill>
+                  <a:srgbClr val="64748B"/>
+                </a:solidFill>
+                <a:latin typeface="Noto Sans KR"/>
+              </a:rPr>
+              <a:t>PILLAR 04</a:t>
+            </a:r>
+          </a:p>
+        </p:txBody>
+      </p:sp>
+      <p:sp>
+        <p:nvSpPr>
+          <p:cNvPr id="22" name="TextBox 21"/>
+          <p:cNvSpPr txBox="1"/>
+          <p:nvPr/>
+        </p:nvSpPr>
+        <p:spPr>
+          <a:xfrm>
+            <a:off x="9258300" y="3652837"/>
+            <a:ext cx="2150268" cy="219075"/>
+          </a:xfrm>
+          <a:prstGeom prst="rect">
+            <a:avLst/>
+          </a:prstGeom>
+          <a:noFill/>
+        </p:spPr>
+        <p:txBody>
+          <a:bodyPr wrap="square" lIns="0" rIns="0" tIns="0" bIns="0" anchor="t">
+            <a:spAutoFit/>
+          </a:bodyPr>
+          <a:lstStyle/>
+          <a:p>
+            <a:pPr algn="l"/>
+            <a:r>
+              <a:rPr b="1" sz="1500" i="0" u="none">
+                <a:solidFill>
+                  <a:srgbClr val="0F172A"/>
+                </a:solidFill>
+                <a:latin typeface="Noto Sans KR"/>
+              </a:rPr>
+              <a:t>NordAxe Java Agent</a:t>
+            </a:r>
+          </a:p>
+        </p:txBody>
+      </p:sp>
+      <p:sp>
+        <p:nvSpPr>
+          <p:cNvPr id="23" name="TextBox 22"/>
+          <p:cNvSpPr txBox="1"/>
+          <p:nvPr/>
+        </p:nvSpPr>
+        <p:spPr>
+          <a:xfrm>
+            <a:off x="9258300" y="3986212"/>
+            <a:ext cx="2047875" cy="771525"/>
+          </a:xfrm>
+          <a:prstGeom prst="rect">
+            <a:avLst/>
+          </a:prstGeom>
+          <a:noFill/>
+        </p:spPr>
+        <p:txBody>
+          <a:bodyPr wrap="square" lIns="0" rIns="0" tIns="0" bIns="0" anchor="t">
+            <a:spAutoFit/>
+          </a:bodyPr>
+          <a:lstStyle/>
+          <a:p>
+            <a:pPr algn="l">
+              <a:lnSpc>
+                <a:spcPts val="2025"/>
+              </a:lnSpc>
+            </a:pPr>
+            <a:r>
+              <a:rPr b="0" sz="1350" i="0" u="none">
+                <a:solidFill>
+                  <a:srgbClr val="334155"/>
+                </a:solidFill>
+                <a:latin typeface="Noto Sans KR"/>
+              </a:rPr>
+              <a:t>Java 비즈니스 모듈 직접 활용 및 검증된 MAS 전환 지원</a:t>
+            </a:r>
+          </a:p>
+        </p:txBody>
+      </p:sp>
       <p:pic>
         <p:nvPicPr>
-          <p:cNvPr id="21" name="Picture 20" descr="image.png"/>
+          <p:cNvPr id="24" name="Picture 23" descr="image.png"/>
           <p:cNvPicPr>
             <a:picLocks noChangeAspect="1"/>
           </p:cNvPicPr>
@@ -4719,8 +5550,80 @@
         </p:blipFill>
         <p:spPr>
           <a:xfrm>
-            <a:off x="8538567" y="3133725"/>
-            <a:ext cx="163115" cy="209550"/>
+            <a:off x="1021258" y="2986087"/>
+            <a:ext cx="148232" cy="190500"/>
+          </a:xfrm>
+          <a:prstGeom prst="rect">
+            <a:avLst/>
+          </a:prstGeom>
+        </p:spPr>
+      </p:pic>
+      <p:pic>
+        <p:nvPicPr>
+          <p:cNvPr id="25" name="Picture 24" descr="image.png"/>
+          <p:cNvPicPr>
+            <a:picLocks noChangeAspect="1"/>
+          </p:cNvPicPr>
+          <p:nvPr/>
+        </p:nvPicPr>
+        <p:blipFill>
+          <a:blip r:embed="rId9"/>
+          <a:stretch>
+            <a:fillRect/>
+          </a:stretch>
+        </p:blipFill>
+        <p:spPr>
+          <a:xfrm>
+            <a:off x="3812083" y="2986087"/>
+            <a:ext cx="148232" cy="190500"/>
+          </a:xfrm>
+          <a:prstGeom prst="rect">
+            <a:avLst/>
+          </a:prstGeom>
+        </p:spPr>
+      </p:pic>
+      <p:pic>
+        <p:nvPicPr>
+          <p:cNvPr id="26" name="Picture 25" descr="image.png"/>
+          <p:cNvPicPr>
+            <a:picLocks noChangeAspect="1"/>
+          </p:cNvPicPr>
+          <p:nvPr/>
+        </p:nvPicPr>
+        <p:blipFill>
+          <a:blip r:embed="rId10"/>
+          <a:stretch>
+            <a:fillRect/>
+          </a:stretch>
+        </p:blipFill>
+        <p:spPr>
+          <a:xfrm>
+            <a:off x="6602908" y="2986087"/>
+            <a:ext cx="148232" cy="190500"/>
+          </a:xfrm>
+          <a:prstGeom prst="rect">
+            <a:avLst/>
+          </a:prstGeom>
+        </p:spPr>
+      </p:pic>
+      <p:pic>
+        <p:nvPicPr>
+          <p:cNvPr id="27" name="Picture 26" descr="image.png"/>
+          <p:cNvPicPr>
+            <a:picLocks noChangeAspect="1"/>
+          </p:cNvPicPr>
+          <p:nvPr/>
+        </p:nvPicPr>
+        <p:blipFill>
+          <a:blip r:embed="rId11"/>
+          <a:stretch>
+            <a:fillRect/>
+          </a:stretch>
+        </p:blipFill>
+        <p:spPr>
+          <a:xfrm>
+            <a:off x="9393733" y="2986087"/>
+            <a:ext cx="148232" cy="190500"/>
           </a:xfrm>
           <a:prstGeom prst="rect">
             <a:avLst/>
@@ -4753,44 +5656,9 @@
         <p:nvPr/>
       </p:nvGrpSpPr>
       <p:grpSpPr/>
-      <p:sp>
-        <p:nvSpPr>
-          <p:cNvPr id="2" name="TextBox 1"/>
-          <p:cNvSpPr txBox="1"/>
-          <p:nvPr/>
-        </p:nvSpPr>
-        <p:spPr>
-          <a:xfrm>
-            <a:off x="609600" y="533400"/>
-            <a:ext cx="10972800" cy="647700"/>
-          </a:xfrm>
-          <a:prstGeom prst="rect">
-            <a:avLst/>
-          </a:prstGeom>
-          <a:noFill/>
-        </p:spPr>
-        <p:txBody>
-          <a:bodyPr wrap="square" lIns="0" rIns="0" tIns="0" bIns="0" anchor="t">
-            <a:spAutoFit/>
-          </a:bodyPr>
-          <a:lstStyle/>
-          <a:p>
-            <a:pPr algn="l"/>
-            <a:r>
-              <a:rPr b="1" sz="1200" i="0" u="none">
-                <a:solidFill>
-                  <a:srgbClr val="2563EB"/>
-                </a:solidFill>
-                <a:latin typeface="Noto Sans KR"/>
-              </a:rPr>
-              <a:t>DEVELOPMENT PHASE</a:t>
-            </a:r>
-          </a:p>
-        </p:txBody>
-      </p:sp>
       <p:pic>
         <p:nvPicPr>
-          <p:cNvPr id="3" name="Picture 2" descr="image.png"/>
+          <p:cNvPr id="2" name="Picture 1" descr="image.png"/>
           <p:cNvPicPr>
             <a:picLocks noChangeAspect="1"/>
           </p:cNvPicPr>
@@ -4804,52 +5672,17 @@
         </p:blipFill>
         <p:spPr>
           <a:xfrm>
-            <a:off x="5962650" y="2709862"/>
-            <a:ext cx="5619750" cy="2390775"/>
+            <a:off x="5962650" y="2838450"/>
+            <a:ext cx="5619750" cy="2133600"/>
           </a:xfrm>
           <a:prstGeom prst="rect">
             <a:avLst/>
           </a:prstGeom>
         </p:spPr>
       </p:pic>
-      <p:sp>
-        <p:nvSpPr>
-          <p:cNvPr id="4" name="TextBox 3"/>
-          <p:cNvSpPr txBox="1"/>
-          <p:nvPr/>
-        </p:nvSpPr>
-        <p:spPr>
-          <a:xfrm>
-            <a:off x="609600" y="762000"/>
-            <a:ext cx="11521440" cy="419100"/>
-          </a:xfrm>
-          <a:prstGeom prst="rect">
-            <a:avLst/>
-          </a:prstGeom>
-          <a:noFill/>
-        </p:spPr>
-        <p:txBody>
-          <a:bodyPr wrap="square" lIns="0" rIns="0" tIns="0" bIns="0" anchor="t">
-            <a:spAutoFit/>
-          </a:bodyPr>
-          <a:lstStyle/>
-          <a:p>
-            <a:pPr algn="l"/>
-            <a:r>
-              <a:rPr b="0" sz="2400" i="0" u="none">
-                <a:solidFill>
-                  <a:srgbClr val="0F172A"/>
-                </a:solidFill>
-                <a:latin typeface="Noto Sans KR ExtraBold"/>
-              </a:rPr>
-              <a:t>개발 단계: 바이브 코딩 표준 및 안티패턴 관리</a:t>
-            </a:r>
-          </a:p>
-        </p:txBody>
-      </p:sp>
       <p:pic>
         <p:nvPicPr>
-          <p:cNvPr id="5" name="Picture 4" descr="image.png"/>
+          <p:cNvPr id="3" name="Picture 2" descr="image.png"/>
           <p:cNvPicPr>
             <a:picLocks noChangeAspect="1"/>
           </p:cNvPicPr>
@@ -4863,8 +5696,8 @@
         </p:blipFill>
         <p:spPr>
           <a:xfrm>
-            <a:off x="609600" y="2028825"/>
-            <a:ext cx="5010150" cy="1123950"/>
+            <a:off x="609600" y="2647950"/>
+            <a:ext cx="5010150" cy="1162050"/>
           </a:xfrm>
           <a:prstGeom prst="rect">
             <a:avLst/>
@@ -4873,7 +5706,7 @@
       </p:pic>
       <p:pic>
         <p:nvPicPr>
-          <p:cNvPr id="6" name="Picture 5" descr="image.png"/>
+          <p:cNvPr id="4" name="Picture 3" descr="image.png"/>
           <p:cNvPicPr>
             <a:picLocks noChangeAspect="1"/>
           </p:cNvPicPr>
@@ -4887,41 +5720,227 @@
         </p:blipFill>
         <p:spPr>
           <a:xfrm>
-            <a:off x="609600" y="3343275"/>
-            <a:ext cx="5010150" cy="1123950"/>
+            <a:off x="609600" y="4000500"/>
+            <a:ext cx="5010150" cy="1162050"/>
           </a:xfrm>
           <a:prstGeom prst="rect">
             <a:avLst/>
           </a:prstGeom>
         </p:spPr>
       </p:pic>
+      <p:sp>
+        <p:nvSpPr>
+          <p:cNvPr id="5" name="TextBox 4"/>
+          <p:cNvSpPr txBox="1"/>
+          <p:nvPr/>
+        </p:nvSpPr>
+        <p:spPr>
+          <a:xfrm>
+            <a:off x="609600" y="533400"/>
+            <a:ext cx="10972800" cy="647700"/>
+          </a:xfrm>
+          <a:prstGeom prst="rect">
+            <a:avLst/>
+          </a:prstGeom>
+          <a:noFill/>
+        </p:spPr>
+        <p:txBody>
+          <a:bodyPr wrap="square" lIns="0" rIns="0" tIns="0" bIns="0" anchor="t">
+            <a:spAutoFit/>
+          </a:bodyPr>
+          <a:lstStyle/>
+          <a:p>
+            <a:pPr algn="l"/>
+            <a:r>
+              <a:rPr b="1" sz="1200" i="0" u="none">
+                <a:solidFill>
+                  <a:srgbClr val="2563EB"/>
+                </a:solidFill>
+                <a:latin typeface="Noto Sans KR"/>
+              </a:rPr>
+              <a:t>DEVELOPMENT PHASE 01</a:t>
+            </a:r>
+          </a:p>
+        </p:txBody>
+      </p:sp>
+      <p:sp>
+        <p:nvSpPr>
+          <p:cNvPr id="6" name="TextBox 5"/>
+          <p:cNvSpPr txBox="1"/>
+          <p:nvPr/>
+        </p:nvSpPr>
+        <p:spPr>
+          <a:xfrm>
+            <a:off x="609600" y="762000"/>
+            <a:ext cx="11521440" cy="419100"/>
+          </a:xfrm>
+          <a:prstGeom prst="rect">
+            <a:avLst/>
+          </a:prstGeom>
+          <a:noFill/>
+        </p:spPr>
+        <p:txBody>
+          <a:bodyPr wrap="square" lIns="0" rIns="0" tIns="0" bIns="0" anchor="t">
+            <a:spAutoFit/>
+          </a:bodyPr>
+          <a:lstStyle/>
+          <a:p>
+            <a:pPr algn="l"/>
+            <a:r>
+              <a:rPr b="0" sz="2400" i="0" u="none">
+                <a:solidFill>
+                  <a:srgbClr val="0F172A"/>
+                </a:solidFill>
+                <a:latin typeface="Noto Sans KR ExtraBold"/>
+              </a:rPr>
+              <a:t>개발 단계: 바이브 코딩 프레임워크 및 표준 규범</a:t>
+            </a:r>
+          </a:p>
+        </p:txBody>
+      </p:sp>
+      <p:sp>
+        <p:nvSpPr>
+          <p:cNvPr id="7" name="TextBox 6"/>
+          <p:cNvSpPr txBox="1"/>
+          <p:nvPr/>
+        </p:nvSpPr>
+        <p:spPr>
+          <a:xfrm>
+            <a:off x="876300" y="2857500"/>
+            <a:ext cx="4740592" cy="228600"/>
+          </a:xfrm>
+          <a:prstGeom prst="rect">
+            <a:avLst/>
+          </a:prstGeom>
+          <a:noFill/>
+        </p:spPr>
+        <p:txBody>
+          <a:bodyPr wrap="square" lIns="0" rIns="0" tIns="0" bIns="0" anchor="t">
+            <a:spAutoFit/>
+          </a:bodyPr>
+          <a:lstStyle/>
+          <a:p>
+            <a:pPr algn="l"/>
+            <a:r>
+              <a:rPr b="1" sz="1350" i="0" u="none">
+                <a:solidFill>
+                  <a:srgbClr val="0F172A"/>
+                </a:solidFill>
+                <a:latin typeface="Noto Sans KR"/>
+              </a:rPr>
+              <a:t>Inhouse 프레임워크 구조 일치</a:t>
+            </a:r>
+          </a:p>
+        </p:txBody>
+      </p:sp>
+      <p:sp>
+        <p:nvSpPr>
+          <p:cNvPr id="8" name="TextBox 7"/>
+          <p:cNvSpPr txBox="1"/>
+          <p:nvPr/>
+        </p:nvSpPr>
+        <p:spPr>
+          <a:xfrm>
+            <a:off x="876300" y="3143250"/>
+            <a:ext cx="4514850" cy="457200"/>
+          </a:xfrm>
+          <a:prstGeom prst="rect">
+            <a:avLst/>
+          </a:prstGeom>
+          <a:noFill/>
+        </p:spPr>
+        <p:txBody>
+          <a:bodyPr wrap="square" lIns="0" rIns="0" tIns="0" bIns="0" anchor="t">
+            <a:spAutoFit/>
+          </a:bodyPr>
+          <a:lstStyle/>
+          <a:p>
+            <a:pPr algn="l"/>
+            <a:r>
+              <a:rPr b="0" sz="1350" i="0" u="none">
+                <a:solidFill>
+                  <a:srgbClr val="334155"/>
+                </a:solidFill>
+                <a:latin typeface="Noto Sans KR"/>
+              </a:rPr>
+              <a:t>Spring과의 구조적 유사성 극대화로 AI 정확도 향상 및 토큰 소모 최소화</a:t>
+            </a:r>
+          </a:p>
+        </p:txBody>
+      </p:sp>
+      <p:sp>
+        <p:nvSpPr>
+          <p:cNvPr id="9" name="TextBox 8"/>
+          <p:cNvSpPr txBox="1"/>
+          <p:nvPr/>
+        </p:nvSpPr>
+        <p:spPr>
+          <a:xfrm>
+            <a:off x="876300" y="4210050"/>
+            <a:ext cx="4740592" cy="228600"/>
+          </a:xfrm>
+          <a:prstGeom prst="rect">
+            <a:avLst/>
+          </a:prstGeom>
+          <a:noFill/>
+        </p:spPr>
+        <p:txBody>
+          <a:bodyPr wrap="square" lIns="0" rIns="0" tIns="0" bIns="0" anchor="t">
+            <a:spAutoFit/>
+          </a:bodyPr>
+          <a:lstStyle/>
+          <a:p>
+            <a:pPr algn="l"/>
+            <a:r>
+              <a:rPr b="1" sz="1350" i="0" u="none">
+                <a:solidFill>
+                  <a:srgbClr val="0F172A"/>
+                </a:solidFill>
+                <a:latin typeface="Noto Sans KR"/>
+              </a:rPr>
+              <a:t>컨벤션 &amp; 안티패턴 관리</a:t>
+            </a:r>
+          </a:p>
+        </p:txBody>
+      </p:sp>
+      <p:sp>
+        <p:nvSpPr>
+          <p:cNvPr id="10" name="TextBox 9"/>
+          <p:cNvSpPr txBox="1"/>
+          <p:nvPr/>
+        </p:nvSpPr>
+        <p:spPr>
+          <a:xfrm>
+            <a:off x="876300" y="4495800"/>
+            <a:ext cx="4514850" cy="457200"/>
+          </a:xfrm>
+          <a:prstGeom prst="rect">
+            <a:avLst/>
+          </a:prstGeom>
+          <a:noFill/>
+        </p:spPr>
+        <p:txBody>
+          <a:bodyPr wrap="square" lIns="0" rIns="0" tIns="0" bIns="0" anchor="t">
+            <a:spAutoFit/>
+          </a:bodyPr>
+          <a:lstStyle/>
+          <a:p>
+            <a:pPr algn="l"/>
+            <a:r>
+              <a:rPr b="0" sz="1350" i="0" u="none">
+                <a:solidFill>
+                  <a:srgbClr val="334155"/>
+                </a:solidFill>
+                <a:latin typeface="Noto Sans KR"/>
+              </a:rPr>
+              <a:t>언어·라이브러리 및 비즈니스 룰 규범화, 안티패턴 정의로 불필요한 리소스 제어</a:t>
+            </a:r>
+          </a:p>
+        </p:txBody>
+      </p:sp>
       <p:pic>
         <p:nvPicPr>
-          <p:cNvPr id="7" name="Picture 6" descr="image.png"/>
-          <p:cNvPicPr>
-            <a:picLocks noChangeAspect="1"/>
-          </p:cNvPicPr>
-          <p:nvPr/>
-        </p:nvPicPr>
-        <p:blipFill>
-          <a:blip r:embed="rId3"/>
-          <a:stretch>
-            <a:fillRect/>
-          </a:stretch>
-        </p:blipFill>
-        <p:spPr>
-          <a:xfrm>
-            <a:off x="609600" y="4657725"/>
-            <a:ext cx="5010150" cy="1123950"/>
-          </a:xfrm>
-          <a:prstGeom prst="rect">
-            <a:avLst/>
-          </a:prstGeom>
-        </p:spPr>
-      </p:pic>
-      <p:pic>
-        <p:nvPicPr>
-          <p:cNvPr id="8" name="Picture 7" descr="image.png"/>
+          <p:cNvPr id="11" name="Picture 10" descr="image.png"/>
           <p:cNvPicPr>
             <a:picLocks noChangeAspect="1"/>
           </p:cNvPicPr>
@@ -4935,8 +5954,8 @@
         </p:blipFill>
         <p:spPr>
           <a:xfrm>
-            <a:off x="6267450" y="3048000"/>
-            <a:ext cx="148232" cy="190500"/>
+            <a:off x="6267450" y="3167062"/>
+            <a:ext cx="163115" cy="209550"/>
           </a:xfrm>
           <a:prstGeom prst="rect">
             <a:avLst/>
@@ -4945,14 +5964,14 @@
       </p:pic>
       <p:sp>
         <p:nvSpPr>
-          <p:cNvPr id="9" name="TextBox 8"/>
-          <p:cNvSpPr txBox="1"/>
-          <p:nvPr/>
-        </p:nvSpPr>
-        <p:spPr>
-          <a:xfrm>
-            <a:off x="876300" y="2219325"/>
-            <a:ext cx="4740592" cy="228600"/>
+          <p:cNvPr id="12" name="TextBox 11"/>
+          <p:cNvSpPr txBox="1"/>
+          <p:nvPr/>
+        </p:nvSpPr>
+        <p:spPr>
+          <a:xfrm>
+            <a:off x="6525815" y="3143250"/>
+            <a:ext cx="2333885" cy="257175"/>
           </a:xfrm>
           <a:prstGeom prst="rect">
             <a:avLst/>
@@ -4967,118 +5986,13 @@
           <a:p>
             <a:pPr algn="l"/>
             <a:r>
-              <a:rPr b="1" sz="1350" i="0" u="none">
-                <a:solidFill>
-                  <a:srgbClr val="0F172A"/>
-                </a:solidFill>
-                <a:latin typeface="Noto Sans KR"/>
-              </a:rPr>
-              <a:t>Spring 구조적 동일성 확보</a:t>
-            </a:r>
-          </a:p>
-        </p:txBody>
-      </p:sp>
-      <p:sp>
-        <p:nvSpPr>
-          <p:cNvPr id="10" name="TextBox 9"/>
-          <p:cNvSpPr txBox="1"/>
-          <p:nvPr/>
-        </p:nvSpPr>
-        <p:spPr>
-          <a:xfrm>
-            <a:off x="876300" y="2505075"/>
-            <a:ext cx="4514850" cy="457200"/>
-          </a:xfrm>
-          <a:prstGeom prst="rect">
-            <a:avLst/>
-          </a:prstGeom>
-          <a:noFill/>
-        </p:spPr>
-        <p:txBody>
-          <a:bodyPr wrap="square" lIns="0" rIns="0" tIns="0" bIns="0" anchor="t">
-            <a:spAutoFit/>
-          </a:bodyPr>
-          <a:lstStyle/>
-          <a:p>
-            <a:pPr algn="l"/>
-            <a:r>
-              <a:rPr b="0" sz="1350" i="0" u="none">
-                <a:solidFill>
-                  <a:srgbClr val="334155"/>
-                </a:solidFill>
-                <a:latin typeface="Noto Sans KR"/>
-              </a:rPr>
-              <a:t>Inhouse 프레임워크 구조 일치로 AI 동작 정확도 향상 및 토큰 소모 최소화.</a:t>
-            </a:r>
-          </a:p>
-        </p:txBody>
-      </p:sp>
-      <p:sp>
-        <p:nvSpPr>
-          <p:cNvPr id="11" name="TextBox 10"/>
-          <p:cNvSpPr txBox="1"/>
-          <p:nvPr/>
-        </p:nvSpPr>
-        <p:spPr>
-          <a:xfrm>
-            <a:off x="876300" y="3533775"/>
-            <a:ext cx="4740592" cy="228600"/>
-          </a:xfrm>
-          <a:prstGeom prst="rect">
-            <a:avLst/>
-          </a:prstGeom>
-          <a:noFill/>
-        </p:spPr>
-        <p:txBody>
-          <a:bodyPr wrap="square" lIns="0" rIns="0" tIns="0" bIns="0" anchor="t">
-            <a:spAutoFit/>
-          </a:bodyPr>
-          <a:lstStyle/>
-          <a:p>
-            <a:pPr algn="l"/>
-            <a:r>
-              <a:rPr b="1" sz="1350" i="0" u="none">
-                <a:solidFill>
-                  <a:srgbClr val="0F172A"/>
-                </a:solidFill>
-                <a:latin typeface="Noto Sans KR"/>
-              </a:rPr>
-              <a:t>컨벤션 &amp; 안티패턴 정의</a:t>
-            </a:r>
-          </a:p>
-        </p:txBody>
-      </p:sp>
-      <p:sp>
-        <p:nvSpPr>
-          <p:cNvPr id="12" name="TextBox 11"/>
-          <p:cNvSpPr txBox="1"/>
-          <p:nvPr/>
-        </p:nvSpPr>
-        <p:spPr>
-          <a:xfrm>
-            <a:off x="876300" y="3819525"/>
-            <a:ext cx="4514850" cy="457200"/>
-          </a:xfrm>
-          <a:prstGeom prst="rect">
-            <a:avLst/>
-          </a:prstGeom>
-          <a:noFill/>
-        </p:spPr>
-        <p:txBody>
-          <a:bodyPr wrap="square" lIns="0" rIns="0" tIns="0" bIns="0" anchor="t">
-            <a:spAutoFit/>
-          </a:bodyPr>
-          <a:lstStyle/>
-          <a:p>
-            <a:pPr algn="l"/>
-            <a:r>
-              <a:rPr b="0" sz="1350" i="0" u="none">
-                <a:solidFill>
-                  <a:srgbClr val="334155"/>
-                </a:solidFill>
-                <a:latin typeface="Noto Sans KR"/>
-              </a:rPr>
-              <a:t>비즈니스 룰 기반 코딩 규범 명시 및 리소스 생성 시 금지 규칙 정립.</a:t>
+              <a:rPr b="1" sz="1500" i="0" u="none">
+                <a:solidFill>
+                  <a:srgbClr val="FFFFFF"/>
+                </a:solidFill>
+                <a:latin typeface="Noto Sans KR"/>
+              </a:rPr>
+              <a:t>표준 3대 설계서 양식 정의</a:t>
             </a:r>
           </a:p>
         </p:txBody>
@@ -5091,113 +6005,8 @@
         </p:nvSpPr>
         <p:spPr>
           <a:xfrm>
-            <a:off x="876300" y="4848225"/>
-            <a:ext cx="4740592" cy="228600"/>
-          </a:xfrm>
-          <a:prstGeom prst="rect">
-            <a:avLst/>
-          </a:prstGeom>
-          <a:noFill/>
-        </p:spPr>
-        <p:txBody>
-          <a:bodyPr wrap="square" lIns="0" rIns="0" tIns="0" bIns="0" anchor="t">
-            <a:spAutoFit/>
-          </a:bodyPr>
-          <a:lstStyle/>
-          <a:p>
-            <a:pPr algn="l"/>
-            <a:r>
-              <a:rPr b="1" sz="1350" i="0" u="none">
-                <a:solidFill>
-                  <a:srgbClr val="0F172A"/>
-                </a:solidFill>
-                <a:latin typeface="Noto Sans KR"/>
-              </a:rPr>
-              <a:t>3대 설계서 표준 양식화</a:t>
-            </a:r>
-          </a:p>
-        </p:txBody>
-      </p:sp>
-      <p:sp>
-        <p:nvSpPr>
-          <p:cNvPr id="14" name="TextBox 13"/>
-          <p:cNvSpPr txBox="1"/>
-          <p:nvPr/>
-        </p:nvSpPr>
-        <p:spPr>
-          <a:xfrm>
-            <a:off x="876300" y="5133975"/>
-            <a:ext cx="4514850" cy="457200"/>
-          </a:xfrm>
-          <a:prstGeom prst="rect">
-            <a:avLst/>
-          </a:prstGeom>
-          <a:noFill/>
-        </p:spPr>
-        <p:txBody>
-          <a:bodyPr wrap="square" lIns="0" rIns="0" tIns="0" bIns="0" anchor="t">
-            <a:spAutoFit/>
-          </a:bodyPr>
-          <a:lstStyle/>
-          <a:p>
-            <a:pPr algn="l"/>
-            <a:r>
-              <a:rPr b="0" sz="1350" i="0" u="none">
-                <a:solidFill>
-                  <a:srgbClr val="334155"/>
-                </a:solidFill>
-                <a:latin typeface="Noto Sans KR"/>
-              </a:rPr>
-              <a:t>프론트엔드·백엔드·인터페이스 통신 스펙을 표준 규격으로 사전 정의.</a:t>
-            </a:r>
-          </a:p>
-        </p:txBody>
-      </p:sp>
-      <p:sp>
-        <p:nvSpPr>
-          <p:cNvPr id="15" name="TextBox 14"/>
-          <p:cNvSpPr txBox="1"/>
-          <p:nvPr/>
-        </p:nvSpPr>
-        <p:spPr>
-          <a:xfrm>
-            <a:off x="6510932" y="3014662"/>
-            <a:ext cx="2222621" cy="257175"/>
-          </a:xfrm>
-          <a:prstGeom prst="rect">
-            <a:avLst/>
-          </a:prstGeom>
-          <a:noFill/>
-        </p:spPr>
-        <p:txBody>
-          <a:bodyPr wrap="square" lIns="0" rIns="0" tIns="0" bIns="0" anchor="t">
-            <a:spAutoFit/>
-          </a:bodyPr>
-          <a:lstStyle/>
-          <a:p>
-            <a:pPr algn="l"/>
-            <a:r>
-              <a:rPr b="1" sz="1500" i="0" u="none">
-                <a:solidFill>
-                  <a:srgbClr val="FFFFFF"/>
-                </a:solidFill>
-                <a:latin typeface="Noto Sans KR"/>
-              </a:rPr>
-              <a:t>AI 정확도 제어 핵심 원칙</a:t>
-            </a:r>
-          </a:p>
-        </p:txBody>
-      </p:sp>
-      <p:sp>
-        <p:nvSpPr>
-          <p:cNvPr id="16" name="TextBox 15"/>
-          <p:cNvSpPr txBox="1"/>
-          <p:nvPr/>
-        </p:nvSpPr>
-        <p:spPr>
-          <a:xfrm>
-            <a:off x="6267450" y="3462337"/>
-            <a:ext cx="5010150" cy="514350"/>
+            <a:off x="6267450" y="3590925"/>
+            <a:ext cx="5010150" cy="257175"/>
           </a:xfrm>
           <a:prstGeom prst="rect">
             <a:avLst/>
@@ -5222,7 +6031,7 @@
                 </a:solidFill>
                 <a:latin typeface="Noto Sans KR"/>
               </a:rPr>
-              <a:t>구조적 유사성:</a:t>
+              <a:t>프론트엔드 설계서:</a:t>
             </a:r>
             <a:r>
               <a:rPr b="0" sz="1350" i="0" u="none">
@@ -5231,20 +6040,20 @@
                 </a:solidFill>
                 <a:latin typeface="Noto Sans KR"/>
               </a:rPr>
-              <a:t> 프레임워크 유사도가 낮을수록 AI 할루시네이션 급증.</a:t>
-            </a:r>
-          </a:p>
-        </p:txBody>
-      </p:sp>
-      <p:sp>
-        <p:nvSpPr>
-          <p:cNvPr id="17" name="TextBox 16"/>
-          <p:cNvSpPr txBox="1"/>
-          <p:nvPr/>
-        </p:nvSpPr>
-        <p:spPr>
-          <a:xfrm>
-            <a:off x="6267450" y="4129087"/>
+              <a:t> UI/UX 구조 및 백엔드 연동 통신 스펙 정의</a:t>
+            </a:r>
+          </a:p>
+        </p:txBody>
+      </p:sp>
+      <p:sp>
+        <p:nvSpPr>
+          <p:cNvPr id="14" name="TextBox 13"/>
+          <p:cNvSpPr txBox="1"/>
+          <p:nvPr/>
+        </p:nvSpPr>
+        <p:spPr>
+          <a:xfrm>
+            <a:off x="6267450" y="4000500"/>
             <a:ext cx="5010150" cy="257175"/>
           </a:xfrm>
           <a:prstGeom prst="rect">
@@ -5270,7 +6079,7 @@
                 </a:solidFill>
                 <a:latin typeface="Noto Sans KR"/>
               </a:rPr>
-              <a:t>명확한 컨벤션:</a:t>
+              <a:t>백엔드 설계서:</a:t>
             </a:r>
             <a:r>
               <a:rPr b="0" sz="1350" i="0" u="none">
@@ -5279,20 +6088,20 @@
                 </a:solidFill>
                 <a:latin typeface="Noto Sans KR"/>
               </a:rPr>
-              <a:t> 라이브러리 사용 가이드로 불필요한 재작성 방지.</a:t>
-            </a:r>
-          </a:p>
-        </p:txBody>
-      </p:sp>
-      <p:sp>
-        <p:nvSpPr>
-          <p:cNvPr id="18" name="TextBox 17"/>
-          <p:cNvSpPr txBox="1"/>
-          <p:nvPr/>
-        </p:nvSpPr>
-        <p:spPr>
-          <a:xfrm>
-            <a:off x="6267450" y="4538662"/>
+              <a:t> Data 처리 순서 및 프론트엔드 통신 스펙 명시</a:t>
+            </a:r>
+          </a:p>
+        </p:txBody>
+      </p:sp>
+      <p:sp>
+        <p:nvSpPr>
+          <p:cNvPr id="15" name="TextBox 14"/>
+          <p:cNvSpPr txBox="1"/>
+          <p:nvPr/>
+        </p:nvSpPr>
+        <p:spPr>
+          <a:xfrm>
+            <a:off x="6267450" y="4410075"/>
             <a:ext cx="5010150" cy="257175"/>
           </a:xfrm>
           <a:prstGeom prst="rect">
@@ -5318,7 +6127,7 @@
                 </a:solidFill>
                 <a:latin typeface="Noto Sans KR"/>
               </a:rPr>
-              <a:t>양식 표준화:</a:t>
+              <a:t>인터페이스 설계서:</a:t>
             </a:r>
             <a:r>
               <a:rPr b="0" sz="1350" i="0" u="none">
@@ -5327,7 +6136,7 @@
                 </a:solidFill>
                 <a:latin typeface="Noto Sans KR"/>
               </a:rPr>
-              <a:t> 설비·타 시스템 인터페이스 스펙 자동 생성 유도.</a:t>
+              <a:t> 설비 및 외부 타 시스템 통신 스펙 정의</a:t>
             </a:r>
           </a:p>
         </p:txBody>
@@ -5358,79 +6167,9 @@
         <p:nvPr/>
       </p:nvGrpSpPr>
       <p:grpSpPr/>
-      <p:sp>
-        <p:nvSpPr>
-          <p:cNvPr id="2" name="TextBox 1"/>
-          <p:cNvSpPr txBox="1"/>
-          <p:nvPr/>
-        </p:nvSpPr>
-        <p:spPr>
-          <a:xfrm>
-            <a:off x="609600" y="533400"/>
-            <a:ext cx="10972800" cy="647700"/>
-          </a:xfrm>
-          <a:prstGeom prst="rect">
-            <a:avLst/>
-          </a:prstGeom>
-          <a:noFill/>
-        </p:spPr>
-        <p:txBody>
-          <a:bodyPr wrap="square" lIns="0" rIns="0" tIns="0" bIns="0" anchor="t">
-            <a:spAutoFit/>
-          </a:bodyPr>
-          <a:lstStyle/>
-          <a:p>
-            <a:pPr algn="l"/>
-            <a:r>
-              <a:rPr b="1" sz="1200" i="0" u="none">
-                <a:solidFill>
-                  <a:srgbClr val="2563EB"/>
-                </a:solidFill>
-                <a:latin typeface="Noto Sans KR"/>
-              </a:rPr>
-              <a:t>QUALITY CONTROL</a:t>
-            </a:r>
-          </a:p>
-        </p:txBody>
-      </p:sp>
-      <p:sp>
-        <p:nvSpPr>
-          <p:cNvPr id="3" name="TextBox 2"/>
-          <p:cNvSpPr txBox="1"/>
-          <p:nvPr/>
-        </p:nvSpPr>
-        <p:spPr>
-          <a:xfrm>
-            <a:off x="609600" y="762000"/>
-            <a:ext cx="11521440" cy="419100"/>
-          </a:xfrm>
-          <a:prstGeom prst="rect">
-            <a:avLst/>
-          </a:prstGeom>
-          <a:noFill/>
-        </p:spPr>
-        <p:txBody>
-          <a:bodyPr wrap="square" lIns="0" rIns="0" tIns="0" bIns="0" anchor="t">
-            <a:spAutoFit/>
-          </a:bodyPr>
-          <a:lstStyle/>
-          <a:p>
-            <a:pPr algn="l"/>
-            <a:r>
-              <a:rPr b="0" sz="2400" i="0" u="none">
-                <a:solidFill>
-                  <a:srgbClr val="0F172A"/>
-                </a:solidFill>
-                <a:latin typeface="Noto Sans KR ExtraBold"/>
-              </a:rPr>
-              <a:t>형상 관리 브랜치 전략 및 안전 배포 파이프라인</a:t>
-            </a:r>
-          </a:p>
-        </p:txBody>
-      </p:sp>
       <p:pic>
         <p:nvPicPr>
-          <p:cNvPr id="4" name="Picture 3" descr="image.png"/>
+          <p:cNvPr id="2" name="Picture 1" descr="image.png"/>
           <p:cNvPicPr>
             <a:picLocks noChangeAspect="1"/>
           </p:cNvPicPr>
@@ -5444,8 +6183,8 @@
         </p:blipFill>
         <p:spPr>
           <a:xfrm>
-            <a:off x="609600" y="3000375"/>
-            <a:ext cx="2628900" cy="1809750"/>
+            <a:off x="609600" y="2376487"/>
+            <a:ext cx="3505200" cy="3057525"/>
           </a:xfrm>
           <a:prstGeom prst="rect">
             <a:avLst/>
@@ -5454,7 +6193,7 @@
       </p:pic>
       <p:pic>
         <p:nvPicPr>
-          <p:cNvPr id="5" name="Picture 4" descr="image.png"/>
+          <p:cNvPr id="3" name="Picture 2" descr="image.png"/>
           <p:cNvPicPr>
             <a:picLocks noChangeAspect="1"/>
           </p:cNvPicPr>
@@ -5468,8 +6207,8 @@
         </p:blipFill>
         <p:spPr>
           <a:xfrm>
-            <a:off x="3390900" y="3000375"/>
-            <a:ext cx="2628900" cy="1809750"/>
+            <a:off x="4343400" y="2376487"/>
+            <a:ext cx="3505200" cy="3057525"/>
           </a:xfrm>
           <a:prstGeom prst="rect">
             <a:avLst/>
@@ -5478,7 +6217,101 @@
       </p:pic>
       <p:pic>
         <p:nvPicPr>
-          <p:cNvPr id="6" name="Picture 5" descr="image.png"/>
+          <p:cNvPr id="4" name="Picture 3" descr="image.png"/>
+          <p:cNvPicPr>
+            <a:picLocks noChangeAspect="1"/>
+          </p:cNvPicPr>
+          <p:nvPr/>
+        </p:nvPicPr>
+        <p:blipFill>
+          <a:blip r:embed="rId2"/>
+          <a:stretch>
+            <a:fillRect/>
+          </a:stretch>
+        </p:blipFill>
+        <p:spPr>
+          <a:xfrm>
+            <a:off x="8077200" y="2376487"/>
+            <a:ext cx="3505200" cy="3057525"/>
+          </a:xfrm>
+          <a:prstGeom prst="rect">
+            <a:avLst/>
+          </a:prstGeom>
+        </p:spPr>
+      </p:pic>
+      <p:sp>
+        <p:nvSpPr>
+          <p:cNvPr id="5" name="TextBox 4"/>
+          <p:cNvSpPr txBox="1"/>
+          <p:nvPr/>
+        </p:nvSpPr>
+        <p:spPr>
+          <a:xfrm>
+            <a:off x="609600" y="533400"/>
+            <a:ext cx="10972800" cy="647700"/>
+          </a:xfrm>
+          <a:prstGeom prst="rect">
+            <a:avLst/>
+          </a:prstGeom>
+          <a:noFill/>
+        </p:spPr>
+        <p:txBody>
+          <a:bodyPr wrap="square" lIns="0" rIns="0" tIns="0" bIns="0" anchor="t">
+            <a:spAutoFit/>
+          </a:bodyPr>
+          <a:lstStyle/>
+          <a:p>
+            <a:pPr algn="l"/>
+            <a:r>
+              <a:rPr b="1" sz="1200" i="0" u="none">
+                <a:solidFill>
+                  <a:srgbClr val="2563EB"/>
+                </a:solidFill>
+                <a:latin typeface="Noto Sans KR"/>
+              </a:rPr>
+              <a:t>DEVELOPMENT PHASE 02</a:t>
+            </a:r>
+          </a:p>
+        </p:txBody>
+      </p:sp>
+      <p:sp>
+        <p:nvSpPr>
+          <p:cNvPr id="6" name="TextBox 5"/>
+          <p:cNvSpPr txBox="1"/>
+          <p:nvPr/>
+        </p:nvSpPr>
+        <p:spPr>
+          <a:xfrm>
+            <a:off x="609600" y="762000"/>
+            <a:ext cx="11521440" cy="419100"/>
+          </a:xfrm>
+          <a:prstGeom prst="rect">
+            <a:avLst/>
+          </a:prstGeom>
+          <a:noFill/>
+        </p:spPr>
+        <p:txBody>
+          <a:bodyPr wrap="square" lIns="0" rIns="0" tIns="0" bIns="0" anchor="t">
+            <a:spAutoFit/>
+          </a:bodyPr>
+          <a:lstStyle/>
+          <a:p>
+            <a:pPr algn="l"/>
+            <a:r>
+              <a:rPr b="0" sz="2400" i="0" u="none">
+                <a:solidFill>
+                  <a:srgbClr val="0F172A"/>
+                </a:solidFill>
+                <a:latin typeface="Noto Sans KR ExtraBold"/>
+              </a:rPr>
+              <a:t>형상 관리 브랜치 전략 및 CI/CD 안전 배포</a:t>
+            </a:r>
+          </a:p>
+        </p:txBody>
+      </p:sp>
+      <p:pic>
+        <p:nvPicPr>
+          <p:cNvPr id="7" name="Picture 6" descr="image.png"/>
           <p:cNvPicPr>
             <a:picLocks noChangeAspect="1"/>
           </p:cNvPicPr>
@@ -5492,41 +6325,52 @@
         </p:blipFill>
         <p:spPr>
           <a:xfrm>
-            <a:off x="6172200" y="3000375"/>
-            <a:ext cx="2628900" cy="1809750"/>
+            <a:off x="923925" y="2690812"/>
+            <a:ext cx="381000" cy="381000"/>
           </a:xfrm>
           <a:prstGeom prst="rect">
             <a:avLst/>
           </a:prstGeom>
         </p:spPr>
       </p:pic>
+      <p:sp>
+        <p:nvSpPr>
+          <p:cNvPr id="8" name="TextBox 7"/>
+          <p:cNvSpPr txBox="1"/>
+          <p:nvPr/>
+        </p:nvSpPr>
+        <p:spPr>
+          <a:xfrm>
+            <a:off x="923925" y="3224212"/>
+            <a:ext cx="3020377" cy="257175"/>
+          </a:xfrm>
+          <a:prstGeom prst="rect">
+            <a:avLst/>
+          </a:prstGeom>
+          <a:noFill/>
+        </p:spPr>
+        <p:txBody>
+          <a:bodyPr wrap="square" lIns="0" rIns="0" tIns="0" bIns="0" anchor="t">
+            <a:spAutoFit/>
+          </a:bodyPr>
+          <a:lstStyle/>
+          <a:p>
+            <a:pPr algn="l"/>
+            <a:r>
+              <a:rPr b="1" sz="1500" i="0" u="none">
+                <a:solidFill>
+                  <a:srgbClr val="0F172A"/>
+                </a:solidFill>
+                <a:latin typeface="Noto Sans KR"/>
+              </a:rPr>
+              <a:t>저장소 분리 &amp; 권한 제어</a:t>
+            </a:r>
+          </a:p>
+        </p:txBody>
+      </p:sp>
       <p:pic>
         <p:nvPicPr>
-          <p:cNvPr id="7" name="Picture 6" descr="image.png"/>
-          <p:cNvPicPr>
-            <a:picLocks noChangeAspect="1"/>
-          </p:cNvPicPr>
-          <p:nvPr/>
-        </p:nvPicPr>
-        <p:blipFill>
-          <a:blip r:embed="rId2"/>
-          <a:stretch>
-            <a:fillRect/>
-          </a:stretch>
-        </p:blipFill>
-        <p:spPr>
-          <a:xfrm>
-            <a:off x="8953500" y="3000375"/>
-            <a:ext cx="2628900" cy="1809750"/>
-          </a:xfrm>
-          <a:prstGeom prst="rect">
-            <a:avLst/>
-          </a:prstGeom>
-        </p:spPr>
-      </p:pic>
-      <p:pic>
-        <p:nvPicPr>
-          <p:cNvPr id="8" name="Picture 7" descr="image.png"/>
+          <p:cNvPr id="9" name="Picture 8" descr="image.png"/>
           <p:cNvPicPr>
             <a:picLocks noChangeAspect="1"/>
           </p:cNvPicPr>
@@ -5540,17 +6384,52 @@
         </p:blipFill>
         <p:spPr>
           <a:xfrm>
-            <a:off x="847725" y="3238500"/>
-            <a:ext cx="721816" cy="228600"/>
+            <a:off x="4657725" y="2690812"/>
+            <a:ext cx="381000" cy="381000"/>
           </a:xfrm>
           <a:prstGeom prst="rect">
             <a:avLst/>
           </a:prstGeom>
         </p:spPr>
       </p:pic>
+      <p:sp>
+        <p:nvSpPr>
+          <p:cNvPr id="10" name="TextBox 9"/>
+          <p:cNvSpPr txBox="1"/>
+          <p:nvPr/>
+        </p:nvSpPr>
+        <p:spPr>
+          <a:xfrm>
+            <a:off x="4657725" y="3224212"/>
+            <a:ext cx="3020377" cy="257175"/>
+          </a:xfrm>
+          <a:prstGeom prst="rect">
+            <a:avLst/>
+          </a:prstGeom>
+          <a:noFill/>
+        </p:spPr>
+        <p:txBody>
+          <a:bodyPr wrap="square" lIns="0" rIns="0" tIns="0" bIns="0" anchor="t">
+            <a:spAutoFit/>
+          </a:bodyPr>
+          <a:lstStyle/>
+          <a:p>
+            <a:pPr algn="l"/>
+            <a:r>
+              <a:rPr b="1" sz="1500" i="0" u="none">
+                <a:solidFill>
+                  <a:srgbClr val="0F172A"/>
+                </a:solidFill>
+                <a:latin typeface="Noto Sans KR"/>
+              </a:rPr>
+              <a:t>Agent 커밋 &amp; 변경 회귀</a:t>
+            </a:r>
+          </a:p>
+        </p:txBody>
+      </p:sp>
       <p:pic>
         <p:nvPicPr>
-          <p:cNvPr id="9" name="Picture 8" descr="image.png"/>
+          <p:cNvPr id="11" name="Picture 10" descr="image.png"/>
           <p:cNvPicPr>
             <a:picLocks noChangeAspect="1"/>
           </p:cNvPicPr>
@@ -5564,17 +6443,52 @@
         </p:blipFill>
         <p:spPr>
           <a:xfrm>
-            <a:off x="3629025" y="3238500"/>
-            <a:ext cx="721816" cy="228600"/>
+            <a:off x="8391525" y="2690812"/>
+            <a:ext cx="381000" cy="381000"/>
           </a:xfrm>
           <a:prstGeom prst="rect">
             <a:avLst/>
           </a:prstGeom>
         </p:spPr>
       </p:pic>
+      <p:sp>
+        <p:nvSpPr>
+          <p:cNvPr id="12" name="TextBox 11"/>
+          <p:cNvSpPr txBox="1"/>
+          <p:nvPr/>
+        </p:nvSpPr>
+        <p:spPr>
+          <a:xfrm>
+            <a:off x="8391525" y="3224212"/>
+            <a:ext cx="3020377" cy="257175"/>
+          </a:xfrm>
+          <a:prstGeom prst="rect">
+            <a:avLst/>
+          </a:prstGeom>
+          <a:noFill/>
+        </p:spPr>
+        <p:txBody>
+          <a:bodyPr wrap="square" lIns="0" rIns="0" tIns="0" bIns="0" anchor="t">
+            <a:spAutoFit/>
+          </a:bodyPr>
+          <a:lstStyle/>
+          <a:p>
+            <a:pPr algn="l"/>
+            <a:r>
+              <a:rPr b="1" sz="1500" i="0" u="none">
+                <a:solidFill>
+                  <a:srgbClr val="0F172A"/>
+                </a:solidFill>
+                <a:latin typeface="Noto Sans KR"/>
+              </a:rPr>
+              <a:t>단계별 CI/CD 배포</a:t>
+            </a:r>
+          </a:p>
+        </p:txBody>
+      </p:sp>
       <p:pic>
         <p:nvPicPr>
-          <p:cNvPr id="10" name="Picture 9" descr="image.png"/>
+          <p:cNvPr id="13" name="Picture 12" descr="image.png"/>
           <p:cNvPicPr>
             <a:picLocks noChangeAspect="1"/>
           </p:cNvPicPr>
@@ -5588,17 +6502,149 @@
         </p:blipFill>
         <p:spPr>
           <a:xfrm>
-            <a:off x="6410325" y="3238500"/>
-            <a:ext cx="721816" cy="228600"/>
+            <a:off x="1040308" y="2786062"/>
+            <a:ext cx="148232" cy="190500"/>
           </a:xfrm>
           <a:prstGeom prst="rect">
             <a:avLst/>
           </a:prstGeom>
         </p:spPr>
       </p:pic>
+      <p:sp>
+        <p:nvSpPr>
+          <p:cNvPr id="14" name="TextBox 13"/>
+          <p:cNvSpPr txBox="1"/>
+          <p:nvPr/>
+        </p:nvSpPr>
+        <p:spPr>
+          <a:xfrm>
+            <a:off x="923925" y="3595687"/>
+            <a:ext cx="2876550" cy="228600"/>
+          </a:xfrm>
+          <a:prstGeom prst="rect">
+            <a:avLst/>
+          </a:prstGeom>
+          <a:noFill/>
+        </p:spPr>
+        <p:txBody>
+          <a:bodyPr wrap="square" lIns="0" rIns="0" tIns="0" bIns="0" anchor="t">
+            <a:spAutoFit/>
+          </a:bodyPr>
+          <a:lstStyle/>
+          <a:p>
+            <a:pPr algn="l"/>
+            <a:r>
+              <a:rPr b="1" sz="1350" i="0" u="none">
+                <a:solidFill>
+                  <a:srgbClr val="334155"/>
+                </a:solidFill>
+                <a:latin typeface="Noto Sans KR"/>
+              </a:rPr>
+              <a:t>영역 분리:</a:t>
+            </a:r>
+            <a:r>
+              <a:rPr b="0" sz="1350" i="0" u="none">
+                <a:solidFill>
+                  <a:srgbClr val="334155"/>
+                </a:solidFill>
+                <a:latin typeface="Noto Sans KR"/>
+              </a:rPr>
+              <a:t> 문서, 소스, 설정 분리 관리</a:t>
+            </a:r>
+          </a:p>
+        </p:txBody>
+      </p:sp>
+      <p:sp>
+        <p:nvSpPr>
+          <p:cNvPr id="15" name="TextBox 14"/>
+          <p:cNvSpPr txBox="1"/>
+          <p:nvPr/>
+        </p:nvSpPr>
+        <p:spPr>
+          <a:xfrm>
+            <a:off x="923925" y="3900487"/>
+            <a:ext cx="2876550" cy="457200"/>
+          </a:xfrm>
+          <a:prstGeom prst="rect">
+            <a:avLst/>
+          </a:prstGeom>
+          <a:noFill/>
+        </p:spPr>
+        <p:txBody>
+          <a:bodyPr wrap="square" lIns="0" rIns="0" tIns="0" bIns="0" anchor="t">
+            <a:spAutoFit/>
+          </a:bodyPr>
+          <a:lstStyle/>
+          <a:p>
+            <a:pPr algn="l"/>
+            <a:r>
+              <a:rPr b="1" sz="1350" i="0" u="none">
+                <a:solidFill>
+                  <a:srgbClr val="334155"/>
+                </a:solidFill>
+                <a:latin typeface="Noto Sans KR"/>
+              </a:rPr>
+              <a:t>접근 권한:</a:t>
+            </a:r>
+            <a:r>
+              <a:rPr b="0" sz="1350" i="0" u="none">
+                <a:solidFill>
+                  <a:srgbClr val="334155"/>
+                </a:solidFill>
+                <a:latin typeface="Noto Sans KR"/>
+              </a:rPr>
+              <a:t> 개발자·설계자·유지보수자 세분화</a:t>
+            </a:r>
+          </a:p>
+        </p:txBody>
+      </p:sp>
+      <p:sp>
+        <p:nvSpPr>
+          <p:cNvPr id="16" name="TextBox 15"/>
+          <p:cNvSpPr txBox="1"/>
+          <p:nvPr/>
+        </p:nvSpPr>
+        <p:spPr>
+          <a:xfrm>
+            <a:off x="923925" y="4433887"/>
+            <a:ext cx="2876550" cy="457200"/>
+          </a:xfrm>
+          <a:prstGeom prst="rect">
+            <a:avLst/>
+          </a:prstGeom>
+          <a:noFill/>
+        </p:spPr>
+        <p:txBody>
+          <a:bodyPr wrap="square" lIns="0" rIns="0" tIns="0" bIns="0" anchor="t">
+            <a:spAutoFit/>
+          </a:bodyPr>
+          <a:lstStyle/>
+          <a:p>
+            <a:pPr algn="l"/>
+            <a:r>
+              <a:rPr b="1" sz="1350" i="0" u="none">
+                <a:solidFill>
+                  <a:srgbClr val="334155"/>
+                </a:solidFill>
+                <a:latin typeface="Noto Sans KR"/>
+              </a:rPr>
+              <a:t>안전장치:</a:t>
+            </a:r>
+            <a:r>
+              <a:rPr b="0" sz="1350" i="0" u="none">
+                <a:solidFill>
+                  <a:srgbClr val="334155"/>
+                </a:solidFill>
+                <a:latin typeface="Noto Sans KR"/>
+              </a:rPr>
+              <a:t> main 직접 커밋 차단 및 PR 승인 필수</a:t>
+            </a:r>
+          </a:p>
+        </p:txBody>
+      </p:sp>
       <p:pic>
         <p:nvPicPr>
-          <p:cNvPr id="11" name="Picture 10" descr="image.png"/>
+          <p:cNvPr id="17" name="Picture 16" descr="image.png"/>
           <p:cNvPicPr>
             <a:picLocks noChangeAspect="1"/>
           </p:cNvPicPr>
@@ -5612,8 +6658,8 @@
         </p:blipFill>
         <p:spPr>
           <a:xfrm>
-            <a:off x="9191625" y="3238500"/>
-            <a:ext cx="721816" cy="228600"/>
+            <a:off x="4774108" y="2786062"/>
+            <a:ext cx="148232" cy="190500"/>
           </a:xfrm>
           <a:prstGeom prst="rect">
             <a:avLst/>
@@ -5622,14 +6668,14 @@
       </p:pic>
       <p:sp>
         <p:nvSpPr>
-          <p:cNvPr id="12" name="TextBox 11"/>
-          <p:cNvSpPr txBox="1"/>
-          <p:nvPr/>
-        </p:nvSpPr>
-        <p:spPr>
-          <a:xfrm>
-            <a:off x="847725" y="3581400"/>
-            <a:ext cx="2260282" cy="228600"/>
+          <p:cNvPr id="18" name="TextBox 17"/>
+          <p:cNvSpPr txBox="1"/>
+          <p:nvPr/>
+        </p:nvSpPr>
+        <p:spPr>
+          <a:xfrm>
+            <a:off x="4657725" y="3595687"/>
+            <a:ext cx="2876550" cy="457200"/>
           </a:xfrm>
           <a:prstGeom prst="rect">
             <a:avLst/>
@@ -5646,25 +6692,34 @@
             <a:r>
               <a:rPr b="1" sz="1350" i="0" u="none">
                 <a:solidFill>
-                  <a:srgbClr val="0F172A"/>
-                </a:solidFill>
-                <a:latin typeface="Noto Sans KR"/>
-              </a:rPr>
-              <a:t>권한 분리 &amp; Commit</a:t>
-            </a:r>
-          </a:p>
-        </p:txBody>
-      </p:sp>
-      <p:sp>
-        <p:nvSpPr>
-          <p:cNvPr id="13" name="TextBox 12"/>
-          <p:cNvSpPr txBox="1"/>
-          <p:nvPr/>
-        </p:nvSpPr>
-        <p:spPr>
-          <a:xfrm>
-            <a:off x="847725" y="3886200"/>
-            <a:ext cx="2152650" cy="685800"/>
+                  <a:srgbClr val="334155"/>
+                </a:solidFill>
+                <a:latin typeface="Noto Sans KR"/>
+              </a:rPr>
+              <a:t>커밋 단위:</a:t>
+            </a:r>
+            <a:r>
+              <a:rPr b="0" sz="1350" i="0" u="none">
+                <a:solidFill>
+                  <a:srgbClr val="334155"/>
+                </a:solidFill>
+                <a:latin typeface="Noto Sans KR"/>
+              </a:rPr>
+              <a:t> 산출물 변경 이력 단위 Commit 분리</a:t>
+            </a:r>
+          </a:p>
+        </p:txBody>
+      </p:sp>
+      <p:sp>
+        <p:nvSpPr>
+          <p:cNvPr id="19" name="TextBox 18"/>
+          <p:cNvSpPr txBox="1"/>
+          <p:nvPr/>
+        </p:nvSpPr>
+        <p:spPr>
+          <a:xfrm>
+            <a:off x="4657725" y="4129087"/>
+            <a:ext cx="2876550" cy="457200"/>
           </a:xfrm>
           <a:prstGeom prst="rect">
             <a:avLst/>
@@ -5679,27 +6734,36 @@
           <a:p>
             <a:pPr algn="l"/>
             <a:r>
+              <a:rPr b="1" sz="1350" i="0" u="none">
+                <a:solidFill>
+                  <a:srgbClr val="334155"/>
+                </a:solidFill>
+                <a:latin typeface="Noto Sans KR"/>
+              </a:rPr>
+              <a:t>feature 검증:</a:t>
+            </a:r>
+            <a:r>
               <a:rPr b="0" sz="1350" i="0" u="none">
                 <a:solidFill>
-                  <a:srgbClr val="475569"/>
-                </a:solidFill>
-                <a:latin typeface="Noto Sans KR"/>
-              </a:rPr>
-              <a:t>산출물 변경 이력 단위 원자적 Commit 생성 및 main 직커밋 통제.</a:t>
-            </a:r>
-          </a:p>
-        </p:txBody>
-      </p:sp>
-      <p:sp>
-        <p:nvSpPr>
-          <p:cNvPr id="14" name="TextBox 13"/>
-          <p:cNvSpPr txBox="1"/>
-          <p:nvPr/>
-        </p:nvSpPr>
-        <p:spPr>
-          <a:xfrm>
-            <a:off x="3629025" y="3581400"/>
-            <a:ext cx="2260282" cy="228600"/>
+                  <a:srgbClr val="334155"/>
+                </a:solidFill>
+                <a:latin typeface="Noto Sans KR"/>
+              </a:rPr>
+              <a:t> 결과 검증 후 develop 병합</a:t>
+            </a:r>
+          </a:p>
+        </p:txBody>
+      </p:sp>
+      <p:sp>
+        <p:nvSpPr>
+          <p:cNvPr id="20" name="TextBox 19"/>
+          <p:cNvSpPr txBox="1"/>
+          <p:nvPr/>
+        </p:nvSpPr>
+        <p:spPr>
+          <a:xfrm>
+            <a:off x="4657725" y="4662487"/>
+            <a:ext cx="2876550" cy="457200"/>
           </a:xfrm>
           <a:prstGeom prst="rect">
             <a:avLst/>
@@ -5716,25 +6780,58 @@
             <a:r>
               <a:rPr b="1" sz="1350" i="0" u="none">
                 <a:solidFill>
-                  <a:srgbClr val="0F172A"/>
-                </a:solidFill>
-                <a:latin typeface="Noto Sans KR"/>
-              </a:rPr>
-              <a:t>feature 검증 &amp; 회귀</a:t>
-            </a:r>
-          </a:p>
-        </p:txBody>
-      </p:sp>
-      <p:sp>
-        <p:nvSpPr>
-          <p:cNvPr id="15" name="TextBox 14"/>
-          <p:cNvSpPr txBox="1"/>
-          <p:nvPr/>
-        </p:nvSpPr>
-        <p:spPr>
-          <a:xfrm>
-            <a:off x="3629025" y="3886200"/>
-            <a:ext cx="2152650" cy="685800"/>
+                  <a:srgbClr val="334155"/>
+                </a:solidFill>
+                <a:latin typeface="Noto Sans KR"/>
+              </a:rPr>
+              <a:t>회귀 처리:</a:t>
+            </a:r>
+            <a:r>
+              <a:rPr b="0" sz="1350" i="0" u="none">
+                <a:solidFill>
+                  <a:srgbClr val="334155"/>
+                </a:solidFill>
+                <a:latin typeface="Noto Sans KR"/>
+              </a:rPr>
+              <a:t> 연계 테스트 미만족 시 feature 삭제</a:t>
+            </a:r>
+          </a:p>
+        </p:txBody>
+      </p:sp>
+      <p:pic>
+        <p:nvPicPr>
+          <p:cNvPr id="21" name="Picture 20" descr="image.png"/>
+          <p:cNvPicPr>
+            <a:picLocks noChangeAspect="1"/>
+          </p:cNvPicPr>
+          <p:nvPr/>
+        </p:nvPicPr>
+        <p:blipFill>
+          <a:blip r:embed="rId8"/>
+          <a:stretch>
+            <a:fillRect/>
+          </a:stretch>
+        </p:blipFill>
+        <p:spPr>
+          <a:xfrm>
+            <a:off x="8507908" y="2786062"/>
+            <a:ext cx="148232" cy="190500"/>
+          </a:xfrm>
+          <a:prstGeom prst="rect">
+            <a:avLst/>
+          </a:prstGeom>
+        </p:spPr>
+      </p:pic>
+      <p:sp>
+        <p:nvSpPr>
+          <p:cNvPr id="22" name="TextBox 21"/>
+          <p:cNvSpPr txBox="1"/>
+          <p:nvPr/>
+        </p:nvSpPr>
+        <p:spPr>
+          <a:xfrm>
+            <a:off x="8391525" y="3595687"/>
+            <a:ext cx="2876550" cy="457200"/>
           </a:xfrm>
           <a:prstGeom prst="rect">
             <a:avLst/>
@@ -5749,27 +6846,36 @@
           <a:p>
             <a:pPr algn="l"/>
             <a:r>
+              <a:rPr b="1" sz="1350" i="0" u="none">
+                <a:solidFill>
+                  <a:srgbClr val="334155"/>
+                </a:solidFill>
+                <a:latin typeface="Noto Sans KR"/>
+              </a:rPr>
+              <a:t>개발 배포:</a:t>
+            </a:r>
+            <a:r>
               <a:rPr b="0" sz="1350" i="0" u="none">
                 <a:solidFill>
-                  <a:srgbClr val="475569"/>
-                </a:solidFill>
-                <a:latin typeface="Noto Sans KR"/>
-              </a:rPr>
-              <a:t>연계 테스트 미만족 시 산출물 단계 회귀 후 feature 브랜치 삭제.</a:t>
-            </a:r>
-          </a:p>
-        </p:txBody>
-      </p:sp>
-      <p:sp>
-        <p:nvSpPr>
-          <p:cNvPr id="16" name="TextBox 15"/>
-          <p:cNvSpPr txBox="1"/>
-          <p:nvPr/>
-        </p:nvSpPr>
-        <p:spPr>
-          <a:xfrm>
-            <a:off x="6410325" y="3581400"/>
-            <a:ext cx="2260282" cy="200025"/>
+                  <a:srgbClr val="334155"/>
+                </a:solidFill>
+                <a:latin typeface="Noto Sans KR"/>
+              </a:rPr>
+              <a:t> develop 소스+설정 개발서버 자동 배포</a:t>
+            </a:r>
+          </a:p>
+        </p:txBody>
+      </p:sp>
+      <p:sp>
+        <p:nvSpPr>
+          <p:cNvPr id="23" name="TextBox 22"/>
+          <p:cNvSpPr txBox="1"/>
+          <p:nvPr/>
+        </p:nvSpPr>
+        <p:spPr>
+          <a:xfrm>
+            <a:off x="8391525" y="4129087"/>
+            <a:ext cx="2876550" cy="457200"/>
           </a:xfrm>
           <a:prstGeom prst="rect">
             <a:avLst/>
@@ -5786,25 +6892,34 @@
             <a:r>
               <a:rPr b="1" sz="1350" i="0" u="none">
                 <a:solidFill>
-                  <a:srgbClr val="0F172A"/>
-                </a:solidFill>
-                <a:latin typeface="Noto Sans KR"/>
-              </a:rPr>
-              <a:t>develop CI/CD</a:t>
-            </a:r>
-          </a:p>
-        </p:txBody>
-      </p:sp>
-      <p:sp>
-        <p:nvSpPr>
-          <p:cNvPr id="17" name="TextBox 16"/>
-          <p:cNvSpPr txBox="1"/>
-          <p:nvPr/>
-        </p:nvSpPr>
-        <p:spPr>
-          <a:xfrm>
-            <a:off x="6410325" y="3857625"/>
-            <a:ext cx="2152650" cy="685800"/>
+                  <a:srgbClr val="334155"/>
+                </a:solidFill>
+                <a:latin typeface="Noto Sans KR"/>
+              </a:rPr>
+              <a:t>통합 테스트:</a:t>
+            </a:r>
+            <a:r>
+              <a:rPr b="0" sz="1350" i="0" u="none">
+                <a:solidFill>
+                  <a:srgbClr val="334155"/>
+                </a:solidFill>
+                <a:latin typeface="Noto Sans KR"/>
+              </a:rPr>
+              <a:t> 연계 및 기능 무결성 검증</a:t>
+            </a:r>
+          </a:p>
+        </p:txBody>
+      </p:sp>
+      <p:sp>
+        <p:nvSpPr>
+          <p:cNvPr id="24" name="TextBox 23"/>
+          <p:cNvSpPr txBox="1"/>
+          <p:nvPr/>
+        </p:nvSpPr>
+        <p:spPr>
+          <a:xfrm>
+            <a:off x="8391525" y="4662487"/>
+            <a:ext cx="2876550" cy="457200"/>
           </a:xfrm>
           <a:prstGeom prst="rect">
             <a:avLst/>
@@ -5819,83 +6934,22 @@
           <a:p>
             <a:pPr algn="l"/>
             <a:r>
+              <a:rPr b="1" sz="1350" i="0" u="none">
+                <a:solidFill>
+                  <a:srgbClr val="334155"/>
+                </a:solidFill>
+                <a:latin typeface="Noto Sans KR"/>
+              </a:rPr>
+              <a:t>운영 배포:</a:t>
+            </a:r>
+            <a:r>
               <a:rPr b="0" sz="1350" i="0" u="none">
                 <a:solidFill>
-                  <a:srgbClr val="475569"/>
-                </a:solidFill>
-                <a:latin typeface="Noto Sans KR"/>
-              </a:rPr>
-              <a:t>소스와 설정을 병합하여 개발 서버 배포 및 자동화 테스트 검증.</a:t>
-            </a:r>
-          </a:p>
-        </p:txBody>
-      </p:sp>
-      <p:sp>
-        <p:nvSpPr>
-          <p:cNvPr id="18" name="TextBox 17"/>
-          <p:cNvSpPr txBox="1"/>
-          <p:nvPr/>
-        </p:nvSpPr>
-        <p:spPr>
-          <a:xfrm>
-            <a:off x="9191625" y="3581400"/>
-            <a:ext cx="2260282" cy="228600"/>
-          </a:xfrm>
-          <a:prstGeom prst="rect">
-            <a:avLst/>
-          </a:prstGeom>
-          <a:noFill/>
-        </p:spPr>
-        <p:txBody>
-          <a:bodyPr wrap="square" lIns="0" rIns="0" tIns="0" bIns="0" anchor="t">
-            <a:spAutoFit/>
-          </a:bodyPr>
-          <a:lstStyle/>
-          <a:p>
-            <a:pPr algn="l"/>
-            <a:r>
-              <a:rPr b="1" sz="1350" i="0" u="none">
-                <a:solidFill>
-                  <a:srgbClr val="0F172A"/>
-                </a:solidFill>
-                <a:latin typeface="Noto Sans KR"/>
-              </a:rPr>
-              <a:t>master 운영 배포</a:t>
-            </a:r>
-          </a:p>
-        </p:txBody>
-      </p:sp>
-      <p:sp>
-        <p:nvSpPr>
-          <p:cNvPr id="19" name="TextBox 18"/>
-          <p:cNvSpPr txBox="1"/>
-          <p:nvPr/>
-        </p:nvSpPr>
-        <p:spPr>
-          <a:xfrm>
-            <a:off x="9191625" y="3886200"/>
-            <a:ext cx="2152650" cy="685800"/>
-          </a:xfrm>
-          <a:prstGeom prst="rect">
-            <a:avLst/>
-          </a:prstGeom>
-          <a:noFill/>
-        </p:spPr>
-        <p:txBody>
-          <a:bodyPr wrap="square" lIns="0" rIns="0" tIns="0" bIns="0" anchor="t">
-            <a:spAutoFit/>
-          </a:bodyPr>
-          <a:lstStyle/>
-          <a:p>
-            <a:pPr algn="l"/>
-            <a:r>
-              <a:rPr b="0" sz="1350" i="0" u="none">
-                <a:solidFill>
-                  <a:srgbClr val="475569"/>
-                </a:solidFill>
-                <a:latin typeface="Noto Sans KR"/>
-              </a:rPr>
-              <a:t>테스트 완료된 Commit 및 설정 최종 병합 후 운영 서버 배포.</a:t>
+                  <a:srgbClr val="334155"/>
+                </a:solidFill>
+                <a:latin typeface="Noto Sans KR"/>
+              </a:rPr>
+              <a:t> 검증 완료 commit master 병합 및 Release</a:t>
             </a:r>
           </a:p>
         </p:txBody>
@@ -5942,87 +6996,17 @@
         </p:blipFill>
         <p:spPr>
           <a:xfrm>
-            <a:off x="609600" y="1362075"/>
-            <a:ext cx="10972800" cy="5000625"/>
+            <a:off x="609600" y="1285875"/>
+            <a:ext cx="10972800" cy="5114925"/>
           </a:xfrm>
           <a:prstGeom prst="rect">
             <a:avLst/>
           </a:prstGeom>
         </p:spPr>
       </p:pic>
-      <p:sp>
-        <p:nvSpPr>
-          <p:cNvPr id="3" name="TextBox 2"/>
-          <p:cNvSpPr txBox="1"/>
-          <p:nvPr/>
-        </p:nvSpPr>
-        <p:spPr>
-          <a:xfrm>
-            <a:off x="609600" y="495300"/>
-            <a:ext cx="10972800" cy="600075"/>
-          </a:xfrm>
-          <a:prstGeom prst="rect">
-            <a:avLst/>
-          </a:prstGeom>
-          <a:noFill/>
-        </p:spPr>
-        <p:txBody>
-          <a:bodyPr wrap="square" lIns="0" rIns="0" tIns="0" bIns="0" anchor="t">
-            <a:spAutoFit/>
-          </a:bodyPr>
-          <a:lstStyle/>
-          <a:p>
-            <a:pPr algn="l"/>
-            <a:r>
-              <a:rPr b="1" sz="1200" i="0" u="none">
-                <a:solidFill>
-                  <a:srgbClr val="2563EB"/>
-                </a:solidFill>
-                <a:latin typeface="Noto Sans KR"/>
-              </a:rPr>
-              <a:t>ARCHITECTURE DIAGRAM 01</a:t>
-            </a:r>
-          </a:p>
-        </p:txBody>
-      </p:sp>
-      <p:sp>
-        <p:nvSpPr>
-          <p:cNvPr id="4" name="TextBox 3"/>
-          <p:cNvSpPr txBox="1"/>
-          <p:nvPr/>
-        </p:nvSpPr>
-        <p:spPr>
-          <a:xfrm>
-            <a:off x="609600" y="704850"/>
-            <a:ext cx="11521440" cy="390525"/>
-          </a:xfrm>
-          <a:prstGeom prst="rect">
-            <a:avLst/>
-          </a:prstGeom>
-          <a:noFill/>
-        </p:spPr>
-        <p:txBody>
-          <a:bodyPr wrap="square" lIns="0" rIns="0" tIns="0" bIns="0" anchor="t">
-            <a:spAutoFit/>
-          </a:bodyPr>
-          <a:lstStyle/>
-          <a:p>
-            <a:pPr algn="l"/>
-            <a:r>
-              <a:rPr b="0" sz="2250" i="0" u="none">
-                <a:solidFill>
-                  <a:srgbClr val="0F172A"/>
-                </a:solidFill>
-                <a:latin typeface="Noto Sans KR ExtraBold"/>
-              </a:rPr>
-              <a:t>바이브 코딩 기반 개발 및 CI/CD 파이프라인 아키텍처</a:t>
-            </a:r>
-          </a:p>
-        </p:txBody>
-      </p:sp>
       <p:pic>
         <p:nvPicPr>
-          <p:cNvPr id="5" name="Picture 4" descr="image.png"/>
+          <p:cNvPr id="3" name="Picture 2" descr="image.png"/>
           <p:cNvPicPr>
             <a:picLocks noChangeAspect="1"/>
           </p:cNvPicPr>
@@ -6036,8 +7020,56 @@
         </p:blipFill>
         <p:spPr>
           <a:xfrm>
-            <a:off x="885825" y="1638300"/>
-            <a:ext cx="2958554" cy="952500"/>
+            <a:off x="847725" y="3281362"/>
+            <a:ext cx="10496550" cy="714375"/>
+          </a:xfrm>
+          <a:prstGeom prst="rect">
+            <a:avLst/>
+          </a:prstGeom>
+        </p:spPr>
+      </p:pic>
+      <p:pic>
+        <p:nvPicPr>
+          <p:cNvPr id="4" name="Picture 3" descr="image.png"/>
+          <p:cNvPicPr>
+            <a:picLocks noChangeAspect="1"/>
+          </p:cNvPicPr>
+          <p:nvPr/>
+        </p:nvPicPr>
+        <p:blipFill>
+          <a:blip r:embed="rId4"/>
+          <a:stretch>
+            <a:fillRect/>
+          </a:stretch>
+        </p:blipFill>
+        <p:spPr>
+          <a:xfrm>
+            <a:off x="847725" y="1524000"/>
+            <a:ext cx="2095500" cy="561975"/>
+          </a:xfrm>
+          <a:prstGeom prst="rect">
+            <a:avLst/>
+          </a:prstGeom>
+        </p:spPr>
+      </p:pic>
+      <p:pic>
+        <p:nvPicPr>
+          <p:cNvPr id="5" name="Picture 4" descr="image.png"/>
+          <p:cNvPicPr>
+            <a:picLocks noChangeAspect="1"/>
+          </p:cNvPicPr>
+          <p:nvPr/>
+        </p:nvPicPr>
+        <p:blipFill>
+          <a:blip r:embed="rId5"/>
+          <a:stretch>
+            <a:fillRect/>
+          </a:stretch>
+        </p:blipFill>
+        <p:spPr>
+          <a:xfrm>
+            <a:off x="847725" y="5191125"/>
+            <a:ext cx="3397299" cy="971550"/>
           </a:xfrm>
           <a:prstGeom prst="rect">
             <a:avLst/>
@@ -6053,15 +7085,15 @@
           <p:nvPr/>
         </p:nvPicPr>
         <p:blipFill>
-          <a:blip r:embed="rId4"/>
+          <a:blip r:embed="rId6"/>
           <a:stretch>
             <a:fillRect/>
           </a:stretch>
         </p:blipFill>
         <p:spPr>
           <a:xfrm>
-            <a:off x="4034879" y="2028825"/>
-            <a:ext cx="133498" cy="171450"/>
+            <a:off x="4397424" y="5191125"/>
+            <a:ext cx="3397299" cy="971550"/>
           </a:xfrm>
           <a:prstGeom prst="rect">
             <a:avLst/>
@@ -6077,69 +7109,91 @@
           <p:nvPr/>
         </p:nvPicPr>
         <p:blipFill>
-          <a:blip r:embed="rId5"/>
+          <a:blip r:embed="rId7"/>
           <a:stretch>
             <a:fillRect/>
           </a:stretch>
         </p:blipFill>
         <p:spPr>
           <a:xfrm>
-            <a:off x="4358878" y="1647825"/>
-            <a:ext cx="2958554" cy="933450"/>
+            <a:off x="7947124" y="5191125"/>
+            <a:ext cx="3397299" cy="971550"/>
           </a:xfrm>
           <a:prstGeom prst="rect">
             <a:avLst/>
           </a:prstGeom>
         </p:spPr>
       </p:pic>
-      <p:pic>
-        <p:nvPicPr>
-          <p:cNvPr id="8" name="Picture 7" descr="image.png"/>
-          <p:cNvPicPr>
-            <a:picLocks noChangeAspect="1"/>
-          </p:cNvPicPr>
-          <p:nvPr/>
-        </p:nvPicPr>
-        <p:blipFill>
-          <a:blip r:embed="rId4"/>
-          <a:stretch>
-            <a:fillRect/>
-          </a:stretch>
-        </p:blipFill>
-        <p:spPr>
-          <a:xfrm>
-            <a:off x="7507932" y="2028825"/>
-            <a:ext cx="133498" cy="171450"/>
-          </a:xfrm>
-          <a:prstGeom prst="rect">
-            <a:avLst/>
-          </a:prstGeom>
-        </p:spPr>
-      </p:pic>
-      <p:pic>
-        <p:nvPicPr>
-          <p:cNvPr id="9" name="Picture 8" descr="image.png"/>
-          <p:cNvPicPr>
-            <a:picLocks noChangeAspect="1"/>
-          </p:cNvPicPr>
-          <p:nvPr/>
-        </p:nvPicPr>
-        <p:blipFill>
-          <a:blip r:embed="rId6"/>
-          <a:stretch>
-            <a:fillRect/>
-          </a:stretch>
-        </p:blipFill>
-        <p:spPr>
-          <a:xfrm>
-            <a:off x="7831931" y="1652587"/>
-            <a:ext cx="3474094" cy="923925"/>
-          </a:xfrm>
-          <a:prstGeom prst="rect">
-            <a:avLst/>
-          </a:prstGeom>
-        </p:spPr>
-      </p:pic>
+      <p:sp>
+        <p:nvSpPr>
+          <p:cNvPr id="8" name="TextBox 7"/>
+          <p:cNvSpPr txBox="1"/>
+          <p:nvPr/>
+        </p:nvSpPr>
+        <p:spPr>
+          <a:xfrm>
+            <a:off x="609600" y="457200"/>
+            <a:ext cx="10972800" cy="600075"/>
+          </a:xfrm>
+          <a:prstGeom prst="rect">
+            <a:avLst/>
+          </a:prstGeom>
+          <a:noFill/>
+        </p:spPr>
+        <p:txBody>
+          <a:bodyPr wrap="square" lIns="0" rIns="0" tIns="0" bIns="0" anchor="t">
+            <a:spAutoFit/>
+          </a:bodyPr>
+          <a:lstStyle/>
+          <a:p>
+            <a:pPr algn="l"/>
+            <a:r>
+              <a:rPr b="1" sz="1200" i="0" u="none">
+                <a:solidFill>
+                  <a:srgbClr val="2563EB"/>
+                </a:solidFill>
+                <a:latin typeface="Noto Sans KR"/>
+              </a:rPr>
+              <a:t>ARCHITECTURE DIAGRAM 01</a:t>
+            </a:r>
+          </a:p>
+        </p:txBody>
+      </p:sp>
+      <p:sp>
+        <p:nvSpPr>
+          <p:cNvPr id="9" name="TextBox 8"/>
+          <p:cNvSpPr txBox="1"/>
+          <p:nvPr/>
+        </p:nvSpPr>
+        <p:spPr>
+          <a:xfrm>
+            <a:off x="609600" y="666750"/>
+            <a:ext cx="11521440" cy="390525"/>
+          </a:xfrm>
+          <a:prstGeom prst="rect">
+            <a:avLst/>
+          </a:prstGeom>
+          <a:noFill/>
+        </p:spPr>
+        <p:txBody>
+          <a:bodyPr wrap="square" lIns="0" rIns="0" tIns="0" bIns="0" anchor="t">
+            <a:spAutoFit/>
+          </a:bodyPr>
+          <a:lstStyle/>
+          <a:p>
+            <a:pPr algn="l"/>
+            <a:r>
+              <a:rPr b="0" sz="2250" i="0" u="none">
+                <a:solidFill>
+                  <a:srgbClr val="0F172A"/>
+                </a:solidFill>
+                <a:latin typeface="Noto Sans KR ExtraBold"/>
+              </a:rPr>
+              <a:t>바이브 코딩 &amp; CI/CD 개발 파이프라인 구성도</a:t>
+            </a:r>
+          </a:p>
+        </p:txBody>
+      </p:sp>
       <p:pic>
         <p:nvPicPr>
           <p:cNvPr id="10" name="Picture 9" descr="image.png"/>
@@ -6149,15 +7203,15 @@
           <p:nvPr/>
         </p:nvPicPr>
         <p:blipFill>
-          <a:blip r:embed="rId7"/>
+          <a:blip r:embed="rId8"/>
           <a:stretch>
             <a:fillRect/>
           </a:stretch>
         </p:blipFill>
         <p:spPr>
           <a:xfrm>
-            <a:off x="6014442" y="3676650"/>
-            <a:ext cx="163115" cy="209550"/>
+            <a:off x="3381523" y="1590675"/>
+            <a:ext cx="7962751" cy="428625"/>
           </a:xfrm>
           <a:prstGeom prst="rect">
             <a:avLst/>
@@ -6173,15 +7227,15 @@
           <p:nvPr/>
         </p:nvPicPr>
         <p:blipFill>
-          <a:blip r:embed="rId8"/>
+          <a:blip r:embed="rId9"/>
           <a:stretch>
             <a:fillRect/>
           </a:stretch>
         </p:blipFill>
         <p:spPr>
           <a:xfrm>
-            <a:off x="885825" y="4972050"/>
-            <a:ext cx="3130450" cy="1114425"/>
+            <a:off x="6021883" y="2583656"/>
+            <a:ext cx="148232" cy="190500"/>
           </a:xfrm>
           <a:prstGeom prst="rect">
             <a:avLst/>
@@ -6197,15 +7251,15 @@
           <p:nvPr/>
         </p:nvPicPr>
         <p:blipFill>
-          <a:blip r:embed="rId4"/>
+          <a:blip r:embed="rId9"/>
           <a:stretch>
             <a:fillRect/>
           </a:stretch>
         </p:blipFill>
         <p:spPr>
           <a:xfrm>
-            <a:off x="4206775" y="5443537"/>
-            <a:ext cx="133498" cy="171450"/>
+            <a:off x="6021883" y="4493418"/>
+            <a:ext cx="148232" cy="190500"/>
           </a:xfrm>
           <a:prstGeom prst="rect">
             <a:avLst/>
@@ -6221,54 +7275,6 @@
           <p:nvPr/>
         </p:nvPicPr>
         <p:blipFill>
-          <a:blip r:embed="rId9"/>
-          <a:stretch>
-            <a:fillRect/>
-          </a:stretch>
-        </p:blipFill>
-        <p:spPr>
-          <a:xfrm>
-            <a:off x="4530774" y="4972050"/>
-            <a:ext cx="3130450" cy="1114425"/>
-          </a:xfrm>
-          <a:prstGeom prst="rect">
-            <a:avLst/>
-          </a:prstGeom>
-        </p:spPr>
-      </p:pic>
-      <p:pic>
-        <p:nvPicPr>
-          <p:cNvPr id="14" name="Picture 13" descr="image.png"/>
-          <p:cNvPicPr>
-            <a:picLocks noChangeAspect="1"/>
-          </p:cNvPicPr>
-          <p:nvPr/>
-        </p:nvPicPr>
-        <p:blipFill>
-          <a:blip r:embed="rId4"/>
-          <a:stretch>
-            <a:fillRect/>
-          </a:stretch>
-        </p:blipFill>
-        <p:spPr>
-          <a:xfrm>
-            <a:off x="7851725" y="5443537"/>
-            <a:ext cx="133498" cy="171450"/>
-          </a:xfrm>
-          <a:prstGeom prst="rect">
-            <a:avLst/>
-          </a:prstGeom>
-        </p:spPr>
-      </p:pic>
-      <p:pic>
-        <p:nvPicPr>
-          <p:cNvPr id="15" name="Picture 14" descr="image.png"/>
-          <p:cNvPicPr>
-            <a:picLocks noChangeAspect="1"/>
-          </p:cNvPicPr>
-          <p:nvPr/>
-        </p:nvPicPr>
-        <p:blipFill>
           <a:blip r:embed="rId10"/>
           <a:stretch>
             <a:fillRect/>
@@ -6276,17 +7282,122 @@
         </p:blipFill>
         <p:spPr>
           <a:xfrm>
-            <a:off x="8175724" y="4972050"/>
-            <a:ext cx="3130450" cy="1114425"/>
+            <a:off x="3095625" y="1714500"/>
+            <a:ext cx="133498" cy="171450"/>
           </a:xfrm>
           <a:prstGeom prst="rect">
             <a:avLst/>
           </a:prstGeom>
         </p:spPr>
       </p:pic>
+      <p:sp>
+        <p:nvSpPr>
+          <p:cNvPr id="14" name="TextBox 13"/>
+          <p:cNvSpPr txBox="1"/>
+          <p:nvPr/>
+        </p:nvSpPr>
+        <p:spPr>
+          <a:xfrm>
+            <a:off x="4178349" y="1714500"/>
+            <a:ext cx="1470124" cy="180975"/>
+          </a:xfrm>
+          <a:prstGeom prst="rect">
+            <a:avLst/>
+          </a:prstGeom>
+          <a:noFill/>
+        </p:spPr>
+        <p:txBody>
+          <a:bodyPr wrap="square" lIns="168324" rIns="0" tIns="0" bIns="0" anchor="t">
+            <a:spAutoFit/>
+          </a:bodyPr>
+          <a:lstStyle/>
+          <a:p>
+            <a:pPr algn="l"/>
+            <a:r>
+              <a:rPr b="0" sz="1125" i="0" u="none">
+                <a:solidFill>
+                  <a:srgbClr val="1E293B"/>
+                </a:solidFill>
+                <a:latin typeface="Noto Sans KR SemiBold"/>
+              </a:rPr>
+              <a:t>Inhouse 프레임워크</a:t>
+            </a:r>
+          </a:p>
+        </p:txBody>
+      </p:sp>
+      <p:sp>
+        <p:nvSpPr>
+          <p:cNvPr id="15" name="TextBox 14"/>
+          <p:cNvSpPr txBox="1"/>
+          <p:nvPr/>
+        </p:nvSpPr>
+        <p:spPr>
+          <a:xfrm>
+            <a:off x="7032575" y="1714500"/>
+            <a:ext cx="922436" cy="180975"/>
+          </a:xfrm>
+          <a:prstGeom prst="rect">
+            <a:avLst/>
+          </a:prstGeom>
+          <a:noFill/>
+        </p:spPr>
+        <p:txBody>
+          <a:bodyPr wrap="square" lIns="168324" rIns="0" tIns="0" bIns="0" anchor="t">
+            <a:spAutoFit/>
+          </a:bodyPr>
+          <a:lstStyle/>
+          <a:p>
+            <a:pPr algn="l"/>
+            <a:r>
+              <a:rPr b="0" sz="1125" i="0" u="none">
+                <a:solidFill>
+                  <a:srgbClr val="1E293B"/>
+                </a:solidFill>
+                <a:latin typeface="Noto Sans KR SemiBold"/>
+              </a:rPr>
+              <a:t>코딩 컨벤션</a:t>
+            </a:r>
+          </a:p>
+        </p:txBody>
+      </p:sp>
+      <p:sp>
+        <p:nvSpPr>
+          <p:cNvPr id="16" name="TextBox 15"/>
+          <p:cNvSpPr txBox="1"/>
+          <p:nvPr/>
+        </p:nvSpPr>
+        <p:spPr>
+          <a:xfrm>
+            <a:off x="9339113" y="1714500"/>
+            <a:ext cx="1208186" cy="180975"/>
+          </a:xfrm>
+          <a:prstGeom prst="rect">
+            <a:avLst/>
+          </a:prstGeom>
+          <a:noFill/>
+        </p:spPr>
+        <p:txBody>
+          <a:bodyPr wrap="square" lIns="168324" rIns="0" tIns="0" bIns="0" anchor="t">
+            <a:spAutoFit/>
+          </a:bodyPr>
+          <a:lstStyle/>
+          <a:p>
+            <a:pPr algn="l"/>
+            <a:r>
+              <a:rPr b="0" sz="1125" i="0" u="none">
+                <a:solidFill>
+                  <a:srgbClr val="1E293B"/>
+                </a:solidFill>
+                <a:latin typeface="Noto Sans KR SemiBold"/>
+              </a:rPr>
+              <a:t>안티패턴 리스트</a:t>
+            </a:r>
+          </a:p>
+        </p:txBody>
+      </p:sp>
       <p:pic>
         <p:nvPicPr>
-          <p:cNvPr id="16" name="Picture 15" descr="image.png"/>
+          <p:cNvPr id="17" name="Picture 16" descr="image.png"/>
           <p:cNvPicPr>
             <a:picLocks noChangeAspect="1"/>
           </p:cNvPicPr>
@@ -6300,8 +7411,8 @@
         </p:blipFill>
         <p:spPr>
           <a:xfrm>
-            <a:off x="2290911" y="1790700"/>
-            <a:ext cx="148232" cy="190500"/>
+            <a:off x="1085850" y="3524250"/>
+            <a:ext cx="177849" cy="228600"/>
           </a:xfrm>
           <a:prstGeom prst="rect">
             <a:avLst/>
@@ -6310,7 +7421,7 @@
       </p:pic>
       <p:pic>
         <p:nvPicPr>
-          <p:cNvPr id="17" name="Picture 16" descr="image.png"/>
+          <p:cNvPr id="18" name="Picture 17" descr="image.png"/>
           <p:cNvPicPr>
             <a:picLocks noChangeAspect="1"/>
           </p:cNvPicPr>
@@ -6324,8 +7435,8 @@
         </p:blipFill>
         <p:spPr>
           <a:xfrm>
-            <a:off x="5763964" y="1800225"/>
-            <a:ext cx="148232" cy="190500"/>
+            <a:off x="8886676" y="3486150"/>
+            <a:ext cx="1203870" cy="304800"/>
           </a:xfrm>
           <a:prstGeom prst="rect">
             <a:avLst/>
@@ -6334,7 +7445,7 @@
       </p:pic>
       <p:pic>
         <p:nvPicPr>
-          <p:cNvPr id="18" name="Picture 17" descr="image.png"/>
+          <p:cNvPr id="19" name="Picture 18" descr="image.png"/>
           <p:cNvPicPr>
             <a:picLocks noChangeAspect="1"/>
           </p:cNvPicPr>
@@ -6348,8 +7459,8 @@
         </p:blipFill>
         <p:spPr>
           <a:xfrm>
-            <a:off x="9494787" y="1804987"/>
-            <a:ext cx="148232" cy="190500"/>
+            <a:off x="10204846" y="3486150"/>
+            <a:ext cx="901303" cy="304800"/>
           </a:xfrm>
           <a:prstGeom prst="rect">
             <a:avLst/>
@@ -6358,105 +7469,70 @@
       </p:pic>
       <p:sp>
         <p:nvSpPr>
-          <p:cNvPr id="19" name="TextBox 18"/>
-          <p:cNvSpPr txBox="1"/>
-          <p:nvPr/>
-        </p:nvSpPr>
-        <p:spPr>
-          <a:xfrm>
-            <a:off x="1076325" y="2038350"/>
-            <a:ext cx="2577554" cy="228600"/>
-          </a:xfrm>
-          <a:prstGeom prst="rect">
-            <a:avLst/>
-          </a:prstGeom>
-          <a:noFill/>
-        </p:spPr>
-        <p:txBody>
-          <a:bodyPr wrap="square" lIns="0" rIns="0" tIns="0" bIns="0" anchor="t">
-            <a:spAutoFit/>
-          </a:bodyPr>
-          <a:lstStyle/>
-          <a:p>
-            <a:pPr algn="ctr"/>
-            <a:r>
-              <a:rPr b="1" sz="1350" i="0" u="none">
-                <a:solidFill>
-                  <a:srgbClr val="FFFFFF"/>
-                </a:solidFill>
-                <a:latin typeface="Noto Sans KR"/>
-              </a:rPr>
-              <a:t>Inhouse 코딩 컨벤션</a:t>
-            </a:r>
-          </a:p>
-        </p:txBody>
-      </p:sp>
-      <p:sp>
-        <p:nvSpPr>
           <p:cNvPr id="20" name="TextBox 19"/>
           <p:cNvSpPr txBox="1"/>
           <p:nvPr/>
         </p:nvSpPr>
         <p:spPr>
           <a:xfrm>
-            <a:off x="1076325" y="2266950"/>
-            <a:ext cx="2577554" cy="171450"/>
-          </a:xfrm>
-          <a:prstGeom prst="rect">
-            <a:avLst/>
-          </a:prstGeom>
-          <a:noFill/>
-        </p:spPr>
-        <p:txBody>
-          <a:bodyPr wrap="square" lIns="0" rIns="0" tIns="0" bIns="0" anchor="t">
-            <a:spAutoFit/>
-          </a:bodyPr>
-          <a:lstStyle/>
-          <a:p>
-            <a:pPr algn="ctr"/>
+            <a:off x="1009650" y="5381625"/>
+            <a:ext cx="3073449" cy="200025"/>
+          </a:xfrm>
+          <a:prstGeom prst="rect">
+            <a:avLst/>
+          </a:prstGeom>
+          <a:noFill/>
+        </p:spPr>
+        <p:txBody>
+          <a:bodyPr wrap="square" lIns="0" rIns="0" tIns="0" bIns="0" anchor="t">
+            <a:spAutoFit/>
+          </a:bodyPr>
+          <a:lstStyle/>
+          <a:p>
+            <a:pPr algn="l"/>
+            <a:r>
+              <a:rPr b="1" sz="1200" i="0" u="none">
+                <a:solidFill>
+                  <a:srgbClr val="0F172A"/>
+                </a:solidFill>
+                <a:latin typeface="Noto Sans KR"/>
+              </a:rPr>
+              <a:t>feature Branch</a:t>
+            </a:r>
+          </a:p>
+        </p:txBody>
+      </p:sp>
+      <p:sp>
+        <p:nvSpPr>
+          <p:cNvPr id="21" name="TextBox 20"/>
+          <p:cNvSpPr txBox="1"/>
+          <p:nvPr/>
+        </p:nvSpPr>
+        <p:spPr>
+          <a:xfrm>
+            <a:off x="1009650" y="5657850"/>
+            <a:ext cx="3073449" cy="342900"/>
+          </a:xfrm>
+          <a:prstGeom prst="rect">
+            <a:avLst/>
+          </a:prstGeom>
+          <a:noFill/>
+        </p:spPr>
+        <p:txBody>
+          <a:bodyPr wrap="square" lIns="0" rIns="0" tIns="0" bIns="0" anchor="t">
+            <a:spAutoFit/>
+          </a:bodyPr>
+          <a:lstStyle/>
+          <a:p>
+            <a:pPr algn="l"/>
             <a:r>
               <a:rPr b="0" sz="1050" i="0" u="none">
                 <a:solidFill>
-                  <a:srgbClr val="94A3B8"/>
-                </a:solidFill>
-                <a:latin typeface="Noto Sans KR"/>
-              </a:rPr>
-              <a:t>Spring 유사 구조 &amp; 안티패턴</a:t>
-            </a:r>
-          </a:p>
-        </p:txBody>
-      </p:sp>
-      <p:sp>
-        <p:nvSpPr>
-          <p:cNvPr id="21" name="TextBox 20"/>
-          <p:cNvSpPr txBox="1"/>
-          <p:nvPr/>
-        </p:nvSpPr>
-        <p:spPr>
-          <a:xfrm>
-            <a:off x="4549378" y="2047875"/>
-            <a:ext cx="2577554" cy="228600"/>
-          </a:xfrm>
-          <a:prstGeom prst="rect">
-            <a:avLst/>
-          </a:prstGeom>
-          <a:noFill/>
-        </p:spPr>
-        <p:txBody>
-          <a:bodyPr wrap="square" lIns="0" rIns="0" tIns="0" bIns="0" anchor="t">
-            <a:spAutoFit/>
-          </a:bodyPr>
-          <a:lstStyle/>
-          <a:p>
-            <a:pPr algn="ctr"/>
-            <a:r>
-              <a:rPr b="1" sz="1350" i="0" u="none">
-                <a:solidFill>
-                  <a:srgbClr val="FFFFFF"/>
-                </a:solidFill>
-                <a:latin typeface="Noto Sans KR"/>
-              </a:rPr>
-              <a:t>3대 설계서 표준 양식</a:t>
+                  <a:srgbClr val="64748B"/>
+                </a:solidFill>
+                <a:latin typeface="Noto Sans KR"/>
+              </a:rPr>
+              <a:t>테스트 미만족 시 산출물 단계 회귀 및 feature 브랜치 삭제</a:t>
             </a:r>
           </a:p>
         </p:txBody>
@@ -6469,64 +7545,64 @@
         </p:nvSpPr>
         <p:spPr>
           <a:xfrm>
-            <a:off x="4549378" y="2276475"/>
-            <a:ext cx="2577554" cy="152400"/>
-          </a:xfrm>
-          <a:prstGeom prst="rect">
-            <a:avLst/>
-          </a:prstGeom>
-          <a:noFill/>
-        </p:spPr>
-        <p:txBody>
-          <a:bodyPr wrap="square" lIns="0" rIns="0" tIns="0" bIns="0" anchor="t">
-            <a:spAutoFit/>
-          </a:bodyPr>
-          <a:lstStyle/>
-          <a:p>
-            <a:pPr algn="ctr"/>
+            <a:off x="4559349" y="5381625"/>
+            <a:ext cx="3073449" cy="200025"/>
+          </a:xfrm>
+          <a:prstGeom prst="rect">
+            <a:avLst/>
+          </a:prstGeom>
+          <a:noFill/>
+        </p:spPr>
+        <p:txBody>
+          <a:bodyPr wrap="square" lIns="0" rIns="0" tIns="0" bIns="0" anchor="t">
+            <a:spAutoFit/>
+          </a:bodyPr>
+          <a:lstStyle/>
+          <a:p>
+            <a:pPr algn="l"/>
+            <a:r>
+              <a:rPr b="1" sz="1200" i="0" u="none">
+                <a:solidFill>
+                  <a:srgbClr val="0F172A"/>
+                </a:solidFill>
+                <a:latin typeface="Noto Sans KR"/>
+              </a:rPr>
+              <a:t>develop Branch</a:t>
+            </a:r>
+          </a:p>
+        </p:txBody>
+      </p:sp>
+      <p:sp>
+        <p:nvSpPr>
+          <p:cNvPr id="23" name="TextBox 22"/>
+          <p:cNvSpPr txBox="1"/>
+          <p:nvPr/>
+        </p:nvSpPr>
+        <p:spPr>
+          <a:xfrm>
+            <a:off x="4559349" y="5657850"/>
+            <a:ext cx="3073449" cy="342900"/>
+          </a:xfrm>
+          <a:prstGeom prst="rect">
+            <a:avLst/>
+          </a:prstGeom>
+          <a:noFill/>
+        </p:spPr>
+        <p:txBody>
+          <a:bodyPr wrap="square" lIns="0" rIns="0" tIns="0" bIns="0" anchor="t">
+            <a:spAutoFit/>
+          </a:bodyPr>
+          <a:lstStyle/>
+          <a:p>
+            <a:pPr algn="l"/>
             <a:r>
               <a:rPr b="0" sz="1050" i="0" u="none">
                 <a:solidFill>
-                  <a:srgbClr val="94A3B8"/>
-                </a:solidFill>
-                <a:latin typeface="Noto Sans KR"/>
-              </a:rPr>
-              <a:t>UI/UX, Backend, Interface</a:t>
-            </a:r>
-          </a:p>
-        </p:txBody>
-      </p:sp>
-      <p:sp>
-        <p:nvSpPr>
-          <p:cNvPr id="23" name="TextBox 22"/>
-          <p:cNvSpPr txBox="1"/>
-          <p:nvPr/>
-        </p:nvSpPr>
-        <p:spPr>
-          <a:xfrm>
-            <a:off x="8022431" y="2052637"/>
-            <a:ext cx="3093094" cy="200025"/>
-          </a:xfrm>
-          <a:prstGeom prst="rect">
-            <a:avLst/>
-          </a:prstGeom>
-          <a:noFill/>
-        </p:spPr>
-        <p:txBody>
-          <a:bodyPr wrap="square" lIns="0" rIns="0" tIns="0" bIns="0" anchor="t">
-            <a:spAutoFit/>
-          </a:bodyPr>
-          <a:lstStyle/>
-          <a:p>
-            <a:pPr algn="ctr"/>
-            <a:r>
-              <a:rPr b="1" sz="1350" i="0" u="none">
-                <a:solidFill>
-                  <a:srgbClr val="FFFFFF"/>
-                </a:solidFill>
-                <a:latin typeface="Noto Sans KR"/>
-              </a:rPr>
-              <a:t>Vibe Coding AI Agent</a:t>
+                  <a:srgbClr val="64748B"/>
+                </a:solidFill>
+                <a:latin typeface="Noto Sans KR"/>
+              </a:rPr>
+              <a:t>소스+설정 병합 배포, 타 시스템 연계 및 통합 테스트</a:t>
             </a:r>
           </a:p>
         </p:txBody>
@@ -6539,141 +7615,71 @@
         </p:nvSpPr>
         <p:spPr>
           <a:xfrm>
-            <a:off x="8022431" y="2252662"/>
-            <a:ext cx="3093094" cy="171450"/>
-          </a:xfrm>
-          <a:prstGeom prst="rect">
-            <a:avLst/>
-          </a:prstGeom>
-          <a:noFill/>
-        </p:spPr>
-        <p:txBody>
-          <a:bodyPr wrap="square" lIns="0" rIns="0" tIns="0" bIns="0" anchor="t">
-            <a:spAutoFit/>
-          </a:bodyPr>
-          <a:lstStyle/>
-          <a:p>
-            <a:pPr algn="ctr"/>
+            <a:off x="8109049" y="5381625"/>
+            <a:ext cx="3073449" cy="200025"/>
+          </a:xfrm>
+          <a:prstGeom prst="rect">
+            <a:avLst/>
+          </a:prstGeom>
+          <a:noFill/>
+        </p:spPr>
+        <p:txBody>
+          <a:bodyPr wrap="square" lIns="0" rIns="0" tIns="0" bIns="0" anchor="t">
+            <a:spAutoFit/>
+          </a:bodyPr>
+          <a:lstStyle/>
+          <a:p>
+            <a:pPr algn="l"/>
+            <a:r>
+              <a:rPr b="1" sz="1200" i="0" u="none">
+                <a:solidFill>
+                  <a:srgbClr val="0F172A"/>
+                </a:solidFill>
+                <a:latin typeface="Noto Sans KR"/>
+              </a:rPr>
+              <a:t>master Branch</a:t>
+            </a:r>
+          </a:p>
+        </p:txBody>
+      </p:sp>
+      <p:sp>
+        <p:nvSpPr>
+          <p:cNvPr id="25" name="TextBox 24"/>
+          <p:cNvSpPr txBox="1"/>
+          <p:nvPr/>
+        </p:nvSpPr>
+        <p:spPr>
+          <a:xfrm>
+            <a:off x="8109049" y="5657850"/>
+            <a:ext cx="3073449" cy="323850"/>
+          </a:xfrm>
+          <a:prstGeom prst="rect">
+            <a:avLst/>
+          </a:prstGeom>
+          <a:noFill/>
+        </p:spPr>
+        <p:txBody>
+          <a:bodyPr wrap="square" lIns="0" rIns="0" tIns="0" bIns="0" anchor="t">
+            <a:spAutoFit/>
+          </a:bodyPr>
+          <a:lstStyle/>
+          <a:p>
+            <a:pPr algn="l"/>
             <a:r>
               <a:rPr b="0" sz="1050" i="0" u="none">
                 <a:solidFill>
-                  <a:srgbClr val="BFDBFE"/>
-                </a:solidFill>
-                <a:latin typeface="Noto Sans KR"/>
-              </a:rPr>
-              <a:t>소스코드 &amp; 산출물 자동 생성</a:t>
-            </a:r>
-          </a:p>
-        </p:txBody>
-      </p:sp>
-      <p:sp>
-        <p:nvSpPr>
-          <p:cNvPr id="25" name="TextBox 24"/>
-          <p:cNvSpPr txBox="1"/>
-          <p:nvPr/>
-        </p:nvSpPr>
-        <p:spPr>
-          <a:xfrm>
-            <a:off x="1076325" y="5438775"/>
-            <a:ext cx="2749450" cy="457200"/>
-          </a:xfrm>
-          <a:prstGeom prst="rect">
-            <a:avLst/>
-          </a:prstGeom>
-          <a:noFill/>
-        </p:spPr>
-        <p:txBody>
-          <a:bodyPr wrap="square" lIns="0" rIns="0" tIns="0" bIns="0" anchor="t">
-            <a:spAutoFit/>
-          </a:bodyPr>
-          <a:lstStyle/>
-          <a:p>
-            <a:pPr algn="l"/>
-            <a:r>
-              <a:rPr b="0" sz="1350" i="0" u="none">
-                <a:solidFill>
-                  <a:srgbClr val="475569"/>
-                </a:solidFill>
-                <a:latin typeface="Noto Sans KR"/>
-              </a:rPr>
-              <a:t>개별 기능 검증 및 산출물 단위 Commit 생성 (실패 시 회귀 후 삭제)</a:t>
-            </a:r>
-          </a:p>
-        </p:txBody>
-      </p:sp>
-      <p:sp>
-        <p:nvSpPr>
-          <p:cNvPr id="26" name="TextBox 25"/>
-          <p:cNvSpPr txBox="1"/>
-          <p:nvPr/>
-        </p:nvSpPr>
-        <p:spPr>
-          <a:xfrm>
-            <a:off x="4721274" y="5438775"/>
-            <a:ext cx="2749450" cy="457200"/>
-          </a:xfrm>
-          <a:prstGeom prst="rect">
-            <a:avLst/>
-          </a:prstGeom>
-          <a:noFill/>
-        </p:spPr>
-        <p:txBody>
-          <a:bodyPr wrap="square" lIns="0" rIns="0" tIns="0" bIns="0" anchor="t">
-            <a:spAutoFit/>
-          </a:bodyPr>
-          <a:lstStyle/>
-          <a:p>
-            <a:pPr algn="l"/>
-            <a:r>
-              <a:rPr b="0" sz="1350" i="0" u="none">
-                <a:solidFill>
-                  <a:srgbClr val="475569"/>
-                </a:solidFill>
-                <a:latin typeface="Noto Sans KR"/>
-              </a:rPr>
-              <a:t>소스/설정 통합 후 개발 서버 자동 배포 및 연계 테스트 수행</a:t>
-            </a:r>
-          </a:p>
-        </p:txBody>
-      </p:sp>
-      <p:sp>
-        <p:nvSpPr>
-          <p:cNvPr id="27" name="TextBox 26"/>
-          <p:cNvSpPr txBox="1"/>
-          <p:nvPr/>
-        </p:nvSpPr>
-        <p:spPr>
-          <a:xfrm>
-            <a:off x="8366224" y="5438775"/>
-            <a:ext cx="2749450" cy="457200"/>
-          </a:xfrm>
-          <a:prstGeom prst="rect">
-            <a:avLst/>
-          </a:prstGeom>
-          <a:noFill/>
-        </p:spPr>
-        <p:txBody>
-          <a:bodyPr wrap="square" lIns="0" rIns="0" tIns="0" bIns="0" anchor="t">
-            <a:spAutoFit/>
-          </a:bodyPr>
-          <a:lstStyle/>
-          <a:p>
-            <a:pPr algn="l"/>
-            <a:r>
-              <a:rPr b="0" sz="1350" i="0" u="none">
-                <a:solidFill>
-                  <a:srgbClr val="475569"/>
-                </a:solidFill>
-                <a:latin typeface="Noto Sans KR"/>
-              </a:rPr>
-              <a:t>Merge 승인 통제 후 운영 환경 배포 (Direct Commit 차단)</a:t>
+                  <a:srgbClr val="64748B"/>
+                </a:solidFill>
+                <a:latin typeface="Noto Sans KR"/>
+              </a:rPr>
+              <a:t>검증 완료 commit 승인 병합 및 운영 서버 안정적 Release</a:t>
             </a:r>
           </a:p>
         </p:txBody>
       </p:sp>
       <p:pic>
         <p:nvPicPr>
-          <p:cNvPr id="28" name="Picture 27" descr="image.png"/>
+          <p:cNvPr id="26" name="Picture 25" descr="image.png"/>
           <p:cNvPicPr>
             <a:picLocks noChangeAspect="1"/>
           </p:cNvPicPr>
@@ -6687,8 +7693,8 @@
         </p:blipFill>
         <p:spPr>
           <a:xfrm>
-            <a:off x="1076325" y="5186362"/>
-            <a:ext cx="118616" cy="152400"/>
+            <a:off x="4178349" y="1733550"/>
+            <a:ext cx="111174" cy="142875"/>
           </a:xfrm>
           <a:prstGeom prst="rect">
             <a:avLst/>
@@ -6697,7 +7703,7 @@
       </p:pic>
       <p:pic>
         <p:nvPicPr>
-          <p:cNvPr id="29" name="Picture 28" descr="image.png"/>
+          <p:cNvPr id="27" name="Picture 26" descr="image.png"/>
           <p:cNvPicPr>
             <a:picLocks noChangeAspect="1"/>
           </p:cNvPicPr>
@@ -6711,8 +7717,8 @@
         </p:blipFill>
         <p:spPr>
           <a:xfrm>
-            <a:off x="4721274" y="5186362"/>
-            <a:ext cx="118616" cy="152400"/>
+            <a:off x="7032575" y="1733550"/>
+            <a:ext cx="111174" cy="142875"/>
           </a:xfrm>
           <a:prstGeom prst="rect">
             <a:avLst/>
@@ -6721,7 +7727,101 @@
       </p:pic>
       <p:pic>
         <p:nvPicPr>
-          <p:cNvPr id="30" name="Picture 29" descr="image.png"/>
+          <p:cNvPr id="28" name="Picture 27" descr="image.png"/>
+          <p:cNvPicPr>
+            <a:picLocks noChangeAspect="1"/>
+          </p:cNvPicPr>
+          <p:nvPr/>
+        </p:nvPicPr>
+        <p:blipFill>
+          <a:blip r:embed="rId15"/>
+          <a:stretch>
+            <a:fillRect/>
+          </a:stretch>
+        </p:blipFill>
+        <p:spPr>
+          <a:xfrm>
+            <a:off x="9339113" y="1733550"/>
+            <a:ext cx="111174" cy="142875"/>
+          </a:xfrm>
+          <a:prstGeom prst="rect">
+            <a:avLst/>
+          </a:prstGeom>
+        </p:spPr>
+      </p:pic>
+      <p:sp>
+        <p:nvSpPr>
+          <p:cNvPr id="29" name="TextBox 28"/>
+          <p:cNvSpPr txBox="1"/>
+          <p:nvPr/>
+        </p:nvSpPr>
+        <p:spPr>
+          <a:xfrm>
+            <a:off x="1377999" y="3443287"/>
+            <a:ext cx="3111638" cy="219075"/>
+          </a:xfrm>
+          <a:prstGeom prst="rect">
+            <a:avLst/>
+          </a:prstGeom>
+          <a:noFill/>
+        </p:spPr>
+        <p:txBody>
+          <a:bodyPr wrap="square" lIns="0" rIns="0" tIns="0" bIns="0" anchor="t">
+            <a:spAutoFit/>
+          </a:bodyPr>
+          <a:lstStyle/>
+          <a:p>
+            <a:pPr algn="l"/>
+            <a:r>
+              <a:rPr b="1" sz="1275" i="0" u="none">
+                <a:solidFill>
+                  <a:srgbClr val="0F172A"/>
+                </a:solidFill>
+                <a:latin typeface="Noto Sans KR"/>
+              </a:rPr>
+              <a:t>AI Agent 바이브 코딩 엔진</a:t>
+            </a:r>
+          </a:p>
+        </p:txBody>
+      </p:sp>
+      <p:sp>
+        <p:nvSpPr>
+          <p:cNvPr id="30" name="TextBox 29"/>
+          <p:cNvSpPr txBox="1"/>
+          <p:nvPr/>
+        </p:nvSpPr>
+        <p:spPr>
+          <a:xfrm>
+            <a:off x="1377999" y="3662362"/>
+            <a:ext cx="2963465" cy="171450"/>
+          </a:xfrm>
+          <a:prstGeom prst="rect">
+            <a:avLst/>
+          </a:prstGeom>
+          <a:noFill/>
+        </p:spPr>
+        <p:txBody>
+          <a:bodyPr wrap="square" lIns="0" rIns="0" tIns="0" bIns="0" anchor="t">
+            <a:spAutoFit/>
+          </a:bodyPr>
+          <a:lstStyle/>
+          <a:p>
+            <a:pPr algn="l"/>
+            <a:r>
+              <a:rPr b="0" sz="1050" i="0" u="none">
+                <a:solidFill>
+                  <a:srgbClr val="475569"/>
+                </a:solidFill>
+                <a:latin typeface="Noto Sans KR"/>
+              </a:rPr>
+              <a:t>산출물 변경 이력 단위 소스코드 및 커밋 자동 생성</a:t>
+            </a:r>
+          </a:p>
+        </p:txBody>
+      </p:sp>
+      <p:pic>
+        <p:nvPicPr>
+          <p:cNvPr id="31" name="Picture 30" descr="image.png"/>
           <p:cNvPicPr>
             <a:picLocks noChangeAspect="1"/>
           </p:cNvPicPr>
@@ -6735,119 +7835,62 @@
         </p:blipFill>
         <p:spPr>
           <a:xfrm>
-            <a:off x="8366224" y="5186362"/>
-            <a:ext cx="118616" cy="152400"/>
+            <a:off x="3441650" y="5381625"/>
+            <a:ext cx="641449" cy="200025"/>
           </a:xfrm>
           <a:prstGeom prst="rect">
             <a:avLst/>
           </a:prstGeom>
         </p:spPr>
       </p:pic>
-      <p:sp>
-        <p:nvSpPr>
-          <p:cNvPr id="31" name="TextBox 30"/>
-          <p:cNvSpPr txBox="1"/>
-          <p:nvPr/>
-        </p:nvSpPr>
-        <p:spPr>
-          <a:xfrm>
-            <a:off x="1271141" y="5162550"/>
-            <a:ext cx="1270627" cy="200025"/>
-          </a:xfrm>
-          <a:prstGeom prst="rect">
-            <a:avLst/>
-          </a:prstGeom>
-          <a:noFill/>
-        </p:spPr>
-        <p:txBody>
-          <a:bodyPr wrap="square" lIns="0" rIns="0" tIns="0" bIns="0" anchor="t">
-            <a:spAutoFit/>
-          </a:bodyPr>
-          <a:lstStyle/>
-          <a:p>
-            <a:pPr algn="l"/>
-            <a:r>
-              <a:rPr b="1" sz="1350" i="0" u="none">
-                <a:solidFill>
-                  <a:srgbClr val="0F172A"/>
-                </a:solidFill>
-                <a:latin typeface="Noto Sans KR"/>
-              </a:rPr>
-              <a:t>feature Branch</a:t>
-            </a:r>
-          </a:p>
-        </p:txBody>
-      </p:sp>
-      <p:sp>
-        <p:nvSpPr>
-          <p:cNvPr id="32" name="TextBox 31"/>
-          <p:cNvSpPr txBox="1"/>
-          <p:nvPr/>
-        </p:nvSpPr>
-        <p:spPr>
-          <a:xfrm>
-            <a:off x="4916090" y="5162550"/>
-            <a:ext cx="1340323" cy="200025"/>
-          </a:xfrm>
-          <a:prstGeom prst="rect">
-            <a:avLst/>
-          </a:prstGeom>
-          <a:noFill/>
-        </p:spPr>
-        <p:txBody>
-          <a:bodyPr wrap="square" lIns="0" rIns="0" tIns="0" bIns="0" anchor="t">
-            <a:spAutoFit/>
-          </a:bodyPr>
-          <a:lstStyle/>
-          <a:p>
-            <a:pPr algn="l"/>
-            <a:r>
-              <a:rPr b="1" sz="1350" i="0" u="none">
-                <a:solidFill>
-                  <a:srgbClr val="0F172A"/>
-                </a:solidFill>
-                <a:latin typeface="Noto Sans KR"/>
-              </a:rPr>
-              <a:t>develop (CI/CD)</a:t>
-            </a:r>
-          </a:p>
-        </p:txBody>
-      </p:sp>
-      <p:sp>
-        <p:nvSpPr>
-          <p:cNvPr id="33" name="TextBox 32"/>
-          <p:cNvSpPr txBox="1"/>
-          <p:nvPr/>
-        </p:nvSpPr>
-        <p:spPr>
-          <a:xfrm>
-            <a:off x="8561040" y="5162550"/>
-            <a:ext cx="1170458" cy="200025"/>
-          </a:xfrm>
-          <a:prstGeom prst="rect">
-            <a:avLst/>
-          </a:prstGeom>
-          <a:noFill/>
-        </p:spPr>
-        <p:txBody>
-          <a:bodyPr wrap="square" lIns="0" rIns="0" tIns="0" bIns="0" anchor="t">
-            <a:spAutoFit/>
-          </a:bodyPr>
-          <a:lstStyle/>
-          <a:p>
-            <a:pPr algn="l"/>
-            <a:r>
-              <a:rPr b="1" sz="1350" i="0" u="none">
-                <a:solidFill>
-                  <a:srgbClr val="0F172A"/>
-                </a:solidFill>
-                <a:latin typeface="Noto Sans KR"/>
-              </a:rPr>
-              <a:t>master (Prod)</a:t>
-            </a:r>
-          </a:p>
-        </p:txBody>
-      </p:sp>
+      <p:pic>
+        <p:nvPicPr>
+          <p:cNvPr id="32" name="Picture 31" descr="image.png"/>
+          <p:cNvPicPr>
+            <a:picLocks noChangeAspect="1"/>
+          </p:cNvPicPr>
+          <p:nvPr/>
+        </p:nvPicPr>
+        <p:blipFill>
+          <a:blip r:embed="rId17"/>
+          <a:stretch>
+            <a:fillRect/>
+          </a:stretch>
+        </p:blipFill>
+        <p:spPr>
+          <a:xfrm>
+            <a:off x="6908899" y="5381625"/>
+            <a:ext cx="723900" cy="200025"/>
+          </a:xfrm>
+          <a:prstGeom prst="rect">
+            <a:avLst/>
+          </a:prstGeom>
+        </p:spPr>
+      </p:pic>
+      <p:pic>
+        <p:nvPicPr>
+          <p:cNvPr id="33" name="Picture 32" descr="image.png"/>
+          <p:cNvPicPr>
+            <a:picLocks noChangeAspect="1"/>
+          </p:cNvPicPr>
+          <p:nvPr/>
+        </p:nvPicPr>
+        <p:blipFill>
+          <a:blip r:embed="rId18"/>
+          <a:stretch>
+            <a:fillRect/>
+          </a:stretch>
+        </p:blipFill>
+        <p:spPr>
+          <a:xfrm>
+            <a:off x="10541049" y="5381625"/>
+            <a:ext cx="641449" cy="200025"/>
+          </a:xfrm>
+          <a:prstGeom prst="rect">
+            <a:avLst/>
+          </a:prstGeom>
+        </p:spPr>
+      </p:pic>
     </p:spTree>
   </p:cSld>
   <p:clrMapOvr>
@@ -6857,6 +7900,590 @@
 </file>
 
 <file path=ppt/slides/slide6.xml><?xml version="1.0" encoding="utf-8"?>
+<p:sld xmlns:a="http://schemas.openxmlformats.org/drawingml/2006/main" xmlns:p="http://schemas.openxmlformats.org/presentationml/2006/main" xmlns:r="http://schemas.openxmlformats.org/officeDocument/2006/relationships">
+  <p:cSld>
+    <p:bg>
+      <p:bgPr>
+        <a:solidFill>
+          <a:srgbClr val="F8FAFC"/>
+        </a:solidFill>
+        <a:effectLst/>
+      </p:bgPr>
+    </p:bg>
+    <p:spTree>
+      <p:nvGrpSpPr>
+        <p:cNvPr id="1" name=""/>
+        <p:cNvGrpSpPr/>
+        <p:nvPr/>
+      </p:nvGrpSpPr>
+      <p:grpSpPr/>
+      <p:pic>
+        <p:nvPicPr>
+          <p:cNvPr id="2" name="Picture 1" descr="image.png"/>
+          <p:cNvPicPr>
+            <a:picLocks noChangeAspect="1"/>
+          </p:cNvPicPr>
+          <p:nvPr/>
+        </p:nvPicPr>
+        <p:blipFill>
+          <a:blip r:embed="rId2"/>
+          <a:stretch>
+            <a:fillRect/>
+          </a:stretch>
+        </p:blipFill>
+        <p:spPr>
+          <a:xfrm>
+            <a:off x="609600" y="2465040"/>
+            <a:ext cx="5334000" cy="2880270"/>
+          </a:xfrm>
+          <a:prstGeom prst="rect">
+            <a:avLst/>
+          </a:prstGeom>
+        </p:spPr>
+      </p:pic>
+      <p:pic>
+        <p:nvPicPr>
+          <p:cNvPr id="3" name="Picture 2" descr="image.png"/>
+          <p:cNvPicPr>
+            <a:picLocks noChangeAspect="1"/>
+          </p:cNvPicPr>
+          <p:nvPr/>
+        </p:nvPicPr>
+        <p:blipFill>
+          <a:blip r:embed="rId3"/>
+          <a:stretch>
+            <a:fillRect/>
+          </a:stretch>
+        </p:blipFill>
+        <p:spPr>
+          <a:xfrm>
+            <a:off x="6248400" y="2557462"/>
+            <a:ext cx="5334000" cy="2695575"/>
+          </a:xfrm>
+          <a:prstGeom prst="rect">
+            <a:avLst/>
+          </a:prstGeom>
+        </p:spPr>
+      </p:pic>
+      <p:pic>
+        <p:nvPicPr>
+          <p:cNvPr id="4" name="Picture 3" descr="image.png"/>
+          <p:cNvPicPr>
+            <a:picLocks noChangeAspect="1"/>
+          </p:cNvPicPr>
+          <p:nvPr/>
+        </p:nvPicPr>
+        <p:blipFill>
+          <a:blip r:embed="rId4"/>
+          <a:stretch>
+            <a:fillRect/>
+          </a:stretch>
+        </p:blipFill>
+        <p:spPr>
+          <a:xfrm>
+            <a:off x="923925" y="4268985"/>
+            <a:ext cx="4705350" cy="762000"/>
+          </a:xfrm>
+          <a:prstGeom prst="rect">
+            <a:avLst/>
+          </a:prstGeom>
+        </p:spPr>
+      </p:pic>
+      <p:sp>
+        <p:nvSpPr>
+          <p:cNvPr id="5" name="TextBox 4"/>
+          <p:cNvSpPr txBox="1"/>
+          <p:nvPr/>
+        </p:nvSpPr>
+        <p:spPr>
+          <a:xfrm>
+            <a:off x="609600" y="533400"/>
+            <a:ext cx="10972800" cy="647700"/>
+          </a:xfrm>
+          <a:prstGeom prst="rect">
+            <a:avLst/>
+          </a:prstGeom>
+          <a:noFill/>
+        </p:spPr>
+        <p:txBody>
+          <a:bodyPr wrap="square" lIns="0" rIns="0" tIns="0" bIns="0" anchor="t">
+            <a:spAutoFit/>
+          </a:bodyPr>
+          <a:lstStyle/>
+          <a:p>
+            <a:pPr algn="l"/>
+            <a:r>
+              <a:rPr b="1" sz="1200" i="0" u="none">
+                <a:solidFill>
+                  <a:srgbClr val="2563EB"/>
+                </a:solidFill>
+                <a:latin typeface="Noto Sans KR"/>
+              </a:rPr>
+              <a:t>QUALITY CONTROL</a:t>
+            </a:r>
+          </a:p>
+        </p:txBody>
+      </p:sp>
+      <p:sp>
+        <p:nvSpPr>
+          <p:cNvPr id="6" name="TextBox 5"/>
+          <p:cNvSpPr txBox="1"/>
+          <p:nvPr/>
+        </p:nvSpPr>
+        <p:spPr>
+          <a:xfrm>
+            <a:off x="609600" y="762000"/>
+            <a:ext cx="11521440" cy="419100"/>
+          </a:xfrm>
+          <a:prstGeom prst="rect">
+            <a:avLst/>
+          </a:prstGeom>
+          <a:noFill/>
+        </p:spPr>
+        <p:txBody>
+          <a:bodyPr wrap="square" lIns="0" rIns="0" tIns="0" bIns="0" anchor="t">
+            <a:spAutoFit/>
+          </a:bodyPr>
+          <a:lstStyle/>
+          <a:p>
+            <a:pPr algn="l"/>
+            <a:r>
+              <a:rPr b="0" sz="2400" i="0" u="none">
+                <a:solidFill>
+                  <a:srgbClr val="0F172A"/>
+                </a:solidFill>
+                <a:latin typeface="Noto Sans KR ExtraBold"/>
+              </a:rPr>
+              <a:t>비(非)바이브 코딩 프로젝트 소스 품질 관제</a:t>
+            </a:r>
+          </a:p>
+        </p:txBody>
+      </p:sp>
+      <p:sp>
+        <p:nvSpPr>
+          <p:cNvPr id="7" name="TextBox 6"/>
+          <p:cNvSpPr txBox="1"/>
+          <p:nvPr/>
+        </p:nvSpPr>
+        <p:spPr>
+          <a:xfrm>
+            <a:off x="923925" y="3255615"/>
+            <a:ext cx="4705350" cy="822870"/>
+          </a:xfrm>
+          <a:prstGeom prst="rect">
+            <a:avLst/>
+          </a:prstGeom>
+          <a:noFill/>
+        </p:spPr>
+        <p:txBody>
+          <a:bodyPr wrap="square" lIns="0" rIns="0" tIns="0" bIns="0" anchor="t">
+            <a:spAutoFit/>
+          </a:bodyPr>
+          <a:lstStyle/>
+          <a:p>
+            <a:pPr algn="l">
+              <a:lnSpc>
+                <a:spcPts val="2160"/>
+              </a:lnSpc>
+            </a:pPr>
+            <a:r>
+              <a:rPr b="0" sz="1350" i="0" u="none">
+                <a:solidFill>
+                  <a:srgbClr val="334155"/>
+                </a:solidFill>
+                <a:latin typeface="Noto Sans KR"/>
+              </a:rPr>
+              <a:t>바이브 코딩으로 제작되지 않은 레거시 또는 외부 개발 소스의 경우에도 범용성이 높고 제어가 용이한 Spring 기반 프레임워크 구조로 표준화합니다.</a:t>
+            </a:r>
+          </a:p>
+        </p:txBody>
+      </p:sp>
+      <p:pic>
+        <p:nvPicPr>
+          <p:cNvPr id="8" name="Picture 7" descr="image.png"/>
+          <p:cNvPicPr>
+            <a:picLocks noChangeAspect="1"/>
+          </p:cNvPicPr>
+          <p:nvPr/>
+        </p:nvPicPr>
+        <p:blipFill>
+          <a:blip r:embed="rId5"/>
+          <a:stretch>
+            <a:fillRect/>
+          </a:stretch>
+        </p:blipFill>
+        <p:spPr>
+          <a:xfrm>
+            <a:off x="923925" y="2807940"/>
+            <a:ext cx="177849" cy="228600"/>
+          </a:xfrm>
+          <a:prstGeom prst="rect">
+            <a:avLst/>
+          </a:prstGeom>
+        </p:spPr>
+      </p:pic>
+      <p:sp>
+        <p:nvSpPr>
+          <p:cNvPr id="9" name="TextBox 8"/>
+          <p:cNvSpPr txBox="1"/>
+          <p:nvPr/>
+        </p:nvSpPr>
+        <p:spPr>
+          <a:xfrm>
+            <a:off x="1216074" y="2779365"/>
+            <a:ext cx="3080385" cy="285750"/>
+          </a:xfrm>
+          <a:prstGeom prst="rect">
+            <a:avLst/>
+          </a:prstGeom>
+          <a:noFill/>
+        </p:spPr>
+        <p:txBody>
+          <a:bodyPr wrap="square" lIns="0" rIns="0" tIns="0" bIns="0" anchor="t">
+            <a:spAutoFit/>
+          </a:bodyPr>
+          <a:lstStyle/>
+          <a:p>
+            <a:pPr algn="l"/>
+            <a:r>
+              <a:rPr b="1" sz="1650" i="0" u="none">
+                <a:solidFill>
+                  <a:srgbClr val="0F172A"/>
+                </a:solidFill>
+                <a:latin typeface="Noto Sans KR"/>
+              </a:rPr>
+              <a:t>Spring 베이스 범용 프레임워크</a:t>
+            </a:r>
+          </a:p>
+        </p:txBody>
+      </p:sp>
+      <p:sp>
+        <p:nvSpPr>
+          <p:cNvPr id="10" name="TextBox 9"/>
+          <p:cNvSpPr txBox="1"/>
+          <p:nvPr/>
+        </p:nvSpPr>
+        <p:spPr>
+          <a:xfrm>
+            <a:off x="1085850" y="4430910"/>
+            <a:ext cx="4381500" cy="180975"/>
+          </a:xfrm>
+          <a:prstGeom prst="rect">
+            <a:avLst/>
+          </a:prstGeom>
+          <a:noFill/>
+        </p:spPr>
+        <p:txBody>
+          <a:bodyPr wrap="square" lIns="0" rIns="0" tIns="0" bIns="0" anchor="t">
+            <a:spAutoFit/>
+          </a:bodyPr>
+          <a:lstStyle/>
+          <a:p>
+            <a:pPr algn="l"/>
+            <a:r>
+              <a:rPr b="1" sz="1125" i="0" u="none">
+                <a:solidFill>
+                  <a:srgbClr val="1E40AF"/>
+                </a:solidFill>
+                <a:latin typeface="Noto Sans KR"/>
+              </a:rPr>
+              <a:t>필수 준수 사항</a:t>
+            </a:r>
+          </a:p>
+        </p:txBody>
+      </p:sp>
+      <p:sp>
+        <p:nvSpPr>
+          <p:cNvPr id="11" name="TextBox 10"/>
+          <p:cNvSpPr txBox="1"/>
+          <p:nvPr/>
+        </p:nvSpPr>
+        <p:spPr>
+          <a:xfrm>
+            <a:off x="1085850" y="4669035"/>
+            <a:ext cx="3391495" cy="180975"/>
+          </a:xfrm>
+          <a:prstGeom prst="rect">
+            <a:avLst/>
+          </a:prstGeom>
+          <a:noFill/>
+        </p:spPr>
+        <p:txBody>
+          <a:bodyPr wrap="square" lIns="0" rIns="0" tIns="0" bIns="0" anchor="t">
+            <a:spAutoFit/>
+          </a:bodyPr>
+          <a:lstStyle/>
+          <a:p>
+            <a:pPr algn="l"/>
+            <a:r>
+              <a:rPr b="0" sz="1275" i="0" u="none">
+                <a:solidFill>
+                  <a:srgbClr val="1E293B"/>
+                </a:solidFill>
+                <a:latin typeface="Noto Sans KR Medium"/>
+              </a:rPr>
+              <a:t>코딩 컨벤션 및 리소스 안티패턴 규칙 엄격 적용</a:t>
+            </a:r>
+          </a:p>
+        </p:txBody>
+      </p:sp>
+      <p:pic>
+        <p:nvPicPr>
+          <p:cNvPr id="12" name="Picture 11" descr="image.png"/>
+          <p:cNvPicPr>
+            <a:picLocks noChangeAspect="1"/>
+          </p:cNvPicPr>
+          <p:nvPr/>
+        </p:nvPicPr>
+        <p:blipFill>
+          <a:blip r:embed="rId6"/>
+          <a:stretch>
+            <a:fillRect/>
+          </a:stretch>
+        </p:blipFill>
+        <p:spPr>
+          <a:xfrm>
+            <a:off x="6562725" y="2900362"/>
+            <a:ext cx="177849" cy="228600"/>
+          </a:xfrm>
+          <a:prstGeom prst="rect">
+            <a:avLst/>
+          </a:prstGeom>
+        </p:spPr>
+      </p:pic>
+      <p:sp>
+        <p:nvSpPr>
+          <p:cNvPr id="13" name="TextBox 12"/>
+          <p:cNvSpPr txBox="1"/>
+          <p:nvPr/>
+        </p:nvSpPr>
+        <p:spPr>
+          <a:xfrm>
+            <a:off x="6854874" y="2871787"/>
+            <a:ext cx="3496061" cy="285750"/>
+          </a:xfrm>
+          <a:prstGeom prst="rect">
+            <a:avLst/>
+          </a:prstGeom>
+          <a:noFill/>
+        </p:spPr>
+        <p:txBody>
+          <a:bodyPr wrap="square" lIns="0" rIns="0" tIns="0" bIns="0" anchor="t">
+            <a:spAutoFit/>
+          </a:bodyPr>
+          <a:lstStyle/>
+          <a:p>
+            <a:pPr algn="l"/>
+            <a:r>
+              <a:rPr b="1" sz="1650" i="0" u="none">
+                <a:solidFill>
+                  <a:srgbClr val="0F172A"/>
+                </a:solidFill>
+                <a:latin typeface="Noto Sans KR"/>
+              </a:rPr>
+              <a:t>로그 기반 Prompt 품질 무결성 검증</a:t>
+            </a:r>
+          </a:p>
+        </p:txBody>
+      </p:sp>
+      <p:sp>
+        <p:nvSpPr>
+          <p:cNvPr id="14" name="TextBox 13"/>
+          <p:cNvSpPr txBox="1"/>
+          <p:nvPr/>
+        </p:nvSpPr>
+        <p:spPr>
+          <a:xfrm>
+            <a:off x="6791473" y="3348037"/>
+            <a:ext cx="4476601" cy="514350"/>
+          </a:xfrm>
+          <a:prstGeom prst="rect">
+            <a:avLst/>
+          </a:prstGeom>
+          <a:noFill/>
+        </p:spPr>
+        <p:txBody>
+          <a:bodyPr wrap="square" lIns="0" rIns="0" tIns="0" bIns="0" anchor="t">
+            <a:spAutoFit/>
+          </a:bodyPr>
+          <a:lstStyle/>
+          <a:p>
+            <a:pPr algn="l">
+              <a:lnSpc>
+                <a:spcPts val="2025"/>
+              </a:lnSpc>
+            </a:pPr>
+            <a:r>
+              <a:rPr b="0" sz="1350" i="0" u="none">
+                <a:solidFill>
+                  <a:srgbClr val="334155"/>
+                </a:solidFill>
+                <a:latin typeface="Noto Sans KR"/>
+              </a:rPr>
+              <a:t>작성된 소스코드와 MES 핵심 Data/Log 추출 Tool 상호 연동</a:t>
+            </a:r>
+          </a:p>
+        </p:txBody>
+      </p:sp>
+      <p:sp>
+        <p:nvSpPr>
+          <p:cNvPr id="15" name="TextBox 14"/>
+          <p:cNvSpPr txBox="1"/>
+          <p:nvPr/>
+        </p:nvSpPr>
+        <p:spPr>
+          <a:xfrm>
+            <a:off x="6791473" y="4014787"/>
+            <a:ext cx="4476601" cy="514350"/>
+          </a:xfrm>
+          <a:prstGeom prst="rect">
+            <a:avLst/>
+          </a:prstGeom>
+          <a:noFill/>
+        </p:spPr>
+        <p:txBody>
+          <a:bodyPr wrap="square" lIns="0" rIns="0" tIns="0" bIns="0" anchor="t">
+            <a:spAutoFit/>
+          </a:bodyPr>
+          <a:lstStyle/>
+          <a:p>
+            <a:pPr algn="l">
+              <a:lnSpc>
+                <a:spcPts val="2025"/>
+              </a:lnSpc>
+            </a:pPr>
+            <a:r>
+              <a:rPr b="0" sz="1350" i="0" u="none">
+                <a:solidFill>
+                  <a:srgbClr val="334155"/>
+                </a:solidFill>
+                <a:latin typeface="Noto Sans KR"/>
+              </a:rPr>
+              <a:t>실행 로그를 프롬프트화하여 소스 품질 및 동작 오류 자동 탐지</a:t>
+            </a:r>
+          </a:p>
+        </p:txBody>
+      </p:sp>
+      <p:sp>
+        <p:nvSpPr>
+          <p:cNvPr id="16" name="TextBox 15"/>
+          <p:cNvSpPr txBox="1"/>
+          <p:nvPr/>
+        </p:nvSpPr>
+        <p:spPr>
+          <a:xfrm>
+            <a:off x="6791473" y="4681537"/>
+            <a:ext cx="4476601" cy="257175"/>
+          </a:xfrm>
+          <a:prstGeom prst="rect">
+            <a:avLst/>
+          </a:prstGeom>
+          <a:noFill/>
+        </p:spPr>
+        <p:txBody>
+          <a:bodyPr wrap="square" lIns="0" rIns="0" tIns="0" bIns="0" anchor="t">
+            <a:spAutoFit/>
+          </a:bodyPr>
+          <a:lstStyle/>
+          <a:p>
+            <a:pPr algn="l">
+              <a:lnSpc>
+                <a:spcPts val="2025"/>
+              </a:lnSpc>
+            </a:pPr>
+            <a:r>
+              <a:rPr b="0" sz="1350" i="0" u="none">
+                <a:solidFill>
+                  <a:srgbClr val="334155"/>
+                </a:solidFill>
+                <a:latin typeface="Noto Sans KR"/>
+              </a:rPr>
+              <a:t>동작 무결성 확인 및 무분별한 메모리/DB 리소스 누수 방지</a:t>
+            </a:r>
+          </a:p>
+        </p:txBody>
+      </p:sp>
+      <p:pic>
+        <p:nvPicPr>
+          <p:cNvPr id="17" name="Picture 16" descr="image.png"/>
+          <p:cNvPicPr>
+            <a:picLocks noChangeAspect="1"/>
+          </p:cNvPicPr>
+          <p:nvPr/>
+        </p:nvPicPr>
+        <p:blipFill>
+          <a:blip r:embed="rId7"/>
+          <a:stretch>
+            <a:fillRect/>
+          </a:stretch>
+        </p:blipFill>
+        <p:spPr>
+          <a:xfrm>
+            <a:off x="6562725" y="3371850"/>
+            <a:ext cx="133498" cy="200025"/>
+          </a:xfrm>
+          <a:prstGeom prst="rect">
+            <a:avLst/>
+          </a:prstGeom>
+        </p:spPr>
+      </p:pic>
+      <p:pic>
+        <p:nvPicPr>
+          <p:cNvPr id="18" name="Picture 17" descr="image.png"/>
+          <p:cNvPicPr>
+            <a:picLocks noChangeAspect="1"/>
+          </p:cNvPicPr>
+          <p:nvPr/>
+        </p:nvPicPr>
+        <p:blipFill>
+          <a:blip r:embed="rId7"/>
+          <a:stretch>
+            <a:fillRect/>
+          </a:stretch>
+        </p:blipFill>
+        <p:spPr>
+          <a:xfrm>
+            <a:off x="6562725" y="4038600"/>
+            <a:ext cx="133498" cy="200025"/>
+          </a:xfrm>
+          <a:prstGeom prst="rect">
+            <a:avLst/>
+          </a:prstGeom>
+        </p:spPr>
+      </p:pic>
+      <p:pic>
+        <p:nvPicPr>
+          <p:cNvPr id="19" name="Picture 18" descr="image.png"/>
+          <p:cNvPicPr>
+            <a:picLocks noChangeAspect="1"/>
+          </p:cNvPicPr>
+          <p:nvPr/>
+        </p:nvPicPr>
+        <p:blipFill>
+          <a:blip r:embed="rId7"/>
+          <a:stretch>
+            <a:fillRect/>
+          </a:stretch>
+        </p:blipFill>
+        <p:spPr>
+          <a:xfrm>
+            <a:off x="6562725" y="4705350"/>
+            <a:ext cx="133498" cy="200025"/>
+          </a:xfrm>
+          <a:prstGeom prst="rect">
+            <a:avLst/>
+          </a:prstGeom>
+        </p:spPr>
+      </p:pic>
+    </p:spTree>
+  </p:cSld>
+  <p:clrMapOvr>
+    <a:masterClrMapping/>
+  </p:clrMapOvr>
+</p:sld>
+</file>
+
+<file path=ppt/slides/slide7.xml><?xml version="1.0" encoding="utf-8"?>
 <p:sld xmlns:a="http://schemas.openxmlformats.org/drawingml/2006/main" xmlns:p="http://schemas.openxmlformats.org/presentationml/2006/main" xmlns:r="http://schemas.openxmlformats.org/officeDocument/2006/relationships">
   <p:cSld>
     <p:bg>
@@ -6874,79 +8501,9 @@
         <p:nvPr/>
       </p:nvGrpSpPr>
       <p:grpSpPr/>
-      <p:sp>
-        <p:nvSpPr>
-          <p:cNvPr id="2" name="TextBox 1"/>
-          <p:cNvSpPr txBox="1"/>
-          <p:nvPr/>
-        </p:nvSpPr>
-        <p:spPr>
-          <a:xfrm>
-            <a:off x="609600" y="533400"/>
-            <a:ext cx="10972800" cy="647700"/>
-          </a:xfrm>
-          <a:prstGeom prst="rect">
-            <a:avLst/>
-          </a:prstGeom>
-          <a:noFill/>
-        </p:spPr>
-        <p:txBody>
-          <a:bodyPr wrap="square" lIns="0" rIns="0" tIns="0" bIns="0" anchor="t">
-            <a:spAutoFit/>
-          </a:bodyPr>
-          <a:lstStyle/>
-          <a:p>
-            <a:pPr algn="l"/>
-            <a:r>
-              <a:rPr b="1" sz="1200" i="0" u="none">
-                <a:solidFill>
-                  <a:srgbClr val="2563EB"/>
-                </a:solidFill>
-                <a:latin typeface="Noto Sans KR"/>
-              </a:rPr>
-              <a:t>LEGACY GOVERNANCE</a:t>
-            </a:r>
-          </a:p>
-        </p:txBody>
-      </p:sp>
-      <p:sp>
-        <p:nvSpPr>
-          <p:cNvPr id="3" name="TextBox 2"/>
-          <p:cNvSpPr txBox="1"/>
-          <p:nvPr/>
-        </p:nvSpPr>
-        <p:spPr>
-          <a:xfrm>
-            <a:off x="609600" y="762000"/>
-            <a:ext cx="11521440" cy="419100"/>
-          </a:xfrm>
-          <a:prstGeom prst="rect">
-            <a:avLst/>
-          </a:prstGeom>
-          <a:noFill/>
-        </p:spPr>
-        <p:txBody>
-          <a:bodyPr wrap="square" lIns="0" rIns="0" tIns="0" bIns="0" anchor="t">
-            <a:spAutoFit/>
-          </a:bodyPr>
-          <a:lstStyle/>
-          <a:p>
-            <a:pPr algn="l"/>
-            <a:r>
-              <a:rPr b="0" sz="2400" i="0" u="none">
-                <a:solidFill>
-                  <a:srgbClr val="0F172A"/>
-                </a:solidFill>
-                <a:latin typeface="Noto Sans KR ExtraBold"/>
-              </a:rPr>
-              <a:t>기존 소스 품질 관제 체계 (비-바이브 코딩 프로젝트)</a:t>
-            </a:r>
-          </a:p>
-        </p:txBody>
-      </p:sp>
       <p:pic>
         <p:nvPicPr>
-          <p:cNvPr id="4" name="Picture 3" descr="image.png"/>
+          <p:cNvPr id="2" name="Picture 1" descr="image.png"/>
           <p:cNvPicPr>
             <a:picLocks noChangeAspect="1"/>
           </p:cNvPicPr>
@@ -6960,8 +8517,56 @@
         </p:blipFill>
         <p:spPr>
           <a:xfrm>
-            <a:off x="609600" y="2838450"/>
-            <a:ext cx="3505200" cy="2171700"/>
+            <a:off x="609600" y="4157662"/>
+            <a:ext cx="10972800" cy="914400"/>
+          </a:xfrm>
+          <a:prstGeom prst="rect">
+            <a:avLst/>
+          </a:prstGeom>
+        </p:spPr>
+      </p:pic>
+      <p:pic>
+        <p:nvPicPr>
+          <p:cNvPr id="3" name="Picture 2" descr="image.png"/>
+          <p:cNvPicPr>
+            <a:picLocks noChangeAspect="1"/>
+          </p:cNvPicPr>
+          <p:nvPr/>
+        </p:nvPicPr>
+        <p:blipFill>
+          <a:blip r:embed="rId3"/>
+          <a:stretch>
+            <a:fillRect/>
+          </a:stretch>
+        </p:blipFill>
+        <p:spPr>
+          <a:xfrm>
+            <a:off x="609600" y="2738437"/>
+            <a:ext cx="3530649" cy="1228725"/>
+          </a:xfrm>
+          <a:prstGeom prst="rect">
+            <a:avLst/>
+          </a:prstGeom>
+        </p:spPr>
+      </p:pic>
+      <p:pic>
+        <p:nvPicPr>
+          <p:cNvPr id="4" name="Picture 3" descr="image.png"/>
+          <p:cNvPicPr>
+            <a:picLocks noChangeAspect="1"/>
+          </p:cNvPicPr>
+          <p:nvPr/>
+        </p:nvPicPr>
+        <p:blipFill>
+          <a:blip r:embed="rId4"/>
+          <a:stretch>
+            <a:fillRect/>
+          </a:stretch>
+        </p:blipFill>
+        <p:spPr>
+          <a:xfrm>
+            <a:off x="4330749" y="2738437"/>
+            <a:ext cx="3530649" cy="1228725"/>
           </a:xfrm>
           <a:prstGeom prst="rect">
             <a:avLst/>
@@ -6977,39 +8582,109 @@
           <p:nvPr/>
         </p:nvPicPr>
         <p:blipFill>
-          <a:blip r:embed="rId2"/>
+          <a:blip r:embed="rId5"/>
           <a:stretch>
             <a:fillRect/>
           </a:stretch>
         </p:blipFill>
         <p:spPr>
           <a:xfrm>
-            <a:off x="4343400" y="2838450"/>
-            <a:ext cx="3505200" cy="2171700"/>
+            <a:off x="8051899" y="2738437"/>
+            <a:ext cx="3530649" cy="1228725"/>
           </a:xfrm>
           <a:prstGeom prst="rect">
             <a:avLst/>
           </a:prstGeom>
         </p:spPr>
       </p:pic>
+      <p:sp>
+        <p:nvSpPr>
+          <p:cNvPr id="6" name="TextBox 5"/>
+          <p:cNvSpPr txBox="1"/>
+          <p:nvPr/>
+        </p:nvSpPr>
+        <p:spPr>
+          <a:xfrm>
+            <a:off x="609600" y="533400"/>
+            <a:ext cx="10972800" cy="647700"/>
+          </a:xfrm>
+          <a:prstGeom prst="rect">
+            <a:avLst/>
+          </a:prstGeom>
+          <a:noFill/>
+        </p:spPr>
+        <p:txBody>
+          <a:bodyPr wrap="square" lIns="0" rIns="0" tIns="0" bIns="0" anchor="t">
+            <a:spAutoFit/>
+          </a:bodyPr>
+          <a:lstStyle/>
+          <a:p>
+            <a:pPr algn="l"/>
+            <a:r>
+              <a:rPr b="1" sz="1200" i="0" u="none">
+                <a:solidFill>
+                  <a:srgbClr val="2563EB"/>
+                </a:solidFill>
+                <a:latin typeface="Noto Sans KR"/>
+              </a:rPr>
+              <a:t>OPERATIONAL AGENT TOOLS</a:t>
+            </a:r>
+          </a:p>
+        </p:txBody>
+      </p:sp>
+      <p:sp>
+        <p:nvSpPr>
+          <p:cNvPr id="7" name="TextBox 6"/>
+          <p:cNvSpPr txBox="1"/>
+          <p:nvPr/>
+        </p:nvSpPr>
+        <p:spPr>
+          <a:xfrm>
+            <a:off x="609600" y="762000"/>
+            <a:ext cx="11521440" cy="419100"/>
+          </a:xfrm>
+          <a:prstGeom prst="rect">
+            <a:avLst/>
+          </a:prstGeom>
+          <a:noFill/>
+        </p:spPr>
+        <p:txBody>
+          <a:bodyPr wrap="square" lIns="0" rIns="0" tIns="0" bIns="0" anchor="t">
+            <a:spAutoFit/>
+          </a:bodyPr>
+          <a:lstStyle/>
+          <a:p>
+            <a:pPr algn="l"/>
+            <a:r>
+              <a:rPr b="0" sz="2400" i="0" u="none">
+                <a:solidFill>
+                  <a:srgbClr val="0F172A"/>
+                </a:solidFill>
+                <a:latin typeface="Noto Sans KR ExtraBold"/>
+              </a:rPr>
+              <a:t>운영 단계 MES 핵심 데이터 AI Agent Tools</a:t>
+            </a:r>
+          </a:p>
+        </p:txBody>
+      </p:sp>
       <p:pic>
         <p:nvPicPr>
-          <p:cNvPr id="6" name="Picture 5" descr="image.png"/>
+          <p:cNvPr id="8" name="Picture 7" descr="image.png"/>
           <p:cNvPicPr>
             <a:picLocks noChangeAspect="1"/>
           </p:cNvPicPr>
           <p:nvPr/>
         </p:nvPicPr>
         <p:blipFill>
-          <a:blip r:embed="rId3"/>
+          <a:blip r:embed="rId6"/>
           <a:stretch>
             <a:fillRect/>
           </a:stretch>
         </p:blipFill>
         <p:spPr>
           <a:xfrm>
-            <a:off x="8077200" y="2838450"/>
-            <a:ext cx="3505200" cy="2171700"/>
+            <a:off x="9429452" y="4452937"/>
+            <a:ext cx="1924347" cy="323850"/>
           </a:xfrm>
           <a:prstGeom prst="rect">
             <a:avLst/>
@@ -7018,14 +8693,14 @@
       </p:pic>
       <p:sp>
         <p:nvSpPr>
-          <p:cNvPr id="7" name="TextBox 6"/>
-          <p:cNvSpPr txBox="1"/>
-          <p:nvPr/>
-        </p:nvSpPr>
-        <p:spPr>
-          <a:xfrm>
-            <a:off x="914400" y="3181350"/>
-            <a:ext cx="2895600" cy="266700"/>
+          <p:cNvPr id="9" name="TextBox 8"/>
+          <p:cNvSpPr txBox="1"/>
+          <p:nvPr/>
+        </p:nvSpPr>
+        <p:spPr>
+          <a:xfrm>
+            <a:off x="847725" y="2976562"/>
+            <a:ext cx="3054399" cy="219075"/>
           </a:xfrm>
           <a:prstGeom prst="rect">
             <a:avLst/>
@@ -7040,27 +8715,27 @@
           <a:p>
             <a:pPr algn="l"/>
             <a:r>
-              <a:rPr b="0" sz="1800" i="0" u="none">
+              <a:rPr b="1" sz="1500" i="0" u="none">
                 <a:solidFill>
                   <a:srgbClr val="2563EB"/>
                 </a:solidFill>
-                <a:latin typeface="Noto Sans KR ExtraBold"/>
-              </a:rPr>
-              <a:t>01</a:t>
-            </a:r>
-          </a:p>
-        </p:txBody>
-      </p:sp>
-      <p:sp>
-        <p:nvSpPr>
-          <p:cNvPr id="8" name="TextBox 7"/>
-          <p:cNvSpPr txBox="1"/>
-          <p:nvPr/>
-        </p:nvSpPr>
-        <p:spPr>
-          <a:xfrm>
-            <a:off x="914400" y="3562350"/>
-            <a:ext cx="3040380" cy="257175"/>
+                <a:latin typeface="Noto Sans KR"/>
+              </a:rPr>
+              <a:t>WO &amp; LOT Tool</a:t>
+            </a:r>
+          </a:p>
+        </p:txBody>
+      </p:sp>
+      <p:sp>
+        <p:nvSpPr>
+          <p:cNvPr id="10" name="TextBox 9"/>
+          <p:cNvSpPr txBox="1"/>
+          <p:nvPr/>
+        </p:nvSpPr>
+        <p:spPr>
+          <a:xfrm>
+            <a:off x="847725" y="3271837"/>
+            <a:ext cx="3054399" cy="457200"/>
           </a:xfrm>
           <a:prstGeom prst="rect">
             <a:avLst/>
@@ -7075,44 +8750,75 @@
           <a:p>
             <a:pPr algn="l"/>
             <a:r>
+              <a:rPr b="0" sz="1350" i="0" u="none">
+                <a:solidFill>
+                  <a:srgbClr val="334155"/>
+                </a:solidFill>
+                <a:latin typeface="Noto Sans KR"/>
+              </a:rPr>
+              <a:t>작업지시(WO) 및 LOT 추적 데이터 추출 및 상태 관제 Tool</a:t>
+            </a:r>
+          </a:p>
+        </p:txBody>
+      </p:sp>
+      <p:sp>
+        <p:nvSpPr>
+          <p:cNvPr id="11" name="TextBox 10"/>
+          <p:cNvSpPr txBox="1"/>
+          <p:nvPr/>
+        </p:nvSpPr>
+        <p:spPr>
+          <a:xfrm>
+            <a:off x="4568874" y="2976562"/>
+            <a:ext cx="3054399" cy="219075"/>
+          </a:xfrm>
+          <a:prstGeom prst="rect">
+            <a:avLst/>
+          </a:prstGeom>
+          <a:noFill/>
+        </p:spPr>
+        <p:txBody>
+          <a:bodyPr wrap="square" lIns="0" rIns="0" tIns="0" bIns="0" anchor="t">
+            <a:spAutoFit/>
+          </a:bodyPr>
+          <a:lstStyle/>
+          <a:p>
+            <a:pPr algn="l"/>
+            <a:r>
               <a:rPr b="1" sz="1500" i="0" u="none">
                 <a:solidFill>
-                  <a:srgbClr val="0F172A"/>
-                </a:solidFill>
-                <a:latin typeface="Noto Sans KR"/>
-              </a:rPr>
-              <a:t>Spring 베이스 범용성</a:t>
-            </a:r>
-          </a:p>
-        </p:txBody>
-      </p:sp>
-      <p:sp>
-        <p:nvSpPr>
-          <p:cNvPr id="9" name="TextBox 8"/>
-          <p:cNvSpPr txBox="1"/>
-          <p:nvPr/>
-        </p:nvSpPr>
-        <p:spPr>
-          <a:xfrm>
-            <a:off x="914400" y="3933825"/>
-            <a:ext cx="2895600" cy="771525"/>
-          </a:xfrm>
-          <a:prstGeom prst="rect">
-            <a:avLst/>
-          </a:prstGeom>
-          <a:noFill/>
-        </p:spPr>
-        <p:txBody>
-          <a:bodyPr wrap="square" lIns="0" rIns="0" tIns="0" bIns="0" anchor="t">
-            <a:spAutoFit/>
-          </a:bodyPr>
-          <a:lstStyle/>
-          <a:p>
-            <a:pPr algn="l">
-              <a:lnSpc>
-                <a:spcPts val="2025"/>
-              </a:lnSpc>
-            </a:pPr>
+                  <a:srgbClr val="2563EB"/>
+                </a:solidFill>
+                <a:latin typeface="Noto Sans KR"/>
+              </a:rPr>
+              <a:t>EQUIPMENT Tool</a:t>
+            </a:r>
+          </a:p>
+        </p:txBody>
+      </p:sp>
+      <p:sp>
+        <p:nvSpPr>
+          <p:cNvPr id="12" name="TextBox 11"/>
+          <p:cNvSpPr txBox="1"/>
+          <p:nvPr/>
+        </p:nvSpPr>
+        <p:spPr>
+          <a:xfrm>
+            <a:off x="4568874" y="3271837"/>
+            <a:ext cx="3054399" cy="457200"/>
+          </a:xfrm>
+          <a:prstGeom prst="rect">
+            <a:avLst/>
+          </a:prstGeom>
+          <a:noFill/>
+        </p:spPr>
+        <p:txBody>
+          <a:bodyPr wrap="square" lIns="0" rIns="0" tIns="0" bIns="0" anchor="t">
+            <a:spAutoFit/>
+          </a:bodyPr>
+          <a:lstStyle/>
+          <a:p>
+            <a:pPr algn="l"/>
             <a:r>
               <a:rPr b="0" sz="1350" i="0" u="none">
                 <a:solidFill>
@@ -7120,21 +8826,21 @@
                 </a:solidFill>
                 <a:latin typeface="Noto Sans KR"/>
               </a:rPr>
-              <a:t>레거시 프레임워크를 범용성 높은 Spring 기반 아키텍처로 재구성하여 구조 표준화.</a:t>
-            </a:r>
-          </a:p>
-        </p:txBody>
-      </p:sp>
-      <p:sp>
-        <p:nvSpPr>
-          <p:cNvPr id="10" name="TextBox 9"/>
-          <p:cNvSpPr txBox="1"/>
-          <p:nvPr/>
-        </p:nvSpPr>
-        <p:spPr>
-          <a:xfrm>
-            <a:off x="4648200" y="3181350"/>
-            <a:ext cx="2895600" cy="266700"/>
+              <a:t>설비 가동 상태, 가동률 및 파라미터 상태 실시간 조회</a:t>
+            </a:r>
+          </a:p>
+        </p:txBody>
+      </p:sp>
+      <p:sp>
+        <p:nvSpPr>
+          <p:cNvPr id="13" name="TextBox 12"/>
+          <p:cNvSpPr txBox="1"/>
+          <p:nvPr/>
+        </p:nvSpPr>
+        <p:spPr>
+          <a:xfrm>
+            <a:off x="8290024" y="2976562"/>
+            <a:ext cx="3054399" cy="219075"/>
           </a:xfrm>
           <a:prstGeom prst="rect">
             <a:avLst/>
@@ -7149,27 +8855,27 @@
           <a:p>
             <a:pPr algn="l"/>
             <a:r>
-              <a:rPr b="0" sz="1800" i="0" u="none">
+              <a:rPr b="1" sz="1500" i="0" u="none">
                 <a:solidFill>
                   <a:srgbClr val="2563EB"/>
                 </a:solidFill>
-                <a:latin typeface="Noto Sans KR ExtraBold"/>
-              </a:rPr>
-              <a:t>02</a:t>
-            </a:r>
-          </a:p>
-        </p:txBody>
-      </p:sp>
-      <p:sp>
-        <p:nvSpPr>
-          <p:cNvPr id="11" name="TextBox 10"/>
-          <p:cNvSpPr txBox="1"/>
-          <p:nvPr/>
-        </p:nvSpPr>
-        <p:spPr>
-          <a:xfrm>
-            <a:off x="4648200" y="3562350"/>
-            <a:ext cx="3040380" cy="257175"/>
+                <a:latin typeface="Noto Sans KR"/>
+              </a:rPr>
+              <a:t>PROCESS &amp; TRACK Tool</a:t>
+            </a:r>
+          </a:p>
+        </p:txBody>
+      </p:sp>
+      <p:sp>
+        <p:nvSpPr>
+          <p:cNvPr id="14" name="TextBox 13"/>
+          <p:cNvSpPr txBox="1"/>
+          <p:nvPr/>
+        </p:nvSpPr>
+        <p:spPr>
+          <a:xfrm>
+            <a:off x="8290024" y="3271837"/>
+            <a:ext cx="3054399" cy="457200"/>
           </a:xfrm>
           <a:prstGeom prst="rect">
             <a:avLst/>
@@ -7184,66 +8890,86 @@
           <a:p>
             <a:pPr algn="l"/>
             <a:r>
+              <a:rPr b="0" sz="1350" i="0" u="none">
+                <a:solidFill>
+                  <a:srgbClr val="334155"/>
+                </a:solidFill>
+                <a:latin typeface="Noto Sans KR"/>
+              </a:rPr>
+              <a:t>공정 순서, Track-In/Out 이력 분석 및 공정 지연 탐지</a:t>
+            </a:r>
+          </a:p>
+        </p:txBody>
+      </p:sp>
+      <p:pic>
+        <p:nvPicPr>
+          <p:cNvPr id="15" name="Picture 14" descr="image.png"/>
+          <p:cNvPicPr>
+            <a:picLocks noChangeAspect="1"/>
+          </p:cNvPicPr>
+          <p:nvPr/>
+        </p:nvPicPr>
+        <p:blipFill>
+          <a:blip r:embed="rId7"/>
+          <a:stretch>
+            <a:fillRect/>
+          </a:stretch>
+        </p:blipFill>
+        <p:spPr>
+          <a:xfrm>
+            <a:off x="838200" y="4481512"/>
+            <a:ext cx="207466" cy="266700"/>
+          </a:xfrm>
+          <a:prstGeom prst="rect">
+            <a:avLst/>
+          </a:prstGeom>
+        </p:spPr>
+      </p:pic>
+      <p:sp>
+        <p:nvSpPr>
+          <p:cNvPr id="16" name="TextBox 15"/>
+          <p:cNvSpPr txBox="1"/>
+          <p:nvPr/>
+        </p:nvSpPr>
+        <p:spPr>
+          <a:xfrm>
+            <a:off x="1198066" y="4386262"/>
+            <a:ext cx="5059226" cy="257175"/>
+          </a:xfrm>
+          <a:prstGeom prst="rect">
+            <a:avLst/>
+          </a:prstGeom>
+          <a:noFill/>
+        </p:spPr>
+        <p:txBody>
+          <a:bodyPr wrap="square" lIns="0" rIns="0" tIns="0" bIns="0" anchor="t">
+            <a:spAutoFit/>
+          </a:bodyPr>
+          <a:lstStyle/>
+          <a:p>
+            <a:pPr algn="l"/>
+            <a:r>
               <a:rPr b="1" sz="1500" i="0" u="none">
                 <a:solidFill>
-                  <a:srgbClr val="0F172A"/>
-                </a:solidFill>
-                <a:latin typeface="Noto Sans KR"/>
-              </a:rPr>
-              <a:t>규범 필수 적용</a:t>
-            </a:r>
-          </a:p>
-        </p:txBody>
-      </p:sp>
-      <p:sp>
-        <p:nvSpPr>
-          <p:cNvPr id="12" name="TextBox 11"/>
-          <p:cNvSpPr txBox="1"/>
-          <p:nvPr/>
-        </p:nvSpPr>
-        <p:spPr>
-          <a:xfrm>
-            <a:off x="4648200" y="3933825"/>
-            <a:ext cx="2895600" cy="771525"/>
-          </a:xfrm>
-          <a:prstGeom prst="rect">
-            <a:avLst/>
-          </a:prstGeom>
-          <a:noFill/>
-        </p:spPr>
-        <p:txBody>
-          <a:bodyPr wrap="square" lIns="0" rIns="0" tIns="0" bIns="0" anchor="t">
-            <a:spAutoFit/>
-          </a:bodyPr>
-          <a:lstStyle/>
-          <a:p>
-            <a:pPr algn="l">
-              <a:lnSpc>
-                <a:spcPts val="2025"/>
-              </a:lnSpc>
-            </a:pPr>
-            <a:r>
-              <a:rPr b="0" sz="1350" i="0" u="none">
-                <a:solidFill>
-                  <a:srgbClr val="334155"/>
-                </a:solidFill>
-                <a:latin typeface="Noto Sans KR"/>
-              </a:rPr>
-              <a:t>개발 단계와 동일한 코딩 컨벤션 및 안티패턴 규칙을 레거시 관제에도 강제 적용.</a:t>
-            </a:r>
-          </a:p>
-        </p:txBody>
-      </p:sp>
-      <p:sp>
-        <p:nvSpPr>
-          <p:cNvPr id="13" name="TextBox 12"/>
-          <p:cNvSpPr txBox="1"/>
-          <p:nvPr/>
-        </p:nvSpPr>
-        <p:spPr>
-          <a:xfrm>
-            <a:off x="8382000" y="3181350"/>
-            <a:ext cx="2895600" cy="266700"/>
+                  <a:srgbClr val="FFFFFF"/>
+                </a:solidFill>
+                <a:latin typeface="Noto Sans KR"/>
+              </a:rPr>
+              <a:t>인터페이스 &amp; Log 추출 전용 Tool</a:t>
+            </a:r>
+          </a:p>
+        </p:txBody>
+      </p:sp>
+      <p:sp>
+        <p:nvSpPr>
+          <p:cNvPr id="17" name="TextBox 16"/>
+          <p:cNvSpPr txBox="1"/>
+          <p:nvPr/>
+        </p:nvSpPr>
+        <p:spPr>
+          <a:xfrm>
+            <a:off x="1198066" y="4643437"/>
+            <a:ext cx="4818310" cy="200025"/>
           </a:xfrm>
           <a:prstGeom prst="rect">
             <a:avLst/>
@@ -7258,87 +8984,13 @@
           <a:p>
             <a:pPr algn="l"/>
             <a:r>
-              <a:rPr b="0" sz="1800" i="0" u="none">
-                <a:solidFill>
-                  <a:srgbClr val="0F172A"/>
-                </a:solidFill>
-                <a:latin typeface="Noto Sans KR ExtraBold"/>
-              </a:rPr>
-              <a:t>03</a:t>
-            </a:r>
-          </a:p>
-        </p:txBody>
-      </p:sp>
-      <p:sp>
-        <p:nvSpPr>
-          <p:cNvPr id="14" name="TextBox 13"/>
-          <p:cNvSpPr txBox="1"/>
-          <p:nvPr/>
-        </p:nvSpPr>
-        <p:spPr>
-          <a:xfrm>
-            <a:off x="8382000" y="3562350"/>
-            <a:ext cx="3040380" cy="257175"/>
-          </a:xfrm>
-          <a:prstGeom prst="rect">
-            <a:avLst/>
-          </a:prstGeom>
-          <a:noFill/>
-        </p:spPr>
-        <p:txBody>
-          <a:bodyPr wrap="square" lIns="0" rIns="0" tIns="0" bIns="0" anchor="t">
-            <a:spAutoFit/>
-          </a:bodyPr>
-          <a:lstStyle/>
-          <a:p>
-            <a:pPr algn="l"/>
-            <a:r>
-              <a:rPr b="1" sz="1500" i="0" u="none">
-                <a:solidFill>
-                  <a:srgbClr val="0F172A"/>
-                </a:solidFill>
-                <a:latin typeface="Noto Sans KR"/>
-              </a:rPr>
-              <a:t>Log 기반 AI 검증</a:t>
-            </a:r>
-          </a:p>
-        </p:txBody>
-      </p:sp>
-      <p:sp>
-        <p:nvSpPr>
-          <p:cNvPr id="15" name="TextBox 14"/>
-          <p:cNvSpPr txBox="1"/>
-          <p:nvPr/>
-        </p:nvSpPr>
-        <p:spPr>
-          <a:xfrm>
-            <a:off x="8382000" y="3933825"/>
-            <a:ext cx="2895600" cy="771525"/>
-          </a:xfrm>
-          <a:prstGeom prst="rect">
-            <a:avLst/>
-          </a:prstGeom>
-          <a:noFill/>
-        </p:spPr>
-        <p:txBody>
-          <a:bodyPr wrap="square" lIns="0" rIns="0" tIns="0" bIns="0" anchor="t">
-            <a:spAutoFit/>
-          </a:bodyPr>
-          <a:lstStyle/>
-          <a:p>
-            <a:pPr algn="l">
-              <a:lnSpc>
-                <a:spcPts val="2025"/>
-              </a:lnSpc>
-            </a:pPr>
-            <a:r>
-              <a:rPr b="0" sz="1350" i="0" u="none">
-                <a:solidFill>
-                  <a:srgbClr val="334155"/>
-                </a:solidFill>
-                <a:latin typeface="Noto Sans KR"/>
-              </a:rPr>
-              <a:t>실행 로그 분석 데이터를 Prompt화하여 소스 품질과 동작 무결성을 AI가 검증.</a:t>
+              <a:rPr b="0" sz="1200" i="0" u="none">
+                <a:solidFill>
+                  <a:srgbClr val="94A3B8"/>
+                </a:solidFill>
+                <a:latin typeface="Noto Sans KR"/>
+              </a:rPr>
+              <a:t>설비·타 시스템 통신 스펙 및 MES 핵심 처리 Execution Log 실시간 추출</a:t>
             </a:r>
           </a:p>
         </p:txBody>
@@ -7351,7 +9003,7 @@
 </p:sld>
 </file>
 
-<file path=ppt/slides/slide7.xml><?xml version="1.0" encoding="utf-8"?>
+<file path=ppt/slides/slide8.xml><?xml version="1.0" encoding="utf-8"?>
 <p:sld xmlns:a="http://schemas.openxmlformats.org/drawingml/2006/main" xmlns:p="http://schemas.openxmlformats.org/presentationml/2006/main" xmlns:r="http://schemas.openxmlformats.org/officeDocument/2006/relationships">
   <p:cSld>
     <p:bg>
@@ -7369,44 +9021,9 @@
         <p:nvPr/>
       </p:nvGrpSpPr>
       <p:grpSpPr/>
-      <p:sp>
-        <p:nvSpPr>
-          <p:cNvPr id="2" name="TextBox 1"/>
-          <p:cNvSpPr txBox="1"/>
-          <p:nvPr/>
-        </p:nvSpPr>
-        <p:spPr>
-          <a:xfrm>
-            <a:off x="609600" y="533400"/>
-            <a:ext cx="10972800" cy="647700"/>
-          </a:xfrm>
-          <a:prstGeom prst="rect">
-            <a:avLst/>
-          </a:prstGeom>
-          <a:noFill/>
-        </p:spPr>
-        <p:txBody>
-          <a:bodyPr wrap="square" lIns="0" rIns="0" tIns="0" bIns="0" anchor="t">
-            <a:spAutoFit/>
-          </a:bodyPr>
-          <a:lstStyle/>
-          <a:p>
-            <a:pPr algn="l"/>
-            <a:r>
-              <a:rPr b="1" sz="1200" i="0" u="none">
-                <a:solidFill>
-                  <a:srgbClr val="2563EB"/>
-                </a:solidFill>
-                <a:latin typeface="Noto Sans KR"/>
-              </a:rPr>
-              <a:t>MES INTEGRATION</a:t>
-            </a:r>
-          </a:p>
-        </p:txBody>
-      </p:sp>
       <p:pic>
         <p:nvPicPr>
-          <p:cNvPr id="3" name="Picture 2" descr="image.png"/>
+          <p:cNvPr id="2" name="Picture 1" descr="image.png"/>
           <p:cNvPicPr>
             <a:picLocks noChangeAspect="1"/>
           </p:cNvPicPr>
@@ -7420,8 +9037,32 @@
         </p:blipFill>
         <p:spPr>
           <a:xfrm>
-            <a:off x="609600" y="2433637"/>
-            <a:ext cx="5334000" cy="2943225"/>
+            <a:off x="847725" y="1538287"/>
+            <a:ext cx="2658367" cy="657225"/>
+          </a:xfrm>
+          <a:prstGeom prst="rect">
+            <a:avLst/>
+          </a:prstGeom>
+        </p:spPr>
+      </p:pic>
+      <p:pic>
+        <p:nvPicPr>
+          <p:cNvPr id="3" name="Picture 2" descr="image.png"/>
+          <p:cNvPicPr>
+            <a:picLocks noChangeAspect="1"/>
+          </p:cNvPicPr>
+          <p:nvPr/>
+        </p:nvPicPr>
+        <p:blipFill>
+          <a:blip r:embed="rId3"/>
+          <a:stretch>
+            <a:fillRect/>
+          </a:stretch>
+        </p:blipFill>
+        <p:spPr>
+          <a:xfrm>
+            <a:off x="3959125" y="1524000"/>
+            <a:ext cx="3125390" cy="685800"/>
           </a:xfrm>
           <a:prstGeom prst="rect">
             <a:avLst/>
@@ -7437,65 +9078,6 @@
           <p:nvPr/>
         </p:nvPicPr>
         <p:blipFill>
-          <a:blip r:embed="rId3"/>
-          <a:stretch>
-            <a:fillRect/>
-          </a:stretch>
-        </p:blipFill>
-        <p:spPr>
-          <a:xfrm>
-            <a:off x="6248400" y="2733675"/>
-            <a:ext cx="5334000" cy="2343150"/>
-          </a:xfrm>
-          <a:prstGeom prst="rect">
-            <a:avLst/>
-          </a:prstGeom>
-        </p:spPr>
-      </p:pic>
-      <p:sp>
-        <p:nvSpPr>
-          <p:cNvPr id="5" name="TextBox 4"/>
-          <p:cNvSpPr txBox="1"/>
-          <p:nvPr/>
-        </p:nvSpPr>
-        <p:spPr>
-          <a:xfrm>
-            <a:off x="609600" y="762000"/>
-            <a:ext cx="11521440" cy="419100"/>
-          </a:xfrm>
-          <a:prstGeom prst="rect">
-            <a:avLst/>
-          </a:prstGeom>
-          <a:noFill/>
-        </p:spPr>
-        <p:txBody>
-          <a:bodyPr wrap="square" lIns="0" rIns="0" tIns="0" bIns="0" anchor="t">
-            <a:spAutoFit/>
-          </a:bodyPr>
-          <a:lstStyle/>
-          <a:p>
-            <a:pPr algn="l"/>
-            <a:r>
-              <a:rPr b="0" sz="2400" i="0" u="none">
-                <a:solidFill>
-                  <a:srgbClr val="0F172A"/>
-                </a:solidFill>
-                <a:latin typeface="Noto Sans KR ExtraBold"/>
-              </a:rPr>
-              <a:t>운영 단계: MES 핵심 DATA 연동 AI Agent Tool 개발</a:t>
-            </a:r>
-          </a:p>
-        </p:txBody>
-      </p:sp>
-      <p:pic>
-        <p:nvPicPr>
-          <p:cNvPr id="6" name="Picture 5" descr="image.png"/>
-          <p:cNvPicPr>
-            <a:picLocks noChangeAspect="1"/>
-          </p:cNvPicPr>
-          <p:nvPr/>
-        </p:nvPicPr>
-        <p:blipFill>
           <a:blip r:embed="rId4"/>
           <a:stretch>
             <a:fillRect/>
@@ -7503,8 +9085,8 @@
         </p:blipFill>
         <p:spPr>
           <a:xfrm>
-            <a:off x="923925" y="2719387"/>
-            <a:ext cx="1401663" cy="228600"/>
+            <a:off x="7537549" y="1547812"/>
+            <a:ext cx="3806725" cy="638175"/>
           </a:xfrm>
           <a:prstGeom prst="rect">
             <a:avLst/>
@@ -7513,7 +9095,7 @@
       </p:pic>
       <p:pic>
         <p:nvPicPr>
-          <p:cNvPr id="7" name="Picture 6" descr="image.png"/>
+          <p:cNvPr id="5" name="Picture 4" descr="image.png"/>
           <p:cNvPicPr>
             <a:picLocks noChangeAspect="1"/>
           </p:cNvPicPr>
@@ -7527,165 +9109,17 @@
         </p:blipFill>
         <p:spPr>
           <a:xfrm>
-            <a:off x="6562725" y="3019425"/>
-            <a:ext cx="1848594" cy="228600"/>
+            <a:off x="847725" y="5257800"/>
+            <a:ext cx="4202459" cy="904875"/>
           </a:xfrm>
           <a:prstGeom prst="rect">
             <a:avLst/>
           </a:prstGeom>
         </p:spPr>
       </p:pic>
-      <p:sp>
-        <p:nvSpPr>
-          <p:cNvPr id="8" name="TextBox 7"/>
-          <p:cNvSpPr txBox="1"/>
-          <p:nvPr/>
-        </p:nvSpPr>
-        <p:spPr>
-          <a:xfrm>
-            <a:off x="923925" y="3071812"/>
-            <a:ext cx="4940617" cy="285750"/>
-          </a:xfrm>
-          <a:prstGeom prst="rect">
-            <a:avLst/>
-          </a:prstGeom>
-          <a:noFill/>
-        </p:spPr>
-        <p:txBody>
-          <a:bodyPr wrap="square" lIns="0" rIns="0" tIns="0" bIns="0" anchor="t">
-            <a:spAutoFit/>
-          </a:bodyPr>
-          <a:lstStyle/>
-          <a:p>
-            <a:pPr algn="l"/>
-            <a:r>
-              <a:rPr b="1" sz="1650" i="0" u="none">
-                <a:solidFill>
-                  <a:srgbClr val="0F172A"/>
-                </a:solidFill>
-                <a:latin typeface="Noto Sans KR"/>
-              </a:rPr>
-              <a:t>MES 주요 엔티티 활용</a:t>
-            </a:r>
-          </a:p>
-        </p:txBody>
-      </p:sp>
-      <p:sp>
-        <p:nvSpPr>
-          <p:cNvPr id="9" name="TextBox 8"/>
-          <p:cNvSpPr txBox="1"/>
-          <p:nvPr/>
-        </p:nvSpPr>
-        <p:spPr>
-          <a:xfrm>
-            <a:off x="923925" y="3471862"/>
-            <a:ext cx="4705350" cy="771525"/>
-          </a:xfrm>
-          <a:prstGeom prst="rect">
-            <a:avLst/>
-          </a:prstGeom>
-          <a:noFill/>
-        </p:spPr>
-        <p:txBody>
-          <a:bodyPr wrap="square" lIns="0" rIns="0" tIns="0" bIns="0" anchor="t">
-            <a:spAutoFit/>
-          </a:bodyPr>
-          <a:lstStyle/>
-          <a:p>
-            <a:pPr algn="l">
-              <a:lnSpc>
-                <a:spcPts val="2025"/>
-              </a:lnSpc>
-            </a:pPr>
-            <a:r>
-              <a:rPr b="0" sz="1350" i="0" u="none">
-                <a:solidFill>
-                  <a:srgbClr val="334155"/>
-                </a:solidFill>
-                <a:latin typeface="Noto Sans KR"/>
-              </a:rPr>
-              <a:t>WO, LOT, EQUIPMENT, PROCESS, TRACKIN-OUT 등 핵심 제조 데이터를 AI Agent가 즉시 조회·제어할 수 있는 표준 Tool 세트 구축.</a:t>
-            </a:r>
-          </a:p>
-        </p:txBody>
-      </p:sp>
-      <p:sp>
-        <p:nvSpPr>
-          <p:cNvPr id="10" name="TextBox 9"/>
-          <p:cNvSpPr txBox="1"/>
-          <p:nvPr/>
-        </p:nvSpPr>
-        <p:spPr>
-          <a:xfrm>
-            <a:off x="6562725" y="3371850"/>
-            <a:ext cx="4940617" cy="285750"/>
-          </a:xfrm>
-          <a:prstGeom prst="rect">
-            <a:avLst/>
-          </a:prstGeom>
-          <a:noFill/>
-        </p:spPr>
-        <p:txBody>
-          <a:bodyPr wrap="square" lIns="0" rIns="0" tIns="0" bIns="0" anchor="t">
-            <a:spAutoFit/>
-          </a:bodyPr>
-          <a:lstStyle/>
-          <a:p>
-            <a:pPr algn="l"/>
-            <a:r>
-              <a:rPr b="1" sz="1650" i="0" u="none">
-                <a:solidFill>
-                  <a:srgbClr val="0F172A"/>
-                </a:solidFill>
-                <a:latin typeface="Noto Sans KR"/>
-              </a:rPr>
-              <a:t>인터페이스 &amp; 통신 로그 추출</a:t>
-            </a:r>
-          </a:p>
-        </p:txBody>
-      </p:sp>
-      <p:sp>
-        <p:nvSpPr>
-          <p:cNvPr id="11" name="TextBox 10"/>
-          <p:cNvSpPr txBox="1"/>
-          <p:nvPr/>
-        </p:nvSpPr>
-        <p:spPr>
-          <a:xfrm>
-            <a:off x="6562725" y="3771900"/>
-            <a:ext cx="4705350" cy="514350"/>
-          </a:xfrm>
-          <a:prstGeom prst="rect">
-            <a:avLst/>
-          </a:prstGeom>
-          <a:noFill/>
-        </p:spPr>
-        <p:txBody>
-          <a:bodyPr wrap="square" lIns="0" rIns="0" tIns="0" bIns="0" anchor="t">
-            <a:spAutoFit/>
-          </a:bodyPr>
-          <a:lstStyle/>
-          <a:p>
-            <a:pPr algn="l">
-              <a:lnSpc>
-                <a:spcPts val="2025"/>
-              </a:lnSpc>
-            </a:pPr>
-            <a:r>
-              <a:rPr b="0" sz="1350" i="0" u="none">
-                <a:solidFill>
-                  <a:srgbClr val="334155"/>
-                </a:solidFill>
-                <a:latin typeface="Noto Sans KR"/>
-              </a:rPr>
-              <a:t>설비 및 외부 타 시스템과의 통신 인터페이스 규격과 MES 핵심 처리 Log를 실시간으로 자동 추출하는 전용 AI Tool 개발.</a:t>
-            </a:r>
-          </a:p>
-        </p:txBody>
-      </p:sp>
       <p:pic>
         <p:nvPicPr>
-          <p:cNvPr id="12" name="Picture 11" descr="image.png"/>
+          <p:cNvPr id="6" name="Picture 5" descr="image.png"/>
           <p:cNvPicPr>
             <a:picLocks noChangeAspect="1"/>
           </p:cNvPicPr>
@@ -7699,17 +9133,87 @@
         </p:blipFill>
         <p:spPr>
           <a:xfrm>
-            <a:off x="923925" y="4433887"/>
-            <a:ext cx="1191666" cy="285750"/>
+            <a:off x="5240684" y="5257800"/>
+            <a:ext cx="6103590" cy="904875"/>
           </a:xfrm>
           <a:prstGeom prst="rect">
             <a:avLst/>
           </a:prstGeom>
         </p:spPr>
       </p:pic>
+      <p:sp>
+        <p:nvSpPr>
+          <p:cNvPr id="7" name="TextBox 6"/>
+          <p:cNvSpPr txBox="1"/>
+          <p:nvPr/>
+        </p:nvSpPr>
+        <p:spPr>
+          <a:xfrm>
+            <a:off x="609600" y="457200"/>
+            <a:ext cx="10972800" cy="600075"/>
+          </a:xfrm>
+          <a:prstGeom prst="rect">
+            <a:avLst/>
+          </a:prstGeom>
+          <a:noFill/>
+        </p:spPr>
+        <p:txBody>
+          <a:bodyPr wrap="square" lIns="0" rIns="0" tIns="0" bIns="0" anchor="t">
+            <a:spAutoFit/>
+          </a:bodyPr>
+          <a:lstStyle/>
+          <a:p>
+            <a:pPr algn="l"/>
+            <a:r>
+              <a:rPr b="1" sz="1200" i="0" u="none">
+                <a:solidFill>
+                  <a:srgbClr val="2563EB"/>
+                </a:solidFill>
+                <a:latin typeface="Noto Sans KR"/>
+              </a:rPr>
+              <a:t>ARCHITECTURE DIAGRAM 02</a:t>
+            </a:r>
+          </a:p>
+        </p:txBody>
+      </p:sp>
+      <p:sp>
+        <p:nvSpPr>
+          <p:cNvPr id="8" name="TextBox 7"/>
+          <p:cNvSpPr txBox="1"/>
+          <p:nvPr/>
+        </p:nvSpPr>
+        <p:spPr>
+          <a:xfrm>
+            <a:off x="609600" y="666750"/>
+            <a:ext cx="11521440" cy="390525"/>
+          </a:xfrm>
+          <a:prstGeom prst="rect">
+            <a:avLst/>
+          </a:prstGeom>
+          <a:noFill/>
+        </p:spPr>
+        <p:txBody>
+          <a:bodyPr wrap="square" lIns="0" rIns="0" tIns="0" bIns="0" anchor="t">
+            <a:spAutoFit/>
+          </a:bodyPr>
+          <a:lstStyle/>
+          <a:p>
+            <a:pPr algn="l"/>
+            <a:r>
+              <a:rPr b="0" sz="2250" i="0" u="none">
+                <a:solidFill>
+                  <a:srgbClr val="0F172A"/>
+                </a:solidFill>
+                <a:latin typeface="Noto Sans KR ExtraBold"/>
+              </a:rPr>
+              <a:t>MES CSV 변환 &amp; Vector RAG 아키텍처</a:t>
+            </a:r>
+          </a:p>
+        </p:txBody>
+      </p:sp>
       <p:pic>
         <p:nvPicPr>
-          <p:cNvPr id="13" name="Picture 12" descr="image.png"/>
+          <p:cNvPr id="9" name="Picture 8" descr="image.png"/>
           <p:cNvPicPr>
             <a:picLocks noChangeAspect="1"/>
           </p:cNvPicPr>
@@ -7723,17 +9227,87 @@
         </p:blipFill>
         <p:spPr>
           <a:xfrm>
-            <a:off x="2191791" y="4433887"/>
-            <a:ext cx="1228725" cy="285750"/>
+            <a:off x="6029176" y="3643312"/>
+            <a:ext cx="133498" cy="171450"/>
           </a:xfrm>
           <a:prstGeom prst="rect">
             <a:avLst/>
           </a:prstGeom>
         </p:spPr>
       </p:pic>
+      <p:sp>
+        <p:nvSpPr>
+          <p:cNvPr id="10" name="TextBox 9"/>
+          <p:cNvSpPr txBox="1"/>
+          <p:nvPr/>
+        </p:nvSpPr>
+        <p:spPr>
+          <a:xfrm>
+            <a:off x="1009650" y="1700212"/>
+            <a:ext cx="2334517" cy="142875"/>
+          </a:xfrm>
+          <a:prstGeom prst="rect">
+            <a:avLst/>
+          </a:prstGeom>
+          <a:noFill/>
+        </p:spPr>
+        <p:txBody>
+          <a:bodyPr wrap="square" lIns="0" rIns="0" tIns="0" bIns="0" anchor="t">
+            <a:spAutoFit/>
+          </a:bodyPr>
+          <a:lstStyle/>
+          <a:p>
+            <a:pPr algn="ctr"/>
+            <a:r>
+              <a:rPr b="1" sz="975" i="0" u="none">
+                <a:solidFill>
+                  <a:srgbClr val="64748B"/>
+                </a:solidFill>
+                <a:latin typeface="Noto Sans KR"/>
+              </a:rPr>
+              <a:t>SOURCE DATA</a:t>
+            </a:r>
+          </a:p>
+        </p:txBody>
+      </p:sp>
+      <p:sp>
+        <p:nvSpPr>
+          <p:cNvPr id="11" name="TextBox 10"/>
+          <p:cNvSpPr txBox="1"/>
+          <p:nvPr/>
+        </p:nvSpPr>
+        <p:spPr>
+          <a:xfrm>
+            <a:off x="1308645" y="1843087"/>
+            <a:ext cx="1736377" cy="180975"/>
+          </a:xfrm>
+          <a:prstGeom prst="rect">
+            <a:avLst/>
+          </a:prstGeom>
+          <a:noFill/>
+        </p:spPr>
+        <p:txBody>
+          <a:bodyPr wrap="square" lIns="0" rIns="0" tIns="0" bIns="0" anchor="t">
+            <a:spAutoFit/>
+          </a:bodyPr>
+          <a:lstStyle/>
+          <a:p>
+            <a:pPr algn="ctr"/>
+            <a:r>
+              <a:rPr b="1" sz="1275" i="0" u="none">
+                <a:solidFill>
+                  <a:srgbClr val="0F172A"/>
+                </a:solidFill>
+                <a:latin typeface="Noto Sans KR"/>
+              </a:rPr>
+              <a:t>MES CORE DB &amp; Logs</a:t>
+            </a:r>
+          </a:p>
+        </p:txBody>
+      </p:sp>
       <p:pic>
         <p:nvPicPr>
-          <p:cNvPr id="14" name="Picture 13" descr="image.png"/>
+          <p:cNvPr id="12" name="Picture 11" descr="image.png"/>
           <p:cNvPicPr>
             <a:picLocks noChangeAspect="1"/>
           </p:cNvPicPr>
@@ -7747,14 +9321,84 @@
         </p:blipFill>
         <p:spPr>
           <a:xfrm>
-            <a:off x="3496716" y="4433887"/>
-            <a:ext cx="1488132" cy="285750"/>
+            <a:off x="3658492" y="1766887"/>
+            <a:ext cx="148232" cy="190500"/>
           </a:xfrm>
           <a:prstGeom prst="rect">
             <a:avLst/>
           </a:prstGeom>
         </p:spPr>
       </p:pic>
+      <p:sp>
+        <p:nvSpPr>
+          <p:cNvPr id="13" name="TextBox 12"/>
+          <p:cNvSpPr txBox="1"/>
+          <p:nvPr/>
+        </p:nvSpPr>
+        <p:spPr>
+          <a:xfrm>
+            <a:off x="4121050" y="1685925"/>
+            <a:ext cx="2801540" cy="142875"/>
+          </a:xfrm>
+          <a:prstGeom prst="rect">
+            <a:avLst/>
+          </a:prstGeom>
+          <a:noFill/>
+        </p:spPr>
+        <p:txBody>
+          <a:bodyPr wrap="square" lIns="0" rIns="0" tIns="0" bIns="0" anchor="t">
+            <a:spAutoFit/>
+          </a:bodyPr>
+          <a:lstStyle/>
+          <a:p>
+            <a:pPr algn="ctr"/>
+            <a:r>
+              <a:rPr b="1" sz="975" i="0" u="none">
+                <a:solidFill>
+                  <a:srgbClr val="1E40AF"/>
+                </a:solidFill>
+                <a:latin typeface="Noto Sans KR"/>
+              </a:rPr>
+              <a:t>BATCH SCHEDULER</a:t>
+            </a:r>
+          </a:p>
+        </p:txBody>
+      </p:sp>
+      <p:sp>
+        <p:nvSpPr>
+          <p:cNvPr id="14" name="TextBox 13"/>
+          <p:cNvSpPr txBox="1"/>
+          <p:nvPr/>
+        </p:nvSpPr>
+        <p:spPr>
+          <a:xfrm>
+            <a:off x="4721125" y="1847850"/>
+            <a:ext cx="1601390" cy="180975"/>
+          </a:xfrm>
+          <a:prstGeom prst="rect">
+            <a:avLst/>
+          </a:prstGeom>
+          <a:noFill/>
+        </p:spPr>
+        <p:txBody>
+          <a:bodyPr wrap="square" lIns="0" rIns="0" tIns="0" bIns="0" anchor="t">
+            <a:spAutoFit/>
+          </a:bodyPr>
+          <a:lstStyle/>
+          <a:p>
+            <a:pPr algn="ctr"/>
+            <a:r>
+              <a:rPr b="1" sz="1275" i="0" u="none">
+                <a:solidFill>
+                  <a:srgbClr val="0F172A"/>
+                </a:solidFill>
+                <a:latin typeface="Noto Sans KR"/>
+              </a:rPr>
+              <a:t>주기적 CSV 파일 변환</a:t>
+            </a:r>
+          </a:p>
+        </p:txBody>
+      </p:sp>
       <p:pic>
         <p:nvPicPr>
           <p:cNvPr id="15" name="Picture 14" descr="image.png"/>
@@ -7771,17 +9415,87 @@
         </p:blipFill>
         <p:spPr>
           <a:xfrm>
-            <a:off x="923925" y="4795837"/>
-            <a:ext cx="1228725" cy="266700"/>
+            <a:off x="7236916" y="1766887"/>
+            <a:ext cx="148232" cy="190500"/>
           </a:xfrm>
           <a:prstGeom prst="rect">
             <a:avLst/>
           </a:prstGeom>
         </p:spPr>
       </p:pic>
+      <p:sp>
+        <p:nvSpPr>
+          <p:cNvPr id="16" name="TextBox 15"/>
+          <p:cNvSpPr txBox="1"/>
+          <p:nvPr/>
+        </p:nvSpPr>
+        <p:spPr>
+          <a:xfrm>
+            <a:off x="1047750" y="5762625"/>
+            <a:ext cx="3802409" cy="200025"/>
+          </a:xfrm>
+          <a:prstGeom prst="rect">
+            <a:avLst/>
+          </a:prstGeom>
+          <a:noFill/>
+        </p:spPr>
+        <p:txBody>
+          <a:bodyPr wrap="square" lIns="0" rIns="0" tIns="0" bIns="0" anchor="t">
+            <a:spAutoFit/>
+          </a:bodyPr>
+          <a:lstStyle/>
+          <a:p>
+            <a:pPr algn="l"/>
+            <a:r>
+              <a:rPr b="0" sz="1200" i="0" u="none">
+                <a:solidFill>
+                  <a:srgbClr val="475569"/>
+                </a:solidFill>
+                <a:latin typeface="Noto Sans KR"/>
+              </a:rPr>
+              <a:t>사용자 대화형 즉시 질의 및 RAG 기반 정교한 대답 생성</a:t>
+            </a:r>
+          </a:p>
+        </p:txBody>
+      </p:sp>
+      <p:sp>
+        <p:nvSpPr>
+          <p:cNvPr id="17" name="TextBox 16"/>
+          <p:cNvSpPr txBox="1"/>
+          <p:nvPr/>
+        </p:nvSpPr>
+        <p:spPr>
+          <a:xfrm>
+            <a:off x="5440709" y="5762625"/>
+            <a:ext cx="5703540" cy="200025"/>
+          </a:xfrm>
+          <a:prstGeom prst="rect">
+            <a:avLst/>
+          </a:prstGeom>
+          <a:noFill/>
+        </p:spPr>
+        <p:txBody>
+          <a:bodyPr wrap="square" lIns="0" rIns="0" tIns="0" bIns="0" anchor="t">
+            <a:spAutoFit/>
+          </a:bodyPr>
+          <a:lstStyle/>
+          <a:p>
+            <a:pPr algn="l"/>
+            <a:r>
+              <a:rPr b="0" sz="1200" i="0" u="none">
+                <a:solidFill>
+                  <a:srgbClr val="1E293B"/>
+                </a:solidFill>
+                <a:latin typeface="Noto Sans KR"/>
+              </a:rPr>
+              <a:t>실행/보관 주기 설정, 시각화 라이브러리 연동, 이상 데이터 발생 시 Alarm 발송</a:t>
+            </a:r>
+          </a:p>
+        </p:txBody>
+      </p:sp>
       <p:pic>
         <p:nvPicPr>
-          <p:cNvPr id="16" name="Picture 15" descr="image.png"/>
+          <p:cNvPr id="18" name="Picture 17" descr="image.png"/>
           <p:cNvPicPr>
             <a:picLocks noChangeAspect="1"/>
           </p:cNvPicPr>
@@ -7795,17 +9509,52 @@
         </p:blipFill>
         <p:spPr>
           <a:xfrm>
-            <a:off x="6562725" y="4476750"/>
-            <a:ext cx="1140023" cy="285750"/>
+            <a:off x="1047750" y="5495925"/>
+            <a:ext cx="118616" cy="152400"/>
           </a:xfrm>
           <a:prstGeom prst="rect">
             <a:avLst/>
           </a:prstGeom>
         </p:spPr>
       </p:pic>
+      <p:sp>
+        <p:nvSpPr>
+          <p:cNvPr id="19" name="TextBox 18"/>
+          <p:cNvSpPr txBox="1"/>
+          <p:nvPr/>
+        </p:nvSpPr>
+        <p:spPr>
+          <a:xfrm>
+            <a:off x="1242566" y="5457825"/>
+            <a:ext cx="1040286" cy="228600"/>
+          </a:xfrm>
+          <a:prstGeom prst="rect">
+            <a:avLst/>
+          </a:prstGeom>
+          <a:noFill/>
+        </p:spPr>
+        <p:txBody>
+          <a:bodyPr wrap="square" lIns="0" rIns="0" tIns="0" bIns="0" anchor="t">
+            <a:spAutoFit/>
+          </a:bodyPr>
+          <a:lstStyle/>
+          <a:p>
+            <a:pPr algn="l"/>
+            <a:r>
+              <a:rPr b="1" sz="1350" i="0" u="none">
+                <a:solidFill>
+                  <a:srgbClr val="0F172A"/>
+                </a:solidFill>
+                <a:latin typeface="Noto Sans KR"/>
+              </a:rPr>
+              <a:t>일반 Prompt</a:t>
+            </a:r>
+          </a:p>
+        </p:txBody>
+      </p:sp>
       <p:pic>
         <p:nvPicPr>
-          <p:cNvPr id="17" name="Picture 16" descr="image.png"/>
+          <p:cNvPr id="20" name="Picture 19" descr="image.png"/>
           <p:cNvPicPr>
             <a:picLocks noChangeAspect="1"/>
           </p:cNvPicPr>
@@ -7819,216 +9568,48 @@
         </p:blipFill>
         <p:spPr>
           <a:xfrm>
-            <a:off x="7778948" y="4476750"/>
-            <a:ext cx="1159519" cy="285750"/>
+            <a:off x="10272117" y="5486400"/>
+            <a:ext cx="872132" cy="171450"/>
           </a:xfrm>
           <a:prstGeom prst="rect">
             <a:avLst/>
           </a:prstGeom>
         </p:spPr>
       </p:pic>
-    </p:spTree>
-  </p:cSld>
-  <p:clrMapOvr>
-    <a:masterClrMapping/>
-  </p:clrMapOvr>
-</p:sld>
-</file>
-
-<file path=ppt/slides/slide8.xml><?xml version="1.0" encoding="utf-8"?>
-<p:sld xmlns:a="http://schemas.openxmlformats.org/drawingml/2006/main" xmlns:p="http://schemas.openxmlformats.org/presentationml/2006/main" xmlns:r="http://schemas.openxmlformats.org/officeDocument/2006/relationships">
-  <p:cSld>
-    <p:bg>
-      <p:bgPr>
-        <a:solidFill>
-          <a:srgbClr val="FFFFFF"/>
-        </a:solidFill>
-        <a:effectLst/>
-      </p:bgPr>
-    </p:bg>
-    <p:spTree>
-      <p:nvGrpSpPr>
-        <p:cNvPr id="1" name=""/>
-        <p:cNvGrpSpPr/>
-        <p:nvPr/>
-      </p:nvGrpSpPr>
-      <p:grpSpPr/>
-      <p:sp>
-        <p:nvSpPr>
-          <p:cNvPr id="2" name="TextBox 1"/>
-          <p:cNvSpPr txBox="1"/>
-          <p:nvPr/>
-        </p:nvSpPr>
-        <p:spPr>
-          <a:xfrm>
-            <a:off x="609600" y="533400"/>
-            <a:ext cx="10972800" cy="647700"/>
-          </a:xfrm>
-          <a:prstGeom prst="rect">
-            <a:avLst/>
-          </a:prstGeom>
-          <a:noFill/>
-        </p:spPr>
-        <p:txBody>
-          <a:bodyPr wrap="square" lIns="0" rIns="0" tIns="0" bIns="0" anchor="t">
-            <a:spAutoFit/>
-          </a:bodyPr>
-          <a:lstStyle/>
-          <a:p>
-            <a:pPr algn="l"/>
-            <a:r>
-              <a:rPr b="1" sz="1200" i="0" u="none">
-                <a:solidFill>
-                  <a:srgbClr val="2563EB"/>
-                </a:solidFill>
-                <a:latin typeface="Noto Sans KR"/>
-              </a:rPr>
-              <a:t>PROMPT MANAGEMENT</a:t>
-            </a:r>
-          </a:p>
-        </p:txBody>
-      </p:sp>
-      <p:sp>
-        <p:nvSpPr>
-          <p:cNvPr id="3" name="TextBox 2"/>
-          <p:cNvSpPr txBox="1"/>
-          <p:nvPr/>
-        </p:nvSpPr>
-        <p:spPr>
-          <a:xfrm>
-            <a:off x="609600" y="762000"/>
-            <a:ext cx="11521440" cy="419100"/>
-          </a:xfrm>
-          <a:prstGeom prst="rect">
-            <a:avLst/>
-          </a:prstGeom>
-          <a:noFill/>
-        </p:spPr>
-        <p:txBody>
-          <a:bodyPr wrap="square" lIns="0" rIns="0" tIns="0" bIns="0" anchor="t">
-            <a:spAutoFit/>
-          </a:bodyPr>
-          <a:lstStyle/>
-          <a:p>
-            <a:pPr algn="l"/>
-            <a:r>
-              <a:rPr b="0" sz="2400" i="0" u="none">
-                <a:solidFill>
-                  <a:srgbClr val="0F172A"/>
-                </a:solidFill>
-                <a:latin typeface="Noto Sans KR ExtraBold"/>
-              </a:rPr>
-              <a:t>프롬프트 파이프라인 관리 및 엔지니어링 고도화</a:t>
-            </a:r>
-          </a:p>
-        </p:txBody>
-      </p:sp>
       <p:pic>
         <p:nvPicPr>
-          <p:cNvPr id="4" name="Picture 3" descr="image.png"/>
+          <p:cNvPr id="21" name="Picture 20" descr="image.png"/>
           <p:cNvPicPr>
             <a:picLocks noChangeAspect="1"/>
           </p:cNvPicPr>
           <p:nvPr/>
         </p:nvPicPr>
         <p:blipFill>
-          <a:blip r:embed="rId2"/>
+          <a:blip r:embed="rId12"/>
           <a:stretch>
             <a:fillRect/>
           </a:stretch>
         </p:blipFill>
         <p:spPr>
           <a:xfrm>
-            <a:off x="609600" y="3181350"/>
-            <a:ext cx="2600325" cy="1447800"/>
+            <a:off x="5440709" y="5495925"/>
+            <a:ext cx="118616" cy="152400"/>
           </a:xfrm>
           <a:prstGeom prst="rect">
             <a:avLst/>
           </a:prstGeom>
         </p:spPr>
       </p:pic>
-      <p:pic>
-        <p:nvPicPr>
-          <p:cNvPr id="5" name="Picture 4" descr="image.png"/>
-          <p:cNvPicPr>
-            <a:picLocks noChangeAspect="1"/>
-          </p:cNvPicPr>
-          <p:nvPr/>
-        </p:nvPicPr>
-        <p:blipFill>
-          <a:blip r:embed="rId2"/>
-          <a:stretch>
-            <a:fillRect/>
-          </a:stretch>
-        </p:blipFill>
-        <p:spPr>
-          <a:xfrm>
-            <a:off x="3400425" y="3181350"/>
-            <a:ext cx="2600325" cy="1447800"/>
-          </a:xfrm>
-          <a:prstGeom prst="rect">
-            <a:avLst/>
-          </a:prstGeom>
-        </p:spPr>
-      </p:pic>
-      <p:pic>
-        <p:nvPicPr>
-          <p:cNvPr id="6" name="Picture 5" descr="image.png"/>
-          <p:cNvPicPr>
-            <a:picLocks noChangeAspect="1"/>
-          </p:cNvPicPr>
-          <p:nvPr/>
-        </p:nvPicPr>
-        <p:blipFill>
-          <a:blip r:embed="rId2"/>
-          <a:stretch>
-            <a:fillRect/>
-          </a:stretch>
-        </p:blipFill>
-        <p:spPr>
-          <a:xfrm>
-            <a:off x="6191250" y="3181350"/>
-            <a:ext cx="2600325" cy="1447800"/>
-          </a:xfrm>
-          <a:prstGeom prst="rect">
-            <a:avLst/>
-          </a:prstGeom>
-        </p:spPr>
-      </p:pic>
-      <p:pic>
-        <p:nvPicPr>
-          <p:cNvPr id="7" name="Picture 6" descr="image.png"/>
-          <p:cNvPicPr>
-            <a:picLocks noChangeAspect="1"/>
-          </p:cNvPicPr>
-          <p:nvPr/>
-        </p:nvPicPr>
-        <p:blipFill>
-          <a:blip r:embed="rId2"/>
-          <a:stretch>
-            <a:fillRect/>
-          </a:stretch>
-        </p:blipFill>
-        <p:spPr>
-          <a:xfrm>
-            <a:off x="8982075" y="3181350"/>
-            <a:ext cx="2600325" cy="1447800"/>
-          </a:xfrm>
-          <a:prstGeom prst="rect">
-            <a:avLst/>
-          </a:prstGeom>
-        </p:spPr>
-      </p:pic>
-      <p:sp>
-        <p:nvSpPr>
-          <p:cNvPr id="8" name="TextBox 7"/>
-          <p:cNvSpPr txBox="1"/>
-          <p:nvPr/>
-        </p:nvSpPr>
-        <p:spPr>
-          <a:xfrm>
-            <a:off x="838200" y="3409950"/>
-            <a:ext cx="2250281" cy="228600"/>
+      <p:sp>
+        <p:nvSpPr>
+          <p:cNvPr id="22" name="TextBox 21"/>
+          <p:cNvSpPr txBox="1"/>
+          <p:nvPr/>
+        </p:nvSpPr>
+        <p:spPr>
+          <a:xfrm>
+            <a:off x="5635525" y="5457825"/>
+            <a:ext cx="2430303" cy="228600"/>
           </a:xfrm>
           <a:prstGeom prst="rect">
             <a:avLst/>
@@ -8049,252 +9630,7 @@
                 </a:solidFill>
                 <a:latin typeface="Noto Sans KR"/>
               </a:rPr>
-              <a:t>DB 매핑 &amp; JSON 생성</a:t>
-            </a:r>
-          </a:p>
-        </p:txBody>
-      </p:sp>
-      <p:sp>
-        <p:nvSpPr>
-          <p:cNvPr id="9" name="TextBox 8"/>
-          <p:cNvSpPr txBox="1"/>
-          <p:nvPr/>
-        </p:nvSpPr>
-        <p:spPr>
-          <a:xfrm>
-            <a:off x="838200" y="3714750"/>
-            <a:ext cx="2143125" cy="685800"/>
-          </a:xfrm>
-          <a:prstGeom prst="rect">
-            <a:avLst/>
-          </a:prstGeom>
-          <a:noFill/>
-        </p:spPr>
-        <p:txBody>
-          <a:bodyPr wrap="square" lIns="0" rIns="0" tIns="0" bIns="0" anchor="t">
-            <a:spAutoFit/>
-          </a:bodyPr>
-          <a:lstStyle/>
-          <a:p>
-            <a:pPr algn="l"/>
-            <a:r>
-              <a:rPr b="0" sz="1350" i="0" u="none">
-                <a:solidFill>
-                  <a:srgbClr val="334155"/>
-                </a:solidFill>
-                <a:latin typeface="Noto Sans KR"/>
-              </a:rPr>
-              <a:t>Prompt별 JPA Entity Column/Key 일치화로 자동 JSON 저장.</a:t>
-            </a:r>
-          </a:p>
-        </p:txBody>
-      </p:sp>
-      <p:sp>
-        <p:nvSpPr>
-          <p:cNvPr id="10" name="TextBox 9"/>
-          <p:cNvSpPr txBox="1"/>
-          <p:nvPr/>
-        </p:nvSpPr>
-        <p:spPr>
-          <a:xfrm>
-            <a:off x="3629025" y="3409950"/>
-            <a:ext cx="2250281" cy="228600"/>
-          </a:xfrm>
-          <a:prstGeom prst="rect">
-            <a:avLst/>
-          </a:prstGeom>
-          <a:noFill/>
-        </p:spPr>
-        <p:txBody>
-          <a:bodyPr wrap="square" lIns="0" rIns="0" tIns="0" bIns="0" anchor="t">
-            <a:spAutoFit/>
-          </a:bodyPr>
-          <a:lstStyle/>
-          <a:p>
-            <a:pPr algn="l"/>
-            <a:r>
-              <a:rPr b="1" sz="1350" i="0" u="none">
-                <a:solidFill>
-                  <a:srgbClr val="0F172A"/>
-                </a:solidFill>
-                <a:latin typeface="Noto Sans KR"/>
-              </a:rPr>
-              <a:t>GUID 기반 메타 관리</a:t>
-            </a:r>
-          </a:p>
-        </p:txBody>
-      </p:sp>
-      <p:sp>
-        <p:nvSpPr>
-          <p:cNvPr id="11" name="TextBox 10"/>
-          <p:cNvSpPr txBox="1"/>
-          <p:nvPr/>
-        </p:nvSpPr>
-        <p:spPr>
-          <a:xfrm>
-            <a:off x="3629025" y="3714750"/>
-            <a:ext cx="2143125" cy="685800"/>
-          </a:xfrm>
-          <a:prstGeom prst="rect">
-            <a:avLst/>
-          </a:prstGeom>
-          <a:noFill/>
-        </p:spPr>
-        <p:txBody>
-          <a:bodyPr wrap="square" lIns="0" rIns="0" tIns="0" bIns="0" anchor="t">
-            <a:spAutoFit/>
-          </a:bodyPr>
-          <a:lstStyle/>
-          <a:p>
-            <a:pPr algn="l"/>
-            <a:r>
-              <a:rPr b="0" sz="1350" i="0" u="none">
-                <a:solidFill>
-                  <a:srgbClr val="334155"/>
-                </a:solidFill>
-                <a:latin typeface="Noto Sans KR"/>
-              </a:rPr>
-              <a:t>GUID 부여, 실행·보관 주기 관리, Shared Prompt 및 Alarm 설정.</a:t>
-            </a:r>
-          </a:p>
-        </p:txBody>
-      </p:sp>
-      <p:sp>
-        <p:nvSpPr>
-          <p:cNvPr id="12" name="TextBox 11"/>
-          <p:cNvSpPr txBox="1"/>
-          <p:nvPr/>
-        </p:nvSpPr>
-        <p:spPr>
-          <a:xfrm>
-            <a:off x="6419850" y="3409950"/>
-            <a:ext cx="2250281" cy="228600"/>
-          </a:xfrm>
-          <a:prstGeom prst="rect">
-            <a:avLst/>
-          </a:prstGeom>
-          <a:noFill/>
-        </p:spPr>
-        <p:txBody>
-          <a:bodyPr wrap="square" lIns="0" rIns="0" tIns="0" bIns="0" anchor="t">
-            <a:spAutoFit/>
-          </a:bodyPr>
-          <a:lstStyle/>
-          <a:p>
-            <a:pPr algn="l"/>
-            <a:r>
-              <a:rPr b="1" sz="1350" i="0" u="none">
-                <a:solidFill>
-                  <a:srgbClr val="0F172A"/>
-                </a:solidFill>
-                <a:latin typeface="Noto Sans KR"/>
-              </a:rPr>
-              <a:t>시각화 라이브러리 연동</a:t>
-            </a:r>
-          </a:p>
-        </p:txBody>
-      </p:sp>
-      <p:sp>
-        <p:nvSpPr>
-          <p:cNvPr id="13" name="TextBox 12"/>
-          <p:cNvSpPr txBox="1"/>
-          <p:nvPr/>
-        </p:nvSpPr>
-        <p:spPr>
-          <a:xfrm>
-            <a:off x="6419850" y="3714750"/>
-            <a:ext cx="2143125" cy="685800"/>
-          </a:xfrm>
-          <a:prstGeom prst="rect">
-            <a:avLst/>
-          </a:prstGeom>
-          <a:noFill/>
-        </p:spPr>
-        <p:txBody>
-          <a:bodyPr wrap="square" lIns="0" rIns="0" tIns="0" bIns="0" anchor="t">
-            <a:spAutoFit/>
-          </a:bodyPr>
-          <a:lstStyle/>
-          <a:p>
-            <a:pPr algn="l"/>
-            <a:r>
-              <a:rPr b="0" sz="1350" i="0" u="none">
-                <a:solidFill>
-                  <a:srgbClr val="334155"/>
-                </a:solidFill>
-                <a:latin typeface="Noto Sans KR"/>
-              </a:rPr>
-              <a:t>분석 데이터 생성 시 즉시 시각화 차트 및 알람 트리거 자동 작동.</a:t>
-            </a:r>
-          </a:p>
-        </p:txBody>
-      </p:sp>
-      <p:sp>
-        <p:nvSpPr>
-          <p:cNvPr id="14" name="TextBox 13"/>
-          <p:cNvSpPr txBox="1"/>
-          <p:nvPr/>
-        </p:nvSpPr>
-        <p:spPr>
-          <a:xfrm>
-            <a:off x="9210675" y="3409950"/>
-            <a:ext cx="2250281" cy="228600"/>
-          </a:xfrm>
-          <a:prstGeom prst="rect">
-            <a:avLst/>
-          </a:prstGeom>
-          <a:noFill/>
-        </p:spPr>
-        <p:txBody>
-          <a:bodyPr wrap="square" lIns="0" rIns="0" tIns="0" bIns="0" anchor="t">
-            <a:spAutoFit/>
-          </a:bodyPr>
-          <a:lstStyle/>
-          <a:p>
-            <a:pPr algn="l"/>
-            <a:r>
-              <a:rPr b="1" sz="1350" i="0" u="none">
-                <a:solidFill>
-                  <a:srgbClr val="0F172A"/>
-                </a:solidFill>
-                <a:latin typeface="Noto Sans KR"/>
-              </a:rPr>
-              <a:t>LLM 기반 성능 분석</a:t>
-            </a:r>
-          </a:p>
-        </p:txBody>
-      </p:sp>
-      <p:sp>
-        <p:nvSpPr>
-          <p:cNvPr id="15" name="TextBox 14"/>
-          <p:cNvSpPr txBox="1"/>
-          <p:nvPr/>
-        </p:nvSpPr>
-        <p:spPr>
-          <a:xfrm>
-            <a:off x="9210675" y="3714750"/>
-            <a:ext cx="2143125" cy="685800"/>
-          </a:xfrm>
-          <a:prstGeom prst="rect">
-            <a:avLst/>
-          </a:prstGeom>
-          <a:noFill/>
-        </p:spPr>
-        <p:txBody>
-          <a:bodyPr wrap="square" lIns="0" rIns="0" tIns="0" bIns="0" anchor="t">
-            <a:spAutoFit/>
-          </a:bodyPr>
-          <a:lstStyle/>
-          <a:p>
-            <a:pPr algn="l"/>
-            <a:r>
-              <a:rPr b="0" sz="1350" i="0" u="none">
-                <a:solidFill>
-                  <a:srgbClr val="334155"/>
-                </a:solidFill>
-                <a:latin typeface="Noto Sans KR"/>
-              </a:rPr>
-              <a:t>Prompt 통계 및 유효성 LLM 분석을 통한 지속적 엔지니어링 고도화.</a:t>
+              <a:t>자동주기 Prompt (GUID 관리)</a:t>
             </a:r>
           </a:p>
         </p:txBody>
@@ -8325,44 +9661,9 @@
         <p:nvPr/>
       </p:nvGrpSpPr>
       <p:grpSpPr/>
-      <p:sp>
-        <p:nvSpPr>
-          <p:cNvPr id="2" name="TextBox 1"/>
-          <p:cNvSpPr txBox="1"/>
-          <p:nvPr/>
-        </p:nvSpPr>
-        <p:spPr>
-          <a:xfrm>
-            <a:off x="609600" y="495300"/>
-            <a:ext cx="10972800" cy="600075"/>
-          </a:xfrm>
-          <a:prstGeom prst="rect">
-            <a:avLst/>
-          </a:prstGeom>
-          <a:noFill/>
-        </p:spPr>
-        <p:txBody>
-          <a:bodyPr wrap="square" lIns="0" rIns="0" tIns="0" bIns="0" anchor="t">
-            <a:spAutoFit/>
-          </a:bodyPr>
-          <a:lstStyle/>
-          <a:p>
-            <a:pPr algn="l"/>
-            <a:r>
-              <a:rPr b="1" sz="1200" i="0" u="none">
-                <a:solidFill>
-                  <a:srgbClr val="2563EB"/>
-                </a:solidFill>
-                <a:latin typeface="Noto Sans KR"/>
-              </a:rPr>
-              <a:t>ARCHITECTURE DIAGRAM 02</a:t>
-            </a:r>
-          </a:p>
-        </p:txBody>
-      </p:sp>
       <p:pic>
         <p:nvPicPr>
-          <p:cNvPr id="3" name="Picture 2" descr="image.png"/>
+          <p:cNvPr id="2" name="Picture 1" descr="image.png"/>
           <p:cNvPicPr>
             <a:picLocks noChangeAspect="1"/>
           </p:cNvPicPr>
@@ -8376,8 +9677,8 @@
         </p:blipFill>
         <p:spPr>
           <a:xfrm>
-            <a:off x="876300" y="1590675"/>
-            <a:ext cx="10439400" cy="704850"/>
+            <a:off x="609600" y="2381250"/>
+            <a:ext cx="5314950" cy="3048000"/>
           </a:xfrm>
           <a:prstGeom prst="rect">
             <a:avLst/>
@@ -8386,7 +9687,101 @@
       </p:pic>
       <p:pic>
         <p:nvPicPr>
-          <p:cNvPr id="4" name="Picture 3" descr="image.png"/>
+          <p:cNvPr id="3" name="Picture 2" descr="image.png"/>
+          <p:cNvPicPr>
+            <a:picLocks noChangeAspect="1"/>
+          </p:cNvPicPr>
+          <p:nvPr/>
+        </p:nvPicPr>
+        <p:blipFill>
+          <a:blip r:embed="rId2"/>
+          <a:stretch>
+            <a:fillRect/>
+          </a:stretch>
+        </p:blipFill>
+        <p:spPr>
+          <a:xfrm>
+            <a:off x="6267450" y="2495550"/>
+            <a:ext cx="5314950" cy="2819400"/>
+          </a:xfrm>
+          <a:prstGeom prst="rect">
+            <a:avLst/>
+          </a:prstGeom>
+        </p:spPr>
+      </p:pic>
+      <p:sp>
+        <p:nvSpPr>
+          <p:cNvPr id="4" name="TextBox 3"/>
+          <p:cNvSpPr txBox="1"/>
+          <p:nvPr/>
+        </p:nvSpPr>
+        <p:spPr>
+          <a:xfrm>
+            <a:off x="609600" y="533400"/>
+            <a:ext cx="10972800" cy="647700"/>
+          </a:xfrm>
+          <a:prstGeom prst="rect">
+            <a:avLst/>
+          </a:prstGeom>
+          <a:noFill/>
+        </p:spPr>
+        <p:txBody>
+          <a:bodyPr wrap="square" lIns="0" rIns="0" tIns="0" bIns="0" anchor="t">
+            <a:spAutoFit/>
+          </a:bodyPr>
+          <a:lstStyle/>
+          <a:p>
+            <a:pPr algn="l"/>
+            <a:r>
+              <a:rPr b="1" sz="1200" i="0" u="none">
+                <a:solidFill>
+                  <a:srgbClr val="2563EB"/>
+                </a:solidFill>
+                <a:latin typeface="Noto Sans KR"/>
+              </a:rPr>
+              <a:t>PROMPT GOVERNANCE</a:t>
+            </a:r>
+          </a:p>
+        </p:txBody>
+      </p:sp>
+      <p:sp>
+        <p:nvSpPr>
+          <p:cNvPr id="5" name="TextBox 4"/>
+          <p:cNvSpPr txBox="1"/>
+          <p:nvPr/>
+        </p:nvSpPr>
+        <p:spPr>
+          <a:xfrm>
+            <a:off x="609600" y="762000"/>
+            <a:ext cx="11521440" cy="419100"/>
+          </a:xfrm>
+          <a:prstGeom prst="rect">
+            <a:avLst/>
+          </a:prstGeom>
+          <a:noFill/>
+        </p:spPr>
+        <p:txBody>
+          <a:bodyPr wrap="square" lIns="0" rIns="0" tIns="0" bIns="0" anchor="t">
+            <a:spAutoFit/>
+          </a:bodyPr>
+          <a:lstStyle/>
+          <a:p>
+            <a:pPr algn="l"/>
+            <a:r>
+              <a:rPr b="0" sz="2400" i="0" u="none">
+                <a:solidFill>
+                  <a:srgbClr val="0F172A"/>
+                </a:solidFill>
+                <a:latin typeface="Noto Sans KR ExtraBold"/>
+              </a:rPr>
+              <a:t>자동주기 Prompt 관제 및 엔지니어링 고도화</a:t>
+            </a:r>
+          </a:p>
+        </p:txBody>
+      </p:sp>
+      <p:pic>
+        <p:nvPicPr>
+          <p:cNvPr id="6" name="Picture 5" descr="image.png"/>
           <p:cNvPicPr>
             <a:picLocks noChangeAspect="1"/>
           </p:cNvPicPr>
@@ -8400,8 +9795,8 @@
         </p:blipFill>
         <p:spPr>
           <a:xfrm>
-            <a:off x="876300" y="5562600"/>
-            <a:ext cx="10439400" cy="533400"/>
+            <a:off x="923925" y="2695575"/>
+            <a:ext cx="381000" cy="381000"/>
           </a:xfrm>
           <a:prstGeom prst="rect">
             <a:avLst/>
@@ -8410,14 +9805,14 @@
       </p:pic>
       <p:sp>
         <p:nvSpPr>
-          <p:cNvPr id="5" name="TextBox 4"/>
-          <p:cNvSpPr txBox="1"/>
-          <p:nvPr/>
-        </p:nvSpPr>
-        <p:spPr>
-          <a:xfrm>
-            <a:off x="609600" y="704850"/>
-            <a:ext cx="11521440" cy="390525"/>
+          <p:cNvPr id="7" name="TextBox 6"/>
+          <p:cNvSpPr txBox="1"/>
+          <p:nvPr/>
+        </p:nvSpPr>
+        <p:spPr>
+          <a:xfrm>
+            <a:off x="923925" y="3228975"/>
+            <a:ext cx="4920615" cy="285750"/>
           </a:xfrm>
           <a:prstGeom prst="rect">
             <a:avLst/>
@@ -8432,20 +9827,20 @@
           <a:p>
             <a:pPr algn="l"/>
             <a:r>
-              <a:rPr b="0" sz="2250" i="0" u="none">
+              <a:rPr b="1" sz="1650" i="0" u="none">
                 <a:solidFill>
                   <a:srgbClr val="0F172A"/>
                 </a:solidFill>
-                <a:latin typeface="Noto Sans KR ExtraBold"/>
-              </a:rPr>
-              <a:t>운영 AI Agent &amp; MES Tool 서비스 전체 시스템 구성도</a:t>
+                <a:latin typeface="Noto Sans KR"/>
+              </a:rPr>
+              <a:t>GUID 기반 DB 메타 관리</a:t>
             </a:r>
           </a:p>
         </p:txBody>
       </p:sp>
       <p:pic>
         <p:nvPicPr>
-          <p:cNvPr id="6" name="Picture 5" descr="image.png"/>
+          <p:cNvPr id="8" name="Picture 7" descr="image.png"/>
           <p:cNvPicPr>
             <a:picLocks noChangeAspect="1"/>
           </p:cNvPicPr>
@@ -8459,17 +9854,52 @@
         </p:blipFill>
         <p:spPr>
           <a:xfrm>
-            <a:off x="6419403" y="1866900"/>
-            <a:ext cx="118616" cy="152400"/>
+            <a:off x="6581775" y="2809875"/>
+            <a:ext cx="381000" cy="381000"/>
           </a:xfrm>
           <a:prstGeom prst="rect">
             <a:avLst/>
           </a:prstGeom>
         </p:spPr>
       </p:pic>
+      <p:sp>
+        <p:nvSpPr>
+          <p:cNvPr id="9" name="TextBox 8"/>
+          <p:cNvSpPr txBox="1"/>
+          <p:nvPr/>
+        </p:nvSpPr>
+        <p:spPr>
+          <a:xfrm>
+            <a:off x="6581775" y="3343275"/>
+            <a:ext cx="4920615" cy="285750"/>
+          </a:xfrm>
+          <a:prstGeom prst="rect">
+            <a:avLst/>
+          </a:prstGeom>
+          <a:noFill/>
+        </p:spPr>
+        <p:txBody>
+          <a:bodyPr wrap="square" lIns="0" rIns="0" tIns="0" bIns="0" anchor="t">
+            <a:spAutoFit/>
+          </a:bodyPr>
+          <a:lstStyle/>
+          <a:p>
+            <a:pPr algn="l"/>
+            <a:r>
+              <a:rPr b="1" sz="1650" i="0" u="none">
+                <a:solidFill>
+                  <a:srgbClr val="0F172A"/>
+                </a:solidFill>
+                <a:latin typeface="Noto Sans KR"/>
+              </a:rPr>
+              <a:t>프롬프트 엔지니어링 고도화</a:t>
+            </a:r>
+          </a:p>
+        </p:txBody>
+      </p:sp>
       <p:pic>
         <p:nvPicPr>
-          <p:cNvPr id="7" name="Picture 6" descr="image.png"/>
+          <p:cNvPr id="10" name="Picture 9" descr="image.png"/>
           <p:cNvPicPr>
             <a:picLocks noChangeAspect="1"/>
           </p:cNvPicPr>
@@ -8483,17 +9913,193 @@
         </p:blipFill>
         <p:spPr>
           <a:xfrm>
-            <a:off x="9026276" y="1781175"/>
-            <a:ext cx="2060823" cy="323850"/>
+            <a:off x="1040308" y="2790825"/>
+            <a:ext cx="148232" cy="190500"/>
           </a:xfrm>
           <a:prstGeom prst="rect">
             <a:avLst/>
           </a:prstGeom>
         </p:spPr>
       </p:pic>
+      <p:sp>
+        <p:nvSpPr>
+          <p:cNvPr id="11" name="TextBox 10"/>
+          <p:cNvSpPr txBox="1"/>
+          <p:nvPr/>
+        </p:nvSpPr>
+        <p:spPr>
+          <a:xfrm>
+            <a:off x="923925" y="3629025"/>
+            <a:ext cx="4686300" cy="228600"/>
+          </a:xfrm>
+          <a:prstGeom prst="rect">
+            <a:avLst/>
+          </a:prstGeom>
+          <a:noFill/>
+        </p:spPr>
+        <p:txBody>
+          <a:bodyPr wrap="square" lIns="0" rIns="0" tIns="0" bIns="0" anchor="t">
+            <a:spAutoFit/>
+          </a:bodyPr>
+          <a:lstStyle/>
+          <a:p>
+            <a:pPr algn="l"/>
+            <a:r>
+              <a:rPr b="1" sz="1350" i="0" u="none">
+                <a:solidFill>
+                  <a:srgbClr val="334155"/>
+                </a:solidFill>
+                <a:latin typeface="Noto Sans KR"/>
+              </a:rPr>
+              <a:t>고유 식별자:</a:t>
+            </a:r>
+            <a:r>
+              <a:rPr b="0" sz="1350" i="0" u="none">
+                <a:solidFill>
+                  <a:srgbClr val="334155"/>
+                </a:solidFill>
+                <a:latin typeface="Noto Sans KR"/>
+              </a:rPr>
+              <a:t> 모든 자동주기 Prompt에 GUID 부여</a:t>
+            </a:r>
+          </a:p>
+        </p:txBody>
+      </p:sp>
+      <p:sp>
+        <p:nvSpPr>
+          <p:cNvPr id="12" name="TextBox 11"/>
+          <p:cNvSpPr txBox="1"/>
+          <p:nvPr/>
+        </p:nvSpPr>
+        <p:spPr>
+          <a:xfrm>
+            <a:off x="923925" y="3971925"/>
+            <a:ext cx="4686300" cy="228600"/>
+          </a:xfrm>
+          <a:prstGeom prst="rect">
+            <a:avLst/>
+          </a:prstGeom>
+          <a:noFill/>
+        </p:spPr>
+        <p:txBody>
+          <a:bodyPr wrap="square" lIns="0" rIns="0" tIns="0" bIns="0" anchor="t">
+            <a:spAutoFit/>
+          </a:bodyPr>
+          <a:lstStyle/>
+          <a:p>
+            <a:pPr algn="l"/>
+            <a:r>
+              <a:rPr b="1" sz="1350" i="0" u="none">
+                <a:solidFill>
+                  <a:srgbClr val="334155"/>
+                </a:solidFill>
+                <a:latin typeface="Noto Sans KR"/>
+              </a:rPr>
+              <a:t>주기 제어:</a:t>
+            </a:r>
+            <a:r>
+              <a:rPr b="0" sz="1350" i="0" u="none">
+                <a:solidFill>
+                  <a:srgbClr val="334155"/>
+                </a:solidFill>
+                <a:latin typeface="Noto Sans KR"/>
+              </a:rPr>
+              <a:t> 실행 주기 및 결과 데이터 보관 주기 세부 설정</a:t>
+            </a:r>
+          </a:p>
+        </p:txBody>
+      </p:sp>
+      <p:sp>
+        <p:nvSpPr>
+          <p:cNvPr id="13" name="TextBox 12"/>
+          <p:cNvSpPr txBox="1"/>
+          <p:nvPr/>
+        </p:nvSpPr>
+        <p:spPr>
+          <a:xfrm>
+            <a:off x="923925" y="4314825"/>
+            <a:ext cx="4686300" cy="457200"/>
+          </a:xfrm>
+          <a:prstGeom prst="rect">
+            <a:avLst/>
+          </a:prstGeom>
+          <a:noFill/>
+        </p:spPr>
+        <p:txBody>
+          <a:bodyPr wrap="square" lIns="0" rIns="0" tIns="0" bIns="0" anchor="t">
+            <a:spAutoFit/>
+          </a:bodyPr>
+          <a:lstStyle/>
+          <a:p>
+            <a:pPr algn="l"/>
+            <a:r>
+              <a:rPr b="1" sz="1350" i="0" u="none">
+                <a:solidFill>
+                  <a:srgbClr val="334155"/>
+                </a:solidFill>
+                <a:latin typeface="Noto Sans KR"/>
+              </a:rPr>
+              <a:t>공유 &amp; 시각화:</a:t>
+            </a:r>
+            <a:r>
+              <a:rPr b="0" sz="1350" i="0" u="none">
+                <a:solidFill>
+                  <a:srgbClr val="334155"/>
+                </a:solidFill>
+                <a:latin typeface="Noto Sans KR"/>
+              </a:rPr>
+              <a:t> 공유 프롬프트 및 대시보드 차트 라이브러리 연동</a:t>
+            </a:r>
+          </a:p>
+        </p:txBody>
+      </p:sp>
+      <p:sp>
+        <p:nvSpPr>
+          <p:cNvPr id="14" name="TextBox 13"/>
+          <p:cNvSpPr txBox="1"/>
+          <p:nvPr/>
+        </p:nvSpPr>
+        <p:spPr>
+          <a:xfrm>
+            <a:off x="923925" y="4886325"/>
+            <a:ext cx="4686300" cy="228600"/>
+          </a:xfrm>
+          <a:prstGeom prst="rect">
+            <a:avLst/>
+          </a:prstGeom>
+          <a:noFill/>
+        </p:spPr>
+        <p:txBody>
+          <a:bodyPr wrap="square" lIns="0" rIns="0" tIns="0" bIns="0" anchor="t">
+            <a:spAutoFit/>
+          </a:bodyPr>
+          <a:lstStyle/>
+          <a:p>
+            <a:pPr algn="l"/>
+            <a:r>
+              <a:rPr b="1" sz="1350" i="0" u="none">
+                <a:solidFill>
+                  <a:srgbClr val="334155"/>
+                </a:solidFill>
+                <a:latin typeface="Noto Sans KR"/>
+              </a:rPr>
+              <a:t>알람 모니터링:</a:t>
+            </a:r>
+            <a:r>
+              <a:rPr b="0" sz="1350" i="0" u="none">
+                <a:solidFill>
+                  <a:srgbClr val="334155"/>
+                </a:solidFill>
+                <a:latin typeface="Noto Sans KR"/>
+              </a:rPr>
+              <a:t> Data 이상치 감지 시 즉시 Alarm 발송</a:t>
+            </a:r>
+          </a:p>
+        </p:txBody>
+      </p:sp>
       <p:pic>
         <p:nvPicPr>
-          <p:cNvPr id="8" name="Picture 7" descr="image.png"/>
+          <p:cNvPr id="15" name="Picture 14" descr="image.png"/>
           <p:cNvPicPr>
             <a:picLocks noChangeAspect="1"/>
           </p:cNvPicPr>
@@ -8507,168 +10113,24 @@
         </p:blipFill>
         <p:spPr>
           <a:xfrm>
-            <a:off x="876300" y="3405187"/>
-            <a:ext cx="3378249" cy="1047750"/>
+            <a:off x="6698158" y="2905125"/>
+            <a:ext cx="148232" cy="190500"/>
           </a:xfrm>
           <a:prstGeom prst="rect">
             <a:avLst/>
           </a:prstGeom>
         </p:spPr>
       </p:pic>
-      <p:pic>
-        <p:nvPicPr>
-          <p:cNvPr id="9" name="Picture 8" descr="image.png"/>
-          <p:cNvPicPr>
-            <a:picLocks noChangeAspect="1"/>
-          </p:cNvPicPr>
-          <p:nvPr/>
-        </p:nvPicPr>
-        <p:blipFill>
-          <a:blip r:embed="rId7"/>
-          <a:stretch>
-            <a:fillRect/>
-          </a:stretch>
-        </p:blipFill>
-        <p:spPr>
-          <a:xfrm>
-            <a:off x="4406949" y="3405187"/>
-            <a:ext cx="3378249" cy="1047750"/>
-          </a:xfrm>
-          <a:prstGeom prst="rect">
-            <a:avLst/>
-          </a:prstGeom>
-        </p:spPr>
-      </p:pic>
-      <p:pic>
-        <p:nvPicPr>
-          <p:cNvPr id="10" name="Picture 9" descr="image.png"/>
-          <p:cNvPicPr>
-            <a:picLocks noChangeAspect="1"/>
-          </p:cNvPicPr>
-          <p:nvPr/>
-        </p:nvPicPr>
-        <p:blipFill>
-          <a:blip r:embed="rId8"/>
-          <a:stretch>
-            <a:fillRect/>
-          </a:stretch>
-        </p:blipFill>
-        <p:spPr>
-          <a:xfrm>
-            <a:off x="7937599" y="3405187"/>
-            <a:ext cx="3378249" cy="1047750"/>
-          </a:xfrm>
-          <a:prstGeom prst="rect">
-            <a:avLst/>
-          </a:prstGeom>
-        </p:spPr>
-      </p:pic>
-      <p:pic>
-        <p:nvPicPr>
-          <p:cNvPr id="11" name="Picture 10" descr="image.png"/>
-          <p:cNvPicPr>
-            <a:picLocks noChangeAspect="1"/>
-          </p:cNvPicPr>
-          <p:nvPr/>
-        </p:nvPicPr>
-        <p:blipFill>
-          <a:blip r:embed="rId9"/>
-          <a:stretch>
-            <a:fillRect/>
-          </a:stretch>
-        </p:blipFill>
-        <p:spPr>
-          <a:xfrm>
-            <a:off x="1104900" y="1847850"/>
-            <a:ext cx="148232" cy="190500"/>
-          </a:xfrm>
-          <a:prstGeom prst="rect">
-            <a:avLst/>
-          </a:prstGeom>
-        </p:spPr>
-      </p:pic>
-      <p:pic>
-        <p:nvPicPr>
-          <p:cNvPr id="12" name="Picture 11" descr="image.png"/>
-          <p:cNvPicPr>
-            <a:picLocks noChangeAspect="1"/>
-          </p:cNvPicPr>
-          <p:nvPr/>
-        </p:nvPicPr>
-        <p:blipFill>
-          <a:blip r:embed="rId10"/>
-          <a:stretch>
-            <a:fillRect/>
-          </a:stretch>
-        </p:blipFill>
-        <p:spPr>
-          <a:xfrm>
-            <a:off x="1104900" y="5734050"/>
-            <a:ext cx="148232" cy="190500"/>
-          </a:xfrm>
-          <a:prstGeom prst="rect">
-            <a:avLst/>
-          </a:prstGeom>
-        </p:spPr>
-      </p:pic>
-      <p:pic>
-        <p:nvPicPr>
-          <p:cNvPr id="13" name="Picture 12" descr="image.png"/>
-          <p:cNvPicPr>
-            <a:picLocks noChangeAspect="1"/>
-          </p:cNvPicPr>
-          <p:nvPr/>
-        </p:nvPicPr>
-        <p:blipFill>
-          <a:blip r:embed="rId11"/>
-          <a:stretch>
-            <a:fillRect/>
-          </a:stretch>
-        </p:blipFill>
-        <p:spPr>
-          <a:xfrm>
-            <a:off x="4969222" y="5734050"/>
-            <a:ext cx="148232" cy="190500"/>
-          </a:xfrm>
-          <a:prstGeom prst="rect">
-            <a:avLst/>
-          </a:prstGeom>
-        </p:spPr>
-      </p:pic>
-      <p:pic>
-        <p:nvPicPr>
-          <p:cNvPr id="14" name="Picture 13" descr="image.png"/>
-          <p:cNvPicPr>
-            <a:picLocks noChangeAspect="1"/>
-          </p:cNvPicPr>
-          <p:nvPr/>
-        </p:nvPicPr>
-        <p:blipFill>
-          <a:blip r:embed="rId12"/>
-          <a:stretch>
-            <a:fillRect/>
-          </a:stretch>
-        </p:blipFill>
-        <p:spPr>
-          <a:xfrm>
-            <a:off x="8852743" y="5734050"/>
-            <a:ext cx="148232" cy="190500"/>
-          </a:xfrm>
-          <a:prstGeom prst="rect">
-            <a:avLst/>
-          </a:prstGeom>
-        </p:spPr>
-      </p:pic>
-      <p:sp>
-        <p:nvSpPr>
-          <p:cNvPr id="15" name="TextBox 14"/>
-          <p:cNvSpPr txBox="1"/>
-          <p:nvPr/>
-        </p:nvSpPr>
-        <p:spPr>
-          <a:xfrm>
-            <a:off x="1076325" y="3605212"/>
-            <a:ext cx="2978199" cy="152400"/>
+      <p:sp>
+        <p:nvSpPr>
+          <p:cNvPr id="16" name="TextBox 15"/>
+          <p:cNvSpPr txBox="1"/>
+          <p:nvPr/>
+        </p:nvSpPr>
+        <p:spPr>
+          <a:xfrm>
+            <a:off x="6581775" y="3743325"/>
+            <a:ext cx="4686300" cy="228600"/>
           </a:xfrm>
           <a:prstGeom prst="rect">
             <a:avLst/>
@@ -8683,27 +10145,36 @@
           <a:p>
             <a:pPr algn="l"/>
             <a:r>
-              <a:rPr b="1" sz="1050" i="0" u="none">
-                <a:solidFill>
-                  <a:srgbClr val="93C5FD"/>
-                </a:solidFill>
-                <a:latin typeface="Noto Sans KR"/>
-              </a:rPr>
-              <a:t>PROMPT METADATA DB</a:t>
-            </a:r>
-          </a:p>
-        </p:txBody>
-      </p:sp>
-      <p:sp>
-        <p:nvSpPr>
-          <p:cNvPr id="16" name="TextBox 15"/>
-          <p:cNvSpPr txBox="1"/>
-          <p:nvPr/>
-        </p:nvSpPr>
-        <p:spPr>
-          <a:xfrm>
-            <a:off x="1076325" y="3814762"/>
-            <a:ext cx="2978199" cy="228600"/>
+              <a:rPr b="1" sz="1350" i="0" u="none">
+                <a:solidFill>
+                  <a:srgbClr val="334155"/>
+                </a:solidFill>
+                <a:latin typeface="Noto Sans KR"/>
+              </a:rPr>
+              <a:t>LLM 자체 분석:</a:t>
+            </a:r>
+            <a:r>
+              <a:rPr b="0" sz="1350" i="0" u="none">
+                <a:solidFill>
+                  <a:srgbClr val="334155"/>
+                </a:solidFill>
+                <a:latin typeface="Noto Sans KR"/>
+              </a:rPr>
+              <a:t> 프롬프트 구문 및 응답 유효성 LLM 분석</a:t>
+            </a:r>
+          </a:p>
+        </p:txBody>
+      </p:sp>
+      <p:sp>
+        <p:nvSpPr>
+          <p:cNvPr id="17" name="TextBox 16"/>
+          <p:cNvSpPr txBox="1"/>
+          <p:nvPr/>
+        </p:nvSpPr>
+        <p:spPr>
+          <a:xfrm>
+            <a:off x="6581775" y="4086225"/>
+            <a:ext cx="4686300" cy="228600"/>
           </a:xfrm>
           <a:prstGeom prst="rect">
             <a:avLst/>
@@ -8720,25 +10191,34 @@
             <a:r>
               <a:rPr b="1" sz="1350" i="0" u="none">
                 <a:solidFill>
-                  <a:srgbClr val="FFFFFF"/>
-                </a:solidFill>
-                <a:latin typeface="Noto Sans KR"/>
-              </a:rPr>
-              <a:t>JPA Entity Column 매핑</a:t>
-            </a:r>
-          </a:p>
-        </p:txBody>
-      </p:sp>
-      <p:sp>
-        <p:nvSpPr>
-          <p:cNvPr id="17" name="TextBox 16"/>
-          <p:cNvSpPr txBox="1"/>
-          <p:nvPr/>
-        </p:nvSpPr>
-        <p:spPr>
-          <a:xfrm>
-            <a:off x="1076325" y="4081462"/>
-            <a:ext cx="2978199" cy="171450"/>
+                  <a:srgbClr val="334155"/>
+                </a:solidFill>
+                <a:latin typeface="Noto Sans KR"/>
+              </a:rPr>
+              <a:t>사용 통계 관리:</a:t>
+            </a:r>
+            <a:r>
+              <a:rPr b="0" sz="1350" i="0" u="none">
+                <a:solidFill>
+                  <a:srgbClr val="334155"/>
+                </a:solidFill>
+                <a:latin typeface="Noto Sans KR"/>
+              </a:rPr>
+              <a:t> 프롬프트별 호출 빈도 및 성공률 통계화</a:t>
+            </a:r>
+          </a:p>
+        </p:txBody>
+      </p:sp>
+      <p:sp>
+        <p:nvSpPr>
+          <p:cNvPr id="18" name="TextBox 17"/>
+          <p:cNvSpPr txBox="1"/>
+          <p:nvPr/>
+        </p:nvSpPr>
+        <p:spPr>
+          <a:xfrm>
+            <a:off x="6581775" y="4429125"/>
+            <a:ext cx="4686300" cy="228600"/>
           </a:xfrm>
           <a:prstGeom prst="rect">
             <a:avLst/>
@@ -8753,27 +10233,36 @@
           <a:p>
             <a:pPr algn="l"/>
             <a:r>
-              <a:rPr b="0" sz="1050" i="0" u="none">
-                <a:solidFill>
-                  <a:srgbClr val="CBD5E1"/>
-                </a:solidFill>
-                <a:latin typeface="Noto Sans KR"/>
-              </a:rPr>
-              <a:t>JSON 자동 변환 및 보관주기 관리</a:t>
-            </a:r>
-          </a:p>
-        </p:txBody>
-      </p:sp>
-      <p:sp>
-        <p:nvSpPr>
-          <p:cNvPr id="18" name="TextBox 17"/>
-          <p:cNvSpPr txBox="1"/>
-          <p:nvPr/>
-        </p:nvSpPr>
-        <p:spPr>
-          <a:xfrm>
-            <a:off x="4606974" y="3605212"/>
-            <a:ext cx="2978199" cy="152400"/>
+              <a:rPr b="1" sz="1350" i="0" u="none">
+                <a:solidFill>
+                  <a:srgbClr val="334155"/>
+                </a:solidFill>
+                <a:latin typeface="Noto Sans KR"/>
+              </a:rPr>
+              <a:t>분석 모델 발굴:</a:t>
+            </a:r>
+            <a:r>
+              <a:rPr b="0" sz="1350" i="0" u="none">
+                <a:solidFill>
+                  <a:srgbClr val="334155"/>
+                </a:solidFill>
+                <a:latin typeface="Noto Sans KR"/>
+              </a:rPr>
+              <a:t> 데이터 분석 유효성에 따른 모델 지속적 튜닝</a:t>
+            </a:r>
+          </a:p>
+        </p:txBody>
+      </p:sp>
+      <p:sp>
+        <p:nvSpPr>
+          <p:cNvPr id="19" name="TextBox 18"/>
+          <p:cNvSpPr txBox="1"/>
+          <p:nvPr/>
+        </p:nvSpPr>
+        <p:spPr>
+          <a:xfrm>
+            <a:off x="6581775" y="4772025"/>
+            <a:ext cx="4686300" cy="228600"/>
           </a:xfrm>
           <a:prstGeom prst="rect">
             <a:avLst/>
@@ -8788,363 +10277,22 @@
           <a:p>
             <a:pPr algn="l"/>
             <a:r>
-              <a:rPr b="1" sz="1050" i="0" u="none">
-                <a:solidFill>
-                  <a:srgbClr val="A7F3D0"/>
-                </a:solidFill>
-                <a:latin typeface="Noto Sans KR"/>
-              </a:rPr>
-              <a:t>MES CORE TOOL API</a:t>
-            </a:r>
-          </a:p>
-        </p:txBody>
-      </p:sp>
-      <p:sp>
-        <p:nvSpPr>
-          <p:cNvPr id="19" name="TextBox 18"/>
-          <p:cNvSpPr txBox="1"/>
-          <p:nvPr/>
-        </p:nvSpPr>
-        <p:spPr>
-          <a:xfrm>
-            <a:off x="4606974" y="3814762"/>
-            <a:ext cx="2978199" cy="228600"/>
-          </a:xfrm>
-          <a:prstGeom prst="rect">
-            <a:avLst/>
-          </a:prstGeom>
-          <a:noFill/>
-        </p:spPr>
-        <p:txBody>
-          <a:bodyPr wrap="square" lIns="0" rIns="0" tIns="0" bIns="0" anchor="t">
-            <a:spAutoFit/>
-          </a:bodyPr>
-          <a:lstStyle/>
-          <a:p>
-            <a:pPr algn="l"/>
-            <a:r>
               <a:rPr b="1" sz="1350" i="0" u="none">
                 <a:solidFill>
-                  <a:srgbClr val="FFFFFF"/>
-                </a:solidFill>
-                <a:latin typeface="Noto Sans KR"/>
-              </a:rPr>
-              <a:t>WO / LOT / 설비 / Process</a:t>
-            </a:r>
-          </a:p>
-        </p:txBody>
-      </p:sp>
-      <p:sp>
-        <p:nvSpPr>
-          <p:cNvPr id="20" name="TextBox 19"/>
-          <p:cNvSpPr txBox="1"/>
-          <p:nvPr/>
-        </p:nvSpPr>
-        <p:spPr>
-          <a:xfrm>
-            <a:off x="4606974" y="4081462"/>
-            <a:ext cx="2978199" cy="171450"/>
-          </a:xfrm>
-          <a:prstGeom prst="rect">
-            <a:avLst/>
-          </a:prstGeom>
-          <a:noFill/>
-        </p:spPr>
-        <p:txBody>
-          <a:bodyPr wrap="square" lIns="0" rIns="0" tIns="0" bIns="0" anchor="t">
-            <a:spAutoFit/>
-          </a:bodyPr>
-          <a:lstStyle/>
-          <a:p>
-            <a:pPr algn="l"/>
-            <a:r>
-              <a:rPr b="0" sz="1050" i="0" u="none">
-                <a:solidFill>
-                  <a:srgbClr val="CBD5E1"/>
-                </a:solidFill>
-                <a:latin typeface="Noto Sans KR"/>
-              </a:rPr>
-              <a:t>TRACKIN-OUT &amp; 통신 Log 파싱</a:t>
-            </a:r>
-          </a:p>
-        </p:txBody>
-      </p:sp>
-      <p:sp>
-        <p:nvSpPr>
-          <p:cNvPr id="21" name="TextBox 20"/>
-          <p:cNvSpPr txBox="1"/>
-          <p:nvPr/>
-        </p:nvSpPr>
-        <p:spPr>
-          <a:xfrm>
-            <a:off x="8137624" y="3605212"/>
-            <a:ext cx="2978199" cy="152400"/>
-          </a:xfrm>
-          <a:prstGeom prst="rect">
-            <a:avLst/>
-          </a:prstGeom>
-          <a:noFill/>
-        </p:spPr>
-        <p:txBody>
-          <a:bodyPr wrap="square" lIns="0" rIns="0" tIns="0" bIns="0" anchor="t">
-            <a:spAutoFit/>
-          </a:bodyPr>
-          <a:lstStyle/>
-          <a:p>
-            <a:pPr algn="l"/>
-            <a:r>
-              <a:rPr b="1" sz="1050" i="0" u="none">
-                <a:solidFill>
-                  <a:srgbClr val="E9D5FF"/>
-                </a:solidFill>
-                <a:latin typeface="Noto Sans KR"/>
-              </a:rPr>
-              <a:t>PROMPT HIGH-ADVANCED</a:t>
-            </a:r>
-          </a:p>
-        </p:txBody>
-      </p:sp>
-      <p:sp>
-        <p:nvSpPr>
-          <p:cNvPr id="22" name="TextBox 21"/>
-          <p:cNvSpPr txBox="1"/>
-          <p:nvPr/>
-        </p:nvSpPr>
-        <p:spPr>
-          <a:xfrm>
-            <a:off x="8137624" y="3814762"/>
-            <a:ext cx="2978199" cy="228600"/>
-          </a:xfrm>
-          <a:prstGeom prst="rect">
-            <a:avLst/>
-          </a:prstGeom>
-          <a:noFill/>
-        </p:spPr>
-        <p:txBody>
-          <a:bodyPr wrap="square" lIns="0" rIns="0" tIns="0" bIns="0" anchor="t">
-            <a:spAutoFit/>
-          </a:bodyPr>
-          <a:lstStyle/>
-          <a:p>
-            <a:pPr algn="l"/>
-            <a:r>
-              <a:rPr b="1" sz="1350" i="0" u="none">
-                <a:solidFill>
-                  <a:srgbClr val="FFFFFF"/>
-                </a:solidFill>
-                <a:latin typeface="Noto Sans KR"/>
-              </a:rPr>
-              <a:t>LLM 프롬프트 분석</a:t>
-            </a:r>
-          </a:p>
-        </p:txBody>
-      </p:sp>
-      <p:sp>
-        <p:nvSpPr>
-          <p:cNvPr id="23" name="TextBox 22"/>
-          <p:cNvSpPr txBox="1"/>
-          <p:nvPr/>
-        </p:nvSpPr>
-        <p:spPr>
-          <a:xfrm>
-            <a:off x="8137624" y="4081462"/>
-            <a:ext cx="2978199" cy="171450"/>
-          </a:xfrm>
-          <a:prstGeom prst="rect">
-            <a:avLst/>
-          </a:prstGeom>
-          <a:noFill/>
-        </p:spPr>
-        <p:txBody>
-          <a:bodyPr wrap="square" lIns="0" rIns="0" tIns="0" bIns="0" anchor="t">
-            <a:spAutoFit/>
-          </a:bodyPr>
-          <a:lstStyle/>
-          <a:p>
-            <a:pPr algn="l"/>
-            <a:r>
-              <a:rPr b="0" sz="1050" i="0" u="none">
-                <a:solidFill>
-                  <a:srgbClr val="CBD5E1"/>
-                </a:solidFill>
-                <a:latin typeface="Noto Sans KR"/>
-              </a:rPr>
-              <a:t>사용 통계 &amp; 데이터 유효성 검증</a:t>
-            </a:r>
-          </a:p>
-        </p:txBody>
-      </p:sp>
-      <p:sp>
-        <p:nvSpPr>
-          <p:cNvPr id="24" name="TextBox 23"/>
-          <p:cNvSpPr txBox="1"/>
-          <p:nvPr/>
-        </p:nvSpPr>
-        <p:spPr>
-          <a:xfrm>
-            <a:off x="1405532" y="5715000"/>
-            <a:ext cx="1809898" cy="228600"/>
-          </a:xfrm>
-          <a:prstGeom prst="rect">
-            <a:avLst/>
-          </a:prstGeom>
-          <a:noFill/>
-        </p:spPr>
-        <p:txBody>
-          <a:bodyPr wrap="square" lIns="0" rIns="0" tIns="0" bIns="0" anchor="t">
-            <a:spAutoFit/>
-          </a:bodyPr>
-          <a:lstStyle/>
-          <a:p>
-            <a:pPr algn="l"/>
-            <a:r>
-              <a:rPr b="1" sz="1350" i="0" u="none">
-                <a:solidFill>
-                  <a:srgbClr val="FFFFFF"/>
-                </a:solidFill>
-                <a:latin typeface="Noto Sans KR"/>
-              </a:rPr>
-              <a:t>시각화 라이브러리 연동</a:t>
-            </a:r>
-          </a:p>
-        </p:txBody>
-      </p:sp>
-      <p:sp>
-        <p:nvSpPr>
-          <p:cNvPr id="25" name="TextBox 24"/>
-          <p:cNvSpPr txBox="1"/>
-          <p:nvPr/>
-        </p:nvSpPr>
-        <p:spPr>
-          <a:xfrm>
-            <a:off x="5269855" y="5715000"/>
-            <a:ext cx="1829097" cy="228600"/>
-          </a:xfrm>
-          <a:prstGeom prst="rect">
-            <a:avLst/>
-          </a:prstGeom>
-          <a:noFill/>
-        </p:spPr>
-        <p:txBody>
-          <a:bodyPr wrap="square" lIns="0" rIns="0" tIns="0" bIns="0" anchor="t">
-            <a:spAutoFit/>
-          </a:bodyPr>
-          <a:lstStyle/>
-          <a:p>
-            <a:pPr algn="l"/>
-            <a:r>
-              <a:rPr b="1" sz="1350" i="0" u="none">
-                <a:solidFill>
-                  <a:srgbClr val="FFFFFF"/>
-                </a:solidFill>
-                <a:latin typeface="Noto Sans KR"/>
-              </a:rPr>
-              <a:t>이상 감지 실시간 Alarm</a:t>
-            </a:r>
-          </a:p>
-        </p:txBody>
-      </p:sp>
-      <p:sp>
-        <p:nvSpPr>
-          <p:cNvPr id="26" name="TextBox 25"/>
-          <p:cNvSpPr txBox="1"/>
-          <p:nvPr/>
-        </p:nvSpPr>
-        <p:spPr>
-          <a:xfrm>
-            <a:off x="9153376" y="5715000"/>
-            <a:ext cx="1933575" cy="228600"/>
-          </a:xfrm>
-          <a:prstGeom prst="rect">
-            <a:avLst/>
-          </a:prstGeom>
-          <a:noFill/>
-        </p:spPr>
-        <p:txBody>
-          <a:bodyPr wrap="square" lIns="0" rIns="0" tIns="0" bIns="0" anchor="t">
-            <a:spAutoFit/>
-          </a:bodyPr>
-          <a:lstStyle/>
-          <a:p>
-            <a:pPr algn="l"/>
-            <a:r>
-              <a:rPr b="1" sz="1350" i="0" u="none">
-                <a:solidFill>
-                  <a:srgbClr val="FFFFFF"/>
-                </a:solidFill>
-                <a:latin typeface="Noto Sans KR"/>
-              </a:rPr>
-              <a:t>MES DB &amp; Log 스토리지</a:t>
-            </a:r>
-          </a:p>
-        </p:txBody>
-      </p:sp>
-      <p:sp>
-        <p:nvSpPr>
-          <p:cNvPr id="27" name="TextBox 26"/>
-          <p:cNvSpPr txBox="1"/>
-          <p:nvPr/>
-        </p:nvSpPr>
-        <p:spPr>
-          <a:xfrm>
-            <a:off x="1367432" y="1743075"/>
-            <a:ext cx="2563713" cy="228600"/>
-          </a:xfrm>
-          <a:prstGeom prst="rect">
-            <a:avLst/>
-          </a:prstGeom>
-          <a:noFill/>
-        </p:spPr>
-        <p:txBody>
-          <a:bodyPr wrap="square" lIns="0" rIns="0" tIns="0" bIns="0" anchor="t">
-            <a:spAutoFit/>
-          </a:bodyPr>
-          <a:lstStyle/>
-          <a:p>
-            <a:pPr algn="l"/>
-            <a:r>
-              <a:rPr b="1" sz="1350" i="0" u="none">
-                <a:solidFill>
-                  <a:srgbClr val="FFFFFF"/>
-                </a:solidFill>
-                <a:latin typeface="Noto Sans KR"/>
-              </a:rPr>
-              <a:t>사용자 / 관리자</a:t>
-            </a:r>
-          </a:p>
-        </p:txBody>
-      </p:sp>
-      <p:sp>
-        <p:nvSpPr>
-          <p:cNvPr id="28" name="TextBox 27"/>
-          <p:cNvSpPr txBox="1"/>
-          <p:nvPr/>
-        </p:nvSpPr>
-        <p:spPr>
-          <a:xfrm>
-            <a:off x="1367432" y="1971675"/>
-            <a:ext cx="2563713" cy="171450"/>
-          </a:xfrm>
-          <a:prstGeom prst="rect">
-            <a:avLst/>
-          </a:prstGeom>
-          <a:noFill/>
-        </p:spPr>
-        <p:txBody>
-          <a:bodyPr wrap="square" lIns="0" rIns="0" tIns="0" bIns="0" anchor="t">
-            <a:spAutoFit/>
-          </a:bodyPr>
-          <a:lstStyle/>
-          <a:p>
-            <a:pPr algn="l"/>
-            <a:r>
-              <a:rPr b="0" sz="1050" i="0" u="none">
-                <a:solidFill>
-                  <a:srgbClr val="94A3B8"/>
-                </a:solidFill>
-                <a:latin typeface="Noto Sans KR"/>
-              </a:rPr>
-              <a:t>Prompt 정의 &amp; 실행 주기 및 대상 Data 설정</a:t>
+                  <a:srgbClr val="334155"/>
+                </a:solidFill>
+                <a:latin typeface="Noto Sans KR"/>
+              </a:rPr>
+              <a:t>선순환 구조:</a:t>
+            </a:r>
+            <a:r>
+              <a:rPr b="0" sz="1350" i="0" u="none">
+                <a:solidFill>
+                  <a:srgbClr val="334155"/>
+                </a:solidFill>
+                <a:latin typeface="Noto Sans KR"/>
+              </a:rPr>
+              <a:t> 통계 데이터 기반 AI 프롬프트 품질 자동 개선</a:t>
             </a:r>
           </a:p>
         </p:txBody>

--- a/제조 분야 AI Agent 아키텍처.pptx
+++ b/제조 분야 AI Agent 아키텍처.pptx
@@ -5,21 +5,21 @@
     <p:sldMasterId id="2147483648" r:id="rId1"/>
   </p:sldMasterIdLst>
   <p:sldIdLst>
-    <p:sldId id="256" r:id="rId7"/>
-    <p:sldId id="257" r:id="rId8"/>
-    <p:sldId id="258" r:id="rId9"/>
-    <p:sldId id="259" r:id="rId10"/>
-    <p:sldId id="260" r:id="rId11"/>
-    <p:sldId id="261" r:id="rId12"/>
-    <p:sldId id="262" r:id="rId13"/>
-    <p:sldId id="263" r:id="rId14"/>
-    <p:sldId id="264" r:id="rId15"/>
-    <p:sldId id="265" r:id="rId16"/>
-    <p:sldId id="266" r:id="rId17"/>
-    <p:sldId id="267" r:id="rId18"/>
-    <p:sldId id="268" r:id="rId19"/>
+    <p:sldId id="256" r:id="rId2"/>
+    <p:sldId id="257" r:id="rId3"/>
+    <p:sldId id="258" r:id="rId4"/>
+    <p:sldId id="259" r:id="rId5"/>
+    <p:sldId id="260" r:id="rId6"/>
+    <p:sldId id="261" r:id="rId7"/>
+    <p:sldId id="262" r:id="rId8"/>
+    <p:sldId id="263" r:id="rId9"/>
+    <p:sldId id="264" r:id="rId10"/>
+    <p:sldId id="265" r:id="rId11"/>
+    <p:sldId id="266" r:id="rId12"/>
+    <p:sldId id="267" r:id="rId13"/>
+    <p:sldId id="268" r:id="rId14"/>
   </p:sldIdLst>
-  <p:sldSz cx="12192000" cy="6858000" type="screen4x3"/>
+  <p:sldSz cx="12192000" cy="6858000"/>
   <p:notesSz cx="6858000" cy="9144000"/>
   <p:defaultTextStyle>
     <a:defPPr>
@@ -116,6 +116,22 @@
       </a:defRPr>
     </a:lvl9pPr>
   </p:defaultTextStyle>
+  <p:extLst>
+    <p:ext uri="{EFAFB233-063F-42B5-8137-9DF3F51BA10A}">
+      <p15:sldGuideLst xmlns:p15="http://schemas.microsoft.com/office/powerpoint/2012/main">
+        <p15:guide id="1" orient="horz" pos="2160">
+          <p15:clr>
+            <a:srgbClr val="A4A3A4"/>
+          </p15:clr>
+        </p15:guide>
+        <p15:guide id="2" pos="2880">
+          <p15:clr>
+            <a:srgbClr val="A4A3A4"/>
+          </p15:clr>
+        </p15:guide>
+      </p15:sldGuideLst>
+    </p:ext>
+  </p:extLst>
 </p:presentation>
 </file>
 
@@ -157,10 +173,9 @@
           <a:lstStyle/>
           <a:p>
             <a:r>
-              <a:rPr lang="en-US" smtClean="0"/>
+              <a:rPr lang="en-US"/>
               <a:t>Click to edit Master title style</a:t>
             </a:r>
-            <a:endParaRPr lang="en-US"/>
           </a:p>
         </p:txBody>
       </p:sp>
@@ -276,10 +291,9 @@
           </a:lstStyle>
           <a:p>
             <a:r>
-              <a:rPr lang="en-US" smtClean="0"/>
+              <a:rPr lang="en-US"/>
               <a:t>Click to edit Master subtitle style</a:t>
             </a:r>
-            <a:endParaRPr lang="en-US"/>
           </a:p>
         </p:txBody>
       </p:sp>
@@ -300,7 +314,7 @@
           <a:p>
             <a:fld id="{5BCAD085-E8A6-8845-BD4E-CB4CCA059FC4}" type="datetimeFigureOut">
               <a:rPr lang="en-US" smtClean="0"/>
-              <a:t>1/27/13</a:t>
+              <a:t>9/3/2026</a:t>
             </a:fld>
             <a:endParaRPr lang="en-US"/>
           </a:p>
@@ -394,10 +408,9 @@
           <a:lstStyle/>
           <a:p>
             <a:r>
-              <a:rPr lang="en-US" smtClean="0"/>
+              <a:rPr lang="en-US"/>
               <a:t>Click to edit Master title style</a:t>
             </a:r>
-            <a:endParaRPr lang="en-US"/>
           </a:p>
         </p:txBody>
       </p:sp>
@@ -418,38 +431,37 @@
           <a:p>
             <a:pPr lvl="0"/>
             <a:r>
-              <a:rPr lang="en-US" smtClean="0"/>
+              <a:rPr lang="en-US"/>
               <a:t>Click to edit Master text styles</a:t>
             </a:r>
           </a:p>
           <a:p>
             <a:pPr lvl="1"/>
             <a:r>
-              <a:rPr lang="en-US" smtClean="0"/>
+              <a:rPr lang="en-US"/>
               <a:t>Second level</a:t>
             </a:r>
           </a:p>
           <a:p>
             <a:pPr lvl="2"/>
             <a:r>
-              <a:rPr lang="en-US" smtClean="0"/>
+              <a:rPr lang="en-US"/>
               <a:t>Third level</a:t>
             </a:r>
           </a:p>
           <a:p>
             <a:pPr lvl="3"/>
             <a:r>
-              <a:rPr lang="en-US" smtClean="0"/>
+              <a:rPr lang="en-US"/>
               <a:t>Fourth level</a:t>
             </a:r>
           </a:p>
           <a:p>
             <a:pPr lvl="4"/>
             <a:r>
-              <a:rPr lang="en-US" smtClean="0"/>
+              <a:rPr lang="en-US"/>
               <a:t>Fifth level</a:t>
             </a:r>
-            <a:endParaRPr lang="en-US"/>
           </a:p>
         </p:txBody>
       </p:sp>
@@ -470,7 +482,7 @@
           <a:p>
             <a:fld id="{5BCAD085-E8A6-8845-BD4E-CB4CCA059FC4}" type="datetimeFigureOut">
               <a:rPr lang="en-US" smtClean="0"/>
-              <a:t>1/27/13</a:t>
+              <a:t>9/3/2026</a:t>
             </a:fld>
             <a:endParaRPr lang="en-US"/>
           </a:p>
@@ -569,10 +581,9 @@
           <a:lstStyle/>
           <a:p>
             <a:r>
-              <a:rPr lang="en-US" smtClean="0"/>
+              <a:rPr lang="en-US"/>
               <a:t>Click to edit Master title style</a:t>
             </a:r>
-            <a:endParaRPr lang="en-US"/>
           </a:p>
         </p:txBody>
       </p:sp>
@@ -598,38 +609,37 @@
           <a:p>
             <a:pPr lvl="0"/>
             <a:r>
-              <a:rPr lang="en-US" smtClean="0"/>
+              <a:rPr lang="en-US"/>
               <a:t>Click to edit Master text styles</a:t>
             </a:r>
           </a:p>
           <a:p>
             <a:pPr lvl="1"/>
             <a:r>
-              <a:rPr lang="en-US" smtClean="0"/>
+              <a:rPr lang="en-US"/>
               <a:t>Second level</a:t>
             </a:r>
           </a:p>
           <a:p>
             <a:pPr lvl="2"/>
             <a:r>
-              <a:rPr lang="en-US" smtClean="0"/>
+              <a:rPr lang="en-US"/>
               <a:t>Third level</a:t>
             </a:r>
           </a:p>
           <a:p>
             <a:pPr lvl="3"/>
             <a:r>
-              <a:rPr lang="en-US" smtClean="0"/>
+              <a:rPr lang="en-US"/>
               <a:t>Fourth level</a:t>
             </a:r>
           </a:p>
           <a:p>
             <a:pPr lvl="4"/>
             <a:r>
-              <a:rPr lang="en-US" smtClean="0"/>
+              <a:rPr lang="en-US"/>
               <a:t>Fifth level</a:t>
             </a:r>
-            <a:endParaRPr lang="en-US"/>
           </a:p>
         </p:txBody>
       </p:sp>
@@ -650,7 +660,7 @@
           <a:p>
             <a:fld id="{5BCAD085-E8A6-8845-BD4E-CB4CCA059FC4}" type="datetimeFigureOut">
               <a:rPr lang="en-US" smtClean="0"/>
-              <a:t>1/27/13</a:t>
+              <a:t>9/3/2026</a:t>
             </a:fld>
             <a:endParaRPr lang="en-US"/>
           </a:p>
@@ -744,10 +754,9 @@
           <a:lstStyle/>
           <a:p>
             <a:r>
-              <a:rPr lang="en-US" smtClean="0"/>
+              <a:rPr lang="en-US"/>
               <a:t>Click to edit Master title style</a:t>
             </a:r>
-            <a:endParaRPr lang="en-US"/>
           </a:p>
         </p:txBody>
       </p:sp>
@@ -768,38 +777,37 @@
           <a:p>
             <a:pPr lvl="0"/>
             <a:r>
-              <a:rPr lang="en-US" smtClean="0"/>
+              <a:rPr lang="en-US"/>
               <a:t>Click to edit Master text styles</a:t>
             </a:r>
           </a:p>
           <a:p>
             <a:pPr lvl="1"/>
             <a:r>
-              <a:rPr lang="en-US" smtClean="0"/>
+              <a:rPr lang="en-US"/>
               <a:t>Second level</a:t>
             </a:r>
           </a:p>
           <a:p>
             <a:pPr lvl="2"/>
             <a:r>
-              <a:rPr lang="en-US" smtClean="0"/>
+              <a:rPr lang="en-US"/>
               <a:t>Third level</a:t>
             </a:r>
           </a:p>
           <a:p>
             <a:pPr lvl="3"/>
             <a:r>
-              <a:rPr lang="en-US" smtClean="0"/>
+              <a:rPr lang="en-US"/>
               <a:t>Fourth level</a:t>
             </a:r>
           </a:p>
           <a:p>
             <a:pPr lvl="4"/>
             <a:r>
-              <a:rPr lang="en-US" smtClean="0"/>
+              <a:rPr lang="en-US"/>
               <a:t>Fifth level</a:t>
             </a:r>
-            <a:endParaRPr lang="en-US"/>
           </a:p>
         </p:txBody>
       </p:sp>
@@ -820,7 +828,7 @@
           <a:p>
             <a:fld id="{5BCAD085-E8A6-8845-BD4E-CB4CCA059FC4}" type="datetimeFigureOut">
               <a:rPr lang="en-US" smtClean="0"/>
-              <a:t>1/27/13</a:t>
+              <a:t>9/3/2026</a:t>
             </a:fld>
             <a:endParaRPr lang="en-US"/>
           </a:p>
@@ -923,10 +931,9 @@
           </a:lstStyle>
           <a:p>
             <a:r>
-              <a:rPr lang="en-US" smtClean="0"/>
+              <a:rPr lang="en-US"/>
               <a:t>Click to edit Master title style</a:t>
             </a:r>
-            <a:endParaRPr lang="en-US"/>
           </a:p>
         </p:txBody>
       </p:sp>
@@ -1043,7 +1050,7 @@
           <a:p>
             <a:pPr lvl="0"/>
             <a:r>
-              <a:rPr lang="en-US" smtClean="0"/>
+              <a:rPr lang="en-US"/>
               <a:t>Click to edit Master text styles</a:t>
             </a:r>
           </a:p>
@@ -1066,7 +1073,7 @@
           <a:p>
             <a:fld id="{5BCAD085-E8A6-8845-BD4E-CB4CCA059FC4}" type="datetimeFigureOut">
               <a:rPr lang="en-US" smtClean="0"/>
-              <a:t>1/27/13</a:t>
+              <a:t>9/3/2026</a:t>
             </a:fld>
             <a:endParaRPr lang="en-US"/>
           </a:p>
@@ -1160,10 +1167,9 @@
           <a:lstStyle/>
           <a:p>
             <a:r>
-              <a:rPr lang="en-US" smtClean="0"/>
+              <a:rPr lang="en-US"/>
               <a:t>Click to edit Master title style</a:t>
             </a:r>
-            <a:endParaRPr lang="en-US"/>
           </a:p>
         </p:txBody>
       </p:sp>
@@ -1217,38 +1223,37 @@
           <a:p>
             <a:pPr lvl="0"/>
             <a:r>
-              <a:rPr lang="en-US" smtClean="0"/>
+              <a:rPr lang="en-US"/>
               <a:t>Click to edit Master text styles</a:t>
             </a:r>
           </a:p>
           <a:p>
             <a:pPr lvl="1"/>
             <a:r>
-              <a:rPr lang="en-US" smtClean="0"/>
+              <a:rPr lang="en-US"/>
               <a:t>Second level</a:t>
             </a:r>
           </a:p>
           <a:p>
             <a:pPr lvl="2"/>
             <a:r>
-              <a:rPr lang="en-US" smtClean="0"/>
+              <a:rPr lang="en-US"/>
               <a:t>Third level</a:t>
             </a:r>
           </a:p>
           <a:p>
             <a:pPr lvl="3"/>
             <a:r>
-              <a:rPr lang="en-US" smtClean="0"/>
+              <a:rPr lang="en-US"/>
               <a:t>Fourth level</a:t>
             </a:r>
           </a:p>
           <a:p>
             <a:pPr lvl="4"/>
             <a:r>
-              <a:rPr lang="en-US" smtClean="0"/>
+              <a:rPr lang="en-US"/>
               <a:t>Fifth level</a:t>
             </a:r>
-            <a:endParaRPr lang="en-US"/>
           </a:p>
         </p:txBody>
       </p:sp>
@@ -1302,38 +1307,37 @@
           <a:p>
             <a:pPr lvl="0"/>
             <a:r>
-              <a:rPr lang="en-US" smtClean="0"/>
+              <a:rPr lang="en-US"/>
               <a:t>Click to edit Master text styles</a:t>
             </a:r>
           </a:p>
           <a:p>
             <a:pPr lvl="1"/>
             <a:r>
-              <a:rPr lang="en-US" smtClean="0"/>
+              <a:rPr lang="en-US"/>
               <a:t>Second level</a:t>
             </a:r>
           </a:p>
           <a:p>
             <a:pPr lvl="2"/>
             <a:r>
-              <a:rPr lang="en-US" smtClean="0"/>
+              <a:rPr lang="en-US"/>
               <a:t>Third level</a:t>
             </a:r>
           </a:p>
           <a:p>
             <a:pPr lvl="3"/>
             <a:r>
-              <a:rPr lang="en-US" smtClean="0"/>
+              <a:rPr lang="en-US"/>
               <a:t>Fourth level</a:t>
             </a:r>
           </a:p>
           <a:p>
             <a:pPr lvl="4"/>
             <a:r>
-              <a:rPr lang="en-US" smtClean="0"/>
+              <a:rPr lang="en-US"/>
               <a:t>Fifth level</a:t>
             </a:r>
-            <a:endParaRPr lang="en-US"/>
           </a:p>
         </p:txBody>
       </p:sp>
@@ -1354,7 +1358,7 @@
           <a:p>
             <a:fld id="{5BCAD085-E8A6-8845-BD4E-CB4CCA059FC4}" type="datetimeFigureOut">
               <a:rPr lang="en-US" smtClean="0"/>
-              <a:t>1/27/13</a:t>
+              <a:t>9/3/2026</a:t>
             </a:fld>
             <a:endParaRPr lang="en-US"/>
           </a:p>
@@ -1452,10 +1456,9 @@
           </a:lstStyle>
           <a:p>
             <a:r>
-              <a:rPr lang="en-US" smtClean="0"/>
+              <a:rPr lang="en-US"/>
               <a:t>Click to edit Master title style</a:t>
             </a:r>
-            <a:endParaRPr lang="en-US"/>
           </a:p>
         </p:txBody>
       </p:sp>
@@ -1518,7 +1521,7 @@
           <a:p>
             <a:pPr lvl="0"/>
             <a:r>
-              <a:rPr lang="en-US" smtClean="0"/>
+              <a:rPr lang="en-US"/>
               <a:t>Click to edit Master text styles</a:t>
             </a:r>
           </a:p>
@@ -1574,38 +1577,37 @@
           <a:p>
             <a:pPr lvl="0"/>
             <a:r>
-              <a:rPr lang="en-US" smtClean="0"/>
+              <a:rPr lang="en-US"/>
               <a:t>Click to edit Master text styles</a:t>
             </a:r>
           </a:p>
           <a:p>
             <a:pPr lvl="1"/>
             <a:r>
-              <a:rPr lang="en-US" smtClean="0"/>
+              <a:rPr lang="en-US"/>
               <a:t>Second level</a:t>
             </a:r>
           </a:p>
           <a:p>
             <a:pPr lvl="2"/>
             <a:r>
-              <a:rPr lang="en-US" smtClean="0"/>
+              <a:rPr lang="en-US"/>
               <a:t>Third level</a:t>
             </a:r>
           </a:p>
           <a:p>
             <a:pPr lvl="3"/>
             <a:r>
-              <a:rPr lang="en-US" smtClean="0"/>
+              <a:rPr lang="en-US"/>
               <a:t>Fourth level</a:t>
             </a:r>
           </a:p>
           <a:p>
             <a:pPr lvl="4"/>
             <a:r>
-              <a:rPr lang="en-US" smtClean="0"/>
+              <a:rPr lang="en-US"/>
               <a:t>Fifth level</a:t>
             </a:r>
-            <a:endParaRPr lang="en-US"/>
           </a:p>
         </p:txBody>
       </p:sp>
@@ -1668,7 +1670,7 @@
           <a:p>
             <a:pPr lvl="0"/>
             <a:r>
-              <a:rPr lang="en-US" smtClean="0"/>
+              <a:rPr lang="en-US"/>
               <a:t>Click to edit Master text styles</a:t>
             </a:r>
           </a:p>
@@ -1724,38 +1726,37 @@
           <a:p>
             <a:pPr lvl="0"/>
             <a:r>
-              <a:rPr lang="en-US" smtClean="0"/>
+              <a:rPr lang="en-US"/>
               <a:t>Click to edit Master text styles</a:t>
             </a:r>
           </a:p>
           <a:p>
             <a:pPr lvl="1"/>
             <a:r>
-              <a:rPr lang="en-US" smtClean="0"/>
+              <a:rPr lang="en-US"/>
               <a:t>Second level</a:t>
             </a:r>
           </a:p>
           <a:p>
             <a:pPr lvl="2"/>
             <a:r>
-              <a:rPr lang="en-US" smtClean="0"/>
+              <a:rPr lang="en-US"/>
               <a:t>Third level</a:t>
             </a:r>
           </a:p>
           <a:p>
             <a:pPr lvl="3"/>
             <a:r>
-              <a:rPr lang="en-US" smtClean="0"/>
+              <a:rPr lang="en-US"/>
               <a:t>Fourth level</a:t>
             </a:r>
           </a:p>
           <a:p>
             <a:pPr lvl="4"/>
             <a:r>
-              <a:rPr lang="en-US" smtClean="0"/>
+              <a:rPr lang="en-US"/>
               <a:t>Fifth level</a:t>
             </a:r>
-            <a:endParaRPr lang="en-US"/>
           </a:p>
         </p:txBody>
       </p:sp>
@@ -1776,7 +1777,7 @@
           <a:p>
             <a:fld id="{5BCAD085-E8A6-8845-BD4E-CB4CCA059FC4}" type="datetimeFigureOut">
               <a:rPr lang="en-US" smtClean="0"/>
-              <a:t>1/27/13</a:t>
+              <a:t>9/3/2026</a:t>
             </a:fld>
             <a:endParaRPr lang="en-US"/>
           </a:p>
@@ -1870,10 +1871,9 @@
           <a:lstStyle/>
           <a:p>
             <a:r>
-              <a:rPr lang="en-US" smtClean="0"/>
+              <a:rPr lang="en-US"/>
               <a:t>Click to edit Master title style</a:t>
             </a:r>
-            <a:endParaRPr lang="en-US"/>
           </a:p>
         </p:txBody>
       </p:sp>
@@ -1894,7 +1894,7 @@
           <a:p>
             <a:fld id="{5BCAD085-E8A6-8845-BD4E-CB4CCA059FC4}" type="datetimeFigureOut">
               <a:rPr lang="en-US" smtClean="0"/>
-              <a:t>1/27/13</a:t>
+              <a:t>9/3/2026</a:t>
             </a:fld>
             <a:endParaRPr lang="en-US"/>
           </a:p>
@@ -1989,7 +1989,7 @@
           <a:p>
             <a:fld id="{5BCAD085-E8A6-8845-BD4E-CB4CCA059FC4}" type="datetimeFigureOut">
               <a:rPr lang="en-US" smtClean="0"/>
-              <a:t>1/27/13</a:t>
+              <a:t>9/3/2026</a:t>
             </a:fld>
             <a:endParaRPr lang="en-US"/>
           </a:p>
@@ -2092,10 +2092,9 @@
           </a:lstStyle>
           <a:p>
             <a:r>
-              <a:rPr lang="en-US" smtClean="0"/>
+              <a:rPr lang="en-US"/>
               <a:t>Click to edit Master title style</a:t>
             </a:r>
-            <a:endParaRPr lang="en-US"/>
           </a:p>
         </p:txBody>
       </p:sp>
@@ -2149,38 +2148,37 @@
           <a:p>
             <a:pPr lvl="0"/>
             <a:r>
-              <a:rPr lang="en-US" smtClean="0"/>
+              <a:rPr lang="en-US"/>
               <a:t>Click to edit Master text styles</a:t>
             </a:r>
           </a:p>
           <a:p>
             <a:pPr lvl="1"/>
             <a:r>
-              <a:rPr lang="en-US" smtClean="0"/>
+              <a:rPr lang="en-US"/>
               <a:t>Second level</a:t>
             </a:r>
           </a:p>
           <a:p>
             <a:pPr lvl="2"/>
             <a:r>
-              <a:rPr lang="en-US" smtClean="0"/>
+              <a:rPr lang="en-US"/>
               <a:t>Third level</a:t>
             </a:r>
           </a:p>
           <a:p>
             <a:pPr lvl="3"/>
             <a:r>
-              <a:rPr lang="en-US" smtClean="0"/>
+              <a:rPr lang="en-US"/>
               <a:t>Fourth level</a:t>
             </a:r>
           </a:p>
           <a:p>
             <a:pPr lvl="4"/>
             <a:r>
-              <a:rPr lang="en-US" smtClean="0"/>
+              <a:rPr lang="en-US"/>
               <a:t>Fifth level</a:t>
             </a:r>
-            <a:endParaRPr lang="en-US"/>
           </a:p>
         </p:txBody>
       </p:sp>
@@ -2243,7 +2241,7 @@
           <a:p>
             <a:pPr lvl="0"/>
             <a:r>
-              <a:rPr lang="en-US" smtClean="0"/>
+              <a:rPr lang="en-US"/>
               <a:t>Click to edit Master text styles</a:t>
             </a:r>
           </a:p>
@@ -2266,7 +2264,7 @@
           <a:p>
             <a:fld id="{5BCAD085-E8A6-8845-BD4E-CB4CCA059FC4}" type="datetimeFigureOut">
               <a:rPr lang="en-US" smtClean="0"/>
-              <a:t>1/27/13</a:t>
+              <a:t>9/3/2026</a:t>
             </a:fld>
             <a:endParaRPr lang="en-US"/>
           </a:p>
@@ -2369,10 +2367,9 @@
           </a:lstStyle>
           <a:p>
             <a:r>
-              <a:rPr lang="en-US" smtClean="0"/>
+              <a:rPr lang="en-US"/>
               <a:t>Click to edit Master title style</a:t>
             </a:r>
-            <a:endParaRPr lang="en-US"/>
           </a:p>
         </p:txBody>
       </p:sp>
@@ -2496,7 +2493,7 @@
           <a:p>
             <a:pPr lvl="0"/>
             <a:r>
-              <a:rPr lang="en-US" smtClean="0"/>
+              <a:rPr lang="en-US"/>
               <a:t>Click to edit Master text styles</a:t>
             </a:r>
           </a:p>
@@ -2519,7 +2516,7 @@
           <a:p>
             <a:fld id="{5BCAD085-E8A6-8845-BD4E-CB4CCA059FC4}" type="datetimeFigureOut">
               <a:rPr lang="en-US" smtClean="0"/>
-              <a:t>1/27/13</a:t>
+              <a:t>9/3/2026</a:t>
             </a:fld>
             <a:endParaRPr lang="en-US"/>
           </a:p>
@@ -2628,10 +2625,9 @@
           <a:lstStyle/>
           <a:p>
             <a:r>
-              <a:rPr lang="en-US" smtClean="0"/>
+              <a:rPr lang="en-US"/>
               <a:t>Click to edit Master title style</a:t>
             </a:r>
-            <a:endParaRPr lang="en-US"/>
           </a:p>
         </p:txBody>
       </p:sp>
@@ -2662,38 +2658,37 @@
           <a:p>
             <a:pPr lvl="0"/>
             <a:r>
-              <a:rPr lang="en-US" smtClean="0"/>
+              <a:rPr lang="en-US"/>
               <a:t>Click to edit Master text styles</a:t>
             </a:r>
           </a:p>
           <a:p>
             <a:pPr lvl="1"/>
             <a:r>
-              <a:rPr lang="en-US" smtClean="0"/>
+              <a:rPr lang="en-US"/>
               <a:t>Second level</a:t>
             </a:r>
           </a:p>
           <a:p>
             <a:pPr lvl="2"/>
             <a:r>
-              <a:rPr lang="en-US" smtClean="0"/>
+              <a:rPr lang="en-US"/>
               <a:t>Third level</a:t>
             </a:r>
           </a:p>
           <a:p>
             <a:pPr lvl="3"/>
             <a:r>
-              <a:rPr lang="en-US" smtClean="0"/>
+              <a:rPr lang="en-US"/>
               <a:t>Fourth level</a:t>
             </a:r>
           </a:p>
           <a:p>
             <a:pPr lvl="4"/>
             <a:r>
-              <a:rPr lang="en-US" smtClean="0"/>
+              <a:rPr lang="en-US"/>
               <a:t>Fifth level</a:t>
             </a:r>
-            <a:endParaRPr lang="en-US"/>
           </a:p>
         </p:txBody>
       </p:sp>
@@ -2732,7 +2727,7 @@
           <a:p>
             <a:fld id="{5BCAD085-E8A6-8845-BD4E-CB4CCA059FC4}" type="datetimeFigureOut">
               <a:rPr lang="en-US" smtClean="0"/>
-              <a:t>1/27/13</a:t>
+              <a:t>9/3/2026</a:t>
             </a:fld>
             <a:endParaRPr lang="en-US"/>
           </a:p>
@@ -3091,7 +3086,7 @@
 </file>
 
 <file path=ppt/slides/slide1.xml><?xml version="1.0" encoding="utf-8"?>
-<p:sld xmlns:a="http://schemas.openxmlformats.org/drawingml/2006/main" xmlns:p="http://schemas.openxmlformats.org/presentationml/2006/main" xmlns:r="http://schemas.openxmlformats.org/officeDocument/2006/relationships">
+<p:sld xmlns:a="http://schemas.openxmlformats.org/drawingml/2006/main" xmlns:r="http://schemas.openxmlformats.org/officeDocument/2006/relationships" xmlns:p="http://schemas.openxmlformats.org/presentationml/2006/main">
   <p:cSld>
     <p:bg>
       <p:bgPr>
@@ -3107,7 +3102,14 @@
         <p:cNvGrpSpPr/>
         <p:nvPr/>
       </p:nvGrpSpPr>
-      <p:grpSpPr/>
+      <p:grpSpPr>
+        <a:xfrm>
+          <a:off x="0" y="0"/>
+          <a:ext cx="0" cy="0"/>
+          <a:chOff x="0" y="0"/>
+          <a:chExt cx="0" cy="0"/>
+        </a:xfrm>
+      </p:grpSpPr>
       <p:pic>
         <p:nvPicPr>
           <p:cNvPr id="2" name="Picture 1" descr="image.png"/>
@@ -3149,14 +3151,14 @@
           <a:noFill/>
         </p:spPr>
         <p:txBody>
-          <a:bodyPr wrap="square" lIns="0" rIns="0" tIns="0" bIns="0" anchor="ctr">
+          <a:bodyPr wrap="square" lIns="0" tIns="0" rIns="0" bIns="0" anchor="ctr">
             <a:spAutoFit/>
           </a:bodyPr>
           <a:lstStyle/>
           <a:p>
             <a:pPr algn="l"/>
             <a:r>
-              <a:rPr b="0" sz="1200" i="0" u="none">
+              <a:rPr sz="1200" b="0" i="0" u="none">
                 <a:solidFill>
                   <a:srgbClr val="94A3B8"/>
                 </a:solidFill>
@@ -3184,7 +3186,7 @@
           <a:noFill/>
         </p:spPr>
         <p:txBody>
-          <a:bodyPr wrap="square" lIns="0" rIns="0" tIns="0" bIns="0" anchor="t">
+          <a:bodyPr wrap="square" lIns="0" tIns="0" rIns="0" bIns="0" anchor="t">
             <a:spAutoFit/>
           </a:bodyPr>
           <a:lstStyle/>
@@ -3195,7 +3197,7 @@
               </a:lnSpc>
             </a:pPr>
             <a:r>
-              <a:rPr b="0" sz="3900" i="0" u="none">
+              <a:rPr sz="3900" b="0" i="0" u="none">
                 <a:solidFill>
                   <a:srgbClr val="F8FAFC"/>
                 </a:solidFill>
@@ -3208,7 +3210,7 @@
 </a:t>
             </a:r>
             <a:r>
-              <a:rPr b="0" sz="3900" i="0" u="none">
+              <a:rPr sz="3900" b="0" i="0" u="none">
                 <a:solidFill>
                   <a:srgbClr val="38BDF8"/>
                 </a:solidFill>
@@ -3236,7 +3238,7 @@
           <a:noFill/>
         </p:spPr>
         <p:txBody>
-          <a:bodyPr wrap="square" lIns="0" rIns="0" tIns="0" bIns="0" anchor="t">
+          <a:bodyPr wrap="square" lIns="0" tIns="0" rIns="0" bIns="0" anchor="t">
             <a:spAutoFit/>
           </a:bodyPr>
           <a:lstStyle/>
@@ -3247,7 +3249,7 @@
               </a:lnSpc>
             </a:pPr>
             <a:r>
-              <a:rPr b="0" sz="1500" i="0" u="none">
+              <a:rPr sz="1500" b="0" i="0" u="none">
                 <a:solidFill>
                   <a:srgbClr val="94A3B8"/>
                 </a:solidFill>
@@ -3323,14 +3325,14 @@
           <a:noFill/>
         </p:spPr>
         <p:txBody>
-          <a:bodyPr wrap="square" lIns="0" rIns="0" tIns="0" bIns="0" anchor="t">
+          <a:bodyPr wrap="square" lIns="0" tIns="0" rIns="0" bIns="0" anchor="t">
             <a:spAutoFit/>
           </a:bodyPr>
           <a:lstStyle/>
           <a:p>
             <a:pPr algn="l"/>
             <a:r>
-              <a:rPr b="0" sz="1200" i="0" u="none">
+              <a:rPr sz="1200" b="0" i="0" u="none">
                 <a:solidFill>
                   <a:srgbClr val="CBD5E1"/>
                 </a:solidFill>
@@ -3382,14 +3384,14 @@
           <a:noFill/>
         </p:spPr>
         <p:txBody>
-          <a:bodyPr wrap="square" lIns="0" rIns="0" tIns="0" bIns="0" anchor="t">
+          <a:bodyPr wrap="square" lIns="0" tIns="0" rIns="0" bIns="0" anchor="t">
             <a:spAutoFit/>
           </a:bodyPr>
           <a:lstStyle/>
           <a:p>
             <a:pPr algn="l"/>
             <a:r>
-              <a:rPr b="0" sz="1200" i="0" u="none">
+              <a:rPr sz="1200" b="0" i="0" u="none">
                 <a:solidFill>
                   <a:srgbClr val="CBD5E1"/>
                 </a:solidFill>
@@ -3441,14 +3443,14 @@
           <a:noFill/>
         </p:spPr>
         <p:txBody>
-          <a:bodyPr wrap="square" lIns="0" rIns="0" tIns="0" bIns="0" anchor="t">
+          <a:bodyPr wrap="square" lIns="0" tIns="0" rIns="0" bIns="0" anchor="t">
             <a:spAutoFit/>
           </a:bodyPr>
           <a:lstStyle/>
           <a:p>
             <a:pPr algn="l"/>
             <a:r>
-              <a:rPr b="0" sz="1200" i="0" u="none">
+              <a:rPr sz="1200" b="0" i="0" u="none">
                 <a:solidFill>
                   <a:srgbClr val="CBD5E1"/>
                 </a:solidFill>
@@ -3468,7 +3470,7 @@
 </file>
 
 <file path=ppt/slides/slide10.xml><?xml version="1.0" encoding="utf-8"?>
-<p:sld xmlns:a="http://schemas.openxmlformats.org/drawingml/2006/main" xmlns:p="http://schemas.openxmlformats.org/presentationml/2006/main" xmlns:r="http://schemas.openxmlformats.org/officeDocument/2006/relationships">
+<p:sld xmlns:a="http://schemas.openxmlformats.org/drawingml/2006/main" xmlns:r="http://schemas.openxmlformats.org/officeDocument/2006/relationships" xmlns:p="http://schemas.openxmlformats.org/presentationml/2006/main">
   <p:cSld>
     <p:bg>
       <p:bgPr>
@@ -3484,7 +3486,14 @@
         <p:cNvGrpSpPr/>
         <p:nvPr/>
       </p:nvGrpSpPr>
-      <p:grpSpPr/>
+      <p:grpSpPr>
+        <a:xfrm>
+          <a:off x="0" y="0"/>
+          <a:ext cx="0" cy="0"/>
+          <a:chOff x="0" y="0"/>
+          <a:chExt cx="0" cy="0"/>
+        </a:xfrm>
+      </p:grpSpPr>
       <p:pic>
         <p:nvPicPr>
           <p:cNvPr id="2" name="Picture 1" descr="image.png"/>
@@ -3607,7 +3616,9 @@
       </p:pic>
       <p:sp>
         <p:nvSpPr>
-          <p:cNvPr id="7" name="TextBox 6"/>
+          <p:cNvPr id="7" name="TextBox 6">
+            <a:hlinkClick r:id="rId6"/>
+          </p:cNvPr>
           <p:cNvSpPr txBox="1"/>
           <p:nvPr/>
         </p:nvSpPr>
@@ -3622,14 +3633,14 @@
           <a:noFill/>
         </p:spPr>
         <p:txBody>
-          <a:bodyPr wrap="square" lIns="0" rIns="0" tIns="0" bIns="0" anchor="t">
+          <a:bodyPr wrap="square" lIns="0" tIns="0" rIns="0" bIns="0" anchor="t">
             <a:spAutoFit/>
           </a:bodyPr>
           <a:lstStyle/>
           <a:p>
             <a:pPr algn="l"/>
             <a:r>
-              <a:rPr b="1" sz="1200" i="0" u="none">
+              <a:rPr sz="1200" b="1" i="0" u="none">
                 <a:solidFill>
                   <a:srgbClr val="2563EB"/>
                 </a:solidFill>
@@ -3649,29 +3660,85 @@
         <p:spPr>
           <a:xfrm>
             <a:off x="609600" y="762000"/>
-            <a:ext cx="11521440" cy="419100"/>
-          </a:xfrm>
-          <a:prstGeom prst="rect">
-            <a:avLst/>
-          </a:prstGeom>
-          <a:noFill/>
-        </p:spPr>
-        <p:txBody>
-          <a:bodyPr wrap="square" lIns="0" rIns="0" tIns="0" bIns="0" anchor="t">
-            <a:spAutoFit/>
-          </a:bodyPr>
-          <a:lstStyle/>
-          <a:p>
-            <a:pPr algn="l"/>
-            <a:r>
-              <a:rPr b="0" sz="2400" i="0" u="none">
+            <a:ext cx="11521440" cy="369332"/>
+          </a:xfrm>
+          <a:prstGeom prst="rect">
+            <a:avLst/>
+          </a:prstGeom>
+          <a:noFill/>
+        </p:spPr>
+        <p:txBody>
+          <a:bodyPr wrap="square" lIns="0" tIns="0" rIns="0" bIns="0" anchor="t">
+            <a:spAutoFit/>
+          </a:bodyPr>
+          <a:lstStyle/>
+          <a:p>
+            <a:r>
+              <a:rPr sz="2400" b="0" i="0" u="none" dirty="0">
                 <a:solidFill>
                   <a:srgbClr val="0F172A"/>
                 </a:solidFill>
                 <a:latin typeface="Noto Sans KR ExtraBold"/>
-              </a:rPr>
-              <a:t>왜 Enterprise NordAxe 프레임워크인가?</a:t>
-            </a:r>
+                <a:hlinkClick r:id="rId6"/>
+              </a:rPr>
+              <a:t>왜 </a:t>
+            </a:r>
+            <a:r>
+              <a:rPr sz="2400" b="0" i="0" u="none" dirty="0" err="1">
+                <a:solidFill>
+                  <a:srgbClr val="0F172A"/>
+                </a:solidFill>
+                <a:latin typeface="Noto Sans KR ExtraBold"/>
+                <a:hlinkClick r:id="rId6"/>
+              </a:rPr>
+              <a:t>NordAxe</a:t>
+            </a:r>
+            <a:r>
+              <a:rPr lang="en-US" sz="2400" dirty="0">
+                <a:solidFill>
+                  <a:srgbClr val="0F172A"/>
+                </a:solidFill>
+                <a:latin typeface="Noto Sans KR ExtraBold"/>
+                <a:hlinkClick r:id="rId6"/>
+              </a:rPr>
+              <a:t>(https://github.com/mordent/OpenProject)</a:t>
+            </a:r>
+            <a:r>
+              <a:rPr sz="2400" b="0" i="0" u="none" dirty="0">
+                <a:solidFill>
+                  <a:srgbClr val="0F172A"/>
+                </a:solidFill>
+                <a:latin typeface="Noto Sans KR ExtraBold"/>
+                <a:hlinkClick r:id="rId6"/>
+              </a:rPr>
+              <a:t> </a:t>
+            </a:r>
+            <a:r>
+              <a:rPr sz="2400" b="0" i="0" u="none" dirty="0" err="1">
+                <a:solidFill>
+                  <a:srgbClr val="0F172A"/>
+                </a:solidFill>
+                <a:latin typeface="Noto Sans KR ExtraBold"/>
+                <a:hlinkClick r:id="rId6"/>
+              </a:rPr>
+              <a:t>프레임워크인가</a:t>
+            </a:r>
+            <a:r>
+              <a:rPr sz="2400" b="0" i="0" u="none" dirty="0">
+                <a:solidFill>
+                  <a:srgbClr val="0F172A"/>
+                </a:solidFill>
+                <a:latin typeface="Noto Sans KR ExtraBold"/>
+                <a:hlinkClick r:id="rId6"/>
+              </a:rPr>
+              <a:t>?</a:t>
+            </a:r>
+            <a:endParaRPr sz="2400" b="0" i="0" u="none" dirty="0">
+              <a:solidFill>
+                <a:srgbClr val="0F172A"/>
+              </a:solidFill>
+              <a:latin typeface="Noto Sans KR ExtraBold"/>
+            </a:endParaRPr>
           </a:p>
         </p:txBody>
       </p:sp>
@@ -3692,14 +3759,14 @@
           <a:noFill/>
         </p:spPr>
         <p:txBody>
-          <a:bodyPr wrap="square" lIns="0" rIns="0" tIns="0" bIns="0" anchor="t">
+          <a:bodyPr wrap="square" lIns="0" tIns="0" rIns="0" bIns="0" anchor="t">
             <a:spAutoFit/>
           </a:bodyPr>
           <a:lstStyle/>
           <a:p>
             <a:pPr algn="l"/>
             <a:r>
-              <a:rPr b="1" sz="1650" i="0" u="none">
+              <a:rPr sz="1650" b="1" i="0" u="none">
                 <a:solidFill>
                   <a:srgbClr val="0F172A"/>
                 </a:solidFill>
@@ -3727,7 +3794,7 @@
           <a:noFill/>
         </p:spPr>
         <p:txBody>
-          <a:bodyPr wrap="square" lIns="0" rIns="0" tIns="0" bIns="0" anchor="t">
+          <a:bodyPr wrap="square" lIns="0" tIns="0" rIns="0" bIns="0" anchor="t">
             <a:spAutoFit/>
           </a:bodyPr>
           <a:lstStyle/>
@@ -3738,7 +3805,7 @@
               </a:lnSpc>
             </a:pPr>
             <a:r>
-              <a:rPr b="0" sz="4800" i="0" u="none">
+              <a:rPr sz="4800" b="0" i="0" u="none">
                 <a:solidFill>
                   <a:srgbClr val="2563EB"/>
                 </a:solidFill>
@@ -3766,14 +3833,14 @@
           <a:noFill/>
         </p:spPr>
         <p:txBody>
-          <a:bodyPr wrap="square" lIns="0" rIns="0" tIns="0" bIns="0" anchor="t">
+          <a:bodyPr wrap="square" lIns="0" tIns="0" rIns="0" bIns="0" anchor="t">
             <a:spAutoFit/>
           </a:bodyPr>
           <a:lstStyle/>
           <a:p>
             <a:pPr algn="l"/>
             <a:r>
-              <a:rPr b="0" sz="1350" i="0" u="none">
+              <a:rPr sz="1350" b="0" i="0" u="none">
                 <a:solidFill>
                   <a:srgbClr val="475569"/>
                 </a:solidFill>
@@ -3801,7 +3868,7 @@
           <a:noFill/>
         </p:spPr>
         <p:txBody>
-          <a:bodyPr wrap="square" lIns="0" rIns="0" tIns="0" bIns="0" anchor="t">
+          <a:bodyPr wrap="square" lIns="0" tIns="0" rIns="0" bIns="0" anchor="t">
             <a:spAutoFit/>
           </a:bodyPr>
           <a:lstStyle/>
@@ -3812,7 +3879,7 @@
               </a:lnSpc>
             </a:pPr>
             <a:r>
-              <a:rPr b="0" sz="4800" i="0" u="none">
+              <a:rPr sz="4800" b="0" i="0" u="none">
                 <a:solidFill>
                   <a:srgbClr val="0F172A"/>
                 </a:solidFill>
@@ -3840,14 +3907,14 @@
           <a:noFill/>
         </p:spPr>
         <p:txBody>
-          <a:bodyPr wrap="square" lIns="0" rIns="0" tIns="0" bIns="0" anchor="t">
+          <a:bodyPr wrap="square" lIns="0" tIns="0" rIns="0" bIns="0" anchor="t">
             <a:spAutoFit/>
           </a:bodyPr>
           <a:lstStyle/>
           <a:p>
             <a:pPr algn="l"/>
             <a:r>
-              <a:rPr b="0" sz="1350" i="0" u="none">
+              <a:rPr sz="1350" b="0" i="0" u="none">
                 <a:solidFill>
                   <a:srgbClr val="475569"/>
                 </a:solidFill>
@@ -3875,14 +3942,14 @@
           <a:noFill/>
         </p:spPr>
         <p:txBody>
-          <a:bodyPr wrap="square" lIns="0" rIns="0" tIns="0" bIns="0" anchor="t">
+          <a:bodyPr wrap="square" lIns="0" tIns="0" rIns="0" bIns="0" anchor="t">
             <a:spAutoFit/>
           </a:bodyPr>
           <a:lstStyle/>
           <a:p>
             <a:pPr algn="l"/>
             <a:r>
-              <a:rPr b="1" sz="1275" i="0" u="none">
+              <a:rPr sz="1275" b="1" i="0" u="none">
                 <a:solidFill>
                   <a:srgbClr val="2563EB"/>
                 </a:solidFill>
@@ -3910,14 +3977,14 @@
           <a:noFill/>
         </p:spPr>
         <p:txBody>
-          <a:bodyPr wrap="square" lIns="0" rIns="0" tIns="0" bIns="0" anchor="t">
+          <a:bodyPr wrap="square" lIns="0" tIns="0" rIns="0" bIns="0" anchor="t">
             <a:spAutoFit/>
           </a:bodyPr>
           <a:lstStyle/>
           <a:p>
             <a:pPr algn="l"/>
             <a:r>
-              <a:rPr b="0" sz="1275" i="0" u="none">
+              <a:rPr sz="1275" b="0" i="0" u="none">
                 <a:solidFill>
                   <a:srgbClr val="334155"/>
                 </a:solidFill>
@@ -3945,14 +4012,14 @@
           <a:noFill/>
         </p:spPr>
         <p:txBody>
-          <a:bodyPr wrap="square" lIns="0" rIns="0" tIns="0" bIns="0" anchor="t">
+          <a:bodyPr wrap="square" lIns="0" tIns="0" rIns="0" bIns="0" anchor="t">
             <a:spAutoFit/>
           </a:bodyPr>
           <a:lstStyle/>
           <a:p>
             <a:pPr algn="l"/>
             <a:r>
-              <a:rPr b="1" sz="1275" i="0" u="none">
+              <a:rPr sz="1275" b="1" i="0" u="none">
                 <a:solidFill>
                   <a:srgbClr val="2563EB"/>
                 </a:solidFill>
@@ -3980,14 +4047,14 @@
           <a:noFill/>
         </p:spPr>
         <p:txBody>
-          <a:bodyPr wrap="square" lIns="0" rIns="0" tIns="0" bIns="0" anchor="t">
+          <a:bodyPr wrap="square" lIns="0" tIns="0" rIns="0" bIns="0" anchor="t">
             <a:spAutoFit/>
           </a:bodyPr>
           <a:lstStyle/>
           <a:p>
             <a:pPr algn="l"/>
             <a:r>
-              <a:rPr b="0" sz="1275" i="0" u="none">
+              <a:rPr sz="1275" b="0" i="0" u="none">
                 <a:solidFill>
                   <a:srgbClr val="334155"/>
                 </a:solidFill>
@@ -4007,7 +4074,7 @@
 </file>
 
 <file path=ppt/slides/slide11.xml><?xml version="1.0" encoding="utf-8"?>
-<p:sld xmlns:a="http://schemas.openxmlformats.org/drawingml/2006/main" xmlns:p="http://schemas.openxmlformats.org/presentationml/2006/main" xmlns:r="http://schemas.openxmlformats.org/officeDocument/2006/relationships">
+<p:sld xmlns:a="http://schemas.openxmlformats.org/drawingml/2006/main" xmlns:r="http://schemas.openxmlformats.org/officeDocument/2006/relationships" xmlns:p="http://schemas.openxmlformats.org/presentationml/2006/main">
   <p:cSld>
     <p:bg>
       <p:bgPr>
@@ -4023,7 +4090,14 @@
         <p:cNvGrpSpPr/>
         <p:nvPr/>
       </p:nvGrpSpPr>
-      <p:grpSpPr/>
+      <p:grpSpPr>
+        <a:xfrm>
+          <a:off x="0" y="0"/>
+          <a:ext cx="0" cy="0"/>
+          <a:chOff x="0" y="0"/>
+          <a:chExt cx="0" cy="0"/>
+        </a:xfrm>
+      </p:grpSpPr>
       <p:pic>
         <p:nvPicPr>
           <p:cNvPr id="2" name="Picture 1" descr="image.png"/>
@@ -4113,14 +4187,14 @@
           <a:noFill/>
         </p:spPr>
         <p:txBody>
-          <a:bodyPr wrap="square" lIns="0" rIns="0" tIns="0" bIns="0" anchor="t">
+          <a:bodyPr wrap="square" lIns="0" tIns="0" rIns="0" bIns="0" anchor="t">
             <a:spAutoFit/>
           </a:bodyPr>
           <a:lstStyle/>
           <a:p>
             <a:pPr algn="l"/>
             <a:r>
-              <a:rPr b="1" sz="1200" i="0" u="none">
+              <a:rPr sz="1200" b="1" i="0" u="none">
                 <a:solidFill>
                   <a:srgbClr val="2563EB"/>
                 </a:solidFill>
@@ -4148,14 +4222,14 @@
           <a:noFill/>
         </p:spPr>
         <p:txBody>
-          <a:bodyPr wrap="square" lIns="0" rIns="0" tIns="0" bIns="0" anchor="t">
+          <a:bodyPr wrap="square" lIns="0" tIns="0" rIns="0" bIns="0" anchor="t">
             <a:spAutoFit/>
           </a:bodyPr>
           <a:lstStyle/>
           <a:p>
             <a:pPr algn="l"/>
             <a:r>
-              <a:rPr b="0" sz="2400" i="0" u="none">
+              <a:rPr sz="2400" b="0" i="0" u="none">
                 <a:solidFill>
                   <a:srgbClr val="0F172A"/>
                 </a:solidFill>
@@ -4207,7 +4281,7 @@
           <a:noFill/>
         </p:spPr>
         <p:txBody>
-          <a:bodyPr wrap="square" lIns="0" rIns="0" tIns="0" bIns="0" anchor="t">
+          <a:bodyPr wrap="square" lIns="0" tIns="0" rIns="0" bIns="0" anchor="t">
             <a:spAutoFit/>
           </a:bodyPr>
           <a:lstStyle/>
@@ -4218,7 +4292,7 @@
               </a:lnSpc>
             </a:pPr>
             <a:r>
-              <a:rPr b="1" sz="1350" i="0" u="none">
+              <a:rPr sz="1350" b="1" i="0" u="none">
                 <a:solidFill>
                   <a:srgbClr val="334155"/>
                 </a:solidFill>
@@ -4227,7 +4301,7 @@
               <a:t>SK하이닉스 M16</a:t>
             </a:r>
             <a:r>
-              <a:rPr b="0" sz="1350" i="0" u="none">
+              <a:rPr sz="1350" b="0" i="0" u="none">
                 <a:solidFill>
                   <a:srgbClr val="334155"/>
                 </a:solidFill>
@@ -4236,7 +4310,7 @@
               <a:t> 및 </a:t>
             </a:r>
             <a:r>
-              <a:rPr b="1" sz="1350" i="0" u="none">
+              <a:rPr sz="1350" b="1" i="0" u="none">
                 <a:solidFill>
                   <a:srgbClr val="334155"/>
                 </a:solidFill>
@@ -4245,7 +4319,7 @@
               <a:t>LS일렉트릭 ESS MES</a:t>
             </a:r>
             <a:r>
-              <a:rPr b="0" sz="1350" i="0" u="none">
+              <a:rPr sz="1350" b="0" i="0" u="none">
                 <a:solidFill>
                   <a:srgbClr val="334155"/>
                 </a:solidFill>
@@ -4258,7 +4332,7 @@
 </a:t>
             </a:r>
             <a:r>
-              <a:rPr b="0" sz="1350" i="0" u="none">
+              <a:rPr sz="1350" b="0" i="0" u="none">
                 <a:solidFill>
                   <a:srgbClr val="334155"/>
                 </a:solidFill>
@@ -4286,7 +4360,7 @@
           <a:noFill/>
         </p:spPr>
         <p:txBody>
-          <a:bodyPr wrap="square" lIns="0" rIns="0" tIns="0" bIns="0" anchor="t">
+          <a:bodyPr wrap="square" lIns="0" tIns="0" rIns="0" bIns="0" anchor="t">
             <a:spAutoFit/>
           </a:bodyPr>
           <a:lstStyle/>
@@ -4297,7 +4371,7 @@
               </a:lnSpc>
             </a:pPr>
             <a:r>
-              <a:rPr b="0" sz="1350" i="0" u="none">
+              <a:rPr sz="1350" b="0" i="0" u="none">
                 <a:solidFill>
                   <a:srgbClr val="334155"/>
                 </a:solidFill>
@@ -4349,14 +4423,14 @@
           <a:noFill/>
         </p:spPr>
         <p:txBody>
-          <a:bodyPr wrap="square" lIns="0" rIns="0" tIns="0" bIns="0" anchor="t">
+          <a:bodyPr wrap="square" lIns="0" tIns="0" rIns="0" bIns="0" anchor="t">
             <a:spAutoFit/>
           </a:bodyPr>
           <a:lstStyle/>
           <a:p>
             <a:pPr algn="l"/>
             <a:r>
-              <a:rPr b="1" sz="1500" i="0" u="none">
+              <a:rPr sz="1500" b="1" i="0" u="none">
                 <a:solidFill>
                   <a:srgbClr val="0F172A"/>
                 </a:solidFill>
@@ -4408,14 +4482,14 @@
           <a:noFill/>
         </p:spPr>
         <p:txBody>
-          <a:bodyPr wrap="square" lIns="0" rIns="0" tIns="0" bIns="0" anchor="t">
+          <a:bodyPr wrap="square" lIns="0" tIns="0" rIns="0" bIns="0" anchor="t">
             <a:spAutoFit/>
           </a:bodyPr>
           <a:lstStyle/>
           <a:p>
             <a:pPr algn="l"/>
             <a:r>
-              <a:rPr b="1" sz="1500" i="0" u="none">
+              <a:rPr sz="1500" b="1" i="0" u="none">
                 <a:solidFill>
                   <a:srgbClr val="0F172A"/>
                 </a:solidFill>
@@ -4435,7 +4509,7 @@
 </file>
 
 <file path=ppt/slides/slide12.xml><?xml version="1.0" encoding="utf-8"?>
-<p:sld xmlns:a="http://schemas.openxmlformats.org/drawingml/2006/main" xmlns:p="http://schemas.openxmlformats.org/presentationml/2006/main" xmlns:r="http://schemas.openxmlformats.org/officeDocument/2006/relationships">
+<p:sld xmlns:a="http://schemas.openxmlformats.org/drawingml/2006/main" xmlns:r="http://schemas.openxmlformats.org/officeDocument/2006/relationships" xmlns:p="http://schemas.openxmlformats.org/presentationml/2006/main">
   <p:cSld>
     <p:bg>
       <p:bgPr>
@@ -4451,7 +4525,14 @@
         <p:cNvGrpSpPr/>
         <p:nvPr/>
       </p:nvGrpSpPr>
-      <p:grpSpPr/>
+      <p:grpSpPr>
+        <a:xfrm>
+          <a:off x="0" y="0"/>
+          <a:ext cx="0" cy="0"/>
+          <a:chOff x="0" y="0"/>
+          <a:chExt cx="0" cy="0"/>
+        </a:xfrm>
+      </p:grpSpPr>
       <p:pic>
         <p:nvPicPr>
           <p:cNvPr id="2" name="Picture 1" descr="image.png"/>
@@ -4493,7 +4574,7 @@
           <a:noFill/>
         </p:spPr>
         <p:txBody>
-          <a:bodyPr wrap="square" lIns="0" rIns="0" tIns="0" bIns="0" anchor="t">
+          <a:bodyPr wrap="square" lIns="0" tIns="0" rIns="0" bIns="0" anchor="t">
             <a:spAutoFit/>
           </a:bodyPr>
           <a:lstStyle/>
@@ -4504,7 +4585,7 @@
               </a:lnSpc>
             </a:pPr>
             <a:r>
-              <a:rPr b="0" sz="3600" i="0" u="none">
+              <a:rPr sz="3600" b="0" i="0" u="none">
                 <a:solidFill>
                   <a:srgbClr val="F8FAFC"/>
                 </a:solidFill>
@@ -4517,7 +4598,7 @@
 </a:t>
             </a:r>
             <a:r>
-              <a:rPr b="0" sz="3600" i="0" u="none">
+              <a:rPr sz="3600" b="0" i="0" u="none">
                 <a:solidFill>
                   <a:srgbClr val="38BDF8"/>
                 </a:solidFill>
@@ -4545,7 +4626,7 @@
           <a:noFill/>
         </p:spPr>
         <p:txBody>
-          <a:bodyPr wrap="square" lIns="0" rIns="0" tIns="0" bIns="0" anchor="t">
+          <a:bodyPr wrap="square" lIns="0" tIns="0" rIns="0" bIns="0" anchor="t">
             <a:spAutoFit/>
           </a:bodyPr>
           <a:lstStyle/>
@@ -4556,7 +4637,7 @@
               </a:lnSpc>
             </a:pPr>
             <a:r>
-              <a:rPr b="0" sz="1500" i="0" u="none">
+              <a:rPr sz="1500" b="0" i="0" u="none">
                 <a:solidFill>
                   <a:srgbClr val="94A3B8"/>
                 </a:solidFill>
@@ -4608,6 +4689,7 @@
           <a:lstStyle/>
           <a:p>
             <a:pPr algn="ctr"/>
+            <a:endParaRPr/>
           </a:p>
         </p:txBody>
       </p:sp>
@@ -4628,14 +4710,14 @@
           <a:noFill/>
         </p:spPr>
         <p:txBody>
-          <a:bodyPr wrap="square" lIns="0" rIns="0" tIns="0" bIns="0" anchor="t">
+          <a:bodyPr wrap="square" lIns="0" tIns="0" rIns="0" bIns="0" anchor="t">
             <a:spAutoFit/>
           </a:bodyPr>
           <a:lstStyle/>
           <a:p>
             <a:pPr algn="ctr"/>
             <a:r>
-              <a:rPr b="0" sz="1350" i="0" u="none">
+              <a:rPr sz="1350" b="0" i="0" u="none">
                 <a:solidFill>
                   <a:srgbClr val="CBD5E1"/>
                 </a:solidFill>
@@ -4655,7 +4737,7 @@
 </file>
 
 <file path=ppt/slides/slide13.xml><?xml version="1.0" encoding="utf-8"?>
-<p:sld xmlns:a="http://schemas.openxmlformats.org/drawingml/2006/main" xmlns:p="http://schemas.openxmlformats.org/presentationml/2006/main" xmlns:r="http://schemas.openxmlformats.org/officeDocument/2006/relationships">
+<p:sld xmlns:a="http://schemas.openxmlformats.org/drawingml/2006/main" xmlns:r="http://schemas.openxmlformats.org/officeDocument/2006/relationships" xmlns:p="http://schemas.openxmlformats.org/presentationml/2006/main">
   <p:cSld>
     <p:bg>
       <p:bgPr>
@@ -4671,7 +4753,14 @@
         <p:cNvGrpSpPr/>
         <p:nvPr/>
       </p:nvGrpSpPr>
-      <p:grpSpPr/>
+      <p:grpSpPr>
+        <a:xfrm>
+          <a:off x="0" y="0"/>
+          <a:ext cx="0" cy="0"/>
+          <a:chOff x="0" y="0"/>
+          <a:chExt cx="0" cy="0"/>
+        </a:xfrm>
+      </p:grpSpPr>
       <p:sp>
         <p:nvSpPr>
           <p:cNvPr id="2" name="TextBox 1"/>
@@ -4689,14 +4778,14 @@
           <a:noFill/>
         </p:spPr>
         <p:txBody>
-          <a:bodyPr wrap="square" lIns="0" rIns="0" tIns="0" bIns="0" anchor="t">
+          <a:bodyPr wrap="square" lIns="0" tIns="0" rIns="0" bIns="0" anchor="t">
             <a:spAutoFit/>
           </a:bodyPr>
           <a:lstStyle/>
           <a:p>
             <a:pPr algn="l"/>
             <a:r>
-              <a:rPr b="1" sz="1800" i="0" u="none">
+              <a:rPr sz="1800" b="1" i="0" u="none">
                 <a:solidFill>
                   <a:srgbClr val="0F172A"/>
                 </a:solidFill>
@@ -4748,14 +4837,14 @@
           <a:noFill/>
         </p:spPr>
         <p:txBody>
-          <a:bodyPr wrap="square" lIns="0" rIns="0" tIns="0" bIns="0" anchor="t">
+          <a:bodyPr wrap="square" lIns="0" tIns="0" rIns="0" bIns="0" anchor="t">
             <a:spAutoFit/>
           </a:bodyPr>
           <a:lstStyle/>
           <a:p>
             <a:pPr algn="l"/>
             <a:r>
-              <a:rPr b="0" sz="975" i="0" u="none">
+              <a:rPr sz="975" b="0" i="0" u="none">
                 <a:solidFill>
                   <a:srgbClr val="0F172A"/>
                 </a:solidFill>
@@ -4783,14 +4872,14 @@
           <a:noFill/>
         </p:spPr>
         <p:txBody>
-          <a:bodyPr wrap="square" lIns="0" rIns="0" tIns="0" bIns="0" anchor="t">
+          <a:bodyPr wrap="square" lIns="0" tIns="0" rIns="0" bIns="0" anchor="t">
             <a:spAutoFit/>
           </a:bodyPr>
           <a:lstStyle/>
           <a:p>
             <a:pPr algn="l"/>
             <a:r>
-              <a:rPr b="0" sz="1200" i="0" u="none">
+              <a:rPr sz="1200" b="0" i="0" u="none">
                 <a:solidFill>
                   <a:srgbClr val="0F172A"/>
                 </a:solidFill>
@@ -4799,7 +4888,7 @@
               <a:t>Source: </a:t>
             </a:r>
             <a:r>
-              <a:rPr b="0" sz="1200" i="0" u="none">
+              <a:rPr sz="1200" b="0" i="0" u="none">
                 <a:solidFill>
                   <a:srgbClr val="4F46E5"/>
                 </a:solidFill>
@@ -4819,7 +4908,7 @@
 </file>
 
 <file path=ppt/slides/slide2.xml><?xml version="1.0" encoding="utf-8"?>
-<p:sld xmlns:a="http://schemas.openxmlformats.org/drawingml/2006/main" xmlns:p="http://schemas.openxmlformats.org/presentationml/2006/main" xmlns:r="http://schemas.openxmlformats.org/officeDocument/2006/relationships">
+<p:sld xmlns:a="http://schemas.openxmlformats.org/drawingml/2006/main" xmlns:r="http://schemas.openxmlformats.org/officeDocument/2006/relationships" xmlns:p="http://schemas.openxmlformats.org/presentationml/2006/main">
   <p:cSld>
     <p:bg>
       <p:bgPr>
@@ -4835,7 +4924,14 @@
         <p:cNvGrpSpPr/>
         <p:nvPr/>
       </p:nvGrpSpPr>
-      <p:grpSpPr/>
+      <p:grpSpPr>
+        <a:xfrm>
+          <a:off x="0" y="0"/>
+          <a:ext cx="0" cy="0"/>
+          <a:chOff x="0" y="0"/>
+          <a:chExt cx="0" cy="0"/>
+        </a:xfrm>
+      </p:grpSpPr>
       <p:pic>
         <p:nvPicPr>
           <p:cNvPr id="2" name="Picture 1" descr="image.png"/>
@@ -4949,14 +5045,14 @@
           <a:noFill/>
         </p:spPr>
         <p:txBody>
-          <a:bodyPr wrap="square" lIns="0" rIns="0" tIns="0" bIns="0" anchor="t">
+          <a:bodyPr wrap="square" lIns="0" tIns="0" rIns="0" bIns="0" anchor="t">
             <a:spAutoFit/>
           </a:bodyPr>
           <a:lstStyle/>
           <a:p>
             <a:pPr algn="l"/>
             <a:r>
-              <a:rPr b="1" sz="1200" i="0" u="none">
+              <a:rPr sz="1200" b="1" i="0" u="none">
                 <a:solidFill>
                   <a:srgbClr val="2563EB"/>
                 </a:solidFill>
@@ -4984,14 +5080,14 @@
           <a:noFill/>
         </p:spPr>
         <p:txBody>
-          <a:bodyPr wrap="square" lIns="0" rIns="0" tIns="0" bIns="0" anchor="t">
+          <a:bodyPr wrap="square" lIns="0" tIns="0" rIns="0" bIns="0" anchor="t">
             <a:spAutoFit/>
           </a:bodyPr>
           <a:lstStyle/>
           <a:p>
             <a:pPr algn="l"/>
             <a:r>
-              <a:rPr b="0" sz="2400" i="0" u="none">
+              <a:rPr sz="2400" b="0" i="0" u="none">
                 <a:solidFill>
                   <a:srgbClr val="0F172A"/>
                 </a:solidFill>
@@ -5043,14 +5139,14 @@
           <a:noFill/>
         </p:spPr>
         <p:txBody>
-          <a:bodyPr wrap="square" lIns="0" rIns="0" tIns="0" bIns="0" anchor="t">
+          <a:bodyPr wrap="square" lIns="0" tIns="0" rIns="0" bIns="0" anchor="t">
             <a:spAutoFit/>
           </a:bodyPr>
           <a:lstStyle/>
           <a:p>
             <a:pPr algn="l"/>
             <a:r>
-              <a:rPr b="1" sz="1050" i="0" u="none">
+              <a:rPr sz="1050" b="1" i="0" u="none">
                 <a:solidFill>
                   <a:srgbClr val="64748B"/>
                 </a:solidFill>
@@ -5078,14 +5174,14 @@
           <a:noFill/>
         </p:spPr>
         <p:txBody>
-          <a:bodyPr wrap="square" lIns="0" rIns="0" tIns="0" bIns="0" anchor="t">
+          <a:bodyPr wrap="square" lIns="0" tIns="0" rIns="0" bIns="0" anchor="t">
             <a:spAutoFit/>
           </a:bodyPr>
           <a:lstStyle/>
           <a:p>
             <a:pPr algn="l"/>
             <a:r>
-              <a:rPr b="1" sz="1500" i="0" u="none">
+              <a:rPr sz="1500" b="1" i="0" u="none">
                 <a:solidFill>
                   <a:srgbClr val="0F172A"/>
                 </a:solidFill>
@@ -5113,7 +5209,7 @@
           <a:noFill/>
         </p:spPr>
         <p:txBody>
-          <a:bodyPr wrap="square" lIns="0" rIns="0" tIns="0" bIns="0" anchor="t">
+          <a:bodyPr wrap="square" lIns="0" tIns="0" rIns="0" bIns="0" anchor="t">
             <a:spAutoFit/>
           </a:bodyPr>
           <a:lstStyle/>
@@ -5124,7 +5220,7 @@
               </a:lnSpc>
             </a:pPr>
             <a:r>
-              <a:rPr b="0" sz="1350" i="0" u="none">
+              <a:rPr sz="1350" b="0" i="0" u="none">
                 <a:solidFill>
                   <a:srgbClr val="334155"/>
                 </a:solidFill>
@@ -5176,14 +5272,14 @@
           <a:noFill/>
         </p:spPr>
         <p:txBody>
-          <a:bodyPr wrap="square" lIns="0" rIns="0" tIns="0" bIns="0" anchor="t">
+          <a:bodyPr wrap="square" lIns="0" tIns="0" rIns="0" bIns="0" anchor="t">
             <a:spAutoFit/>
           </a:bodyPr>
           <a:lstStyle/>
           <a:p>
             <a:pPr algn="l"/>
             <a:r>
-              <a:rPr b="1" sz="1050" i="0" u="none">
+              <a:rPr sz="1050" b="1" i="0" u="none">
                 <a:solidFill>
                   <a:srgbClr val="64748B"/>
                 </a:solidFill>
@@ -5211,14 +5307,14 @@
           <a:noFill/>
         </p:spPr>
         <p:txBody>
-          <a:bodyPr wrap="square" lIns="0" rIns="0" tIns="0" bIns="0" anchor="t">
+          <a:bodyPr wrap="square" lIns="0" tIns="0" rIns="0" bIns="0" anchor="t">
             <a:spAutoFit/>
           </a:bodyPr>
           <a:lstStyle/>
           <a:p>
             <a:pPr algn="l"/>
             <a:r>
-              <a:rPr b="1" sz="1500" i="0" u="none">
+              <a:rPr sz="1500" b="1" i="0" u="none">
                 <a:solidFill>
                   <a:srgbClr val="0F172A"/>
                 </a:solidFill>
@@ -5246,7 +5342,7 @@
           <a:noFill/>
         </p:spPr>
         <p:txBody>
-          <a:bodyPr wrap="square" lIns="0" rIns="0" tIns="0" bIns="0" anchor="t">
+          <a:bodyPr wrap="square" lIns="0" tIns="0" rIns="0" bIns="0" anchor="t">
             <a:spAutoFit/>
           </a:bodyPr>
           <a:lstStyle/>
@@ -5257,7 +5353,7 @@
               </a:lnSpc>
             </a:pPr>
             <a:r>
-              <a:rPr b="0" sz="1350" i="0" u="none">
+              <a:rPr sz="1350" b="0" i="0" u="none">
                 <a:solidFill>
                   <a:srgbClr val="334155"/>
                 </a:solidFill>
@@ -5309,14 +5405,14 @@
           <a:noFill/>
         </p:spPr>
         <p:txBody>
-          <a:bodyPr wrap="square" lIns="0" rIns="0" tIns="0" bIns="0" anchor="t">
+          <a:bodyPr wrap="square" lIns="0" tIns="0" rIns="0" bIns="0" anchor="t">
             <a:spAutoFit/>
           </a:bodyPr>
           <a:lstStyle/>
           <a:p>
             <a:pPr algn="l"/>
             <a:r>
-              <a:rPr b="1" sz="1050" i="0" u="none">
+              <a:rPr sz="1050" b="1" i="0" u="none">
                 <a:solidFill>
                   <a:srgbClr val="64748B"/>
                 </a:solidFill>
@@ -5344,14 +5440,14 @@
           <a:noFill/>
         </p:spPr>
         <p:txBody>
-          <a:bodyPr wrap="square" lIns="0" rIns="0" tIns="0" bIns="0" anchor="t">
+          <a:bodyPr wrap="square" lIns="0" tIns="0" rIns="0" bIns="0" anchor="t">
             <a:spAutoFit/>
           </a:bodyPr>
           <a:lstStyle/>
           <a:p>
             <a:pPr algn="l"/>
             <a:r>
-              <a:rPr b="1" sz="1500" i="0" u="none">
+              <a:rPr sz="1500" b="1" i="0" u="none">
                 <a:solidFill>
                   <a:srgbClr val="0F172A"/>
                 </a:solidFill>
@@ -5379,7 +5475,7 @@
           <a:noFill/>
         </p:spPr>
         <p:txBody>
-          <a:bodyPr wrap="square" lIns="0" rIns="0" tIns="0" bIns="0" anchor="t">
+          <a:bodyPr wrap="square" lIns="0" tIns="0" rIns="0" bIns="0" anchor="t">
             <a:spAutoFit/>
           </a:bodyPr>
           <a:lstStyle/>
@@ -5390,7 +5486,7 @@
               </a:lnSpc>
             </a:pPr>
             <a:r>
-              <a:rPr b="0" sz="1350" i="0" u="none">
+              <a:rPr sz="1350" b="0" i="0" u="none">
                 <a:solidFill>
                   <a:srgbClr val="334155"/>
                 </a:solidFill>
@@ -5442,14 +5538,14 @@
           <a:noFill/>
         </p:spPr>
         <p:txBody>
-          <a:bodyPr wrap="square" lIns="0" rIns="0" tIns="0" bIns="0" anchor="t">
+          <a:bodyPr wrap="square" lIns="0" tIns="0" rIns="0" bIns="0" anchor="t">
             <a:spAutoFit/>
           </a:bodyPr>
           <a:lstStyle/>
           <a:p>
             <a:pPr algn="l"/>
             <a:r>
-              <a:rPr b="1" sz="1050" i="0" u="none">
+              <a:rPr sz="1050" b="1" i="0" u="none">
                 <a:solidFill>
                   <a:srgbClr val="64748B"/>
                 </a:solidFill>
@@ -5477,14 +5573,14 @@
           <a:noFill/>
         </p:spPr>
         <p:txBody>
-          <a:bodyPr wrap="square" lIns="0" rIns="0" tIns="0" bIns="0" anchor="t">
+          <a:bodyPr wrap="square" lIns="0" tIns="0" rIns="0" bIns="0" anchor="t">
             <a:spAutoFit/>
           </a:bodyPr>
           <a:lstStyle/>
           <a:p>
             <a:pPr algn="l"/>
             <a:r>
-              <a:rPr b="1" sz="1500" i="0" u="none">
+              <a:rPr sz="1500" b="1" i="0" u="none">
                 <a:solidFill>
                   <a:srgbClr val="0F172A"/>
                 </a:solidFill>
@@ -5512,7 +5608,7 @@
           <a:noFill/>
         </p:spPr>
         <p:txBody>
-          <a:bodyPr wrap="square" lIns="0" rIns="0" tIns="0" bIns="0" anchor="t">
+          <a:bodyPr wrap="square" lIns="0" tIns="0" rIns="0" bIns="0" anchor="t">
             <a:spAutoFit/>
           </a:bodyPr>
           <a:lstStyle/>
@@ -5523,7 +5619,7 @@
               </a:lnSpc>
             </a:pPr>
             <a:r>
-              <a:rPr b="0" sz="1350" i="0" u="none">
+              <a:rPr sz="1350" b="0" i="0" u="none">
                 <a:solidFill>
                   <a:srgbClr val="334155"/>
                 </a:solidFill>
@@ -5639,7 +5735,7 @@
 </file>
 
 <file path=ppt/slides/slide3.xml><?xml version="1.0" encoding="utf-8"?>
-<p:sld xmlns:a="http://schemas.openxmlformats.org/drawingml/2006/main" xmlns:p="http://schemas.openxmlformats.org/presentationml/2006/main" xmlns:r="http://schemas.openxmlformats.org/officeDocument/2006/relationships">
+<p:sld xmlns:a="http://schemas.openxmlformats.org/drawingml/2006/main" xmlns:r="http://schemas.openxmlformats.org/officeDocument/2006/relationships" xmlns:p="http://schemas.openxmlformats.org/presentationml/2006/main">
   <p:cSld>
     <p:bg>
       <p:bgPr>
@@ -5655,7 +5751,14 @@
         <p:cNvGrpSpPr/>
         <p:nvPr/>
       </p:nvGrpSpPr>
-      <p:grpSpPr/>
+      <p:grpSpPr>
+        <a:xfrm>
+          <a:off x="0" y="0"/>
+          <a:ext cx="0" cy="0"/>
+          <a:chOff x="0" y="0"/>
+          <a:chExt cx="0" cy="0"/>
+        </a:xfrm>
+      </p:grpSpPr>
       <p:pic>
         <p:nvPicPr>
           <p:cNvPr id="2" name="Picture 1" descr="image.png"/>
@@ -5745,14 +5848,14 @@
           <a:noFill/>
         </p:spPr>
         <p:txBody>
-          <a:bodyPr wrap="square" lIns="0" rIns="0" tIns="0" bIns="0" anchor="t">
+          <a:bodyPr wrap="square" lIns="0" tIns="0" rIns="0" bIns="0" anchor="t">
             <a:spAutoFit/>
           </a:bodyPr>
           <a:lstStyle/>
           <a:p>
             <a:pPr algn="l"/>
             <a:r>
-              <a:rPr b="1" sz="1200" i="0" u="none">
+              <a:rPr sz="1200" b="1" i="0" u="none">
                 <a:solidFill>
                   <a:srgbClr val="2563EB"/>
                 </a:solidFill>
@@ -5780,14 +5883,14 @@
           <a:noFill/>
         </p:spPr>
         <p:txBody>
-          <a:bodyPr wrap="square" lIns="0" rIns="0" tIns="0" bIns="0" anchor="t">
+          <a:bodyPr wrap="square" lIns="0" tIns="0" rIns="0" bIns="0" anchor="t">
             <a:spAutoFit/>
           </a:bodyPr>
           <a:lstStyle/>
           <a:p>
             <a:pPr algn="l"/>
             <a:r>
-              <a:rPr b="0" sz="2400" i="0" u="none">
+              <a:rPr sz="2400" b="0" i="0" u="none">
                 <a:solidFill>
                   <a:srgbClr val="0F172A"/>
                 </a:solidFill>
@@ -5815,14 +5918,14 @@
           <a:noFill/>
         </p:spPr>
         <p:txBody>
-          <a:bodyPr wrap="square" lIns="0" rIns="0" tIns="0" bIns="0" anchor="t">
+          <a:bodyPr wrap="square" lIns="0" tIns="0" rIns="0" bIns="0" anchor="t">
             <a:spAutoFit/>
           </a:bodyPr>
           <a:lstStyle/>
           <a:p>
             <a:pPr algn="l"/>
             <a:r>
-              <a:rPr b="1" sz="1350" i="0" u="none">
+              <a:rPr sz="1350" b="1" i="0" u="none">
                 <a:solidFill>
                   <a:srgbClr val="0F172A"/>
                 </a:solidFill>
@@ -5850,14 +5953,14 @@
           <a:noFill/>
         </p:spPr>
         <p:txBody>
-          <a:bodyPr wrap="square" lIns="0" rIns="0" tIns="0" bIns="0" anchor="t">
+          <a:bodyPr wrap="square" lIns="0" tIns="0" rIns="0" bIns="0" anchor="t">
             <a:spAutoFit/>
           </a:bodyPr>
           <a:lstStyle/>
           <a:p>
             <a:pPr algn="l"/>
             <a:r>
-              <a:rPr b="0" sz="1350" i="0" u="none">
+              <a:rPr sz="1350" b="0" i="0" u="none">
                 <a:solidFill>
                   <a:srgbClr val="334155"/>
                 </a:solidFill>
@@ -5885,14 +5988,14 @@
           <a:noFill/>
         </p:spPr>
         <p:txBody>
-          <a:bodyPr wrap="square" lIns="0" rIns="0" tIns="0" bIns="0" anchor="t">
+          <a:bodyPr wrap="square" lIns="0" tIns="0" rIns="0" bIns="0" anchor="t">
             <a:spAutoFit/>
           </a:bodyPr>
           <a:lstStyle/>
           <a:p>
             <a:pPr algn="l"/>
             <a:r>
-              <a:rPr b="1" sz="1350" i="0" u="none">
+              <a:rPr sz="1350" b="1" i="0" u="none">
                 <a:solidFill>
                   <a:srgbClr val="0F172A"/>
                 </a:solidFill>
@@ -5920,14 +6023,14 @@
           <a:noFill/>
         </p:spPr>
         <p:txBody>
-          <a:bodyPr wrap="square" lIns="0" rIns="0" tIns="0" bIns="0" anchor="t">
+          <a:bodyPr wrap="square" lIns="0" tIns="0" rIns="0" bIns="0" anchor="t">
             <a:spAutoFit/>
           </a:bodyPr>
           <a:lstStyle/>
           <a:p>
             <a:pPr algn="l"/>
             <a:r>
-              <a:rPr b="0" sz="1350" i="0" u="none">
+              <a:rPr sz="1350" b="0" i="0" u="none">
                 <a:solidFill>
                   <a:srgbClr val="334155"/>
                 </a:solidFill>
@@ -5979,14 +6082,14 @@
           <a:noFill/>
         </p:spPr>
         <p:txBody>
-          <a:bodyPr wrap="square" lIns="0" rIns="0" tIns="0" bIns="0" anchor="t">
+          <a:bodyPr wrap="square" lIns="0" tIns="0" rIns="0" bIns="0" anchor="t">
             <a:spAutoFit/>
           </a:bodyPr>
           <a:lstStyle/>
           <a:p>
             <a:pPr algn="l"/>
             <a:r>
-              <a:rPr b="1" sz="1500" i="0" u="none">
+              <a:rPr sz="1500" b="1" i="0" u="none">
                 <a:solidFill>
                   <a:srgbClr val="FFFFFF"/>
                 </a:solidFill>
@@ -6014,7 +6117,7 @@
           <a:noFill/>
         </p:spPr>
         <p:txBody>
-          <a:bodyPr wrap="square" lIns="0" rIns="0" tIns="0" bIns="0" anchor="t">
+          <a:bodyPr wrap="square" lIns="0" tIns="0" rIns="0" bIns="0" anchor="t">
             <a:spAutoFit/>
           </a:bodyPr>
           <a:lstStyle/>
@@ -6025,7 +6128,7 @@
               </a:lnSpc>
             </a:pPr>
             <a:r>
-              <a:rPr b="1" sz="1350" i="0" u="none">
+              <a:rPr sz="1350" b="1" i="0" u="none">
                 <a:solidFill>
                   <a:srgbClr val="38BDF8"/>
                 </a:solidFill>
@@ -6034,7 +6137,7 @@
               <a:t>프론트엔드 설계서:</a:t>
             </a:r>
             <a:r>
-              <a:rPr b="0" sz="1350" i="0" u="none">
+              <a:rPr sz="1350" b="0" i="0" u="none">
                 <a:solidFill>
                   <a:srgbClr val="CBD5E1"/>
                 </a:solidFill>
@@ -6062,7 +6165,7 @@
           <a:noFill/>
         </p:spPr>
         <p:txBody>
-          <a:bodyPr wrap="square" lIns="0" rIns="0" tIns="0" bIns="0" anchor="t">
+          <a:bodyPr wrap="square" lIns="0" tIns="0" rIns="0" bIns="0" anchor="t">
             <a:spAutoFit/>
           </a:bodyPr>
           <a:lstStyle/>
@@ -6073,7 +6176,7 @@
               </a:lnSpc>
             </a:pPr>
             <a:r>
-              <a:rPr b="1" sz="1350" i="0" u="none">
+              <a:rPr sz="1350" b="1" i="0" u="none">
                 <a:solidFill>
                   <a:srgbClr val="38BDF8"/>
                 </a:solidFill>
@@ -6082,7 +6185,7 @@
               <a:t>백엔드 설계서:</a:t>
             </a:r>
             <a:r>
-              <a:rPr b="0" sz="1350" i="0" u="none">
+              <a:rPr sz="1350" b="0" i="0" u="none">
                 <a:solidFill>
                   <a:srgbClr val="CBD5E1"/>
                 </a:solidFill>
@@ -6110,7 +6213,7 @@
           <a:noFill/>
         </p:spPr>
         <p:txBody>
-          <a:bodyPr wrap="square" lIns="0" rIns="0" tIns="0" bIns="0" anchor="t">
+          <a:bodyPr wrap="square" lIns="0" tIns="0" rIns="0" bIns="0" anchor="t">
             <a:spAutoFit/>
           </a:bodyPr>
           <a:lstStyle/>
@@ -6121,7 +6224,7 @@
               </a:lnSpc>
             </a:pPr>
             <a:r>
-              <a:rPr b="1" sz="1350" i="0" u="none">
+              <a:rPr sz="1350" b="1" i="0" u="none">
                 <a:solidFill>
                   <a:srgbClr val="38BDF8"/>
                 </a:solidFill>
@@ -6130,7 +6233,7 @@
               <a:t>인터페이스 설계서:</a:t>
             </a:r>
             <a:r>
-              <a:rPr b="0" sz="1350" i="0" u="none">
+              <a:rPr sz="1350" b="0" i="0" u="none">
                 <a:solidFill>
                   <a:srgbClr val="CBD5E1"/>
                 </a:solidFill>
@@ -6150,7 +6253,7 @@
 </file>
 
 <file path=ppt/slides/slide4.xml><?xml version="1.0" encoding="utf-8"?>
-<p:sld xmlns:a="http://schemas.openxmlformats.org/drawingml/2006/main" xmlns:p="http://schemas.openxmlformats.org/presentationml/2006/main" xmlns:r="http://schemas.openxmlformats.org/officeDocument/2006/relationships">
+<p:sld xmlns:a="http://schemas.openxmlformats.org/drawingml/2006/main" xmlns:r="http://schemas.openxmlformats.org/officeDocument/2006/relationships" xmlns:p="http://schemas.openxmlformats.org/presentationml/2006/main">
   <p:cSld>
     <p:bg>
       <p:bgPr>
@@ -6166,7 +6269,14 @@
         <p:cNvGrpSpPr/>
         <p:nvPr/>
       </p:nvGrpSpPr>
-      <p:grpSpPr/>
+      <p:grpSpPr>
+        <a:xfrm>
+          <a:off x="0" y="0"/>
+          <a:ext cx="0" cy="0"/>
+          <a:chOff x="0" y="0"/>
+          <a:chExt cx="0" cy="0"/>
+        </a:xfrm>
+      </p:grpSpPr>
       <p:pic>
         <p:nvPicPr>
           <p:cNvPr id="2" name="Picture 1" descr="image.png"/>
@@ -6256,14 +6366,14 @@
           <a:noFill/>
         </p:spPr>
         <p:txBody>
-          <a:bodyPr wrap="square" lIns="0" rIns="0" tIns="0" bIns="0" anchor="t">
+          <a:bodyPr wrap="square" lIns="0" tIns="0" rIns="0" bIns="0" anchor="t">
             <a:spAutoFit/>
           </a:bodyPr>
           <a:lstStyle/>
           <a:p>
             <a:pPr algn="l"/>
             <a:r>
-              <a:rPr b="1" sz="1200" i="0" u="none">
+              <a:rPr sz="1200" b="1" i="0" u="none">
                 <a:solidFill>
                   <a:srgbClr val="2563EB"/>
                 </a:solidFill>
@@ -6291,14 +6401,14 @@
           <a:noFill/>
         </p:spPr>
         <p:txBody>
-          <a:bodyPr wrap="square" lIns="0" rIns="0" tIns="0" bIns="0" anchor="t">
+          <a:bodyPr wrap="square" lIns="0" tIns="0" rIns="0" bIns="0" anchor="t">
             <a:spAutoFit/>
           </a:bodyPr>
           <a:lstStyle/>
           <a:p>
             <a:pPr algn="l"/>
             <a:r>
-              <a:rPr b="0" sz="2400" i="0" u="none">
+              <a:rPr sz="2400" b="0" i="0" u="none">
                 <a:solidFill>
                   <a:srgbClr val="0F172A"/>
                 </a:solidFill>
@@ -6350,14 +6460,14 @@
           <a:noFill/>
         </p:spPr>
         <p:txBody>
-          <a:bodyPr wrap="square" lIns="0" rIns="0" tIns="0" bIns="0" anchor="t">
+          <a:bodyPr wrap="square" lIns="0" tIns="0" rIns="0" bIns="0" anchor="t">
             <a:spAutoFit/>
           </a:bodyPr>
           <a:lstStyle/>
           <a:p>
             <a:pPr algn="l"/>
             <a:r>
-              <a:rPr b="1" sz="1500" i="0" u="none">
+              <a:rPr sz="1500" b="1" i="0" u="none">
                 <a:solidFill>
                   <a:srgbClr val="0F172A"/>
                 </a:solidFill>
@@ -6409,14 +6519,14 @@
           <a:noFill/>
         </p:spPr>
         <p:txBody>
-          <a:bodyPr wrap="square" lIns="0" rIns="0" tIns="0" bIns="0" anchor="t">
+          <a:bodyPr wrap="square" lIns="0" tIns="0" rIns="0" bIns="0" anchor="t">
             <a:spAutoFit/>
           </a:bodyPr>
           <a:lstStyle/>
           <a:p>
             <a:pPr algn="l"/>
             <a:r>
-              <a:rPr b="1" sz="1500" i="0" u="none">
+              <a:rPr sz="1500" b="1" i="0" u="none">
                 <a:solidFill>
                   <a:srgbClr val="0F172A"/>
                 </a:solidFill>
@@ -6468,14 +6578,14 @@
           <a:noFill/>
         </p:spPr>
         <p:txBody>
-          <a:bodyPr wrap="square" lIns="0" rIns="0" tIns="0" bIns="0" anchor="t">
+          <a:bodyPr wrap="square" lIns="0" tIns="0" rIns="0" bIns="0" anchor="t">
             <a:spAutoFit/>
           </a:bodyPr>
           <a:lstStyle/>
           <a:p>
             <a:pPr algn="l"/>
             <a:r>
-              <a:rPr b="1" sz="1500" i="0" u="none">
+              <a:rPr sz="1500" b="1" i="0" u="none">
                 <a:solidFill>
                   <a:srgbClr val="0F172A"/>
                 </a:solidFill>
@@ -6527,14 +6637,14 @@
           <a:noFill/>
         </p:spPr>
         <p:txBody>
-          <a:bodyPr wrap="square" lIns="0" rIns="0" tIns="0" bIns="0" anchor="t">
+          <a:bodyPr wrap="square" lIns="0" tIns="0" rIns="0" bIns="0" anchor="t">
             <a:spAutoFit/>
           </a:bodyPr>
           <a:lstStyle/>
           <a:p>
             <a:pPr algn="l"/>
             <a:r>
-              <a:rPr b="1" sz="1350" i="0" u="none">
+              <a:rPr sz="1350" b="1" i="0" u="none">
                 <a:solidFill>
                   <a:srgbClr val="334155"/>
                 </a:solidFill>
@@ -6543,7 +6653,7 @@
               <a:t>영역 분리:</a:t>
             </a:r>
             <a:r>
-              <a:rPr b="0" sz="1350" i="0" u="none">
+              <a:rPr sz="1350" b="0" i="0" u="none">
                 <a:solidFill>
                   <a:srgbClr val="334155"/>
                 </a:solidFill>
@@ -6571,14 +6681,14 @@
           <a:noFill/>
         </p:spPr>
         <p:txBody>
-          <a:bodyPr wrap="square" lIns="0" rIns="0" tIns="0" bIns="0" anchor="t">
+          <a:bodyPr wrap="square" lIns="0" tIns="0" rIns="0" bIns="0" anchor="t">
             <a:spAutoFit/>
           </a:bodyPr>
           <a:lstStyle/>
           <a:p>
             <a:pPr algn="l"/>
             <a:r>
-              <a:rPr b="1" sz="1350" i="0" u="none">
+              <a:rPr sz="1350" b="1" i="0" u="none">
                 <a:solidFill>
                   <a:srgbClr val="334155"/>
                 </a:solidFill>
@@ -6587,7 +6697,7 @@
               <a:t>접근 권한:</a:t>
             </a:r>
             <a:r>
-              <a:rPr b="0" sz="1350" i="0" u="none">
+              <a:rPr sz="1350" b="0" i="0" u="none">
                 <a:solidFill>
                   <a:srgbClr val="334155"/>
                 </a:solidFill>
@@ -6615,14 +6725,14 @@
           <a:noFill/>
         </p:spPr>
         <p:txBody>
-          <a:bodyPr wrap="square" lIns="0" rIns="0" tIns="0" bIns="0" anchor="t">
+          <a:bodyPr wrap="square" lIns="0" tIns="0" rIns="0" bIns="0" anchor="t">
             <a:spAutoFit/>
           </a:bodyPr>
           <a:lstStyle/>
           <a:p>
             <a:pPr algn="l"/>
             <a:r>
-              <a:rPr b="1" sz="1350" i="0" u="none">
+              <a:rPr sz="1350" b="1" i="0" u="none">
                 <a:solidFill>
                   <a:srgbClr val="334155"/>
                 </a:solidFill>
@@ -6631,7 +6741,7 @@
               <a:t>안전장치:</a:t>
             </a:r>
             <a:r>
-              <a:rPr b="0" sz="1350" i="0" u="none">
+              <a:rPr sz="1350" b="0" i="0" u="none">
                 <a:solidFill>
                   <a:srgbClr val="334155"/>
                 </a:solidFill>
@@ -6683,14 +6793,14 @@
           <a:noFill/>
         </p:spPr>
         <p:txBody>
-          <a:bodyPr wrap="square" lIns="0" rIns="0" tIns="0" bIns="0" anchor="t">
+          <a:bodyPr wrap="square" lIns="0" tIns="0" rIns="0" bIns="0" anchor="t">
             <a:spAutoFit/>
           </a:bodyPr>
           <a:lstStyle/>
           <a:p>
             <a:pPr algn="l"/>
             <a:r>
-              <a:rPr b="1" sz="1350" i="0" u="none">
+              <a:rPr sz="1350" b="1" i="0" u="none">
                 <a:solidFill>
                   <a:srgbClr val="334155"/>
                 </a:solidFill>
@@ -6699,7 +6809,7 @@
               <a:t>커밋 단위:</a:t>
             </a:r>
             <a:r>
-              <a:rPr b="0" sz="1350" i="0" u="none">
+              <a:rPr sz="1350" b="0" i="0" u="none">
                 <a:solidFill>
                   <a:srgbClr val="334155"/>
                 </a:solidFill>
@@ -6727,14 +6837,14 @@
           <a:noFill/>
         </p:spPr>
         <p:txBody>
-          <a:bodyPr wrap="square" lIns="0" rIns="0" tIns="0" bIns="0" anchor="t">
+          <a:bodyPr wrap="square" lIns="0" tIns="0" rIns="0" bIns="0" anchor="t">
             <a:spAutoFit/>
           </a:bodyPr>
           <a:lstStyle/>
           <a:p>
             <a:pPr algn="l"/>
             <a:r>
-              <a:rPr b="1" sz="1350" i="0" u="none">
+              <a:rPr sz="1350" b="1" i="0" u="none">
                 <a:solidFill>
                   <a:srgbClr val="334155"/>
                 </a:solidFill>
@@ -6743,7 +6853,7 @@
               <a:t>feature 검증:</a:t>
             </a:r>
             <a:r>
-              <a:rPr b="0" sz="1350" i="0" u="none">
+              <a:rPr sz="1350" b="0" i="0" u="none">
                 <a:solidFill>
                   <a:srgbClr val="334155"/>
                 </a:solidFill>
@@ -6771,14 +6881,14 @@
           <a:noFill/>
         </p:spPr>
         <p:txBody>
-          <a:bodyPr wrap="square" lIns="0" rIns="0" tIns="0" bIns="0" anchor="t">
+          <a:bodyPr wrap="square" lIns="0" tIns="0" rIns="0" bIns="0" anchor="t">
             <a:spAutoFit/>
           </a:bodyPr>
           <a:lstStyle/>
           <a:p>
             <a:pPr algn="l"/>
             <a:r>
-              <a:rPr b="1" sz="1350" i="0" u="none">
+              <a:rPr sz="1350" b="1" i="0" u="none">
                 <a:solidFill>
                   <a:srgbClr val="334155"/>
                 </a:solidFill>
@@ -6787,7 +6897,7 @@
               <a:t>회귀 처리:</a:t>
             </a:r>
             <a:r>
-              <a:rPr b="0" sz="1350" i="0" u="none">
+              <a:rPr sz="1350" b="0" i="0" u="none">
                 <a:solidFill>
                   <a:srgbClr val="334155"/>
                 </a:solidFill>
@@ -6839,14 +6949,14 @@
           <a:noFill/>
         </p:spPr>
         <p:txBody>
-          <a:bodyPr wrap="square" lIns="0" rIns="0" tIns="0" bIns="0" anchor="t">
+          <a:bodyPr wrap="square" lIns="0" tIns="0" rIns="0" bIns="0" anchor="t">
             <a:spAutoFit/>
           </a:bodyPr>
           <a:lstStyle/>
           <a:p>
             <a:pPr algn="l"/>
             <a:r>
-              <a:rPr b="1" sz="1350" i="0" u="none">
+              <a:rPr sz="1350" b="1" i="0" u="none">
                 <a:solidFill>
                   <a:srgbClr val="334155"/>
                 </a:solidFill>
@@ -6855,7 +6965,7 @@
               <a:t>개발 배포:</a:t>
             </a:r>
             <a:r>
-              <a:rPr b="0" sz="1350" i="0" u="none">
+              <a:rPr sz="1350" b="0" i="0" u="none">
                 <a:solidFill>
                   <a:srgbClr val="334155"/>
                 </a:solidFill>
@@ -6883,14 +6993,14 @@
           <a:noFill/>
         </p:spPr>
         <p:txBody>
-          <a:bodyPr wrap="square" lIns="0" rIns="0" tIns="0" bIns="0" anchor="t">
+          <a:bodyPr wrap="square" lIns="0" tIns="0" rIns="0" bIns="0" anchor="t">
             <a:spAutoFit/>
           </a:bodyPr>
           <a:lstStyle/>
           <a:p>
             <a:pPr algn="l"/>
             <a:r>
-              <a:rPr b="1" sz="1350" i="0" u="none">
+              <a:rPr sz="1350" b="1" i="0" u="none">
                 <a:solidFill>
                   <a:srgbClr val="334155"/>
                 </a:solidFill>
@@ -6899,7 +7009,7 @@
               <a:t>통합 테스트:</a:t>
             </a:r>
             <a:r>
-              <a:rPr b="0" sz="1350" i="0" u="none">
+              <a:rPr sz="1350" b="0" i="0" u="none">
                 <a:solidFill>
                   <a:srgbClr val="334155"/>
                 </a:solidFill>
@@ -6927,14 +7037,14 @@
           <a:noFill/>
         </p:spPr>
         <p:txBody>
-          <a:bodyPr wrap="square" lIns="0" rIns="0" tIns="0" bIns="0" anchor="t">
+          <a:bodyPr wrap="square" lIns="0" tIns="0" rIns="0" bIns="0" anchor="t">
             <a:spAutoFit/>
           </a:bodyPr>
           <a:lstStyle/>
           <a:p>
             <a:pPr algn="l"/>
             <a:r>
-              <a:rPr b="1" sz="1350" i="0" u="none">
+              <a:rPr sz="1350" b="1" i="0" u="none">
                 <a:solidFill>
                   <a:srgbClr val="334155"/>
                 </a:solidFill>
@@ -6943,7 +7053,7 @@
               <a:t>운영 배포:</a:t>
             </a:r>
             <a:r>
-              <a:rPr b="0" sz="1350" i="0" u="none">
+              <a:rPr sz="1350" b="0" i="0" u="none">
                 <a:solidFill>
                   <a:srgbClr val="334155"/>
                 </a:solidFill>
@@ -6963,7 +7073,7 @@
 </file>
 
 <file path=ppt/slides/slide5.xml><?xml version="1.0" encoding="utf-8"?>
-<p:sld xmlns:a="http://schemas.openxmlformats.org/drawingml/2006/main" xmlns:p="http://schemas.openxmlformats.org/presentationml/2006/main" xmlns:r="http://schemas.openxmlformats.org/officeDocument/2006/relationships">
+<p:sld xmlns:a="http://schemas.openxmlformats.org/drawingml/2006/main" xmlns:r="http://schemas.openxmlformats.org/officeDocument/2006/relationships" xmlns:p="http://schemas.openxmlformats.org/presentationml/2006/main">
   <p:cSld>
     <p:bg>
       <p:bgPr>
@@ -6979,7 +7089,14 @@
         <p:cNvGrpSpPr/>
         <p:nvPr/>
       </p:nvGrpSpPr>
-      <p:grpSpPr/>
+      <p:grpSpPr>
+        <a:xfrm>
+          <a:off x="0" y="0"/>
+          <a:ext cx="0" cy="0"/>
+          <a:chOff x="0" y="0"/>
+          <a:chExt cx="0" cy="0"/>
+        </a:xfrm>
+      </p:grpSpPr>
       <p:pic>
         <p:nvPicPr>
           <p:cNvPr id="2" name="Picture 1" descr="image.png"/>
@@ -7141,14 +7258,14 @@
           <a:noFill/>
         </p:spPr>
         <p:txBody>
-          <a:bodyPr wrap="square" lIns="0" rIns="0" tIns="0" bIns="0" anchor="t">
+          <a:bodyPr wrap="square" lIns="0" tIns="0" rIns="0" bIns="0" anchor="t">
             <a:spAutoFit/>
           </a:bodyPr>
           <a:lstStyle/>
           <a:p>
             <a:pPr algn="l"/>
             <a:r>
-              <a:rPr b="1" sz="1200" i="0" u="none">
+              <a:rPr sz="1200" b="1" i="0" u="none">
                 <a:solidFill>
                   <a:srgbClr val="2563EB"/>
                 </a:solidFill>
@@ -7176,14 +7293,14 @@
           <a:noFill/>
         </p:spPr>
         <p:txBody>
-          <a:bodyPr wrap="square" lIns="0" rIns="0" tIns="0" bIns="0" anchor="t">
+          <a:bodyPr wrap="square" lIns="0" tIns="0" rIns="0" bIns="0" anchor="t">
             <a:spAutoFit/>
           </a:bodyPr>
           <a:lstStyle/>
           <a:p>
             <a:pPr algn="l"/>
             <a:r>
-              <a:rPr b="0" sz="2250" i="0" u="none">
+              <a:rPr sz="2250" b="0" i="0" u="none">
                 <a:solidFill>
                   <a:srgbClr val="0F172A"/>
                 </a:solidFill>
@@ -7307,14 +7424,14 @@
           <a:noFill/>
         </p:spPr>
         <p:txBody>
-          <a:bodyPr wrap="square" lIns="168324" rIns="0" tIns="0" bIns="0" anchor="t">
+          <a:bodyPr wrap="square" lIns="168324" tIns="0" rIns="0" bIns="0" anchor="t">
             <a:spAutoFit/>
           </a:bodyPr>
           <a:lstStyle/>
           <a:p>
             <a:pPr algn="l"/>
             <a:r>
-              <a:rPr b="0" sz="1125" i="0" u="none">
+              <a:rPr sz="1125" b="0" i="0" u="none">
                 <a:solidFill>
                   <a:srgbClr val="1E293B"/>
                 </a:solidFill>
@@ -7342,14 +7459,14 @@
           <a:noFill/>
         </p:spPr>
         <p:txBody>
-          <a:bodyPr wrap="square" lIns="168324" rIns="0" tIns="0" bIns="0" anchor="t">
+          <a:bodyPr wrap="square" lIns="168324" tIns="0" rIns="0" bIns="0" anchor="t">
             <a:spAutoFit/>
           </a:bodyPr>
           <a:lstStyle/>
           <a:p>
             <a:pPr algn="l"/>
             <a:r>
-              <a:rPr b="0" sz="1125" i="0" u="none">
+              <a:rPr sz="1125" b="0" i="0" u="none">
                 <a:solidFill>
                   <a:srgbClr val="1E293B"/>
                 </a:solidFill>
@@ -7377,14 +7494,14 @@
           <a:noFill/>
         </p:spPr>
         <p:txBody>
-          <a:bodyPr wrap="square" lIns="168324" rIns="0" tIns="0" bIns="0" anchor="t">
+          <a:bodyPr wrap="square" lIns="168324" tIns="0" rIns="0" bIns="0" anchor="t">
             <a:spAutoFit/>
           </a:bodyPr>
           <a:lstStyle/>
           <a:p>
             <a:pPr algn="l"/>
             <a:r>
-              <a:rPr b="0" sz="1125" i="0" u="none">
+              <a:rPr sz="1125" b="0" i="0" u="none">
                 <a:solidFill>
                   <a:srgbClr val="1E293B"/>
                 </a:solidFill>
@@ -7484,14 +7601,14 @@
           <a:noFill/>
         </p:spPr>
         <p:txBody>
-          <a:bodyPr wrap="square" lIns="0" rIns="0" tIns="0" bIns="0" anchor="t">
+          <a:bodyPr wrap="square" lIns="0" tIns="0" rIns="0" bIns="0" anchor="t">
             <a:spAutoFit/>
           </a:bodyPr>
           <a:lstStyle/>
           <a:p>
             <a:pPr algn="l"/>
             <a:r>
-              <a:rPr b="1" sz="1200" i="0" u="none">
+              <a:rPr sz="1200" b="1" i="0" u="none">
                 <a:solidFill>
                   <a:srgbClr val="0F172A"/>
                 </a:solidFill>
@@ -7519,14 +7636,14 @@
           <a:noFill/>
         </p:spPr>
         <p:txBody>
-          <a:bodyPr wrap="square" lIns="0" rIns="0" tIns="0" bIns="0" anchor="t">
+          <a:bodyPr wrap="square" lIns="0" tIns="0" rIns="0" bIns="0" anchor="t">
             <a:spAutoFit/>
           </a:bodyPr>
           <a:lstStyle/>
           <a:p>
             <a:pPr algn="l"/>
             <a:r>
-              <a:rPr b="0" sz="1050" i="0" u="none">
+              <a:rPr sz="1050" b="0" i="0" u="none">
                 <a:solidFill>
                   <a:srgbClr val="64748B"/>
                 </a:solidFill>
@@ -7554,14 +7671,14 @@
           <a:noFill/>
         </p:spPr>
         <p:txBody>
-          <a:bodyPr wrap="square" lIns="0" rIns="0" tIns="0" bIns="0" anchor="t">
+          <a:bodyPr wrap="square" lIns="0" tIns="0" rIns="0" bIns="0" anchor="t">
             <a:spAutoFit/>
           </a:bodyPr>
           <a:lstStyle/>
           <a:p>
             <a:pPr algn="l"/>
             <a:r>
-              <a:rPr b="1" sz="1200" i="0" u="none">
+              <a:rPr sz="1200" b="1" i="0" u="none">
                 <a:solidFill>
                   <a:srgbClr val="0F172A"/>
                 </a:solidFill>
@@ -7589,14 +7706,14 @@
           <a:noFill/>
         </p:spPr>
         <p:txBody>
-          <a:bodyPr wrap="square" lIns="0" rIns="0" tIns="0" bIns="0" anchor="t">
+          <a:bodyPr wrap="square" lIns="0" tIns="0" rIns="0" bIns="0" anchor="t">
             <a:spAutoFit/>
           </a:bodyPr>
           <a:lstStyle/>
           <a:p>
             <a:pPr algn="l"/>
             <a:r>
-              <a:rPr b="0" sz="1050" i="0" u="none">
+              <a:rPr sz="1050" b="0" i="0" u="none">
                 <a:solidFill>
                   <a:srgbClr val="64748B"/>
                 </a:solidFill>
@@ -7624,14 +7741,14 @@
           <a:noFill/>
         </p:spPr>
         <p:txBody>
-          <a:bodyPr wrap="square" lIns="0" rIns="0" tIns="0" bIns="0" anchor="t">
+          <a:bodyPr wrap="square" lIns="0" tIns="0" rIns="0" bIns="0" anchor="t">
             <a:spAutoFit/>
           </a:bodyPr>
           <a:lstStyle/>
           <a:p>
             <a:pPr algn="l"/>
             <a:r>
-              <a:rPr b="1" sz="1200" i="0" u="none">
+              <a:rPr sz="1200" b="1" i="0" u="none">
                 <a:solidFill>
                   <a:srgbClr val="0F172A"/>
                 </a:solidFill>
@@ -7659,14 +7776,14 @@
           <a:noFill/>
         </p:spPr>
         <p:txBody>
-          <a:bodyPr wrap="square" lIns="0" rIns="0" tIns="0" bIns="0" anchor="t">
+          <a:bodyPr wrap="square" lIns="0" tIns="0" rIns="0" bIns="0" anchor="t">
             <a:spAutoFit/>
           </a:bodyPr>
           <a:lstStyle/>
           <a:p>
             <a:pPr algn="l"/>
             <a:r>
-              <a:rPr b="0" sz="1050" i="0" u="none">
+              <a:rPr sz="1050" b="0" i="0" u="none">
                 <a:solidFill>
                   <a:srgbClr val="64748B"/>
                 </a:solidFill>
@@ -7766,14 +7883,14 @@
           <a:noFill/>
         </p:spPr>
         <p:txBody>
-          <a:bodyPr wrap="square" lIns="0" rIns="0" tIns="0" bIns="0" anchor="t">
+          <a:bodyPr wrap="square" lIns="0" tIns="0" rIns="0" bIns="0" anchor="t">
             <a:spAutoFit/>
           </a:bodyPr>
           <a:lstStyle/>
           <a:p>
             <a:pPr algn="l"/>
             <a:r>
-              <a:rPr b="1" sz="1275" i="0" u="none">
+              <a:rPr sz="1275" b="1" i="0" u="none">
                 <a:solidFill>
                   <a:srgbClr val="0F172A"/>
                 </a:solidFill>
@@ -7801,14 +7918,14 @@
           <a:noFill/>
         </p:spPr>
         <p:txBody>
-          <a:bodyPr wrap="square" lIns="0" rIns="0" tIns="0" bIns="0" anchor="t">
+          <a:bodyPr wrap="square" lIns="0" tIns="0" rIns="0" bIns="0" anchor="t">
             <a:spAutoFit/>
           </a:bodyPr>
           <a:lstStyle/>
           <a:p>
             <a:pPr algn="l"/>
             <a:r>
-              <a:rPr b="0" sz="1050" i="0" u="none">
+              <a:rPr sz="1050" b="0" i="0" u="none">
                 <a:solidFill>
                   <a:srgbClr val="475569"/>
                 </a:solidFill>
@@ -7900,7 +8017,7 @@
 </file>
 
 <file path=ppt/slides/slide6.xml><?xml version="1.0" encoding="utf-8"?>
-<p:sld xmlns:a="http://schemas.openxmlformats.org/drawingml/2006/main" xmlns:p="http://schemas.openxmlformats.org/presentationml/2006/main" xmlns:r="http://schemas.openxmlformats.org/officeDocument/2006/relationships">
+<p:sld xmlns:a="http://schemas.openxmlformats.org/drawingml/2006/main" xmlns:r="http://schemas.openxmlformats.org/officeDocument/2006/relationships" xmlns:p="http://schemas.openxmlformats.org/presentationml/2006/main">
   <p:cSld>
     <p:bg>
       <p:bgPr>
@@ -7916,7 +8033,14 @@
         <p:cNvGrpSpPr/>
         <p:nvPr/>
       </p:nvGrpSpPr>
-      <p:grpSpPr/>
+      <p:grpSpPr>
+        <a:xfrm>
+          <a:off x="0" y="0"/>
+          <a:ext cx="0" cy="0"/>
+          <a:chOff x="0" y="0"/>
+          <a:chExt cx="0" cy="0"/>
+        </a:xfrm>
+      </p:grpSpPr>
       <p:pic>
         <p:nvPicPr>
           <p:cNvPr id="2" name="Picture 1" descr="image.png"/>
@@ -8006,14 +8130,14 @@
           <a:noFill/>
         </p:spPr>
         <p:txBody>
-          <a:bodyPr wrap="square" lIns="0" rIns="0" tIns="0" bIns="0" anchor="t">
+          <a:bodyPr wrap="square" lIns="0" tIns="0" rIns="0" bIns="0" anchor="t">
             <a:spAutoFit/>
           </a:bodyPr>
           <a:lstStyle/>
           <a:p>
             <a:pPr algn="l"/>
             <a:r>
-              <a:rPr b="1" sz="1200" i="0" u="none">
+              <a:rPr sz="1200" b="1" i="0" u="none">
                 <a:solidFill>
                   <a:srgbClr val="2563EB"/>
                 </a:solidFill>
@@ -8041,14 +8165,14 @@
           <a:noFill/>
         </p:spPr>
         <p:txBody>
-          <a:bodyPr wrap="square" lIns="0" rIns="0" tIns="0" bIns="0" anchor="t">
+          <a:bodyPr wrap="square" lIns="0" tIns="0" rIns="0" bIns="0" anchor="t">
             <a:spAutoFit/>
           </a:bodyPr>
           <a:lstStyle/>
           <a:p>
             <a:pPr algn="l"/>
             <a:r>
-              <a:rPr b="0" sz="2400" i="0" u="none">
+              <a:rPr sz="2400" b="0" i="0" u="none">
                 <a:solidFill>
                   <a:srgbClr val="0F172A"/>
                 </a:solidFill>
@@ -8076,7 +8200,7 @@
           <a:noFill/>
         </p:spPr>
         <p:txBody>
-          <a:bodyPr wrap="square" lIns="0" rIns="0" tIns="0" bIns="0" anchor="t">
+          <a:bodyPr wrap="square" lIns="0" tIns="0" rIns="0" bIns="0" anchor="t">
             <a:spAutoFit/>
           </a:bodyPr>
           <a:lstStyle/>
@@ -8087,7 +8211,7 @@
               </a:lnSpc>
             </a:pPr>
             <a:r>
-              <a:rPr b="0" sz="1350" i="0" u="none">
+              <a:rPr sz="1350" b="0" i="0" u="none">
                 <a:solidFill>
                   <a:srgbClr val="334155"/>
                 </a:solidFill>
@@ -8139,14 +8263,14 @@
           <a:noFill/>
         </p:spPr>
         <p:txBody>
-          <a:bodyPr wrap="square" lIns="0" rIns="0" tIns="0" bIns="0" anchor="t">
+          <a:bodyPr wrap="square" lIns="0" tIns="0" rIns="0" bIns="0" anchor="t">
             <a:spAutoFit/>
           </a:bodyPr>
           <a:lstStyle/>
           <a:p>
             <a:pPr algn="l"/>
             <a:r>
-              <a:rPr b="1" sz="1650" i="0" u="none">
+              <a:rPr sz="1650" b="1" i="0" u="none">
                 <a:solidFill>
                   <a:srgbClr val="0F172A"/>
                 </a:solidFill>
@@ -8174,14 +8298,14 @@
           <a:noFill/>
         </p:spPr>
         <p:txBody>
-          <a:bodyPr wrap="square" lIns="0" rIns="0" tIns="0" bIns="0" anchor="t">
+          <a:bodyPr wrap="square" lIns="0" tIns="0" rIns="0" bIns="0" anchor="t">
             <a:spAutoFit/>
           </a:bodyPr>
           <a:lstStyle/>
           <a:p>
             <a:pPr algn="l"/>
             <a:r>
-              <a:rPr b="1" sz="1125" i="0" u="none">
+              <a:rPr sz="1125" b="1" i="0" u="none">
                 <a:solidFill>
                   <a:srgbClr val="1E40AF"/>
                 </a:solidFill>
@@ -8209,14 +8333,14 @@
           <a:noFill/>
         </p:spPr>
         <p:txBody>
-          <a:bodyPr wrap="square" lIns="0" rIns="0" tIns="0" bIns="0" anchor="t">
+          <a:bodyPr wrap="square" lIns="0" tIns="0" rIns="0" bIns="0" anchor="t">
             <a:spAutoFit/>
           </a:bodyPr>
           <a:lstStyle/>
           <a:p>
             <a:pPr algn="l"/>
             <a:r>
-              <a:rPr b="0" sz="1275" i="0" u="none">
+              <a:rPr sz="1275" b="0" i="0" u="none">
                 <a:solidFill>
                   <a:srgbClr val="1E293B"/>
                 </a:solidFill>
@@ -8268,14 +8392,14 @@
           <a:noFill/>
         </p:spPr>
         <p:txBody>
-          <a:bodyPr wrap="square" lIns="0" rIns="0" tIns="0" bIns="0" anchor="t">
+          <a:bodyPr wrap="square" lIns="0" tIns="0" rIns="0" bIns="0" anchor="t">
             <a:spAutoFit/>
           </a:bodyPr>
           <a:lstStyle/>
           <a:p>
             <a:pPr algn="l"/>
             <a:r>
-              <a:rPr b="1" sz="1650" i="0" u="none">
+              <a:rPr sz="1650" b="1" i="0" u="none">
                 <a:solidFill>
                   <a:srgbClr val="0F172A"/>
                 </a:solidFill>
@@ -8303,7 +8427,7 @@
           <a:noFill/>
         </p:spPr>
         <p:txBody>
-          <a:bodyPr wrap="square" lIns="0" rIns="0" tIns="0" bIns="0" anchor="t">
+          <a:bodyPr wrap="square" lIns="0" tIns="0" rIns="0" bIns="0" anchor="t">
             <a:spAutoFit/>
           </a:bodyPr>
           <a:lstStyle/>
@@ -8314,7 +8438,7 @@
               </a:lnSpc>
             </a:pPr>
             <a:r>
-              <a:rPr b="0" sz="1350" i="0" u="none">
+              <a:rPr sz="1350" b="0" i="0" u="none">
                 <a:solidFill>
                   <a:srgbClr val="334155"/>
                 </a:solidFill>
@@ -8342,7 +8466,7 @@
           <a:noFill/>
         </p:spPr>
         <p:txBody>
-          <a:bodyPr wrap="square" lIns="0" rIns="0" tIns="0" bIns="0" anchor="t">
+          <a:bodyPr wrap="square" lIns="0" tIns="0" rIns="0" bIns="0" anchor="t">
             <a:spAutoFit/>
           </a:bodyPr>
           <a:lstStyle/>
@@ -8353,7 +8477,7 @@
               </a:lnSpc>
             </a:pPr>
             <a:r>
-              <a:rPr b="0" sz="1350" i="0" u="none">
+              <a:rPr sz="1350" b="0" i="0" u="none">
                 <a:solidFill>
                   <a:srgbClr val="334155"/>
                 </a:solidFill>
@@ -8381,7 +8505,7 @@
           <a:noFill/>
         </p:spPr>
         <p:txBody>
-          <a:bodyPr wrap="square" lIns="0" rIns="0" tIns="0" bIns="0" anchor="t">
+          <a:bodyPr wrap="square" lIns="0" tIns="0" rIns="0" bIns="0" anchor="t">
             <a:spAutoFit/>
           </a:bodyPr>
           <a:lstStyle/>
@@ -8392,7 +8516,7 @@
               </a:lnSpc>
             </a:pPr>
             <a:r>
-              <a:rPr b="0" sz="1350" i="0" u="none">
+              <a:rPr sz="1350" b="0" i="0" u="none">
                 <a:solidFill>
                   <a:srgbClr val="334155"/>
                 </a:solidFill>
@@ -8484,7 +8608,7 @@
 </file>
 
 <file path=ppt/slides/slide7.xml><?xml version="1.0" encoding="utf-8"?>
-<p:sld xmlns:a="http://schemas.openxmlformats.org/drawingml/2006/main" xmlns:p="http://schemas.openxmlformats.org/presentationml/2006/main" xmlns:r="http://schemas.openxmlformats.org/officeDocument/2006/relationships">
+<p:sld xmlns:a="http://schemas.openxmlformats.org/drawingml/2006/main" xmlns:r="http://schemas.openxmlformats.org/officeDocument/2006/relationships" xmlns:p="http://schemas.openxmlformats.org/presentationml/2006/main">
   <p:cSld>
     <p:bg>
       <p:bgPr>
@@ -8500,7 +8624,14 @@
         <p:cNvGrpSpPr/>
         <p:nvPr/>
       </p:nvGrpSpPr>
-      <p:grpSpPr/>
+      <p:grpSpPr>
+        <a:xfrm>
+          <a:off x="0" y="0"/>
+          <a:ext cx="0" cy="0"/>
+          <a:chOff x="0" y="0"/>
+          <a:chExt cx="0" cy="0"/>
+        </a:xfrm>
+      </p:grpSpPr>
       <p:pic>
         <p:nvPicPr>
           <p:cNvPr id="2" name="Picture 1" descr="image.png"/>
@@ -8614,14 +8745,14 @@
           <a:noFill/>
         </p:spPr>
         <p:txBody>
-          <a:bodyPr wrap="square" lIns="0" rIns="0" tIns="0" bIns="0" anchor="t">
+          <a:bodyPr wrap="square" lIns="0" tIns="0" rIns="0" bIns="0" anchor="t">
             <a:spAutoFit/>
           </a:bodyPr>
           <a:lstStyle/>
           <a:p>
             <a:pPr algn="l"/>
             <a:r>
-              <a:rPr b="1" sz="1200" i="0" u="none">
+              <a:rPr sz="1200" b="1" i="0" u="none">
                 <a:solidFill>
                   <a:srgbClr val="2563EB"/>
                 </a:solidFill>
@@ -8649,14 +8780,14 @@
           <a:noFill/>
         </p:spPr>
         <p:txBody>
-          <a:bodyPr wrap="square" lIns="0" rIns="0" tIns="0" bIns="0" anchor="t">
+          <a:bodyPr wrap="square" lIns="0" tIns="0" rIns="0" bIns="0" anchor="t">
             <a:spAutoFit/>
           </a:bodyPr>
           <a:lstStyle/>
           <a:p>
             <a:pPr algn="l"/>
             <a:r>
-              <a:rPr b="0" sz="2400" i="0" u="none">
+              <a:rPr sz="2400" b="0" i="0" u="none">
                 <a:solidFill>
                   <a:srgbClr val="0F172A"/>
                 </a:solidFill>
@@ -8708,14 +8839,14 @@
           <a:noFill/>
         </p:spPr>
         <p:txBody>
-          <a:bodyPr wrap="square" lIns="0" rIns="0" tIns="0" bIns="0" anchor="t">
+          <a:bodyPr wrap="square" lIns="0" tIns="0" rIns="0" bIns="0" anchor="t">
             <a:spAutoFit/>
           </a:bodyPr>
           <a:lstStyle/>
           <a:p>
             <a:pPr algn="l"/>
             <a:r>
-              <a:rPr b="1" sz="1500" i="0" u="none">
+              <a:rPr sz="1500" b="1" i="0" u="none">
                 <a:solidFill>
                   <a:srgbClr val="2563EB"/>
                 </a:solidFill>
@@ -8743,14 +8874,14 @@
           <a:noFill/>
         </p:spPr>
         <p:txBody>
-          <a:bodyPr wrap="square" lIns="0" rIns="0" tIns="0" bIns="0" anchor="t">
+          <a:bodyPr wrap="square" lIns="0" tIns="0" rIns="0" bIns="0" anchor="t">
             <a:spAutoFit/>
           </a:bodyPr>
           <a:lstStyle/>
           <a:p>
             <a:pPr algn="l"/>
             <a:r>
-              <a:rPr b="0" sz="1350" i="0" u="none">
+              <a:rPr sz="1350" b="0" i="0" u="none">
                 <a:solidFill>
                   <a:srgbClr val="334155"/>
                 </a:solidFill>
@@ -8778,14 +8909,14 @@
           <a:noFill/>
         </p:spPr>
         <p:txBody>
-          <a:bodyPr wrap="square" lIns="0" rIns="0" tIns="0" bIns="0" anchor="t">
+          <a:bodyPr wrap="square" lIns="0" tIns="0" rIns="0" bIns="0" anchor="t">
             <a:spAutoFit/>
           </a:bodyPr>
           <a:lstStyle/>
           <a:p>
             <a:pPr algn="l"/>
             <a:r>
-              <a:rPr b="1" sz="1500" i="0" u="none">
+              <a:rPr sz="1500" b="1" i="0" u="none">
                 <a:solidFill>
                   <a:srgbClr val="2563EB"/>
                 </a:solidFill>
@@ -8813,14 +8944,14 @@
           <a:noFill/>
         </p:spPr>
         <p:txBody>
-          <a:bodyPr wrap="square" lIns="0" rIns="0" tIns="0" bIns="0" anchor="t">
+          <a:bodyPr wrap="square" lIns="0" tIns="0" rIns="0" bIns="0" anchor="t">
             <a:spAutoFit/>
           </a:bodyPr>
           <a:lstStyle/>
           <a:p>
             <a:pPr algn="l"/>
             <a:r>
-              <a:rPr b="0" sz="1350" i="0" u="none">
+              <a:rPr sz="1350" b="0" i="0" u="none">
                 <a:solidFill>
                   <a:srgbClr val="334155"/>
                 </a:solidFill>
@@ -8848,14 +8979,14 @@
           <a:noFill/>
         </p:spPr>
         <p:txBody>
-          <a:bodyPr wrap="square" lIns="0" rIns="0" tIns="0" bIns="0" anchor="t">
+          <a:bodyPr wrap="square" lIns="0" tIns="0" rIns="0" bIns="0" anchor="t">
             <a:spAutoFit/>
           </a:bodyPr>
           <a:lstStyle/>
           <a:p>
             <a:pPr algn="l"/>
             <a:r>
-              <a:rPr b="1" sz="1500" i="0" u="none">
+              <a:rPr sz="1500" b="1" i="0" u="none">
                 <a:solidFill>
                   <a:srgbClr val="2563EB"/>
                 </a:solidFill>
@@ -8883,14 +9014,14 @@
           <a:noFill/>
         </p:spPr>
         <p:txBody>
-          <a:bodyPr wrap="square" lIns="0" rIns="0" tIns="0" bIns="0" anchor="t">
+          <a:bodyPr wrap="square" lIns="0" tIns="0" rIns="0" bIns="0" anchor="t">
             <a:spAutoFit/>
           </a:bodyPr>
           <a:lstStyle/>
           <a:p>
             <a:pPr algn="l"/>
             <a:r>
-              <a:rPr b="0" sz="1350" i="0" u="none">
+              <a:rPr sz="1350" b="0" i="0" u="none">
                 <a:solidFill>
                   <a:srgbClr val="334155"/>
                 </a:solidFill>
@@ -8942,14 +9073,14 @@
           <a:noFill/>
         </p:spPr>
         <p:txBody>
-          <a:bodyPr wrap="square" lIns="0" rIns="0" tIns="0" bIns="0" anchor="t">
+          <a:bodyPr wrap="square" lIns="0" tIns="0" rIns="0" bIns="0" anchor="t">
             <a:spAutoFit/>
           </a:bodyPr>
           <a:lstStyle/>
           <a:p>
             <a:pPr algn="l"/>
             <a:r>
-              <a:rPr b="1" sz="1500" i="0" u="none">
+              <a:rPr sz="1500" b="1" i="0" u="none">
                 <a:solidFill>
                   <a:srgbClr val="FFFFFF"/>
                 </a:solidFill>
@@ -8977,14 +9108,14 @@
           <a:noFill/>
         </p:spPr>
         <p:txBody>
-          <a:bodyPr wrap="square" lIns="0" rIns="0" tIns="0" bIns="0" anchor="t">
+          <a:bodyPr wrap="square" lIns="0" tIns="0" rIns="0" bIns="0" anchor="t">
             <a:spAutoFit/>
           </a:bodyPr>
           <a:lstStyle/>
           <a:p>
             <a:pPr algn="l"/>
             <a:r>
-              <a:rPr b="0" sz="1200" i="0" u="none">
+              <a:rPr sz="1200" b="0" i="0" u="none">
                 <a:solidFill>
                   <a:srgbClr val="94A3B8"/>
                 </a:solidFill>
@@ -9004,7 +9135,7 @@
 </file>
 
 <file path=ppt/slides/slide8.xml><?xml version="1.0" encoding="utf-8"?>
-<p:sld xmlns:a="http://schemas.openxmlformats.org/drawingml/2006/main" xmlns:p="http://schemas.openxmlformats.org/presentationml/2006/main" xmlns:r="http://schemas.openxmlformats.org/officeDocument/2006/relationships">
+<p:sld xmlns:a="http://schemas.openxmlformats.org/drawingml/2006/main" xmlns:r="http://schemas.openxmlformats.org/officeDocument/2006/relationships" xmlns:p="http://schemas.openxmlformats.org/presentationml/2006/main">
   <p:cSld>
     <p:bg>
       <p:bgPr>
@@ -9020,7 +9151,14 @@
         <p:cNvGrpSpPr/>
         <p:nvPr/>
       </p:nvGrpSpPr>
-      <p:grpSpPr/>
+      <p:grpSpPr>
+        <a:xfrm>
+          <a:off x="0" y="0"/>
+          <a:ext cx="0" cy="0"/>
+          <a:chOff x="0" y="0"/>
+          <a:chExt cx="0" cy="0"/>
+        </a:xfrm>
+      </p:grpSpPr>
       <p:pic>
         <p:nvPicPr>
           <p:cNvPr id="2" name="Picture 1" descr="image.png"/>
@@ -9158,14 +9296,14 @@
           <a:noFill/>
         </p:spPr>
         <p:txBody>
-          <a:bodyPr wrap="square" lIns="0" rIns="0" tIns="0" bIns="0" anchor="t">
+          <a:bodyPr wrap="square" lIns="0" tIns="0" rIns="0" bIns="0" anchor="t">
             <a:spAutoFit/>
           </a:bodyPr>
           <a:lstStyle/>
           <a:p>
             <a:pPr algn="l"/>
             <a:r>
-              <a:rPr b="1" sz="1200" i="0" u="none">
+              <a:rPr sz="1200" b="1" i="0" u="none">
                 <a:solidFill>
                   <a:srgbClr val="2563EB"/>
                 </a:solidFill>
@@ -9193,14 +9331,14 @@
           <a:noFill/>
         </p:spPr>
         <p:txBody>
-          <a:bodyPr wrap="square" lIns="0" rIns="0" tIns="0" bIns="0" anchor="t">
+          <a:bodyPr wrap="square" lIns="0" tIns="0" rIns="0" bIns="0" anchor="t">
             <a:spAutoFit/>
           </a:bodyPr>
           <a:lstStyle/>
           <a:p>
             <a:pPr algn="l"/>
             <a:r>
-              <a:rPr b="0" sz="2250" i="0" u="none">
+              <a:rPr sz="2250" b="0" i="0" u="none">
                 <a:solidFill>
                   <a:srgbClr val="0F172A"/>
                 </a:solidFill>
@@ -9252,14 +9390,14 @@
           <a:noFill/>
         </p:spPr>
         <p:txBody>
-          <a:bodyPr wrap="square" lIns="0" rIns="0" tIns="0" bIns="0" anchor="t">
+          <a:bodyPr wrap="square" lIns="0" tIns="0" rIns="0" bIns="0" anchor="t">
             <a:spAutoFit/>
           </a:bodyPr>
           <a:lstStyle/>
           <a:p>
             <a:pPr algn="ctr"/>
             <a:r>
-              <a:rPr b="1" sz="975" i="0" u="none">
+              <a:rPr sz="975" b="1" i="0" u="none">
                 <a:solidFill>
                   <a:srgbClr val="64748B"/>
                 </a:solidFill>
@@ -9287,14 +9425,14 @@
           <a:noFill/>
         </p:spPr>
         <p:txBody>
-          <a:bodyPr wrap="square" lIns="0" rIns="0" tIns="0" bIns="0" anchor="t">
+          <a:bodyPr wrap="square" lIns="0" tIns="0" rIns="0" bIns="0" anchor="t">
             <a:spAutoFit/>
           </a:bodyPr>
           <a:lstStyle/>
           <a:p>
             <a:pPr algn="ctr"/>
             <a:r>
-              <a:rPr b="1" sz="1275" i="0" u="none">
+              <a:rPr sz="1275" b="1" i="0" u="none">
                 <a:solidFill>
                   <a:srgbClr val="0F172A"/>
                 </a:solidFill>
@@ -9346,14 +9484,14 @@
           <a:noFill/>
         </p:spPr>
         <p:txBody>
-          <a:bodyPr wrap="square" lIns="0" rIns="0" tIns="0" bIns="0" anchor="t">
+          <a:bodyPr wrap="square" lIns="0" tIns="0" rIns="0" bIns="0" anchor="t">
             <a:spAutoFit/>
           </a:bodyPr>
           <a:lstStyle/>
           <a:p>
             <a:pPr algn="ctr"/>
             <a:r>
-              <a:rPr b="1" sz="975" i="0" u="none">
+              <a:rPr sz="975" b="1" i="0" u="none">
                 <a:solidFill>
                   <a:srgbClr val="1E40AF"/>
                 </a:solidFill>
@@ -9381,14 +9519,14 @@
           <a:noFill/>
         </p:spPr>
         <p:txBody>
-          <a:bodyPr wrap="square" lIns="0" rIns="0" tIns="0" bIns="0" anchor="t">
+          <a:bodyPr wrap="square" lIns="0" tIns="0" rIns="0" bIns="0" anchor="t">
             <a:spAutoFit/>
           </a:bodyPr>
           <a:lstStyle/>
           <a:p>
             <a:pPr algn="ctr"/>
             <a:r>
-              <a:rPr b="1" sz="1275" i="0" u="none">
+              <a:rPr sz="1275" b="1" i="0" u="none">
                 <a:solidFill>
                   <a:srgbClr val="0F172A"/>
                 </a:solidFill>
@@ -9440,14 +9578,14 @@
           <a:noFill/>
         </p:spPr>
         <p:txBody>
-          <a:bodyPr wrap="square" lIns="0" rIns="0" tIns="0" bIns="0" anchor="t">
+          <a:bodyPr wrap="square" lIns="0" tIns="0" rIns="0" bIns="0" anchor="t">
             <a:spAutoFit/>
           </a:bodyPr>
           <a:lstStyle/>
           <a:p>
             <a:pPr algn="l"/>
             <a:r>
-              <a:rPr b="0" sz="1200" i="0" u="none">
+              <a:rPr sz="1200" b="0" i="0" u="none">
                 <a:solidFill>
                   <a:srgbClr val="475569"/>
                 </a:solidFill>
@@ -9475,14 +9613,14 @@
           <a:noFill/>
         </p:spPr>
         <p:txBody>
-          <a:bodyPr wrap="square" lIns="0" rIns="0" tIns="0" bIns="0" anchor="t">
+          <a:bodyPr wrap="square" lIns="0" tIns="0" rIns="0" bIns="0" anchor="t">
             <a:spAutoFit/>
           </a:bodyPr>
           <a:lstStyle/>
           <a:p>
             <a:pPr algn="l"/>
             <a:r>
-              <a:rPr b="0" sz="1200" i="0" u="none">
+              <a:rPr sz="1200" b="0" i="0" u="none">
                 <a:solidFill>
                   <a:srgbClr val="1E293B"/>
                 </a:solidFill>
@@ -9534,14 +9672,14 @@
           <a:noFill/>
         </p:spPr>
         <p:txBody>
-          <a:bodyPr wrap="square" lIns="0" rIns="0" tIns="0" bIns="0" anchor="t">
+          <a:bodyPr wrap="square" lIns="0" tIns="0" rIns="0" bIns="0" anchor="t">
             <a:spAutoFit/>
           </a:bodyPr>
           <a:lstStyle/>
           <a:p>
             <a:pPr algn="l"/>
             <a:r>
-              <a:rPr b="1" sz="1350" i="0" u="none">
+              <a:rPr sz="1350" b="1" i="0" u="none">
                 <a:solidFill>
                   <a:srgbClr val="0F172A"/>
                 </a:solidFill>
@@ -9617,14 +9755,14 @@
           <a:noFill/>
         </p:spPr>
         <p:txBody>
-          <a:bodyPr wrap="square" lIns="0" rIns="0" tIns="0" bIns="0" anchor="t">
+          <a:bodyPr wrap="square" lIns="0" tIns="0" rIns="0" bIns="0" anchor="t">
             <a:spAutoFit/>
           </a:bodyPr>
           <a:lstStyle/>
           <a:p>
             <a:pPr algn="l"/>
             <a:r>
-              <a:rPr b="1" sz="1350" i="0" u="none">
+              <a:rPr sz="1350" b="1" i="0" u="none">
                 <a:solidFill>
                   <a:srgbClr val="0F172A"/>
                 </a:solidFill>
@@ -9644,7 +9782,7 @@
 </file>
 
 <file path=ppt/slides/slide9.xml><?xml version="1.0" encoding="utf-8"?>
-<p:sld xmlns:a="http://schemas.openxmlformats.org/drawingml/2006/main" xmlns:p="http://schemas.openxmlformats.org/presentationml/2006/main" xmlns:r="http://schemas.openxmlformats.org/officeDocument/2006/relationships">
+<p:sld xmlns:a="http://schemas.openxmlformats.org/drawingml/2006/main" xmlns:r="http://schemas.openxmlformats.org/officeDocument/2006/relationships" xmlns:p="http://schemas.openxmlformats.org/presentationml/2006/main">
   <p:cSld>
     <p:bg>
       <p:bgPr>
@@ -9660,7 +9798,14 @@
         <p:cNvGrpSpPr/>
         <p:nvPr/>
       </p:nvGrpSpPr>
-      <p:grpSpPr/>
+      <p:grpSpPr>
+        <a:xfrm>
+          <a:off x="0" y="0"/>
+          <a:ext cx="0" cy="0"/>
+          <a:chOff x="0" y="0"/>
+          <a:chExt cx="0" cy="0"/>
+        </a:xfrm>
+      </p:grpSpPr>
       <p:pic>
         <p:nvPicPr>
           <p:cNvPr id="2" name="Picture 1" descr="image.png"/>
@@ -9726,14 +9871,14 @@
           <a:noFill/>
         </p:spPr>
         <p:txBody>
-          <a:bodyPr wrap="square" lIns="0" rIns="0" tIns="0" bIns="0" anchor="t">
+          <a:bodyPr wrap="square" lIns="0" tIns="0" rIns="0" bIns="0" anchor="t">
             <a:spAutoFit/>
           </a:bodyPr>
           <a:lstStyle/>
           <a:p>
             <a:pPr algn="l"/>
             <a:r>
-              <a:rPr b="1" sz="1200" i="0" u="none">
+              <a:rPr sz="1200" b="1" i="0" u="none">
                 <a:solidFill>
                   <a:srgbClr val="2563EB"/>
                 </a:solidFill>
@@ -9761,14 +9906,14 @@
           <a:noFill/>
         </p:spPr>
         <p:txBody>
-          <a:bodyPr wrap="square" lIns="0" rIns="0" tIns="0" bIns="0" anchor="t">
+          <a:bodyPr wrap="square" lIns="0" tIns="0" rIns="0" bIns="0" anchor="t">
             <a:spAutoFit/>
           </a:bodyPr>
           <a:lstStyle/>
           <a:p>
             <a:pPr algn="l"/>
             <a:r>
-              <a:rPr b="0" sz="2400" i="0" u="none">
+              <a:rPr sz="2400" b="0" i="0" u="none">
                 <a:solidFill>
                   <a:srgbClr val="0F172A"/>
                 </a:solidFill>
@@ -9820,14 +9965,14 @@
           <a:noFill/>
         </p:spPr>
         <p:txBody>
-          <a:bodyPr wrap="square" lIns="0" rIns="0" tIns="0" bIns="0" anchor="t">
+          <a:bodyPr wrap="square" lIns="0" tIns="0" rIns="0" bIns="0" anchor="t">
             <a:spAutoFit/>
           </a:bodyPr>
           <a:lstStyle/>
           <a:p>
             <a:pPr algn="l"/>
             <a:r>
-              <a:rPr b="1" sz="1650" i="0" u="none">
+              <a:rPr sz="1650" b="1" i="0" u="none">
                 <a:solidFill>
                   <a:srgbClr val="0F172A"/>
                 </a:solidFill>
@@ -9879,14 +10024,14 @@
           <a:noFill/>
         </p:spPr>
         <p:txBody>
-          <a:bodyPr wrap="square" lIns="0" rIns="0" tIns="0" bIns="0" anchor="t">
+          <a:bodyPr wrap="square" lIns="0" tIns="0" rIns="0" bIns="0" anchor="t">
             <a:spAutoFit/>
           </a:bodyPr>
           <a:lstStyle/>
           <a:p>
             <a:pPr algn="l"/>
             <a:r>
-              <a:rPr b="1" sz="1650" i="0" u="none">
+              <a:rPr sz="1650" b="1" i="0" u="none">
                 <a:solidFill>
                   <a:srgbClr val="0F172A"/>
                 </a:solidFill>
@@ -9938,14 +10083,14 @@
           <a:noFill/>
         </p:spPr>
         <p:txBody>
-          <a:bodyPr wrap="square" lIns="0" rIns="0" tIns="0" bIns="0" anchor="t">
+          <a:bodyPr wrap="square" lIns="0" tIns="0" rIns="0" bIns="0" anchor="t">
             <a:spAutoFit/>
           </a:bodyPr>
           <a:lstStyle/>
           <a:p>
             <a:pPr algn="l"/>
             <a:r>
-              <a:rPr b="1" sz="1350" i="0" u="none">
+              <a:rPr sz="1350" b="1" i="0" u="none">
                 <a:solidFill>
                   <a:srgbClr val="334155"/>
                 </a:solidFill>
@@ -9954,7 +10099,7 @@
               <a:t>고유 식별자:</a:t>
             </a:r>
             <a:r>
-              <a:rPr b="0" sz="1350" i="0" u="none">
+              <a:rPr sz="1350" b="0" i="0" u="none">
                 <a:solidFill>
                   <a:srgbClr val="334155"/>
                 </a:solidFill>
@@ -9982,14 +10127,14 @@
           <a:noFill/>
         </p:spPr>
         <p:txBody>
-          <a:bodyPr wrap="square" lIns="0" rIns="0" tIns="0" bIns="0" anchor="t">
+          <a:bodyPr wrap="square" lIns="0" tIns="0" rIns="0" bIns="0" anchor="t">
             <a:spAutoFit/>
           </a:bodyPr>
           <a:lstStyle/>
           <a:p>
             <a:pPr algn="l"/>
             <a:r>
-              <a:rPr b="1" sz="1350" i="0" u="none">
+              <a:rPr sz="1350" b="1" i="0" u="none">
                 <a:solidFill>
                   <a:srgbClr val="334155"/>
                 </a:solidFill>
@@ -9998,7 +10143,7 @@
               <a:t>주기 제어:</a:t>
             </a:r>
             <a:r>
-              <a:rPr b="0" sz="1350" i="0" u="none">
+              <a:rPr sz="1350" b="0" i="0" u="none">
                 <a:solidFill>
                   <a:srgbClr val="334155"/>
                 </a:solidFill>
@@ -10026,14 +10171,14 @@
           <a:noFill/>
         </p:spPr>
         <p:txBody>
-          <a:bodyPr wrap="square" lIns="0" rIns="0" tIns="0" bIns="0" anchor="t">
+          <a:bodyPr wrap="square" lIns="0" tIns="0" rIns="0" bIns="0" anchor="t">
             <a:spAutoFit/>
           </a:bodyPr>
           <a:lstStyle/>
           <a:p>
             <a:pPr algn="l"/>
             <a:r>
-              <a:rPr b="1" sz="1350" i="0" u="none">
+              <a:rPr sz="1350" b="1" i="0" u="none">
                 <a:solidFill>
                   <a:srgbClr val="334155"/>
                 </a:solidFill>
@@ -10042,7 +10187,7 @@
               <a:t>공유 &amp; 시각화:</a:t>
             </a:r>
             <a:r>
-              <a:rPr b="0" sz="1350" i="0" u="none">
+              <a:rPr sz="1350" b="0" i="0" u="none">
                 <a:solidFill>
                   <a:srgbClr val="334155"/>
                 </a:solidFill>
@@ -10070,14 +10215,14 @@
           <a:noFill/>
         </p:spPr>
         <p:txBody>
-          <a:bodyPr wrap="square" lIns="0" rIns="0" tIns="0" bIns="0" anchor="t">
+          <a:bodyPr wrap="square" lIns="0" tIns="0" rIns="0" bIns="0" anchor="t">
             <a:spAutoFit/>
           </a:bodyPr>
           <a:lstStyle/>
           <a:p>
             <a:pPr algn="l"/>
             <a:r>
-              <a:rPr b="1" sz="1350" i="0" u="none">
+              <a:rPr sz="1350" b="1" i="0" u="none">
                 <a:solidFill>
                   <a:srgbClr val="334155"/>
                 </a:solidFill>
@@ -10086,7 +10231,7 @@
               <a:t>알람 모니터링:</a:t>
             </a:r>
             <a:r>
-              <a:rPr b="0" sz="1350" i="0" u="none">
+              <a:rPr sz="1350" b="0" i="0" u="none">
                 <a:solidFill>
                   <a:srgbClr val="334155"/>
                 </a:solidFill>
@@ -10138,14 +10283,14 @@
           <a:noFill/>
         </p:spPr>
         <p:txBody>
-          <a:bodyPr wrap="square" lIns="0" rIns="0" tIns="0" bIns="0" anchor="t">
+          <a:bodyPr wrap="square" lIns="0" tIns="0" rIns="0" bIns="0" anchor="t">
             <a:spAutoFit/>
           </a:bodyPr>
           <a:lstStyle/>
           <a:p>
             <a:pPr algn="l"/>
             <a:r>
-              <a:rPr b="1" sz="1350" i="0" u="none">
+              <a:rPr sz="1350" b="1" i="0" u="none">
                 <a:solidFill>
                   <a:srgbClr val="334155"/>
                 </a:solidFill>
@@ -10154,7 +10299,7 @@
               <a:t>LLM 자체 분석:</a:t>
             </a:r>
             <a:r>
-              <a:rPr b="0" sz="1350" i="0" u="none">
+              <a:rPr sz="1350" b="0" i="0" u="none">
                 <a:solidFill>
                   <a:srgbClr val="334155"/>
                 </a:solidFill>
@@ -10182,14 +10327,14 @@
           <a:noFill/>
         </p:spPr>
         <p:txBody>
-          <a:bodyPr wrap="square" lIns="0" rIns="0" tIns="0" bIns="0" anchor="t">
+          <a:bodyPr wrap="square" lIns="0" tIns="0" rIns="0" bIns="0" anchor="t">
             <a:spAutoFit/>
           </a:bodyPr>
           <a:lstStyle/>
           <a:p>
             <a:pPr algn="l"/>
             <a:r>
-              <a:rPr b="1" sz="1350" i="0" u="none">
+              <a:rPr sz="1350" b="1" i="0" u="none">
                 <a:solidFill>
                   <a:srgbClr val="334155"/>
                 </a:solidFill>
@@ -10198,7 +10343,7 @@
               <a:t>사용 통계 관리:</a:t>
             </a:r>
             <a:r>
-              <a:rPr b="0" sz="1350" i="0" u="none">
+              <a:rPr sz="1350" b="0" i="0" u="none">
                 <a:solidFill>
                   <a:srgbClr val="334155"/>
                 </a:solidFill>
@@ -10226,14 +10371,14 @@
           <a:noFill/>
         </p:spPr>
         <p:txBody>
-          <a:bodyPr wrap="square" lIns="0" rIns="0" tIns="0" bIns="0" anchor="t">
+          <a:bodyPr wrap="square" lIns="0" tIns="0" rIns="0" bIns="0" anchor="t">
             <a:spAutoFit/>
           </a:bodyPr>
           <a:lstStyle/>
           <a:p>
             <a:pPr algn="l"/>
             <a:r>
-              <a:rPr b="1" sz="1350" i="0" u="none">
+              <a:rPr sz="1350" b="1" i="0" u="none">
                 <a:solidFill>
                   <a:srgbClr val="334155"/>
                 </a:solidFill>
@@ -10242,7 +10387,7 @@
               <a:t>분석 모델 발굴:</a:t>
             </a:r>
             <a:r>
-              <a:rPr b="0" sz="1350" i="0" u="none">
+              <a:rPr sz="1350" b="0" i="0" u="none">
                 <a:solidFill>
                   <a:srgbClr val="334155"/>
                 </a:solidFill>
@@ -10270,14 +10415,14 @@
           <a:noFill/>
         </p:spPr>
         <p:txBody>
-          <a:bodyPr wrap="square" lIns="0" rIns="0" tIns="0" bIns="0" anchor="t">
+          <a:bodyPr wrap="square" lIns="0" tIns="0" rIns="0" bIns="0" anchor="t">
             <a:spAutoFit/>
           </a:bodyPr>
           <a:lstStyle/>
           <a:p>
             <a:pPr algn="l"/>
             <a:r>
-              <a:rPr b="1" sz="1350" i="0" u="none">
+              <a:rPr sz="1350" b="1" i="0" u="none">
                 <a:solidFill>
                   <a:srgbClr val="334155"/>
                 </a:solidFill>
@@ -10286,7 +10431,7 @@
               <a:t>선순환 구조:</a:t>
             </a:r>
             <a:r>
-              <a:rPr b="0" sz="1350" i="0" u="none">
+              <a:rPr sz="1350" b="0" i="0" u="none">
                 <a:solidFill>
                   <a:srgbClr val="334155"/>
                 </a:solidFill>
